--- a/納品レポート/ホテル別レポート/richmond_mejiro_口コミ分析レポート.pptx
+++ b/納品レポート/ホテル別レポート/richmond_mejiro_口コミ分析レポート.pptx
@@ -208,7 +208,7 @@
                 <c:formatCode>General</c:formatCode>
                 <c:ptCount val="6"/>
                 <c:pt idx="0">
-                  <c:v>9.24</c:v>
+                  <c:v>9.27</c:v>
                 </c:pt>
                 <c:pt idx="1">
                   <c:v>9.2</c:v>
@@ -223,7 +223,7 @@
                   <c:v>8.53</c:v>
                 </c:pt>
                 <c:pt idx="5">
-                  <c:v>7.64</c:v>
+                  <c:v>7.73</c:v>
                 </c:pt>
               </c:numCache>
             </c:numRef>
@@ -566,7 +566,7 @@
               <c:numCache>
                 <c:ptCount val="3"/>
                 <c:pt idx="0">
-                  <c:v>99</c:v>
+                  <c:v>102</c:v>
                 </c:pt>
                 <c:pt idx="1">
                   <c:v>14</c:v>
@@ -823,13 +823,13 @@
                 <c:formatCode>General</c:formatCode>
                 <c:ptCount val="9"/>
                 <c:pt idx="0">
-                  <c:v>51</c:v>
+                  <c:v>53</c:v>
                 </c:pt>
                 <c:pt idx="1">
                   <c:v>12</c:v>
                 </c:pt>
                 <c:pt idx="2">
-                  <c:v>36</c:v>
+                  <c:v>37</c:v>
                 </c:pt>
                 <c:pt idx="3">
                   <c:v>7</c:v>
@@ -2798,7 +2798,7 @@
                 <a:ea typeface="Arial" pitchFamily="34" charset="-122"/>
                 <a:cs typeface="Arial" pitchFamily="34" charset="-120"/>
               </a:rPr>
-              <a:t>レビュー総数：116件（6サイト）</a:t>
+              <a:t>レビュー総数：119件（6サイト）</a:t>
             </a:r>
             <a:endParaRPr lang="en-US" sz="1000" dirty="0"/>
           </a:p>
@@ -2818,7 +2818,7 @@
                 <a:ea typeface="Arial" pitchFamily="34" charset="-122"/>
                 <a:cs typeface="Arial" pitchFamily="34" charset="-120"/>
               </a:rPr>
-              <a:t>作成日：2026年3月17日</a:t>
+              <a:t>作成日：2026年3月18日</a:t>
             </a:r>
             <a:endParaRPr lang="en-US" sz="1000" dirty="0"/>
           </a:p>
@@ -3364,7 +3364,7 @@
                           <a:ea typeface="Arial" pitchFamily="34" charset="-122"/>
                           <a:cs typeface="Arial" pitchFamily="34" charset="-120"/>
                         </a:rPr>
-                        <a:t>8.65点</a:t>
+                        <a:t>8.66点</a:t>
                       </a:r>
                       <a:endParaRPr lang="en-US" sz="1000" dirty="0">
                         <a:latin typeface="Arial" charset="0"/>
@@ -3638,7 +3638,7 @@
                           <a:ea typeface="Arial" pitchFamily="34" charset="-122"/>
                           <a:cs typeface="Arial" pitchFamily="34" charset="-120"/>
                         </a:rPr>
-                        <a:t>85.3%</a:t>
+                        <a:t>85.7%</a:t>
                       </a:r>
                       <a:endParaRPr lang="en-US" sz="1000" dirty="0">
                         <a:latin typeface="Arial" charset="0"/>
@@ -3706,7 +3706,7 @@
                           <a:ea typeface="Arial" pitchFamily="34" charset="-122"/>
                           <a:cs typeface="Arial" pitchFamily="34" charset="-120"/>
                         </a:rPr>
-                        <a:t>90%以上</a:t>
+                        <a:t>91%以上</a:t>
                       </a:r>
                       <a:endParaRPr lang="en-US" sz="1000" dirty="0">
                         <a:latin typeface="Arial" charset="0"/>
@@ -3912,7 +3912,7 @@
                           <a:ea typeface="Arial" pitchFamily="34" charset="-122"/>
                           <a:cs typeface="Arial" pitchFamily="34" charset="-120"/>
                         </a:rPr>
-                        <a:t>2.6%</a:t>
+                        <a:t>2.5%</a:t>
                       </a:r>
                       <a:endParaRPr lang="en-US" sz="1000" dirty="0">
                         <a:latin typeface="Arial" charset="0"/>
@@ -4186,7 +4186,7 @@
                           <a:ea typeface="Arial" pitchFamily="34" charset="-122"/>
                           <a:cs typeface="Arial" pitchFamily="34" charset="-120"/>
                         </a:rPr>
-                        <a:t>7.6点</a:t>
+                        <a:t>7.7点</a:t>
                       </a:r>
                       <a:endParaRPr lang="en-US" sz="1000" dirty="0">
                         <a:latin typeface="Arial" charset="0"/>
@@ -4254,7 +4254,7 @@
                           <a:ea typeface="Arial" pitchFamily="34" charset="-122"/>
                           <a:cs typeface="Arial" pitchFamily="34" charset="-120"/>
                         </a:rPr>
-                        <a:t>8.6点以上</a:t>
+                        <a:t>8.7点以上</a:t>
                       </a:r>
                       <a:endParaRPr lang="en-US" sz="1000" dirty="0">
                         <a:latin typeface="Arial" charset="0"/>
@@ -5373,7 +5373,7 @@
                 <a:ea typeface="Arial" pitchFamily="34" charset="-122"/>
                 <a:cs typeface="Arial" pitchFamily="34" charset="-120"/>
               </a:rPr>
-              <a:t>8.65</a:t>
+              <a:t>8.66</a:t>
             </a:r>
             <a:endParaRPr lang="en-US" sz="3200" dirty="0"/>
           </a:p>
@@ -5498,7 +5498,7 @@
                 <a:ea typeface="Arial" pitchFamily="34" charset="-122"/>
                 <a:cs typeface="Arial" pitchFamily="34" charset="-120"/>
               </a:rPr>
-              <a:t>85.3%</a:t>
+              <a:t>85.7%</a:t>
             </a:r>
             <a:endParaRPr lang="en-US" sz="3200" dirty="0"/>
           </a:p>
@@ -5623,7 +5623,7 @@
                 <a:ea typeface="Arial" pitchFamily="34" charset="-122"/>
                 <a:cs typeface="Arial" pitchFamily="34" charset="-120"/>
               </a:rPr>
-              <a:t>2.6%</a:t>
+              <a:t>2.5%</a:t>
             </a:r>
             <a:endParaRPr lang="en-US" sz="3200" dirty="0"/>
           </a:p>
@@ -5748,7 +5748,7 @@
                 <a:ea typeface="Arial" pitchFamily="34" charset="-122"/>
                 <a:cs typeface="Arial" pitchFamily="34" charset="-120"/>
               </a:rPr>
-              <a:t>116件</a:t>
+              <a:t>119件</a:t>
             </a:r>
             <a:endParaRPr lang="en-US" sz="3200" dirty="0"/>
           </a:p>
@@ -5896,7 +5896,7 @@
                 <a:ea typeface="Arial" pitchFamily="34" charset="-122"/>
                 <a:cs typeface="Arial" pitchFamily="34" charset="-120"/>
               </a:rPr>
-              <a:t>  立地はとても良いし、部屋も素敵ですが、窓が隣の建物の壁に遮られていて、壁が触れられるほど近いのが難点です</a:t>
+              <a:t>  JR山手線にも近く、立地も便利です</a:t>
             </a:r>
             <a:endParaRPr lang="en-US" sz="1100" dirty="0"/>
           </a:p>
@@ -5936,7 +5936,7 @@
                 <a:ea typeface="Arial" pitchFamily="34" charset="-122"/>
                 <a:cs typeface="Arial" pitchFamily="34" charset="-120"/>
               </a:rPr>
-              <a:t>  のようなもので浄水器へ汲みにいかないとだめでした 氷も地下しかありません リネン庫の近くだったからか夜中洗濯機の音...</a:t>
+              <a:t>  รร ดี ห้องพักดี อุปกรณ์ครบ เดินทางสะดวกด้วย JR Yamanote l...</a:t>
             </a:r>
             <a:endParaRPr lang="en-US" sz="1100" dirty="0"/>
           </a:p>
@@ -6557,7 +6557,7 @@
                 <a:ea typeface="Arial" pitchFamily="34" charset="-122"/>
                 <a:cs typeface="Arial" pitchFamily="34" charset="-120"/>
               </a:rPr>
-              <a:t>8.65</a:t>
+              <a:t>8.66</a:t>
             </a:r>
             <a:endParaRPr lang="en-US" sz="3200" dirty="0"/>
           </a:p>
@@ -6682,7 +6682,7 @@
                 <a:ea typeface="Arial" pitchFamily="34" charset="-122"/>
                 <a:cs typeface="Arial" pitchFamily="34" charset="-120"/>
               </a:rPr>
-              <a:t>85.3%</a:t>
+              <a:t>85.7%</a:t>
             </a:r>
             <a:endParaRPr lang="en-US" sz="3200" dirty="0"/>
           </a:p>
@@ -6807,7 +6807,7 @@
                 <a:ea typeface="Arial" pitchFamily="34" charset="-122"/>
                 <a:cs typeface="Arial" pitchFamily="34" charset="-120"/>
               </a:rPr>
-              <a:t>2.6%</a:t>
+              <a:t>2.5%</a:t>
             </a:r>
             <a:endParaRPr lang="en-US" sz="3200" dirty="0"/>
           </a:p>
@@ -6932,7 +6932,7 @@
                 <a:ea typeface="Arial" pitchFamily="34" charset="-122"/>
                 <a:cs typeface="Arial" pitchFamily="34" charset="-120"/>
               </a:rPr>
-              <a:t>116件</a:t>
+              <a:t>119件</a:t>
             </a:r>
             <a:endParaRPr lang="en-US" sz="3200" dirty="0"/>
           </a:p>
@@ -7353,7 +7353,7 @@
                 <a:ea typeface="Arial" pitchFamily="34" charset="-122"/>
                 <a:cs typeface="Arial" pitchFamily="34" charset="-120"/>
               </a:rPr>
-              <a:t>Trip.com(9.24)が最高スコア。</a:t>
+              <a:t>Trip.com(9.27)が最高スコア。</a:t>
             </a:r>
             <a:endParaRPr lang="en-US" sz="1100" dirty="0"/>
           </a:p>
@@ -7402,7 +7402,7 @@
                 <a:ea typeface="Arial" pitchFamily="34" charset="-122"/>
                 <a:cs typeface="Arial" pitchFamily="34" charset="-120"/>
               </a:rPr>
-              <a:t>Booking.com(7.6)が相対的に低い。口コミ返信の強化が急務</a:t>
+              <a:t>Booking.com(7.7)が相対的に低い。口コミ返信の強化が急務</a:t>
             </a:r>
             <a:endParaRPr lang="en-US" sz="1100" dirty="0"/>
           </a:p>
@@ -7911,7 +7911,7 @@
                           <a:ea typeface="Arial" pitchFamily="34" charset="-122"/>
                           <a:cs typeface="Arial" pitchFamily="34" charset="-120"/>
                         </a:rPr>
-                        <a:t>25</a:t>
+                        <a:t>26</a:t>
                       </a:r>
                       <a:endParaRPr lang="en-US" sz="900" dirty="0">
                         <a:latin typeface="Arial" charset="0"/>
@@ -7979,7 +7979,7 @@
                           <a:ea typeface="Arial" pitchFamily="34" charset="-122"/>
                           <a:cs typeface="Arial" pitchFamily="34" charset="-120"/>
                         </a:rPr>
-                        <a:t>9.24</a:t>
+                        <a:t>9.27</a:t>
                       </a:r>
                       <a:endParaRPr lang="en-US" sz="900" dirty="0">
                         <a:latin typeface="Arial" charset="0"/>
@@ -8115,7 +8115,7 @@
                           <a:ea typeface="Arial" pitchFamily="34" charset="-122"/>
                           <a:cs typeface="Arial" pitchFamily="34" charset="-120"/>
                         </a:rPr>
-                        <a:t>9.24</a:t>
+                        <a:t>9.27</a:t>
                       </a:r>
                       <a:endParaRPr lang="en-US" sz="900" dirty="0">
                         <a:latin typeface="Arial" charset="0"/>
@@ -9621,7 +9621,7 @@
                           <a:ea typeface="Arial" pitchFamily="34" charset="-122"/>
                           <a:cs typeface="Arial" pitchFamily="34" charset="-120"/>
                         </a:rPr>
-                        <a:t>28</a:t>
+                        <a:t>30</a:t>
                       </a:r>
                       <a:endParaRPr lang="en-US" sz="900" dirty="0">
                         <a:latin typeface="Arial" charset="0"/>
@@ -9689,7 +9689,7 @@
                           <a:ea typeface="Arial" pitchFamily="34" charset="-122"/>
                           <a:cs typeface="Arial" pitchFamily="34" charset="-120"/>
                         </a:rPr>
-                        <a:t>7.64</a:t>
+                        <a:t>7.73</a:t>
                       </a:r>
                       <a:endParaRPr lang="en-US" sz="900" dirty="0">
                         <a:latin typeface="Arial" charset="0"/>
@@ -9825,7 +9825,7 @@
                           <a:ea typeface="Arial" pitchFamily="34" charset="-122"/>
                           <a:cs typeface="Arial" pitchFamily="34" charset="-120"/>
                         </a:rPr>
-                        <a:t>7.64</a:t>
+                        <a:t>7.73</a:t>
                       </a:r>
                       <a:endParaRPr lang="en-US" sz="900" dirty="0">
                         <a:latin typeface="Arial" charset="0"/>
@@ -10233,7 +10233,7 @@
                 <a:ea typeface="Arial" pitchFamily="34" charset="-122"/>
                 <a:cs typeface="Arial" pitchFamily="34" charset="-120"/>
               </a:rPr>
-              <a:t>99件（85.3%）</a:t>
+              <a:t>102件（85.7%）</a:t>
             </a:r>
             <a:endParaRPr lang="en-US" sz="1100" dirty="0"/>
           </a:p>
@@ -10331,7 +10331,7 @@
                 <a:ea typeface="Arial" pitchFamily="34" charset="-122"/>
                 <a:cs typeface="Arial" pitchFamily="34" charset="-120"/>
               </a:rPr>
-              <a:t>14件（12.1%）</a:t>
+              <a:t>14件（11.8%）</a:t>
             </a:r>
             <a:endParaRPr lang="en-US" sz="1100" dirty="0"/>
           </a:p>
@@ -10429,7 +10429,7 @@
                 <a:ea typeface="Arial" pitchFamily="34" charset="-122"/>
                 <a:cs typeface="Arial" pitchFamily="34" charset="-120"/>
               </a:rPr>
-              <a:t>3件（2.6%）</a:t>
+              <a:t>3件（2.5%）</a:t>
             </a:r>
             <a:endParaRPr lang="en-US" sz="1100" dirty="0"/>
           </a:p>
@@ -10841,7 +10841,7 @@
                 <a:ea typeface="Arial" pitchFamily="34" charset="-122"/>
                 <a:cs typeface="Arial" pitchFamily="34" charset="-120"/>
               </a:rPr>
-              <a:t>立地はとても良いし、部屋も素敵ですが、窓が隣の建物の壁に遮られていて、壁が触れられるほど近いのが難点です</a:t>
+              <a:t>JR山手線にも近く、立地も便利です</a:t>
             </a:r>
             <a:endParaRPr lang="en-US" sz="900" dirty="0"/>
           </a:p>
@@ -10880,7 +10880,7 @@
                 <a:ea typeface="Arial" pitchFamily="34" charset="-122"/>
                 <a:cs typeface="Arial" pitchFamily="34" charset="-120"/>
               </a:rPr>
-              <a:t>「駅から近く、迷わずにたどり着けました」</a:t>
+              <a:t>「立地はとても良いし、部屋も素敵ですが、窓が隣の建物の壁に遮られていて、壁が触れられるほど近いのが難点です」</a:t>
             </a:r>
             <a:endParaRPr lang="en-US" sz="900" dirty="0"/>
           </a:p>
@@ -11064,7 +11064,7 @@
                 <a:ea typeface="Arial" pitchFamily="34" charset="-122"/>
                 <a:cs typeface="Arial" pitchFamily="34" charset="-120"/>
               </a:rPr>
-              <a:t>のようなもので浄水器へ汲みにいかないとだめでした 氷も地下しかありません リネン庫の近くだったからか夜中洗濯機の音...</a:t>
+              <a:t>รร ดี ห้องพักดี อุปกรณ์ครบ เดินทางสะดวกด้วย JR Yamanote l...</a:t>
             </a:r>
             <a:endParaRPr lang="en-US" sz="900" dirty="0"/>
           </a:p>
@@ -11103,7 +11103,7 @@
                 <a:ea typeface="Arial" pitchFamily="34" charset="-122"/>
                 <a:cs typeface="Arial" pitchFamily="34" charset="-120"/>
               </a:rPr>
-              <a:t>「アメニティ（洗面用具や客室備品など）はロビーに用意されており、必要に応じて自由に選ぶことができます」</a:t>
+              <a:t>「のようなもので浄水器へ汲みにいかないとだめでした 氷も地下しかありません リネン庫の近くだったからか夜中洗濯機の音...」</a:t>
             </a:r>
             <a:endParaRPr lang="en-US" sz="900" dirty="0"/>
           </a:p>

--- a/納品レポート/ホテル別レポート/richmond_mejiro_口コミ分析レポート.pptx
+++ b/納品レポート/ホテル別レポート/richmond_mejiro_口コミ分析レポート.pptx
@@ -214,7 +214,7 @@
                   <c:v>9.2</c:v>
                 </c:pt>
                 <c:pt idx="2">
-                  <c:v>9.17</c:v>
+                  <c:v>9.15</c:v>
                 </c:pt>
                 <c:pt idx="3">
                   <c:v>8.67</c:v>
@@ -223,7 +223,7 @@
                   <c:v>8.53</c:v>
                 </c:pt>
                 <c:pt idx="5">
-                  <c:v>7.73</c:v>
+                  <c:v>7.74</c:v>
                 </c:pt>
               </c:numCache>
             </c:numRef>
@@ -566,7 +566,7 @@
               <c:numCache>
                 <c:ptCount val="3"/>
                 <c:pt idx="0">
-                  <c:v>102</c:v>
+                  <c:v>105</c:v>
                 </c:pt>
                 <c:pt idx="1">
                   <c:v>14</c:v>
@@ -823,13 +823,13 @@
                 <c:formatCode>General</c:formatCode>
                 <c:ptCount val="9"/>
                 <c:pt idx="0">
-                  <c:v>53</c:v>
+                  <c:v>54</c:v>
                 </c:pt>
                 <c:pt idx="1">
                   <c:v>12</c:v>
                 </c:pt>
                 <c:pt idx="2">
-                  <c:v>37</c:v>
+                  <c:v>39</c:v>
                 </c:pt>
                 <c:pt idx="3">
                   <c:v>7</c:v>
@@ -2798,7 +2798,7 @@
                 <a:ea typeface="Arial" pitchFamily="34" charset="-122"/>
                 <a:cs typeface="Arial" pitchFamily="34" charset="-120"/>
               </a:rPr>
-              <a:t>レビュー総数：119件（6サイト）</a:t>
+              <a:t>レビュー総数：122件（6サイト）</a:t>
             </a:r>
             <a:endParaRPr lang="en-US" sz="1000" dirty="0"/>
           </a:p>
@@ -2818,7 +2818,7 @@
                 <a:ea typeface="Arial" pitchFamily="34" charset="-122"/>
                 <a:cs typeface="Arial" pitchFamily="34" charset="-120"/>
               </a:rPr>
-              <a:t>作成日：2026年3月18日</a:t>
+              <a:t>作成日：2026年3月19日</a:t>
             </a:r>
             <a:endParaRPr lang="en-US" sz="1000" dirty="0"/>
           </a:p>
@@ -3638,7 +3638,7 @@
                           <a:ea typeface="Arial" pitchFamily="34" charset="-122"/>
                           <a:cs typeface="Arial" pitchFamily="34" charset="-120"/>
                         </a:rPr>
-                        <a:t>85.7%</a:t>
+                        <a:t>86.1%</a:t>
                       </a:r>
                       <a:endParaRPr lang="en-US" sz="1000" dirty="0">
                         <a:latin typeface="Arial" charset="0"/>
@@ -5498,7 +5498,7 @@
                 <a:ea typeface="Arial" pitchFamily="34" charset="-122"/>
                 <a:cs typeface="Arial" pitchFamily="34" charset="-120"/>
               </a:rPr>
-              <a:t>85.7%</a:t>
+              <a:t>86.1%</a:t>
             </a:r>
             <a:endParaRPr lang="en-US" sz="3200" dirty="0"/>
           </a:p>
@@ -5748,7 +5748,7 @@
                 <a:ea typeface="Arial" pitchFamily="34" charset="-122"/>
                 <a:cs typeface="Arial" pitchFamily="34" charset="-120"/>
               </a:rPr>
-              <a:t>119件</a:t>
+              <a:t>122件</a:t>
             </a:r>
             <a:endParaRPr lang="en-US" sz="3200" dirty="0"/>
           </a:p>
@@ -6682,7 +6682,7 @@
                 <a:ea typeface="Arial" pitchFamily="34" charset="-122"/>
                 <a:cs typeface="Arial" pitchFamily="34" charset="-120"/>
               </a:rPr>
-              <a:t>85.7%</a:t>
+              <a:t>86.1%</a:t>
             </a:r>
             <a:endParaRPr lang="en-US" sz="3200" dirty="0"/>
           </a:p>
@@ -6932,7 +6932,7 @@
                 <a:ea typeface="Arial" pitchFamily="34" charset="-122"/>
                 <a:cs typeface="Arial" pitchFamily="34" charset="-120"/>
               </a:rPr>
-              <a:t>119件</a:t>
+              <a:t>122件</a:t>
             </a:r>
             <a:endParaRPr lang="en-US" sz="3200" dirty="0"/>
           </a:p>
@@ -8595,7 +8595,7 @@
                           <a:ea typeface="Arial" pitchFamily="34" charset="-122"/>
                           <a:cs typeface="Arial" pitchFamily="34" charset="-120"/>
                         </a:rPr>
-                        <a:t>24</a:t>
+                        <a:t>26</a:t>
                       </a:r>
                       <a:endParaRPr lang="en-US" sz="900" dirty="0">
                         <a:latin typeface="Arial" charset="0"/>
@@ -8799,7 +8799,7 @@
                           <a:ea typeface="Arial" pitchFamily="34" charset="-122"/>
                           <a:cs typeface="Arial" pitchFamily="34" charset="-120"/>
                         </a:rPr>
-                        <a:t>9.17</a:t>
+                        <a:t>9.15</a:t>
                       </a:r>
                       <a:endParaRPr lang="en-US" sz="900" dirty="0">
                         <a:latin typeface="Arial" charset="0"/>
@@ -9621,7 +9621,7 @@
                           <a:ea typeface="Arial" pitchFamily="34" charset="-122"/>
                           <a:cs typeface="Arial" pitchFamily="34" charset="-120"/>
                         </a:rPr>
-                        <a:t>30</a:t>
+                        <a:t>31</a:t>
                       </a:r>
                       <a:endParaRPr lang="en-US" sz="900" dirty="0">
                         <a:latin typeface="Arial" charset="0"/>
@@ -9689,7 +9689,7 @@
                           <a:ea typeface="Arial" pitchFamily="34" charset="-122"/>
                           <a:cs typeface="Arial" pitchFamily="34" charset="-120"/>
                         </a:rPr>
-                        <a:t>7.73</a:t>
+                        <a:t>7.74</a:t>
                       </a:r>
                       <a:endParaRPr lang="en-US" sz="900" dirty="0">
                         <a:latin typeface="Arial" charset="0"/>
@@ -9825,7 +9825,7 @@
                           <a:ea typeface="Arial" pitchFamily="34" charset="-122"/>
                           <a:cs typeface="Arial" pitchFamily="34" charset="-120"/>
                         </a:rPr>
-                        <a:t>7.73</a:t>
+                        <a:t>7.74</a:t>
                       </a:r>
                       <a:endParaRPr lang="en-US" sz="900" dirty="0">
                         <a:latin typeface="Arial" charset="0"/>
@@ -10233,7 +10233,7 @@
                 <a:ea typeface="Arial" pitchFamily="34" charset="-122"/>
                 <a:cs typeface="Arial" pitchFamily="34" charset="-120"/>
               </a:rPr>
-              <a:t>102件（85.7%）</a:t>
+              <a:t>105件（86.1%）</a:t>
             </a:r>
             <a:endParaRPr lang="en-US" sz="1100" dirty="0"/>
           </a:p>
@@ -10331,7 +10331,7 @@
                 <a:ea typeface="Arial" pitchFamily="34" charset="-122"/>
                 <a:cs typeface="Arial" pitchFamily="34" charset="-120"/>
               </a:rPr>
-              <a:t>14件（11.8%）</a:t>
+              <a:t>14件（11.5%）</a:t>
             </a:r>
             <a:endParaRPr lang="en-US" sz="1100" dirty="0"/>
           </a:p>
@@ -11733,7 +11733,7 @@
                 <a:ea typeface="Arial" pitchFamily="34" charset="-122"/>
                 <a:cs typeface="Arial" pitchFamily="34" charset="-120"/>
               </a:rPr>
-              <a:t>古さのためか清掃にも限界があるように感じた</a:t>
+              <a:t>独立のお風呂も広く清潔で、手足を伸ばしてゆったり浸かることができ、旅の疲れを癒すことができました</a:t>
             </a:r>
             <a:endParaRPr lang="en-US" sz="900" dirty="0"/>
           </a:p>
@@ -11772,7 +11772,7 @@
                 <a:ea typeface="Arial" pitchFamily="34" charset="-122"/>
                 <a:cs typeface="Arial" pitchFamily="34" charset="-120"/>
               </a:rPr>
-              <a:t>「お部屋も二人で13500円だったのにトイレとお風呂は別だし、綺麗だったしドライヤーはReFaだったのでとても良かった」</a:t>
+              <a:t>「古さのためか清掃にも限界があるように感じた」</a:t>
             </a:r>
             <a:endParaRPr lang="en-US" sz="900" dirty="0"/>
           </a:p>

--- a/納品レポート/ホテル別レポート/richmond_mejiro_口コミ分析レポート.pptx
+++ b/納品レポート/ホテル別レポート/richmond_mejiro_口コミ分析レポート.pptx
@@ -208,7 +208,7 @@
                 <c:formatCode>General</c:formatCode>
                 <c:ptCount val="6"/>
                 <c:pt idx="0">
-                  <c:v>9.27</c:v>
+                  <c:v>9.3</c:v>
                 </c:pt>
                 <c:pt idx="1">
                   <c:v>9.2</c:v>
@@ -220,10 +220,10 @@
                   <c:v>8.67</c:v>
                 </c:pt>
                 <c:pt idx="4">
-                  <c:v>8.53</c:v>
+                  <c:v>8.4</c:v>
                 </c:pt>
                 <c:pt idx="5">
-                  <c:v>7.74</c:v>
+                  <c:v>7.81</c:v>
                 </c:pt>
               </c:numCache>
             </c:numRef>
@@ -566,10 +566,10 @@
               <c:numCache>
                 <c:ptCount val="3"/>
                 <c:pt idx="0">
-                  <c:v>105</c:v>
+                  <c:v>107</c:v>
                 </c:pt>
                 <c:pt idx="1">
-                  <c:v>14</c:v>
+                  <c:v>15</c:v>
                 </c:pt>
                 <c:pt idx="2">
                   <c:v>3</c:v>
@@ -823,7 +823,7 @@
                 <c:formatCode>General</c:formatCode>
                 <c:ptCount val="9"/>
                 <c:pt idx="0">
-                  <c:v>54</c:v>
+                  <c:v>56</c:v>
                 </c:pt>
                 <c:pt idx="1">
                   <c:v>12</c:v>
@@ -835,7 +835,7 @@
                   <c:v>7</c:v>
                 </c:pt>
                 <c:pt idx="4">
-                  <c:v>4</c:v>
+                  <c:v>5</c:v>
                 </c:pt>
                 <c:pt idx="5">
                   <c:v>3</c:v>
@@ -2798,7 +2798,7 @@
                 <a:ea typeface="Arial" pitchFamily="34" charset="-122"/>
                 <a:cs typeface="Arial" pitchFamily="34" charset="-120"/>
               </a:rPr>
-              <a:t>レビュー総数：122件（6サイト）</a:t>
+              <a:t>レビュー総数：125件（6サイト）</a:t>
             </a:r>
             <a:endParaRPr lang="en-US" sz="1000" dirty="0"/>
           </a:p>
@@ -2818,7 +2818,7 @@
                 <a:ea typeface="Arial" pitchFamily="34" charset="-122"/>
                 <a:cs typeface="Arial" pitchFamily="34" charset="-120"/>
               </a:rPr>
-              <a:t>作成日：2026年3月19日</a:t>
+              <a:t>作成日：2026年3月20日</a:t>
             </a:r>
             <a:endParaRPr lang="en-US" sz="1000" dirty="0"/>
           </a:p>
@@ -3638,7 +3638,7 @@
                           <a:ea typeface="Arial" pitchFamily="34" charset="-122"/>
                           <a:cs typeface="Arial" pitchFamily="34" charset="-120"/>
                         </a:rPr>
-                        <a:t>86.1%</a:t>
+                        <a:t>85.6%</a:t>
                       </a:r>
                       <a:endParaRPr lang="en-US" sz="1000" dirty="0">
                         <a:latin typeface="Arial" charset="0"/>
@@ -3912,7 +3912,7 @@
                           <a:ea typeface="Arial" pitchFamily="34" charset="-122"/>
                           <a:cs typeface="Arial" pitchFamily="34" charset="-120"/>
                         </a:rPr>
-                        <a:t>2.5%</a:t>
+                        <a:t>2.4%</a:t>
                       </a:r>
                       <a:endParaRPr lang="en-US" sz="1000" dirty="0">
                         <a:latin typeface="Arial" charset="0"/>
@@ -4186,7 +4186,7 @@
                           <a:ea typeface="Arial" pitchFamily="34" charset="-122"/>
                           <a:cs typeface="Arial" pitchFamily="34" charset="-120"/>
                         </a:rPr>
-                        <a:t>7.7点</a:t>
+                        <a:t>7.8点</a:t>
                       </a:r>
                       <a:endParaRPr lang="en-US" sz="1000" dirty="0">
                         <a:latin typeface="Arial" charset="0"/>
@@ -4254,7 +4254,7 @@
                           <a:ea typeface="Arial" pitchFamily="34" charset="-122"/>
                           <a:cs typeface="Arial" pitchFamily="34" charset="-120"/>
                         </a:rPr>
-                        <a:t>8.7点以上</a:t>
+                        <a:t>8.8点以上</a:t>
                       </a:r>
                       <a:endParaRPr lang="en-US" sz="1000" dirty="0">
                         <a:latin typeface="Arial" charset="0"/>
@@ -4734,7 +4734,7 @@
                           <a:ea typeface="Arial" pitchFamily="34" charset="-122"/>
                           <a:cs typeface="Arial" pitchFamily="34" charset="-120"/>
                         </a:rPr>
-                        <a:t>約19件/期間</a:t>
+                        <a:t>約20件/期間</a:t>
                       </a:r>
                       <a:endParaRPr lang="en-US" sz="1000" dirty="0">
                         <a:latin typeface="Arial" charset="0"/>
@@ -4802,7 +4802,7 @@
                           <a:ea typeface="Arial" pitchFamily="34" charset="-122"/>
                           <a:cs typeface="Arial" pitchFamily="34" charset="-120"/>
                         </a:rPr>
-                        <a:t>9件以下</a:t>
+                        <a:t>10件以下</a:t>
                       </a:r>
                       <a:endParaRPr lang="en-US" sz="1000" dirty="0">
                         <a:latin typeface="Arial" charset="0"/>
@@ -5498,7 +5498,7 @@
                 <a:ea typeface="Arial" pitchFamily="34" charset="-122"/>
                 <a:cs typeface="Arial" pitchFamily="34" charset="-120"/>
               </a:rPr>
-              <a:t>86.1%</a:t>
+              <a:t>85.6%</a:t>
             </a:r>
             <a:endParaRPr lang="en-US" sz="3200" dirty="0"/>
           </a:p>
@@ -5623,7 +5623,7 @@
                 <a:ea typeface="Arial" pitchFamily="34" charset="-122"/>
                 <a:cs typeface="Arial" pitchFamily="34" charset="-120"/>
               </a:rPr>
-              <a:t>2.5%</a:t>
+              <a:t>2.4%</a:t>
             </a:r>
             <a:endParaRPr lang="en-US" sz="3200" dirty="0"/>
           </a:p>
@@ -5748,7 +5748,7 @@
                 <a:ea typeface="Arial" pitchFamily="34" charset="-122"/>
                 <a:cs typeface="Arial" pitchFamily="34" charset="-120"/>
               </a:rPr>
-              <a:t>122件</a:t>
+              <a:t>125件</a:t>
             </a:r>
             <a:endParaRPr lang="en-US" sz="3200" dirty="0"/>
           </a:p>
@@ -5896,7 +5896,7 @@
                 <a:ea typeface="Arial" pitchFamily="34" charset="-122"/>
                 <a:cs typeface="Arial" pitchFamily="34" charset="-120"/>
               </a:rPr>
-              <a:t>  JR山手線にも近く、立地も便利です</a:t>
+              <a:t>  立地も良く、ホテルも広々としていました</a:t>
             </a:r>
             <a:endParaRPr lang="en-US" sz="1100" dirty="0"/>
           </a:p>
@@ -5936,7 +5936,7 @@
                 <a:ea typeface="Arial" pitchFamily="34" charset="-122"/>
                 <a:cs typeface="Arial" pitchFamily="34" charset="-120"/>
               </a:rPr>
-              <a:t>  รร ดี ห้องพักดี อุปกรณ์ครบ เดินทางสะดวกด้วย JR Yamanote l...</a:t>
+              <a:t>  以前宿泊した際、駅から近くお部屋も広々としていて綺麗でベッドも広くて是非また泊まりたいと思いリピートしました</a:t>
             </a:r>
             <a:endParaRPr lang="en-US" sz="1100" dirty="0"/>
           </a:p>
@@ -5976,7 +5976,7 @@
                 <a:ea typeface="Arial" pitchFamily="34" charset="-122"/>
                 <a:cs typeface="Arial" pitchFamily="34" charset="-120"/>
               </a:rPr>
-              <a:t>  のようなもので浄水器へ汲みにいかないとだめでした 氷も地下しかありません リネン庫の近くだったからか夜中洗濯機の音...</a:t>
+              <a:t>  フロントの方はとても優しく丁寧で素敵な方でした</a:t>
             </a:r>
             <a:endParaRPr lang="en-US" sz="1100" dirty="0"/>
           </a:p>
@@ -6124,7 +6124,7 @@
                 <a:ea typeface="Arial" pitchFamily="34" charset="-122"/>
                 <a:cs typeface="Arial" pitchFamily="34" charset="-120"/>
               </a:rPr>
-              <a:t>  Amenities like toiletries and room supplies will be provi...</a:t>
+              <a:t>  2泊しましたが、1日目にシャワーを使用したら水がどんどん浴槽に溜まり、排水されなくひたすら溜まり続けて気持ち悪かったです</a:t>
             </a:r>
             <a:endParaRPr lang="en-US" sz="1100" dirty="0"/>
           </a:p>
@@ -6164,7 +6164,7 @@
                 <a:ea typeface="Arial" pitchFamily="34" charset="-122"/>
                 <a:cs typeface="Arial" pitchFamily="34" charset="-120"/>
               </a:rPr>
-              <a:t>  Very good location, nice room, but the window is blocked ...</a:t>
+              <a:t>  Everyone was very accommodating and our room was very clean</a:t>
             </a:r>
             <a:endParaRPr lang="en-US" sz="1100" dirty="0"/>
           </a:p>
@@ -6682,7 +6682,7 @@
                 <a:ea typeface="Arial" pitchFamily="34" charset="-122"/>
                 <a:cs typeface="Arial" pitchFamily="34" charset="-120"/>
               </a:rPr>
-              <a:t>86.1%</a:t>
+              <a:t>85.6%</a:t>
             </a:r>
             <a:endParaRPr lang="en-US" sz="3200" dirty="0"/>
           </a:p>
@@ -6807,7 +6807,7 @@
                 <a:ea typeface="Arial" pitchFamily="34" charset="-122"/>
                 <a:cs typeface="Arial" pitchFamily="34" charset="-120"/>
               </a:rPr>
-              <a:t>2.5%</a:t>
+              <a:t>2.4%</a:t>
             </a:r>
             <a:endParaRPr lang="en-US" sz="3200" dirty="0"/>
           </a:p>
@@ -6932,7 +6932,7 @@
                 <a:ea typeface="Arial" pitchFamily="34" charset="-122"/>
                 <a:cs typeface="Arial" pitchFamily="34" charset="-120"/>
               </a:rPr>
-              <a:t>122件</a:t>
+              <a:t>125件</a:t>
             </a:r>
             <a:endParaRPr lang="en-US" sz="3200" dirty="0"/>
           </a:p>
@@ -7353,7 +7353,7 @@
                 <a:ea typeface="Arial" pitchFamily="34" charset="-122"/>
                 <a:cs typeface="Arial" pitchFamily="34" charset="-120"/>
               </a:rPr>
-              <a:t>Trip.com(9.27)が最高スコア。</a:t>
+              <a:t>Trip.com(9.30)が最高スコア。</a:t>
             </a:r>
             <a:endParaRPr lang="en-US" sz="1100" dirty="0"/>
           </a:p>
@@ -7402,7 +7402,7 @@
                 <a:ea typeface="Arial" pitchFamily="34" charset="-122"/>
                 <a:cs typeface="Arial" pitchFamily="34" charset="-120"/>
               </a:rPr>
-              <a:t>Booking.com(7.7)が相対的に低い。口コミ返信の強化が急務</a:t>
+              <a:t>Booking.com(7.8)が相対的に低い。口コミ返信の強化が急務</a:t>
             </a:r>
             <a:endParaRPr lang="en-US" sz="1100" dirty="0"/>
           </a:p>
@@ -7911,7 +7911,7 @@
                           <a:ea typeface="Arial" pitchFamily="34" charset="-122"/>
                           <a:cs typeface="Arial" pitchFamily="34" charset="-120"/>
                         </a:rPr>
-                        <a:t>26</a:t>
+                        <a:t>27</a:t>
                       </a:r>
                       <a:endParaRPr lang="en-US" sz="900" dirty="0">
                         <a:latin typeface="Arial" charset="0"/>
@@ -7979,7 +7979,7 @@
                           <a:ea typeface="Arial" pitchFamily="34" charset="-122"/>
                           <a:cs typeface="Arial" pitchFamily="34" charset="-120"/>
                         </a:rPr>
-                        <a:t>9.27</a:t>
+                        <a:t>9.3</a:t>
                       </a:r>
                       <a:endParaRPr lang="en-US" sz="900" dirty="0">
                         <a:latin typeface="Arial" charset="0"/>
@@ -8115,7 +8115,7 @@
                           <a:ea typeface="Arial" pitchFamily="34" charset="-122"/>
                           <a:cs typeface="Arial" pitchFamily="34" charset="-120"/>
                         </a:rPr>
-                        <a:t>9.27</a:t>
+                        <a:t>9.3</a:t>
                       </a:r>
                       <a:endParaRPr lang="en-US" sz="900" dirty="0">
                         <a:latin typeface="Arial" charset="0"/>
@@ -9279,7 +9279,7 @@
                           <a:ea typeface="Arial" pitchFamily="34" charset="-122"/>
                           <a:cs typeface="Arial" pitchFamily="34" charset="-120"/>
                         </a:rPr>
-                        <a:t>19</a:t>
+                        <a:t>20</a:t>
                       </a:r>
                       <a:endParaRPr lang="en-US" sz="900" dirty="0">
                         <a:latin typeface="Arial" charset="0"/>
@@ -9347,7 +9347,7 @@
                           <a:ea typeface="Arial" pitchFamily="34" charset="-122"/>
                           <a:cs typeface="Arial" pitchFamily="34" charset="-120"/>
                         </a:rPr>
-                        <a:t>4.26</a:t>
+                        <a:t>4.2</a:t>
                       </a:r>
                       <a:endParaRPr lang="en-US" sz="900" dirty="0">
                         <a:latin typeface="Arial" charset="0"/>
@@ -9483,7 +9483,7 @@
                           <a:ea typeface="Arial" pitchFamily="34" charset="-122"/>
                           <a:cs typeface="Arial" pitchFamily="34" charset="-120"/>
                         </a:rPr>
-                        <a:t>8.53</a:t>
+                        <a:t>8.4</a:t>
                       </a:r>
                       <a:endParaRPr lang="en-US" sz="900" dirty="0">
                         <a:latin typeface="Arial" charset="0"/>
@@ -9621,7 +9621,7 @@
                           <a:ea typeface="Arial" pitchFamily="34" charset="-122"/>
                           <a:cs typeface="Arial" pitchFamily="34" charset="-120"/>
                         </a:rPr>
-                        <a:t>31</a:t>
+                        <a:t>32</a:t>
                       </a:r>
                       <a:endParaRPr lang="en-US" sz="900" dirty="0">
                         <a:latin typeface="Arial" charset="0"/>
@@ -9689,7 +9689,7 @@
                           <a:ea typeface="Arial" pitchFamily="34" charset="-122"/>
                           <a:cs typeface="Arial" pitchFamily="34" charset="-120"/>
                         </a:rPr>
-                        <a:t>7.74</a:t>
+                        <a:t>7.81</a:t>
                       </a:r>
                       <a:endParaRPr lang="en-US" sz="900" dirty="0">
                         <a:latin typeface="Arial" charset="0"/>
@@ -9825,7 +9825,7 @@
                           <a:ea typeface="Arial" pitchFamily="34" charset="-122"/>
                           <a:cs typeface="Arial" pitchFamily="34" charset="-120"/>
                         </a:rPr>
-                        <a:t>7.74</a:t>
+                        <a:t>7.81</a:t>
                       </a:r>
                       <a:endParaRPr lang="en-US" sz="900" dirty="0">
                         <a:latin typeface="Arial" charset="0"/>
@@ -10233,7 +10233,7 @@
                 <a:ea typeface="Arial" pitchFamily="34" charset="-122"/>
                 <a:cs typeface="Arial" pitchFamily="34" charset="-120"/>
               </a:rPr>
-              <a:t>105件（86.1%）</a:t>
+              <a:t>107件（85.6%）</a:t>
             </a:r>
             <a:endParaRPr lang="en-US" sz="1100" dirty="0"/>
           </a:p>
@@ -10331,7 +10331,7 @@
                 <a:ea typeface="Arial" pitchFamily="34" charset="-122"/>
                 <a:cs typeface="Arial" pitchFamily="34" charset="-120"/>
               </a:rPr>
-              <a:t>14件（11.5%）</a:t>
+              <a:t>15件（12.0%）</a:t>
             </a:r>
             <a:endParaRPr lang="en-US" sz="1100" dirty="0"/>
           </a:p>
@@ -10429,7 +10429,7 @@
                 <a:ea typeface="Arial" pitchFamily="34" charset="-122"/>
                 <a:cs typeface="Arial" pitchFamily="34" charset="-120"/>
               </a:rPr>
-              <a:t>3件（2.5%）</a:t>
+              <a:t>3件（2.4%）</a:t>
             </a:r>
             <a:endParaRPr lang="en-US" sz="1100" dirty="0"/>
           </a:p>
@@ -10841,7 +10841,7 @@
                 <a:ea typeface="Arial" pitchFamily="34" charset="-122"/>
                 <a:cs typeface="Arial" pitchFamily="34" charset="-120"/>
               </a:rPr>
-              <a:t>JR山手線にも近く、立地も便利です</a:t>
+              <a:t>立地も良く、ホテルも広々としていました</a:t>
             </a:r>
             <a:endParaRPr lang="en-US" sz="900" dirty="0"/>
           </a:p>
@@ -10880,7 +10880,7 @@
                 <a:ea typeface="Arial" pitchFamily="34" charset="-122"/>
                 <a:cs typeface="Arial" pitchFamily="34" charset="-120"/>
               </a:rPr>
-              <a:t>「立地はとても良いし、部屋も素敵ですが、窓が隣の建物の壁に遮られていて、壁が触れられるほど近いのが難点です」</a:t>
+              <a:t>「以前宿泊した際、駅から近くお部屋も広々としていて綺麗でベッドも広くて是非また泊まりたいと思いリピートしました」</a:t>
             </a:r>
             <a:endParaRPr lang="en-US" sz="900" dirty="0"/>
           </a:p>
@@ -11064,7 +11064,7 @@
                 <a:ea typeface="Arial" pitchFamily="34" charset="-122"/>
                 <a:cs typeface="Arial" pitchFamily="34" charset="-120"/>
               </a:rPr>
-              <a:t>รร ดี ห้องพักดี อุปกรณ์ครบ เดินทางสะดวกด้วย JR Yamanote l...</a:t>
+              <a:t>以前宿泊した際、駅から近くお部屋も広々としていて綺麗でベッドも広くて是非また泊まりたいと思いリピートしました</a:t>
             </a:r>
             <a:endParaRPr lang="en-US" sz="900" dirty="0"/>
           </a:p>
@@ -11079,6 +11079,229 @@
         <p:spPr>
           <a:xfrm>
             <a:off x="3429000" y="1828800"/>
+            <a:ext cx="2377440" cy="640080"/>
+          </a:xfrm>
+          <a:prstGeom prst="rect">
+            <a:avLst/>
+          </a:prstGeom>
+          <a:noFill/>
+          <a:ln/>
+        </p:spPr>
+        <p:txBody>
+          <a:bodyPr wrap="square" lIns="0" tIns="0" rIns="0" bIns="0" rtlCol="0" anchor="ctr"/>
+          <a:lstStyle/>
+          <a:p>
+            <a:pPr indent="0" marL="0">
+              <a:buNone/>
+            </a:pPr>
+            <a:r>
+              <a:rPr lang="en-US" sz="900" i="1" dirty="0">
+                <a:solidFill>
+                  <a:srgbClr val="3B7DD8"/>
+                </a:solidFill>
+                <a:latin typeface="Arial" pitchFamily="34" charset="0"/>
+                <a:ea typeface="Arial" pitchFamily="34" charset="-122"/>
+                <a:cs typeface="Arial" pitchFamily="34" charset="-120"/>
+              </a:rPr>
+              <a:t>「รร ดี ห้องพักดี อุปกรณ์ครบ เดินทางสะดวกด้วย JR Yamanote l...」</a:t>
+            </a:r>
+            <a:endParaRPr lang="en-US" sz="900" dirty="0"/>
+          </a:p>
+        </p:txBody>
+      </p:sp>
+      <p:sp>
+        <p:nvSpPr>
+          <p:cNvPr id="19" name="Shape 17"/>
+          <p:cNvSpPr/>
+          <p:nvPr/>
+        </p:nvSpPr>
+        <p:spPr>
+          <a:xfrm>
+            <a:off x="6126480" y="1051560"/>
+            <a:ext cx="2651760" cy="1600200"/>
+          </a:xfrm>
+          <a:prstGeom prst="rect">
+            <a:avLst/>
+          </a:prstGeom>
+          <a:solidFill>
+            <a:srgbClr val="FFFFFF"/>
+          </a:solidFill>
+          <a:ln/>
+          <a:effectLst>
+            <a:outerShdw sx="100000" sy="100000" kx="0" ky="0" algn="bl" rotWithShape="0" blurRad="50800" dist="25400" dir="8100000">
+              <a:srgbClr val="000000">
+                <a:alpha val="10000"/>
+              </a:srgbClr>
+            </a:outerShdw>
+          </a:effectLst>
+        </p:spPr>
+      </p:sp>
+      <p:sp>
+        <p:nvSpPr>
+          <p:cNvPr id="20" name="Shape 18"/>
+          <p:cNvSpPr/>
+          <p:nvPr/>
+        </p:nvSpPr>
+        <p:spPr>
+          <a:xfrm>
+            <a:off x="6126480" y="1051560"/>
+            <a:ext cx="54864" cy="1600200"/>
+          </a:xfrm>
+          <a:prstGeom prst="rect">
+            <a:avLst/>
+          </a:prstGeom>
+          <a:solidFill>
+            <a:srgbClr val="16A34A"/>
+          </a:solidFill>
+          <a:ln/>
+        </p:spPr>
+      </p:sp>
+      <p:sp>
+        <p:nvSpPr>
+          <p:cNvPr id="21" name="Shape 19"/>
+          <p:cNvSpPr/>
+          <p:nvPr/>
+        </p:nvSpPr>
+        <p:spPr>
+          <a:xfrm>
+            <a:off x="7955280" y="1124712"/>
+            <a:ext cx="658368" cy="228600"/>
+          </a:xfrm>
+          <a:prstGeom prst="rect">
+            <a:avLst/>
+          </a:prstGeom>
+          <a:solidFill>
+            <a:srgbClr val="DCFCE7"/>
+          </a:solidFill>
+          <a:ln/>
+        </p:spPr>
+      </p:sp>
+      <p:sp>
+        <p:nvSpPr>
+          <p:cNvPr id="22" name="Text 20"/>
+          <p:cNvSpPr/>
+          <p:nvPr/>
+        </p:nvSpPr>
+        <p:spPr>
+          <a:xfrm>
+            <a:off x="7955280" y="1124712"/>
+            <a:ext cx="658368" cy="228600"/>
+          </a:xfrm>
+          <a:prstGeom prst="rect">
+            <a:avLst/>
+          </a:prstGeom>
+          <a:noFill/>
+          <a:ln/>
+        </p:spPr>
+        <p:txBody>
+          <a:bodyPr wrap="square" lIns="0" tIns="0" rIns="0" bIns="0" rtlCol="0" anchor="ctr"/>
+          <a:lstStyle/>
+          <a:p>
+            <a:pPr algn="ctr" indent="0" marL="0">
+              <a:buNone/>
+            </a:pPr>
+            <a:r>
+              <a:rPr lang="en-US" sz="900" b="1" dirty="0">
+                <a:solidFill>
+                  <a:srgbClr val="16A34A"/>
+                </a:solidFill>
+                <a:latin typeface="Arial" pitchFamily="34" charset="0"/>
+                <a:ea typeface="Arial" pitchFamily="34" charset="-122"/>
+                <a:cs typeface="Arial" pitchFamily="34" charset="-120"/>
+              </a:rPr>
+              <a:t>20件+</a:t>
+            </a:r>
+            <a:endParaRPr lang="en-US" sz="900" dirty="0"/>
+          </a:p>
+        </p:txBody>
+      </p:sp>
+      <p:sp>
+        <p:nvSpPr>
+          <p:cNvPr id="23" name="Text 21"/>
+          <p:cNvSpPr/>
+          <p:nvPr/>
+        </p:nvSpPr>
+        <p:spPr>
+          <a:xfrm>
+            <a:off x="6263640" y="1124712"/>
+            <a:ext cx="1645920" cy="274320"/>
+          </a:xfrm>
+          <a:prstGeom prst="rect">
+            <a:avLst/>
+          </a:prstGeom>
+          <a:noFill/>
+          <a:ln/>
+        </p:spPr>
+        <p:txBody>
+          <a:bodyPr wrap="square" lIns="0" tIns="0" rIns="0" bIns="0" rtlCol="0" anchor="ctr"/>
+          <a:lstStyle/>
+          <a:p>
+            <a:pPr indent="0" marL="0">
+              <a:buNone/>
+            </a:pPr>
+            <a:r>
+              <a:rPr lang="en-US" sz="1300" b="1" dirty="0">
+                <a:solidFill>
+                  <a:srgbClr val="1A2744"/>
+                </a:solidFill>
+                <a:latin typeface="Arial" pitchFamily="34" charset="0"/>
+                <a:ea typeface="Arial" pitchFamily="34" charset="-122"/>
+                <a:cs typeface="Arial" pitchFamily="34" charset="-120"/>
+              </a:rPr>
+              <a:t>スタッフの対応</a:t>
+            </a:r>
+            <a:endParaRPr lang="en-US" sz="1300" dirty="0"/>
+          </a:p>
+        </p:txBody>
+      </p:sp>
+      <p:sp>
+        <p:nvSpPr>
+          <p:cNvPr id="24" name="Text 22"/>
+          <p:cNvSpPr/>
+          <p:nvPr/>
+        </p:nvSpPr>
+        <p:spPr>
+          <a:xfrm>
+            <a:off x="6263640" y="1417320"/>
+            <a:ext cx="2377440" cy="365760"/>
+          </a:xfrm>
+          <a:prstGeom prst="rect">
+            <a:avLst/>
+          </a:prstGeom>
+          <a:noFill/>
+          <a:ln/>
+        </p:spPr>
+        <p:txBody>
+          <a:bodyPr wrap="square" lIns="0" tIns="0" rIns="0" bIns="0" rtlCol="0" anchor="ctr"/>
+          <a:lstStyle/>
+          <a:p>
+            <a:pPr indent="0" marL="0">
+              <a:buNone/>
+            </a:pPr>
+            <a:r>
+              <a:rPr lang="en-US" sz="900" dirty="0">
+                <a:solidFill>
+                  <a:srgbClr val="64748B"/>
+                </a:solidFill>
+                <a:latin typeface="Arial" pitchFamily="34" charset="0"/>
+                <a:ea typeface="Arial" pitchFamily="34" charset="-122"/>
+                <a:cs typeface="Arial" pitchFamily="34" charset="-120"/>
+              </a:rPr>
+              <a:t>フロントの方はとても優しく丁寧で素敵な方でした</a:t>
+            </a:r>
+            <a:endParaRPr lang="en-US" sz="900" dirty="0"/>
+          </a:p>
+        </p:txBody>
+      </p:sp>
+      <p:sp>
+        <p:nvSpPr>
+          <p:cNvPr id="25" name="Text 23"/>
+          <p:cNvSpPr/>
+          <p:nvPr/>
+        </p:nvSpPr>
+        <p:spPr>
+          <a:xfrm>
+            <a:off x="6263640" y="1828800"/>
             <a:ext cx="2377440" cy="640080"/>
           </a:xfrm>
           <a:prstGeom prst="rect">
@@ -11111,13 +11334,13 @@
       </p:sp>
       <p:sp>
         <p:nvSpPr>
-          <p:cNvPr id="19" name="Shape 17"/>
-          <p:cNvSpPr/>
-          <p:nvPr/>
-        </p:nvSpPr>
-        <p:spPr>
-          <a:xfrm>
-            <a:off x="6126480" y="1051560"/>
+          <p:cNvPr id="26" name="Shape 24"/>
+          <p:cNvSpPr/>
+          <p:nvPr/>
+        </p:nvSpPr>
+        <p:spPr>
+          <a:xfrm>
+            <a:off x="457200" y="2880360"/>
             <a:ext cx="2651760" cy="1600200"/>
           </a:xfrm>
           <a:prstGeom prst="rect">
@@ -11138,13 +11361,13 @@
       </p:sp>
       <p:sp>
         <p:nvSpPr>
-          <p:cNvPr id="20" name="Shape 18"/>
-          <p:cNvSpPr/>
-          <p:nvPr/>
-        </p:nvSpPr>
-        <p:spPr>
-          <a:xfrm>
-            <a:off x="6126480" y="1051560"/>
+          <p:cNvPr id="27" name="Shape 25"/>
+          <p:cNvSpPr/>
+          <p:nvPr/>
+        </p:nvSpPr>
+        <p:spPr>
+          <a:xfrm>
+            <a:off x="457200" y="2880360"/>
             <a:ext cx="54864" cy="1600200"/>
           </a:xfrm>
           <a:prstGeom prst="rect">
@@ -11158,13 +11381,13 @@
       </p:sp>
       <p:sp>
         <p:nvSpPr>
-          <p:cNvPr id="21" name="Shape 19"/>
-          <p:cNvSpPr/>
-          <p:nvPr/>
-        </p:nvSpPr>
-        <p:spPr>
-          <a:xfrm>
-            <a:off x="7955280" y="1124712"/>
+          <p:cNvPr id="28" name="Shape 26"/>
+          <p:cNvSpPr/>
+          <p:nvPr/>
+        </p:nvSpPr>
+        <p:spPr>
+          <a:xfrm>
+            <a:off x="2286000" y="2953512"/>
             <a:ext cx="658368" cy="228600"/>
           </a:xfrm>
           <a:prstGeom prst="rect">
@@ -11178,13 +11401,13 @@
       </p:sp>
       <p:sp>
         <p:nvSpPr>
-          <p:cNvPr id="22" name="Text 20"/>
-          <p:cNvSpPr/>
-          <p:nvPr/>
-        </p:nvSpPr>
-        <p:spPr>
-          <a:xfrm>
-            <a:off x="7955280" y="1124712"/>
+          <p:cNvPr id="29" name="Text 27"/>
+          <p:cNvSpPr/>
+          <p:nvPr/>
+        </p:nvSpPr>
+        <p:spPr>
+          <a:xfrm>
+            <a:off x="2286000" y="2953512"/>
             <a:ext cx="658368" cy="228600"/>
           </a:xfrm>
           <a:prstGeom prst="rect">
@@ -11217,13 +11440,13 @@
       </p:sp>
       <p:sp>
         <p:nvSpPr>
-          <p:cNvPr id="23" name="Text 21"/>
-          <p:cNvSpPr/>
-          <p:nvPr/>
-        </p:nvSpPr>
-        <p:spPr>
-          <a:xfrm>
-            <a:off x="6263640" y="1124712"/>
+          <p:cNvPr id="30" name="Text 28"/>
+          <p:cNvSpPr/>
+          <p:nvPr/>
+        </p:nvSpPr>
+        <p:spPr>
+          <a:xfrm>
+            <a:off x="594360" y="2953512"/>
             <a:ext cx="1645920" cy="274320"/>
           </a:xfrm>
           <a:prstGeom prst="rect">
@@ -11248,7 +11471,7 @@
                 <a:ea typeface="Arial" pitchFamily="34" charset="-122"/>
                 <a:cs typeface="Arial" pitchFamily="34" charset="-120"/>
               </a:rPr>
-              <a:t>スタッフの対応</a:t>
+              <a:t>清潔さ・清掃</a:t>
             </a:r>
             <a:endParaRPr lang="en-US" sz="1300" dirty="0"/>
           </a:p>
@@ -11256,13 +11479,13 @@
       </p:sp>
       <p:sp>
         <p:nvSpPr>
-          <p:cNvPr id="24" name="Text 22"/>
-          <p:cNvSpPr/>
-          <p:nvPr/>
-        </p:nvSpPr>
-        <p:spPr>
-          <a:xfrm>
-            <a:off x="6263640" y="1417320"/>
+          <p:cNvPr id="31" name="Text 29"/>
+          <p:cNvSpPr/>
+          <p:nvPr/>
+        </p:nvSpPr>
+        <p:spPr>
+          <a:xfrm>
+            <a:off x="594360" y="3246120"/>
             <a:ext cx="2377440" cy="365760"/>
           </a:xfrm>
           <a:prstGeom prst="rect">
@@ -11287,7 +11510,7 @@
                 <a:ea typeface="Arial" pitchFamily="34" charset="-122"/>
                 <a:cs typeface="Arial" pitchFamily="34" charset="-120"/>
               </a:rPr>
-              <a:t>のようなもので浄水器へ汲みにいかないとだめでした 氷も地下しかありません リネン庫の近くだったからか夜中洗濯機の音...</a:t>
+              <a:t>Everyone was very accommodating and our room was very clean</a:t>
             </a:r>
             <a:endParaRPr lang="en-US" sz="900" dirty="0"/>
           </a:p>
@@ -11295,13 +11518,13 @@
       </p:sp>
       <p:sp>
         <p:nvSpPr>
-          <p:cNvPr id="25" name="Text 23"/>
-          <p:cNvSpPr/>
-          <p:nvPr/>
-        </p:nvSpPr>
-        <p:spPr>
-          <a:xfrm>
-            <a:off x="6263640" y="1828800"/>
+          <p:cNvPr id="32" name="Text 30"/>
+          <p:cNvSpPr/>
+          <p:nvPr/>
+        </p:nvSpPr>
+        <p:spPr>
+          <a:xfrm>
+            <a:off x="594360" y="3657600"/>
             <a:ext cx="2377440" cy="640080"/>
           </a:xfrm>
           <a:prstGeom prst="rect">
@@ -11326,7 +11549,7 @@
                 <a:ea typeface="Arial" pitchFamily="34" charset="-122"/>
                 <a:cs typeface="Arial" pitchFamily="34" charset="-120"/>
               </a:rPr>
-              <a:t>「前回の対応がとても良く今回も絶対に泊まろうと予約しました」</a:t>
+              <a:t>「やはり掃除と清潔感は大切だと思いました」</a:t>
             </a:r>
             <a:endParaRPr lang="en-US" sz="900" dirty="0"/>
           </a:p>
@@ -11334,13 +11557,13 @@
       </p:sp>
       <p:sp>
         <p:nvSpPr>
-          <p:cNvPr id="26" name="Shape 24"/>
-          <p:cNvSpPr/>
-          <p:nvPr/>
-        </p:nvSpPr>
-        <p:spPr>
-          <a:xfrm>
-            <a:off x="457200" y="2880360"/>
+          <p:cNvPr id="33" name="Shape 31"/>
+          <p:cNvSpPr/>
+          <p:nvPr/>
+        </p:nvSpPr>
+        <p:spPr>
+          <a:xfrm>
+            <a:off x="3291840" y="2880360"/>
             <a:ext cx="2651760" cy="1600200"/>
           </a:xfrm>
           <a:prstGeom prst="rect">
@@ -11361,13 +11584,13 @@
       </p:sp>
       <p:sp>
         <p:nvSpPr>
-          <p:cNvPr id="27" name="Shape 25"/>
-          <p:cNvSpPr/>
-          <p:nvPr/>
-        </p:nvSpPr>
-        <p:spPr>
-          <a:xfrm>
-            <a:off x="457200" y="2880360"/>
+          <p:cNvPr id="34" name="Shape 32"/>
+          <p:cNvSpPr/>
+          <p:nvPr/>
+        </p:nvSpPr>
+        <p:spPr>
+          <a:xfrm>
+            <a:off x="3291840" y="2880360"/>
             <a:ext cx="54864" cy="1600200"/>
           </a:xfrm>
           <a:prstGeom prst="rect">
@@ -11381,13 +11604,13 @@
       </p:sp>
       <p:sp>
         <p:nvSpPr>
-          <p:cNvPr id="28" name="Shape 26"/>
-          <p:cNvSpPr/>
-          <p:nvPr/>
-        </p:nvSpPr>
-        <p:spPr>
-          <a:xfrm>
-            <a:off x="2286000" y="2953512"/>
+          <p:cNvPr id="35" name="Shape 33"/>
+          <p:cNvSpPr/>
+          <p:nvPr/>
+        </p:nvSpPr>
+        <p:spPr>
+          <a:xfrm>
+            <a:off x="5120640" y="2953512"/>
             <a:ext cx="658368" cy="228600"/>
           </a:xfrm>
           <a:prstGeom prst="rect">
@@ -11401,13 +11624,13 @@
       </p:sp>
       <p:sp>
         <p:nvSpPr>
-          <p:cNvPr id="29" name="Text 27"/>
-          <p:cNvSpPr/>
-          <p:nvPr/>
-        </p:nvSpPr>
-        <p:spPr>
-          <a:xfrm>
-            <a:off x="2286000" y="2953512"/>
+          <p:cNvPr id="36" name="Text 34"/>
+          <p:cNvSpPr/>
+          <p:nvPr/>
+        </p:nvSpPr>
+        <p:spPr>
+          <a:xfrm>
+            <a:off x="5120640" y="2953512"/>
             <a:ext cx="658368" cy="228600"/>
           </a:xfrm>
           <a:prstGeom prst="rect">
@@ -11440,13 +11663,13 @@
       </p:sp>
       <p:sp>
         <p:nvSpPr>
-          <p:cNvPr id="30" name="Text 28"/>
-          <p:cNvSpPr/>
-          <p:nvPr/>
-        </p:nvSpPr>
-        <p:spPr>
-          <a:xfrm>
-            <a:off x="594360" y="2953512"/>
+          <p:cNvPr id="37" name="Text 35"/>
+          <p:cNvSpPr/>
+          <p:nvPr/>
+        </p:nvSpPr>
+        <p:spPr>
+          <a:xfrm>
+            <a:off x="3429000" y="2953512"/>
             <a:ext cx="1645920" cy="274320"/>
           </a:xfrm>
           <a:prstGeom prst="rect">
@@ -11479,13 +11702,13 @@
       </p:sp>
       <p:sp>
         <p:nvSpPr>
-          <p:cNvPr id="31" name="Text 29"/>
-          <p:cNvSpPr/>
-          <p:nvPr/>
-        </p:nvSpPr>
-        <p:spPr>
-          <a:xfrm>
-            <a:off x="594360" y="3246120"/>
+          <p:cNvPr id="38" name="Text 36"/>
+          <p:cNvSpPr/>
+          <p:nvPr/>
+        </p:nvSpPr>
+        <p:spPr>
+          <a:xfrm>
+            <a:off x="3429000" y="3246120"/>
             <a:ext cx="2377440" cy="365760"/>
           </a:xfrm>
           <a:prstGeom prst="rect">
@@ -11518,13 +11741,13 @@
       </p:sp>
       <p:sp>
         <p:nvSpPr>
-          <p:cNvPr id="32" name="Text 30"/>
-          <p:cNvSpPr/>
-          <p:nvPr/>
-        </p:nvSpPr>
-        <p:spPr>
-          <a:xfrm>
-            <a:off x="594360" y="3657600"/>
+          <p:cNvPr id="39" name="Text 37"/>
+          <p:cNvSpPr/>
+          <p:nvPr/>
+        </p:nvSpPr>
+        <p:spPr>
+          <a:xfrm>
+            <a:off x="3429000" y="3657600"/>
             <a:ext cx="2377440" cy="640080"/>
           </a:xfrm>
           <a:prstGeom prst="rect">
@@ -11550,229 +11773,6 @@
                 <a:cs typeface="Arial" pitchFamily="34" charset="-120"/>
               </a:rPr>
               <a:t>「駅からのアクセスはよかったです  池袋の隣なのに夜は落ち着いてて治安は良さそうでした ホテルに行くまでにコンビニも...」</a:t>
-            </a:r>
-            <a:endParaRPr lang="en-US" sz="900" dirty="0"/>
-          </a:p>
-        </p:txBody>
-      </p:sp>
-      <p:sp>
-        <p:nvSpPr>
-          <p:cNvPr id="33" name="Shape 31"/>
-          <p:cNvSpPr/>
-          <p:nvPr/>
-        </p:nvSpPr>
-        <p:spPr>
-          <a:xfrm>
-            <a:off x="3291840" y="2880360"/>
-            <a:ext cx="2651760" cy="1600200"/>
-          </a:xfrm>
-          <a:prstGeom prst="rect">
-            <a:avLst/>
-          </a:prstGeom>
-          <a:solidFill>
-            <a:srgbClr val="FFFFFF"/>
-          </a:solidFill>
-          <a:ln/>
-          <a:effectLst>
-            <a:outerShdw sx="100000" sy="100000" kx="0" ky="0" algn="bl" rotWithShape="0" blurRad="50800" dist="25400" dir="8100000">
-              <a:srgbClr val="000000">
-                <a:alpha val="10000"/>
-              </a:srgbClr>
-            </a:outerShdw>
-          </a:effectLst>
-        </p:spPr>
-      </p:sp>
-      <p:sp>
-        <p:nvSpPr>
-          <p:cNvPr id="34" name="Shape 32"/>
-          <p:cNvSpPr/>
-          <p:nvPr/>
-        </p:nvSpPr>
-        <p:spPr>
-          <a:xfrm>
-            <a:off x="3291840" y="2880360"/>
-            <a:ext cx="54864" cy="1600200"/>
-          </a:xfrm>
-          <a:prstGeom prst="rect">
-            <a:avLst/>
-          </a:prstGeom>
-          <a:solidFill>
-            <a:srgbClr val="16A34A"/>
-          </a:solidFill>
-          <a:ln/>
-        </p:spPr>
-      </p:sp>
-      <p:sp>
-        <p:nvSpPr>
-          <p:cNvPr id="35" name="Shape 33"/>
-          <p:cNvSpPr/>
-          <p:nvPr/>
-        </p:nvSpPr>
-        <p:spPr>
-          <a:xfrm>
-            <a:off x="5120640" y="2953512"/>
-            <a:ext cx="658368" cy="228600"/>
-          </a:xfrm>
-          <a:prstGeom prst="rect">
-            <a:avLst/>
-          </a:prstGeom>
-          <a:solidFill>
-            <a:srgbClr val="DCFCE7"/>
-          </a:solidFill>
-          <a:ln/>
-        </p:spPr>
-      </p:sp>
-      <p:sp>
-        <p:nvSpPr>
-          <p:cNvPr id="36" name="Text 34"/>
-          <p:cNvSpPr/>
-          <p:nvPr/>
-        </p:nvSpPr>
-        <p:spPr>
-          <a:xfrm>
-            <a:off x="5120640" y="2953512"/>
-            <a:ext cx="658368" cy="228600"/>
-          </a:xfrm>
-          <a:prstGeom prst="rect">
-            <a:avLst/>
-          </a:prstGeom>
-          <a:noFill/>
-          <a:ln/>
-        </p:spPr>
-        <p:txBody>
-          <a:bodyPr wrap="square" lIns="0" tIns="0" rIns="0" bIns="0" rtlCol="0" anchor="ctr"/>
-          <a:lstStyle/>
-          <a:p>
-            <a:pPr algn="ctr" indent="0" marL="0">
-              <a:buNone/>
-            </a:pPr>
-            <a:r>
-              <a:rPr lang="en-US" sz="900" b="1" dirty="0">
-                <a:solidFill>
-                  <a:srgbClr val="16A34A"/>
-                </a:solidFill>
-                <a:latin typeface="Arial" pitchFamily="34" charset="0"/>
-                <a:ea typeface="Arial" pitchFamily="34" charset="-122"/>
-                <a:cs typeface="Arial" pitchFamily="34" charset="-120"/>
-              </a:rPr>
-              <a:t>20件+</a:t>
-            </a:r>
-            <a:endParaRPr lang="en-US" sz="900" dirty="0"/>
-          </a:p>
-        </p:txBody>
-      </p:sp>
-      <p:sp>
-        <p:nvSpPr>
-          <p:cNvPr id="37" name="Text 35"/>
-          <p:cNvSpPr/>
-          <p:nvPr/>
-        </p:nvSpPr>
-        <p:spPr>
-          <a:xfrm>
-            <a:off x="3429000" y="2953512"/>
-            <a:ext cx="1645920" cy="274320"/>
-          </a:xfrm>
-          <a:prstGeom prst="rect">
-            <a:avLst/>
-          </a:prstGeom>
-          <a:noFill/>
-          <a:ln/>
-        </p:spPr>
-        <p:txBody>
-          <a:bodyPr wrap="square" lIns="0" tIns="0" rIns="0" bIns="0" rtlCol="0" anchor="ctr"/>
-          <a:lstStyle/>
-          <a:p>
-            <a:pPr indent="0" marL="0">
-              <a:buNone/>
-            </a:pPr>
-            <a:r>
-              <a:rPr lang="en-US" sz="1300" b="1" dirty="0">
-                <a:solidFill>
-                  <a:srgbClr val="1A2744"/>
-                </a:solidFill>
-                <a:latin typeface="Arial" pitchFamily="34" charset="0"/>
-                <a:ea typeface="Arial" pitchFamily="34" charset="-122"/>
-                <a:cs typeface="Arial" pitchFamily="34" charset="-120"/>
-              </a:rPr>
-              <a:t>清潔さ・清掃</a:t>
-            </a:r>
-            <a:endParaRPr lang="en-US" sz="1300" dirty="0"/>
-          </a:p>
-        </p:txBody>
-      </p:sp>
-      <p:sp>
-        <p:nvSpPr>
-          <p:cNvPr id="38" name="Text 36"/>
-          <p:cNvSpPr/>
-          <p:nvPr/>
-        </p:nvSpPr>
-        <p:spPr>
-          <a:xfrm>
-            <a:off x="3429000" y="3246120"/>
-            <a:ext cx="2377440" cy="365760"/>
-          </a:xfrm>
-          <a:prstGeom prst="rect">
-            <a:avLst/>
-          </a:prstGeom>
-          <a:noFill/>
-          <a:ln/>
-        </p:spPr>
-        <p:txBody>
-          <a:bodyPr wrap="square" lIns="0" tIns="0" rIns="0" bIns="0" rtlCol="0" anchor="ctr"/>
-          <a:lstStyle/>
-          <a:p>
-            <a:pPr indent="0" marL="0">
-              <a:buNone/>
-            </a:pPr>
-            <a:r>
-              <a:rPr lang="en-US" sz="900" dirty="0">
-                <a:solidFill>
-                  <a:srgbClr val="64748B"/>
-                </a:solidFill>
-                <a:latin typeface="Arial" pitchFamily="34" charset="0"/>
-                <a:ea typeface="Arial" pitchFamily="34" charset="-122"/>
-                <a:cs typeface="Arial" pitchFamily="34" charset="-120"/>
-              </a:rPr>
-              <a:t>独立のお風呂も広く清潔で、手足を伸ばしてゆったり浸かることができ、旅の疲れを癒すことができました</a:t>
-            </a:r>
-            <a:endParaRPr lang="en-US" sz="900" dirty="0"/>
-          </a:p>
-        </p:txBody>
-      </p:sp>
-      <p:sp>
-        <p:nvSpPr>
-          <p:cNvPr id="39" name="Text 37"/>
-          <p:cNvSpPr/>
-          <p:nvPr/>
-        </p:nvSpPr>
-        <p:spPr>
-          <a:xfrm>
-            <a:off x="3429000" y="3657600"/>
-            <a:ext cx="2377440" cy="640080"/>
-          </a:xfrm>
-          <a:prstGeom prst="rect">
-            <a:avLst/>
-          </a:prstGeom>
-          <a:noFill/>
-          <a:ln/>
-        </p:spPr>
-        <p:txBody>
-          <a:bodyPr wrap="square" lIns="0" tIns="0" rIns="0" bIns="0" rtlCol="0" anchor="ctr"/>
-          <a:lstStyle/>
-          <a:p>
-            <a:pPr indent="0" marL="0">
-              <a:buNone/>
-            </a:pPr>
-            <a:r>
-              <a:rPr lang="en-US" sz="900" i="1" dirty="0">
-                <a:solidFill>
-                  <a:srgbClr val="3B7DD8"/>
-                </a:solidFill>
-                <a:latin typeface="Arial" pitchFamily="34" charset="0"/>
-                <a:ea typeface="Arial" pitchFamily="34" charset="-122"/>
-                <a:cs typeface="Arial" pitchFamily="34" charset="-120"/>
-              </a:rPr>
-              <a:t>「古さのためか清掃にも限界があるように感じた」</a:t>
             </a:r>
             <a:endParaRPr lang="en-US" sz="900" dirty="0"/>
           </a:p>
@@ -12685,7 +12685,7 @@
                           <a:ea typeface="Arial" pitchFamily="34" charset="-122"/>
                           <a:cs typeface="Arial" pitchFamily="34" charset="-120"/>
                         </a:rPr>
-                        <a:t>Amenities like toiletries and room supplies will be provi...</a:t>
+                        <a:t>2泊しましたが、1日目にシャワーを使用したら水がどんどん浴槽に溜まり、排水されなくひたすら溜まり続けて気持ち悪かったです</a:t>
                       </a:r>
                       <a:endParaRPr lang="en-US" sz="900" dirty="0">
                         <a:latin typeface="Arial" charset="0"/>
@@ -12753,7 +12753,7 @@
                           <a:ea typeface="Arial" pitchFamily="34" charset="-122"/>
                           <a:cs typeface="Arial" pitchFamily="34" charset="-120"/>
                         </a:rPr>
-                        <a:t>19件</a:t>
+                        <a:t>20件</a:t>
                       </a:r>
                       <a:endParaRPr lang="en-US" sz="900" dirty="0">
                         <a:latin typeface="Arial" charset="0"/>
@@ -12959,7 +12959,7 @@
                           <a:ea typeface="Arial" pitchFamily="34" charset="-122"/>
                           <a:cs typeface="Arial" pitchFamily="34" charset="-120"/>
                         </a:rPr>
-                        <a:t>Very good location, nice room, but the window is blocked ...</a:t>
+                        <a:t>Everyone was very accommodating and our room was very clean</a:t>
                       </a:r>
                       <a:endParaRPr lang="en-US" sz="900" dirty="0">
                         <a:latin typeface="Arial" charset="0"/>
@@ -13027,7 +13027,7 @@
                           <a:ea typeface="Arial" pitchFamily="34" charset="-122"/>
                           <a:cs typeface="Arial" pitchFamily="34" charset="-120"/>
                         </a:rPr>
-                        <a:t>15件</a:t>
+                        <a:t>17件</a:t>
                       </a:r>
                       <a:endParaRPr lang="en-US" sz="900" dirty="0">
                         <a:latin typeface="Arial" charset="0"/>
@@ -13781,7 +13781,7 @@
                           <a:ea typeface="Arial" pitchFamily="34" charset="-122"/>
                           <a:cs typeface="Arial" pitchFamily="34" charset="-120"/>
                         </a:rPr>
-                        <a:t>1 ヴィラツインをトリプル利用 1階フロント横のお部屋だったのでアクセスが楽だった ソファ、テーブルx2、小さい椅...</a:t>
+                        <a:t>間違えてツインを予約してしまい、ベッドが狭く残念でしたが自分のミスなのでそれは仕方ないですね</a:t>
                       </a:r>
                       <a:endParaRPr lang="en-US" sz="900" dirty="0">
                         <a:latin typeface="Arial" charset="0"/>
@@ -13849,7 +13849,7 @@
                           <a:ea typeface="Arial" pitchFamily="34" charset="-122"/>
                           <a:cs typeface="Arial" pitchFamily="34" charset="-120"/>
                         </a:rPr>
-                        <a:t>6件</a:t>
+                        <a:t>7件</a:t>
                       </a:r>
                       <a:endParaRPr lang="en-US" sz="900" dirty="0">
                         <a:latin typeface="Arial" charset="0"/>

--- a/納品レポート/ホテル別レポート/richmond_mejiro_口コミ分析レポート.pptx
+++ b/納品レポート/ホテル別レポート/richmond_mejiro_口コミ分析レポート.pptx
@@ -220,7 +220,7 @@
                   <c:v>8.67</c:v>
                 </c:pt>
                 <c:pt idx="4">
-                  <c:v>8.4</c:v>
+                  <c:v>8.55</c:v>
                 </c:pt>
                 <c:pt idx="5">
                   <c:v>7.81</c:v>
@@ -566,7 +566,7 @@
               <c:numCache>
                 <c:ptCount val="3"/>
                 <c:pt idx="0">
-                  <c:v>107</c:v>
+                  <c:v>109</c:v>
                 </c:pt>
                 <c:pt idx="1">
                   <c:v>15</c:v>
@@ -823,7 +823,7 @@
                 <c:formatCode>General</c:formatCode>
                 <c:ptCount val="9"/>
                 <c:pt idx="0">
-                  <c:v>56</c:v>
+                  <c:v>58</c:v>
                 </c:pt>
                 <c:pt idx="1">
                   <c:v>12</c:v>
@@ -2798,7 +2798,7 @@
                 <a:ea typeface="Arial" pitchFamily="34" charset="-122"/>
                 <a:cs typeface="Arial" pitchFamily="34" charset="-120"/>
               </a:rPr>
-              <a:t>レビュー総数：125件（6サイト）</a:t>
+              <a:t>レビュー総数：127件（6サイト）</a:t>
             </a:r>
             <a:endParaRPr lang="en-US" sz="1000" dirty="0"/>
           </a:p>
@@ -2818,7 +2818,7 @@
                 <a:ea typeface="Arial" pitchFamily="34" charset="-122"/>
                 <a:cs typeface="Arial" pitchFamily="34" charset="-120"/>
               </a:rPr>
-              <a:t>作成日：2026年3月20日</a:t>
+              <a:t>作成日：2026年3月21日</a:t>
             </a:r>
             <a:endParaRPr lang="en-US" sz="1000" dirty="0"/>
           </a:p>
@@ -3364,7 +3364,7 @@
                           <a:ea typeface="Arial" pitchFamily="34" charset="-122"/>
                           <a:cs typeface="Arial" pitchFamily="34" charset="-120"/>
                         </a:rPr>
-                        <a:t>8.66点</a:t>
+                        <a:t>8.69点</a:t>
                       </a:r>
                       <a:endParaRPr lang="en-US" sz="1000" dirty="0">
                         <a:latin typeface="Arial" charset="0"/>
@@ -3638,7 +3638,7 @@
                           <a:ea typeface="Arial" pitchFamily="34" charset="-122"/>
                           <a:cs typeface="Arial" pitchFamily="34" charset="-120"/>
                         </a:rPr>
-                        <a:t>85.6%</a:t>
+                        <a:t>85.8%</a:t>
                       </a:r>
                       <a:endParaRPr lang="en-US" sz="1000" dirty="0">
                         <a:latin typeface="Arial" charset="0"/>
@@ -4734,7 +4734,7 @@
                           <a:ea typeface="Arial" pitchFamily="34" charset="-122"/>
                           <a:cs typeface="Arial" pitchFamily="34" charset="-120"/>
                         </a:rPr>
-                        <a:t>約20件/期間</a:t>
+                        <a:t>約21件/期間</a:t>
                       </a:r>
                       <a:endParaRPr lang="en-US" sz="1000" dirty="0">
                         <a:latin typeface="Arial" charset="0"/>
@@ -5373,7 +5373,7 @@
                 <a:ea typeface="Arial" pitchFamily="34" charset="-122"/>
                 <a:cs typeface="Arial" pitchFamily="34" charset="-120"/>
               </a:rPr>
-              <a:t>8.66</a:t>
+              <a:t>8.69</a:t>
             </a:r>
             <a:endParaRPr lang="en-US" sz="3200" dirty="0"/>
           </a:p>
@@ -5498,7 +5498,7 @@
                 <a:ea typeface="Arial" pitchFamily="34" charset="-122"/>
                 <a:cs typeface="Arial" pitchFamily="34" charset="-120"/>
               </a:rPr>
-              <a:t>85.6%</a:t>
+              <a:t>85.8%</a:t>
             </a:r>
             <a:endParaRPr lang="en-US" sz="3200" dirty="0"/>
           </a:p>
@@ -5748,7 +5748,7 @@
                 <a:ea typeface="Arial" pitchFamily="34" charset="-122"/>
                 <a:cs typeface="Arial" pitchFamily="34" charset="-120"/>
               </a:rPr>
-              <a:t>125件</a:t>
+              <a:t>127件</a:t>
             </a:r>
             <a:endParaRPr lang="en-US" sz="3200" dirty="0"/>
           </a:p>
@@ -5936,7 +5936,7 @@
                 <a:ea typeface="Arial" pitchFamily="34" charset="-122"/>
                 <a:cs typeface="Arial" pitchFamily="34" charset="-120"/>
               </a:rPr>
-              <a:t>  以前宿泊した際、駅から近くお部屋も広々としていて綺麗でベッドも広くて是非また泊まりたいと思いリピートしました</a:t>
+              <a:t>  ガストでのウェルカムドリンクもお部屋に持って行けて、紅茶やフェイスマスクなどのアメニティも充実していて、嬉しいです</a:t>
             </a:r>
             <a:endParaRPr lang="en-US" sz="1100" dirty="0"/>
           </a:p>
@@ -5976,7 +5976,7 @@
                 <a:ea typeface="Arial" pitchFamily="34" charset="-122"/>
                 <a:cs typeface="Arial" pitchFamily="34" charset="-120"/>
               </a:rPr>
-              <a:t>  フロントの方はとても優しく丁寧で素敵な方でした</a:t>
+              <a:t>  スタッフさんの対応も事務的でなく安心感がありました</a:t>
             </a:r>
             <a:endParaRPr lang="en-US" sz="1100" dirty="0"/>
           </a:p>
@@ -6124,7 +6124,7 @@
                 <a:ea typeface="Arial" pitchFamily="34" charset="-122"/>
                 <a:cs typeface="Arial" pitchFamily="34" charset="-120"/>
               </a:rPr>
-              <a:t>  2泊しましたが、1日目にシャワーを使用したら水がどんどん浴槽に溜まり、排水されなくひたすら溜まり続けて気持ち悪かったです</a:t>
+              <a:t>  壁、エレベーターの内装が綺麗、 お部屋も浴室もチェックアウト時間もゆったりしていて、気分よく過ごせました</a:t>
             </a:r>
             <a:endParaRPr lang="en-US" sz="1100" dirty="0"/>
           </a:p>
@@ -6557,7 +6557,7 @@
                 <a:ea typeface="Arial" pitchFamily="34" charset="-122"/>
                 <a:cs typeface="Arial" pitchFamily="34" charset="-120"/>
               </a:rPr>
-              <a:t>8.66</a:t>
+              <a:t>8.69</a:t>
             </a:r>
             <a:endParaRPr lang="en-US" sz="3200" dirty="0"/>
           </a:p>
@@ -6682,7 +6682,7 @@
                 <a:ea typeface="Arial" pitchFamily="34" charset="-122"/>
                 <a:cs typeface="Arial" pitchFamily="34" charset="-120"/>
               </a:rPr>
-              <a:t>85.6%</a:t>
+              <a:t>85.8%</a:t>
             </a:r>
             <a:endParaRPr lang="en-US" sz="3200" dirty="0"/>
           </a:p>
@@ -6932,7 +6932,7 @@
                 <a:ea typeface="Arial" pitchFamily="34" charset="-122"/>
                 <a:cs typeface="Arial" pitchFamily="34" charset="-120"/>
               </a:rPr>
-              <a:t>125件</a:t>
+              <a:t>127件</a:t>
             </a:r>
             <a:endParaRPr lang="en-US" sz="3200" dirty="0"/>
           </a:p>
@@ -9279,7 +9279,7 @@
                           <a:ea typeface="Arial" pitchFamily="34" charset="-122"/>
                           <a:cs typeface="Arial" pitchFamily="34" charset="-120"/>
                         </a:rPr>
-                        <a:t>20</a:t>
+                        <a:t>22</a:t>
                       </a:r>
                       <a:endParaRPr lang="en-US" sz="900" dirty="0">
                         <a:latin typeface="Arial" charset="0"/>
@@ -9347,7 +9347,7 @@
                           <a:ea typeface="Arial" pitchFamily="34" charset="-122"/>
                           <a:cs typeface="Arial" pitchFamily="34" charset="-120"/>
                         </a:rPr>
-                        <a:t>4.2</a:t>
+                        <a:t>4.27</a:t>
                       </a:r>
                       <a:endParaRPr lang="en-US" sz="900" dirty="0">
                         <a:latin typeface="Arial" charset="0"/>
@@ -9483,7 +9483,7 @@
                           <a:ea typeface="Arial" pitchFamily="34" charset="-122"/>
                           <a:cs typeface="Arial" pitchFamily="34" charset="-120"/>
                         </a:rPr>
-                        <a:t>8.4</a:t>
+                        <a:t>8.55</a:t>
                       </a:r>
                       <a:endParaRPr lang="en-US" sz="900" dirty="0">
                         <a:latin typeface="Arial" charset="0"/>
@@ -10233,7 +10233,7 @@
                 <a:ea typeface="Arial" pitchFamily="34" charset="-122"/>
                 <a:cs typeface="Arial" pitchFamily="34" charset="-120"/>
               </a:rPr>
-              <a:t>107件（85.6%）</a:t>
+              <a:t>109件（85.8%）</a:t>
             </a:r>
             <a:endParaRPr lang="en-US" sz="1100" dirty="0"/>
           </a:p>
@@ -10331,7 +10331,7 @@
                 <a:ea typeface="Arial" pitchFamily="34" charset="-122"/>
                 <a:cs typeface="Arial" pitchFamily="34" charset="-120"/>
               </a:rPr>
-              <a:t>15件（12.0%）</a:t>
+              <a:t>15件（11.8%）</a:t>
             </a:r>
             <a:endParaRPr lang="en-US" sz="1100" dirty="0"/>
           </a:p>
@@ -10986,7 +10986,7 @@
                 <a:ea typeface="Arial" pitchFamily="34" charset="-122"/>
                 <a:cs typeface="Arial" pitchFamily="34" charset="-120"/>
               </a:rPr>
-              <a:t>20件+</a:t>
+              <a:t>50件+</a:t>
             </a:r>
             <a:endParaRPr lang="en-US" sz="900" dirty="0"/>
           </a:p>
@@ -11064,7 +11064,7 @@
                 <a:ea typeface="Arial" pitchFamily="34" charset="-122"/>
                 <a:cs typeface="Arial" pitchFamily="34" charset="-120"/>
               </a:rPr>
-              <a:t>以前宿泊した際、駅から近くお部屋も広々としていて綺麗でベッドも広くて是非また泊まりたいと思いリピートしました</a:t>
+              <a:t>ガストでのウェルカムドリンクもお部屋に持って行けて、紅茶やフェイスマスクなどのアメニティも充実していて、嬉しいです</a:t>
             </a:r>
             <a:endParaRPr lang="en-US" sz="900" dirty="0"/>
           </a:p>
@@ -11103,7 +11103,7 @@
                 <a:ea typeface="Arial" pitchFamily="34" charset="-122"/>
                 <a:cs typeface="Arial" pitchFamily="34" charset="-120"/>
               </a:rPr>
-              <a:t>「รร ดี ห้องพักดี อุปกรณ์ครบ เดินทางสะดวกด้วย JR Yamanote l...」</a:t>
+              <a:t>「滞在中は快適に過ごすことが出来ありがとうございました☺︎ アメニティが充実していて嬉しかったです」</a:t>
             </a:r>
             <a:endParaRPr lang="en-US" sz="900" dirty="0"/>
           </a:p>
@@ -11287,7 +11287,7 @@
                 <a:ea typeface="Arial" pitchFamily="34" charset="-122"/>
                 <a:cs typeface="Arial" pitchFamily="34" charset="-120"/>
               </a:rPr>
-              <a:t>フロントの方はとても優しく丁寧で素敵な方でした</a:t>
+              <a:t>スタッフさんの対応も事務的でなく安心感がありました</a:t>
             </a:r>
             <a:endParaRPr lang="en-US" sz="900" dirty="0"/>
           </a:p>
@@ -11326,7 +11326,7 @@
                 <a:ea typeface="Arial" pitchFamily="34" charset="-122"/>
                 <a:cs typeface="Arial" pitchFamily="34" charset="-120"/>
               </a:rPr>
-              <a:t>「のようなもので浄水器へ汲みにいかないとだめでした 氷も地下しかありません リネン庫の近くだったからか夜中洗濯機の音...」</a:t>
+              <a:t>「フロントの方はとても優しく丁寧で素敵な方でした」</a:t>
             </a:r>
             <a:endParaRPr lang="en-US" sz="900" dirty="0"/>
           </a:p>
@@ -11510,7 +11510,7 @@
                 <a:ea typeface="Arial" pitchFamily="34" charset="-122"/>
                 <a:cs typeface="Arial" pitchFamily="34" charset="-120"/>
               </a:rPr>
-              <a:t>Everyone was very accommodating and our room was very clean</a:t>
+              <a:t>壁、エレベーターの内装が綺麗、 お部屋も浴室もチェックアウト時間もゆったりしていて、気分よく過ごせました</a:t>
             </a:r>
             <a:endParaRPr lang="en-US" sz="900" dirty="0"/>
           </a:p>
@@ -11549,7 +11549,7 @@
                 <a:ea typeface="Arial" pitchFamily="34" charset="-122"/>
                 <a:cs typeface="Arial" pitchFamily="34" charset="-120"/>
               </a:rPr>
-              <a:t>「やはり掃除と清潔感は大切だと思いました」</a:t>
+              <a:t>「Everyone was very accommodating and our room was very clean」</a:t>
             </a:r>
             <a:endParaRPr lang="en-US" sz="900" dirty="0"/>
           </a:p>
@@ -12685,7 +12685,7 @@
                           <a:ea typeface="Arial" pitchFamily="34" charset="-122"/>
                           <a:cs typeface="Arial" pitchFamily="34" charset="-120"/>
                         </a:rPr>
-                        <a:t>2泊しましたが、1日目にシャワーを使用したら水がどんどん浴槽に溜まり、排水されなくひたすら溜まり続けて気持ち悪かったです</a:t>
+                        <a:t>壁、エレベーターの内装が綺麗、 お部屋も浴室もチェックアウト時間もゆったりしていて、気分よく過ごせました</a:t>
                       </a:r>
                       <a:endParaRPr lang="en-US" sz="900" dirty="0">
                         <a:latin typeface="Arial" charset="0"/>
@@ -12753,7 +12753,7 @@
                           <a:ea typeface="Arial" pitchFamily="34" charset="-122"/>
                           <a:cs typeface="Arial" pitchFamily="34" charset="-120"/>
                         </a:rPr>
-                        <a:t>20件</a:t>
+                        <a:t>21件</a:t>
                       </a:r>
                       <a:endParaRPr lang="en-US" sz="900" dirty="0">
                         <a:latin typeface="Arial" charset="0"/>

--- a/納品レポート/ホテル別レポート/richmond_mejiro_口コミ分析レポート.pptx
+++ b/納品レポート/ホテル別レポート/richmond_mejiro_口コミ分析レポート.pptx
@@ -208,7 +208,7 @@
                 <c:formatCode>General</c:formatCode>
                 <c:ptCount val="6"/>
                 <c:pt idx="0">
-                  <c:v>9.3</c:v>
+                  <c:v>9.32</c:v>
                 </c:pt>
                 <c:pt idx="1">
                   <c:v>9.2</c:v>
@@ -220,10 +220,10 @@
                   <c:v>8.67</c:v>
                 </c:pt>
                 <c:pt idx="4">
-                  <c:v>8.55</c:v>
+                  <c:v>8.52</c:v>
                 </c:pt>
                 <c:pt idx="5">
-                  <c:v>7.81</c:v>
+                  <c:v>7.82</c:v>
                 </c:pt>
               </c:numCache>
             </c:numRef>
@@ -566,7 +566,7 @@
               <c:numCache>
                 <c:ptCount val="3"/>
                 <c:pt idx="0">
-                  <c:v>109</c:v>
+                  <c:v>112</c:v>
                 </c:pt>
                 <c:pt idx="1">
                   <c:v>15</c:v>
@@ -823,13 +823,13 @@
                 <c:formatCode>General</c:formatCode>
                 <c:ptCount val="9"/>
                 <c:pt idx="0">
-                  <c:v>58</c:v>
+                  <c:v>59</c:v>
                 </c:pt>
                 <c:pt idx="1">
                   <c:v>12</c:v>
                 </c:pt>
                 <c:pt idx="2">
-                  <c:v>39</c:v>
+                  <c:v>41</c:v>
                 </c:pt>
                 <c:pt idx="3">
                   <c:v>7</c:v>
@@ -2798,7 +2798,7 @@
                 <a:ea typeface="Arial" pitchFamily="34" charset="-122"/>
                 <a:cs typeface="Arial" pitchFamily="34" charset="-120"/>
               </a:rPr>
-              <a:t>レビュー総数：127件（6サイト）</a:t>
+              <a:t>レビュー総数：130件（6サイト）</a:t>
             </a:r>
             <a:endParaRPr lang="en-US" sz="1000" dirty="0"/>
           </a:p>
@@ -2818,7 +2818,7 @@
                 <a:ea typeface="Arial" pitchFamily="34" charset="-122"/>
                 <a:cs typeface="Arial" pitchFamily="34" charset="-120"/>
               </a:rPr>
-              <a:t>作成日：2026年3月21日</a:t>
+              <a:t>作成日：2026年3月23日</a:t>
             </a:r>
             <a:endParaRPr lang="en-US" sz="1000" dirty="0"/>
           </a:p>
@@ -3364,7 +3364,7 @@
                           <a:ea typeface="Arial" pitchFamily="34" charset="-122"/>
                           <a:cs typeface="Arial" pitchFamily="34" charset="-120"/>
                         </a:rPr>
-                        <a:t>8.69点</a:t>
+                        <a:t>8.68点</a:t>
                       </a:r>
                       <a:endParaRPr lang="en-US" sz="1000" dirty="0">
                         <a:latin typeface="Arial" charset="0"/>
@@ -3638,7 +3638,7 @@
                           <a:ea typeface="Arial" pitchFamily="34" charset="-122"/>
                           <a:cs typeface="Arial" pitchFamily="34" charset="-120"/>
                         </a:rPr>
-                        <a:t>85.8%</a:t>
+                        <a:t>86.2%</a:t>
                       </a:r>
                       <a:endParaRPr lang="en-US" sz="1000" dirty="0">
                         <a:latin typeface="Arial" charset="0"/>
@@ -3912,7 +3912,7 @@
                           <a:ea typeface="Arial" pitchFamily="34" charset="-122"/>
                           <a:cs typeface="Arial" pitchFamily="34" charset="-120"/>
                         </a:rPr>
-                        <a:t>2.4%</a:t>
+                        <a:t>2.3%</a:t>
                       </a:r>
                       <a:endParaRPr lang="en-US" sz="1000" dirty="0">
                         <a:latin typeface="Arial" charset="0"/>
@@ -5373,7 +5373,7 @@
                 <a:ea typeface="Arial" pitchFamily="34" charset="-122"/>
                 <a:cs typeface="Arial" pitchFamily="34" charset="-120"/>
               </a:rPr>
-              <a:t>8.69</a:t>
+              <a:t>8.68</a:t>
             </a:r>
             <a:endParaRPr lang="en-US" sz="3200" dirty="0"/>
           </a:p>
@@ -5498,7 +5498,7 @@
                 <a:ea typeface="Arial" pitchFamily="34" charset="-122"/>
                 <a:cs typeface="Arial" pitchFamily="34" charset="-120"/>
               </a:rPr>
-              <a:t>85.8%</a:t>
+              <a:t>86.2%</a:t>
             </a:r>
             <a:endParaRPr lang="en-US" sz="3200" dirty="0"/>
           </a:p>
@@ -5623,7 +5623,7 @@
                 <a:ea typeface="Arial" pitchFamily="34" charset="-122"/>
                 <a:cs typeface="Arial" pitchFamily="34" charset="-120"/>
               </a:rPr>
-              <a:t>2.4%</a:t>
+              <a:t>2.3%</a:t>
             </a:r>
             <a:endParaRPr lang="en-US" sz="3200" dirty="0"/>
           </a:p>
@@ -5748,7 +5748,7 @@
                 <a:ea typeface="Arial" pitchFamily="34" charset="-122"/>
                 <a:cs typeface="Arial" pitchFamily="34" charset="-120"/>
               </a:rPr>
-              <a:t>127件</a:t>
+              <a:t>130件</a:t>
             </a:r>
             <a:endParaRPr lang="en-US" sz="3200" dirty="0"/>
           </a:p>
@@ -5936,7 +5936,7 @@
                 <a:ea typeface="Arial" pitchFamily="34" charset="-122"/>
                 <a:cs typeface="Arial" pitchFamily="34" charset="-120"/>
               </a:rPr>
-              <a:t>  ガストでのウェルカムドリンクもお部屋に持って行けて、紅茶やフェイスマスクなどのアメニティも充実していて、嬉しいです</a:t>
+              <a:t>  Tout un panel d'équipements mis a disposition des clients...</a:t>
             </a:r>
             <a:endParaRPr lang="en-US" sz="1100" dirty="0"/>
           </a:p>
@@ -5976,7 +5976,7 @@
                 <a:ea typeface="Arial" pitchFamily="34" charset="-122"/>
                 <a:cs typeface="Arial" pitchFamily="34" charset="-120"/>
               </a:rPr>
-              <a:t>  スタッフさんの対応も事務的でなく安心感がありました</a:t>
+              <a:t>  ホテルのスタッフの皆様に心より感謝申し上げます</a:t>
             </a:r>
             <a:endParaRPr lang="en-US" sz="1100" dirty="0"/>
           </a:p>
@@ -6124,7 +6124,7 @@
                 <a:ea typeface="Arial" pitchFamily="34" charset="-122"/>
                 <a:cs typeface="Arial" pitchFamily="34" charset="-120"/>
               </a:rPr>
-              <a:t>  壁、エレベーターの内装が綺麗、 お部屋も浴室もチェックアウト時間もゆったりしていて、気分よく過ごせました</a:t>
+              <a:t>  La suite était très grande et la douche et les toilettes ...</a:t>
             </a:r>
             <a:endParaRPr lang="en-US" sz="1100" dirty="0"/>
           </a:p>
@@ -6164,7 +6164,7 @@
                 <a:ea typeface="Arial" pitchFamily="34" charset="-122"/>
                 <a:cs typeface="Arial" pitchFamily="34" charset="-120"/>
               </a:rPr>
-              <a:t>  Everyone was very accommodating and our room was very clean</a:t>
+              <a:t>  L'emplacement nous a permis de rayonner dans Tokyo très f...</a:t>
             </a:r>
             <a:endParaRPr lang="en-US" sz="1100" dirty="0"/>
           </a:p>
@@ -6557,7 +6557,7 @@
                 <a:ea typeface="Arial" pitchFamily="34" charset="-122"/>
                 <a:cs typeface="Arial" pitchFamily="34" charset="-120"/>
               </a:rPr>
-              <a:t>8.69</a:t>
+              <a:t>8.68</a:t>
             </a:r>
             <a:endParaRPr lang="en-US" sz="3200" dirty="0"/>
           </a:p>
@@ -6682,7 +6682,7 @@
                 <a:ea typeface="Arial" pitchFamily="34" charset="-122"/>
                 <a:cs typeface="Arial" pitchFamily="34" charset="-120"/>
               </a:rPr>
-              <a:t>85.8%</a:t>
+              <a:t>86.2%</a:t>
             </a:r>
             <a:endParaRPr lang="en-US" sz="3200" dirty="0"/>
           </a:p>
@@ -6807,7 +6807,7 @@
                 <a:ea typeface="Arial" pitchFamily="34" charset="-122"/>
                 <a:cs typeface="Arial" pitchFamily="34" charset="-120"/>
               </a:rPr>
-              <a:t>2.4%</a:t>
+              <a:t>2.3%</a:t>
             </a:r>
             <a:endParaRPr lang="en-US" sz="3200" dirty="0"/>
           </a:p>
@@ -6932,7 +6932,7 @@
                 <a:ea typeface="Arial" pitchFamily="34" charset="-122"/>
                 <a:cs typeface="Arial" pitchFamily="34" charset="-120"/>
               </a:rPr>
-              <a:t>127件</a:t>
+              <a:t>130件</a:t>
             </a:r>
             <a:endParaRPr lang="en-US" sz="3200" dirty="0"/>
           </a:p>
@@ -7353,7 +7353,7 @@
                 <a:ea typeface="Arial" pitchFamily="34" charset="-122"/>
                 <a:cs typeface="Arial" pitchFamily="34" charset="-120"/>
               </a:rPr>
-              <a:t>Trip.com(9.30)が最高スコア。</a:t>
+              <a:t>Trip.com(9.32)が最高スコア。</a:t>
             </a:r>
             <a:endParaRPr lang="en-US" sz="1100" dirty="0"/>
           </a:p>
@@ -7911,7 +7911,7 @@
                           <a:ea typeface="Arial" pitchFamily="34" charset="-122"/>
                           <a:cs typeface="Arial" pitchFamily="34" charset="-120"/>
                         </a:rPr>
-                        <a:t>27</a:t>
+                        <a:t>28</a:t>
                       </a:r>
                       <a:endParaRPr lang="en-US" sz="900" dirty="0">
                         <a:latin typeface="Arial" charset="0"/>
@@ -7979,7 +7979,7 @@
                           <a:ea typeface="Arial" pitchFamily="34" charset="-122"/>
                           <a:cs typeface="Arial" pitchFamily="34" charset="-120"/>
                         </a:rPr>
-                        <a:t>9.3</a:t>
+                        <a:t>9.32</a:t>
                       </a:r>
                       <a:endParaRPr lang="en-US" sz="900" dirty="0">
                         <a:latin typeface="Arial" charset="0"/>
@@ -8115,7 +8115,7 @@
                           <a:ea typeface="Arial" pitchFamily="34" charset="-122"/>
                           <a:cs typeface="Arial" pitchFamily="34" charset="-120"/>
                         </a:rPr>
-                        <a:t>9.3</a:t>
+                        <a:t>9.32</a:t>
                       </a:r>
                       <a:endParaRPr lang="en-US" sz="900" dirty="0">
                         <a:latin typeface="Arial" charset="0"/>
@@ -9279,7 +9279,7 @@
                           <a:ea typeface="Arial" pitchFamily="34" charset="-122"/>
                           <a:cs typeface="Arial" pitchFamily="34" charset="-120"/>
                         </a:rPr>
-                        <a:t>22</a:t>
+                        <a:t>23</a:t>
                       </a:r>
                       <a:endParaRPr lang="en-US" sz="900" dirty="0">
                         <a:latin typeface="Arial" charset="0"/>
@@ -9347,7 +9347,7 @@
                           <a:ea typeface="Arial" pitchFamily="34" charset="-122"/>
                           <a:cs typeface="Arial" pitchFamily="34" charset="-120"/>
                         </a:rPr>
-                        <a:t>4.27</a:t>
+                        <a:t>4.26</a:t>
                       </a:r>
                       <a:endParaRPr lang="en-US" sz="900" dirty="0">
                         <a:latin typeface="Arial" charset="0"/>
@@ -9483,7 +9483,7 @@
                           <a:ea typeface="Arial" pitchFamily="34" charset="-122"/>
                           <a:cs typeface="Arial" pitchFamily="34" charset="-120"/>
                         </a:rPr>
-                        <a:t>8.55</a:t>
+                        <a:t>8.52</a:t>
                       </a:r>
                       <a:endParaRPr lang="en-US" sz="900" dirty="0">
                         <a:latin typeface="Arial" charset="0"/>
@@ -9621,7 +9621,7 @@
                           <a:ea typeface="Arial" pitchFamily="34" charset="-122"/>
                           <a:cs typeface="Arial" pitchFamily="34" charset="-120"/>
                         </a:rPr>
-                        <a:t>32</a:t>
+                        <a:t>33</a:t>
                       </a:r>
                       <a:endParaRPr lang="en-US" sz="900" dirty="0">
                         <a:latin typeface="Arial" charset="0"/>
@@ -9689,7 +9689,7 @@
                           <a:ea typeface="Arial" pitchFamily="34" charset="-122"/>
                           <a:cs typeface="Arial" pitchFamily="34" charset="-120"/>
                         </a:rPr>
-                        <a:t>7.81</a:t>
+                        <a:t>7.82</a:t>
                       </a:r>
                       <a:endParaRPr lang="en-US" sz="900" dirty="0">
                         <a:latin typeface="Arial" charset="0"/>
@@ -9825,7 +9825,7 @@
                           <a:ea typeface="Arial" pitchFamily="34" charset="-122"/>
                           <a:cs typeface="Arial" pitchFamily="34" charset="-120"/>
                         </a:rPr>
-                        <a:t>7.81</a:t>
+                        <a:t>7.82</a:t>
                       </a:r>
                       <a:endParaRPr lang="en-US" sz="900" dirty="0">
                         <a:latin typeface="Arial" charset="0"/>
@@ -10233,7 +10233,7 @@
                 <a:ea typeface="Arial" pitchFamily="34" charset="-122"/>
                 <a:cs typeface="Arial" pitchFamily="34" charset="-120"/>
               </a:rPr>
-              <a:t>109件（85.8%）</a:t>
+              <a:t>112件（86.2%）</a:t>
             </a:r>
             <a:endParaRPr lang="en-US" sz="1100" dirty="0"/>
           </a:p>
@@ -10331,7 +10331,7 @@
                 <a:ea typeface="Arial" pitchFamily="34" charset="-122"/>
                 <a:cs typeface="Arial" pitchFamily="34" charset="-120"/>
               </a:rPr>
-              <a:t>15件（11.8%）</a:t>
+              <a:t>15件（11.5%）</a:t>
             </a:r>
             <a:endParaRPr lang="en-US" sz="1100" dirty="0"/>
           </a:p>
@@ -10429,7 +10429,7 @@
                 <a:ea typeface="Arial" pitchFamily="34" charset="-122"/>
                 <a:cs typeface="Arial" pitchFamily="34" charset="-120"/>
               </a:rPr>
-              <a:t>3件（2.4%）</a:t>
+              <a:t>3件（2.3%）</a:t>
             </a:r>
             <a:endParaRPr lang="en-US" sz="1100" dirty="0"/>
           </a:p>
@@ -11064,7 +11064,7 @@
                 <a:ea typeface="Arial" pitchFamily="34" charset="-122"/>
                 <a:cs typeface="Arial" pitchFamily="34" charset="-120"/>
               </a:rPr>
-              <a:t>ガストでのウェルカムドリンクもお部屋に持って行けて、紅茶やフェイスマスクなどのアメニティも充実していて、嬉しいです</a:t>
+              <a:t>Tout un panel d'équipements mis a disposition des clients...</a:t>
             </a:r>
             <a:endParaRPr lang="en-US" sz="900" dirty="0"/>
           </a:p>
@@ -11103,7 +11103,7 @@
                 <a:ea typeface="Arial" pitchFamily="34" charset="-122"/>
                 <a:cs typeface="Arial" pitchFamily="34" charset="-120"/>
               </a:rPr>
-              <a:t>「滞在中は快適に過ごすことが出来ありがとうございました☺︎ アメニティが充実していて嬉しかったです」</a:t>
+              <a:t>「周辺環境も良く快適に過ごせました」</a:t>
             </a:r>
             <a:endParaRPr lang="en-US" sz="900" dirty="0"/>
           </a:p>
@@ -11287,7 +11287,7 @@
                 <a:ea typeface="Arial" pitchFamily="34" charset="-122"/>
                 <a:cs typeface="Arial" pitchFamily="34" charset="-120"/>
               </a:rPr>
-              <a:t>スタッフさんの対応も事務的でなく安心感がありました</a:t>
+              <a:t>ホテルのスタッフの皆様に心より感謝申し上げます</a:t>
             </a:r>
             <a:endParaRPr lang="en-US" sz="900" dirty="0"/>
           </a:p>
@@ -11326,7 +11326,7 @@
                 <a:ea typeface="Arial" pitchFamily="34" charset="-122"/>
                 <a:cs typeface="Arial" pitchFamily="34" charset="-120"/>
               </a:rPr>
-              <a:t>「フロントの方はとても優しく丁寧で素敵な方でした」</a:t>
+              <a:t>「スタッフさんの対応も事務的でなく安心感がありました」</a:t>
             </a:r>
             <a:endParaRPr lang="en-US" sz="900" dirty="0"/>
           </a:p>
@@ -11510,7 +11510,7 @@
                 <a:ea typeface="Arial" pitchFamily="34" charset="-122"/>
                 <a:cs typeface="Arial" pitchFamily="34" charset="-120"/>
               </a:rPr>
-              <a:t>壁、エレベーターの内装が綺麗、 お部屋も浴室もチェックアウト時間もゆったりしていて、気分よく過ごせました</a:t>
+              <a:t>Karagöz Ailesi ホテルのサービス、親切さ、清潔さ、そして価格は素晴らしかったです</a:t>
             </a:r>
             <a:endParaRPr lang="en-US" sz="900" dirty="0"/>
           </a:p>
@@ -11549,7 +11549,7 @@
                 <a:ea typeface="Arial" pitchFamily="34" charset="-122"/>
                 <a:cs typeface="Arial" pitchFamily="34" charset="-120"/>
               </a:rPr>
-              <a:t>「Everyone was very accommodating and our room was very clean」</a:t>
+              <a:t>「壁、エレベーターの内装が綺麗、 お部屋も浴室もチェックアウト時間もゆったりしていて、気分よく過ごせました」</a:t>
             </a:r>
             <a:endParaRPr lang="en-US" sz="900" dirty="0"/>
           </a:p>
@@ -11956,7 +11956,7 @@
                 <a:ea typeface="Arial" pitchFamily="34" charset="-122"/>
                 <a:cs typeface="Arial" pitchFamily="34" charset="-120"/>
               </a:rPr>
-              <a:t>とても、美味しく、お得な気分でした</a:t>
+              <a:t>ただ、日本に滞在していたため、朝食はオリーブ、チーズ、3～​​5分ゆでた卵、キュウリの種類が限られていて、パンがな...</a:t>
             </a:r>
             <a:endParaRPr lang="en-US" sz="900" dirty="0"/>
           </a:p>
@@ -11995,7 +11995,7 @@
                 <a:ea typeface="Arial" pitchFamily="34" charset="-122"/>
                 <a:cs typeface="Arial" pitchFamily="34" charset="-120"/>
               </a:rPr>
-              <a:t>「宿泊者サービスがどこもウェルカムドリンクでチェックイン時には終わっていることがほどんどでしたが、こちらは朝食時にホ...」</a:t>
+              <a:t>「とても、美味しく、お得な気分でした」</a:t>
             </a:r>
             <a:endParaRPr lang="en-US" sz="900" dirty="0"/>
           </a:p>
@@ -12685,7 +12685,7 @@
                           <a:ea typeface="Arial" pitchFamily="34" charset="-122"/>
                           <a:cs typeface="Arial" pitchFamily="34" charset="-120"/>
                         </a:rPr>
-                        <a:t>壁、エレベーターの内装が綺麗、 お部屋も浴室もチェックアウト時間もゆったりしていて、気分よく過ごせました</a:t>
+                        <a:t>La suite était très grande et la douche et les toilettes ...</a:t>
                       </a:r>
                       <a:endParaRPr lang="en-US" sz="900" dirty="0">
                         <a:latin typeface="Arial" charset="0"/>
@@ -12959,7 +12959,7 @@
                           <a:ea typeface="Arial" pitchFamily="34" charset="-122"/>
                           <a:cs typeface="Arial" pitchFamily="34" charset="-120"/>
                         </a:rPr>
-                        <a:t>Everyone was very accommodating and our room was very clean</a:t>
+                        <a:t>L'emplacement nous a permis de rayonner dans Tokyo très f...</a:t>
                       </a:r>
                       <a:endParaRPr lang="en-US" sz="900" dirty="0">
                         <a:latin typeface="Arial" charset="0"/>
@@ -13027,7 +13027,7 @@
                           <a:ea typeface="Arial" pitchFamily="34" charset="-122"/>
                           <a:cs typeface="Arial" pitchFamily="34" charset="-120"/>
                         </a:rPr>
-                        <a:t>17件</a:t>
+                        <a:t>18件</a:t>
                       </a:r>
                       <a:endParaRPr lang="en-US" sz="900" dirty="0">
                         <a:latin typeface="Arial" charset="0"/>
@@ -13439,7 +13439,7 @@
                           <a:ea typeface="Arial" pitchFamily="34" charset="-122"/>
                           <a:cs typeface="Arial" pitchFamily="34" charset="-120"/>
                         </a:rPr>
-                        <a:t>窓・採光</a:t>
+                        <a:t>対応・サービスの不満</a:t>
                       </a:r>
                       <a:endParaRPr lang="en-US" sz="900" dirty="0">
                         <a:latin typeface="Arial" charset="0"/>
@@ -13507,7 +13507,7 @@
                           <a:ea typeface="Arial" pitchFamily="34" charset="-122"/>
                           <a:cs typeface="Arial" pitchFamily="34" charset="-120"/>
                         </a:rPr>
-                        <a:t>立地はとても良いし、部屋も素敵ですが、窓が隣の建物の壁に遮られていて、壁が触れられるほど近いのが難点です</a:t>
+                        <a:t>ただドライヤーの吸い込み部分の汚れが酷く残念でした</a:t>
                       </a:r>
                       <a:endParaRPr lang="en-US" sz="900" dirty="0">
                         <a:latin typeface="Arial" charset="0"/>
@@ -13575,7 +13575,7 @@
                           <a:ea typeface="Arial" pitchFamily="34" charset="-122"/>
                           <a:cs typeface="Arial" pitchFamily="34" charset="-120"/>
                         </a:rPr>
-                        <a:t>7件</a:t>
+                        <a:t>9件</a:t>
                       </a:r>
                       <a:endParaRPr lang="en-US" sz="900" dirty="0">
                         <a:latin typeface="Arial" charset="0"/>
@@ -13713,7 +13713,7 @@
                           <a:ea typeface="Arial" pitchFamily="34" charset="-122"/>
                           <a:cs typeface="Arial" pitchFamily="34" charset="-120"/>
                         </a:rPr>
-                        <a:t>対応・サービスの不満</a:t>
+                        <a:t>窓・採光</a:t>
                       </a:r>
                       <a:endParaRPr lang="en-US" sz="900" dirty="0">
                         <a:latin typeface="Arial" charset="0"/>
@@ -13781,7 +13781,7 @@
                           <a:ea typeface="Arial" pitchFamily="34" charset="-122"/>
                           <a:cs typeface="Arial" pitchFamily="34" charset="-120"/>
                         </a:rPr>
-                        <a:t>間違えてツインを予約してしまい、ベッドが狭く残念でしたが自分のミスなのでそれは仕方ないですね</a:t>
+                        <a:t>立地はとても良いし、部屋も素敵ですが、窓が隣の建物の壁に遮られていて、壁が触れられるほど近いのが難点です</a:t>
                       </a:r>
                       <a:endParaRPr lang="en-US" sz="900" dirty="0">
                         <a:latin typeface="Arial" charset="0"/>
@@ -14123,7 +14123,7 @@
                           <a:ea typeface="Arial" pitchFamily="34" charset="-122"/>
                           <a:cs typeface="Arial" pitchFamily="34" charset="-120"/>
                         </a:rPr>
-                        <a:t>5件</a:t>
+                        <a:t>4件</a:t>
                       </a:r>
                       <a:endParaRPr lang="en-US" sz="900" dirty="0">
                         <a:latin typeface="Arial" charset="0"/>
@@ -14261,7 +14261,7 @@
                           <a:ea typeface="Arial" pitchFamily="34" charset="-122"/>
                           <a:cs typeface="Arial" pitchFamily="34" charset="-120"/>
                         </a:rPr>
-                        <a:t>防音性能</a:t>
+                        <a:t>清掃不備</a:t>
                       </a:r>
                       <a:endParaRPr lang="en-US" sz="900" dirty="0">
                         <a:latin typeface="Arial" charset="0"/>
@@ -14329,7 +14329,7 @@
                           <a:ea typeface="Arial" pitchFamily="34" charset="-122"/>
                           <a:cs typeface="Arial" pitchFamily="34" charset="-120"/>
                         </a:rPr>
-                        <a:t>のようなもので浄水器へ汲みにいかないとだめでした 氷も地下しかありません リネン庫の近くだったからか夜中洗濯機の音...</a:t>
+                        <a:t>ただドライヤーの吸い込み部分の汚れが酷く残念でした</a:t>
                       </a:r>
                       <a:endParaRPr lang="en-US" sz="900" dirty="0">
                         <a:latin typeface="Arial" charset="0"/>
@@ -14397,7 +14397,7 @@
                           <a:ea typeface="Arial" pitchFamily="34" charset="-122"/>
                           <a:cs typeface="Arial" pitchFamily="34" charset="-120"/>
                         </a:rPr>
-                        <a:t>3件</a:t>
+                        <a:t>4件</a:t>
                       </a:r>
                       <a:endParaRPr lang="en-US" sz="900" dirty="0">
                         <a:latin typeface="Arial" charset="0"/>
@@ -14535,7 +14535,7 @@
                           <a:ea typeface="Arial" pitchFamily="34" charset="-122"/>
                           <a:cs typeface="Arial" pitchFamily="34" charset="-120"/>
                         </a:rPr>
-                        <a:t>臭い・匂い</a:t>
+                        <a:t>防音性能</a:t>
                       </a:r>
                       <a:endParaRPr lang="en-US" sz="900" dirty="0">
                         <a:latin typeface="Arial" charset="0"/>
@@ -14603,7 +14603,7 @@
                           <a:ea typeface="Arial" pitchFamily="34" charset="-122"/>
                           <a:cs typeface="Arial" pitchFamily="34" charset="-120"/>
                         </a:rPr>
-                        <a:t>お部屋もタバコの匂いは気にならなかったので良かったです</a:t>
+                        <a:t>のようなもので浄水器へ汲みにいかないとだめでした 氷も地下しかありません リネン庫の近くだったからか夜中洗濯機の音...</a:t>
                       </a:r>
                       <a:endParaRPr lang="en-US" sz="900" dirty="0">
                         <a:latin typeface="Arial" charset="0"/>
@@ -14809,7 +14809,7 @@
                           <a:ea typeface="Arial" pitchFamily="34" charset="-122"/>
                           <a:cs typeface="Arial" pitchFamily="34" charset="-120"/>
                         </a:rPr>
-                        <a:t>清掃不備</a:t>
+                        <a:t>臭い・匂い</a:t>
                       </a:r>
                       <a:endParaRPr lang="en-US" sz="900" dirty="0">
                         <a:latin typeface="Arial" charset="0"/>
@@ -14877,7 +14877,7 @@
                           <a:ea typeface="Arial" pitchFamily="34" charset="-122"/>
                           <a:cs typeface="Arial" pitchFamily="34" charset="-120"/>
                         </a:rPr>
-                        <a:t>1 ヴィラツインをトリプル利用 1階フロント横のお部屋だったのでアクセスが楽だった ソファ、テーブルx2、小さい椅...</a:t>
+                        <a:t>お部屋もタバコの匂いは気にならなかったので良かったです</a:t>
                       </a:r>
                       <a:endParaRPr lang="en-US" sz="900" dirty="0">
                         <a:latin typeface="Arial" charset="0"/>

--- a/納品レポート/ホテル別レポート/richmond_mejiro_口コミ分析レポート.pptx
+++ b/納品レポート/ホテル別レポート/richmond_mejiro_口コミ分析レポート.pptx
@@ -208,7 +208,7 @@
                 <c:formatCode>General</c:formatCode>
                 <c:ptCount val="6"/>
                 <c:pt idx="0">
-                  <c:v>9.32</c:v>
+                  <c:v>9.38</c:v>
                 </c:pt>
                 <c:pt idx="1">
                   <c:v>9.2</c:v>
@@ -220,10 +220,10 @@
                   <c:v>8.67</c:v>
                 </c:pt>
                 <c:pt idx="4">
-                  <c:v>8.52</c:v>
+                  <c:v>8.42</c:v>
                 </c:pt>
                 <c:pt idx="5">
-                  <c:v>7.82</c:v>
+                  <c:v>7.85</c:v>
                 </c:pt>
               </c:numCache>
             </c:numRef>
@@ -566,10 +566,10 @@
               <c:numCache>
                 <c:ptCount val="3"/>
                 <c:pt idx="0">
-                  <c:v>112</c:v>
+                  <c:v>117</c:v>
                 </c:pt>
                 <c:pt idx="1">
-                  <c:v>15</c:v>
+                  <c:v>16</c:v>
                 </c:pt>
                 <c:pt idx="2">
                   <c:v>3</c:v>
@@ -823,10 +823,10 @@
                 <c:formatCode>General</c:formatCode>
                 <c:ptCount val="9"/>
                 <c:pt idx="0">
-                  <c:v>59</c:v>
+                  <c:v>62</c:v>
                 </c:pt>
                 <c:pt idx="1">
-                  <c:v>12</c:v>
+                  <c:v>14</c:v>
                 </c:pt>
                 <c:pt idx="2">
                   <c:v>41</c:v>
@@ -835,7 +835,7 @@
                   <c:v>7</c:v>
                 </c:pt>
                 <c:pt idx="4">
-                  <c:v>5</c:v>
+                  <c:v>6</c:v>
                 </c:pt>
                 <c:pt idx="5">
                   <c:v>3</c:v>
@@ -2798,7 +2798,7 @@
                 <a:ea typeface="Arial" pitchFamily="34" charset="-122"/>
                 <a:cs typeface="Arial" pitchFamily="34" charset="-120"/>
               </a:rPr>
-              <a:t>レビュー総数：130件（6サイト）</a:t>
+              <a:t>レビュー総数：136件（6サイト）</a:t>
             </a:r>
             <a:endParaRPr lang="en-US" sz="1000" dirty="0"/>
           </a:p>
@@ -2818,7 +2818,7 @@
                 <a:ea typeface="Arial" pitchFamily="34" charset="-122"/>
                 <a:cs typeface="Arial" pitchFamily="34" charset="-120"/>
               </a:rPr>
-              <a:t>作成日：2026年3月23日</a:t>
+              <a:t>作成日：2026年3月24日</a:t>
             </a:r>
             <a:endParaRPr lang="en-US" sz="1000" dirty="0"/>
           </a:p>
@@ -3364,7 +3364,7 @@
                           <a:ea typeface="Arial" pitchFamily="34" charset="-122"/>
                           <a:cs typeface="Arial" pitchFamily="34" charset="-120"/>
                         </a:rPr>
-                        <a:t>8.68点</a:t>
+                        <a:t>8.70点</a:t>
                       </a:r>
                       <a:endParaRPr lang="en-US" sz="1000" dirty="0">
                         <a:latin typeface="Arial" charset="0"/>
@@ -3638,7 +3638,7 @@
                           <a:ea typeface="Arial" pitchFamily="34" charset="-122"/>
                           <a:cs typeface="Arial" pitchFamily="34" charset="-120"/>
                         </a:rPr>
-                        <a:t>86.2%</a:t>
+                        <a:t>86.0%</a:t>
                       </a:r>
                       <a:endParaRPr lang="en-US" sz="1000" dirty="0">
                         <a:latin typeface="Arial" charset="0"/>
@@ -3912,7 +3912,7 @@
                           <a:ea typeface="Arial" pitchFamily="34" charset="-122"/>
                           <a:cs typeface="Arial" pitchFamily="34" charset="-120"/>
                         </a:rPr>
-                        <a:t>2.3%</a:t>
+                        <a:t>2.2%</a:t>
                       </a:r>
                       <a:endParaRPr lang="en-US" sz="1000" dirty="0">
                         <a:latin typeface="Arial" charset="0"/>
@@ -5373,7 +5373,7 @@
                 <a:ea typeface="Arial" pitchFamily="34" charset="-122"/>
                 <a:cs typeface="Arial" pitchFamily="34" charset="-120"/>
               </a:rPr>
-              <a:t>8.68</a:t>
+              <a:t>8.70</a:t>
             </a:r>
             <a:endParaRPr lang="en-US" sz="3200" dirty="0"/>
           </a:p>
@@ -5498,7 +5498,7 @@
                 <a:ea typeface="Arial" pitchFamily="34" charset="-122"/>
                 <a:cs typeface="Arial" pitchFamily="34" charset="-120"/>
               </a:rPr>
-              <a:t>86.2%</a:t>
+              <a:t>86.0%</a:t>
             </a:r>
             <a:endParaRPr lang="en-US" sz="3200" dirty="0"/>
           </a:p>
@@ -5623,7 +5623,7 @@
                 <a:ea typeface="Arial" pitchFamily="34" charset="-122"/>
                 <a:cs typeface="Arial" pitchFamily="34" charset="-120"/>
               </a:rPr>
-              <a:t>2.3%</a:t>
+              <a:t>2.2%</a:t>
             </a:r>
             <a:endParaRPr lang="en-US" sz="3200" dirty="0"/>
           </a:p>
@@ -5748,7 +5748,7 @@
                 <a:ea typeface="Arial" pitchFamily="34" charset="-122"/>
                 <a:cs typeface="Arial" pitchFamily="34" charset="-120"/>
               </a:rPr>
-              <a:t>130件</a:t>
+              <a:t>136件</a:t>
             </a:r>
             <a:endParaRPr lang="en-US" sz="3200" dirty="0"/>
           </a:p>
@@ -5896,7 +5896,7 @@
                 <a:ea typeface="Arial" pitchFamily="34" charset="-122"/>
                 <a:cs typeface="Arial" pitchFamily="34" charset="-120"/>
               </a:rPr>
-              <a:t>  立地も良く、ホテルも広々としていました</a:t>
+              <a:t>  目白駅から徒歩わずか3分と大変便利です</a:t>
             </a:r>
             <a:endParaRPr lang="en-US" sz="1100" dirty="0"/>
           </a:p>
@@ -5936,7 +5936,7 @@
                 <a:ea typeface="Arial" pitchFamily="34" charset="-122"/>
                 <a:cs typeface="Arial" pitchFamily="34" charset="-120"/>
               </a:rPr>
-              <a:t>  Tout un panel d'équipements mis a disposition des clients...</a:t>
+              <a:t>  目白站出來走3分鐘就到了，非常方便 設備：必要なアメニティはすべて揃っており、各階段の下には温水が出る給水器が設置...</a:t>
             </a:r>
             <a:endParaRPr lang="en-US" sz="1100" dirty="0"/>
           </a:p>
@@ -5976,7 +5976,7 @@
                 <a:ea typeface="Arial" pitchFamily="34" charset="-122"/>
                 <a:cs typeface="Arial" pitchFamily="34" charset="-120"/>
               </a:rPr>
-              <a:t>  ホテルのスタッフの皆様に心より感謝申し上げます</a:t>
+              <a:t>  綺麗なのとアニメティが充実していて、スタッフの対応ロケーションも最高でした</a:t>
             </a:r>
             <a:endParaRPr lang="en-US" sz="1100" dirty="0"/>
           </a:p>
@@ -6164,7 +6164,7 @@
                 <a:ea typeface="Arial" pitchFamily="34" charset="-122"/>
                 <a:cs typeface="Arial" pitchFamily="34" charset="-120"/>
               </a:rPr>
-              <a:t>  L'emplacement nous a permis de rayonner dans Tokyo très f...</a:t>
+              <a:t>  Lovely simple breakfast and room space is good enough for...</a:t>
             </a:r>
             <a:endParaRPr lang="en-US" sz="1100" dirty="0"/>
           </a:p>
@@ -6557,7 +6557,7 @@
                 <a:ea typeface="Arial" pitchFamily="34" charset="-122"/>
                 <a:cs typeface="Arial" pitchFamily="34" charset="-120"/>
               </a:rPr>
-              <a:t>8.68</a:t>
+              <a:t>8.70</a:t>
             </a:r>
             <a:endParaRPr lang="en-US" sz="3200" dirty="0"/>
           </a:p>
@@ -6682,7 +6682,7 @@
                 <a:ea typeface="Arial" pitchFamily="34" charset="-122"/>
                 <a:cs typeface="Arial" pitchFamily="34" charset="-120"/>
               </a:rPr>
-              <a:t>86.2%</a:t>
+              <a:t>86.0%</a:t>
             </a:r>
             <a:endParaRPr lang="en-US" sz="3200" dirty="0"/>
           </a:p>
@@ -6807,7 +6807,7 @@
                 <a:ea typeface="Arial" pitchFamily="34" charset="-122"/>
                 <a:cs typeface="Arial" pitchFamily="34" charset="-120"/>
               </a:rPr>
-              <a:t>2.3%</a:t>
+              <a:t>2.2%</a:t>
             </a:r>
             <a:endParaRPr lang="en-US" sz="3200" dirty="0"/>
           </a:p>
@@ -6932,7 +6932,7 @@
                 <a:ea typeface="Arial" pitchFamily="34" charset="-122"/>
                 <a:cs typeface="Arial" pitchFamily="34" charset="-120"/>
               </a:rPr>
-              <a:t>130件</a:t>
+              <a:t>136件</a:t>
             </a:r>
             <a:endParaRPr lang="en-US" sz="3200" dirty="0"/>
           </a:p>
@@ -7353,7 +7353,7 @@
                 <a:ea typeface="Arial" pitchFamily="34" charset="-122"/>
                 <a:cs typeface="Arial" pitchFamily="34" charset="-120"/>
               </a:rPr>
-              <a:t>Trip.com(9.32)が最高スコア。</a:t>
+              <a:t>Trip.com(9.38)が最高スコア。</a:t>
             </a:r>
             <a:endParaRPr lang="en-US" sz="1100" dirty="0"/>
           </a:p>
@@ -7911,7 +7911,7 @@
                           <a:ea typeface="Arial" pitchFamily="34" charset="-122"/>
                           <a:cs typeface="Arial" pitchFamily="34" charset="-120"/>
                         </a:rPr>
-                        <a:t>28</a:t>
+                        <a:t>32</a:t>
                       </a:r>
                       <a:endParaRPr lang="en-US" sz="900" dirty="0">
                         <a:latin typeface="Arial" charset="0"/>
@@ -7979,7 +7979,7 @@
                           <a:ea typeface="Arial" pitchFamily="34" charset="-122"/>
                           <a:cs typeface="Arial" pitchFamily="34" charset="-120"/>
                         </a:rPr>
-                        <a:t>9.32</a:t>
+                        <a:t>9.38</a:t>
                       </a:r>
                       <a:endParaRPr lang="en-US" sz="900" dirty="0">
                         <a:latin typeface="Arial" charset="0"/>
@@ -8115,7 +8115,7 @@
                           <a:ea typeface="Arial" pitchFamily="34" charset="-122"/>
                           <a:cs typeface="Arial" pitchFamily="34" charset="-120"/>
                         </a:rPr>
-                        <a:t>9.32</a:t>
+                        <a:t>9.38</a:t>
                       </a:r>
                       <a:endParaRPr lang="en-US" sz="900" dirty="0">
                         <a:latin typeface="Arial" charset="0"/>
@@ -9279,7 +9279,7 @@
                           <a:ea typeface="Arial" pitchFamily="34" charset="-122"/>
                           <a:cs typeface="Arial" pitchFamily="34" charset="-120"/>
                         </a:rPr>
-                        <a:t>23</a:t>
+                        <a:t>24</a:t>
                       </a:r>
                       <a:endParaRPr lang="en-US" sz="900" dirty="0">
                         <a:latin typeface="Arial" charset="0"/>
@@ -9347,7 +9347,7 @@
                           <a:ea typeface="Arial" pitchFamily="34" charset="-122"/>
                           <a:cs typeface="Arial" pitchFamily="34" charset="-120"/>
                         </a:rPr>
-                        <a:t>4.26</a:t>
+                        <a:t>4.21</a:t>
                       </a:r>
                       <a:endParaRPr lang="en-US" sz="900" dirty="0">
                         <a:latin typeface="Arial" charset="0"/>
@@ -9483,7 +9483,7 @@
                           <a:ea typeface="Arial" pitchFamily="34" charset="-122"/>
                           <a:cs typeface="Arial" pitchFamily="34" charset="-120"/>
                         </a:rPr>
-                        <a:t>8.52</a:t>
+                        <a:t>8.42</a:t>
                       </a:r>
                       <a:endParaRPr lang="en-US" sz="900" dirty="0">
                         <a:latin typeface="Arial" charset="0"/>
@@ -9621,7 +9621,7 @@
                           <a:ea typeface="Arial" pitchFamily="34" charset="-122"/>
                           <a:cs typeface="Arial" pitchFamily="34" charset="-120"/>
                         </a:rPr>
-                        <a:t>33</a:t>
+                        <a:t>34</a:t>
                       </a:r>
                       <a:endParaRPr lang="en-US" sz="900" dirty="0">
                         <a:latin typeface="Arial" charset="0"/>
@@ -9689,7 +9689,7 @@
                           <a:ea typeface="Arial" pitchFamily="34" charset="-122"/>
                           <a:cs typeface="Arial" pitchFamily="34" charset="-120"/>
                         </a:rPr>
-                        <a:t>7.82</a:t>
+                        <a:t>7.85</a:t>
                       </a:r>
                       <a:endParaRPr lang="en-US" sz="900" dirty="0">
                         <a:latin typeface="Arial" charset="0"/>
@@ -9825,7 +9825,7 @@
                           <a:ea typeface="Arial" pitchFamily="34" charset="-122"/>
                           <a:cs typeface="Arial" pitchFamily="34" charset="-120"/>
                         </a:rPr>
-                        <a:t>7.82</a:t>
+                        <a:t>7.85</a:t>
                       </a:r>
                       <a:endParaRPr lang="en-US" sz="900" dirty="0">
                         <a:latin typeface="Arial" charset="0"/>
@@ -10233,7 +10233,7 @@
                 <a:ea typeface="Arial" pitchFamily="34" charset="-122"/>
                 <a:cs typeface="Arial" pitchFamily="34" charset="-120"/>
               </a:rPr>
-              <a:t>112件（86.2%）</a:t>
+              <a:t>117件（86.0%）</a:t>
             </a:r>
             <a:endParaRPr lang="en-US" sz="1100" dirty="0"/>
           </a:p>
@@ -10331,7 +10331,7 @@
                 <a:ea typeface="Arial" pitchFamily="34" charset="-122"/>
                 <a:cs typeface="Arial" pitchFamily="34" charset="-120"/>
               </a:rPr>
-              <a:t>15件（11.5%）</a:t>
+              <a:t>16件（11.8%）</a:t>
             </a:r>
             <a:endParaRPr lang="en-US" sz="1100" dirty="0"/>
           </a:p>
@@ -10429,7 +10429,7 @@
                 <a:ea typeface="Arial" pitchFamily="34" charset="-122"/>
                 <a:cs typeface="Arial" pitchFamily="34" charset="-120"/>
               </a:rPr>
-              <a:t>3件（2.3%）</a:t>
+              <a:t>3件（2.2%）</a:t>
             </a:r>
             <a:endParaRPr lang="en-US" sz="1100" dirty="0"/>
           </a:p>
@@ -10841,7 +10841,7 @@
                 <a:ea typeface="Arial" pitchFamily="34" charset="-122"/>
                 <a:cs typeface="Arial" pitchFamily="34" charset="-120"/>
               </a:rPr>
-              <a:t>立地も良く、ホテルも広々としていました</a:t>
+              <a:t>目白駅から徒歩わずか3分と大変便利です</a:t>
             </a:r>
             <a:endParaRPr lang="en-US" sz="900" dirty="0"/>
           </a:p>
@@ -10880,7 +10880,7 @@
                 <a:ea typeface="Arial" pitchFamily="34" charset="-122"/>
                 <a:cs typeface="Arial" pitchFamily="34" charset="-120"/>
               </a:rPr>
-              <a:t>「以前宿泊した際、駅から近くお部屋も広々としていて綺麗でベッドも広くて是非また泊まりたいと思いリピートしました」</a:t>
+              <a:t>「Good location 立地が良い」</a:t>
             </a:r>
             <a:endParaRPr lang="en-US" sz="900" dirty="0"/>
           </a:p>
@@ -11064,7 +11064,7 @@
                 <a:ea typeface="Arial" pitchFamily="34" charset="-122"/>
                 <a:cs typeface="Arial" pitchFamily="34" charset="-120"/>
               </a:rPr>
-              <a:t>Tout un panel d'équipements mis a disposition des clients...</a:t>
+              <a:t>目白站出來走3分鐘就到了，非常方便 設備：必要なアメニティはすべて揃っており、各階段の下には温水が出る給水器が設置...</a:t>
             </a:r>
             <a:endParaRPr lang="en-US" sz="900" dirty="0"/>
           </a:p>
@@ -11103,7 +11103,7 @@
                 <a:ea typeface="Arial" pitchFamily="34" charset="-122"/>
                 <a:cs typeface="Arial" pitchFamily="34" charset="-120"/>
               </a:rPr>
-              <a:t>「周辺環境も良く快適に過ごせました」</a:t>
+              <a:t>「Tout un panel d'équipements mis a disposition des clients...」</a:t>
             </a:r>
             <a:endParaRPr lang="en-US" sz="900" dirty="0"/>
           </a:p>
@@ -11287,7 +11287,7 @@
                 <a:ea typeface="Arial" pitchFamily="34" charset="-122"/>
                 <a:cs typeface="Arial" pitchFamily="34" charset="-120"/>
               </a:rPr>
-              <a:t>ホテルのスタッフの皆様に心より感謝申し上げます</a:t>
+              <a:t>綺麗なのとアニメティが充実していて、スタッフの対応ロケーションも最高でした</a:t>
             </a:r>
             <a:endParaRPr lang="en-US" sz="900" dirty="0"/>
           </a:p>
@@ -11326,7 +11326,7 @@
                 <a:ea typeface="Arial" pitchFamily="34" charset="-122"/>
                 <a:cs typeface="Arial" pitchFamily="34" charset="-120"/>
               </a:rPr>
-              <a:t>「スタッフさんの対応も事務的でなく安心感がありました」</a:t>
+              <a:t>「ホテルのスタッフの皆様に心より感謝申し上げます」</a:t>
             </a:r>
             <a:endParaRPr lang="en-US" sz="900" dirty="0"/>
           </a:p>
@@ -11510,7 +11510,7 @@
                 <a:ea typeface="Arial" pitchFamily="34" charset="-122"/>
                 <a:cs typeface="Arial" pitchFamily="34" charset="-120"/>
               </a:rPr>
-              <a:t>Karagöz Ailesi ホテルのサービス、親切さ、清潔さ、そして価格は素晴らしかったです</a:t>
+              <a:t>衛生状態：良好</a:t>
             </a:r>
             <a:endParaRPr lang="en-US" sz="900" dirty="0"/>
           </a:p>
@@ -11549,7 +11549,7 @@
                 <a:ea typeface="Arial" pitchFamily="34" charset="-122"/>
                 <a:cs typeface="Arial" pitchFamily="34" charset="-120"/>
               </a:rPr>
-              <a:t>「壁、エレベーターの内装が綺麗、 お部屋も浴室もチェックアウト時間もゆったりしていて、気分よく過ごせました」</a:t>
+              <a:t>「綺麗なのとアニメティが充実していて、スタッフの対応ロケーションも最高でした」</a:t>
             </a:r>
             <a:endParaRPr lang="en-US" sz="900" dirty="0"/>
           </a:p>
@@ -11733,7 +11733,7 @@
                 <a:ea typeface="Arial" pitchFamily="34" charset="-122"/>
                 <a:cs typeface="Arial" pitchFamily="34" charset="-120"/>
               </a:rPr>
-              <a:t>近くにコンビニやパン屋はありますが、周辺にはレストランが数軒しかありません</a:t>
+              <a:t>近隣には松本清、ココナ、赤いローソンコンビニエンスストアがあります</a:t>
             </a:r>
             <a:endParaRPr lang="en-US" sz="900" dirty="0"/>
           </a:p>
@@ -11772,7 +11772,7 @@
                 <a:ea typeface="Arial" pitchFamily="34" charset="-122"/>
                 <a:cs typeface="Arial" pitchFamily="34" charset="-120"/>
               </a:rPr>
-              <a:t>「駅からのアクセスはよかったです  池袋の隣なのに夜は落ち着いてて治安は良さそうでした ホテルに行くまでにコンビニも...」</a:t>
+              <a:t>「近くにコンビニやパン屋はありますが、周辺にはレストランが数軒しかありません」</a:t>
             </a:r>
             <a:endParaRPr lang="en-US" sz="900" dirty="0"/>
           </a:p>
@@ -11956,7 +11956,7 @@
                 <a:ea typeface="Arial" pitchFamily="34" charset="-122"/>
                 <a:cs typeface="Arial" pitchFamily="34" charset="-120"/>
               </a:rPr>
-              <a:t>ただ、日本に滞在していたため、朝食はオリーブ、チーズ、3～​​5分ゆでた卵、キュウリの種類が限られていて、パンがな...</a:t>
+              <a:t>Washing machine is at the B1 level 素敵なシンプルな朝食で、部屋もグループには十...</a:t>
             </a:r>
             <a:endParaRPr lang="en-US" sz="900" dirty="0"/>
           </a:p>
@@ -11995,7 +11995,7 @@
                 <a:ea typeface="Arial" pitchFamily="34" charset="-122"/>
                 <a:cs typeface="Arial" pitchFamily="34" charset="-120"/>
               </a:rPr>
-              <a:t>「とても、美味しく、お得な気分でした」</a:t>
+              <a:t>「そのガストの朝食は代金に見合っていてなかなか良かった」</a:t>
             </a:r>
             <a:endParaRPr lang="en-US" sz="900" dirty="0"/>
           </a:p>
@@ -12959,7 +12959,7 @@
                           <a:ea typeface="Arial" pitchFamily="34" charset="-122"/>
                           <a:cs typeface="Arial" pitchFamily="34" charset="-120"/>
                         </a:rPr>
-                        <a:t>L'emplacement nous a permis de rayonner dans Tokyo très f...</a:t>
+                        <a:t>Lovely simple breakfast and room space is good enough for...</a:t>
                       </a:r>
                       <a:endParaRPr lang="en-US" sz="900" dirty="0">
                         <a:latin typeface="Arial" charset="0"/>
@@ -13027,7 +13027,7 @@
                           <a:ea typeface="Arial" pitchFamily="34" charset="-122"/>
                           <a:cs typeface="Arial" pitchFamily="34" charset="-120"/>
                         </a:rPr>
-                        <a:t>18件</a:t>
+                        <a:t>19件</a:t>
                       </a:r>
                       <a:endParaRPr lang="en-US" sz="900" dirty="0">
                         <a:latin typeface="Arial" charset="0"/>
@@ -13439,7 +13439,7 @@
                           <a:ea typeface="Arial" pitchFamily="34" charset="-122"/>
                           <a:cs typeface="Arial" pitchFamily="34" charset="-120"/>
                         </a:rPr>
-                        <a:t>対応・サービスの不満</a:t>
+                        <a:t>窓・採光</a:t>
                       </a:r>
                       <a:endParaRPr lang="en-US" sz="900" dirty="0">
                         <a:latin typeface="Arial" charset="0"/>
@@ -13507,7 +13507,7 @@
                           <a:ea typeface="Arial" pitchFamily="34" charset="-122"/>
                           <a:cs typeface="Arial" pitchFamily="34" charset="-120"/>
                         </a:rPr>
-                        <a:t>ただドライヤーの吸い込み部分の汚れが酷く残念でした</a:t>
+                        <a:t>窓がない部屋だったので寝泊まりだけでは充分ですがホテル滞在メインだと部屋有りのとこがいいかもです</a:t>
                       </a:r>
                       <a:endParaRPr lang="en-US" sz="900" dirty="0">
                         <a:latin typeface="Arial" charset="0"/>
@@ -13713,7 +13713,7 @@
                           <a:ea typeface="Arial" pitchFamily="34" charset="-122"/>
                           <a:cs typeface="Arial" pitchFamily="34" charset="-120"/>
                         </a:rPr>
-                        <a:t>窓・採光</a:t>
+                        <a:t>対応・サービスの不満</a:t>
                       </a:r>
                       <a:endParaRPr lang="en-US" sz="900" dirty="0">
                         <a:latin typeface="Arial" charset="0"/>
@@ -13781,7 +13781,7 @@
                           <a:ea typeface="Arial" pitchFamily="34" charset="-122"/>
                           <a:cs typeface="Arial" pitchFamily="34" charset="-120"/>
                         </a:rPr>
-                        <a:t>立地はとても良いし、部屋も素敵ですが、窓が隣の建物の壁に遮られていて、壁が触れられるほど近いのが難点です</a:t>
+                        <a:t>ただドライヤーの吸い込み部分の汚れが酷く残念でした</a:t>
                       </a:r>
                       <a:endParaRPr lang="en-US" sz="900" dirty="0">
                         <a:latin typeface="Arial" charset="0"/>
@@ -13849,7 +13849,7 @@
                           <a:ea typeface="Arial" pitchFamily="34" charset="-122"/>
                           <a:cs typeface="Arial" pitchFamily="34" charset="-120"/>
                         </a:rPr>
-                        <a:t>7件</a:t>
+                        <a:t>9件</a:t>
                       </a:r>
                       <a:endParaRPr lang="en-US" sz="900" dirty="0">
                         <a:latin typeface="Arial" charset="0"/>

--- a/納品レポート/ホテル別レポート/richmond_mejiro_口コミ分析レポート.pptx
+++ b/納品レポート/ホテル別レポート/richmond_mejiro_口コミ分析レポート.pptx
@@ -208,13 +208,13 @@
                 <c:formatCode>General</c:formatCode>
                 <c:ptCount val="6"/>
                 <c:pt idx="0">
-                  <c:v>9.38</c:v>
+                  <c:v>9.36</c:v>
                 </c:pt>
                 <c:pt idx="1">
-                  <c:v>9.2</c:v>
+                  <c:v>9.33</c:v>
                 </c:pt>
                 <c:pt idx="2">
-                  <c:v>9.15</c:v>
+                  <c:v>9.11</c:v>
                 </c:pt>
                 <c:pt idx="3">
                   <c:v>8.67</c:v>
@@ -223,7 +223,7 @@
                   <c:v>8.42</c:v>
                 </c:pt>
                 <c:pt idx="5">
-                  <c:v>7.85</c:v>
+                  <c:v>7.88</c:v>
                 </c:pt>
               </c:numCache>
             </c:numRef>
@@ -566,7 +566,7 @@
               <c:numCache>
                 <c:ptCount val="3"/>
                 <c:pt idx="0">
-                  <c:v>117</c:v>
+                  <c:v>120</c:v>
                 </c:pt>
                 <c:pt idx="1">
                   <c:v>16</c:v>
@@ -823,10 +823,10 @@
                 <c:formatCode>General</c:formatCode>
                 <c:ptCount val="9"/>
                 <c:pt idx="0">
-                  <c:v>62</c:v>
+                  <c:v>63</c:v>
                 </c:pt>
                 <c:pt idx="1">
-                  <c:v>14</c:v>
+                  <c:v>16</c:v>
                 </c:pt>
                 <c:pt idx="2">
                   <c:v>41</c:v>
@@ -2798,7 +2798,7 @@
                 <a:ea typeface="Arial" pitchFamily="34" charset="-122"/>
                 <a:cs typeface="Arial" pitchFamily="34" charset="-120"/>
               </a:rPr>
-              <a:t>レビュー総数：136件（6サイト）</a:t>
+              <a:t>レビュー総数：139件（6サイト）</a:t>
             </a:r>
             <a:endParaRPr lang="en-US" sz="1000" dirty="0"/>
           </a:p>
@@ -2818,7 +2818,7 @@
                 <a:ea typeface="Arial" pitchFamily="34" charset="-122"/>
                 <a:cs typeface="Arial" pitchFamily="34" charset="-120"/>
               </a:rPr>
-              <a:t>作成日：2026年3月24日</a:t>
+              <a:t>作成日：2026年3月25日</a:t>
             </a:r>
             <a:endParaRPr lang="en-US" sz="1000" dirty="0"/>
           </a:p>
@@ -3364,7 +3364,7 @@
                           <a:ea typeface="Arial" pitchFamily="34" charset="-122"/>
                           <a:cs typeface="Arial" pitchFamily="34" charset="-120"/>
                         </a:rPr>
-                        <a:t>8.70点</a:t>
+                        <a:t>8.71点</a:t>
                       </a:r>
                       <a:endParaRPr lang="en-US" sz="1000" dirty="0">
                         <a:latin typeface="Arial" charset="0"/>
@@ -3638,7 +3638,7 @@
                           <a:ea typeface="Arial" pitchFamily="34" charset="-122"/>
                           <a:cs typeface="Arial" pitchFamily="34" charset="-120"/>
                         </a:rPr>
-                        <a:t>86.0%</a:t>
+                        <a:t>86.3%</a:t>
                       </a:r>
                       <a:endParaRPr lang="en-US" sz="1000" dirty="0">
                         <a:latin typeface="Arial" charset="0"/>
@@ -4186,7 +4186,7 @@
                           <a:ea typeface="Arial" pitchFamily="34" charset="-122"/>
                           <a:cs typeface="Arial" pitchFamily="34" charset="-120"/>
                         </a:rPr>
-                        <a:t>7.8点</a:t>
+                        <a:t>7.9点</a:t>
                       </a:r>
                       <a:endParaRPr lang="en-US" sz="1000" dirty="0">
                         <a:latin typeface="Arial" charset="0"/>
@@ -4254,7 +4254,7 @@
                           <a:ea typeface="Arial" pitchFamily="34" charset="-122"/>
                           <a:cs typeface="Arial" pitchFamily="34" charset="-120"/>
                         </a:rPr>
-                        <a:t>8.8点以上</a:t>
+                        <a:t>8.9点以上</a:t>
                       </a:r>
                       <a:endParaRPr lang="en-US" sz="1000" dirty="0">
                         <a:latin typeface="Arial" charset="0"/>
@@ -4734,7 +4734,7 @@
                           <a:ea typeface="Arial" pitchFamily="34" charset="-122"/>
                           <a:cs typeface="Arial" pitchFamily="34" charset="-120"/>
                         </a:rPr>
-                        <a:t>約21件/期間</a:t>
+                        <a:t>約23件/期間</a:t>
                       </a:r>
                       <a:endParaRPr lang="en-US" sz="1000" dirty="0">
                         <a:latin typeface="Arial" charset="0"/>
@@ -4802,7 +4802,7 @@
                           <a:ea typeface="Arial" pitchFamily="34" charset="-122"/>
                           <a:cs typeface="Arial" pitchFamily="34" charset="-120"/>
                         </a:rPr>
-                        <a:t>10件以下</a:t>
+                        <a:t>11件以下</a:t>
                       </a:r>
                       <a:endParaRPr lang="en-US" sz="1000" dirty="0">
                         <a:latin typeface="Arial" charset="0"/>
@@ -5373,7 +5373,7 @@
                 <a:ea typeface="Arial" pitchFamily="34" charset="-122"/>
                 <a:cs typeface="Arial" pitchFamily="34" charset="-120"/>
               </a:rPr>
-              <a:t>8.70</a:t>
+              <a:t>8.71</a:t>
             </a:r>
             <a:endParaRPr lang="en-US" sz="3200" dirty="0"/>
           </a:p>
@@ -5498,7 +5498,7 @@
                 <a:ea typeface="Arial" pitchFamily="34" charset="-122"/>
                 <a:cs typeface="Arial" pitchFamily="34" charset="-120"/>
               </a:rPr>
-              <a:t>86.0%</a:t>
+              <a:t>86.3%</a:t>
             </a:r>
             <a:endParaRPr lang="en-US" sz="3200" dirty="0"/>
           </a:p>
@@ -5748,7 +5748,7 @@
                 <a:ea typeface="Arial" pitchFamily="34" charset="-122"/>
                 <a:cs typeface="Arial" pitchFamily="34" charset="-120"/>
               </a:rPr>
-              <a:t>136件</a:t>
+              <a:t>139件</a:t>
             </a:r>
             <a:endParaRPr lang="en-US" sz="3200" dirty="0"/>
           </a:p>
@@ -5896,7 +5896,7 @@
                 <a:ea typeface="Arial" pitchFamily="34" charset="-122"/>
                 <a:cs typeface="Arial" pitchFamily="34" charset="-120"/>
               </a:rPr>
-              <a:t>  目白駅から徒歩わずか3分と大変便利です</a:t>
+              <a:t>  二泊しましたが駅近で便利</a:t>
             </a:r>
             <a:endParaRPr lang="en-US" sz="1100" dirty="0"/>
           </a:p>
@@ -5976,7 +5976,7 @@
                 <a:ea typeface="Arial" pitchFamily="34" charset="-122"/>
                 <a:cs typeface="Arial" pitchFamily="34" charset="-120"/>
               </a:rPr>
-              <a:t>  綺麗なのとアニメティが充実していて、スタッフの対応ロケーションも最高でした</a:t>
+              <a:t>  部屋は清潔で25㎡とやや広め、 浴槽とシャワーが別々、 スタッフ対応も良く非常に満足しました</a:t>
             </a:r>
             <a:endParaRPr lang="en-US" sz="1100" dirty="0"/>
           </a:p>
@@ -6124,7 +6124,7 @@
                 <a:ea typeface="Arial" pitchFamily="34" charset="-122"/>
                 <a:cs typeface="Arial" pitchFamily="34" charset="-120"/>
               </a:rPr>
-              <a:t>  La suite était très grande et la douche et les toilettes ...</a:t>
+              <a:t>  部屋は清潔で25㎡とやや広め、 浴槽とシャワーが別々、 スタッフ対応も良く非常に満足しました</a:t>
             </a:r>
             <a:endParaRPr lang="en-US" sz="1100" dirty="0"/>
           </a:p>
@@ -6557,7 +6557,7 @@
                 <a:ea typeface="Arial" pitchFamily="34" charset="-122"/>
                 <a:cs typeface="Arial" pitchFamily="34" charset="-120"/>
               </a:rPr>
-              <a:t>8.70</a:t>
+              <a:t>8.71</a:t>
             </a:r>
             <a:endParaRPr lang="en-US" sz="3200" dirty="0"/>
           </a:p>
@@ -6682,7 +6682,7 @@
                 <a:ea typeface="Arial" pitchFamily="34" charset="-122"/>
                 <a:cs typeface="Arial" pitchFamily="34" charset="-120"/>
               </a:rPr>
-              <a:t>86.0%</a:t>
+              <a:t>86.3%</a:t>
             </a:r>
             <a:endParaRPr lang="en-US" sz="3200" dirty="0"/>
           </a:p>
@@ -6932,7 +6932,7 @@
                 <a:ea typeface="Arial" pitchFamily="34" charset="-122"/>
                 <a:cs typeface="Arial" pitchFamily="34" charset="-120"/>
               </a:rPr>
-              <a:t>136件</a:t>
+              <a:t>139件</a:t>
             </a:r>
             <a:endParaRPr lang="en-US" sz="3200" dirty="0"/>
           </a:p>
@@ -7353,7 +7353,7 @@
                 <a:ea typeface="Arial" pitchFamily="34" charset="-122"/>
                 <a:cs typeface="Arial" pitchFamily="34" charset="-120"/>
               </a:rPr>
-              <a:t>Trip.com(9.38)が最高スコア。</a:t>
+              <a:t>Trip.com(9.36)が最高スコア。</a:t>
             </a:r>
             <a:endParaRPr lang="en-US" sz="1100" dirty="0"/>
           </a:p>
@@ -7402,7 +7402,7 @@
                 <a:ea typeface="Arial" pitchFamily="34" charset="-122"/>
                 <a:cs typeface="Arial" pitchFamily="34" charset="-120"/>
               </a:rPr>
-              <a:t>Booking.com(7.8)が相対的に低い。口コミ返信の強化が急務</a:t>
+              <a:t>Booking.com(7.9)が相対的に低い。口コミ返信の強化が急務</a:t>
             </a:r>
             <a:endParaRPr lang="en-US" sz="1100" dirty="0"/>
           </a:p>
@@ -7911,7 +7911,7 @@
                           <a:ea typeface="Arial" pitchFamily="34" charset="-122"/>
                           <a:cs typeface="Arial" pitchFamily="34" charset="-120"/>
                         </a:rPr>
-                        <a:t>32</a:t>
+                        <a:t>33</a:t>
                       </a:r>
                       <a:endParaRPr lang="en-US" sz="900" dirty="0">
                         <a:latin typeface="Arial" charset="0"/>
@@ -7979,7 +7979,7 @@
                           <a:ea typeface="Arial" pitchFamily="34" charset="-122"/>
                           <a:cs typeface="Arial" pitchFamily="34" charset="-120"/>
                         </a:rPr>
-                        <a:t>9.38</a:t>
+                        <a:t>9.36</a:t>
                       </a:r>
                       <a:endParaRPr lang="en-US" sz="900" dirty="0">
                         <a:latin typeface="Arial" charset="0"/>
@@ -8115,7 +8115,7 @@
                           <a:ea typeface="Arial" pitchFamily="34" charset="-122"/>
                           <a:cs typeface="Arial" pitchFamily="34" charset="-120"/>
                         </a:rPr>
-                        <a:t>9.38</a:t>
+                        <a:t>9.36</a:t>
                       </a:r>
                       <a:endParaRPr lang="en-US" sz="900" dirty="0">
                         <a:latin typeface="Arial" charset="0"/>
@@ -8253,7 +8253,7 @@
                           <a:ea typeface="Arial" pitchFamily="34" charset="-122"/>
                           <a:cs typeface="Arial" pitchFamily="34" charset="-120"/>
                         </a:rPr>
-                        <a:t>5</a:t>
+                        <a:t>6</a:t>
                       </a:r>
                       <a:endParaRPr lang="en-US" sz="900" dirty="0">
                         <a:latin typeface="Arial" charset="0"/>
@@ -8321,7 +8321,7 @@
                           <a:ea typeface="Arial" pitchFamily="34" charset="-122"/>
                           <a:cs typeface="Arial" pitchFamily="34" charset="-120"/>
                         </a:rPr>
-                        <a:t>9.2</a:t>
+                        <a:t>9.33</a:t>
                       </a:r>
                       <a:endParaRPr lang="en-US" sz="900" dirty="0">
                         <a:latin typeface="Arial" charset="0"/>
@@ -8457,7 +8457,7 @@
                           <a:ea typeface="Arial" pitchFamily="34" charset="-122"/>
                           <a:cs typeface="Arial" pitchFamily="34" charset="-120"/>
                         </a:rPr>
-                        <a:t>9.2</a:t>
+                        <a:t>9.33</a:t>
                       </a:r>
                       <a:endParaRPr lang="en-US" sz="900" dirty="0">
                         <a:latin typeface="Arial" charset="0"/>
@@ -8595,7 +8595,7 @@
                           <a:ea typeface="Arial" pitchFamily="34" charset="-122"/>
                           <a:cs typeface="Arial" pitchFamily="34" charset="-120"/>
                         </a:rPr>
-                        <a:t>26</a:t>
+                        <a:t>27</a:t>
                       </a:r>
                       <a:endParaRPr lang="en-US" sz="900" dirty="0">
                         <a:latin typeface="Arial" charset="0"/>
@@ -8663,7 +8663,7 @@
                           <a:ea typeface="Arial" pitchFamily="34" charset="-122"/>
                           <a:cs typeface="Arial" pitchFamily="34" charset="-120"/>
                         </a:rPr>
-                        <a:t>4.58</a:t>
+                        <a:t>4.56</a:t>
                       </a:r>
                       <a:endParaRPr lang="en-US" sz="900" dirty="0">
                         <a:latin typeface="Arial" charset="0"/>
@@ -8799,7 +8799,7 @@
                           <a:ea typeface="Arial" pitchFamily="34" charset="-122"/>
                           <a:cs typeface="Arial" pitchFamily="34" charset="-120"/>
                         </a:rPr>
-                        <a:t>9.15</a:t>
+                        <a:t>9.11</a:t>
                       </a:r>
                       <a:endParaRPr lang="en-US" sz="900" dirty="0">
                         <a:latin typeface="Arial" charset="0"/>
@@ -9689,7 +9689,7 @@
                           <a:ea typeface="Arial" pitchFamily="34" charset="-122"/>
                           <a:cs typeface="Arial" pitchFamily="34" charset="-120"/>
                         </a:rPr>
-                        <a:t>7.85</a:t>
+                        <a:t>7.88</a:t>
                       </a:r>
                       <a:endParaRPr lang="en-US" sz="900" dirty="0">
                         <a:latin typeface="Arial" charset="0"/>
@@ -9825,7 +9825,7 @@
                           <a:ea typeface="Arial" pitchFamily="34" charset="-122"/>
                           <a:cs typeface="Arial" pitchFamily="34" charset="-120"/>
                         </a:rPr>
-                        <a:t>7.85</a:t>
+                        <a:t>7.88</a:t>
                       </a:r>
                       <a:endParaRPr lang="en-US" sz="900" dirty="0">
                         <a:latin typeface="Arial" charset="0"/>
@@ -10233,7 +10233,7 @@
                 <a:ea typeface="Arial" pitchFamily="34" charset="-122"/>
                 <a:cs typeface="Arial" pitchFamily="34" charset="-120"/>
               </a:rPr>
-              <a:t>117件（86.0%）</a:t>
+              <a:t>120件（86.3%）</a:t>
             </a:r>
             <a:endParaRPr lang="en-US" sz="1100" dirty="0"/>
           </a:p>
@@ -10331,7 +10331,7 @@
                 <a:ea typeface="Arial" pitchFamily="34" charset="-122"/>
                 <a:cs typeface="Arial" pitchFamily="34" charset="-120"/>
               </a:rPr>
-              <a:t>16件（11.8%）</a:t>
+              <a:t>16件（11.5%）</a:t>
             </a:r>
             <a:endParaRPr lang="en-US" sz="1100" dirty="0"/>
           </a:p>
@@ -10841,7 +10841,7 @@
                 <a:ea typeface="Arial" pitchFamily="34" charset="-122"/>
                 <a:cs typeface="Arial" pitchFamily="34" charset="-120"/>
               </a:rPr>
-              <a:t>目白駅から徒歩わずか3分と大変便利です</a:t>
+              <a:t>二泊しましたが駅近で便利</a:t>
             </a:r>
             <a:endParaRPr lang="en-US" sz="900" dirty="0"/>
           </a:p>
@@ -10880,7 +10880,7 @@
                 <a:ea typeface="Arial" pitchFamily="34" charset="-122"/>
                 <a:cs typeface="Arial" pitchFamily="34" charset="-120"/>
               </a:rPr>
-              <a:t>「Good location 立地が良い」</a:t>
+              <a:t>「目白駅から徒歩わずか3分と大変便利です」</a:t>
             </a:r>
             <a:endParaRPr lang="en-US" sz="900" dirty="0"/>
           </a:p>
@@ -11209,7 +11209,7 @@
                 <a:ea typeface="Arial" pitchFamily="34" charset="-122"/>
                 <a:cs typeface="Arial" pitchFamily="34" charset="-120"/>
               </a:rPr>
-              <a:t>20件+</a:t>
+              <a:t>50件+</a:t>
             </a:r>
             <a:endParaRPr lang="en-US" sz="900" dirty="0"/>
           </a:p>
@@ -11287,7 +11287,7 @@
                 <a:ea typeface="Arial" pitchFamily="34" charset="-122"/>
                 <a:cs typeface="Arial" pitchFamily="34" charset="-120"/>
               </a:rPr>
-              <a:t>綺麗なのとアニメティが充実していて、スタッフの対応ロケーションも最高でした</a:t>
+              <a:t>部屋は清潔で25㎡とやや広め、 浴槽とシャワーが別々、 スタッフ対応も良く非常に満足しました</a:t>
             </a:r>
             <a:endParaRPr lang="en-US" sz="900" dirty="0"/>
           </a:p>
@@ -11326,7 +11326,7 @@
                 <a:ea typeface="Arial" pitchFamily="34" charset="-122"/>
                 <a:cs typeface="Arial" pitchFamily="34" charset="-120"/>
               </a:rPr>
-              <a:t>「ホテルのスタッフの皆様に心より感謝申し上げます」</a:t>
+              <a:t>「綺麗なのとアニメティが充実していて、スタッフの対応ロケーションも最高でした」</a:t>
             </a:r>
             <a:endParaRPr lang="en-US" sz="900" dirty="0"/>
           </a:p>
@@ -11510,7 +11510,7 @@
                 <a:ea typeface="Arial" pitchFamily="34" charset="-122"/>
                 <a:cs typeface="Arial" pitchFamily="34" charset="-120"/>
               </a:rPr>
-              <a:t>衛生状態：良好</a:t>
+              <a:t>利用した部屋は清潔で満足できました</a:t>
             </a:r>
             <a:endParaRPr lang="en-US" sz="900" dirty="0"/>
           </a:p>
@@ -11549,7 +11549,7 @@
                 <a:ea typeface="Arial" pitchFamily="34" charset="-122"/>
                 <a:cs typeface="Arial" pitchFamily="34" charset="-120"/>
               </a:rPr>
-              <a:t>「綺麗なのとアニメティが充実していて、スタッフの対応ロケーションも最高でした」</a:t>
+              <a:t>「部屋は清潔で25㎡とやや広め、 浴槽とシャワーが別々、 スタッフ対応も良く非常に満足しました」</a:t>
             </a:r>
             <a:endParaRPr lang="en-US" sz="900" dirty="0"/>
           </a:p>
@@ -12685,7 +12685,7 @@
                           <a:ea typeface="Arial" pitchFamily="34" charset="-122"/>
                           <a:cs typeface="Arial" pitchFamily="34" charset="-120"/>
                         </a:rPr>
-                        <a:t>La suite était très grande et la douche et les toilettes ...</a:t>
+                        <a:t>部屋は清潔で25㎡とやや広め、 浴槽とシャワーが別々、 スタッフ対応も良く非常に満足しました</a:t>
                       </a:r>
                       <a:endParaRPr lang="en-US" sz="900" dirty="0">
                         <a:latin typeface="Arial" charset="0"/>
@@ -12753,7 +12753,7 @@
                           <a:ea typeface="Arial" pitchFamily="34" charset="-122"/>
                           <a:cs typeface="Arial" pitchFamily="34" charset="-120"/>
                         </a:rPr>
-                        <a:t>21件</a:t>
+                        <a:t>23件</a:t>
                       </a:r>
                       <a:endParaRPr lang="en-US" sz="900" dirty="0">
                         <a:latin typeface="Arial" charset="0"/>
@@ -13027,7 +13027,7 @@
                           <a:ea typeface="Arial" pitchFamily="34" charset="-122"/>
                           <a:cs typeface="Arial" pitchFamily="34" charset="-120"/>
                         </a:rPr>
-                        <a:t>19件</a:t>
+                        <a:t>20件</a:t>
                       </a:r>
                       <a:endParaRPr lang="en-US" sz="900" dirty="0">
                         <a:latin typeface="Arial" charset="0"/>
@@ -14123,7 +14123,7 @@
                           <a:ea typeface="Arial" pitchFamily="34" charset="-122"/>
                           <a:cs typeface="Arial" pitchFamily="34" charset="-120"/>
                         </a:rPr>
-                        <a:t>4件</a:t>
+                        <a:t>5件</a:t>
                       </a:r>
                       <a:endParaRPr lang="en-US" sz="900" dirty="0">
                         <a:latin typeface="Arial" charset="0"/>

--- a/納品レポート/ホテル別レポート/richmond_mejiro_口コミ分析レポート.pptx
+++ b/納品レポート/ホテル別レポート/richmond_mejiro_口コミ分析レポート.pptx
@@ -220,10 +220,10 @@
                   <c:v>8.67</c:v>
                 </c:pt>
                 <c:pt idx="4">
-                  <c:v>8.42</c:v>
+                  <c:v>8.4</c:v>
                 </c:pt>
                 <c:pt idx="5">
-                  <c:v>7.88</c:v>
+                  <c:v>7.91</c:v>
                 </c:pt>
               </c:numCache>
             </c:numRef>
@@ -566,10 +566,10 @@
               <c:numCache>
                 <c:ptCount val="3"/>
                 <c:pt idx="0">
-                  <c:v>120</c:v>
+                  <c:v>121</c:v>
                 </c:pt>
                 <c:pt idx="1">
-                  <c:v>16</c:v>
+                  <c:v>15</c:v>
                 </c:pt>
                 <c:pt idx="2">
                   <c:v>3</c:v>
@@ -829,10 +829,10 @@
                   <c:v>16</c:v>
                 </c:pt>
                 <c:pt idx="2">
-                  <c:v>41</c:v>
+                  <c:v>42</c:v>
                 </c:pt>
                 <c:pt idx="3">
-                  <c:v>7</c:v>
+                  <c:v>6</c:v>
                 </c:pt>
                 <c:pt idx="4">
                   <c:v>6</c:v>
@@ -2818,7 +2818,7 @@
                 <a:ea typeface="Arial" pitchFamily="34" charset="-122"/>
                 <a:cs typeface="Arial" pitchFamily="34" charset="-120"/>
               </a:rPr>
-              <a:t>作成日：2026年3月25日</a:t>
+              <a:t>作成日：2026年3月26日</a:t>
             </a:r>
             <a:endParaRPr lang="en-US" sz="1000" dirty="0"/>
           </a:p>
@@ -3364,7 +3364,7 @@
                           <a:ea typeface="Arial" pitchFamily="34" charset="-122"/>
                           <a:cs typeface="Arial" pitchFamily="34" charset="-120"/>
                         </a:rPr>
-                        <a:t>8.71点</a:t>
+                        <a:t>8.72点</a:t>
                       </a:r>
                       <a:endParaRPr lang="en-US" sz="1000" dirty="0">
                         <a:latin typeface="Arial" charset="0"/>
@@ -3638,7 +3638,7 @@
                           <a:ea typeface="Arial" pitchFamily="34" charset="-122"/>
                           <a:cs typeface="Arial" pitchFamily="34" charset="-120"/>
                         </a:rPr>
-                        <a:t>86.3%</a:t>
+                        <a:t>87.1%</a:t>
                       </a:r>
                       <a:endParaRPr lang="en-US" sz="1000" dirty="0">
                         <a:latin typeface="Arial" charset="0"/>
@@ -3706,7 +3706,7 @@
                           <a:ea typeface="Arial" pitchFamily="34" charset="-122"/>
                           <a:cs typeface="Arial" pitchFamily="34" charset="-120"/>
                         </a:rPr>
-                        <a:t>91%以上</a:t>
+                        <a:t>92%以上</a:t>
                       </a:r>
                       <a:endParaRPr lang="en-US" sz="1000" dirty="0">
                         <a:latin typeface="Arial" charset="0"/>
@@ -4734,7 +4734,7 @@
                           <a:ea typeface="Arial" pitchFamily="34" charset="-122"/>
                           <a:cs typeface="Arial" pitchFamily="34" charset="-120"/>
                         </a:rPr>
-                        <a:t>約23件/期間</a:t>
+                        <a:t>約22件/期間</a:t>
                       </a:r>
                       <a:endParaRPr lang="en-US" sz="1000" dirty="0">
                         <a:latin typeface="Arial" charset="0"/>
@@ -5373,7 +5373,7 @@
                 <a:ea typeface="Arial" pitchFamily="34" charset="-122"/>
                 <a:cs typeface="Arial" pitchFamily="34" charset="-120"/>
               </a:rPr>
-              <a:t>8.71</a:t>
+              <a:t>8.72</a:t>
             </a:r>
             <a:endParaRPr lang="en-US" sz="3200" dirty="0"/>
           </a:p>
@@ -5498,7 +5498,7 @@
                 <a:ea typeface="Arial" pitchFamily="34" charset="-122"/>
                 <a:cs typeface="Arial" pitchFamily="34" charset="-120"/>
               </a:rPr>
-              <a:t>86.3%</a:t>
+              <a:t>87.1%</a:t>
             </a:r>
             <a:endParaRPr lang="en-US" sz="3200" dirty="0"/>
           </a:p>
@@ -5936,7 +5936,7 @@
                 <a:ea typeface="Arial" pitchFamily="34" charset="-122"/>
                 <a:cs typeface="Arial" pitchFamily="34" charset="-120"/>
               </a:rPr>
-              <a:t>  目白站出來走3分鐘就到了，非常方便 設備：必要なアメニティはすべて揃っており、各階段の下には温水が出る給水器が設置...</a:t>
+              <a:t>  目白站出來走3分鐘就到了，非常方便 設備：必要なアメニティはすべて揃っており、各階段の下には温水が出る給水器も設置...</a:t>
             </a:r>
             <a:endParaRPr lang="en-US" sz="1100" dirty="0"/>
           </a:p>
@@ -6557,7 +6557,7 @@
                 <a:ea typeface="Arial" pitchFamily="34" charset="-122"/>
                 <a:cs typeface="Arial" pitchFamily="34" charset="-120"/>
               </a:rPr>
-              <a:t>8.71</a:t>
+              <a:t>8.72</a:t>
             </a:r>
             <a:endParaRPr lang="en-US" sz="3200" dirty="0"/>
           </a:p>
@@ -6682,7 +6682,7 @@
                 <a:ea typeface="Arial" pitchFamily="34" charset="-122"/>
                 <a:cs typeface="Arial" pitchFamily="34" charset="-120"/>
               </a:rPr>
-              <a:t>86.3%</a:t>
+              <a:t>87.1%</a:t>
             </a:r>
             <a:endParaRPr lang="en-US" sz="3200" dirty="0"/>
           </a:p>
@@ -9279,7 +9279,7 @@
                           <a:ea typeface="Arial" pitchFamily="34" charset="-122"/>
                           <a:cs typeface="Arial" pitchFamily="34" charset="-120"/>
                         </a:rPr>
-                        <a:t>24</a:t>
+                        <a:t>25</a:t>
                       </a:r>
                       <a:endParaRPr lang="en-US" sz="900" dirty="0">
                         <a:latin typeface="Arial" charset="0"/>
@@ -9347,7 +9347,7 @@
                           <a:ea typeface="Arial" pitchFamily="34" charset="-122"/>
                           <a:cs typeface="Arial" pitchFamily="34" charset="-120"/>
                         </a:rPr>
-                        <a:t>4.21</a:t>
+                        <a:t>4.2</a:t>
                       </a:r>
                       <a:endParaRPr lang="en-US" sz="900" dirty="0">
                         <a:latin typeface="Arial" charset="0"/>
@@ -9483,7 +9483,7 @@
                           <a:ea typeface="Arial" pitchFamily="34" charset="-122"/>
                           <a:cs typeface="Arial" pitchFamily="34" charset="-120"/>
                         </a:rPr>
-                        <a:t>8.42</a:t>
+                        <a:t>8.4</a:t>
                       </a:r>
                       <a:endParaRPr lang="en-US" sz="900" dirty="0">
                         <a:latin typeface="Arial" charset="0"/>
@@ -9621,7 +9621,7 @@
                           <a:ea typeface="Arial" pitchFamily="34" charset="-122"/>
                           <a:cs typeface="Arial" pitchFamily="34" charset="-120"/>
                         </a:rPr>
-                        <a:t>34</a:t>
+                        <a:t>33</a:t>
                       </a:r>
                       <a:endParaRPr lang="en-US" sz="900" dirty="0">
                         <a:latin typeface="Arial" charset="0"/>
@@ -9689,7 +9689,7 @@
                           <a:ea typeface="Arial" pitchFamily="34" charset="-122"/>
                           <a:cs typeface="Arial" pitchFamily="34" charset="-120"/>
                         </a:rPr>
-                        <a:t>7.88</a:t>
+                        <a:t>7.91</a:t>
                       </a:r>
                       <a:endParaRPr lang="en-US" sz="900" dirty="0">
                         <a:latin typeface="Arial" charset="0"/>
@@ -9825,7 +9825,7 @@
                           <a:ea typeface="Arial" pitchFamily="34" charset="-122"/>
                           <a:cs typeface="Arial" pitchFamily="34" charset="-120"/>
                         </a:rPr>
-                        <a:t>7.88</a:t>
+                        <a:t>7.91</a:t>
                       </a:r>
                       <a:endParaRPr lang="en-US" sz="900" dirty="0">
                         <a:latin typeface="Arial" charset="0"/>
@@ -10233,7 +10233,7 @@
                 <a:ea typeface="Arial" pitchFamily="34" charset="-122"/>
                 <a:cs typeface="Arial" pitchFamily="34" charset="-120"/>
               </a:rPr>
-              <a:t>120件（86.3%）</a:t>
+              <a:t>121件（87.1%）</a:t>
             </a:r>
             <a:endParaRPr lang="en-US" sz="1100" dirty="0"/>
           </a:p>
@@ -10331,7 +10331,7 @@
                 <a:ea typeface="Arial" pitchFamily="34" charset="-122"/>
                 <a:cs typeface="Arial" pitchFamily="34" charset="-120"/>
               </a:rPr>
-              <a:t>16件（11.5%）</a:t>
+              <a:t>15件（10.8%）</a:t>
             </a:r>
             <a:endParaRPr lang="en-US" sz="1100" dirty="0"/>
           </a:p>
@@ -11064,7 +11064,7 @@
                 <a:ea typeface="Arial" pitchFamily="34" charset="-122"/>
                 <a:cs typeface="Arial" pitchFamily="34" charset="-120"/>
               </a:rPr>
-              <a:t>目白站出來走3分鐘就到了，非常方便 設備：必要なアメニティはすべて揃っており、各階段の下には温水が出る給水器が設置...</a:t>
+              <a:t>目白站出來走3分鐘就到了，非常方便 設備：必要なアメニティはすべて揃っており、各階段の下には温水が出る給水器も設置...</a:t>
             </a:r>
             <a:endParaRPr lang="en-US" sz="900" dirty="0"/>
           </a:p>
@@ -11209,7 +11209,7 @@
                 <a:ea typeface="Arial" pitchFamily="34" charset="-122"/>
                 <a:cs typeface="Arial" pitchFamily="34" charset="-120"/>
               </a:rPr>
-              <a:t>50件+</a:t>
+              <a:t>20件+</a:t>
             </a:r>
             <a:endParaRPr lang="en-US" sz="900" dirty="0"/>
           </a:p>
@@ -12753,7 +12753,7 @@
                           <a:ea typeface="Arial" pitchFamily="34" charset="-122"/>
                           <a:cs typeface="Arial" pitchFamily="34" charset="-120"/>
                         </a:rPr>
-                        <a:t>23件</a:t>
+                        <a:t>22件</a:t>
                       </a:r>
                       <a:endParaRPr lang="en-US" sz="900" dirty="0">
                         <a:latin typeface="Arial" charset="0"/>
@@ -14123,7 +14123,7 @@
                           <a:ea typeface="Arial" pitchFamily="34" charset="-122"/>
                           <a:cs typeface="Arial" pitchFamily="34" charset="-120"/>
                         </a:rPr>
-                        <a:t>5件</a:t>
+                        <a:t>4件</a:t>
                       </a:r>
                       <a:endParaRPr lang="en-US" sz="900" dirty="0">
                         <a:latin typeface="Arial" charset="0"/>

--- a/納品レポート/ホテル別レポート/richmond_mejiro_口コミ分析レポート.pptx
+++ b/納品レポート/ホテル別レポート/richmond_mejiro_口コミ分析レポート.pptx
@@ -208,13 +208,13 @@
                 <c:formatCode>General</c:formatCode>
                 <c:ptCount val="6"/>
                 <c:pt idx="0">
-                  <c:v>9.36</c:v>
+                  <c:v>9.44</c:v>
                 </c:pt>
                 <c:pt idx="1">
                   <c:v>9.33</c:v>
                 </c:pt>
                 <c:pt idx="2">
-                  <c:v>9.11</c:v>
+                  <c:v>9.08</c:v>
                 </c:pt>
                 <c:pt idx="3">
                   <c:v>8.67</c:v>
@@ -223,7 +223,7 @@
                   <c:v>8.4</c:v>
                 </c:pt>
                 <c:pt idx="5">
-                  <c:v>7.91</c:v>
+                  <c:v>7.88</c:v>
                 </c:pt>
               </c:numCache>
             </c:numRef>
@@ -569,7 +569,7 @@
                   <c:v>121</c:v>
                 </c:pt>
                 <c:pt idx="1">
-                  <c:v>15</c:v>
+                  <c:v>16</c:v>
                 </c:pt>
                 <c:pt idx="2">
                   <c:v>3</c:v>
@@ -823,16 +823,16 @@
                 <c:formatCode>General</c:formatCode>
                 <c:ptCount val="9"/>
                 <c:pt idx="0">
-                  <c:v>63</c:v>
+                  <c:v>64</c:v>
                 </c:pt>
                 <c:pt idx="1">
                   <c:v>16</c:v>
                 </c:pt>
                 <c:pt idx="2">
-                  <c:v>42</c:v>
+                  <c:v>41</c:v>
                 </c:pt>
                 <c:pt idx="3">
-                  <c:v>6</c:v>
+                  <c:v>7</c:v>
                 </c:pt>
                 <c:pt idx="4">
                   <c:v>6</c:v>
@@ -2798,7 +2798,7 @@
                 <a:ea typeface="Arial" pitchFamily="34" charset="-122"/>
                 <a:cs typeface="Arial" pitchFamily="34" charset="-120"/>
               </a:rPr>
-              <a:t>レビュー総数：139件（6サイト）</a:t>
+              <a:t>レビュー総数：140件（6サイト）</a:t>
             </a:r>
             <a:endParaRPr lang="en-US" sz="1000" dirty="0"/>
           </a:p>
@@ -2818,7 +2818,7 @@
                 <a:ea typeface="Arial" pitchFamily="34" charset="-122"/>
                 <a:cs typeface="Arial" pitchFamily="34" charset="-120"/>
               </a:rPr>
-              <a:t>作成日：2026年3月26日</a:t>
+              <a:t>作成日：2026年3月27日</a:t>
             </a:r>
             <a:endParaRPr lang="en-US" sz="1000" dirty="0"/>
           </a:p>
@@ -3638,7 +3638,7 @@
                           <a:ea typeface="Arial" pitchFamily="34" charset="-122"/>
                           <a:cs typeface="Arial" pitchFamily="34" charset="-120"/>
                         </a:rPr>
-                        <a:t>87.1%</a:t>
+                        <a:t>86.4%</a:t>
                       </a:r>
                       <a:endParaRPr lang="en-US" sz="1000" dirty="0">
                         <a:latin typeface="Arial" charset="0"/>
@@ -3706,7 +3706,7 @@
                           <a:ea typeface="Arial" pitchFamily="34" charset="-122"/>
                           <a:cs typeface="Arial" pitchFamily="34" charset="-120"/>
                         </a:rPr>
-                        <a:t>92%以上</a:t>
+                        <a:t>91%以上</a:t>
                       </a:r>
                       <a:endParaRPr lang="en-US" sz="1000" dirty="0">
                         <a:latin typeface="Arial" charset="0"/>
@@ -3912,7 +3912,7 @@
                           <a:ea typeface="Arial" pitchFamily="34" charset="-122"/>
                           <a:cs typeface="Arial" pitchFamily="34" charset="-120"/>
                         </a:rPr>
-                        <a:t>2.2%</a:t>
+                        <a:t>2.1%</a:t>
                       </a:r>
                       <a:endParaRPr lang="en-US" sz="1000" dirty="0">
                         <a:latin typeface="Arial" charset="0"/>
@@ -4734,7 +4734,7 @@
                           <a:ea typeface="Arial" pitchFamily="34" charset="-122"/>
                           <a:cs typeface="Arial" pitchFamily="34" charset="-120"/>
                         </a:rPr>
-                        <a:t>約22件/期間</a:t>
+                        <a:t>約24件/期間</a:t>
                       </a:r>
                       <a:endParaRPr lang="en-US" sz="1000" dirty="0">
                         <a:latin typeface="Arial" charset="0"/>
@@ -4802,7 +4802,7 @@
                           <a:ea typeface="Arial" pitchFamily="34" charset="-122"/>
                           <a:cs typeface="Arial" pitchFamily="34" charset="-120"/>
                         </a:rPr>
-                        <a:t>11件以下</a:t>
+                        <a:t>12件以下</a:t>
                       </a:r>
                       <a:endParaRPr lang="en-US" sz="1000" dirty="0">
                         <a:latin typeface="Arial" charset="0"/>
@@ -5498,7 +5498,7 @@
                 <a:ea typeface="Arial" pitchFamily="34" charset="-122"/>
                 <a:cs typeface="Arial" pitchFamily="34" charset="-120"/>
               </a:rPr>
-              <a:t>87.1%</a:t>
+              <a:t>86.4%</a:t>
             </a:r>
             <a:endParaRPr lang="en-US" sz="3200" dirty="0"/>
           </a:p>
@@ -5623,7 +5623,7 @@
                 <a:ea typeface="Arial" pitchFamily="34" charset="-122"/>
                 <a:cs typeface="Arial" pitchFamily="34" charset="-120"/>
               </a:rPr>
-              <a:t>2.2%</a:t>
+              <a:t>2.1%</a:t>
             </a:r>
             <a:endParaRPr lang="en-US" sz="3200" dirty="0"/>
           </a:p>
@@ -5748,7 +5748,7 @@
                 <a:ea typeface="Arial" pitchFamily="34" charset="-122"/>
                 <a:cs typeface="Arial" pitchFamily="34" charset="-120"/>
               </a:rPr>
-              <a:t>139件</a:t>
+              <a:t>140件</a:t>
             </a:r>
             <a:endParaRPr lang="en-US" sz="3200" dirty="0"/>
           </a:p>
@@ -5896,7 +5896,7 @@
                 <a:ea typeface="Arial" pitchFamily="34" charset="-122"/>
                 <a:cs typeface="Arial" pitchFamily="34" charset="-120"/>
               </a:rPr>
-              <a:t>  二泊しましたが駅近で便利</a:t>
+              <a:t>  ホテルは立地が良く、サービスも素晴らしく、部屋も清潔です</a:t>
             </a:r>
             <a:endParaRPr lang="en-US" sz="1100" dirty="0"/>
           </a:p>
@@ -5936,7 +5936,7 @@
                 <a:ea typeface="Arial" pitchFamily="34" charset="-122"/>
                 <a:cs typeface="Arial" pitchFamily="34" charset="-120"/>
               </a:rPr>
-              <a:t>  目白站出來走3分鐘就到了，非常方便 設備：必要なアメニティはすべて揃っており、各階段の下には温水が出る給水器も設置...</a:t>
+              <a:t>  快適なベッド、エアコン、清潔なバスルーム、大型テレビなど、設備が整った素敵なお部屋です</a:t>
             </a:r>
             <a:endParaRPr lang="en-US" sz="1100" dirty="0"/>
           </a:p>
@@ -5976,7 +5976,7 @@
                 <a:ea typeface="Arial" pitchFamily="34" charset="-122"/>
                 <a:cs typeface="Arial" pitchFamily="34" charset="-120"/>
               </a:rPr>
-              <a:t>  部屋は清潔で25㎡とやや広め、 浴槽とシャワーが別々、 スタッフ対応も良く非常に満足しました</a:t>
+              <a:t>  ホテルは立地が良く、サービスも素晴らしく、部屋も清潔です</a:t>
             </a:r>
             <a:endParaRPr lang="en-US" sz="1100" dirty="0"/>
           </a:p>
@@ -6124,7 +6124,7 @@
                 <a:ea typeface="Arial" pitchFamily="34" charset="-122"/>
                 <a:cs typeface="Arial" pitchFamily="34" charset="-120"/>
               </a:rPr>
-              <a:t>  部屋は清潔で25㎡とやや広め、 浴槽とシャワーが別々、 スタッフ対応も良く非常に満足しました</a:t>
+              <a:t>  快適なベッド、エアコン、清潔なバスルーム、大型テレビなど、設備が整った素敵なお部屋です</a:t>
             </a:r>
             <a:endParaRPr lang="en-US" sz="1100" dirty="0"/>
           </a:p>
@@ -6164,7 +6164,7 @@
                 <a:ea typeface="Arial" pitchFamily="34" charset="-122"/>
                 <a:cs typeface="Arial" pitchFamily="34" charset="-120"/>
               </a:rPr>
-              <a:t>  Lovely simple breakfast and room space is good enough for...</a:t>
+              <a:t>  Hotel be ubicato</a:t>
             </a:r>
             <a:endParaRPr lang="en-US" sz="1100" dirty="0"/>
           </a:p>
@@ -6682,7 +6682,7 @@
                 <a:ea typeface="Arial" pitchFamily="34" charset="-122"/>
                 <a:cs typeface="Arial" pitchFamily="34" charset="-120"/>
               </a:rPr>
-              <a:t>87.1%</a:t>
+              <a:t>86.4%</a:t>
             </a:r>
             <a:endParaRPr lang="en-US" sz="3200" dirty="0"/>
           </a:p>
@@ -6807,7 +6807,7 @@
                 <a:ea typeface="Arial" pitchFamily="34" charset="-122"/>
                 <a:cs typeface="Arial" pitchFamily="34" charset="-120"/>
               </a:rPr>
-              <a:t>2.2%</a:t>
+              <a:t>2.1%</a:t>
             </a:r>
             <a:endParaRPr lang="en-US" sz="3200" dirty="0"/>
           </a:p>
@@ -6932,7 +6932,7 @@
                 <a:ea typeface="Arial" pitchFamily="34" charset="-122"/>
                 <a:cs typeface="Arial" pitchFamily="34" charset="-120"/>
               </a:rPr>
-              <a:t>139件</a:t>
+              <a:t>140件</a:t>
             </a:r>
             <a:endParaRPr lang="en-US" sz="3200" dirty="0"/>
           </a:p>
@@ -7353,7 +7353,7 @@
                 <a:ea typeface="Arial" pitchFamily="34" charset="-122"/>
                 <a:cs typeface="Arial" pitchFamily="34" charset="-120"/>
               </a:rPr>
-              <a:t>Trip.com(9.36)が最高スコア。</a:t>
+              <a:t>Trip.com(9.44)が最高スコア。</a:t>
             </a:r>
             <a:endParaRPr lang="en-US" sz="1100" dirty="0"/>
           </a:p>
@@ -7911,7 +7911,7 @@
                           <a:ea typeface="Arial" pitchFamily="34" charset="-122"/>
                           <a:cs typeface="Arial" pitchFamily="34" charset="-120"/>
                         </a:rPr>
-                        <a:t>33</a:t>
+                        <a:t>34</a:t>
                       </a:r>
                       <a:endParaRPr lang="en-US" sz="900" dirty="0">
                         <a:latin typeface="Arial" charset="0"/>
@@ -7979,7 +7979,7 @@
                           <a:ea typeface="Arial" pitchFamily="34" charset="-122"/>
                           <a:cs typeface="Arial" pitchFamily="34" charset="-120"/>
                         </a:rPr>
-                        <a:t>9.36</a:t>
+                        <a:t>9.44</a:t>
                       </a:r>
                       <a:endParaRPr lang="en-US" sz="900" dirty="0">
                         <a:latin typeface="Arial" charset="0"/>
@@ -8115,7 +8115,7 @@
                           <a:ea typeface="Arial" pitchFamily="34" charset="-122"/>
                           <a:cs typeface="Arial" pitchFamily="34" charset="-120"/>
                         </a:rPr>
-                        <a:t>9.36</a:t>
+                        <a:t>9.44</a:t>
                       </a:r>
                       <a:endParaRPr lang="en-US" sz="900" dirty="0">
                         <a:latin typeface="Arial" charset="0"/>
@@ -8595,7 +8595,7 @@
                           <a:ea typeface="Arial" pitchFamily="34" charset="-122"/>
                           <a:cs typeface="Arial" pitchFamily="34" charset="-120"/>
                         </a:rPr>
-                        <a:t>27</a:t>
+                        <a:t>26</a:t>
                       </a:r>
                       <a:endParaRPr lang="en-US" sz="900" dirty="0">
                         <a:latin typeface="Arial" charset="0"/>
@@ -8663,7 +8663,7 @@
                           <a:ea typeface="Arial" pitchFamily="34" charset="-122"/>
                           <a:cs typeface="Arial" pitchFamily="34" charset="-120"/>
                         </a:rPr>
-                        <a:t>4.56</a:t>
+                        <a:t>4.54</a:t>
                       </a:r>
                       <a:endParaRPr lang="en-US" sz="900" dirty="0">
                         <a:latin typeface="Arial" charset="0"/>
@@ -8799,7 +8799,7 @@
                           <a:ea typeface="Arial" pitchFamily="34" charset="-122"/>
                           <a:cs typeface="Arial" pitchFamily="34" charset="-120"/>
                         </a:rPr>
-                        <a:t>9.11</a:t>
+                        <a:t>9.08</a:t>
                       </a:r>
                       <a:endParaRPr lang="en-US" sz="900" dirty="0">
                         <a:latin typeface="Arial" charset="0"/>
@@ -9621,7 +9621,7 @@
                           <a:ea typeface="Arial" pitchFamily="34" charset="-122"/>
                           <a:cs typeface="Arial" pitchFamily="34" charset="-120"/>
                         </a:rPr>
-                        <a:t>33</a:t>
+                        <a:t>34</a:t>
                       </a:r>
                       <a:endParaRPr lang="en-US" sz="900" dirty="0">
                         <a:latin typeface="Arial" charset="0"/>
@@ -9689,7 +9689,7 @@
                           <a:ea typeface="Arial" pitchFamily="34" charset="-122"/>
                           <a:cs typeface="Arial" pitchFamily="34" charset="-120"/>
                         </a:rPr>
-                        <a:t>7.91</a:t>
+                        <a:t>7.88</a:t>
                       </a:r>
                       <a:endParaRPr lang="en-US" sz="900" dirty="0">
                         <a:latin typeface="Arial" charset="0"/>
@@ -9825,7 +9825,7 @@
                           <a:ea typeface="Arial" pitchFamily="34" charset="-122"/>
                           <a:cs typeface="Arial" pitchFamily="34" charset="-120"/>
                         </a:rPr>
-                        <a:t>7.91</a:t>
+                        <a:t>7.88</a:t>
                       </a:r>
                       <a:endParaRPr lang="en-US" sz="900" dirty="0">
                         <a:latin typeface="Arial" charset="0"/>
@@ -10233,7 +10233,7 @@
                 <a:ea typeface="Arial" pitchFamily="34" charset="-122"/>
                 <a:cs typeface="Arial" pitchFamily="34" charset="-120"/>
               </a:rPr>
-              <a:t>121件（87.1%）</a:t>
+              <a:t>121件（86.4%）</a:t>
             </a:r>
             <a:endParaRPr lang="en-US" sz="1100" dirty="0"/>
           </a:p>
@@ -10331,7 +10331,7 @@
                 <a:ea typeface="Arial" pitchFamily="34" charset="-122"/>
                 <a:cs typeface="Arial" pitchFamily="34" charset="-120"/>
               </a:rPr>
-              <a:t>15件（10.8%）</a:t>
+              <a:t>16件（11.4%）</a:t>
             </a:r>
             <a:endParaRPr lang="en-US" sz="1100" dirty="0"/>
           </a:p>
@@ -10429,7 +10429,7 @@
                 <a:ea typeface="Arial" pitchFamily="34" charset="-122"/>
                 <a:cs typeface="Arial" pitchFamily="34" charset="-120"/>
               </a:rPr>
-              <a:t>3件（2.2%）</a:t>
+              <a:t>3件（2.1%）</a:t>
             </a:r>
             <a:endParaRPr lang="en-US" sz="1100" dirty="0"/>
           </a:p>
@@ -10841,7 +10841,7 @@
                 <a:ea typeface="Arial" pitchFamily="34" charset="-122"/>
                 <a:cs typeface="Arial" pitchFamily="34" charset="-120"/>
               </a:rPr>
-              <a:t>二泊しましたが駅近で便利</a:t>
+              <a:t>ホテルは立地が良く、サービスも素晴らしく、部屋も清潔です</a:t>
             </a:r>
             <a:endParaRPr lang="en-US" sz="900" dirty="0"/>
           </a:p>
@@ -10880,7 +10880,7 @@
                 <a:ea typeface="Arial" pitchFamily="34" charset="-122"/>
                 <a:cs typeface="Arial" pitchFamily="34" charset="-120"/>
               </a:rPr>
-              <a:t>「目白駅から徒歩わずか3分と大変便利です」</a:t>
+              <a:t>「そして何より、明治路駅に近いという立地の良さが魅力です」</a:t>
             </a:r>
             <a:endParaRPr lang="en-US" sz="900" dirty="0"/>
           </a:p>
@@ -11064,7 +11064,7 @@
                 <a:ea typeface="Arial" pitchFamily="34" charset="-122"/>
                 <a:cs typeface="Arial" pitchFamily="34" charset="-120"/>
               </a:rPr>
-              <a:t>目白站出來走3分鐘就到了，非常方便 設備：必要なアメニティはすべて揃っており、各階段の下には温水が出る給水器も設置...</a:t>
+              <a:t>快適なベッド、エアコン、清潔なバスルーム、大型テレビなど、設備が整った素敵なお部屋です</a:t>
             </a:r>
             <a:endParaRPr lang="en-US" sz="900" dirty="0"/>
           </a:p>
@@ -11103,7 +11103,7 @@
                 <a:ea typeface="Arial" pitchFamily="34" charset="-122"/>
                 <a:cs typeface="Arial" pitchFamily="34" charset="-120"/>
               </a:rPr>
-              <a:t>「Tout un panel d'équipements mis a disposition des clients...」</a:t>
+              <a:t>「目白站出來走3分鐘就到了，非常方便 設備：必要なアメニティはすべて揃っており、各階段の下には温水が出る給水器が設置...」</a:t>
             </a:r>
             <a:endParaRPr lang="en-US" sz="900" dirty="0"/>
           </a:p>
@@ -11185,6 +11185,229 @@
         <p:spPr>
           <a:xfrm>
             <a:off x="7955280" y="1124712"/>
+            <a:ext cx="658368" cy="228600"/>
+          </a:xfrm>
+          <a:prstGeom prst="rect">
+            <a:avLst/>
+          </a:prstGeom>
+          <a:noFill/>
+          <a:ln/>
+        </p:spPr>
+        <p:txBody>
+          <a:bodyPr wrap="square" lIns="0" tIns="0" rIns="0" bIns="0" rtlCol="0" anchor="ctr"/>
+          <a:lstStyle/>
+          <a:p>
+            <a:pPr algn="ctr" indent="0" marL="0">
+              <a:buNone/>
+            </a:pPr>
+            <a:r>
+              <a:rPr lang="en-US" sz="900" b="1" dirty="0">
+                <a:solidFill>
+                  <a:srgbClr val="16A34A"/>
+                </a:solidFill>
+                <a:latin typeface="Arial" pitchFamily="34" charset="0"/>
+                <a:ea typeface="Arial" pitchFamily="34" charset="-122"/>
+                <a:cs typeface="Arial" pitchFamily="34" charset="-120"/>
+              </a:rPr>
+              <a:t>50件+</a:t>
+            </a:r>
+            <a:endParaRPr lang="en-US" sz="900" dirty="0"/>
+          </a:p>
+        </p:txBody>
+      </p:sp>
+      <p:sp>
+        <p:nvSpPr>
+          <p:cNvPr id="23" name="Text 21"/>
+          <p:cNvSpPr/>
+          <p:nvPr/>
+        </p:nvSpPr>
+        <p:spPr>
+          <a:xfrm>
+            <a:off x="6263640" y="1124712"/>
+            <a:ext cx="1645920" cy="274320"/>
+          </a:xfrm>
+          <a:prstGeom prst="rect">
+            <a:avLst/>
+          </a:prstGeom>
+          <a:noFill/>
+          <a:ln/>
+        </p:spPr>
+        <p:txBody>
+          <a:bodyPr wrap="square" lIns="0" tIns="0" rIns="0" bIns="0" rtlCol="0" anchor="ctr"/>
+          <a:lstStyle/>
+          <a:p>
+            <a:pPr indent="0" marL="0">
+              <a:buNone/>
+            </a:pPr>
+            <a:r>
+              <a:rPr lang="en-US" sz="1300" b="1" dirty="0">
+                <a:solidFill>
+                  <a:srgbClr val="1A2744"/>
+                </a:solidFill>
+                <a:latin typeface="Arial" pitchFamily="34" charset="0"/>
+                <a:ea typeface="Arial" pitchFamily="34" charset="-122"/>
+                <a:cs typeface="Arial" pitchFamily="34" charset="-120"/>
+              </a:rPr>
+              <a:t>スタッフの対応</a:t>
+            </a:r>
+            <a:endParaRPr lang="en-US" sz="1300" dirty="0"/>
+          </a:p>
+        </p:txBody>
+      </p:sp>
+      <p:sp>
+        <p:nvSpPr>
+          <p:cNvPr id="24" name="Text 22"/>
+          <p:cNvSpPr/>
+          <p:nvPr/>
+        </p:nvSpPr>
+        <p:spPr>
+          <a:xfrm>
+            <a:off x="6263640" y="1417320"/>
+            <a:ext cx="2377440" cy="365760"/>
+          </a:xfrm>
+          <a:prstGeom prst="rect">
+            <a:avLst/>
+          </a:prstGeom>
+          <a:noFill/>
+          <a:ln/>
+        </p:spPr>
+        <p:txBody>
+          <a:bodyPr wrap="square" lIns="0" tIns="0" rIns="0" bIns="0" rtlCol="0" anchor="ctr"/>
+          <a:lstStyle/>
+          <a:p>
+            <a:pPr indent="0" marL="0">
+              <a:buNone/>
+            </a:pPr>
+            <a:r>
+              <a:rPr lang="en-US" sz="900" dirty="0">
+                <a:solidFill>
+                  <a:srgbClr val="64748B"/>
+                </a:solidFill>
+                <a:latin typeface="Arial" pitchFamily="34" charset="0"/>
+                <a:ea typeface="Arial" pitchFamily="34" charset="-122"/>
+                <a:cs typeface="Arial" pitchFamily="34" charset="-120"/>
+              </a:rPr>
+              <a:t>ホテルは立地が良く、サービスも素晴らしく、部屋も清潔です</a:t>
+            </a:r>
+            <a:endParaRPr lang="en-US" sz="900" dirty="0"/>
+          </a:p>
+        </p:txBody>
+      </p:sp>
+      <p:sp>
+        <p:nvSpPr>
+          <p:cNvPr id="25" name="Text 23"/>
+          <p:cNvSpPr/>
+          <p:nvPr/>
+        </p:nvSpPr>
+        <p:spPr>
+          <a:xfrm>
+            <a:off x="6263640" y="1828800"/>
+            <a:ext cx="2377440" cy="640080"/>
+          </a:xfrm>
+          <a:prstGeom prst="rect">
+            <a:avLst/>
+          </a:prstGeom>
+          <a:noFill/>
+          <a:ln/>
+        </p:spPr>
+        <p:txBody>
+          <a:bodyPr wrap="square" lIns="0" tIns="0" rIns="0" bIns="0" rtlCol="0" anchor="ctr"/>
+          <a:lstStyle/>
+          <a:p>
+            <a:pPr indent="0" marL="0">
+              <a:buNone/>
+            </a:pPr>
+            <a:r>
+              <a:rPr lang="en-US" sz="900" i="1" dirty="0">
+                <a:solidFill>
+                  <a:srgbClr val="3B7DD8"/>
+                </a:solidFill>
+                <a:latin typeface="Arial" pitchFamily="34" charset="0"/>
+                <a:ea typeface="Arial" pitchFamily="34" charset="-122"/>
+                <a:cs typeface="Arial" pitchFamily="34" charset="-120"/>
+              </a:rPr>
+              <a:t>「スタッフの方々もとても親切で親身になって対応してくれます」</a:t>
+            </a:r>
+            <a:endParaRPr lang="en-US" sz="900" dirty="0"/>
+          </a:p>
+        </p:txBody>
+      </p:sp>
+      <p:sp>
+        <p:nvSpPr>
+          <p:cNvPr id="26" name="Shape 24"/>
+          <p:cNvSpPr/>
+          <p:nvPr/>
+        </p:nvSpPr>
+        <p:spPr>
+          <a:xfrm>
+            <a:off x="457200" y="2880360"/>
+            <a:ext cx="2651760" cy="1600200"/>
+          </a:xfrm>
+          <a:prstGeom prst="rect">
+            <a:avLst/>
+          </a:prstGeom>
+          <a:solidFill>
+            <a:srgbClr val="FFFFFF"/>
+          </a:solidFill>
+          <a:ln/>
+          <a:effectLst>
+            <a:outerShdw sx="100000" sy="100000" kx="0" ky="0" algn="bl" rotWithShape="0" blurRad="50800" dist="25400" dir="8100000">
+              <a:srgbClr val="000000">
+                <a:alpha val="10000"/>
+              </a:srgbClr>
+            </a:outerShdw>
+          </a:effectLst>
+        </p:spPr>
+      </p:sp>
+      <p:sp>
+        <p:nvSpPr>
+          <p:cNvPr id="27" name="Shape 25"/>
+          <p:cNvSpPr/>
+          <p:nvPr/>
+        </p:nvSpPr>
+        <p:spPr>
+          <a:xfrm>
+            <a:off x="457200" y="2880360"/>
+            <a:ext cx="54864" cy="1600200"/>
+          </a:xfrm>
+          <a:prstGeom prst="rect">
+            <a:avLst/>
+          </a:prstGeom>
+          <a:solidFill>
+            <a:srgbClr val="16A34A"/>
+          </a:solidFill>
+          <a:ln/>
+        </p:spPr>
+      </p:sp>
+      <p:sp>
+        <p:nvSpPr>
+          <p:cNvPr id="28" name="Shape 26"/>
+          <p:cNvSpPr/>
+          <p:nvPr/>
+        </p:nvSpPr>
+        <p:spPr>
+          <a:xfrm>
+            <a:off x="2286000" y="2953512"/>
+            <a:ext cx="658368" cy="228600"/>
+          </a:xfrm>
+          <a:prstGeom prst="rect">
+            <a:avLst/>
+          </a:prstGeom>
+          <a:solidFill>
+            <a:srgbClr val="DCFCE7"/>
+          </a:solidFill>
+          <a:ln/>
+        </p:spPr>
+      </p:sp>
+      <p:sp>
+        <p:nvSpPr>
+          <p:cNvPr id="29" name="Text 27"/>
+          <p:cNvSpPr/>
+          <p:nvPr/>
+        </p:nvSpPr>
+        <p:spPr>
+          <a:xfrm>
+            <a:off x="2286000" y="2953512"/>
             <a:ext cx="658368" cy="228600"/>
           </a:xfrm>
           <a:prstGeom prst="rect">
@@ -11217,13 +11440,13 @@
       </p:sp>
       <p:sp>
         <p:nvSpPr>
-          <p:cNvPr id="23" name="Text 21"/>
-          <p:cNvSpPr/>
-          <p:nvPr/>
-        </p:nvSpPr>
-        <p:spPr>
-          <a:xfrm>
-            <a:off x="6263640" y="1124712"/>
+          <p:cNvPr id="30" name="Text 28"/>
+          <p:cNvSpPr/>
+          <p:nvPr/>
+        </p:nvSpPr>
+        <p:spPr>
+          <a:xfrm>
+            <a:off x="594360" y="2953512"/>
             <a:ext cx="1645920" cy="274320"/>
           </a:xfrm>
           <a:prstGeom prst="rect">
@@ -11248,7 +11471,7 @@
                 <a:ea typeface="Arial" pitchFamily="34" charset="-122"/>
                 <a:cs typeface="Arial" pitchFamily="34" charset="-120"/>
               </a:rPr>
-              <a:t>スタッフの対応</a:t>
+              <a:t>清潔さ・清掃</a:t>
             </a:r>
             <a:endParaRPr lang="en-US" sz="1300" dirty="0"/>
           </a:p>
@@ -11256,13 +11479,13 @@
       </p:sp>
       <p:sp>
         <p:nvSpPr>
-          <p:cNvPr id="24" name="Text 22"/>
-          <p:cNvSpPr/>
-          <p:nvPr/>
-        </p:nvSpPr>
-        <p:spPr>
-          <a:xfrm>
-            <a:off x="6263640" y="1417320"/>
+          <p:cNvPr id="31" name="Text 29"/>
+          <p:cNvSpPr/>
+          <p:nvPr/>
+        </p:nvSpPr>
+        <p:spPr>
+          <a:xfrm>
+            <a:off x="594360" y="3246120"/>
             <a:ext cx="2377440" cy="365760"/>
           </a:xfrm>
           <a:prstGeom prst="rect">
@@ -11287,7 +11510,7 @@
                 <a:ea typeface="Arial" pitchFamily="34" charset="-122"/>
                 <a:cs typeface="Arial" pitchFamily="34" charset="-120"/>
               </a:rPr>
-              <a:t>部屋は清潔で25㎡とやや広め、 浴槽とシャワーが別々、 スタッフ対応も良く非常に満足しました</a:t>
+              <a:t>ホテルは立地が良く、サービスも素晴らしく、部屋も清潔です</a:t>
             </a:r>
             <a:endParaRPr lang="en-US" sz="900" dirty="0"/>
           </a:p>
@@ -11295,13 +11518,13 @@
       </p:sp>
       <p:sp>
         <p:nvSpPr>
-          <p:cNvPr id="25" name="Text 23"/>
-          <p:cNvSpPr/>
-          <p:nvPr/>
-        </p:nvSpPr>
-        <p:spPr>
-          <a:xfrm>
-            <a:off x="6263640" y="1828800"/>
+          <p:cNvPr id="32" name="Text 30"/>
+          <p:cNvSpPr/>
+          <p:nvPr/>
+        </p:nvSpPr>
+        <p:spPr>
+          <a:xfrm>
+            <a:off x="594360" y="3657600"/>
             <a:ext cx="2377440" cy="640080"/>
           </a:xfrm>
           <a:prstGeom prst="rect">
@@ -11326,7 +11549,7 @@
                 <a:ea typeface="Arial" pitchFamily="34" charset="-122"/>
                 <a:cs typeface="Arial" pitchFamily="34" charset="-120"/>
               </a:rPr>
-              <a:t>「綺麗なのとアニメティが充実していて、スタッフの対応ロケーションも最高でした」</a:t>
+              <a:t>「快適なベッド、エアコン、清潔なバスルーム、大型テレビなど、設備が整った素敵なお部屋です」</a:t>
             </a:r>
             <a:endParaRPr lang="en-US" sz="900" dirty="0"/>
           </a:p>
@@ -11334,13 +11557,13 @@
       </p:sp>
       <p:sp>
         <p:nvSpPr>
-          <p:cNvPr id="26" name="Shape 24"/>
-          <p:cNvSpPr/>
-          <p:nvPr/>
-        </p:nvSpPr>
-        <p:spPr>
-          <a:xfrm>
-            <a:off x="457200" y="2880360"/>
+          <p:cNvPr id="33" name="Shape 31"/>
+          <p:cNvSpPr/>
+          <p:nvPr/>
+        </p:nvSpPr>
+        <p:spPr>
+          <a:xfrm>
+            <a:off x="3291840" y="2880360"/>
             <a:ext cx="2651760" cy="1600200"/>
           </a:xfrm>
           <a:prstGeom prst="rect">
@@ -11361,13 +11584,13 @@
       </p:sp>
       <p:sp>
         <p:nvSpPr>
-          <p:cNvPr id="27" name="Shape 25"/>
-          <p:cNvSpPr/>
-          <p:nvPr/>
-        </p:nvSpPr>
-        <p:spPr>
-          <a:xfrm>
-            <a:off x="457200" y="2880360"/>
+          <p:cNvPr id="34" name="Shape 32"/>
+          <p:cNvSpPr/>
+          <p:nvPr/>
+        </p:nvSpPr>
+        <p:spPr>
+          <a:xfrm>
+            <a:off x="3291840" y="2880360"/>
             <a:ext cx="54864" cy="1600200"/>
           </a:xfrm>
           <a:prstGeom prst="rect">
@@ -11381,13 +11604,13 @@
       </p:sp>
       <p:sp>
         <p:nvSpPr>
-          <p:cNvPr id="28" name="Shape 26"/>
-          <p:cNvSpPr/>
-          <p:nvPr/>
-        </p:nvSpPr>
-        <p:spPr>
-          <a:xfrm>
-            <a:off x="2286000" y="2953512"/>
+          <p:cNvPr id="35" name="Shape 33"/>
+          <p:cNvSpPr/>
+          <p:nvPr/>
+        </p:nvSpPr>
+        <p:spPr>
+          <a:xfrm>
+            <a:off x="5120640" y="2953512"/>
             <a:ext cx="658368" cy="228600"/>
           </a:xfrm>
           <a:prstGeom prst="rect">
@@ -11401,13 +11624,13 @@
       </p:sp>
       <p:sp>
         <p:nvSpPr>
-          <p:cNvPr id="29" name="Text 27"/>
-          <p:cNvSpPr/>
-          <p:nvPr/>
-        </p:nvSpPr>
-        <p:spPr>
-          <a:xfrm>
-            <a:off x="2286000" y="2953512"/>
+          <p:cNvPr id="36" name="Text 34"/>
+          <p:cNvSpPr/>
+          <p:nvPr/>
+        </p:nvSpPr>
+        <p:spPr>
+          <a:xfrm>
+            <a:off x="5120640" y="2953512"/>
             <a:ext cx="658368" cy="228600"/>
           </a:xfrm>
           <a:prstGeom prst="rect">
@@ -11440,13 +11663,13 @@
       </p:sp>
       <p:sp>
         <p:nvSpPr>
-          <p:cNvPr id="30" name="Text 28"/>
-          <p:cNvSpPr/>
-          <p:nvPr/>
-        </p:nvSpPr>
-        <p:spPr>
-          <a:xfrm>
-            <a:off x="594360" y="2953512"/>
+          <p:cNvPr id="37" name="Text 35"/>
+          <p:cNvSpPr/>
+          <p:nvPr/>
+        </p:nvSpPr>
+        <p:spPr>
+          <a:xfrm>
+            <a:off x="3429000" y="2953512"/>
             <a:ext cx="1645920" cy="274320"/>
           </a:xfrm>
           <a:prstGeom prst="rect">
@@ -11471,7 +11694,7 @@
                 <a:ea typeface="Arial" pitchFamily="34" charset="-122"/>
                 <a:cs typeface="Arial" pitchFamily="34" charset="-120"/>
               </a:rPr>
-              <a:t>清潔さ・清掃</a:t>
+              <a:t>コンビニ・周辺施設</a:t>
             </a:r>
             <a:endParaRPr lang="en-US" sz="1300" dirty="0"/>
           </a:p>
@@ -11479,13 +11702,13 @@
       </p:sp>
       <p:sp>
         <p:nvSpPr>
-          <p:cNvPr id="31" name="Text 29"/>
-          <p:cNvSpPr/>
-          <p:nvPr/>
-        </p:nvSpPr>
-        <p:spPr>
-          <a:xfrm>
-            <a:off x="594360" y="3246120"/>
+          <p:cNvPr id="38" name="Text 36"/>
+          <p:cNvSpPr/>
+          <p:nvPr/>
+        </p:nvSpPr>
+        <p:spPr>
+          <a:xfrm>
+            <a:off x="3429000" y="3246120"/>
             <a:ext cx="2377440" cy="365760"/>
           </a:xfrm>
           <a:prstGeom prst="rect">
@@ -11510,7 +11733,7 @@
                 <a:ea typeface="Arial" pitchFamily="34" charset="-122"/>
                 <a:cs typeface="Arial" pitchFamily="34" charset="-120"/>
               </a:rPr>
-              <a:t>利用した部屋は清潔で満足できました</a:t>
+              <a:t>近隣には松本清、ココナ、赤いローソンコンビニエンスストアがあります</a:t>
             </a:r>
             <a:endParaRPr lang="en-US" sz="900" dirty="0"/>
           </a:p>
@@ -11518,13 +11741,13 @@
       </p:sp>
       <p:sp>
         <p:nvSpPr>
-          <p:cNvPr id="32" name="Text 30"/>
-          <p:cNvSpPr/>
-          <p:nvPr/>
-        </p:nvSpPr>
-        <p:spPr>
-          <a:xfrm>
-            <a:off x="594360" y="3657600"/>
+          <p:cNvPr id="39" name="Text 37"/>
+          <p:cNvSpPr/>
+          <p:nvPr/>
+        </p:nvSpPr>
+        <p:spPr>
+          <a:xfrm>
+            <a:off x="3429000" y="3657600"/>
             <a:ext cx="2377440" cy="640080"/>
           </a:xfrm>
           <a:prstGeom prst="rect">
@@ -11549,7 +11772,7 @@
                 <a:ea typeface="Arial" pitchFamily="34" charset="-122"/>
                 <a:cs typeface="Arial" pitchFamily="34" charset="-120"/>
               </a:rPr>
-              <a:t>「部屋は清潔で25㎡とやや広め、 浴槽とシャワーが別々、 スタッフ対応も良く非常に満足しました」</a:t>
+              <a:t>「近くにコンビニやパン屋はありますが、周辺にはレストランが数軒しかありません」</a:t>
             </a:r>
             <a:endParaRPr lang="en-US" sz="900" dirty="0"/>
           </a:p>
@@ -11557,13 +11780,13 @@
       </p:sp>
       <p:sp>
         <p:nvSpPr>
-          <p:cNvPr id="33" name="Shape 31"/>
-          <p:cNvSpPr/>
-          <p:nvPr/>
-        </p:nvSpPr>
-        <p:spPr>
-          <a:xfrm>
-            <a:off x="3291840" y="2880360"/>
+          <p:cNvPr id="40" name="Shape 38"/>
+          <p:cNvSpPr/>
+          <p:nvPr/>
+        </p:nvSpPr>
+        <p:spPr>
+          <a:xfrm>
+            <a:off x="6126480" y="2880360"/>
             <a:ext cx="2651760" cy="1600200"/>
           </a:xfrm>
           <a:prstGeom prst="rect">
@@ -11584,13 +11807,13 @@
       </p:sp>
       <p:sp>
         <p:nvSpPr>
-          <p:cNvPr id="34" name="Shape 32"/>
-          <p:cNvSpPr/>
-          <p:nvPr/>
-        </p:nvSpPr>
-        <p:spPr>
-          <a:xfrm>
-            <a:off x="3291840" y="2880360"/>
+          <p:cNvPr id="41" name="Shape 39"/>
+          <p:cNvSpPr/>
+          <p:nvPr/>
+        </p:nvSpPr>
+        <p:spPr>
+          <a:xfrm>
+            <a:off x="6126480" y="2880360"/>
             <a:ext cx="54864" cy="1600200"/>
           </a:xfrm>
           <a:prstGeom prst="rect">
@@ -11604,13 +11827,13 @@
       </p:sp>
       <p:sp>
         <p:nvSpPr>
-          <p:cNvPr id="35" name="Shape 33"/>
-          <p:cNvSpPr/>
-          <p:nvPr/>
-        </p:nvSpPr>
-        <p:spPr>
-          <a:xfrm>
-            <a:off x="5120640" y="2953512"/>
+          <p:cNvPr id="42" name="Shape 40"/>
+          <p:cNvSpPr/>
+          <p:nvPr/>
+        </p:nvSpPr>
+        <p:spPr>
+          <a:xfrm>
+            <a:off x="7955280" y="2953512"/>
             <a:ext cx="658368" cy="228600"/>
           </a:xfrm>
           <a:prstGeom prst="rect">
@@ -11624,13 +11847,13 @@
       </p:sp>
       <p:sp>
         <p:nvSpPr>
-          <p:cNvPr id="36" name="Text 34"/>
-          <p:cNvSpPr/>
-          <p:nvPr/>
-        </p:nvSpPr>
-        <p:spPr>
-          <a:xfrm>
-            <a:off x="5120640" y="2953512"/>
+          <p:cNvPr id="43" name="Text 41"/>
+          <p:cNvSpPr/>
+          <p:nvPr/>
+        </p:nvSpPr>
+        <p:spPr>
+          <a:xfrm>
+            <a:off x="7955280" y="2953512"/>
             <a:ext cx="658368" cy="228600"/>
           </a:xfrm>
           <a:prstGeom prst="rect">
@@ -11663,229 +11886,6 @@
       </p:sp>
       <p:sp>
         <p:nvSpPr>
-          <p:cNvPr id="37" name="Text 35"/>
-          <p:cNvSpPr/>
-          <p:nvPr/>
-        </p:nvSpPr>
-        <p:spPr>
-          <a:xfrm>
-            <a:off x="3429000" y="2953512"/>
-            <a:ext cx="1645920" cy="274320"/>
-          </a:xfrm>
-          <a:prstGeom prst="rect">
-            <a:avLst/>
-          </a:prstGeom>
-          <a:noFill/>
-          <a:ln/>
-        </p:spPr>
-        <p:txBody>
-          <a:bodyPr wrap="square" lIns="0" tIns="0" rIns="0" bIns="0" rtlCol="0" anchor="ctr"/>
-          <a:lstStyle/>
-          <a:p>
-            <a:pPr indent="0" marL="0">
-              <a:buNone/>
-            </a:pPr>
-            <a:r>
-              <a:rPr lang="en-US" sz="1300" b="1" dirty="0">
-                <a:solidFill>
-                  <a:srgbClr val="1A2744"/>
-                </a:solidFill>
-                <a:latin typeface="Arial" pitchFamily="34" charset="0"/>
-                <a:ea typeface="Arial" pitchFamily="34" charset="-122"/>
-                <a:cs typeface="Arial" pitchFamily="34" charset="-120"/>
-              </a:rPr>
-              <a:t>コンビニ・周辺施設</a:t>
-            </a:r>
-            <a:endParaRPr lang="en-US" sz="1300" dirty="0"/>
-          </a:p>
-        </p:txBody>
-      </p:sp>
-      <p:sp>
-        <p:nvSpPr>
-          <p:cNvPr id="38" name="Text 36"/>
-          <p:cNvSpPr/>
-          <p:nvPr/>
-        </p:nvSpPr>
-        <p:spPr>
-          <a:xfrm>
-            <a:off x="3429000" y="3246120"/>
-            <a:ext cx="2377440" cy="365760"/>
-          </a:xfrm>
-          <a:prstGeom prst="rect">
-            <a:avLst/>
-          </a:prstGeom>
-          <a:noFill/>
-          <a:ln/>
-        </p:spPr>
-        <p:txBody>
-          <a:bodyPr wrap="square" lIns="0" tIns="0" rIns="0" bIns="0" rtlCol="0" anchor="ctr"/>
-          <a:lstStyle/>
-          <a:p>
-            <a:pPr indent="0" marL="0">
-              <a:buNone/>
-            </a:pPr>
-            <a:r>
-              <a:rPr lang="en-US" sz="900" dirty="0">
-                <a:solidFill>
-                  <a:srgbClr val="64748B"/>
-                </a:solidFill>
-                <a:latin typeface="Arial" pitchFamily="34" charset="0"/>
-                <a:ea typeface="Arial" pitchFamily="34" charset="-122"/>
-                <a:cs typeface="Arial" pitchFamily="34" charset="-120"/>
-              </a:rPr>
-              <a:t>近隣には松本清、ココナ、赤いローソンコンビニエンスストアがあります</a:t>
-            </a:r>
-            <a:endParaRPr lang="en-US" sz="900" dirty="0"/>
-          </a:p>
-        </p:txBody>
-      </p:sp>
-      <p:sp>
-        <p:nvSpPr>
-          <p:cNvPr id="39" name="Text 37"/>
-          <p:cNvSpPr/>
-          <p:nvPr/>
-        </p:nvSpPr>
-        <p:spPr>
-          <a:xfrm>
-            <a:off x="3429000" y="3657600"/>
-            <a:ext cx="2377440" cy="640080"/>
-          </a:xfrm>
-          <a:prstGeom prst="rect">
-            <a:avLst/>
-          </a:prstGeom>
-          <a:noFill/>
-          <a:ln/>
-        </p:spPr>
-        <p:txBody>
-          <a:bodyPr wrap="square" lIns="0" tIns="0" rIns="0" bIns="0" rtlCol="0" anchor="ctr"/>
-          <a:lstStyle/>
-          <a:p>
-            <a:pPr indent="0" marL="0">
-              <a:buNone/>
-            </a:pPr>
-            <a:r>
-              <a:rPr lang="en-US" sz="900" i="1" dirty="0">
-                <a:solidFill>
-                  <a:srgbClr val="3B7DD8"/>
-                </a:solidFill>
-                <a:latin typeface="Arial" pitchFamily="34" charset="0"/>
-                <a:ea typeface="Arial" pitchFamily="34" charset="-122"/>
-                <a:cs typeface="Arial" pitchFamily="34" charset="-120"/>
-              </a:rPr>
-              <a:t>「近くにコンビニやパン屋はありますが、周辺にはレストランが数軒しかありません」</a:t>
-            </a:r>
-            <a:endParaRPr lang="en-US" sz="900" dirty="0"/>
-          </a:p>
-        </p:txBody>
-      </p:sp>
-      <p:sp>
-        <p:nvSpPr>
-          <p:cNvPr id="40" name="Shape 38"/>
-          <p:cNvSpPr/>
-          <p:nvPr/>
-        </p:nvSpPr>
-        <p:spPr>
-          <a:xfrm>
-            <a:off x="6126480" y="2880360"/>
-            <a:ext cx="2651760" cy="1600200"/>
-          </a:xfrm>
-          <a:prstGeom prst="rect">
-            <a:avLst/>
-          </a:prstGeom>
-          <a:solidFill>
-            <a:srgbClr val="FFFFFF"/>
-          </a:solidFill>
-          <a:ln/>
-          <a:effectLst>
-            <a:outerShdw sx="100000" sy="100000" kx="0" ky="0" algn="bl" rotWithShape="0" blurRad="50800" dist="25400" dir="8100000">
-              <a:srgbClr val="000000">
-                <a:alpha val="10000"/>
-              </a:srgbClr>
-            </a:outerShdw>
-          </a:effectLst>
-        </p:spPr>
-      </p:sp>
-      <p:sp>
-        <p:nvSpPr>
-          <p:cNvPr id="41" name="Shape 39"/>
-          <p:cNvSpPr/>
-          <p:nvPr/>
-        </p:nvSpPr>
-        <p:spPr>
-          <a:xfrm>
-            <a:off x="6126480" y="2880360"/>
-            <a:ext cx="54864" cy="1600200"/>
-          </a:xfrm>
-          <a:prstGeom prst="rect">
-            <a:avLst/>
-          </a:prstGeom>
-          <a:solidFill>
-            <a:srgbClr val="16A34A"/>
-          </a:solidFill>
-          <a:ln/>
-        </p:spPr>
-      </p:sp>
-      <p:sp>
-        <p:nvSpPr>
-          <p:cNvPr id="42" name="Shape 40"/>
-          <p:cNvSpPr/>
-          <p:nvPr/>
-        </p:nvSpPr>
-        <p:spPr>
-          <a:xfrm>
-            <a:off x="7955280" y="2953512"/>
-            <a:ext cx="658368" cy="228600"/>
-          </a:xfrm>
-          <a:prstGeom prst="rect">
-            <a:avLst/>
-          </a:prstGeom>
-          <a:solidFill>
-            <a:srgbClr val="DCFCE7"/>
-          </a:solidFill>
-          <a:ln/>
-        </p:spPr>
-      </p:sp>
-      <p:sp>
-        <p:nvSpPr>
-          <p:cNvPr id="43" name="Text 41"/>
-          <p:cNvSpPr/>
-          <p:nvPr/>
-        </p:nvSpPr>
-        <p:spPr>
-          <a:xfrm>
-            <a:off x="7955280" y="2953512"/>
-            <a:ext cx="658368" cy="228600"/>
-          </a:xfrm>
-          <a:prstGeom prst="rect">
-            <a:avLst/>
-          </a:prstGeom>
-          <a:noFill/>
-          <a:ln/>
-        </p:spPr>
-        <p:txBody>
-          <a:bodyPr wrap="square" lIns="0" tIns="0" rIns="0" bIns="0" rtlCol="0" anchor="ctr"/>
-          <a:lstStyle/>
-          <a:p>
-            <a:pPr algn="ctr" indent="0" marL="0">
-              <a:buNone/>
-            </a:pPr>
-            <a:r>
-              <a:rPr lang="en-US" sz="900" b="1" dirty="0">
-                <a:solidFill>
-                  <a:srgbClr val="16A34A"/>
-                </a:solidFill>
-                <a:latin typeface="Arial" pitchFamily="34" charset="0"/>
-                <a:ea typeface="Arial" pitchFamily="34" charset="-122"/>
-                <a:cs typeface="Arial" pitchFamily="34" charset="-120"/>
-              </a:rPr>
-              <a:t>20件+</a:t>
-            </a:r>
-            <a:endParaRPr lang="en-US" sz="900" dirty="0"/>
-          </a:p>
-        </p:txBody>
-      </p:sp>
-      <p:sp>
-        <p:nvSpPr>
           <p:cNvPr id="44" name="Text 42"/>
           <p:cNvSpPr/>
           <p:nvPr/>
@@ -11956,7 +11956,7 @@
                 <a:ea typeface="Arial" pitchFamily="34" charset="-122"/>
                 <a:cs typeface="Arial" pitchFamily="34" charset="-120"/>
               </a:rPr>
-              <a:t>Washing machine is at the B1 level 素敵なシンプルな朝食で、部屋もグループには十...</a:t>
+              <a:t>滞在中は毎日無料の朝食が付いてきます</a:t>
             </a:r>
             <a:endParaRPr lang="en-US" sz="900" dirty="0"/>
           </a:p>
@@ -11995,7 +11995,7 @@
                 <a:ea typeface="Arial" pitchFamily="34" charset="-122"/>
                 <a:cs typeface="Arial" pitchFamily="34" charset="-120"/>
               </a:rPr>
-              <a:t>「そのガストの朝食は代金に見合っていてなかなか良かった」</a:t>
+              <a:t>「Washing machine is at the B1 level 素敵なシンプルな朝食で、部屋もグループには十...」</a:t>
             </a:r>
             <a:endParaRPr lang="en-US" sz="900" dirty="0"/>
           </a:p>
@@ -12685,7 +12685,7 @@
                           <a:ea typeface="Arial" pitchFamily="34" charset="-122"/>
                           <a:cs typeface="Arial" pitchFamily="34" charset="-120"/>
                         </a:rPr>
-                        <a:t>部屋は清潔で25㎡とやや広め、 浴槽とシャワーが別々、 スタッフ対応も良く非常に満足しました</a:t>
+                        <a:t>快適なベッド、エアコン、清潔なバスルーム、大型テレビなど、設備が整った素敵なお部屋です</a:t>
                       </a:r>
                       <a:endParaRPr lang="en-US" sz="900" dirty="0">
                         <a:latin typeface="Arial" charset="0"/>
@@ -12753,7 +12753,7 @@
                           <a:ea typeface="Arial" pitchFamily="34" charset="-122"/>
                           <a:cs typeface="Arial" pitchFamily="34" charset="-120"/>
                         </a:rPr>
-                        <a:t>22件</a:t>
+                        <a:t>24件</a:t>
                       </a:r>
                       <a:endParaRPr lang="en-US" sz="900" dirty="0">
                         <a:latin typeface="Arial" charset="0"/>
@@ -12959,7 +12959,7 @@
                           <a:ea typeface="Arial" pitchFamily="34" charset="-122"/>
                           <a:cs typeface="Arial" pitchFamily="34" charset="-120"/>
                         </a:rPr>
-                        <a:t>Lovely simple breakfast and room space is good enough for...</a:t>
+                        <a:t>Hotel be ubicato</a:t>
                       </a:r>
                       <a:endParaRPr lang="en-US" sz="900" dirty="0">
                         <a:latin typeface="Arial" charset="0"/>
@@ -13027,7 +13027,7 @@
                           <a:ea typeface="Arial" pitchFamily="34" charset="-122"/>
                           <a:cs typeface="Arial" pitchFamily="34" charset="-120"/>
                         </a:rPr>
-                        <a:t>20件</a:t>
+                        <a:t>22件</a:t>
                       </a:r>
                       <a:endParaRPr lang="en-US" sz="900" dirty="0">
                         <a:latin typeface="Arial" charset="0"/>
@@ -14055,7 +14055,7 @@
                           <a:ea typeface="Arial" pitchFamily="34" charset="-122"/>
                           <a:cs typeface="Arial" pitchFamily="34" charset="-120"/>
                         </a:rPr>
-                        <a:t>因為不想在住鳥籠房型，這次特別找大間的訂，三晚在WBC期間的房間搭配信用卡優惠不到一萬，房間真的很大，浴室也超大，...</a:t>
+                        <a:t>唯一の難点は、部屋が少し狭いことです</a:t>
                       </a:r>
                       <a:endParaRPr lang="en-US" sz="900" dirty="0">
                         <a:latin typeface="Arial" charset="0"/>
@@ -14123,7 +14123,7 @@
                           <a:ea typeface="Arial" pitchFamily="34" charset="-122"/>
                           <a:cs typeface="Arial" pitchFamily="34" charset="-120"/>
                         </a:rPr>
-                        <a:t>4件</a:t>
+                        <a:t>6件</a:t>
                       </a:r>
                       <a:endParaRPr lang="en-US" sz="900" dirty="0">
                         <a:latin typeface="Arial" charset="0"/>

--- a/納品レポート/ホテル別レポート/richmond_mejiro_口コミ分析レポート.pptx
+++ b/納品レポート/ホテル別レポート/richmond_mejiro_口コミ分析レポート.pptx
@@ -208,22 +208,22 @@
                 <c:formatCode>General</c:formatCode>
                 <c:ptCount val="6"/>
                 <c:pt idx="0">
-                  <c:v>9.44</c:v>
+                  <c:v>9.47</c:v>
                 </c:pt>
                 <c:pt idx="1">
                   <c:v>9.33</c:v>
                 </c:pt>
                 <c:pt idx="2">
-                  <c:v>9.08</c:v>
+                  <c:v>9</c:v>
                 </c:pt>
                 <c:pt idx="3">
-                  <c:v>8.67</c:v>
+                  <c:v>8.82</c:v>
                 </c:pt>
                 <c:pt idx="4">
-                  <c:v>8.4</c:v>
+                  <c:v>8.38</c:v>
                 </c:pt>
                 <c:pt idx="5">
-                  <c:v>7.88</c:v>
+                  <c:v>7.85</c:v>
                 </c:pt>
               </c:numCache>
             </c:numRef>
@@ -566,10 +566,10 @@
               <c:numCache>
                 <c:ptCount val="3"/>
                 <c:pt idx="0">
-                  <c:v>121</c:v>
+                  <c:v>125</c:v>
                 </c:pt>
                 <c:pt idx="1">
-                  <c:v>16</c:v>
+                  <c:v>17</c:v>
                 </c:pt>
                 <c:pt idx="2">
                   <c:v>3</c:v>
@@ -823,19 +823,19 @@
                 <c:formatCode>General</c:formatCode>
                 <c:ptCount val="9"/>
                 <c:pt idx="0">
-                  <c:v>64</c:v>
+                  <c:v>68</c:v>
                 </c:pt>
                 <c:pt idx="1">
-                  <c:v>16</c:v>
+                  <c:v>15</c:v>
                 </c:pt>
                 <c:pt idx="2">
-                  <c:v>41</c:v>
+                  <c:v>42</c:v>
                 </c:pt>
                 <c:pt idx="3">
                   <c:v>7</c:v>
                 </c:pt>
                 <c:pt idx="4">
-                  <c:v>6</c:v>
+                  <c:v>7</c:v>
                 </c:pt>
                 <c:pt idx="5">
                   <c:v>3</c:v>
@@ -2798,7 +2798,7 @@
                 <a:ea typeface="Arial" pitchFamily="34" charset="-122"/>
                 <a:cs typeface="Arial" pitchFamily="34" charset="-120"/>
               </a:rPr>
-              <a:t>レビュー総数：140件（6サイト）</a:t>
+              <a:t>レビュー総数：145件（6サイト）</a:t>
             </a:r>
             <a:endParaRPr lang="en-US" sz="1000" dirty="0"/>
           </a:p>
@@ -2818,7 +2818,7 @@
                 <a:ea typeface="Arial" pitchFamily="34" charset="-122"/>
                 <a:cs typeface="Arial" pitchFamily="34" charset="-120"/>
               </a:rPr>
-              <a:t>作成日：2026年3月27日</a:t>
+              <a:t>作成日：2026年3月28日</a:t>
             </a:r>
             <a:endParaRPr lang="en-US" sz="1000" dirty="0"/>
           </a:p>
@@ -3364,7 +3364,7 @@
                           <a:ea typeface="Arial" pitchFamily="34" charset="-122"/>
                           <a:cs typeface="Arial" pitchFamily="34" charset="-120"/>
                         </a:rPr>
-                        <a:t>8.72点</a:t>
+                        <a:t>8.73点</a:t>
                       </a:r>
                       <a:endParaRPr lang="en-US" sz="1000" dirty="0">
                         <a:latin typeface="Arial" charset="0"/>
@@ -3638,7 +3638,7 @@
                           <a:ea typeface="Arial" pitchFamily="34" charset="-122"/>
                           <a:cs typeface="Arial" pitchFamily="34" charset="-120"/>
                         </a:rPr>
-                        <a:t>86.4%</a:t>
+                        <a:t>86.2%</a:t>
                       </a:r>
                       <a:endParaRPr lang="en-US" sz="1000" dirty="0">
                         <a:latin typeface="Arial" charset="0"/>
@@ -4186,7 +4186,7 @@
                           <a:ea typeface="Arial" pitchFamily="34" charset="-122"/>
                           <a:cs typeface="Arial" pitchFamily="34" charset="-120"/>
                         </a:rPr>
-                        <a:t>7.9点</a:t>
+                        <a:t>7.8点</a:t>
                       </a:r>
                       <a:endParaRPr lang="en-US" sz="1000" dirty="0">
                         <a:latin typeface="Arial" charset="0"/>
@@ -4254,7 +4254,7 @@
                           <a:ea typeface="Arial" pitchFamily="34" charset="-122"/>
                           <a:cs typeface="Arial" pitchFamily="34" charset="-120"/>
                         </a:rPr>
-                        <a:t>8.9点以上</a:t>
+                        <a:t>8.8点以上</a:t>
                       </a:r>
                       <a:endParaRPr lang="en-US" sz="1000" dirty="0">
                         <a:latin typeface="Arial" charset="0"/>
@@ -4734,7 +4734,7 @@
                           <a:ea typeface="Arial" pitchFamily="34" charset="-122"/>
                           <a:cs typeface="Arial" pitchFamily="34" charset="-120"/>
                         </a:rPr>
-                        <a:t>約24件/期間</a:t>
+                        <a:t>約25件/期間</a:t>
                       </a:r>
                       <a:endParaRPr lang="en-US" sz="1000" dirty="0">
                         <a:latin typeface="Arial" charset="0"/>
@@ -5373,7 +5373,7 @@
                 <a:ea typeface="Arial" pitchFamily="34" charset="-122"/>
                 <a:cs typeface="Arial" pitchFamily="34" charset="-120"/>
               </a:rPr>
-              <a:t>8.72</a:t>
+              <a:t>8.73</a:t>
             </a:r>
             <a:endParaRPr lang="en-US" sz="3200" dirty="0"/>
           </a:p>
@@ -5498,7 +5498,7 @@
                 <a:ea typeface="Arial" pitchFamily="34" charset="-122"/>
                 <a:cs typeface="Arial" pitchFamily="34" charset="-120"/>
               </a:rPr>
-              <a:t>86.4%</a:t>
+              <a:t>86.2%</a:t>
             </a:r>
             <a:endParaRPr lang="en-US" sz="3200" dirty="0"/>
           </a:p>
@@ -5748,7 +5748,7 @@
                 <a:ea typeface="Arial" pitchFamily="34" charset="-122"/>
                 <a:cs typeface="Arial" pitchFamily="34" charset="-120"/>
               </a:rPr>
-              <a:t>140件</a:t>
+              <a:t>145件</a:t>
             </a:r>
             <a:endParaRPr lang="en-US" sz="3200" dirty="0"/>
           </a:p>
@@ -5896,7 +5896,7 @@
                 <a:ea typeface="Arial" pitchFamily="34" charset="-122"/>
                 <a:cs typeface="Arial" pitchFamily="34" charset="-120"/>
               </a:rPr>
-              <a:t>  ホテルは立地が良く、サービスも素晴らしく、部屋も清潔です</a:t>
+              <a:t>  目白駅からすぐ近く、駅を出て左へ徒歩3～5分なので、簡単に見つけることができます</a:t>
             </a:r>
             <a:endParaRPr lang="en-US" sz="1100" dirty="0"/>
           </a:p>
@@ -5936,7 +5936,7 @@
                 <a:ea typeface="Arial" pitchFamily="34" charset="-122"/>
                 <a:cs typeface="Arial" pitchFamily="34" charset="-120"/>
               </a:rPr>
-              <a:t>  快適なベッド、エアコン、清潔なバスルーム、大型テレビなど、設備が整った素敵なお部屋です</a:t>
+              <a:t>  部屋は小さいですが、基本的なアメニティはすべて揃っているので、コストパフォーマンスに優れています</a:t>
             </a:r>
             <a:endParaRPr lang="en-US" sz="1100" dirty="0"/>
           </a:p>
@@ -5976,7 +5976,7 @@
                 <a:ea typeface="Arial" pitchFamily="34" charset="-122"/>
                 <a:cs typeface="Arial" pitchFamily="34" charset="-120"/>
               </a:rPr>
-              <a:t>  ホテルは立地が良く、サービスも素晴らしく、部屋も清潔です</a:t>
+              <a:t>  コーヒーは引き出しに入っているので、必要な場合はスタッフにお申し付けください</a:t>
             </a:r>
             <a:endParaRPr lang="en-US" sz="1100" dirty="0"/>
           </a:p>
@@ -6124,7 +6124,7 @@
                 <a:ea typeface="Arial" pitchFamily="34" charset="-122"/>
                 <a:cs typeface="Arial" pitchFamily="34" charset="-120"/>
               </a:rPr>
-              <a:t>  快適なベッド、エアコン、清潔なバスルーム、大型テレビなど、設備が整った素敵なお部屋です</a:t>
+              <a:t>  理由はわかりませんが、廊下とバスルームの室温が高く、ときに暑く感じるほどでした</a:t>
             </a:r>
             <a:endParaRPr lang="en-US" sz="1100" dirty="0"/>
           </a:p>
@@ -6204,7 +6204,7 @@
                 <a:ea typeface="Arial" pitchFamily="34" charset="-122"/>
                 <a:cs typeface="Arial" pitchFamily="34" charset="-120"/>
               </a:rPr>
-              <a:t>  古さのためか清掃にも限界があるように感じた</a:t>
+              <a:t>  部屋はやや年季が入っていますが、きれいに掃除されておりました</a:t>
             </a:r>
             <a:endParaRPr lang="en-US" sz="1100" dirty="0"/>
           </a:p>
@@ -6557,7 +6557,7 @@
                 <a:ea typeface="Arial" pitchFamily="34" charset="-122"/>
                 <a:cs typeface="Arial" pitchFamily="34" charset="-120"/>
               </a:rPr>
-              <a:t>8.72</a:t>
+              <a:t>8.73</a:t>
             </a:r>
             <a:endParaRPr lang="en-US" sz="3200" dirty="0"/>
           </a:p>
@@ -6682,7 +6682,7 @@
                 <a:ea typeface="Arial" pitchFamily="34" charset="-122"/>
                 <a:cs typeface="Arial" pitchFamily="34" charset="-120"/>
               </a:rPr>
-              <a:t>86.4%</a:t>
+              <a:t>86.2%</a:t>
             </a:r>
             <a:endParaRPr lang="en-US" sz="3200" dirty="0"/>
           </a:p>
@@ -6932,7 +6932,7 @@
                 <a:ea typeface="Arial" pitchFamily="34" charset="-122"/>
                 <a:cs typeface="Arial" pitchFamily="34" charset="-120"/>
               </a:rPr>
-              <a:t>140件</a:t>
+              <a:t>145件</a:t>
             </a:r>
             <a:endParaRPr lang="en-US" sz="3200" dirty="0"/>
           </a:p>
@@ -7353,7 +7353,7 @@
                 <a:ea typeface="Arial" pitchFamily="34" charset="-122"/>
                 <a:cs typeface="Arial" pitchFamily="34" charset="-120"/>
               </a:rPr>
-              <a:t>Trip.com(9.44)が最高スコア。</a:t>
+              <a:t>Trip.com(9.47)が最高スコア。</a:t>
             </a:r>
             <a:endParaRPr lang="en-US" sz="1100" dirty="0"/>
           </a:p>
@@ -7402,7 +7402,7 @@
                 <a:ea typeface="Arial" pitchFamily="34" charset="-122"/>
                 <a:cs typeface="Arial" pitchFamily="34" charset="-120"/>
               </a:rPr>
-              <a:t>Booking.com(7.9)が相対的に低い。口コミ返信の強化が急務</a:t>
+              <a:t>Booking.com(7.8)が相対的に低い。口コミ返信の強化が急務</a:t>
             </a:r>
             <a:endParaRPr lang="en-US" sz="1100" dirty="0"/>
           </a:p>
@@ -7911,7 +7911,7 @@
                           <a:ea typeface="Arial" pitchFamily="34" charset="-122"/>
                           <a:cs typeface="Arial" pitchFamily="34" charset="-120"/>
                         </a:rPr>
-                        <a:t>34</a:t>
+                        <a:t>36</a:t>
                       </a:r>
                       <a:endParaRPr lang="en-US" sz="900" dirty="0">
                         <a:latin typeface="Arial" charset="0"/>
@@ -7979,7 +7979,7 @@
                           <a:ea typeface="Arial" pitchFamily="34" charset="-122"/>
                           <a:cs typeface="Arial" pitchFamily="34" charset="-120"/>
                         </a:rPr>
-                        <a:t>9.44</a:t>
+                        <a:t>9.47</a:t>
                       </a:r>
                       <a:endParaRPr lang="en-US" sz="900" dirty="0">
                         <a:latin typeface="Arial" charset="0"/>
@@ -8115,7 +8115,7 @@
                           <a:ea typeface="Arial" pitchFamily="34" charset="-122"/>
                           <a:cs typeface="Arial" pitchFamily="34" charset="-120"/>
                         </a:rPr>
-                        <a:t>9.44</a:t>
+                        <a:t>9.47</a:t>
                       </a:r>
                       <a:endParaRPr lang="en-US" sz="900" dirty="0">
                         <a:latin typeface="Arial" charset="0"/>
@@ -8663,7 +8663,7 @@
                           <a:ea typeface="Arial" pitchFamily="34" charset="-122"/>
                           <a:cs typeface="Arial" pitchFamily="34" charset="-120"/>
                         </a:rPr>
-                        <a:t>4.54</a:t>
+                        <a:t>4.5</a:t>
                       </a:r>
                       <a:endParaRPr lang="en-US" sz="900" dirty="0">
                         <a:latin typeface="Arial" charset="0"/>
@@ -8799,7 +8799,7 @@
                           <a:ea typeface="Arial" pitchFamily="34" charset="-122"/>
                           <a:cs typeface="Arial" pitchFamily="34" charset="-120"/>
                         </a:rPr>
-                        <a:t>9.08</a:t>
+                        <a:t>9</a:t>
                       </a:r>
                       <a:endParaRPr lang="en-US" sz="900" dirty="0">
                         <a:latin typeface="Arial" charset="0"/>
@@ -8937,7 +8937,7 @@
                           <a:ea typeface="Arial" pitchFamily="34" charset="-122"/>
                           <a:cs typeface="Arial" pitchFamily="34" charset="-120"/>
                         </a:rPr>
-                        <a:t>15</a:t>
+                        <a:t>17</a:t>
                       </a:r>
                       <a:endParaRPr lang="en-US" sz="900" dirty="0">
                         <a:latin typeface="Arial" charset="0"/>
@@ -9005,7 +9005,7 @@
                           <a:ea typeface="Arial" pitchFamily="34" charset="-122"/>
                           <a:cs typeface="Arial" pitchFamily="34" charset="-120"/>
                         </a:rPr>
-                        <a:t>4.33</a:t>
+                        <a:t>4.41</a:t>
                       </a:r>
                       <a:endParaRPr lang="en-US" sz="900" dirty="0">
                         <a:latin typeface="Arial" charset="0"/>
@@ -9141,7 +9141,7 @@
                           <a:ea typeface="Arial" pitchFamily="34" charset="-122"/>
                           <a:cs typeface="Arial" pitchFamily="34" charset="-120"/>
                         </a:rPr>
-                        <a:t>8.67</a:t>
+                        <a:t>8.82</a:t>
                       </a:r>
                       <a:endParaRPr lang="en-US" sz="900" dirty="0">
                         <a:latin typeface="Arial" charset="0"/>
@@ -9279,7 +9279,7 @@
                           <a:ea typeface="Arial" pitchFamily="34" charset="-122"/>
                           <a:cs typeface="Arial" pitchFamily="34" charset="-120"/>
                         </a:rPr>
-                        <a:t>25</a:t>
+                        <a:t>26</a:t>
                       </a:r>
                       <a:endParaRPr lang="en-US" sz="900" dirty="0">
                         <a:latin typeface="Arial" charset="0"/>
@@ -9347,7 +9347,7 @@
                           <a:ea typeface="Arial" pitchFamily="34" charset="-122"/>
                           <a:cs typeface="Arial" pitchFamily="34" charset="-120"/>
                         </a:rPr>
-                        <a:t>4.2</a:t>
+                        <a:t>4.19</a:t>
                       </a:r>
                       <a:endParaRPr lang="en-US" sz="900" dirty="0">
                         <a:latin typeface="Arial" charset="0"/>
@@ -9483,7 +9483,7 @@
                           <a:ea typeface="Arial" pitchFamily="34" charset="-122"/>
                           <a:cs typeface="Arial" pitchFamily="34" charset="-120"/>
                         </a:rPr>
-                        <a:t>8.4</a:t>
+                        <a:t>8.38</a:t>
                       </a:r>
                       <a:endParaRPr lang="en-US" sz="900" dirty="0">
                         <a:latin typeface="Arial" charset="0"/>
@@ -9689,7 +9689,7 @@
                           <a:ea typeface="Arial" pitchFamily="34" charset="-122"/>
                           <a:cs typeface="Arial" pitchFamily="34" charset="-120"/>
                         </a:rPr>
-                        <a:t>7.88</a:t>
+                        <a:t>7.85</a:t>
                       </a:r>
                       <a:endParaRPr lang="en-US" sz="900" dirty="0">
                         <a:latin typeface="Arial" charset="0"/>
@@ -9825,7 +9825,7 @@
                           <a:ea typeface="Arial" pitchFamily="34" charset="-122"/>
                           <a:cs typeface="Arial" pitchFamily="34" charset="-120"/>
                         </a:rPr>
-                        <a:t>7.88</a:t>
+                        <a:t>7.85</a:t>
                       </a:r>
                       <a:endParaRPr lang="en-US" sz="900" dirty="0">
                         <a:latin typeface="Arial" charset="0"/>
@@ -10233,7 +10233,7 @@
                 <a:ea typeface="Arial" pitchFamily="34" charset="-122"/>
                 <a:cs typeface="Arial" pitchFamily="34" charset="-120"/>
               </a:rPr>
-              <a:t>121件（86.4%）</a:t>
+              <a:t>125件（86.2%）</a:t>
             </a:r>
             <a:endParaRPr lang="en-US" sz="1100" dirty="0"/>
           </a:p>
@@ -10331,7 +10331,7 @@
                 <a:ea typeface="Arial" pitchFamily="34" charset="-122"/>
                 <a:cs typeface="Arial" pitchFamily="34" charset="-120"/>
               </a:rPr>
-              <a:t>16件（11.4%）</a:t>
+              <a:t>17件（11.7%）</a:t>
             </a:r>
             <a:endParaRPr lang="en-US" sz="1100" dirty="0"/>
           </a:p>
@@ -10841,7 +10841,7 @@
                 <a:ea typeface="Arial" pitchFamily="34" charset="-122"/>
                 <a:cs typeface="Arial" pitchFamily="34" charset="-120"/>
               </a:rPr>
-              <a:t>ホテルは立地が良く、サービスも素晴らしく、部屋も清潔です</a:t>
+              <a:t>目白駅からすぐ近く、駅を出て左へ徒歩3～5分なので、簡単に見つけることができます</a:t>
             </a:r>
             <a:endParaRPr lang="en-US" sz="900" dirty="0"/>
           </a:p>
@@ -10880,7 +10880,7 @@
                 <a:ea typeface="Arial" pitchFamily="34" charset="-122"/>
                 <a:cs typeface="Arial" pitchFamily="34" charset="-120"/>
               </a:rPr>
-              <a:t>「そして何より、明治路駅に近いという立地の良さが魅力です」</a:t>
+              <a:t>「ホテルは立地が良く、サービスも素晴らしく、部屋も清潔です」</a:t>
             </a:r>
             <a:endParaRPr lang="en-US" sz="900" dirty="0"/>
           </a:p>
@@ -11064,7 +11064,7 @@
                 <a:ea typeface="Arial" pitchFamily="34" charset="-122"/>
                 <a:cs typeface="Arial" pitchFamily="34" charset="-120"/>
               </a:rPr>
-              <a:t>快適なベッド、エアコン、清潔なバスルーム、大型テレビなど、設備が整った素敵なお部屋です</a:t>
+              <a:t>部屋は小さいですが、基本的なアメニティはすべて揃っているので、コストパフォーマンスに優れています</a:t>
             </a:r>
             <a:endParaRPr lang="en-US" sz="900" dirty="0"/>
           </a:p>
@@ -11103,7 +11103,7 @@
                 <a:ea typeface="Arial" pitchFamily="34" charset="-122"/>
                 <a:cs typeface="Arial" pitchFamily="34" charset="-120"/>
               </a:rPr>
-              <a:t>「目白站出來走3分鐘就到了，非常方便 設備：必要なアメニティはすべて揃っており、各階段の下には温水が出る給水器が設置...」</a:t>
+              <a:t>「静かで駅にも近く、快適な環境で、朝食も充実していて、とてもコストパフォーマンスの良いホテルです」</a:t>
             </a:r>
             <a:endParaRPr lang="en-US" sz="900" dirty="0"/>
           </a:p>
@@ -11287,7 +11287,7 @@
                 <a:ea typeface="Arial" pitchFamily="34" charset="-122"/>
                 <a:cs typeface="Arial" pitchFamily="34" charset="-120"/>
               </a:rPr>
-              <a:t>ホテルは立地が良く、サービスも素晴らしく、部屋も清潔です</a:t>
+              <a:t>コーヒーは引き出しに入っているので、必要な場合はスタッフにお申し付けください</a:t>
             </a:r>
             <a:endParaRPr lang="en-US" sz="900" dirty="0"/>
           </a:p>
@@ -11326,7 +11326,7 @@
                 <a:ea typeface="Arial" pitchFamily="34" charset="-122"/>
                 <a:cs typeface="Arial" pitchFamily="34" charset="-120"/>
               </a:rPr>
-              <a:t>「スタッフの方々もとても親切で親身になって対応してくれます」</a:t>
+              <a:t>「ホテルは立地が良く、サービスも素晴らしく、部屋も清潔です」</a:t>
             </a:r>
             <a:endParaRPr lang="en-US" sz="900" dirty="0"/>
           </a:p>
@@ -11549,7 +11549,7 @@
                 <a:ea typeface="Arial" pitchFamily="34" charset="-122"/>
                 <a:cs typeface="Arial" pitchFamily="34" charset="-120"/>
               </a:rPr>
-              <a:t>「快適なベッド、エアコン、清潔なバスルーム、大型テレビなど、設備が整った素敵なお部屋です」</a:t>
+              <a:t>「部屋はやや年季が入っていますが、きれいに掃除されておりました」</a:t>
             </a:r>
             <a:endParaRPr lang="en-US" sz="900" dirty="0"/>
           </a:p>
@@ -11733,7 +11733,7 @@
                 <a:ea typeface="Arial" pitchFamily="34" charset="-122"/>
                 <a:cs typeface="Arial" pitchFamily="34" charset="-120"/>
               </a:rPr>
-              <a:t>近隣には松本清、ココナ、赤いローソンコンビニエンスストアがあります</a:t>
+              <a:t>途中にローソンがあり、池袋から1駅、新宿から3駅と非常に便利な立地です</a:t>
             </a:r>
             <a:endParaRPr lang="en-US" sz="900" dirty="0"/>
           </a:p>
@@ -11772,7 +11772,7 @@
                 <a:ea typeface="Arial" pitchFamily="34" charset="-122"/>
                 <a:cs typeface="Arial" pitchFamily="34" charset="-120"/>
               </a:rPr>
-              <a:t>「近くにコンビニやパン屋はありますが、周辺にはレストランが数軒しかありません」</a:t>
+              <a:t>「近隣には松本清、ココナ、赤いローソンコンビニエンスストアがあります」</a:t>
             </a:r>
             <a:endParaRPr lang="en-US" sz="900" dirty="0"/>
           </a:p>
@@ -11956,7 +11956,7 @@
                 <a:ea typeface="Arial" pitchFamily="34" charset="-122"/>
                 <a:cs typeface="Arial" pitchFamily="34" charset="-120"/>
               </a:rPr>
-              <a:t>滞在中は毎日無料の朝食が付いてきます</a:t>
+              <a:t>静かで駅にも近く、快適な環境で、朝食も充実していて、とてもコストパフォーマンスの良いホテルです</a:t>
             </a:r>
             <a:endParaRPr lang="en-US" sz="900" dirty="0"/>
           </a:p>
@@ -11995,7 +11995,7 @@
                 <a:ea typeface="Arial" pitchFamily="34" charset="-122"/>
                 <a:cs typeface="Arial" pitchFamily="34" charset="-120"/>
               </a:rPr>
-              <a:t>「Washing machine is at the B1 level 素敵なシンプルな朝食で、部屋もグループには十...」</a:t>
+              <a:t>「朝食は非常に混む時間帯がありますが、それをうまく避けられれば、落ち着いて食べることができます」</a:t>
             </a:r>
             <a:endParaRPr lang="en-US" sz="900" dirty="0"/>
           </a:p>
@@ -12685,7 +12685,7 @@
                           <a:ea typeface="Arial" pitchFamily="34" charset="-122"/>
                           <a:cs typeface="Arial" pitchFamily="34" charset="-120"/>
                         </a:rPr>
-                        <a:t>快適なベッド、エアコン、清潔なバスルーム、大型テレビなど、設備が整った素敵なお部屋です</a:t>
+                        <a:t>理由はわかりませんが、廊下とバスルームの室温が高く、ときに暑く感じるほどでした</a:t>
                       </a:r>
                       <a:endParaRPr lang="en-US" sz="900" dirty="0">
                         <a:latin typeface="Arial" charset="0"/>
@@ -12753,7 +12753,7 @@
                           <a:ea typeface="Arial" pitchFamily="34" charset="-122"/>
                           <a:cs typeface="Arial" pitchFamily="34" charset="-120"/>
                         </a:rPr>
-                        <a:t>24件</a:t>
+                        <a:t>25件</a:t>
                       </a:r>
                       <a:endParaRPr lang="en-US" sz="900" dirty="0">
                         <a:latin typeface="Arial" charset="0"/>
@@ -13027,7 +13027,7 @@
                           <a:ea typeface="Arial" pitchFamily="34" charset="-122"/>
                           <a:cs typeface="Arial" pitchFamily="34" charset="-120"/>
                         </a:rPr>
-                        <a:t>22件</a:t>
+                        <a:t>21件</a:t>
                       </a:r>
                       <a:endParaRPr lang="en-US" sz="900" dirty="0">
                         <a:latin typeface="Arial" charset="0"/>
@@ -13233,7 +13233,7 @@
                           <a:ea typeface="Arial" pitchFamily="34" charset="-122"/>
                           <a:cs typeface="Arial" pitchFamily="34" charset="-120"/>
                         </a:rPr>
-                        <a:t>古さのためか清掃にも限界があるように感じた</a:t>
+                        <a:t>部屋はやや年季が入っていますが、きれいに掃除されておりました</a:t>
                       </a:r>
                       <a:endParaRPr lang="en-US" sz="900" dirty="0">
                         <a:latin typeface="Arial" charset="0"/>
@@ -13301,7 +13301,7 @@
                           <a:ea typeface="Arial" pitchFamily="34" charset="-122"/>
                           <a:cs typeface="Arial" pitchFamily="34" charset="-120"/>
                         </a:rPr>
-                        <a:t>11件</a:t>
+                        <a:t>12件</a:t>
                       </a:r>
                       <a:endParaRPr lang="en-US" sz="900" dirty="0">
                         <a:latin typeface="Arial" charset="0"/>
@@ -13439,7 +13439,7 @@
                           <a:ea typeface="Arial" pitchFamily="34" charset="-122"/>
                           <a:cs typeface="Arial" pitchFamily="34" charset="-120"/>
                         </a:rPr>
-                        <a:t>窓・採光</a:t>
+                        <a:t>対応・サービスの不満</a:t>
                       </a:r>
                       <a:endParaRPr lang="en-US" sz="900" dirty="0">
                         <a:latin typeface="Arial" charset="0"/>
@@ -13507,7 +13507,7 @@
                           <a:ea typeface="Arial" pitchFamily="34" charset="-122"/>
                           <a:cs typeface="Arial" pitchFamily="34" charset="-120"/>
                         </a:rPr>
-                        <a:t>窓がない部屋だったので寝泊まりだけでは充分ですがホテル滞在メインだと部屋有りのとこがいいかもです</a:t>
+                        <a:t>房間很不錯 酒店負一層有投幣的洗衣機 500日圓就可以把衣服洗凈烘乾 非常方便 前台服務職員非常溫馨 服務態度很好...</a:t>
                       </a:r>
                       <a:endParaRPr lang="en-US" sz="900" dirty="0">
                         <a:latin typeface="Arial" charset="0"/>
@@ -13575,7 +13575,7 @@
                           <a:ea typeface="Arial" pitchFamily="34" charset="-122"/>
                           <a:cs typeface="Arial" pitchFamily="34" charset="-120"/>
                         </a:rPr>
-                        <a:t>9件</a:t>
+                        <a:t>10件</a:t>
                       </a:r>
                       <a:endParaRPr lang="en-US" sz="900" dirty="0">
                         <a:latin typeface="Arial" charset="0"/>
@@ -13713,7 +13713,7 @@
                           <a:ea typeface="Arial" pitchFamily="34" charset="-122"/>
                           <a:cs typeface="Arial" pitchFamily="34" charset="-120"/>
                         </a:rPr>
-                        <a:t>対応・サービスの不満</a:t>
+                        <a:t>部屋の狭さ</a:t>
                       </a:r>
                       <a:endParaRPr lang="en-US" sz="900" dirty="0">
                         <a:latin typeface="Arial" charset="0"/>
@@ -13781,7 +13781,7 @@
                           <a:ea typeface="Arial" pitchFamily="34" charset="-122"/>
                           <a:cs typeface="Arial" pitchFamily="34" charset="-120"/>
                         </a:rPr>
-                        <a:t>ただドライヤーの吸い込み部分の汚れが酷く残念でした</a:t>
+                        <a:t>部屋は小さいですが、基本的なアメニティはすべて揃っているので、コストパフォーマンスに優れています</a:t>
                       </a:r>
                       <a:endParaRPr lang="en-US" sz="900" dirty="0">
                         <a:latin typeface="Arial" charset="0"/>
@@ -13849,7 +13849,7 @@
                           <a:ea typeface="Arial" pitchFamily="34" charset="-122"/>
                           <a:cs typeface="Arial" pitchFamily="34" charset="-120"/>
                         </a:rPr>
-                        <a:t>9件</a:t>
+                        <a:t>7件</a:t>
                       </a:r>
                       <a:endParaRPr lang="en-US" sz="900" dirty="0">
                         <a:latin typeface="Arial" charset="0"/>
@@ -13987,7 +13987,7 @@
                           <a:ea typeface="Arial" pitchFamily="34" charset="-122"/>
                           <a:cs typeface="Arial" pitchFamily="34" charset="-120"/>
                         </a:rPr>
-                        <a:t>部屋の狭さ</a:t>
+                        <a:t>窓・採光</a:t>
                       </a:r>
                       <a:endParaRPr lang="en-US" sz="900" dirty="0">
                         <a:latin typeface="Arial" charset="0"/>
@@ -14055,7 +14055,7 @@
                           <a:ea typeface="Arial" pitchFamily="34" charset="-122"/>
                           <a:cs typeface="Arial" pitchFamily="34" charset="-120"/>
                         </a:rPr>
-                        <a:t>唯一の難点は、部屋が少し狭いことです</a:t>
+                        <a:t>窓がない部屋だったので寝泊まりだけでは充分ですがホテル滞在メインだと部屋有りのとこがいいかもです</a:t>
                       </a:r>
                       <a:endParaRPr lang="en-US" sz="900" dirty="0">
                         <a:latin typeface="Arial" charset="0"/>
@@ -14123,7 +14123,7 @@
                           <a:ea typeface="Arial" pitchFamily="34" charset="-122"/>
                           <a:cs typeface="Arial" pitchFamily="34" charset="-120"/>
                         </a:rPr>
-                        <a:t>6件</a:t>
+                        <a:t>7件</a:t>
                       </a:r>
                       <a:endParaRPr lang="en-US" sz="900" dirty="0">
                         <a:latin typeface="Arial" charset="0"/>

--- a/納品レポート/ホテル別レポート/richmond_mejiro_口コミ分析レポート.pptx
+++ b/納品レポート/ホテル別レポート/richmond_mejiro_口コミ分析レポート.pptx
@@ -316,13 +316,13 @@
                 <c:formatCode>General</c:formatCode>
                 <c:ptCount val="9"/>
                 <c:pt idx="0">
-                  <c:v>68</c:v>
+                  <c:v>65</c:v>
                 </c:pt>
                 <c:pt idx="1">
                   <c:v>15</c:v>
                 </c:pt>
                 <c:pt idx="2">
-                  <c:v>42</c:v>
+                  <c:v>43</c:v>
                 </c:pt>
                 <c:pt idx="3">
                   <c:v>7</c:v>
@@ -331,7 +331,7 @@
                   <c:v>7</c:v>
                 </c:pt>
                 <c:pt idx="5">
-                  <c:v>3</c:v>
+                  <c:v>4</c:v>
                 </c:pt>
                 <c:pt idx="6">
                   <c:v>1</c:v>
@@ -340,7 +340,7 @@
                   <c:v>1</c:v>
                 </c:pt>
                 <c:pt idx="8">
-                  <c:v>1</c:v>
+                  <c:v>2</c:v>
                 </c:pt>
               </c:numCache>
             </c:numRef>
@@ -630,10 +630,10 @@
                     <c:v>じゃらん</c:v>
                   </c:pt>
                   <c:pt idx="3">
-                    <c:v>Google</c:v>
+                    <c:v>楽天トラベル</c:v>
                   </c:pt>
                   <c:pt idx="4">
-                    <c:v>楽天トラベル</c:v>
+                    <c:v>Google</c:v>
                   </c:pt>
                   <c:pt idx="5">
                     <c:v>Booking.com</c:v>
@@ -649,22 +649,22 @@
                 <c:formatCode>General</c:formatCode>
                 <c:ptCount val="6"/>
                 <c:pt idx="0">
-                  <c:v>9.47</c:v>
+                  <c:v>9.5</c:v>
                 </c:pt>
                 <c:pt idx="1">
                   <c:v>9.33</c:v>
                 </c:pt>
                 <c:pt idx="2">
-                  <c:v>9</c:v>
+                  <c:v>8.96</c:v>
                 </c:pt>
                 <c:pt idx="3">
-                  <c:v>8.82</c:v>
+                  <c:v>8.32</c:v>
                 </c:pt>
                 <c:pt idx="4">
-                  <c:v>8.38</c:v>
+                  <c:v>8.14</c:v>
                 </c:pt>
                 <c:pt idx="5">
-                  <c:v>7.85</c:v>
+                  <c:v>7.71</c:v>
                 </c:pt>
               </c:numCache>
             </c:numRef>
@@ -2834,7 +2834,7 @@
                 <a:ea typeface="Arial" pitchFamily="34" charset="-122"/>
                 <a:cs typeface="Arial" pitchFamily="34" charset="-120"/>
               </a:rPr>
-              <a:t>リッチモンドホテル東京目白は全体平均8.73点（10pt換算）、高評価率86.2%を達成しています。本レポートで示した改善施策を段階的に実施することで、さらなる顧客満足度向上が期待できます。</a:t>
+              <a:t>リッチモンドホテル東京目白は全体平均8.63点（10pt換算）、高評価率84.8%を達成しています。本レポートで示した改善施策を段階的に実施することで、さらなる顧客満足度向上が期待できます。</a:t>
             </a:r>
             <a:endParaRPr lang="en-US" sz="1200" dirty="0"/>
           </a:p>
@@ -3271,7 +3271,7 @@
                 <a:ea typeface="Arial" pitchFamily="34" charset="-122"/>
                 <a:cs typeface="Arial" pitchFamily="34" charset="-120"/>
               </a:rPr>
-              <a:t>8.73</a:t>
+              <a:t>8.63</a:t>
             </a:r>
             <a:endParaRPr lang="en-US" sz="2800" dirty="0"/>
           </a:p>
@@ -3389,7 +3389,7 @@
                 <a:ea typeface="Arial" pitchFamily="34" charset="-122"/>
                 <a:cs typeface="Arial" pitchFamily="34" charset="-120"/>
               </a:rPr>
-              <a:t>86.2%</a:t>
+              <a:t>84.8%</a:t>
             </a:r>
             <a:endParaRPr lang="en-US" sz="2800" dirty="0"/>
           </a:p>
@@ -3507,7 +3507,7 @@
                 <a:ea typeface="Arial" pitchFamily="34" charset="-122"/>
                 <a:cs typeface="Arial" pitchFamily="34" charset="-120"/>
               </a:rPr>
-              <a:t>2.1%</a:t>
+              <a:t>2.8%</a:t>
             </a:r>
             <a:endParaRPr lang="en-US" sz="2800" dirty="0"/>
           </a:p>
@@ -4364,7 +4364,7 @@
                           <a:ea typeface="Arial" pitchFamily="34" charset="-122"/>
                           <a:cs typeface="Arial" pitchFamily="34" charset="-120"/>
                         </a:rPr>
-                        <a:t>36</a:t>
+                        <a:t>38</a:t>
                       </a:r>
                       <a:endParaRPr lang="en-US" sz="800" dirty="0">
                         <a:latin typeface="Arial" charset="0"/>
@@ -4432,7 +4432,7 @@
                           <a:ea typeface="Arial" pitchFamily="34" charset="-122"/>
                           <a:cs typeface="Arial" pitchFamily="34" charset="-120"/>
                         </a:rPr>
-                        <a:t>9.47/10</a:t>
+                        <a:t>9.50/10</a:t>
                       </a:r>
                       <a:endParaRPr lang="en-US" sz="800" dirty="0">
                         <a:latin typeface="Arial" charset="0"/>
@@ -4500,7 +4500,7 @@
                           <a:ea typeface="Arial" pitchFamily="34" charset="-122"/>
                           <a:cs typeface="Arial" pitchFamily="34" charset="-120"/>
                         </a:rPr>
-                        <a:t>9.47</a:t>
+                        <a:t>9.50</a:t>
                       </a:r>
                       <a:endParaRPr lang="en-US" sz="800" dirty="0">
                         <a:latin typeface="Arial" charset="0"/>
@@ -5048,7 +5048,7 @@
                           <a:ea typeface="Arial" pitchFamily="34" charset="-122"/>
                           <a:cs typeface="Arial" pitchFamily="34" charset="-120"/>
                         </a:rPr>
-                        <a:t>26</a:t>
+                        <a:t>27</a:t>
                       </a:r>
                       <a:endParaRPr lang="en-US" sz="800" dirty="0">
                         <a:latin typeface="Arial" charset="0"/>
@@ -5116,7 +5116,7 @@
                           <a:ea typeface="Arial" pitchFamily="34" charset="-122"/>
                           <a:cs typeface="Arial" pitchFamily="34" charset="-120"/>
                         </a:rPr>
-                        <a:t>4.50/5</a:t>
+                        <a:t>4.48/5</a:t>
                       </a:r>
                       <a:endParaRPr lang="en-US" sz="800" dirty="0">
                         <a:latin typeface="Arial" charset="0"/>
@@ -5184,7 +5184,7 @@
                           <a:ea typeface="Arial" pitchFamily="34" charset="-122"/>
                           <a:cs typeface="Arial" pitchFamily="34" charset="-120"/>
                         </a:rPr>
-                        <a:t>9.00</a:t>
+                        <a:t>8.96</a:t>
                       </a:r>
                       <a:endParaRPr lang="en-US" sz="800" dirty="0">
                         <a:latin typeface="Arial" charset="0"/>
@@ -5252,7 +5252,349 @@
                           <a:ea typeface="Arial" pitchFamily="34" charset="-122"/>
                           <a:cs typeface="Arial" pitchFamily="34" charset="-120"/>
                         </a:rPr>
-                        <a:t>優秀</a:t>
+                        <a:t>良好</a:t>
+                      </a:r>
+                      <a:endParaRPr lang="en-US" sz="800" dirty="0">
+                        <a:latin typeface="Arial" charset="0"/>
+                        <a:ea typeface="Arial" charset="0"/>
+                        <a:cs typeface="Arial" charset="0"/>
+                      </a:endParaRPr>
+                    </a:p>
+                  </a:txBody>
+                  <a:tcPr marL="91440" marR="91440" marT="45720" marB="45720">
+                    <a:lnL w="6350" cap="flat" cmpd="sng" algn="ctr">
+                      <a:solidFill>
+                        <a:srgbClr val="CCCCCC"/>
+                      </a:solidFill>
+                      <a:prstDash val="solid"/>
+                      <a:round/>
+                      <a:headEnd type="none" w="med" len="med"/>
+                      <a:tailEnd type="none" w="med" len="med"/>
+                    </a:lnL>
+                    <a:lnR w="6350" cap="flat" cmpd="sng" algn="ctr">
+                      <a:solidFill>
+                        <a:srgbClr val="CCCCCC"/>
+                      </a:solidFill>
+                      <a:prstDash val="solid"/>
+                      <a:round/>
+                      <a:headEnd type="none" w="med" len="med"/>
+                      <a:tailEnd type="none" w="med" len="med"/>
+                    </a:lnR>
+                    <a:lnT w="6350" cap="flat" cmpd="sng" algn="ctr">
+                      <a:solidFill>
+                        <a:srgbClr val="CCCCCC"/>
+                      </a:solidFill>
+                      <a:prstDash val="solid"/>
+                      <a:round/>
+                      <a:headEnd type="none" w="med" len="med"/>
+                      <a:tailEnd type="none" w="med" len="med"/>
+                    </a:lnT>
+                    <a:lnB w="6350" cap="flat" cmpd="sng" algn="ctr">
+                      <a:solidFill>
+                        <a:srgbClr val="CCCCCC"/>
+                      </a:solidFill>
+                      <a:prstDash val="solid"/>
+                      <a:round/>
+                      <a:headEnd type="none" w="med" len="med"/>
+                      <a:tailEnd type="none" w="med" len="med"/>
+                    </a:lnB>
+                    <a:solidFill>
+                      <a:srgbClr val="FFFFFF"/>
+                    </a:solidFill>
+                  </a:tcPr>
+                </a:tc>
+              </a:tr>
+              <a:tr h="0">
+                <a:tc>
+                  <a:txBody>
+                    <a:bodyPr/>
+                    <a:lstStyle/>
+                    <a:p>
+                      <a:pPr algn="ctr" indent="0" marL="0">
+                        <a:buNone/>
+                      </a:pPr>
+                      <a:r>
+                        <a:rPr lang="en-US" sz="800" dirty="0">
+                          <a:solidFill>
+                            <a:srgbClr val="000000"/>
+                          </a:solidFill>
+                          <a:latin typeface="Arial" pitchFamily="34" charset="0"/>
+                          <a:ea typeface="Arial" pitchFamily="34" charset="-122"/>
+                          <a:cs typeface="Arial" pitchFamily="34" charset="-120"/>
+                        </a:rPr>
+                        <a:t>楽天トラベル</a:t>
+                      </a:r>
+                      <a:endParaRPr lang="en-US" sz="800" dirty="0">
+                        <a:latin typeface="Arial" charset="0"/>
+                        <a:ea typeface="Arial" charset="0"/>
+                        <a:cs typeface="Arial" charset="0"/>
+                      </a:endParaRPr>
+                    </a:p>
+                  </a:txBody>
+                  <a:tcPr marL="91440" marR="91440" marT="45720" marB="45720">
+                    <a:lnL w="6350" cap="flat" cmpd="sng" algn="ctr">
+                      <a:solidFill>
+                        <a:srgbClr val="CCCCCC"/>
+                      </a:solidFill>
+                      <a:prstDash val="solid"/>
+                      <a:round/>
+                      <a:headEnd type="none" w="med" len="med"/>
+                      <a:tailEnd type="none" w="med" len="med"/>
+                    </a:lnL>
+                    <a:lnR w="6350" cap="flat" cmpd="sng" algn="ctr">
+                      <a:solidFill>
+                        <a:srgbClr val="CCCCCC"/>
+                      </a:solidFill>
+                      <a:prstDash val="solid"/>
+                      <a:round/>
+                      <a:headEnd type="none" w="med" len="med"/>
+                      <a:tailEnd type="none" w="med" len="med"/>
+                    </a:lnR>
+                    <a:lnT w="6350" cap="flat" cmpd="sng" algn="ctr">
+                      <a:solidFill>
+                        <a:srgbClr val="CCCCCC"/>
+                      </a:solidFill>
+                      <a:prstDash val="solid"/>
+                      <a:round/>
+                      <a:headEnd type="none" w="med" len="med"/>
+                      <a:tailEnd type="none" w="med" len="med"/>
+                    </a:lnT>
+                    <a:lnB w="6350" cap="flat" cmpd="sng" algn="ctr">
+                      <a:solidFill>
+                        <a:srgbClr val="CCCCCC"/>
+                      </a:solidFill>
+                      <a:prstDash val="solid"/>
+                      <a:round/>
+                      <a:headEnd type="none" w="med" len="med"/>
+                      <a:tailEnd type="none" w="med" len="med"/>
+                    </a:lnB>
+                    <a:solidFill>
+                      <a:srgbClr val="FFFFFF"/>
+                    </a:solidFill>
+                  </a:tcPr>
+                </a:tc>
+                <a:tc>
+                  <a:txBody>
+                    <a:bodyPr/>
+                    <a:lstStyle/>
+                    <a:p>
+                      <a:pPr algn="ctr" indent="0" marL="0">
+                        <a:buNone/>
+                      </a:pPr>
+                      <a:r>
+                        <a:rPr lang="en-US" sz="800" dirty="0">
+                          <a:solidFill>
+                            <a:srgbClr val="000000"/>
+                          </a:solidFill>
+                          <a:latin typeface="Arial" pitchFamily="34" charset="0"/>
+                          <a:ea typeface="Arial" pitchFamily="34" charset="-122"/>
+                          <a:cs typeface="Arial" pitchFamily="34" charset="-120"/>
+                        </a:rPr>
+                        <a:t>25</a:t>
+                      </a:r>
+                      <a:endParaRPr lang="en-US" sz="800" dirty="0">
+                        <a:latin typeface="Arial" charset="0"/>
+                        <a:ea typeface="Arial" charset="0"/>
+                        <a:cs typeface="Arial" charset="0"/>
+                      </a:endParaRPr>
+                    </a:p>
+                  </a:txBody>
+                  <a:tcPr marL="91440" marR="91440" marT="45720" marB="45720">
+                    <a:lnL w="6350" cap="flat" cmpd="sng" algn="ctr">
+                      <a:solidFill>
+                        <a:srgbClr val="CCCCCC"/>
+                      </a:solidFill>
+                      <a:prstDash val="solid"/>
+                      <a:round/>
+                      <a:headEnd type="none" w="med" len="med"/>
+                      <a:tailEnd type="none" w="med" len="med"/>
+                    </a:lnL>
+                    <a:lnR w="6350" cap="flat" cmpd="sng" algn="ctr">
+                      <a:solidFill>
+                        <a:srgbClr val="CCCCCC"/>
+                      </a:solidFill>
+                      <a:prstDash val="solid"/>
+                      <a:round/>
+                      <a:headEnd type="none" w="med" len="med"/>
+                      <a:tailEnd type="none" w="med" len="med"/>
+                    </a:lnR>
+                    <a:lnT w="6350" cap="flat" cmpd="sng" algn="ctr">
+                      <a:solidFill>
+                        <a:srgbClr val="CCCCCC"/>
+                      </a:solidFill>
+                      <a:prstDash val="solid"/>
+                      <a:round/>
+                      <a:headEnd type="none" w="med" len="med"/>
+                      <a:tailEnd type="none" w="med" len="med"/>
+                    </a:lnT>
+                    <a:lnB w="6350" cap="flat" cmpd="sng" algn="ctr">
+                      <a:solidFill>
+                        <a:srgbClr val="CCCCCC"/>
+                      </a:solidFill>
+                      <a:prstDash val="solid"/>
+                      <a:round/>
+                      <a:headEnd type="none" w="med" len="med"/>
+                      <a:tailEnd type="none" w="med" len="med"/>
+                    </a:lnB>
+                    <a:solidFill>
+                      <a:srgbClr val="FFFFFF"/>
+                    </a:solidFill>
+                  </a:tcPr>
+                </a:tc>
+                <a:tc>
+                  <a:txBody>
+                    <a:bodyPr/>
+                    <a:lstStyle/>
+                    <a:p>
+                      <a:pPr algn="ctr" indent="0" marL="0">
+                        <a:buNone/>
+                      </a:pPr>
+                      <a:r>
+                        <a:rPr lang="en-US" sz="800" dirty="0">
+                          <a:solidFill>
+                            <a:srgbClr val="000000"/>
+                          </a:solidFill>
+                          <a:latin typeface="Arial" pitchFamily="34" charset="0"/>
+                          <a:ea typeface="Arial" pitchFamily="34" charset="-122"/>
+                          <a:cs typeface="Arial" pitchFamily="34" charset="-120"/>
+                        </a:rPr>
+                        <a:t>4.16/5</a:t>
+                      </a:r>
+                      <a:endParaRPr lang="en-US" sz="800" dirty="0">
+                        <a:latin typeface="Arial" charset="0"/>
+                        <a:ea typeface="Arial" charset="0"/>
+                        <a:cs typeface="Arial" charset="0"/>
+                      </a:endParaRPr>
+                    </a:p>
+                  </a:txBody>
+                  <a:tcPr marL="91440" marR="91440" marT="45720" marB="45720">
+                    <a:lnL w="6350" cap="flat" cmpd="sng" algn="ctr">
+                      <a:solidFill>
+                        <a:srgbClr val="CCCCCC"/>
+                      </a:solidFill>
+                      <a:prstDash val="solid"/>
+                      <a:round/>
+                      <a:headEnd type="none" w="med" len="med"/>
+                      <a:tailEnd type="none" w="med" len="med"/>
+                    </a:lnL>
+                    <a:lnR w="6350" cap="flat" cmpd="sng" algn="ctr">
+                      <a:solidFill>
+                        <a:srgbClr val="CCCCCC"/>
+                      </a:solidFill>
+                      <a:prstDash val="solid"/>
+                      <a:round/>
+                      <a:headEnd type="none" w="med" len="med"/>
+                      <a:tailEnd type="none" w="med" len="med"/>
+                    </a:lnR>
+                    <a:lnT w="6350" cap="flat" cmpd="sng" algn="ctr">
+                      <a:solidFill>
+                        <a:srgbClr val="CCCCCC"/>
+                      </a:solidFill>
+                      <a:prstDash val="solid"/>
+                      <a:round/>
+                      <a:headEnd type="none" w="med" len="med"/>
+                      <a:tailEnd type="none" w="med" len="med"/>
+                    </a:lnT>
+                    <a:lnB w="6350" cap="flat" cmpd="sng" algn="ctr">
+                      <a:solidFill>
+                        <a:srgbClr val="CCCCCC"/>
+                      </a:solidFill>
+                      <a:prstDash val="solid"/>
+                      <a:round/>
+                      <a:headEnd type="none" w="med" len="med"/>
+                      <a:tailEnd type="none" w="med" len="med"/>
+                    </a:lnB>
+                    <a:solidFill>
+                      <a:srgbClr val="FFFFFF"/>
+                    </a:solidFill>
+                  </a:tcPr>
+                </a:tc>
+                <a:tc>
+                  <a:txBody>
+                    <a:bodyPr/>
+                    <a:lstStyle/>
+                    <a:p>
+                      <a:pPr algn="ctr" indent="0" marL="0">
+                        <a:buNone/>
+                      </a:pPr>
+                      <a:r>
+                        <a:rPr lang="en-US" sz="800" dirty="0">
+                          <a:solidFill>
+                            <a:srgbClr val="000000"/>
+                          </a:solidFill>
+                          <a:latin typeface="Arial" pitchFamily="34" charset="0"/>
+                          <a:ea typeface="Arial" pitchFamily="34" charset="-122"/>
+                          <a:cs typeface="Arial" pitchFamily="34" charset="-120"/>
+                        </a:rPr>
+                        <a:t>8.32</a:t>
+                      </a:r>
+                      <a:endParaRPr lang="en-US" sz="800" dirty="0">
+                        <a:latin typeface="Arial" charset="0"/>
+                        <a:ea typeface="Arial" charset="0"/>
+                        <a:cs typeface="Arial" charset="0"/>
+                      </a:endParaRPr>
+                    </a:p>
+                  </a:txBody>
+                  <a:tcPr marL="91440" marR="91440" marT="45720" marB="45720">
+                    <a:lnL w="6350" cap="flat" cmpd="sng" algn="ctr">
+                      <a:solidFill>
+                        <a:srgbClr val="CCCCCC"/>
+                      </a:solidFill>
+                      <a:prstDash val="solid"/>
+                      <a:round/>
+                      <a:headEnd type="none" w="med" len="med"/>
+                      <a:tailEnd type="none" w="med" len="med"/>
+                    </a:lnL>
+                    <a:lnR w="6350" cap="flat" cmpd="sng" algn="ctr">
+                      <a:solidFill>
+                        <a:srgbClr val="CCCCCC"/>
+                      </a:solidFill>
+                      <a:prstDash val="solid"/>
+                      <a:round/>
+                      <a:headEnd type="none" w="med" len="med"/>
+                      <a:tailEnd type="none" w="med" len="med"/>
+                    </a:lnR>
+                    <a:lnT w="6350" cap="flat" cmpd="sng" algn="ctr">
+                      <a:solidFill>
+                        <a:srgbClr val="CCCCCC"/>
+                      </a:solidFill>
+                      <a:prstDash val="solid"/>
+                      <a:round/>
+                      <a:headEnd type="none" w="med" len="med"/>
+                      <a:tailEnd type="none" w="med" len="med"/>
+                    </a:lnT>
+                    <a:lnB w="6350" cap="flat" cmpd="sng" algn="ctr">
+                      <a:solidFill>
+                        <a:srgbClr val="CCCCCC"/>
+                      </a:solidFill>
+                      <a:prstDash val="solid"/>
+                      <a:round/>
+                      <a:headEnd type="none" w="med" len="med"/>
+                      <a:tailEnd type="none" w="med" len="med"/>
+                    </a:lnB>
+                    <a:solidFill>
+                      <a:srgbClr val="FFFFFF"/>
+                    </a:solidFill>
+                  </a:tcPr>
+                </a:tc>
+                <a:tc>
+                  <a:txBody>
+                    <a:bodyPr/>
+                    <a:lstStyle/>
+                    <a:p>
+                      <a:pPr algn="ctr" indent="0" marL="0">
+                        <a:buNone/>
+                      </a:pPr>
+                      <a:r>
+                        <a:rPr lang="en-US" sz="800" dirty="0">
+                          <a:solidFill>
+                            <a:srgbClr val="000000"/>
+                          </a:solidFill>
+                          <a:latin typeface="Arial" pitchFamily="34" charset="0"/>
+                          <a:ea typeface="Arial" pitchFamily="34" charset="-122"/>
+                          <a:cs typeface="Arial" pitchFamily="34" charset="-120"/>
+                        </a:rPr>
+                        <a:t>良好</a:t>
                       </a:r>
                       <a:endParaRPr lang="en-US" sz="800" dirty="0">
                         <a:latin typeface="Arial" charset="0"/>
@@ -5390,7 +5732,7 @@
                           <a:ea typeface="Arial" pitchFamily="34" charset="-122"/>
                           <a:cs typeface="Arial" pitchFamily="34" charset="-120"/>
                         </a:rPr>
-                        <a:t>17</a:t>
+                        <a:t>14</a:t>
                       </a:r>
                       <a:endParaRPr lang="en-US" sz="800" dirty="0">
                         <a:latin typeface="Arial" charset="0"/>
@@ -5458,7 +5800,7 @@
                           <a:ea typeface="Arial" pitchFamily="34" charset="-122"/>
                           <a:cs typeface="Arial" pitchFamily="34" charset="-120"/>
                         </a:rPr>
-                        <a:t>4.41/5</a:t>
+                        <a:t>4.07/5</a:t>
                       </a:r>
                       <a:endParaRPr lang="en-US" sz="800" dirty="0">
                         <a:latin typeface="Arial" charset="0"/>
@@ -5526,349 +5868,7 @@
                           <a:ea typeface="Arial" pitchFamily="34" charset="-122"/>
                           <a:cs typeface="Arial" pitchFamily="34" charset="-120"/>
                         </a:rPr>
-                        <a:t>8.82</a:t>
-                      </a:r>
-                      <a:endParaRPr lang="en-US" sz="800" dirty="0">
-                        <a:latin typeface="Arial" charset="0"/>
-                        <a:ea typeface="Arial" charset="0"/>
-                        <a:cs typeface="Arial" charset="0"/>
-                      </a:endParaRPr>
-                    </a:p>
-                  </a:txBody>
-                  <a:tcPr marL="91440" marR="91440" marT="45720" marB="45720">
-                    <a:lnL w="6350" cap="flat" cmpd="sng" algn="ctr">
-                      <a:solidFill>
-                        <a:srgbClr val="CCCCCC"/>
-                      </a:solidFill>
-                      <a:prstDash val="solid"/>
-                      <a:round/>
-                      <a:headEnd type="none" w="med" len="med"/>
-                      <a:tailEnd type="none" w="med" len="med"/>
-                    </a:lnL>
-                    <a:lnR w="6350" cap="flat" cmpd="sng" algn="ctr">
-                      <a:solidFill>
-                        <a:srgbClr val="CCCCCC"/>
-                      </a:solidFill>
-                      <a:prstDash val="solid"/>
-                      <a:round/>
-                      <a:headEnd type="none" w="med" len="med"/>
-                      <a:tailEnd type="none" w="med" len="med"/>
-                    </a:lnR>
-                    <a:lnT w="6350" cap="flat" cmpd="sng" algn="ctr">
-                      <a:solidFill>
-                        <a:srgbClr val="CCCCCC"/>
-                      </a:solidFill>
-                      <a:prstDash val="solid"/>
-                      <a:round/>
-                      <a:headEnd type="none" w="med" len="med"/>
-                      <a:tailEnd type="none" w="med" len="med"/>
-                    </a:lnT>
-                    <a:lnB w="6350" cap="flat" cmpd="sng" algn="ctr">
-                      <a:solidFill>
-                        <a:srgbClr val="CCCCCC"/>
-                      </a:solidFill>
-                      <a:prstDash val="solid"/>
-                      <a:round/>
-                      <a:headEnd type="none" w="med" len="med"/>
-                      <a:tailEnd type="none" w="med" len="med"/>
-                    </a:lnB>
-                    <a:solidFill>
-                      <a:srgbClr val="FFFFFF"/>
-                    </a:solidFill>
-                  </a:tcPr>
-                </a:tc>
-                <a:tc>
-                  <a:txBody>
-                    <a:bodyPr/>
-                    <a:lstStyle/>
-                    <a:p>
-                      <a:pPr algn="ctr" indent="0" marL="0">
-                        <a:buNone/>
-                      </a:pPr>
-                      <a:r>
-                        <a:rPr lang="en-US" sz="800" dirty="0">
-                          <a:solidFill>
-                            <a:srgbClr val="000000"/>
-                          </a:solidFill>
-                          <a:latin typeface="Arial" pitchFamily="34" charset="0"/>
-                          <a:ea typeface="Arial" pitchFamily="34" charset="-122"/>
-                          <a:cs typeface="Arial" pitchFamily="34" charset="-120"/>
-                        </a:rPr>
-                        <a:t>良好</a:t>
-                      </a:r>
-                      <a:endParaRPr lang="en-US" sz="800" dirty="0">
-                        <a:latin typeface="Arial" charset="0"/>
-                        <a:ea typeface="Arial" charset="0"/>
-                        <a:cs typeface="Arial" charset="0"/>
-                      </a:endParaRPr>
-                    </a:p>
-                  </a:txBody>
-                  <a:tcPr marL="91440" marR="91440" marT="45720" marB="45720">
-                    <a:lnL w="6350" cap="flat" cmpd="sng" algn="ctr">
-                      <a:solidFill>
-                        <a:srgbClr val="CCCCCC"/>
-                      </a:solidFill>
-                      <a:prstDash val="solid"/>
-                      <a:round/>
-                      <a:headEnd type="none" w="med" len="med"/>
-                      <a:tailEnd type="none" w="med" len="med"/>
-                    </a:lnL>
-                    <a:lnR w="6350" cap="flat" cmpd="sng" algn="ctr">
-                      <a:solidFill>
-                        <a:srgbClr val="CCCCCC"/>
-                      </a:solidFill>
-                      <a:prstDash val="solid"/>
-                      <a:round/>
-                      <a:headEnd type="none" w="med" len="med"/>
-                      <a:tailEnd type="none" w="med" len="med"/>
-                    </a:lnR>
-                    <a:lnT w="6350" cap="flat" cmpd="sng" algn="ctr">
-                      <a:solidFill>
-                        <a:srgbClr val="CCCCCC"/>
-                      </a:solidFill>
-                      <a:prstDash val="solid"/>
-                      <a:round/>
-                      <a:headEnd type="none" w="med" len="med"/>
-                      <a:tailEnd type="none" w="med" len="med"/>
-                    </a:lnT>
-                    <a:lnB w="6350" cap="flat" cmpd="sng" algn="ctr">
-                      <a:solidFill>
-                        <a:srgbClr val="CCCCCC"/>
-                      </a:solidFill>
-                      <a:prstDash val="solid"/>
-                      <a:round/>
-                      <a:headEnd type="none" w="med" len="med"/>
-                      <a:tailEnd type="none" w="med" len="med"/>
-                    </a:lnB>
-                    <a:solidFill>
-                      <a:srgbClr val="FFFFFF"/>
-                    </a:solidFill>
-                  </a:tcPr>
-                </a:tc>
-              </a:tr>
-              <a:tr h="0">
-                <a:tc>
-                  <a:txBody>
-                    <a:bodyPr/>
-                    <a:lstStyle/>
-                    <a:p>
-                      <a:pPr algn="ctr" indent="0" marL="0">
-                        <a:buNone/>
-                      </a:pPr>
-                      <a:r>
-                        <a:rPr lang="en-US" sz="800" dirty="0">
-                          <a:solidFill>
-                            <a:srgbClr val="000000"/>
-                          </a:solidFill>
-                          <a:latin typeface="Arial" pitchFamily="34" charset="0"/>
-                          <a:ea typeface="Arial" pitchFamily="34" charset="-122"/>
-                          <a:cs typeface="Arial" pitchFamily="34" charset="-120"/>
-                        </a:rPr>
-                        <a:t>楽天トラベル</a:t>
-                      </a:r>
-                      <a:endParaRPr lang="en-US" sz="800" dirty="0">
-                        <a:latin typeface="Arial" charset="0"/>
-                        <a:ea typeface="Arial" charset="0"/>
-                        <a:cs typeface="Arial" charset="0"/>
-                      </a:endParaRPr>
-                    </a:p>
-                  </a:txBody>
-                  <a:tcPr marL="91440" marR="91440" marT="45720" marB="45720">
-                    <a:lnL w="6350" cap="flat" cmpd="sng" algn="ctr">
-                      <a:solidFill>
-                        <a:srgbClr val="CCCCCC"/>
-                      </a:solidFill>
-                      <a:prstDash val="solid"/>
-                      <a:round/>
-                      <a:headEnd type="none" w="med" len="med"/>
-                      <a:tailEnd type="none" w="med" len="med"/>
-                    </a:lnL>
-                    <a:lnR w="6350" cap="flat" cmpd="sng" algn="ctr">
-                      <a:solidFill>
-                        <a:srgbClr val="CCCCCC"/>
-                      </a:solidFill>
-                      <a:prstDash val="solid"/>
-                      <a:round/>
-                      <a:headEnd type="none" w="med" len="med"/>
-                      <a:tailEnd type="none" w="med" len="med"/>
-                    </a:lnR>
-                    <a:lnT w="6350" cap="flat" cmpd="sng" algn="ctr">
-                      <a:solidFill>
-                        <a:srgbClr val="CCCCCC"/>
-                      </a:solidFill>
-                      <a:prstDash val="solid"/>
-                      <a:round/>
-                      <a:headEnd type="none" w="med" len="med"/>
-                      <a:tailEnd type="none" w="med" len="med"/>
-                    </a:lnT>
-                    <a:lnB w="6350" cap="flat" cmpd="sng" algn="ctr">
-                      <a:solidFill>
-                        <a:srgbClr val="CCCCCC"/>
-                      </a:solidFill>
-                      <a:prstDash val="solid"/>
-                      <a:round/>
-                      <a:headEnd type="none" w="med" len="med"/>
-                      <a:tailEnd type="none" w="med" len="med"/>
-                    </a:lnB>
-                    <a:solidFill>
-                      <a:srgbClr val="FFFFFF"/>
-                    </a:solidFill>
-                  </a:tcPr>
-                </a:tc>
-                <a:tc>
-                  <a:txBody>
-                    <a:bodyPr/>
-                    <a:lstStyle/>
-                    <a:p>
-                      <a:pPr algn="ctr" indent="0" marL="0">
-                        <a:buNone/>
-                      </a:pPr>
-                      <a:r>
-                        <a:rPr lang="en-US" sz="800" dirty="0">
-                          <a:solidFill>
-                            <a:srgbClr val="000000"/>
-                          </a:solidFill>
-                          <a:latin typeface="Arial" pitchFamily="34" charset="0"/>
-                          <a:ea typeface="Arial" pitchFamily="34" charset="-122"/>
-                          <a:cs typeface="Arial" pitchFamily="34" charset="-120"/>
-                        </a:rPr>
-                        <a:t>26</a:t>
-                      </a:r>
-                      <a:endParaRPr lang="en-US" sz="800" dirty="0">
-                        <a:latin typeface="Arial" charset="0"/>
-                        <a:ea typeface="Arial" charset="0"/>
-                        <a:cs typeface="Arial" charset="0"/>
-                      </a:endParaRPr>
-                    </a:p>
-                  </a:txBody>
-                  <a:tcPr marL="91440" marR="91440" marT="45720" marB="45720">
-                    <a:lnL w="6350" cap="flat" cmpd="sng" algn="ctr">
-                      <a:solidFill>
-                        <a:srgbClr val="CCCCCC"/>
-                      </a:solidFill>
-                      <a:prstDash val="solid"/>
-                      <a:round/>
-                      <a:headEnd type="none" w="med" len="med"/>
-                      <a:tailEnd type="none" w="med" len="med"/>
-                    </a:lnL>
-                    <a:lnR w="6350" cap="flat" cmpd="sng" algn="ctr">
-                      <a:solidFill>
-                        <a:srgbClr val="CCCCCC"/>
-                      </a:solidFill>
-                      <a:prstDash val="solid"/>
-                      <a:round/>
-                      <a:headEnd type="none" w="med" len="med"/>
-                      <a:tailEnd type="none" w="med" len="med"/>
-                    </a:lnR>
-                    <a:lnT w="6350" cap="flat" cmpd="sng" algn="ctr">
-                      <a:solidFill>
-                        <a:srgbClr val="CCCCCC"/>
-                      </a:solidFill>
-                      <a:prstDash val="solid"/>
-                      <a:round/>
-                      <a:headEnd type="none" w="med" len="med"/>
-                      <a:tailEnd type="none" w="med" len="med"/>
-                    </a:lnT>
-                    <a:lnB w="6350" cap="flat" cmpd="sng" algn="ctr">
-                      <a:solidFill>
-                        <a:srgbClr val="CCCCCC"/>
-                      </a:solidFill>
-                      <a:prstDash val="solid"/>
-                      <a:round/>
-                      <a:headEnd type="none" w="med" len="med"/>
-                      <a:tailEnd type="none" w="med" len="med"/>
-                    </a:lnB>
-                    <a:solidFill>
-                      <a:srgbClr val="FFFFFF"/>
-                    </a:solidFill>
-                  </a:tcPr>
-                </a:tc>
-                <a:tc>
-                  <a:txBody>
-                    <a:bodyPr/>
-                    <a:lstStyle/>
-                    <a:p>
-                      <a:pPr algn="ctr" indent="0" marL="0">
-                        <a:buNone/>
-                      </a:pPr>
-                      <a:r>
-                        <a:rPr lang="en-US" sz="800" dirty="0">
-                          <a:solidFill>
-                            <a:srgbClr val="000000"/>
-                          </a:solidFill>
-                          <a:latin typeface="Arial" pitchFamily="34" charset="0"/>
-                          <a:ea typeface="Arial" pitchFamily="34" charset="-122"/>
-                          <a:cs typeface="Arial" pitchFamily="34" charset="-120"/>
-                        </a:rPr>
-                        <a:t>4.19/5</a:t>
-                      </a:r>
-                      <a:endParaRPr lang="en-US" sz="800" dirty="0">
-                        <a:latin typeface="Arial" charset="0"/>
-                        <a:ea typeface="Arial" charset="0"/>
-                        <a:cs typeface="Arial" charset="0"/>
-                      </a:endParaRPr>
-                    </a:p>
-                  </a:txBody>
-                  <a:tcPr marL="91440" marR="91440" marT="45720" marB="45720">
-                    <a:lnL w="6350" cap="flat" cmpd="sng" algn="ctr">
-                      <a:solidFill>
-                        <a:srgbClr val="CCCCCC"/>
-                      </a:solidFill>
-                      <a:prstDash val="solid"/>
-                      <a:round/>
-                      <a:headEnd type="none" w="med" len="med"/>
-                      <a:tailEnd type="none" w="med" len="med"/>
-                    </a:lnL>
-                    <a:lnR w="6350" cap="flat" cmpd="sng" algn="ctr">
-                      <a:solidFill>
-                        <a:srgbClr val="CCCCCC"/>
-                      </a:solidFill>
-                      <a:prstDash val="solid"/>
-                      <a:round/>
-                      <a:headEnd type="none" w="med" len="med"/>
-                      <a:tailEnd type="none" w="med" len="med"/>
-                    </a:lnR>
-                    <a:lnT w="6350" cap="flat" cmpd="sng" algn="ctr">
-                      <a:solidFill>
-                        <a:srgbClr val="CCCCCC"/>
-                      </a:solidFill>
-                      <a:prstDash val="solid"/>
-                      <a:round/>
-                      <a:headEnd type="none" w="med" len="med"/>
-                      <a:tailEnd type="none" w="med" len="med"/>
-                    </a:lnT>
-                    <a:lnB w="6350" cap="flat" cmpd="sng" algn="ctr">
-                      <a:solidFill>
-                        <a:srgbClr val="CCCCCC"/>
-                      </a:solidFill>
-                      <a:prstDash val="solid"/>
-                      <a:round/>
-                      <a:headEnd type="none" w="med" len="med"/>
-                      <a:tailEnd type="none" w="med" len="med"/>
-                    </a:lnB>
-                    <a:solidFill>
-                      <a:srgbClr val="FFFFFF"/>
-                    </a:solidFill>
-                  </a:tcPr>
-                </a:tc>
-                <a:tc>
-                  <a:txBody>
-                    <a:bodyPr/>
-                    <a:lstStyle/>
-                    <a:p>
-                      <a:pPr algn="ctr" indent="0" marL="0">
-                        <a:buNone/>
-                      </a:pPr>
-                      <a:r>
-                        <a:rPr lang="en-US" sz="800" dirty="0">
-                          <a:solidFill>
-                            <a:srgbClr val="000000"/>
-                          </a:solidFill>
-                          <a:latin typeface="Arial" pitchFamily="34" charset="0"/>
-                          <a:ea typeface="Arial" pitchFamily="34" charset="-122"/>
-                          <a:cs typeface="Arial" pitchFamily="34" charset="-120"/>
-                        </a:rPr>
-                        <a:t>8.38</a:t>
+                        <a:t>8.14</a:t>
                       </a:r>
                       <a:endParaRPr lang="en-US" sz="800" dirty="0">
                         <a:latin typeface="Arial" charset="0"/>
@@ -6074,7 +6074,7 @@
                           <a:ea typeface="Arial" pitchFamily="34" charset="-122"/>
                           <a:cs typeface="Arial" pitchFamily="34" charset="-120"/>
                         </a:rPr>
-                        <a:t>34</a:t>
+                        <a:t>35</a:t>
                       </a:r>
                       <a:endParaRPr lang="en-US" sz="800" dirty="0">
                         <a:latin typeface="Arial" charset="0"/>
@@ -6142,7 +6142,7 @@
                           <a:ea typeface="Arial" pitchFamily="34" charset="-122"/>
                           <a:cs typeface="Arial" pitchFamily="34" charset="-120"/>
                         </a:rPr>
-                        <a:t>7.85/10</a:t>
+                        <a:t>7.71/10</a:t>
                       </a:r>
                       <a:endParaRPr lang="en-US" sz="800" dirty="0">
                         <a:latin typeface="Arial" charset="0"/>
@@ -6210,7 +6210,7 @@
                           <a:ea typeface="Arial" pitchFamily="34" charset="-122"/>
                           <a:cs typeface="Arial" pitchFamily="34" charset="-120"/>
                         </a:rPr>
-                        <a:t>7.85</a:t>
+                        <a:t>7.71</a:t>
                       </a:r>
                       <a:endParaRPr lang="en-US" sz="800" dirty="0">
                         <a:latin typeface="Arial" charset="0"/>
@@ -6663,7 +6663,7 @@
                 <a:ea typeface="Arial" pitchFamily="34" charset="-122"/>
                 <a:cs typeface="Arial" pitchFamily="34" charset="-120"/>
               </a:rPr>
-              <a:t>125件（86.2%）</a:t>
+              <a:t>123件（84.8%）</a:t>
             </a:r>
             <a:endParaRPr lang="en-US" sz="1600" dirty="0"/>
           </a:p>
@@ -6761,7 +6761,7 @@
                 <a:ea typeface="Arial" pitchFamily="34" charset="-122"/>
                 <a:cs typeface="Arial" pitchFamily="34" charset="-120"/>
               </a:rPr>
-              <a:t>17件（11.7%）</a:t>
+              <a:t>18件（12.4%）</a:t>
             </a:r>
             <a:endParaRPr lang="en-US" sz="1600" dirty="0"/>
           </a:p>
@@ -6859,7 +6859,7 @@
                 <a:ea typeface="Arial" pitchFamily="34" charset="-122"/>
                 <a:cs typeface="Arial" pitchFamily="34" charset="-120"/>
               </a:rPr>
-              <a:t>3件（2.1%）</a:t>
+              <a:t>4件（2.8%）</a:t>
             </a:r>
             <a:endParaRPr lang="en-US" sz="1600" dirty="0"/>
           </a:p>
@@ -7021,7 +7021,7 @@
                 <a:ea typeface="Arial" pitchFamily="34" charset="-122"/>
                 <a:cs typeface="Arial" pitchFamily="34" charset="-120"/>
               </a:rPr>
-              <a:t>高評価レビュー（8-10点: 125件）の分析から、主要な強みテーマを抽出しています。立地・アクセス、客室清潔感、スタッフ対応が高評価の中心的テーマです。</a:t>
+              <a:t>高評価レビュー（8-10点: 123件）の分析から、主要な強みテーマを抽出しています。立地・アクセス、客室清潔感、スタッフ対応が高評価の中心的テーマです。</a:t>
             </a:r>
             <a:endParaRPr lang="en-US" sz="1200" dirty="0"/>
           </a:p>
@@ -7281,7 +7281,7 @@
                 <a:ea typeface="Arial" pitchFamily="34" charset="-122"/>
                 <a:cs typeface="Arial" pitchFamily="34" charset="-120"/>
               </a:rPr>
-              <a:t>低評価・中評価レビュー（20件）から改善課題を優先度別に整理しています。S/A/B/Cの4段階で優先度を設定し、計画的な改善を推進します。</a:t>
+              <a:t>低評価・中評価レビュー（22件）から改善課題を優先度別に整理しています。S/A/B/Cの4段階で優先度を設定し、計画的な改善を推進します。</a:t>
             </a:r>
             <a:endParaRPr lang="en-US" sz="1200" dirty="0"/>
           </a:p>
@@ -8061,7 +8061,7 @@
                 <a:ea typeface="Arial" pitchFamily="34" charset="-122"/>
                 <a:cs typeface="Arial" pitchFamily="34" charset="-120"/>
               </a:rPr>
-              <a:t>全体平均 8.73点 → 目標 9.23点</a:t>
+              <a:t>全体平均 8.63点 → 目標 9.13点</a:t>
             </a:r>
             <a:endParaRPr lang="en-US" sz="1200" dirty="0"/>
           </a:p>
@@ -8078,7 +8078,7 @@
                 <a:ea typeface="Arial" pitchFamily="34" charset="-122"/>
                 <a:cs typeface="Arial" pitchFamily="34" charset="-120"/>
               </a:rPr>
-              <a:t>高評価率 86.2% → 目標 91.2%</a:t>
+              <a:t>高評価率 84.8% → 目標 89.8%</a:t>
             </a:r>
             <a:endParaRPr lang="en-US" sz="1200" dirty="0"/>
           </a:p>
@@ -8095,7 +8095,7 @@
                 <a:ea typeface="Arial" pitchFamily="34" charset="-122"/>
                 <a:cs typeface="Arial" pitchFamily="34" charset="-120"/>
               </a:rPr>
-              <a:t>低評価率 2.1% → 目標 0.1%</a:t>
+              <a:t>低評価率 2.8% → 目標 0.8%</a:t>
             </a:r>
             <a:endParaRPr lang="en-US" sz="1200" dirty="0"/>
           </a:p>

--- a/納品レポート/ホテル別レポート/richmond_mejiro_口コミ分析レポート.pptx
+++ b/納品レポート/ホテル別レポート/richmond_mejiro_口コミ分析レポート.pptx
@@ -316,13 +316,13 @@
                 <c:formatCode>General</c:formatCode>
                 <c:ptCount val="9"/>
                 <c:pt idx="0">
-                  <c:v>65</c:v>
+                  <c:v>64</c:v>
                 </c:pt>
                 <c:pt idx="1">
                   <c:v>15</c:v>
                 </c:pt>
                 <c:pt idx="2">
-                  <c:v>43</c:v>
+                  <c:v>45</c:v>
                 </c:pt>
                 <c:pt idx="3">
                   <c:v>7</c:v>
@@ -649,13 +649,13 @@
                 <c:formatCode>General</c:formatCode>
                 <c:ptCount val="6"/>
                 <c:pt idx="0">
-                  <c:v>9.5</c:v>
+                  <c:v>9.49</c:v>
                 </c:pt>
                 <c:pt idx="1">
                   <c:v>9.33</c:v>
                 </c:pt>
                 <c:pt idx="2">
-                  <c:v>8.96</c:v>
+                  <c:v>8.93</c:v>
                 </c:pt>
                 <c:pt idx="3">
                   <c:v>8.32</c:v>
@@ -664,7 +664,7 @@
                   <c:v>8.14</c:v>
                 </c:pt>
                 <c:pt idx="5">
-                  <c:v>7.71</c:v>
+                  <c:v>7.72</c:v>
                 </c:pt>
               </c:numCache>
             </c:numRef>
@@ -2554,7 +2554,7 @@
                 <a:ea typeface="Arial" pitchFamily="34" charset="-122"/>
                 <a:cs typeface="Arial" pitchFamily="34" charset="-120"/>
               </a:rPr>
-              <a:t>レビュー総数：145件</a:t>
+              <a:t>レビュー総数：146件</a:t>
             </a:r>
             <a:endParaRPr lang="en-US" sz="1000" dirty="0"/>
           </a:p>
@@ -2834,7 +2834,7 @@
                 <a:ea typeface="Arial" pitchFamily="34" charset="-122"/>
                 <a:cs typeface="Arial" pitchFamily="34" charset="-120"/>
               </a:rPr>
-              <a:t>リッチモンドホテル東京目白は全体平均8.63点（10pt換算）、高評価率84.8%を達成しています。本レポートで示した改善施策を段階的に実施することで、さらなる顧客満足度向上が期待できます。</a:t>
+              <a:t>リッチモンドホテル東京目白は全体平均8.61点（10pt換算）、高評価率84.9%を達成しています。本レポートで示した改善施策を段階的に実施することで、さらなる顧客満足度向上が期待できます。</a:t>
             </a:r>
             <a:endParaRPr lang="en-US" sz="1200" dirty="0"/>
           </a:p>
@@ -3271,7 +3271,7 @@
                 <a:ea typeface="Arial" pitchFamily="34" charset="-122"/>
                 <a:cs typeface="Arial" pitchFamily="34" charset="-120"/>
               </a:rPr>
-              <a:t>8.63</a:t>
+              <a:t>8.61</a:t>
             </a:r>
             <a:endParaRPr lang="en-US" sz="2800" dirty="0"/>
           </a:p>
@@ -3389,7 +3389,7 @@
                 <a:ea typeface="Arial" pitchFamily="34" charset="-122"/>
                 <a:cs typeface="Arial" pitchFamily="34" charset="-120"/>
               </a:rPr>
-              <a:t>84.8%</a:t>
+              <a:t>84.9%</a:t>
             </a:r>
             <a:endParaRPr lang="en-US" sz="2800" dirty="0"/>
           </a:p>
@@ -3507,7 +3507,7 @@
                 <a:ea typeface="Arial" pitchFamily="34" charset="-122"/>
                 <a:cs typeface="Arial" pitchFamily="34" charset="-120"/>
               </a:rPr>
-              <a:t>2.8%</a:t>
+              <a:t>2.7%</a:t>
             </a:r>
             <a:endParaRPr lang="en-US" sz="2800" dirty="0"/>
           </a:p>
@@ -3625,7 +3625,7 @@
                 <a:ea typeface="Arial" pitchFamily="34" charset="-122"/>
                 <a:cs typeface="Arial" pitchFamily="34" charset="-120"/>
               </a:rPr>
-              <a:t>145件</a:t>
+              <a:t>146件</a:t>
             </a:r>
             <a:endParaRPr lang="en-US" sz="2800" dirty="0"/>
           </a:p>
@@ -4364,7 +4364,7 @@
                           <a:ea typeface="Arial" pitchFamily="34" charset="-122"/>
                           <a:cs typeface="Arial" pitchFamily="34" charset="-120"/>
                         </a:rPr>
-                        <a:t>38</a:t>
+                        <a:t>37</a:t>
                       </a:r>
                       <a:endParaRPr lang="en-US" sz="800" dirty="0">
                         <a:latin typeface="Arial" charset="0"/>
@@ -4432,7 +4432,7 @@
                           <a:ea typeface="Arial" pitchFamily="34" charset="-122"/>
                           <a:cs typeface="Arial" pitchFamily="34" charset="-120"/>
                         </a:rPr>
-                        <a:t>9.50/10</a:t>
+                        <a:t>9.49/10</a:t>
                       </a:r>
                       <a:endParaRPr lang="en-US" sz="800" dirty="0">
                         <a:latin typeface="Arial" charset="0"/>
@@ -4500,7 +4500,7 @@
                           <a:ea typeface="Arial" pitchFamily="34" charset="-122"/>
                           <a:cs typeface="Arial" pitchFamily="34" charset="-120"/>
                         </a:rPr>
-                        <a:t>9.50</a:t>
+                        <a:t>9.49</a:t>
                       </a:r>
                       <a:endParaRPr lang="en-US" sz="800" dirty="0">
                         <a:latin typeface="Arial" charset="0"/>
@@ -5048,7 +5048,7 @@
                           <a:ea typeface="Arial" pitchFamily="34" charset="-122"/>
                           <a:cs typeface="Arial" pitchFamily="34" charset="-120"/>
                         </a:rPr>
-                        <a:t>27</a:t>
+                        <a:t>28</a:t>
                       </a:r>
                       <a:endParaRPr lang="en-US" sz="800" dirty="0">
                         <a:latin typeface="Arial" charset="0"/>
@@ -5116,7 +5116,7 @@
                           <a:ea typeface="Arial" pitchFamily="34" charset="-122"/>
                           <a:cs typeface="Arial" pitchFamily="34" charset="-120"/>
                         </a:rPr>
-                        <a:t>4.48/5</a:t>
+                        <a:t>4.46/5</a:t>
                       </a:r>
                       <a:endParaRPr lang="en-US" sz="800" dirty="0">
                         <a:latin typeface="Arial" charset="0"/>
@@ -5184,7 +5184,7 @@
                           <a:ea typeface="Arial" pitchFamily="34" charset="-122"/>
                           <a:cs typeface="Arial" pitchFamily="34" charset="-120"/>
                         </a:rPr>
-                        <a:t>8.96</a:t>
+                        <a:t>8.93</a:t>
                       </a:r>
                       <a:endParaRPr lang="en-US" sz="800" dirty="0">
                         <a:latin typeface="Arial" charset="0"/>
@@ -6074,7 +6074,7 @@
                           <a:ea typeface="Arial" pitchFamily="34" charset="-122"/>
                           <a:cs typeface="Arial" pitchFamily="34" charset="-120"/>
                         </a:rPr>
-                        <a:t>35</a:t>
+                        <a:t>36</a:t>
                       </a:r>
                       <a:endParaRPr lang="en-US" sz="800" dirty="0">
                         <a:latin typeface="Arial" charset="0"/>
@@ -6142,7 +6142,7 @@
                           <a:ea typeface="Arial" pitchFamily="34" charset="-122"/>
                           <a:cs typeface="Arial" pitchFamily="34" charset="-120"/>
                         </a:rPr>
-                        <a:t>7.71/10</a:t>
+                        <a:t>7.72/10</a:t>
                       </a:r>
                       <a:endParaRPr lang="en-US" sz="800" dirty="0">
                         <a:latin typeface="Arial" charset="0"/>
@@ -6210,7 +6210,7 @@
                           <a:ea typeface="Arial" pitchFamily="34" charset="-122"/>
                           <a:cs typeface="Arial" pitchFamily="34" charset="-120"/>
                         </a:rPr>
-                        <a:t>7.71</a:t>
+                        <a:t>7.72</a:t>
                       </a:r>
                       <a:endParaRPr lang="en-US" sz="800" dirty="0">
                         <a:latin typeface="Arial" charset="0"/>
@@ -6663,7 +6663,7 @@
                 <a:ea typeface="Arial" pitchFamily="34" charset="-122"/>
                 <a:cs typeface="Arial" pitchFamily="34" charset="-120"/>
               </a:rPr>
-              <a:t>123件（84.8%）</a:t>
+              <a:t>124件（84.9%）</a:t>
             </a:r>
             <a:endParaRPr lang="en-US" sz="1600" dirty="0"/>
           </a:p>
@@ -6761,7 +6761,7 @@
                 <a:ea typeface="Arial" pitchFamily="34" charset="-122"/>
                 <a:cs typeface="Arial" pitchFamily="34" charset="-120"/>
               </a:rPr>
-              <a:t>18件（12.4%）</a:t>
+              <a:t>18件（12.3%）</a:t>
             </a:r>
             <a:endParaRPr lang="en-US" sz="1600" dirty="0"/>
           </a:p>
@@ -6859,7 +6859,7 @@
                 <a:ea typeface="Arial" pitchFamily="34" charset="-122"/>
                 <a:cs typeface="Arial" pitchFamily="34" charset="-120"/>
               </a:rPr>
-              <a:t>4件（2.8%）</a:t>
+              <a:t>4件（2.7%）</a:t>
             </a:r>
             <a:endParaRPr lang="en-US" sz="1600" dirty="0"/>
           </a:p>
@@ -7021,7 +7021,7 @@
                 <a:ea typeface="Arial" pitchFamily="34" charset="-122"/>
                 <a:cs typeface="Arial" pitchFamily="34" charset="-120"/>
               </a:rPr>
-              <a:t>高評価レビュー（8-10点: 123件）の分析から、主要な強みテーマを抽出しています。立地・アクセス、客室清潔感、スタッフ対応が高評価の中心的テーマです。</a:t>
+              <a:t>高評価レビュー（8-10点: 124件）の分析から、主要な強みテーマを抽出しています。立地・アクセス、客室清潔感、スタッフ対応が高評価の中心的テーマです。</a:t>
             </a:r>
             <a:endParaRPr lang="en-US" sz="1200" dirty="0"/>
           </a:p>
@@ -8061,7 +8061,7 @@
                 <a:ea typeface="Arial" pitchFamily="34" charset="-122"/>
                 <a:cs typeface="Arial" pitchFamily="34" charset="-120"/>
               </a:rPr>
-              <a:t>全体平均 8.63点 → 目標 9.13点</a:t>
+              <a:t>全体平均 8.61点 → 目標 9.11点</a:t>
             </a:r>
             <a:endParaRPr lang="en-US" sz="1200" dirty="0"/>
           </a:p>
@@ -8078,7 +8078,7 @@
                 <a:ea typeface="Arial" pitchFamily="34" charset="-122"/>
                 <a:cs typeface="Arial" pitchFamily="34" charset="-120"/>
               </a:rPr>
-              <a:t>高評価率 84.8% → 目標 89.8%</a:t>
+              <a:t>高評価率 84.9% → 目標 89.9%</a:t>
             </a:r>
             <a:endParaRPr lang="en-US" sz="1200" dirty="0"/>
           </a:p>
@@ -8095,7 +8095,7 @@
                 <a:ea typeface="Arial" pitchFamily="34" charset="-122"/>
                 <a:cs typeface="Arial" pitchFamily="34" charset="-120"/>
               </a:rPr>
-              <a:t>低評価率 2.8% → 目標 0.8%</a:t>
+              <a:t>低評価率 2.7% → 目標 0.7%</a:t>
             </a:r>
             <a:endParaRPr lang="en-US" sz="1200" dirty="0"/>
           </a:p>

--- a/納品レポート/ホテル別レポート/richmond_mejiro_口コミ分析レポート.pptx
+++ b/納品レポート/ホテル別レポート/richmond_mejiro_口コミ分析レポート.pptx
@@ -316,7 +316,7 @@
                 <c:formatCode>General</c:formatCode>
                 <c:ptCount val="9"/>
                 <c:pt idx="0">
-                  <c:v>64</c:v>
+                  <c:v>65</c:v>
                 </c:pt>
                 <c:pt idx="1">
                   <c:v>15</c:v>
@@ -328,7 +328,7 @@
                   <c:v>7</c:v>
                 </c:pt>
                 <c:pt idx="4">
-                  <c:v>7</c:v>
+                  <c:v>5</c:v>
                 </c:pt>
                 <c:pt idx="5">
                   <c:v>4</c:v>
@@ -340,7 +340,7 @@
                   <c:v>1</c:v>
                 </c:pt>
                 <c:pt idx="8">
-                  <c:v>2</c:v>
+                  <c:v>3</c:v>
                 </c:pt>
               </c:numCache>
             </c:numRef>
@@ -630,10 +630,10 @@
                     <c:v>じゃらん</c:v>
                   </c:pt>
                   <c:pt idx="3">
-                    <c:v>楽天トラベル</c:v>
+                    <c:v>Google</c:v>
                   </c:pt>
                   <c:pt idx="4">
-                    <c:v>Google</c:v>
+                    <c:v>楽天トラベル</c:v>
                   </c:pt>
                   <c:pt idx="5">
                     <c:v>Booking.com</c:v>
@@ -649,22 +649,22 @@
                 <c:formatCode>General</c:formatCode>
                 <c:ptCount val="6"/>
                 <c:pt idx="0">
-                  <c:v>9.49</c:v>
+                  <c:v>9.45</c:v>
                 </c:pt>
                 <c:pt idx="1">
                   <c:v>9.33</c:v>
                 </c:pt>
                 <c:pt idx="2">
-                  <c:v>8.93</c:v>
+                  <c:v>8.64</c:v>
                 </c:pt>
                 <c:pt idx="3">
+                  <c:v>8.5</c:v>
+                </c:pt>
+                <c:pt idx="4">
                   <c:v>8.32</c:v>
                 </c:pt>
-                <c:pt idx="4">
-                  <c:v>8.14</c:v>
-                </c:pt>
                 <c:pt idx="5">
-                  <c:v>7.72</c:v>
+                  <c:v>7.74</c:v>
                 </c:pt>
               </c:numCache>
             </c:numRef>
@@ -2834,7 +2834,7 @@
                 <a:ea typeface="Arial" pitchFamily="34" charset="-122"/>
                 <a:cs typeface="Arial" pitchFamily="34" charset="-120"/>
               </a:rPr>
-              <a:t>リッチモンドホテル東京目白は全体平均8.61点（10pt換算）、高評価率84.9%を達成しています。本レポートで示した改善施策を段階的に実施することで、さらなる顧客満足度向上が期待できます。</a:t>
+              <a:t>リッチモンドホテル東京目白は全体平均8.61点（10pt換算）、高評価率85.6%を達成しています。本レポートで示した改善施策を段階的に実施することで、さらなる顧客満足度向上が期待できます。</a:t>
             </a:r>
             <a:endParaRPr lang="en-US" sz="1200" dirty="0"/>
           </a:p>
@@ -3389,7 +3389,7 @@
                 <a:ea typeface="Arial" pitchFamily="34" charset="-122"/>
                 <a:cs typeface="Arial" pitchFamily="34" charset="-120"/>
               </a:rPr>
-              <a:t>84.9%</a:t>
+              <a:t>85.6%</a:t>
             </a:r>
             <a:endParaRPr lang="en-US" sz="2800" dirty="0"/>
           </a:p>
@@ -3507,7 +3507,7 @@
                 <a:ea typeface="Arial" pitchFamily="34" charset="-122"/>
                 <a:cs typeface="Arial" pitchFamily="34" charset="-120"/>
               </a:rPr>
-              <a:t>2.7%</a:t>
+              <a:t>3.4%</a:t>
             </a:r>
             <a:endParaRPr lang="en-US" sz="2800" dirty="0"/>
           </a:p>
@@ -4364,7 +4364,7 @@
                           <a:ea typeface="Arial" pitchFamily="34" charset="-122"/>
                           <a:cs typeface="Arial" pitchFamily="34" charset="-120"/>
                         </a:rPr>
-                        <a:t>37</a:t>
+                        <a:t>40</a:t>
                       </a:r>
                       <a:endParaRPr lang="en-US" sz="800" dirty="0">
                         <a:latin typeface="Arial" charset="0"/>
@@ -4432,7 +4432,7 @@
                           <a:ea typeface="Arial" pitchFamily="34" charset="-122"/>
                           <a:cs typeface="Arial" pitchFamily="34" charset="-120"/>
                         </a:rPr>
-                        <a:t>9.49/10</a:t>
+                        <a:t>9.45/10</a:t>
                       </a:r>
                       <a:endParaRPr lang="en-US" sz="800" dirty="0">
                         <a:latin typeface="Arial" charset="0"/>
@@ -4500,7 +4500,7 @@
                           <a:ea typeface="Arial" pitchFamily="34" charset="-122"/>
                           <a:cs typeface="Arial" pitchFamily="34" charset="-120"/>
                         </a:rPr>
-                        <a:t>9.49</a:t>
+                        <a:t>9.45</a:t>
                       </a:r>
                       <a:endParaRPr lang="en-US" sz="800" dirty="0">
                         <a:latin typeface="Arial" charset="0"/>
@@ -5116,7 +5116,7 @@
                           <a:ea typeface="Arial" pitchFamily="34" charset="-122"/>
                           <a:cs typeface="Arial" pitchFamily="34" charset="-120"/>
                         </a:rPr>
-                        <a:t>4.46/5</a:t>
+                        <a:t>4.32/5</a:t>
                       </a:r>
                       <a:endParaRPr lang="en-US" sz="800" dirty="0">
                         <a:latin typeface="Arial" charset="0"/>
@@ -5184,7 +5184,349 @@
                           <a:ea typeface="Arial" pitchFamily="34" charset="-122"/>
                           <a:cs typeface="Arial" pitchFamily="34" charset="-120"/>
                         </a:rPr>
-                        <a:t>8.93</a:t>
+                        <a:t>8.64</a:t>
+                      </a:r>
+                      <a:endParaRPr lang="en-US" sz="800" dirty="0">
+                        <a:latin typeface="Arial" charset="0"/>
+                        <a:ea typeface="Arial" charset="0"/>
+                        <a:cs typeface="Arial" charset="0"/>
+                      </a:endParaRPr>
+                    </a:p>
+                  </a:txBody>
+                  <a:tcPr marL="91440" marR="91440" marT="45720" marB="45720">
+                    <a:lnL w="6350" cap="flat" cmpd="sng" algn="ctr">
+                      <a:solidFill>
+                        <a:srgbClr val="CCCCCC"/>
+                      </a:solidFill>
+                      <a:prstDash val="solid"/>
+                      <a:round/>
+                      <a:headEnd type="none" w="med" len="med"/>
+                      <a:tailEnd type="none" w="med" len="med"/>
+                    </a:lnL>
+                    <a:lnR w="6350" cap="flat" cmpd="sng" algn="ctr">
+                      <a:solidFill>
+                        <a:srgbClr val="CCCCCC"/>
+                      </a:solidFill>
+                      <a:prstDash val="solid"/>
+                      <a:round/>
+                      <a:headEnd type="none" w="med" len="med"/>
+                      <a:tailEnd type="none" w="med" len="med"/>
+                    </a:lnR>
+                    <a:lnT w="6350" cap="flat" cmpd="sng" algn="ctr">
+                      <a:solidFill>
+                        <a:srgbClr val="CCCCCC"/>
+                      </a:solidFill>
+                      <a:prstDash val="solid"/>
+                      <a:round/>
+                      <a:headEnd type="none" w="med" len="med"/>
+                      <a:tailEnd type="none" w="med" len="med"/>
+                    </a:lnT>
+                    <a:lnB w="6350" cap="flat" cmpd="sng" algn="ctr">
+                      <a:solidFill>
+                        <a:srgbClr val="CCCCCC"/>
+                      </a:solidFill>
+                      <a:prstDash val="solid"/>
+                      <a:round/>
+                      <a:headEnd type="none" w="med" len="med"/>
+                      <a:tailEnd type="none" w="med" len="med"/>
+                    </a:lnB>
+                    <a:solidFill>
+                      <a:srgbClr val="FFFFFF"/>
+                    </a:solidFill>
+                  </a:tcPr>
+                </a:tc>
+                <a:tc>
+                  <a:txBody>
+                    <a:bodyPr/>
+                    <a:lstStyle/>
+                    <a:p>
+                      <a:pPr algn="ctr" indent="0" marL="0">
+                        <a:buNone/>
+                      </a:pPr>
+                      <a:r>
+                        <a:rPr lang="en-US" sz="800" dirty="0">
+                          <a:solidFill>
+                            <a:srgbClr val="000000"/>
+                          </a:solidFill>
+                          <a:latin typeface="Arial" pitchFamily="34" charset="0"/>
+                          <a:ea typeface="Arial" pitchFamily="34" charset="-122"/>
+                          <a:cs typeface="Arial" pitchFamily="34" charset="-120"/>
+                        </a:rPr>
+                        <a:t>良好</a:t>
+                      </a:r>
+                      <a:endParaRPr lang="en-US" sz="800" dirty="0">
+                        <a:latin typeface="Arial" charset="0"/>
+                        <a:ea typeface="Arial" charset="0"/>
+                        <a:cs typeface="Arial" charset="0"/>
+                      </a:endParaRPr>
+                    </a:p>
+                  </a:txBody>
+                  <a:tcPr marL="91440" marR="91440" marT="45720" marB="45720">
+                    <a:lnL w="6350" cap="flat" cmpd="sng" algn="ctr">
+                      <a:solidFill>
+                        <a:srgbClr val="CCCCCC"/>
+                      </a:solidFill>
+                      <a:prstDash val="solid"/>
+                      <a:round/>
+                      <a:headEnd type="none" w="med" len="med"/>
+                      <a:tailEnd type="none" w="med" len="med"/>
+                    </a:lnL>
+                    <a:lnR w="6350" cap="flat" cmpd="sng" algn="ctr">
+                      <a:solidFill>
+                        <a:srgbClr val="CCCCCC"/>
+                      </a:solidFill>
+                      <a:prstDash val="solid"/>
+                      <a:round/>
+                      <a:headEnd type="none" w="med" len="med"/>
+                      <a:tailEnd type="none" w="med" len="med"/>
+                    </a:lnR>
+                    <a:lnT w="6350" cap="flat" cmpd="sng" algn="ctr">
+                      <a:solidFill>
+                        <a:srgbClr val="CCCCCC"/>
+                      </a:solidFill>
+                      <a:prstDash val="solid"/>
+                      <a:round/>
+                      <a:headEnd type="none" w="med" len="med"/>
+                      <a:tailEnd type="none" w="med" len="med"/>
+                    </a:lnT>
+                    <a:lnB w="6350" cap="flat" cmpd="sng" algn="ctr">
+                      <a:solidFill>
+                        <a:srgbClr val="CCCCCC"/>
+                      </a:solidFill>
+                      <a:prstDash val="solid"/>
+                      <a:round/>
+                      <a:headEnd type="none" w="med" len="med"/>
+                      <a:tailEnd type="none" w="med" len="med"/>
+                    </a:lnB>
+                    <a:solidFill>
+                      <a:srgbClr val="FFFFFF"/>
+                    </a:solidFill>
+                  </a:tcPr>
+                </a:tc>
+              </a:tr>
+              <a:tr h="0">
+                <a:tc>
+                  <a:txBody>
+                    <a:bodyPr/>
+                    <a:lstStyle/>
+                    <a:p>
+                      <a:pPr algn="ctr" indent="0" marL="0">
+                        <a:buNone/>
+                      </a:pPr>
+                      <a:r>
+                        <a:rPr lang="en-US" sz="800" dirty="0">
+                          <a:solidFill>
+                            <a:srgbClr val="000000"/>
+                          </a:solidFill>
+                          <a:latin typeface="Arial" pitchFamily="34" charset="0"/>
+                          <a:ea typeface="Arial" pitchFamily="34" charset="-122"/>
+                          <a:cs typeface="Arial" pitchFamily="34" charset="-120"/>
+                        </a:rPr>
+                        <a:t>Google</a:t>
+                      </a:r>
+                      <a:endParaRPr lang="en-US" sz="800" dirty="0">
+                        <a:latin typeface="Arial" charset="0"/>
+                        <a:ea typeface="Arial" charset="0"/>
+                        <a:cs typeface="Arial" charset="0"/>
+                      </a:endParaRPr>
+                    </a:p>
+                  </a:txBody>
+                  <a:tcPr marL="91440" marR="91440" marT="45720" marB="45720">
+                    <a:lnL w="6350" cap="flat" cmpd="sng" algn="ctr">
+                      <a:solidFill>
+                        <a:srgbClr val="CCCCCC"/>
+                      </a:solidFill>
+                      <a:prstDash val="solid"/>
+                      <a:round/>
+                      <a:headEnd type="none" w="med" len="med"/>
+                      <a:tailEnd type="none" w="med" len="med"/>
+                    </a:lnL>
+                    <a:lnR w="6350" cap="flat" cmpd="sng" algn="ctr">
+                      <a:solidFill>
+                        <a:srgbClr val="CCCCCC"/>
+                      </a:solidFill>
+                      <a:prstDash val="solid"/>
+                      <a:round/>
+                      <a:headEnd type="none" w="med" len="med"/>
+                      <a:tailEnd type="none" w="med" len="med"/>
+                    </a:lnR>
+                    <a:lnT w="6350" cap="flat" cmpd="sng" algn="ctr">
+                      <a:solidFill>
+                        <a:srgbClr val="CCCCCC"/>
+                      </a:solidFill>
+                      <a:prstDash val="solid"/>
+                      <a:round/>
+                      <a:headEnd type="none" w="med" len="med"/>
+                      <a:tailEnd type="none" w="med" len="med"/>
+                    </a:lnT>
+                    <a:lnB w="6350" cap="flat" cmpd="sng" algn="ctr">
+                      <a:solidFill>
+                        <a:srgbClr val="CCCCCC"/>
+                      </a:solidFill>
+                      <a:prstDash val="solid"/>
+                      <a:round/>
+                      <a:headEnd type="none" w="med" len="med"/>
+                      <a:tailEnd type="none" w="med" len="med"/>
+                    </a:lnB>
+                    <a:solidFill>
+                      <a:srgbClr val="FFFFFF"/>
+                    </a:solidFill>
+                  </a:tcPr>
+                </a:tc>
+                <a:tc>
+                  <a:txBody>
+                    <a:bodyPr/>
+                    <a:lstStyle/>
+                    <a:p>
+                      <a:pPr algn="ctr" indent="0" marL="0">
+                        <a:buNone/>
+                      </a:pPr>
+                      <a:r>
+                        <a:rPr lang="en-US" sz="800" dirty="0">
+                          <a:solidFill>
+                            <a:srgbClr val="000000"/>
+                          </a:solidFill>
+                          <a:latin typeface="Arial" pitchFamily="34" charset="0"/>
+                          <a:ea typeface="Arial" pitchFamily="34" charset="-122"/>
+                          <a:cs typeface="Arial" pitchFamily="34" charset="-120"/>
+                        </a:rPr>
+                        <a:t>12</a:t>
+                      </a:r>
+                      <a:endParaRPr lang="en-US" sz="800" dirty="0">
+                        <a:latin typeface="Arial" charset="0"/>
+                        <a:ea typeface="Arial" charset="0"/>
+                        <a:cs typeface="Arial" charset="0"/>
+                      </a:endParaRPr>
+                    </a:p>
+                  </a:txBody>
+                  <a:tcPr marL="91440" marR="91440" marT="45720" marB="45720">
+                    <a:lnL w="6350" cap="flat" cmpd="sng" algn="ctr">
+                      <a:solidFill>
+                        <a:srgbClr val="CCCCCC"/>
+                      </a:solidFill>
+                      <a:prstDash val="solid"/>
+                      <a:round/>
+                      <a:headEnd type="none" w="med" len="med"/>
+                      <a:tailEnd type="none" w="med" len="med"/>
+                    </a:lnL>
+                    <a:lnR w="6350" cap="flat" cmpd="sng" algn="ctr">
+                      <a:solidFill>
+                        <a:srgbClr val="CCCCCC"/>
+                      </a:solidFill>
+                      <a:prstDash val="solid"/>
+                      <a:round/>
+                      <a:headEnd type="none" w="med" len="med"/>
+                      <a:tailEnd type="none" w="med" len="med"/>
+                    </a:lnR>
+                    <a:lnT w="6350" cap="flat" cmpd="sng" algn="ctr">
+                      <a:solidFill>
+                        <a:srgbClr val="CCCCCC"/>
+                      </a:solidFill>
+                      <a:prstDash val="solid"/>
+                      <a:round/>
+                      <a:headEnd type="none" w="med" len="med"/>
+                      <a:tailEnd type="none" w="med" len="med"/>
+                    </a:lnT>
+                    <a:lnB w="6350" cap="flat" cmpd="sng" algn="ctr">
+                      <a:solidFill>
+                        <a:srgbClr val="CCCCCC"/>
+                      </a:solidFill>
+                      <a:prstDash val="solid"/>
+                      <a:round/>
+                      <a:headEnd type="none" w="med" len="med"/>
+                      <a:tailEnd type="none" w="med" len="med"/>
+                    </a:lnB>
+                    <a:solidFill>
+                      <a:srgbClr val="FFFFFF"/>
+                    </a:solidFill>
+                  </a:tcPr>
+                </a:tc>
+                <a:tc>
+                  <a:txBody>
+                    <a:bodyPr/>
+                    <a:lstStyle/>
+                    <a:p>
+                      <a:pPr algn="ctr" indent="0" marL="0">
+                        <a:buNone/>
+                      </a:pPr>
+                      <a:r>
+                        <a:rPr lang="en-US" sz="800" dirty="0">
+                          <a:solidFill>
+                            <a:srgbClr val="000000"/>
+                          </a:solidFill>
+                          <a:latin typeface="Arial" pitchFamily="34" charset="0"/>
+                          <a:ea typeface="Arial" pitchFamily="34" charset="-122"/>
+                          <a:cs typeface="Arial" pitchFamily="34" charset="-120"/>
+                        </a:rPr>
+                        <a:t>4.25/5</a:t>
+                      </a:r>
+                      <a:endParaRPr lang="en-US" sz="800" dirty="0">
+                        <a:latin typeface="Arial" charset="0"/>
+                        <a:ea typeface="Arial" charset="0"/>
+                        <a:cs typeface="Arial" charset="0"/>
+                      </a:endParaRPr>
+                    </a:p>
+                  </a:txBody>
+                  <a:tcPr marL="91440" marR="91440" marT="45720" marB="45720">
+                    <a:lnL w="6350" cap="flat" cmpd="sng" algn="ctr">
+                      <a:solidFill>
+                        <a:srgbClr val="CCCCCC"/>
+                      </a:solidFill>
+                      <a:prstDash val="solid"/>
+                      <a:round/>
+                      <a:headEnd type="none" w="med" len="med"/>
+                      <a:tailEnd type="none" w="med" len="med"/>
+                    </a:lnL>
+                    <a:lnR w="6350" cap="flat" cmpd="sng" algn="ctr">
+                      <a:solidFill>
+                        <a:srgbClr val="CCCCCC"/>
+                      </a:solidFill>
+                      <a:prstDash val="solid"/>
+                      <a:round/>
+                      <a:headEnd type="none" w="med" len="med"/>
+                      <a:tailEnd type="none" w="med" len="med"/>
+                    </a:lnR>
+                    <a:lnT w="6350" cap="flat" cmpd="sng" algn="ctr">
+                      <a:solidFill>
+                        <a:srgbClr val="CCCCCC"/>
+                      </a:solidFill>
+                      <a:prstDash val="solid"/>
+                      <a:round/>
+                      <a:headEnd type="none" w="med" len="med"/>
+                      <a:tailEnd type="none" w="med" len="med"/>
+                    </a:lnT>
+                    <a:lnB w="6350" cap="flat" cmpd="sng" algn="ctr">
+                      <a:solidFill>
+                        <a:srgbClr val="CCCCCC"/>
+                      </a:solidFill>
+                      <a:prstDash val="solid"/>
+                      <a:round/>
+                      <a:headEnd type="none" w="med" len="med"/>
+                      <a:tailEnd type="none" w="med" len="med"/>
+                    </a:lnB>
+                    <a:solidFill>
+                      <a:srgbClr val="FFFFFF"/>
+                    </a:solidFill>
+                  </a:tcPr>
+                </a:tc>
+                <a:tc>
+                  <a:txBody>
+                    <a:bodyPr/>
+                    <a:lstStyle/>
+                    <a:p>
+                      <a:pPr algn="ctr" indent="0" marL="0">
+                        <a:buNone/>
+                      </a:pPr>
+                      <a:r>
+                        <a:rPr lang="en-US" sz="800" dirty="0">
+                          <a:solidFill>
+                            <a:srgbClr val="000000"/>
+                          </a:solidFill>
+                          <a:latin typeface="Arial" pitchFamily="34" charset="0"/>
+                          <a:ea typeface="Arial" pitchFamily="34" charset="-122"/>
+                          <a:cs typeface="Arial" pitchFamily="34" charset="-120"/>
+                        </a:rPr>
+                        <a:t>8.50</a:t>
                       </a:r>
                       <a:endParaRPr lang="en-US" sz="800" dirty="0">
                         <a:latin typeface="Arial" charset="0"/>
@@ -5664,7 +6006,7 @@
                           <a:ea typeface="Arial" pitchFamily="34" charset="-122"/>
                           <a:cs typeface="Arial" pitchFamily="34" charset="-120"/>
                         </a:rPr>
-                        <a:t>Google</a:t>
+                        <a:t>Booking.com</a:t>
                       </a:r>
                       <a:endParaRPr lang="en-US" sz="800" dirty="0">
                         <a:latin typeface="Arial" charset="0"/>
@@ -5732,7 +6074,7 @@
                           <a:ea typeface="Arial" pitchFamily="34" charset="-122"/>
                           <a:cs typeface="Arial" pitchFamily="34" charset="-120"/>
                         </a:rPr>
-                        <a:t>14</a:t>
+                        <a:t>35</a:t>
                       </a:r>
                       <a:endParaRPr lang="en-US" sz="800" dirty="0">
                         <a:latin typeface="Arial" charset="0"/>
@@ -5800,7 +6142,7 @@
                           <a:ea typeface="Arial" pitchFamily="34" charset="-122"/>
                           <a:cs typeface="Arial" pitchFamily="34" charset="-120"/>
                         </a:rPr>
-                        <a:t>4.07/5</a:t>
+                        <a:t>7.74/10</a:t>
                       </a:r>
                       <a:endParaRPr lang="en-US" sz="800" dirty="0">
                         <a:latin typeface="Arial" charset="0"/>
@@ -5868,349 +6210,7 @@
                           <a:ea typeface="Arial" pitchFamily="34" charset="-122"/>
                           <a:cs typeface="Arial" pitchFamily="34" charset="-120"/>
                         </a:rPr>
-                        <a:t>8.14</a:t>
-                      </a:r>
-                      <a:endParaRPr lang="en-US" sz="800" dirty="0">
-                        <a:latin typeface="Arial" charset="0"/>
-                        <a:ea typeface="Arial" charset="0"/>
-                        <a:cs typeface="Arial" charset="0"/>
-                      </a:endParaRPr>
-                    </a:p>
-                  </a:txBody>
-                  <a:tcPr marL="91440" marR="91440" marT="45720" marB="45720">
-                    <a:lnL w="6350" cap="flat" cmpd="sng" algn="ctr">
-                      <a:solidFill>
-                        <a:srgbClr val="CCCCCC"/>
-                      </a:solidFill>
-                      <a:prstDash val="solid"/>
-                      <a:round/>
-                      <a:headEnd type="none" w="med" len="med"/>
-                      <a:tailEnd type="none" w="med" len="med"/>
-                    </a:lnL>
-                    <a:lnR w="6350" cap="flat" cmpd="sng" algn="ctr">
-                      <a:solidFill>
-                        <a:srgbClr val="CCCCCC"/>
-                      </a:solidFill>
-                      <a:prstDash val="solid"/>
-                      <a:round/>
-                      <a:headEnd type="none" w="med" len="med"/>
-                      <a:tailEnd type="none" w="med" len="med"/>
-                    </a:lnR>
-                    <a:lnT w="6350" cap="flat" cmpd="sng" algn="ctr">
-                      <a:solidFill>
-                        <a:srgbClr val="CCCCCC"/>
-                      </a:solidFill>
-                      <a:prstDash val="solid"/>
-                      <a:round/>
-                      <a:headEnd type="none" w="med" len="med"/>
-                      <a:tailEnd type="none" w="med" len="med"/>
-                    </a:lnT>
-                    <a:lnB w="6350" cap="flat" cmpd="sng" algn="ctr">
-                      <a:solidFill>
-                        <a:srgbClr val="CCCCCC"/>
-                      </a:solidFill>
-                      <a:prstDash val="solid"/>
-                      <a:round/>
-                      <a:headEnd type="none" w="med" len="med"/>
-                      <a:tailEnd type="none" w="med" len="med"/>
-                    </a:lnB>
-                    <a:solidFill>
-                      <a:srgbClr val="FFFFFF"/>
-                    </a:solidFill>
-                  </a:tcPr>
-                </a:tc>
-                <a:tc>
-                  <a:txBody>
-                    <a:bodyPr/>
-                    <a:lstStyle/>
-                    <a:p>
-                      <a:pPr algn="ctr" indent="0" marL="0">
-                        <a:buNone/>
-                      </a:pPr>
-                      <a:r>
-                        <a:rPr lang="en-US" sz="800" dirty="0">
-                          <a:solidFill>
-                            <a:srgbClr val="000000"/>
-                          </a:solidFill>
-                          <a:latin typeface="Arial" pitchFamily="34" charset="0"/>
-                          <a:ea typeface="Arial" pitchFamily="34" charset="-122"/>
-                          <a:cs typeface="Arial" pitchFamily="34" charset="-120"/>
-                        </a:rPr>
-                        <a:t>良好</a:t>
-                      </a:r>
-                      <a:endParaRPr lang="en-US" sz="800" dirty="0">
-                        <a:latin typeface="Arial" charset="0"/>
-                        <a:ea typeface="Arial" charset="0"/>
-                        <a:cs typeface="Arial" charset="0"/>
-                      </a:endParaRPr>
-                    </a:p>
-                  </a:txBody>
-                  <a:tcPr marL="91440" marR="91440" marT="45720" marB="45720">
-                    <a:lnL w="6350" cap="flat" cmpd="sng" algn="ctr">
-                      <a:solidFill>
-                        <a:srgbClr val="CCCCCC"/>
-                      </a:solidFill>
-                      <a:prstDash val="solid"/>
-                      <a:round/>
-                      <a:headEnd type="none" w="med" len="med"/>
-                      <a:tailEnd type="none" w="med" len="med"/>
-                    </a:lnL>
-                    <a:lnR w="6350" cap="flat" cmpd="sng" algn="ctr">
-                      <a:solidFill>
-                        <a:srgbClr val="CCCCCC"/>
-                      </a:solidFill>
-                      <a:prstDash val="solid"/>
-                      <a:round/>
-                      <a:headEnd type="none" w="med" len="med"/>
-                      <a:tailEnd type="none" w="med" len="med"/>
-                    </a:lnR>
-                    <a:lnT w="6350" cap="flat" cmpd="sng" algn="ctr">
-                      <a:solidFill>
-                        <a:srgbClr val="CCCCCC"/>
-                      </a:solidFill>
-                      <a:prstDash val="solid"/>
-                      <a:round/>
-                      <a:headEnd type="none" w="med" len="med"/>
-                      <a:tailEnd type="none" w="med" len="med"/>
-                    </a:lnT>
-                    <a:lnB w="6350" cap="flat" cmpd="sng" algn="ctr">
-                      <a:solidFill>
-                        <a:srgbClr val="CCCCCC"/>
-                      </a:solidFill>
-                      <a:prstDash val="solid"/>
-                      <a:round/>
-                      <a:headEnd type="none" w="med" len="med"/>
-                      <a:tailEnd type="none" w="med" len="med"/>
-                    </a:lnB>
-                    <a:solidFill>
-                      <a:srgbClr val="FFFFFF"/>
-                    </a:solidFill>
-                  </a:tcPr>
-                </a:tc>
-              </a:tr>
-              <a:tr h="0">
-                <a:tc>
-                  <a:txBody>
-                    <a:bodyPr/>
-                    <a:lstStyle/>
-                    <a:p>
-                      <a:pPr algn="ctr" indent="0" marL="0">
-                        <a:buNone/>
-                      </a:pPr>
-                      <a:r>
-                        <a:rPr lang="en-US" sz="800" dirty="0">
-                          <a:solidFill>
-                            <a:srgbClr val="000000"/>
-                          </a:solidFill>
-                          <a:latin typeface="Arial" pitchFamily="34" charset="0"/>
-                          <a:ea typeface="Arial" pitchFamily="34" charset="-122"/>
-                          <a:cs typeface="Arial" pitchFamily="34" charset="-120"/>
-                        </a:rPr>
-                        <a:t>Booking.com</a:t>
-                      </a:r>
-                      <a:endParaRPr lang="en-US" sz="800" dirty="0">
-                        <a:latin typeface="Arial" charset="0"/>
-                        <a:ea typeface="Arial" charset="0"/>
-                        <a:cs typeface="Arial" charset="0"/>
-                      </a:endParaRPr>
-                    </a:p>
-                  </a:txBody>
-                  <a:tcPr marL="91440" marR="91440" marT="45720" marB="45720">
-                    <a:lnL w="6350" cap="flat" cmpd="sng" algn="ctr">
-                      <a:solidFill>
-                        <a:srgbClr val="CCCCCC"/>
-                      </a:solidFill>
-                      <a:prstDash val="solid"/>
-                      <a:round/>
-                      <a:headEnd type="none" w="med" len="med"/>
-                      <a:tailEnd type="none" w="med" len="med"/>
-                    </a:lnL>
-                    <a:lnR w="6350" cap="flat" cmpd="sng" algn="ctr">
-                      <a:solidFill>
-                        <a:srgbClr val="CCCCCC"/>
-                      </a:solidFill>
-                      <a:prstDash val="solid"/>
-                      <a:round/>
-                      <a:headEnd type="none" w="med" len="med"/>
-                      <a:tailEnd type="none" w="med" len="med"/>
-                    </a:lnR>
-                    <a:lnT w="6350" cap="flat" cmpd="sng" algn="ctr">
-                      <a:solidFill>
-                        <a:srgbClr val="CCCCCC"/>
-                      </a:solidFill>
-                      <a:prstDash val="solid"/>
-                      <a:round/>
-                      <a:headEnd type="none" w="med" len="med"/>
-                      <a:tailEnd type="none" w="med" len="med"/>
-                    </a:lnT>
-                    <a:lnB w="6350" cap="flat" cmpd="sng" algn="ctr">
-                      <a:solidFill>
-                        <a:srgbClr val="CCCCCC"/>
-                      </a:solidFill>
-                      <a:prstDash val="solid"/>
-                      <a:round/>
-                      <a:headEnd type="none" w="med" len="med"/>
-                      <a:tailEnd type="none" w="med" len="med"/>
-                    </a:lnB>
-                    <a:solidFill>
-                      <a:srgbClr val="FFFFFF"/>
-                    </a:solidFill>
-                  </a:tcPr>
-                </a:tc>
-                <a:tc>
-                  <a:txBody>
-                    <a:bodyPr/>
-                    <a:lstStyle/>
-                    <a:p>
-                      <a:pPr algn="ctr" indent="0" marL="0">
-                        <a:buNone/>
-                      </a:pPr>
-                      <a:r>
-                        <a:rPr lang="en-US" sz="800" dirty="0">
-                          <a:solidFill>
-                            <a:srgbClr val="000000"/>
-                          </a:solidFill>
-                          <a:latin typeface="Arial" pitchFamily="34" charset="0"/>
-                          <a:ea typeface="Arial" pitchFamily="34" charset="-122"/>
-                          <a:cs typeface="Arial" pitchFamily="34" charset="-120"/>
-                        </a:rPr>
-                        <a:t>36</a:t>
-                      </a:r>
-                      <a:endParaRPr lang="en-US" sz="800" dirty="0">
-                        <a:latin typeface="Arial" charset="0"/>
-                        <a:ea typeface="Arial" charset="0"/>
-                        <a:cs typeface="Arial" charset="0"/>
-                      </a:endParaRPr>
-                    </a:p>
-                  </a:txBody>
-                  <a:tcPr marL="91440" marR="91440" marT="45720" marB="45720">
-                    <a:lnL w="6350" cap="flat" cmpd="sng" algn="ctr">
-                      <a:solidFill>
-                        <a:srgbClr val="CCCCCC"/>
-                      </a:solidFill>
-                      <a:prstDash val="solid"/>
-                      <a:round/>
-                      <a:headEnd type="none" w="med" len="med"/>
-                      <a:tailEnd type="none" w="med" len="med"/>
-                    </a:lnL>
-                    <a:lnR w="6350" cap="flat" cmpd="sng" algn="ctr">
-                      <a:solidFill>
-                        <a:srgbClr val="CCCCCC"/>
-                      </a:solidFill>
-                      <a:prstDash val="solid"/>
-                      <a:round/>
-                      <a:headEnd type="none" w="med" len="med"/>
-                      <a:tailEnd type="none" w="med" len="med"/>
-                    </a:lnR>
-                    <a:lnT w="6350" cap="flat" cmpd="sng" algn="ctr">
-                      <a:solidFill>
-                        <a:srgbClr val="CCCCCC"/>
-                      </a:solidFill>
-                      <a:prstDash val="solid"/>
-                      <a:round/>
-                      <a:headEnd type="none" w="med" len="med"/>
-                      <a:tailEnd type="none" w="med" len="med"/>
-                    </a:lnT>
-                    <a:lnB w="6350" cap="flat" cmpd="sng" algn="ctr">
-                      <a:solidFill>
-                        <a:srgbClr val="CCCCCC"/>
-                      </a:solidFill>
-                      <a:prstDash val="solid"/>
-                      <a:round/>
-                      <a:headEnd type="none" w="med" len="med"/>
-                      <a:tailEnd type="none" w="med" len="med"/>
-                    </a:lnB>
-                    <a:solidFill>
-                      <a:srgbClr val="FFFFFF"/>
-                    </a:solidFill>
-                  </a:tcPr>
-                </a:tc>
-                <a:tc>
-                  <a:txBody>
-                    <a:bodyPr/>
-                    <a:lstStyle/>
-                    <a:p>
-                      <a:pPr algn="ctr" indent="0" marL="0">
-                        <a:buNone/>
-                      </a:pPr>
-                      <a:r>
-                        <a:rPr lang="en-US" sz="800" dirty="0">
-                          <a:solidFill>
-                            <a:srgbClr val="000000"/>
-                          </a:solidFill>
-                          <a:latin typeface="Arial" pitchFamily="34" charset="0"/>
-                          <a:ea typeface="Arial" pitchFamily="34" charset="-122"/>
-                          <a:cs typeface="Arial" pitchFamily="34" charset="-120"/>
-                        </a:rPr>
-                        <a:t>7.72/10</a:t>
-                      </a:r>
-                      <a:endParaRPr lang="en-US" sz="800" dirty="0">
-                        <a:latin typeface="Arial" charset="0"/>
-                        <a:ea typeface="Arial" charset="0"/>
-                        <a:cs typeface="Arial" charset="0"/>
-                      </a:endParaRPr>
-                    </a:p>
-                  </a:txBody>
-                  <a:tcPr marL="91440" marR="91440" marT="45720" marB="45720">
-                    <a:lnL w="6350" cap="flat" cmpd="sng" algn="ctr">
-                      <a:solidFill>
-                        <a:srgbClr val="CCCCCC"/>
-                      </a:solidFill>
-                      <a:prstDash val="solid"/>
-                      <a:round/>
-                      <a:headEnd type="none" w="med" len="med"/>
-                      <a:tailEnd type="none" w="med" len="med"/>
-                    </a:lnL>
-                    <a:lnR w="6350" cap="flat" cmpd="sng" algn="ctr">
-                      <a:solidFill>
-                        <a:srgbClr val="CCCCCC"/>
-                      </a:solidFill>
-                      <a:prstDash val="solid"/>
-                      <a:round/>
-                      <a:headEnd type="none" w="med" len="med"/>
-                      <a:tailEnd type="none" w="med" len="med"/>
-                    </a:lnR>
-                    <a:lnT w="6350" cap="flat" cmpd="sng" algn="ctr">
-                      <a:solidFill>
-                        <a:srgbClr val="CCCCCC"/>
-                      </a:solidFill>
-                      <a:prstDash val="solid"/>
-                      <a:round/>
-                      <a:headEnd type="none" w="med" len="med"/>
-                      <a:tailEnd type="none" w="med" len="med"/>
-                    </a:lnT>
-                    <a:lnB w="6350" cap="flat" cmpd="sng" algn="ctr">
-                      <a:solidFill>
-                        <a:srgbClr val="CCCCCC"/>
-                      </a:solidFill>
-                      <a:prstDash val="solid"/>
-                      <a:round/>
-                      <a:headEnd type="none" w="med" len="med"/>
-                      <a:tailEnd type="none" w="med" len="med"/>
-                    </a:lnB>
-                    <a:solidFill>
-                      <a:srgbClr val="FFFFFF"/>
-                    </a:solidFill>
-                  </a:tcPr>
-                </a:tc>
-                <a:tc>
-                  <a:txBody>
-                    <a:bodyPr/>
-                    <a:lstStyle/>
-                    <a:p>
-                      <a:pPr algn="ctr" indent="0" marL="0">
-                        <a:buNone/>
-                      </a:pPr>
-                      <a:r>
-                        <a:rPr lang="en-US" sz="800" dirty="0">
-                          <a:solidFill>
-                            <a:srgbClr val="000000"/>
-                          </a:solidFill>
-                          <a:latin typeface="Arial" pitchFamily="34" charset="0"/>
-                          <a:ea typeface="Arial" pitchFamily="34" charset="-122"/>
-                          <a:cs typeface="Arial" pitchFamily="34" charset="-120"/>
-                        </a:rPr>
-                        <a:t>7.72</a:t>
+                        <a:t>7.74</a:t>
                       </a:r>
                       <a:endParaRPr lang="en-US" sz="800" dirty="0">
                         <a:latin typeface="Arial" charset="0"/>
@@ -6663,7 +6663,7 @@
                 <a:ea typeface="Arial" pitchFamily="34" charset="-122"/>
                 <a:cs typeface="Arial" pitchFamily="34" charset="-120"/>
               </a:rPr>
-              <a:t>124件（84.9%）</a:t>
+              <a:t>125件（85.6%）</a:t>
             </a:r>
             <a:endParaRPr lang="en-US" sz="1600" dirty="0"/>
           </a:p>
@@ -6761,7 +6761,7 @@
                 <a:ea typeface="Arial" pitchFamily="34" charset="-122"/>
                 <a:cs typeface="Arial" pitchFamily="34" charset="-120"/>
               </a:rPr>
-              <a:t>18件（12.3%）</a:t>
+              <a:t>16件（11.0%）</a:t>
             </a:r>
             <a:endParaRPr lang="en-US" sz="1600" dirty="0"/>
           </a:p>
@@ -6859,7 +6859,7 @@
                 <a:ea typeface="Arial" pitchFamily="34" charset="-122"/>
                 <a:cs typeface="Arial" pitchFamily="34" charset="-120"/>
               </a:rPr>
-              <a:t>4件（2.7%）</a:t>
+              <a:t>5件（3.4%）</a:t>
             </a:r>
             <a:endParaRPr lang="en-US" sz="1600" dirty="0"/>
           </a:p>
@@ -7021,7 +7021,7 @@
                 <a:ea typeface="Arial" pitchFamily="34" charset="-122"/>
                 <a:cs typeface="Arial" pitchFamily="34" charset="-120"/>
               </a:rPr>
-              <a:t>高評価レビュー（8-10点: 124件）の分析から、主要な強みテーマを抽出しています。立地・アクセス、客室清潔感、スタッフ対応が高評価の中心的テーマです。</a:t>
+              <a:t>高評価レビュー（8-10点: 125件）の分析から、主要な強みテーマを抽出しています。立地・アクセス、客室清潔感、スタッフ対応が高評価の中心的テーマです。</a:t>
             </a:r>
             <a:endParaRPr lang="en-US" sz="1200" dirty="0"/>
           </a:p>
@@ -7281,7 +7281,7 @@
                 <a:ea typeface="Arial" pitchFamily="34" charset="-122"/>
                 <a:cs typeface="Arial" pitchFamily="34" charset="-120"/>
               </a:rPr>
-              <a:t>低評価・中評価レビュー（22件）から改善課題を優先度別に整理しています。S/A/B/Cの4段階で優先度を設定し、計画的な改善を推進します。</a:t>
+              <a:t>低評価・中評価レビュー（21件）から改善課題を優先度別に整理しています。S/A/B/Cの4段階で優先度を設定し、計画的な改善を推進します。</a:t>
             </a:r>
             <a:endParaRPr lang="en-US" sz="1200" dirty="0"/>
           </a:p>
@@ -8078,7 +8078,7 @@
                 <a:ea typeface="Arial" pitchFamily="34" charset="-122"/>
                 <a:cs typeface="Arial" pitchFamily="34" charset="-120"/>
               </a:rPr>
-              <a:t>高評価率 84.9% → 目標 89.9%</a:t>
+              <a:t>高評価率 85.6% → 目標 90.6%</a:t>
             </a:r>
             <a:endParaRPr lang="en-US" sz="1200" dirty="0"/>
           </a:p>
@@ -8095,7 +8095,7 @@
                 <a:ea typeface="Arial" pitchFamily="34" charset="-122"/>
                 <a:cs typeface="Arial" pitchFamily="34" charset="-120"/>
               </a:rPr>
-              <a:t>低評価率 2.7% → 目標 0.7%</a:t>
+              <a:t>低評価率 3.4% → 目標 1.4%</a:t>
             </a:r>
             <a:endParaRPr lang="en-US" sz="1200" dirty="0"/>
           </a:p>

--- a/納品レポート/ホテル別レポート/richmond_mejiro_口コミ分析レポート.pptx
+++ b/納品レポート/ホテル別レポート/richmond_mejiro_口コミ分析レポート.pptx
@@ -2818,7 +2818,7 @@
                 <a:ea typeface="Arial" pitchFamily="34" charset="-122"/>
                 <a:cs typeface="Arial" pitchFamily="34" charset="-120"/>
               </a:rPr>
-              <a:t>作成日：2026年4月2日</a:t>
+              <a:t>作成日：2026年4月5日</a:t>
             </a:r>
             <a:endParaRPr lang="en-US" sz="1000" dirty="0"/>
           </a:p>

--- a/納品レポート/ホテル別レポート/richmond_mejiro_口コミ分析レポート.pptx
+++ b/納品レポート/ホテル別レポート/richmond_mejiro_口コミ分析レポート.pptx
@@ -180,22 +180,22 @@
                 <c:ptCount val="6"/>
                 <c:lvl>
                   <c:pt idx="0">
+                    <c:v>Agoda</c:v>
+                  </c:pt>
+                  <c:pt idx="1">
                     <c:v>Trip.com</c:v>
                   </c:pt>
-                  <c:pt idx="1">
-                    <c:v>Agoda</c:v>
-                  </c:pt>
                   <c:pt idx="2">
-                    <c:v>じゃらん</c:v>
+                    <c:v>Google</c:v>
                   </c:pt>
                   <c:pt idx="3">
-                    <c:v>Google</c:v>
+                    <c:v>楽天トラベル</c:v>
                   </c:pt>
                   <c:pt idx="4">
-                    <c:v>楽天トラベル</c:v>
+                    <c:v>Booking.com</c:v>
                   </c:pt>
                   <c:pt idx="5">
-                    <c:v>Booking.com</c:v>
+                    <c:v>じゃらん</c:v>
                   </c:pt>
                 </c:lvl>
               </c:multiLvlStrCache>
@@ -208,22 +208,22 @@
                 <c:formatCode>General</c:formatCode>
                 <c:ptCount val="6"/>
                 <c:pt idx="0">
-                  <c:v>9.45</c:v>
+                  <c:v>10</c:v>
                 </c:pt>
                 <c:pt idx="1">
-                  <c:v>9.33</c:v>
+                  <c:v>9.48</c:v>
                 </c:pt>
                 <c:pt idx="2">
-                  <c:v>8.62</c:v>
+                  <c:v>8.4</c:v>
                 </c:pt>
                 <c:pt idx="3">
-                  <c:v>8.5</c:v>
+                  <c:v>8</c:v>
                 </c:pt>
                 <c:pt idx="4">
-                  <c:v>8.25</c:v>
+                  <c:v>7.86</c:v>
                 </c:pt>
                 <c:pt idx="5">
-                  <c:v>7.74</c:v>
+                  <c:v>7.83</c:v>
                 </c:pt>
               </c:numCache>
             </c:numRef>
@@ -566,13 +566,13 @@
               <c:numCache>
                 <c:ptCount val="3"/>
                 <c:pt idx="0">
-                  <c:v>125</c:v>
+                  <c:v>61</c:v>
                 </c:pt>
                 <c:pt idx="1">
-                  <c:v>16</c:v>
+                  <c:v>9</c:v>
                 </c:pt>
                 <c:pt idx="2">
-                  <c:v>5</c:v>
+                  <c:v>3</c:v>
                 </c:pt>
               </c:numCache>
             </c:numRef>
@@ -768,22 +768,11 @@
               <a:effectLst/>
             </c:spPr>
           </c:dPt>
-          <c:dPt>
-            <c:idx val="8"/>
-            <c:invertIfNegative val="0"/>
-            <c:bubble3D val="0"/>
-            <c:spPr>
-              <a:solidFill>
-                <a:srgbClr val="DC2626"/>
-              </a:solidFill>
-              <a:effectLst/>
-            </c:spPr>
-          </c:dPt>
           <c:cat>
             <c:multiLvlStrRef>
-              <c:f>Sheet1!$A$2:$A$10</c:f>
+              <c:f>Sheet1!$A$2:$A$9</c:f>
               <c:multiLvlStrCache>
-                <c:ptCount val="9"/>
+                <c:ptCount val="8"/>
                 <c:lvl>
                   <c:pt idx="0">
                     <c:v>10点</c:v>
@@ -804,12 +793,9 @@
                     <c:v>5点</c:v>
                   </c:pt>
                   <c:pt idx="6">
-                    <c:v>4点</c:v>
+                    <c:v>3点</c:v>
                   </c:pt>
                   <c:pt idx="7">
-                    <c:v>3点</c:v>
-                  </c:pt>
-                  <c:pt idx="8">
                     <c:v>2点</c:v>
                   </c:pt>
                 </c:lvl>
@@ -818,36 +804,33 @@
           </c:cat>
           <c:val>
             <c:numRef>
-              <c:f>Sheet1!$B$2:$B$10</c:f>
+              <c:f>Sheet1!$B$2:$B$9</c:f>
               <c:numCache>
                 <c:formatCode>General</c:formatCode>
-                <c:ptCount val="9"/>
+                <c:ptCount val="8"/>
                 <c:pt idx="0">
-                  <c:v>64</c:v>
+                  <c:v>30</c:v>
                 </c:pt>
                 <c:pt idx="1">
-                  <c:v>15</c:v>
+                  <c:v>9</c:v>
                 </c:pt>
                 <c:pt idx="2">
-                  <c:v>46</c:v>
+                  <c:v>22</c:v>
                 </c:pt>
                 <c:pt idx="3">
-                  <c:v>7</c:v>
+                  <c:v>4</c:v>
                 </c:pt>
                 <c:pt idx="4">
-                  <c:v>5</c:v>
+                  <c:v>3</c:v>
                 </c:pt>
                 <c:pt idx="5">
-                  <c:v>4</c:v>
+                  <c:v>2</c:v>
                 </c:pt>
                 <c:pt idx="6">
                   <c:v>1</c:v>
                 </c:pt>
                 <c:pt idx="7">
-                  <c:v>1</c:v>
-                </c:pt>
-                <c:pt idx="8">
-                  <c:v>3</c:v>
+                  <c:v>2</c:v>
                 </c:pt>
               </c:numCache>
             </c:numRef>
@@ -2778,7 +2761,7 @@
                 <a:ea typeface="Arial" pitchFamily="34" charset="-122"/>
                 <a:cs typeface="Arial" pitchFamily="34" charset="-120"/>
               </a:rPr>
-              <a:t>分析対象期間：2026年2月〜3月</a:t>
+              <a:t>分析対象期間：2026年3月</a:t>
             </a:r>
             <a:endParaRPr lang="en-US" sz="1000" dirty="0"/>
           </a:p>
@@ -2798,7 +2781,7 @@
                 <a:ea typeface="Arial" pitchFamily="34" charset="-122"/>
                 <a:cs typeface="Arial" pitchFamily="34" charset="-120"/>
               </a:rPr>
-              <a:t>レビュー総数：146件（6サイト）</a:t>
+              <a:t>レビュー総数：73件（6サイト）</a:t>
             </a:r>
             <a:endParaRPr lang="en-US" sz="1000" dirty="0"/>
           </a:p>
@@ -3364,7 +3347,7 @@
                           <a:ea typeface="Arial" pitchFamily="34" charset="-122"/>
                           <a:cs typeface="Arial" pitchFamily="34" charset="-120"/>
                         </a:rPr>
-                        <a:t>8.60点</a:t>
+                        <a:t>8.49点</a:t>
                       </a:r>
                       <a:endParaRPr lang="en-US" sz="1000" dirty="0">
                         <a:latin typeface="Arial" charset="0"/>
@@ -3432,7 +3415,7 @@
                           <a:ea typeface="Arial" pitchFamily="34" charset="-122"/>
                           <a:cs typeface="Arial" pitchFamily="34" charset="-120"/>
                         </a:rPr>
-                        <a:t>8.9点以上</a:t>
+                        <a:t>8.8点以上</a:t>
                       </a:r>
                       <a:endParaRPr lang="en-US" sz="1000" dirty="0">
                         <a:latin typeface="Arial" charset="0"/>
@@ -3638,7 +3621,7 @@
                           <a:ea typeface="Arial" pitchFamily="34" charset="-122"/>
                           <a:cs typeface="Arial" pitchFamily="34" charset="-120"/>
                         </a:rPr>
-                        <a:t>85.6%</a:t>
+                        <a:t>83.6%</a:t>
                       </a:r>
                       <a:endParaRPr lang="en-US" sz="1000" dirty="0">
                         <a:latin typeface="Arial" charset="0"/>
@@ -3706,7 +3689,7 @@
                           <a:ea typeface="Arial" pitchFamily="34" charset="-122"/>
                           <a:cs typeface="Arial" pitchFamily="34" charset="-120"/>
                         </a:rPr>
-                        <a:t>91%以上</a:t>
+                        <a:t>89%以上</a:t>
                       </a:r>
                       <a:endParaRPr lang="en-US" sz="1000" dirty="0">
                         <a:latin typeface="Arial" charset="0"/>
@@ -3912,7 +3895,7 @@
                           <a:ea typeface="Arial" pitchFamily="34" charset="-122"/>
                           <a:cs typeface="Arial" pitchFamily="34" charset="-120"/>
                         </a:rPr>
-                        <a:t>3.4%</a:t>
+                        <a:t>4.1%</a:t>
                       </a:r>
                       <a:endParaRPr lang="en-US" sz="1000" dirty="0">
                         <a:latin typeface="Arial" charset="0"/>
@@ -3980,7 +3963,7 @@
                           <a:ea typeface="Arial" pitchFamily="34" charset="-122"/>
                           <a:cs typeface="Arial" pitchFamily="34" charset="-120"/>
                         </a:rPr>
-                        <a:t>0%以下</a:t>
+                        <a:t>1%以下</a:t>
                       </a:r>
                       <a:endParaRPr lang="en-US" sz="1000" dirty="0">
                         <a:latin typeface="Arial" charset="0"/>
@@ -4118,7 +4101,7 @@
                           <a:ea typeface="Arial" pitchFamily="34" charset="-122"/>
                           <a:cs typeface="Arial" pitchFamily="34" charset="-120"/>
                         </a:rPr>
-                        <a:t>Booking.com平均評価</a:t>
+                        <a:t>じゃらん平均評価</a:t>
                       </a:r>
                       <a:endParaRPr lang="en-US" sz="1000" dirty="0">
                         <a:latin typeface="Arial" charset="0"/>
@@ -4186,7 +4169,7 @@
                           <a:ea typeface="Arial" pitchFamily="34" charset="-122"/>
                           <a:cs typeface="Arial" pitchFamily="34" charset="-120"/>
                         </a:rPr>
-                        <a:t>7.7点</a:t>
+                        <a:t>7.8点</a:t>
                       </a:r>
                       <a:endParaRPr lang="en-US" sz="1000" dirty="0">
                         <a:latin typeface="Arial" charset="0"/>
@@ -4254,7 +4237,7 @@
                           <a:ea typeface="Arial" pitchFamily="34" charset="-122"/>
                           <a:cs typeface="Arial" pitchFamily="34" charset="-120"/>
                         </a:rPr>
-                        <a:t>8.7点以上</a:t>
+                        <a:t>8.8点以上</a:t>
                       </a:r>
                       <a:endParaRPr lang="en-US" sz="1000" dirty="0">
                         <a:latin typeface="Arial" charset="0"/>
@@ -4734,7 +4717,7 @@
                           <a:ea typeface="Arial" pitchFamily="34" charset="-122"/>
                           <a:cs typeface="Arial" pitchFamily="34" charset="-120"/>
                         </a:rPr>
-                        <a:t>約22件/期間</a:t>
+                        <a:t>約16件/期間</a:t>
                       </a:r>
                       <a:endParaRPr lang="en-US" sz="1000" dirty="0">
                         <a:latin typeface="Arial" charset="0"/>
@@ -4802,7 +4785,7 @@
                           <a:ea typeface="Arial" pitchFamily="34" charset="-122"/>
                           <a:cs typeface="Arial" pitchFamily="34" charset="-120"/>
                         </a:rPr>
-                        <a:t>11件以下</a:t>
+                        <a:t>8件以下</a:t>
                       </a:r>
                       <a:endParaRPr lang="en-US" sz="1000" dirty="0">
                         <a:latin typeface="Arial" charset="0"/>
@@ -5373,7 +5356,7 @@
                 <a:ea typeface="Arial" pitchFamily="34" charset="-122"/>
                 <a:cs typeface="Arial" pitchFamily="34" charset="-120"/>
               </a:rPr>
-              <a:t>8.60</a:t>
+              <a:t>8.49</a:t>
             </a:r>
             <a:endParaRPr lang="en-US" sz="3200" dirty="0"/>
           </a:p>
@@ -5498,7 +5481,7 @@
                 <a:ea typeface="Arial" pitchFamily="34" charset="-122"/>
                 <a:cs typeface="Arial" pitchFamily="34" charset="-120"/>
               </a:rPr>
-              <a:t>85.6%</a:t>
+              <a:t>83.6%</a:t>
             </a:r>
             <a:endParaRPr lang="en-US" sz="3200" dirty="0"/>
           </a:p>
@@ -5623,7 +5606,7 @@
                 <a:ea typeface="Arial" pitchFamily="34" charset="-122"/>
                 <a:cs typeface="Arial" pitchFamily="34" charset="-120"/>
               </a:rPr>
-              <a:t>3.4%</a:t>
+              <a:t>4.1%</a:t>
             </a:r>
             <a:endParaRPr lang="en-US" sz="3200" dirty="0"/>
           </a:p>
@@ -5748,7 +5731,7 @@
                 <a:ea typeface="Arial" pitchFamily="34" charset="-122"/>
                 <a:cs typeface="Arial" pitchFamily="34" charset="-120"/>
               </a:rPr>
-              <a:t>146件</a:t>
+              <a:t>73件</a:t>
             </a:r>
             <a:endParaRPr lang="en-US" sz="3200" dirty="0"/>
           </a:p>
@@ -5916,6 +5899,46 @@
                 <a:ea typeface="Arial" pitchFamily="34" charset="-122"/>
                 <a:cs typeface="Arial" pitchFamily="34" charset="-120"/>
               </a:rPr>
+              <a:t>スタッフの対応 </a:t>
+            </a:r>
+            <a:endParaRPr lang="en-US" sz="1100" dirty="0"/>
+          </a:p>
+          <a:p>
+            <a:pPr indent="0" marL="0">
+              <a:spcAft>
+                <a:spcPts val="200"/>
+              </a:spcAft>
+              <a:buNone/>
+            </a:pPr>
+            <a:r>
+              <a:rPr lang="en-US" sz="900" dirty="0">
+                <a:solidFill>
+                  <a:srgbClr val="64748B"/>
+                </a:solidFill>
+                <a:latin typeface="Arial" pitchFamily="34" charset="0"/>
+                <a:ea typeface="Arial" pitchFamily="34" charset="-122"/>
+                <a:cs typeface="Arial" pitchFamily="34" charset="-120"/>
+              </a:rPr>
+              <a:t>  とにかくスタッフに電話したら、とても親切に対応してくれて、対応してくれたのはありがたかったのですが、エアコンの音は...</a:t>
+            </a:r>
+            <a:endParaRPr lang="en-US" sz="1100" dirty="0"/>
+          </a:p>
+          <a:p>
+            <a:pPr indent="0" marL="0">
+              <a:spcAft>
+                <a:spcPts val="200"/>
+              </a:spcAft>
+              <a:buNone/>
+            </a:pPr>
+            <a:r>
+              <a:rPr lang="en-US" sz="1100" b="1" dirty="0">
+                <a:solidFill>
+                  <a:srgbClr val="334155"/>
+                </a:solidFill>
+                <a:latin typeface="Arial" pitchFamily="34" charset="0"/>
+                <a:ea typeface="Arial" pitchFamily="34" charset="-122"/>
+                <a:cs typeface="Arial" pitchFamily="34" charset="-120"/>
+              </a:rPr>
               <a:t>快適さ・設備 </a:t>
             </a:r>
             <a:endParaRPr lang="en-US" sz="1100" dirty="0"/>
@@ -5940,46 +5963,6 @@
             </a:r>
             <a:endParaRPr lang="en-US" sz="1100" dirty="0"/>
           </a:p>
-          <a:p>
-            <a:pPr indent="0" marL="0">
-              <a:spcAft>
-                <a:spcPts val="200"/>
-              </a:spcAft>
-              <a:buNone/>
-            </a:pPr>
-            <a:r>
-              <a:rPr lang="en-US" sz="1100" b="1" dirty="0">
-                <a:solidFill>
-                  <a:srgbClr val="334155"/>
-                </a:solidFill>
-                <a:latin typeface="Arial" pitchFamily="34" charset="0"/>
-                <a:ea typeface="Arial" pitchFamily="34" charset="-122"/>
-                <a:cs typeface="Arial" pitchFamily="34" charset="-120"/>
-              </a:rPr>
-              <a:t>スタッフの対応 </a:t>
-            </a:r>
-            <a:endParaRPr lang="en-US" sz="1100" dirty="0"/>
-          </a:p>
-          <a:p>
-            <a:pPr indent="0" marL="0">
-              <a:spcAft>
-                <a:spcPts val="200"/>
-              </a:spcAft>
-              <a:buNone/>
-            </a:pPr>
-            <a:r>
-              <a:rPr lang="en-US" sz="900" dirty="0">
-                <a:solidFill>
-                  <a:srgbClr val="64748B"/>
-                </a:solidFill>
-                <a:latin typeface="Arial" pitchFamily="34" charset="0"/>
-                <a:ea typeface="Arial" pitchFamily="34" charset="-122"/>
-                <a:cs typeface="Arial" pitchFamily="34" charset="-120"/>
-              </a:rPr>
-              <a:t>  とにかくスタッフに電話したら、とても親切に対応してくれて、対応してくれたのはありがたかったのですが、エアコンの音は...</a:t>
-            </a:r>
-            <a:endParaRPr lang="en-US" sz="1100" dirty="0"/>
-          </a:p>
         </p:txBody>
       </p:sp>
       <p:sp>
@@ -6184,7 +6167,7 @@
                 <a:ea typeface="Arial" pitchFamily="34" charset="-122"/>
                 <a:cs typeface="Arial" pitchFamily="34" charset="-120"/>
               </a:rPr>
-              <a:t>設備の老朽化 </a:t>
+              <a:t>防音性能 </a:t>
             </a:r>
             <a:endParaRPr lang="en-US" sz="1100" dirty="0"/>
           </a:p>
@@ -6204,7 +6187,7 @@
                 <a:ea typeface="Arial" pitchFamily="34" charset="-122"/>
                 <a:cs typeface="Arial" pitchFamily="34" charset="-120"/>
               </a:rPr>
-              <a:t>  部屋はやや年季が入っていますが、きれいに掃除されておりました</a:t>
+              <a:t>  ああ、エアコンの音がうるさくてよく眠れません</a:t>
             </a:r>
             <a:endParaRPr lang="en-US" sz="1100" dirty="0"/>
           </a:p>
@@ -6557,7 +6540,7 @@
                 <a:ea typeface="Arial" pitchFamily="34" charset="-122"/>
                 <a:cs typeface="Arial" pitchFamily="34" charset="-120"/>
               </a:rPr>
-              <a:t>8.60</a:t>
+              <a:t>8.49</a:t>
             </a:r>
             <a:endParaRPr lang="en-US" sz="3200" dirty="0"/>
           </a:p>
@@ -6682,7 +6665,7 @@
                 <a:ea typeface="Arial" pitchFamily="34" charset="-122"/>
                 <a:cs typeface="Arial" pitchFamily="34" charset="-120"/>
               </a:rPr>
-              <a:t>85.6%</a:t>
+              <a:t>83.6%</a:t>
             </a:r>
             <a:endParaRPr lang="en-US" sz="3200" dirty="0"/>
           </a:p>
@@ -6807,7 +6790,7 @@
                 <a:ea typeface="Arial" pitchFamily="34" charset="-122"/>
                 <a:cs typeface="Arial" pitchFamily="34" charset="-120"/>
               </a:rPr>
-              <a:t>3.4%</a:t>
+              <a:t>4.1%</a:t>
             </a:r>
             <a:endParaRPr lang="en-US" sz="3200" dirty="0"/>
           </a:p>
@@ -6932,7 +6915,7 @@
                 <a:ea typeface="Arial" pitchFamily="34" charset="-122"/>
                 <a:cs typeface="Arial" pitchFamily="34" charset="-120"/>
               </a:rPr>
-              <a:t>146件</a:t>
+              <a:t>73件</a:t>
             </a:r>
             <a:endParaRPr lang="en-US" sz="3200" dirty="0"/>
           </a:p>
@@ -7353,7 +7336,7 @@
                 <a:ea typeface="Arial" pitchFamily="34" charset="-122"/>
                 <a:cs typeface="Arial" pitchFamily="34" charset="-120"/>
               </a:rPr>
-              <a:t>Trip.com(9.45)が最高スコア。</a:t>
+              <a:t>Agoda(10.00)が最高スコア。</a:t>
             </a:r>
             <a:endParaRPr lang="en-US" sz="1100" dirty="0"/>
           </a:p>
@@ -7402,7 +7385,7 @@
                 <a:ea typeface="Arial" pitchFamily="34" charset="-122"/>
                 <a:cs typeface="Arial" pitchFamily="34" charset="-120"/>
               </a:rPr>
-              <a:t>Booking.com(7.7)が相対的に低い。口コミ返信の強化が急務</a:t>
+              <a:t>じゃらん(7.8)が相対的に低い。口コミ返信の強化が急務</a:t>
             </a:r>
             <a:endParaRPr lang="en-US" sz="1100" dirty="0"/>
           </a:p>
@@ -7843,7 +7826,7 @@
                           <a:ea typeface="Arial" pitchFamily="34" charset="-122"/>
                           <a:cs typeface="Arial" pitchFamily="34" charset="-120"/>
                         </a:rPr>
-                        <a:t>Trip.com</a:t>
+                        <a:t>Agoda</a:t>
                       </a:r>
                       <a:endParaRPr lang="en-US" sz="900" dirty="0">
                         <a:latin typeface="Arial" charset="0"/>
@@ -7911,7 +7894,7 @@
                           <a:ea typeface="Arial" pitchFamily="34" charset="-122"/>
                           <a:cs typeface="Arial" pitchFamily="34" charset="-120"/>
                         </a:rPr>
-                        <a:t>40</a:t>
+                        <a:t>1</a:t>
                       </a:r>
                       <a:endParaRPr lang="en-US" sz="900" dirty="0">
                         <a:latin typeface="Arial" charset="0"/>
@@ -7979,7 +7962,7 @@
                           <a:ea typeface="Arial" pitchFamily="34" charset="-122"/>
                           <a:cs typeface="Arial" pitchFamily="34" charset="-120"/>
                         </a:rPr>
-                        <a:t>9.45</a:t>
+                        <a:t>10</a:t>
                       </a:r>
                       <a:endParaRPr lang="en-US" sz="900" dirty="0">
                         <a:latin typeface="Arial" charset="0"/>
@@ -8115,7 +8098,7 @@
                           <a:ea typeface="Arial" pitchFamily="34" charset="-122"/>
                           <a:cs typeface="Arial" pitchFamily="34" charset="-120"/>
                         </a:rPr>
-                        <a:t>9.45</a:t>
+                        <a:t>10</a:t>
                       </a:r>
                       <a:endParaRPr lang="en-US" sz="900" dirty="0">
                         <a:latin typeface="Arial" charset="0"/>
@@ -8185,7 +8168,7 @@
                           <a:ea typeface="Arial" pitchFamily="34" charset="-122"/>
                           <a:cs typeface="Arial" pitchFamily="34" charset="-120"/>
                         </a:rPr>
-                        <a:t>Agoda</a:t>
+                        <a:t>Trip.com</a:t>
                       </a:r>
                       <a:endParaRPr lang="en-US" sz="900" dirty="0">
                         <a:latin typeface="Arial" charset="0"/>
@@ -8253,7 +8236,7 @@
                           <a:ea typeface="Arial" pitchFamily="34" charset="-122"/>
                           <a:cs typeface="Arial" pitchFamily="34" charset="-120"/>
                         </a:rPr>
-                        <a:t>6</a:t>
+                        <a:t>25</a:t>
                       </a:r>
                       <a:endParaRPr lang="en-US" sz="900" dirty="0">
                         <a:latin typeface="Arial" charset="0"/>
@@ -8321,7 +8304,7 @@
                           <a:ea typeface="Arial" pitchFamily="34" charset="-122"/>
                           <a:cs typeface="Arial" pitchFamily="34" charset="-120"/>
                         </a:rPr>
-                        <a:t>9.33</a:t>
+                        <a:t>9.48</a:t>
                       </a:r>
                       <a:endParaRPr lang="en-US" sz="900" dirty="0">
                         <a:latin typeface="Arial" charset="0"/>
@@ -8457,7 +8440,7 @@
                           <a:ea typeface="Arial" pitchFamily="34" charset="-122"/>
                           <a:cs typeface="Arial" pitchFamily="34" charset="-120"/>
                         </a:rPr>
-                        <a:t>9.33</a:t>
+                        <a:t>9.48</a:t>
                       </a:r>
                       <a:endParaRPr lang="en-US" sz="900" dirty="0">
                         <a:latin typeface="Arial" charset="0"/>
@@ -8527,7 +8510,7 @@
                           <a:ea typeface="Arial" pitchFamily="34" charset="-122"/>
                           <a:cs typeface="Arial" pitchFamily="34" charset="-120"/>
                         </a:rPr>
-                        <a:t>じゃらん</a:t>
+                        <a:t>Google</a:t>
                       </a:r>
                       <a:endParaRPr lang="en-US" sz="900" dirty="0">
                         <a:latin typeface="Arial" charset="0"/>
@@ -8595,7 +8578,7 @@
                           <a:ea typeface="Arial" pitchFamily="34" charset="-122"/>
                           <a:cs typeface="Arial" pitchFamily="34" charset="-120"/>
                         </a:rPr>
-                        <a:t>29</a:t>
+                        <a:t>5</a:t>
                       </a:r>
                       <a:endParaRPr lang="en-US" sz="900" dirty="0">
                         <a:latin typeface="Arial" charset="0"/>
@@ -8663,7 +8646,7 @@
                           <a:ea typeface="Arial" pitchFamily="34" charset="-122"/>
                           <a:cs typeface="Arial" pitchFamily="34" charset="-120"/>
                         </a:rPr>
-                        <a:t>4.31</a:t>
+                        <a:t>4.2</a:t>
                       </a:r>
                       <a:endParaRPr lang="en-US" sz="900" dirty="0">
                         <a:latin typeface="Arial" charset="0"/>
@@ -8799,7 +8782,7 @@
                           <a:ea typeface="Arial" pitchFamily="34" charset="-122"/>
                           <a:cs typeface="Arial" pitchFamily="34" charset="-120"/>
                         </a:rPr>
-                        <a:t>8.62</a:t>
+                        <a:t>8.4</a:t>
                       </a:r>
                       <a:endParaRPr lang="en-US" sz="900" dirty="0">
                         <a:latin typeface="Arial" charset="0"/>
@@ -8869,7 +8852,691 @@
                           <a:ea typeface="Arial" pitchFamily="34" charset="-122"/>
                           <a:cs typeface="Arial" pitchFamily="34" charset="-120"/>
                         </a:rPr>
-                        <a:t>Google</a:t>
+                        <a:t>楽天トラベル</a:t>
+                      </a:r>
+                      <a:endParaRPr lang="en-US" sz="900" dirty="0">
+                        <a:latin typeface="Arial" charset="0"/>
+                        <a:ea typeface="Arial" charset="0"/>
+                        <a:cs typeface="Arial" charset="0"/>
+                      </a:endParaRPr>
+                    </a:p>
+                  </a:txBody>
+                  <a:tcPr marL="91440" marR="91440" marT="45720" marB="45720">
+                    <a:lnL w="6350" cap="flat" cmpd="sng" algn="ctr">
+                      <a:solidFill>
+                        <a:srgbClr val="CBD5E1"/>
+                      </a:solidFill>
+                      <a:prstDash val="solid"/>
+                      <a:round/>
+                      <a:headEnd type="none" w="med" len="med"/>
+                      <a:tailEnd type="none" w="med" len="med"/>
+                    </a:lnL>
+                    <a:lnR w="6350" cap="flat" cmpd="sng" algn="ctr">
+                      <a:solidFill>
+                        <a:srgbClr val="CBD5E1"/>
+                      </a:solidFill>
+                      <a:prstDash val="solid"/>
+                      <a:round/>
+                      <a:headEnd type="none" w="med" len="med"/>
+                      <a:tailEnd type="none" w="med" len="med"/>
+                    </a:lnR>
+                    <a:lnT w="6350" cap="flat" cmpd="sng" algn="ctr">
+                      <a:solidFill>
+                        <a:srgbClr val="CBD5E1"/>
+                      </a:solidFill>
+                      <a:prstDash val="solid"/>
+                      <a:round/>
+                      <a:headEnd type="none" w="med" len="med"/>
+                      <a:tailEnd type="none" w="med" len="med"/>
+                    </a:lnT>
+                    <a:lnB w="6350" cap="flat" cmpd="sng" algn="ctr">
+                      <a:solidFill>
+                        <a:srgbClr val="CBD5E1"/>
+                      </a:solidFill>
+                      <a:prstDash val="solid"/>
+                      <a:round/>
+                      <a:headEnd type="none" w="med" len="med"/>
+                      <a:tailEnd type="none" w="med" len="med"/>
+                    </a:lnB>
+                    <a:solidFill>
+                      <a:srgbClr val="FFFFFF"/>
+                    </a:solidFill>
+                  </a:tcPr>
+                </a:tc>
+                <a:tc>
+                  <a:txBody>
+                    <a:bodyPr/>
+                    <a:lstStyle/>
+                    <a:p>
+                      <a:pPr algn="ctr" indent="0" marL="0">
+                        <a:buNone/>
+                      </a:pPr>
+                      <a:r>
+                        <a:rPr lang="en-US" sz="900" dirty="0">
+                          <a:solidFill>
+                            <a:srgbClr val="000000"/>
+                          </a:solidFill>
+                          <a:latin typeface="Arial" pitchFamily="34" charset="0"/>
+                          <a:ea typeface="Arial" pitchFamily="34" charset="-122"/>
+                          <a:cs typeface="Arial" pitchFamily="34" charset="-120"/>
+                        </a:rPr>
+                        <a:t>9</a:t>
+                      </a:r>
+                      <a:endParaRPr lang="en-US" sz="900" dirty="0">
+                        <a:latin typeface="Arial" charset="0"/>
+                        <a:ea typeface="Arial" charset="0"/>
+                        <a:cs typeface="Arial" charset="0"/>
+                      </a:endParaRPr>
+                    </a:p>
+                  </a:txBody>
+                  <a:tcPr marL="91440" marR="91440" marT="45720" marB="45720">
+                    <a:lnL w="6350" cap="flat" cmpd="sng" algn="ctr">
+                      <a:solidFill>
+                        <a:srgbClr val="CBD5E1"/>
+                      </a:solidFill>
+                      <a:prstDash val="solid"/>
+                      <a:round/>
+                      <a:headEnd type="none" w="med" len="med"/>
+                      <a:tailEnd type="none" w="med" len="med"/>
+                    </a:lnL>
+                    <a:lnR w="6350" cap="flat" cmpd="sng" algn="ctr">
+                      <a:solidFill>
+                        <a:srgbClr val="CBD5E1"/>
+                      </a:solidFill>
+                      <a:prstDash val="solid"/>
+                      <a:round/>
+                      <a:headEnd type="none" w="med" len="med"/>
+                      <a:tailEnd type="none" w="med" len="med"/>
+                    </a:lnR>
+                    <a:lnT w="6350" cap="flat" cmpd="sng" algn="ctr">
+                      <a:solidFill>
+                        <a:srgbClr val="CBD5E1"/>
+                      </a:solidFill>
+                      <a:prstDash val="solid"/>
+                      <a:round/>
+                      <a:headEnd type="none" w="med" len="med"/>
+                      <a:tailEnd type="none" w="med" len="med"/>
+                    </a:lnT>
+                    <a:lnB w="6350" cap="flat" cmpd="sng" algn="ctr">
+                      <a:solidFill>
+                        <a:srgbClr val="CBD5E1"/>
+                      </a:solidFill>
+                      <a:prstDash val="solid"/>
+                      <a:round/>
+                      <a:headEnd type="none" w="med" len="med"/>
+                      <a:tailEnd type="none" w="med" len="med"/>
+                    </a:lnB>
+                    <a:solidFill>
+                      <a:srgbClr val="FFFFFF"/>
+                    </a:solidFill>
+                  </a:tcPr>
+                </a:tc>
+                <a:tc>
+                  <a:txBody>
+                    <a:bodyPr/>
+                    <a:lstStyle/>
+                    <a:p>
+                      <a:pPr algn="ctr" indent="0" marL="0">
+                        <a:buNone/>
+                      </a:pPr>
+                      <a:r>
+                        <a:rPr lang="en-US" sz="900" dirty="0">
+                          <a:solidFill>
+                            <a:srgbClr val="000000"/>
+                          </a:solidFill>
+                          <a:latin typeface="Arial" pitchFamily="34" charset="0"/>
+                          <a:ea typeface="Arial" pitchFamily="34" charset="-122"/>
+                          <a:cs typeface="Arial" pitchFamily="34" charset="-120"/>
+                        </a:rPr>
+                        <a:t>4</a:t>
+                      </a:r>
+                      <a:endParaRPr lang="en-US" sz="900" dirty="0">
+                        <a:latin typeface="Arial" charset="0"/>
+                        <a:ea typeface="Arial" charset="0"/>
+                        <a:cs typeface="Arial" charset="0"/>
+                      </a:endParaRPr>
+                    </a:p>
+                  </a:txBody>
+                  <a:tcPr marL="91440" marR="91440" marT="45720" marB="45720">
+                    <a:lnL w="6350" cap="flat" cmpd="sng" algn="ctr">
+                      <a:solidFill>
+                        <a:srgbClr val="CBD5E1"/>
+                      </a:solidFill>
+                      <a:prstDash val="solid"/>
+                      <a:round/>
+                      <a:headEnd type="none" w="med" len="med"/>
+                      <a:tailEnd type="none" w="med" len="med"/>
+                    </a:lnL>
+                    <a:lnR w="6350" cap="flat" cmpd="sng" algn="ctr">
+                      <a:solidFill>
+                        <a:srgbClr val="CBD5E1"/>
+                      </a:solidFill>
+                      <a:prstDash val="solid"/>
+                      <a:round/>
+                      <a:headEnd type="none" w="med" len="med"/>
+                      <a:tailEnd type="none" w="med" len="med"/>
+                    </a:lnR>
+                    <a:lnT w="6350" cap="flat" cmpd="sng" algn="ctr">
+                      <a:solidFill>
+                        <a:srgbClr val="CBD5E1"/>
+                      </a:solidFill>
+                      <a:prstDash val="solid"/>
+                      <a:round/>
+                      <a:headEnd type="none" w="med" len="med"/>
+                      <a:tailEnd type="none" w="med" len="med"/>
+                    </a:lnT>
+                    <a:lnB w="6350" cap="flat" cmpd="sng" algn="ctr">
+                      <a:solidFill>
+                        <a:srgbClr val="CBD5E1"/>
+                      </a:solidFill>
+                      <a:prstDash val="solid"/>
+                      <a:round/>
+                      <a:headEnd type="none" w="med" len="med"/>
+                      <a:tailEnd type="none" w="med" len="med"/>
+                    </a:lnB>
+                    <a:solidFill>
+                      <a:srgbClr val="FFFFFF"/>
+                    </a:solidFill>
+                  </a:tcPr>
+                </a:tc>
+                <a:tc>
+                  <a:txBody>
+                    <a:bodyPr/>
+                    <a:lstStyle/>
+                    <a:p>
+                      <a:pPr algn="ctr" indent="0" marL="0">
+                        <a:buNone/>
+                      </a:pPr>
+                      <a:r>
+                        <a:rPr lang="en-US" sz="900" dirty="0">
+                          <a:solidFill>
+                            <a:srgbClr val="000000"/>
+                          </a:solidFill>
+                          <a:latin typeface="Arial" pitchFamily="34" charset="0"/>
+                          <a:ea typeface="Arial" pitchFamily="34" charset="-122"/>
+                          <a:cs typeface="Arial" pitchFamily="34" charset="-120"/>
+                        </a:rPr>
+                        <a:t>/5 (×2)</a:t>
+                      </a:r>
+                      <a:endParaRPr lang="en-US" sz="900" dirty="0">
+                        <a:latin typeface="Arial" charset="0"/>
+                        <a:ea typeface="Arial" charset="0"/>
+                        <a:cs typeface="Arial" charset="0"/>
+                      </a:endParaRPr>
+                    </a:p>
+                  </a:txBody>
+                  <a:tcPr marL="91440" marR="91440" marT="45720" marB="45720">
+                    <a:lnL w="6350" cap="flat" cmpd="sng" algn="ctr">
+                      <a:solidFill>
+                        <a:srgbClr val="CBD5E1"/>
+                      </a:solidFill>
+                      <a:prstDash val="solid"/>
+                      <a:round/>
+                      <a:headEnd type="none" w="med" len="med"/>
+                      <a:tailEnd type="none" w="med" len="med"/>
+                    </a:lnL>
+                    <a:lnR w="6350" cap="flat" cmpd="sng" algn="ctr">
+                      <a:solidFill>
+                        <a:srgbClr val="CBD5E1"/>
+                      </a:solidFill>
+                      <a:prstDash val="solid"/>
+                      <a:round/>
+                      <a:headEnd type="none" w="med" len="med"/>
+                      <a:tailEnd type="none" w="med" len="med"/>
+                    </a:lnR>
+                    <a:lnT w="6350" cap="flat" cmpd="sng" algn="ctr">
+                      <a:solidFill>
+                        <a:srgbClr val="CBD5E1"/>
+                      </a:solidFill>
+                      <a:prstDash val="solid"/>
+                      <a:round/>
+                      <a:headEnd type="none" w="med" len="med"/>
+                      <a:tailEnd type="none" w="med" len="med"/>
+                    </a:lnT>
+                    <a:lnB w="6350" cap="flat" cmpd="sng" algn="ctr">
+                      <a:solidFill>
+                        <a:srgbClr val="CBD5E1"/>
+                      </a:solidFill>
+                      <a:prstDash val="solid"/>
+                      <a:round/>
+                      <a:headEnd type="none" w="med" len="med"/>
+                      <a:tailEnd type="none" w="med" len="med"/>
+                    </a:lnB>
+                    <a:solidFill>
+                      <a:srgbClr val="FFFFFF"/>
+                    </a:solidFill>
+                  </a:tcPr>
+                </a:tc>
+                <a:tc>
+                  <a:txBody>
+                    <a:bodyPr/>
+                    <a:lstStyle/>
+                    <a:p>
+                      <a:pPr algn="ctr" indent="0" marL="0">
+                        <a:buNone/>
+                      </a:pPr>
+                      <a:r>
+                        <a:rPr lang="en-US" sz="900" dirty="0">
+                          <a:solidFill>
+                            <a:srgbClr val="000000"/>
+                          </a:solidFill>
+                          <a:latin typeface="Arial" pitchFamily="34" charset="0"/>
+                          <a:ea typeface="Arial" pitchFamily="34" charset="-122"/>
+                          <a:cs typeface="Arial" pitchFamily="34" charset="-120"/>
+                        </a:rPr>
+                        <a:t>8</a:t>
+                      </a:r>
+                      <a:endParaRPr lang="en-US" sz="900" dirty="0">
+                        <a:latin typeface="Arial" charset="0"/>
+                        <a:ea typeface="Arial" charset="0"/>
+                        <a:cs typeface="Arial" charset="0"/>
+                      </a:endParaRPr>
+                    </a:p>
+                  </a:txBody>
+                  <a:tcPr marL="91440" marR="91440" marT="45720" marB="45720">
+                    <a:lnL w="6350" cap="flat" cmpd="sng" algn="ctr">
+                      <a:solidFill>
+                        <a:srgbClr val="CBD5E1"/>
+                      </a:solidFill>
+                      <a:prstDash val="solid"/>
+                      <a:round/>
+                      <a:headEnd type="none" w="med" len="med"/>
+                      <a:tailEnd type="none" w="med" len="med"/>
+                    </a:lnL>
+                    <a:lnR w="6350" cap="flat" cmpd="sng" algn="ctr">
+                      <a:solidFill>
+                        <a:srgbClr val="CBD5E1"/>
+                      </a:solidFill>
+                      <a:prstDash val="solid"/>
+                      <a:round/>
+                      <a:headEnd type="none" w="med" len="med"/>
+                      <a:tailEnd type="none" w="med" len="med"/>
+                    </a:lnR>
+                    <a:lnT w="6350" cap="flat" cmpd="sng" algn="ctr">
+                      <a:solidFill>
+                        <a:srgbClr val="CBD5E1"/>
+                      </a:solidFill>
+                      <a:prstDash val="solid"/>
+                      <a:round/>
+                      <a:headEnd type="none" w="med" len="med"/>
+                      <a:tailEnd type="none" w="med" len="med"/>
+                    </a:lnT>
+                    <a:lnB w="6350" cap="flat" cmpd="sng" algn="ctr">
+                      <a:solidFill>
+                        <a:srgbClr val="CBD5E1"/>
+                      </a:solidFill>
+                      <a:prstDash val="solid"/>
+                      <a:round/>
+                      <a:headEnd type="none" w="med" len="med"/>
+                      <a:tailEnd type="none" w="med" len="med"/>
+                    </a:lnB>
+                    <a:solidFill>
+                      <a:srgbClr val="FFFFFF"/>
+                    </a:solidFill>
+                  </a:tcPr>
+                </a:tc>
+              </a:tr>
+              <a:tr h="201168">
+                <a:tc>
+                  <a:txBody>
+                    <a:bodyPr/>
+                    <a:lstStyle/>
+                    <a:p>
+                      <a:pPr algn="ctr" indent="0" marL="0">
+                        <a:buNone/>
+                      </a:pPr>
+                      <a:r>
+                        <a:rPr lang="en-US" sz="900" dirty="0">
+                          <a:solidFill>
+                            <a:srgbClr val="000000"/>
+                          </a:solidFill>
+                          <a:latin typeface="Arial" pitchFamily="34" charset="0"/>
+                          <a:ea typeface="Arial" pitchFamily="34" charset="-122"/>
+                          <a:cs typeface="Arial" pitchFamily="34" charset="-120"/>
+                        </a:rPr>
+                        <a:t>Booking.com</a:t>
+                      </a:r>
+                      <a:endParaRPr lang="en-US" sz="900" dirty="0">
+                        <a:latin typeface="Arial" charset="0"/>
+                        <a:ea typeface="Arial" charset="0"/>
+                        <a:cs typeface="Arial" charset="0"/>
+                      </a:endParaRPr>
+                    </a:p>
+                  </a:txBody>
+                  <a:tcPr marL="91440" marR="91440" marT="45720" marB="45720">
+                    <a:lnL w="6350" cap="flat" cmpd="sng" algn="ctr">
+                      <a:solidFill>
+                        <a:srgbClr val="CBD5E1"/>
+                      </a:solidFill>
+                      <a:prstDash val="solid"/>
+                      <a:round/>
+                      <a:headEnd type="none" w="med" len="med"/>
+                      <a:tailEnd type="none" w="med" len="med"/>
+                    </a:lnL>
+                    <a:lnR w="6350" cap="flat" cmpd="sng" algn="ctr">
+                      <a:solidFill>
+                        <a:srgbClr val="CBD5E1"/>
+                      </a:solidFill>
+                      <a:prstDash val="solid"/>
+                      <a:round/>
+                      <a:headEnd type="none" w="med" len="med"/>
+                      <a:tailEnd type="none" w="med" len="med"/>
+                    </a:lnR>
+                    <a:lnT w="6350" cap="flat" cmpd="sng" algn="ctr">
+                      <a:solidFill>
+                        <a:srgbClr val="CBD5E1"/>
+                      </a:solidFill>
+                      <a:prstDash val="solid"/>
+                      <a:round/>
+                      <a:headEnd type="none" w="med" len="med"/>
+                      <a:tailEnd type="none" w="med" len="med"/>
+                    </a:lnT>
+                    <a:lnB w="6350" cap="flat" cmpd="sng" algn="ctr">
+                      <a:solidFill>
+                        <a:srgbClr val="CBD5E1"/>
+                      </a:solidFill>
+                      <a:prstDash val="solid"/>
+                      <a:round/>
+                      <a:headEnd type="none" w="med" len="med"/>
+                      <a:tailEnd type="none" w="med" len="med"/>
+                    </a:lnB>
+                    <a:solidFill>
+                      <a:srgbClr val="E8EFF8"/>
+                    </a:solidFill>
+                  </a:tcPr>
+                </a:tc>
+                <a:tc>
+                  <a:txBody>
+                    <a:bodyPr/>
+                    <a:lstStyle/>
+                    <a:p>
+                      <a:pPr algn="ctr" indent="0" marL="0">
+                        <a:buNone/>
+                      </a:pPr>
+                      <a:r>
+                        <a:rPr lang="en-US" sz="900" dirty="0">
+                          <a:solidFill>
+                            <a:srgbClr val="000000"/>
+                          </a:solidFill>
+                          <a:latin typeface="Arial" pitchFamily="34" charset="0"/>
+                          <a:ea typeface="Arial" pitchFamily="34" charset="-122"/>
+                          <a:cs typeface="Arial" pitchFamily="34" charset="-120"/>
+                        </a:rPr>
+                        <a:t>21</a:t>
+                      </a:r>
+                      <a:endParaRPr lang="en-US" sz="900" dirty="0">
+                        <a:latin typeface="Arial" charset="0"/>
+                        <a:ea typeface="Arial" charset="0"/>
+                        <a:cs typeface="Arial" charset="0"/>
+                      </a:endParaRPr>
+                    </a:p>
+                  </a:txBody>
+                  <a:tcPr marL="91440" marR="91440" marT="45720" marB="45720">
+                    <a:lnL w="6350" cap="flat" cmpd="sng" algn="ctr">
+                      <a:solidFill>
+                        <a:srgbClr val="CBD5E1"/>
+                      </a:solidFill>
+                      <a:prstDash val="solid"/>
+                      <a:round/>
+                      <a:headEnd type="none" w="med" len="med"/>
+                      <a:tailEnd type="none" w="med" len="med"/>
+                    </a:lnL>
+                    <a:lnR w="6350" cap="flat" cmpd="sng" algn="ctr">
+                      <a:solidFill>
+                        <a:srgbClr val="CBD5E1"/>
+                      </a:solidFill>
+                      <a:prstDash val="solid"/>
+                      <a:round/>
+                      <a:headEnd type="none" w="med" len="med"/>
+                      <a:tailEnd type="none" w="med" len="med"/>
+                    </a:lnR>
+                    <a:lnT w="6350" cap="flat" cmpd="sng" algn="ctr">
+                      <a:solidFill>
+                        <a:srgbClr val="CBD5E1"/>
+                      </a:solidFill>
+                      <a:prstDash val="solid"/>
+                      <a:round/>
+                      <a:headEnd type="none" w="med" len="med"/>
+                      <a:tailEnd type="none" w="med" len="med"/>
+                    </a:lnT>
+                    <a:lnB w="6350" cap="flat" cmpd="sng" algn="ctr">
+                      <a:solidFill>
+                        <a:srgbClr val="CBD5E1"/>
+                      </a:solidFill>
+                      <a:prstDash val="solid"/>
+                      <a:round/>
+                      <a:headEnd type="none" w="med" len="med"/>
+                      <a:tailEnd type="none" w="med" len="med"/>
+                    </a:lnB>
+                    <a:solidFill>
+                      <a:srgbClr val="E8EFF8"/>
+                    </a:solidFill>
+                  </a:tcPr>
+                </a:tc>
+                <a:tc>
+                  <a:txBody>
+                    <a:bodyPr/>
+                    <a:lstStyle/>
+                    <a:p>
+                      <a:pPr algn="ctr" indent="0" marL="0">
+                        <a:buNone/>
+                      </a:pPr>
+                      <a:r>
+                        <a:rPr lang="en-US" sz="900" dirty="0">
+                          <a:solidFill>
+                            <a:srgbClr val="000000"/>
+                          </a:solidFill>
+                          <a:latin typeface="Arial" pitchFamily="34" charset="0"/>
+                          <a:ea typeface="Arial" pitchFamily="34" charset="-122"/>
+                          <a:cs typeface="Arial" pitchFamily="34" charset="-120"/>
+                        </a:rPr>
+                        <a:t>7.86</a:t>
+                      </a:r>
+                      <a:endParaRPr lang="en-US" sz="900" dirty="0">
+                        <a:latin typeface="Arial" charset="0"/>
+                        <a:ea typeface="Arial" charset="0"/>
+                        <a:cs typeface="Arial" charset="0"/>
+                      </a:endParaRPr>
+                    </a:p>
+                  </a:txBody>
+                  <a:tcPr marL="91440" marR="91440" marT="45720" marB="45720">
+                    <a:lnL w="6350" cap="flat" cmpd="sng" algn="ctr">
+                      <a:solidFill>
+                        <a:srgbClr val="CBD5E1"/>
+                      </a:solidFill>
+                      <a:prstDash val="solid"/>
+                      <a:round/>
+                      <a:headEnd type="none" w="med" len="med"/>
+                      <a:tailEnd type="none" w="med" len="med"/>
+                    </a:lnL>
+                    <a:lnR w="6350" cap="flat" cmpd="sng" algn="ctr">
+                      <a:solidFill>
+                        <a:srgbClr val="CBD5E1"/>
+                      </a:solidFill>
+                      <a:prstDash val="solid"/>
+                      <a:round/>
+                      <a:headEnd type="none" w="med" len="med"/>
+                      <a:tailEnd type="none" w="med" len="med"/>
+                    </a:lnR>
+                    <a:lnT w="6350" cap="flat" cmpd="sng" algn="ctr">
+                      <a:solidFill>
+                        <a:srgbClr val="CBD5E1"/>
+                      </a:solidFill>
+                      <a:prstDash val="solid"/>
+                      <a:round/>
+                      <a:headEnd type="none" w="med" len="med"/>
+                      <a:tailEnd type="none" w="med" len="med"/>
+                    </a:lnT>
+                    <a:lnB w="6350" cap="flat" cmpd="sng" algn="ctr">
+                      <a:solidFill>
+                        <a:srgbClr val="CBD5E1"/>
+                      </a:solidFill>
+                      <a:prstDash val="solid"/>
+                      <a:round/>
+                      <a:headEnd type="none" w="med" len="med"/>
+                      <a:tailEnd type="none" w="med" len="med"/>
+                    </a:lnB>
+                    <a:solidFill>
+                      <a:srgbClr val="E8EFF8"/>
+                    </a:solidFill>
+                  </a:tcPr>
+                </a:tc>
+                <a:tc>
+                  <a:txBody>
+                    <a:bodyPr/>
+                    <a:lstStyle/>
+                    <a:p>
+                      <a:pPr algn="ctr" indent="0" marL="0">
+                        <a:buNone/>
+                      </a:pPr>
+                      <a:r>
+                        <a:rPr lang="en-US" sz="900" dirty="0">
+                          <a:solidFill>
+                            <a:srgbClr val="000000"/>
+                          </a:solidFill>
+                          <a:latin typeface="Arial" pitchFamily="34" charset="0"/>
+                          <a:ea typeface="Arial" pitchFamily="34" charset="-122"/>
+                          <a:cs typeface="Arial" pitchFamily="34" charset="-120"/>
+                        </a:rPr>
+                        <a:t>/10</a:t>
+                      </a:r>
+                      <a:endParaRPr lang="en-US" sz="900" dirty="0">
+                        <a:latin typeface="Arial" charset="0"/>
+                        <a:ea typeface="Arial" charset="0"/>
+                        <a:cs typeface="Arial" charset="0"/>
+                      </a:endParaRPr>
+                    </a:p>
+                  </a:txBody>
+                  <a:tcPr marL="91440" marR="91440" marT="45720" marB="45720">
+                    <a:lnL w="6350" cap="flat" cmpd="sng" algn="ctr">
+                      <a:solidFill>
+                        <a:srgbClr val="CBD5E1"/>
+                      </a:solidFill>
+                      <a:prstDash val="solid"/>
+                      <a:round/>
+                      <a:headEnd type="none" w="med" len="med"/>
+                      <a:tailEnd type="none" w="med" len="med"/>
+                    </a:lnL>
+                    <a:lnR w="6350" cap="flat" cmpd="sng" algn="ctr">
+                      <a:solidFill>
+                        <a:srgbClr val="CBD5E1"/>
+                      </a:solidFill>
+                      <a:prstDash val="solid"/>
+                      <a:round/>
+                      <a:headEnd type="none" w="med" len="med"/>
+                      <a:tailEnd type="none" w="med" len="med"/>
+                    </a:lnR>
+                    <a:lnT w="6350" cap="flat" cmpd="sng" algn="ctr">
+                      <a:solidFill>
+                        <a:srgbClr val="CBD5E1"/>
+                      </a:solidFill>
+                      <a:prstDash val="solid"/>
+                      <a:round/>
+                      <a:headEnd type="none" w="med" len="med"/>
+                      <a:tailEnd type="none" w="med" len="med"/>
+                    </a:lnT>
+                    <a:lnB w="6350" cap="flat" cmpd="sng" algn="ctr">
+                      <a:solidFill>
+                        <a:srgbClr val="CBD5E1"/>
+                      </a:solidFill>
+                      <a:prstDash val="solid"/>
+                      <a:round/>
+                      <a:headEnd type="none" w="med" len="med"/>
+                      <a:tailEnd type="none" w="med" len="med"/>
+                    </a:lnB>
+                    <a:solidFill>
+                      <a:srgbClr val="E8EFF8"/>
+                    </a:solidFill>
+                  </a:tcPr>
+                </a:tc>
+                <a:tc>
+                  <a:txBody>
+                    <a:bodyPr/>
+                    <a:lstStyle/>
+                    <a:p>
+                      <a:pPr algn="ctr" indent="0" marL="0">
+                        <a:buNone/>
+                      </a:pPr>
+                      <a:r>
+                        <a:rPr lang="en-US" sz="900" dirty="0">
+                          <a:solidFill>
+                            <a:srgbClr val="000000"/>
+                          </a:solidFill>
+                          <a:latin typeface="Arial" pitchFamily="34" charset="0"/>
+                          <a:ea typeface="Arial" pitchFamily="34" charset="-122"/>
+                          <a:cs typeface="Arial" pitchFamily="34" charset="-120"/>
+                        </a:rPr>
+                        <a:t>7.86</a:t>
+                      </a:r>
+                      <a:endParaRPr lang="en-US" sz="900" dirty="0">
+                        <a:latin typeface="Arial" charset="0"/>
+                        <a:ea typeface="Arial" charset="0"/>
+                        <a:cs typeface="Arial" charset="0"/>
+                      </a:endParaRPr>
+                    </a:p>
+                  </a:txBody>
+                  <a:tcPr marL="91440" marR="91440" marT="45720" marB="45720">
+                    <a:lnL w="6350" cap="flat" cmpd="sng" algn="ctr">
+                      <a:solidFill>
+                        <a:srgbClr val="CBD5E1"/>
+                      </a:solidFill>
+                      <a:prstDash val="solid"/>
+                      <a:round/>
+                      <a:headEnd type="none" w="med" len="med"/>
+                      <a:tailEnd type="none" w="med" len="med"/>
+                    </a:lnL>
+                    <a:lnR w="6350" cap="flat" cmpd="sng" algn="ctr">
+                      <a:solidFill>
+                        <a:srgbClr val="CBD5E1"/>
+                      </a:solidFill>
+                      <a:prstDash val="solid"/>
+                      <a:round/>
+                      <a:headEnd type="none" w="med" len="med"/>
+                      <a:tailEnd type="none" w="med" len="med"/>
+                    </a:lnR>
+                    <a:lnT w="6350" cap="flat" cmpd="sng" algn="ctr">
+                      <a:solidFill>
+                        <a:srgbClr val="CBD5E1"/>
+                      </a:solidFill>
+                      <a:prstDash val="solid"/>
+                      <a:round/>
+                      <a:headEnd type="none" w="med" len="med"/>
+                      <a:tailEnd type="none" w="med" len="med"/>
+                    </a:lnT>
+                    <a:lnB w="6350" cap="flat" cmpd="sng" algn="ctr">
+                      <a:solidFill>
+                        <a:srgbClr val="CBD5E1"/>
+                      </a:solidFill>
+                      <a:prstDash val="solid"/>
+                      <a:round/>
+                      <a:headEnd type="none" w="med" len="med"/>
+                      <a:tailEnd type="none" w="med" len="med"/>
+                    </a:lnB>
+                    <a:solidFill>
+                      <a:srgbClr val="E8EFF8"/>
+                    </a:solidFill>
+                  </a:tcPr>
+                </a:tc>
+              </a:tr>
+              <a:tr h="201168">
+                <a:tc>
+                  <a:txBody>
+                    <a:bodyPr/>
+                    <a:lstStyle/>
+                    <a:p>
+                      <a:pPr algn="ctr" indent="0" marL="0">
+                        <a:buNone/>
+                      </a:pPr>
+                      <a:r>
+                        <a:rPr lang="en-US" sz="900" dirty="0">
+                          <a:solidFill>
+                            <a:srgbClr val="000000"/>
+                          </a:solidFill>
+                          <a:latin typeface="Arial" pitchFamily="34" charset="0"/>
+                          <a:ea typeface="Arial" pitchFamily="34" charset="-122"/>
+                          <a:cs typeface="Arial" pitchFamily="34" charset="-120"/>
+                        </a:rPr>
+                        <a:t>じゃらん</a:t>
                       </a:r>
                       <a:endParaRPr lang="en-US" sz="900" dirty="0">
                         <a:latin typeface="Arial" charset="0"/>
@@ -9005,7 +9672,7 @@
                           <a:ea typeface="Arial" pitchFamily="34" charset="-122"/>
                           <a:cs typeface="Arial" pitchFamily="34" charset="-120"/>
                         </a:rPr>
-                        <a:t>4.25</a:t>
+                        <a:t>3.92</a:t>
                       </a:r>
                       <a:endParaRPr lang="en-US" sz="900" dirty="0">
                         <a:latin typeface="Arial" charset="0"/>
@@ -9141,691 +9808,7 @@
                           <a:ea typeface="Arial" pitchFamily="34" charset="-122"/>
                           <a:cs typeface="Arial" pitchFamily="34" charset="-120"/>
                         </a:rPr>
-                        <a:t>8.5</a:t>
-                      </a:r>
-                      <a:endParaRPr lang="en-US" sz="900" dirty="0">
-                        <a:latin typeface="Arial" charset="0"/>
-                        <a:ea typeface="Arial" charset="0"/>
-                        <a:cs typeface="Arial" charset="0"/>
-                      </a:endParaRPr>
-                    </a:p>
-                  </a:txBody>
-                  <a:tcPr marL="91440" marR="91440" marT="45720" marB="45720">
-                    <a:lnL w="6350" cap="flat" cmpd="sng" algn="ctr">
-                      <a:solidFill>
-                        <a:srgbClr val="CBD5E1"/>
-                      </a:solidFill>
-                      <a:prstDash val="solid"/>
-                      <a:round/>
-                      <a:headEnd type="none" w="med" len="med"/>
-                      <a:tailEnd type="none" w="med" len="med"/>
-                    </a:lnL>
-                    <a:lnR w="6350" cap="flat" cmpd="sng" algn="ctr">
-                      <a:solidFill>
-                        <a:srgbClr val="CBD5E1"/>
-                      </a:solidFill>
-                      <a:prstDash val="solid"/>
-                      <a:round/>
-                      <a:headEnd type="none" w="med" len="med"/>
-                      <a:tailEnd type="none" w="med" len="med"/>
-                    </a:lnR>
-                    <a:lnT w="6350" cap="flat" cmpd="sng" algn="ctr">
-                      <a:solidFill>
-                        <a:srgbClr val="CBD5E1"/>
-                      </a:solidFill>
-                      <a:prstDash val="solid"/>
-                      <a:round/>
-                      <a:headEnd type="none" w="med" len="med"/>
-                      <a:tailEnd type="none" w="med" len="med"/>
-                    </a:lnT>
-                    <a:lnB w="6350" cap="flat" cmpd="sng" algn="ctr">
-                      <a:solidFill>
-                        <a:srgbClr val="CBD5E1"/>
-                      </a:solidFill>
-                      <a:prstDash val="solid"/>
-                      <a:round/>
-                      <a:headEnd type="none" w="med" len="med"/>
-                      <a:tailEnd type="none" w="med" len="med"/>
-                    </a:lnB>
-                    <a:solidFill>
-                      <a:srgbClr val="FFFFFF"/>
-                    </a:solidFill>
-                  </a:tcPr>
-                </a:tc>
-              </a:tr>
-              <a:tr h="201168">
-                <a:tc>
-                  <a:txBody>
-                    <a:bodyPr/>
-                    <a:lstStyle/>
-                    <a:p>
-                      <a:pPr algn="ctr" indent="0" marL="0">
-                        <a:buNone/>
-                      </a:pPr>
-                      <a:r>
-                        <a:rPr lang="en-US" sz="900" dirty="0">
-                          <a:solidFill>
-                            <a:srgbClr val="000000"/>
-                          </a:solidFill>
-                          <a:latin typeface="Arial" pitchFamily="34" charset="0"/>
-                          <a:ea typeface="Arial" pitchFamily="34" charset="-122"/>
-                          <a:cs typeface="Arial" pitchFamily="34" charset="-120"/>
-                        </a:rPr>
-                        <a:t>楽天トラベル</a:t>
-                      </a:r>
-                      <a:endParaRPr lang="en-US" sz="900" dirty="0">
-                        <a:latin typeface="Arial" charset="0"/>
-                        <a:ea typeface="Arial" charset="0"/>
-                        <a:cs typeface="Arial" charset="0"/>
-                      </a:endParaRPr>
-                    </a:p>
-                  </a:txBody>
-                  <a:tcPr marL="91440" marR="91440" marT="45720" marB="45720">
-                    <a:lnL w="6350" cap="flat" cmpd="sng" algn="ctr">
-                      <a:solidFill>
-                        <a:srgbClr val="CBD5E1"/>
-                      </a:solidFill>
-                      <a:prstDash val="solid"/>
-                      <a:round/>
-                      <a:headEnd type="none" w="med" len="med"/>
-                      <a:tailEnd type="none" w="med" len="med"/>
-                    </a:lnL>
-                    <a:lnR w="6350" cap="flat" cmpd="sng" algn="ctr">
-                      <a:solidFill>
-                        <a:srgbClr val="CBD5E1"/>
-                      </a:solidFill>
-                      <a:prstDash val="solid"/>
-                      <a:round/>
-                      <a:headEnd type="none" w="med" len="med"/>
-                      <a:tailEnd type="none" w="med" len="med"/>
-                    </a:lnR>
-                    <a:lnT w="6350" cap="flat" cmpd="sng" algn="ctr">
-                      <a:solidFill>
-                        <a:srgbClr val="CBD5E1"/>
-                      </a:solidFill>
-                      <a:prstDash val="solid"/>
-                      <a:round/>
-                      <a:headEnd type="none" w="med" len="med"/>
-                      <a:tailEnd type="none" w="med" len="med"/>
-                    </a:lnT>
-                    <a:lnB w="6350" cap="flat" cmpd="sng" algn="ctr">
-                      <a:solidFill>
-                        <a:srgbClr val="CBD5E1"/>
-                      </a:solidFill>
-                      <a:prstDash val="solid"/>
-                      <a:round/>
-                      <a:headEnd type="none" w="med" len="med"/>
-                      <a:tailEnd type="none" w="med" len="med"/>
-                    </a:lnB>
-                    <a:solidFill>
-                      <a:srgbClr val="E8EFF8"/>
-                    </a:solidFill>
-                  </a:tcPr>
-                </a:tc>
-                <a:tc>
-                  <a:txBody>
-                    <a:bodyPr/>
-                    <a:lstStyle/>
-                    <a:p>
-                      <a:pPr algn="ctr" indent="0" marL="0">
-                        <a:buNone/>
-                      </a:pPr>
-                      <a:r>
-                        <a:rPr lang="en-US" sz="900" dirty="0">
-                          <a:solidFill>
-                            <a:srgbClr val="000000"/>
-                          </a:solidFill>
-                          <a:latin typeface="Arial" pitchFamily="34" charset="0"/>
-                          <a:ea typeface="Arial" pitchFamily="34" charset="-122"/>
-                          <a:cs typeface="Arial" pitchFamily="34" charset="-120"/>
-                        </a:rPr>
-                        <a:t>24</a:t>
-                      </a:r>
-                      <a:endParaRPr lang="en-US" sz="900" dirty="0">
-                        <a:latin typeface="Arial" charset="0"/>
-                        <a:ea typeface="Arial" charset="0"/>
-                        <a:cs typeface="Arial" charset="0"/>
-                      </a:endParaRPr>
-                    </a:p>
-                  </a:txBody>
-                  <a:tcPr marL="91440" marR="91440" marT="45720" marB="45720">
-                    <a:lnL w="6350" cap="flat" cmpd="sng" algn="ctr">
-                      <a:solidFill>
-                        <a:srgbClr val="CBD5E1"/>
-                      </a:solidFill>
-                      <a:prstDash val="solid"/>
-                      <a:round/>
-                      <a:headEnd type="none" w="med" len="med"/>
-                      <a:tailEnd type="none" w="med" len="med"/>
-                    </a:lnL>
-                    <a:lnR w="6350" cap="flat" cmpd="sng" algn="ctr">
-                      <a:solidFill>
-                        <a:srgbClr val="CBD5E1"/>
-                      </a:solidFill>
-                      <a:prstDash val="solid"/>
-                      <a:round/>
-                      <a:headEnd type="none" w="med" len="med"/>
-                      <a:tailEnd type="none" w="med" len="med"/>
-                    </a:lnR>
-                    <a:lnT w="6350" cap="flat" cmpd="sng" algn="ctr">
-                      <a:solidFill>
-                        <a:srgbClr val="CBD5E1"/>
-                      </a:solidFill>
-                      <a:prstDash val="solid"/>
-                      <a:round/>
-                      <a:headEnd type="none" w="med" len="med"/>
-                      <a:tailEnd type="none" w="med" len="med"/>
-                    </a:lnT>
-                    <a:lnB w="6350" cap="flat" cmpd="sng" algn="ctr">
-                      <a:solidFill>
-                        <a:srgbClr val="CBD5E1"/>
-                      </a:solidFill>
-                      <a:prstDash val="solid"/>
-                      <a:round/>
-                      <a:headEnd type="none" w="med" len="med"/>
-                      <a:tailEnd type="none" w="med" len="med"/>
-                    </a:lnB>
-                    <a:solidFill>
-                      <a:srgbClr val="E8EFF8"/>
-                    </a:solidFill>
-                  </a:tcPr>
-                </a:tc>
-                <a:tc>
-                  <a:txBody>
-                    <a:bodyPr/>
-                    <a:lstStyle/>
-                    <a:p>
-                      <a:pPr algn="ctr" indent="0" marL="0">
-                        <a:buNone/>
-                      </a:pPr>
-                      <a:r>
-                        <a:rPr lang="en-US" sz="900" dirty="0">
-                          <a:solidFill>
-                            <a:srgbClr val="000000"/>
-                          </a:solidFill>
-                          <a:latin typeface="Arial" pitchFamily="34" charset="0"/>
-                          <a:ea typeface="Arial" pitchFamily="34" charset="-122"/>
-                          <a:cs typeface="Arial" pitchFamily="34" charset="-120"/>
-                        </a:rPr>
-                        <a:t>4.12</a:t>
-                      </a:r>
-                      <a:endParaRPr lang="en-US" sz="900" dirty="0">
-                        <a:latin typeface="Arial" charset="0"/>
-                        <a:ea typeface="Arial" charset="0"/>
-                        <a:cs typeface="Arial" charset="0"/>
-                      </a:endParaRPr>
-                    </a:p>
-                  </a:txBody>
-                  <a:tcPr marL="91440" marR="91440" marT="45720" marB="45720">
-                    <a:lnL w="6350" cap="flat" cmpd="sng" algn="ctr">
-                      <a:solidFill>
-                        <a:srgbClr val="CBD5E1"/>
-                      </a:solidFill>
-                      <a:prstDash val="solid"/>
-                      <a:round/>
-                      <a:headEnd type="none" w="med" len="med"/>
-                      <a:tailEnd type="none" w="med" len="med"/>
-                    </a:lnL>
-                    <a:lnR w="6350" cap="flat" cmpd="sng" algn="ctr">
-                      <a:solidFill>
-                        <a:srgbClr val="CBD5E1"/>
-                      </a:solidFill>
-                      <a:prstDash val="solid"/>
-                      <a:round/>
-                      <a:headEnd type="none" w="med" len="med"/>
-                      <a:tailEnd type="none" w="med" len="med"/>
-                    </a:lnR>
-                    <a:lnT w="6350" cap="flat" cmpd="sng" algn="ctr">
-                      <a:solidFill>
-                        <a:srgbClr val="CBD5E1"/>
-                      </a:solidFill>
-                      <a:prstDash val="solid"/>
-                      <a:round/>
-                      <a:headEnd type="none" w="med" len="med"/>
-                      <a:tailEnd type="none" w="med" len="med"/>
-                    </a:lnT>
-                    <a:lnB w="6350" cap="flat" cmpd="sng" algn="ctr">
-                      <a:solidFill>
-                        <a:srgbClr val="CBD5E1"/>
-                      </a:solidFill>
-                      <a:prstDash val="solid"/>
-                      <a:round/>
-                      <a:headEnd type="none" w="med" len="med"/>
-                      <a:tailEnd type="none" w="med" len="med"/>
-                    </a:lnB>
-                    <a:solidFill>
-                      <a:srgbClr val="E8EFF8"/>
-                    </a:solidFill>
-                  </a:tcPr>
-                </a:tc>
-                <a:tc>
-                  <a:txBody>
-                    <a:bodyPr/>
-                    <a:lstStyle/>
-                    <a:p>
-                      <a:pPr algn="ctr" indent="0" marL="0">
-                        <a:buNone/>
-                      </a:pPr>
-                      <a:r>
-                        <a:rPr lang="en-US" sz="900" dirty="0">
-                          <a:solidFill>
-                            <a:srgbClr val="000000"/>
-                          </a:solidFill>
-                          <a:latin typeface="Arial" pitchFamily="34" charset="0"/>
-                          <a:ea typeface="Arial" pitchFamily="34" charset="-122"/>
-                          <a:cs typeface="Arial" pitchFamily="34" charset="-120"/>
-                        </a:rPr>
-                        <a:t>/5 (×2)</a:t>
-                      </a:r>
-                      <a:endParaRPr lang="en-US" sz="900" dirty="0">
-                        <a:latin typeface="Arial" charset="0"/>
-                        <a:ea typeface="Arial" charset="0"/>
-                        <a:cs typeface="Arial" charset="0"/>
-                      </a:endParaRPr>
-                    </a:p>
-                  </a:txBody>
-                  <a:tcPr marL="91440" marR="91440" marT="45720" marB="45720">
-                    <a:lnL w="6350" cap="flat" cmpd="sng" algn="ctr">
-                      <a:solidFill>
-                        <a:srgbClr val="CBD5E1"/>
-                      </a:solidFill>
-                      <a:prstDash val="solid"/>
-                      <a:round/>
-                      <a:headEnd type="none" w="med" len="med"/>
-                      <a:tailEnd type="none" w="med" len="med"/>
-                    </a:lnL>
-                    <a:lnR w="6350" cap="flat" cmpd="sng" algn="ctr">
-                      <a:solidFill>
-                        <a:srgbClr val="CBD5E1"/>
-                      </a:solidFill>
-                      <a:prstDash val="solid"/>
-                      <a:round/>
-                      <a:headEnd type="none" w="med" len="med"/>
-                      <a:tailEnd type="none" w="med" len="med"/>
-                    </a:lnR>
-                    <a:lnT w="6350" cap="flat" cmpd="sng" algn="ctr">
-                      <a:solidFill>
-                        <a:srgbClr val="CBD5E1"/>
-                      </a:solidFill>
-                      <a:prstDash val="solid"/>
-                      <a:round/>
-                      <a:headEnd type="none" w="med" len="med"/>
-                      <a:tailEnd type="none" w="med" len="med"/>
-                    </a:lnT>
-                    <a:lnB w="6350" cap="flat" cmpd="sng" algn="ctr">
-                      <a:solidFill>
-                        <a:srgbClr val="CBD5E1"/>
-                      </a:solidFill>
-                      <a:prstDash val="solid"/>
-                      <a:round/>
-                      <a:headEnd type="none" w="med" len="med"/>
-                      <a:tailEnd type="none" w="med" len="med"/>
-                    </a:lnB>
-                    <a:solidFill>
-                      <a:srgbClr val="E8EFF8"/>
-                    </a:solidFill>
-                  </a:tcPr>
-                </a:tc>
-                <a:tc>
-                  <a:txBody>
-                    <a:bodyPr/>
-                    <a:lstStyle/>
-                    <a:p>
-                      <a:pPr algn="ctr" indent="0" marL="0">
-                        <a:buNone/>
-                      </a:pPr>
-                      <a:r>
-                        <a:rPr lang="en-US" sz="900" dirty="0">
-                          <a:solidFill>
-                            <a:srgbClr val="000000"/>
-                          </a:solidFill>
-                          <a:latin typeface="Arial" pitchFamily="34" charset="0"/>
-                          <a:ea typeface="Arial" pitchFamily="34" charset="-122"/>
-                          <a:cs typeface="Arial" pitchFamily="34" charset="-120"/>
-                        </a:rPr>
-                        <a:t>8.25</a:t>
-                      </a:r>
-                      <a:endParaRPr lang="en-US" sz="900" dirty="0">
-                        <a:latin typeface="Arial" charset="0"/>
-                        <a:ea typeface="Arial" charset="0"/>
-                        <a:cs typeface="Arial" charset="0"/>
-                      </a:endParaRPr>
-                    </a:p>
-                  </a:txBody>
-                  <a:tcPr marL="91440" marR="91440" marT="45720" marB="45720">
-                    <a:lnL w="6350" cap="flat" cmpd="sng" algn="ctr">
-                      <a:solidFill>
-                        <a:srgbClr val="CBD5E1"/>
-                      </a:solidFill>
-                      <a:prstDash val="solid"/>
-                      <a:round/>
-                      <a:headEnd type="none" w="med" len="med"/>
-                      <a:tailEnd type="none" w="med" len="med"/>
-                    </a:lnL>
-                    <a:lnR w="6350" cap="flat" cmpd="sng" algn="ctr">
-                      <a:solidFill>
-                        <a:srgbClr val="CBD5E1"/>
-                      </a:solidFill>
-                      <a:prstDash val="solid"/>
-                      <a:round/>
-                      <a:headEnd type="none" w="med" len="med"/>
-                      <a:tailEnd type="none" w="med" len="med"/>
-                    </a:lnR>
-                    <a:lnT w="6350" cap="flat" cmpd="sng" algn="ctr">
-                      <a:solidFill>
-                        <a:srgbClr val="CBD5E1"/>
-                      </a:solidFill>
-                      <a:prstDash val="solid"/>
-                      <a:round/>
-                      <a:headEnd type="none" w="med" len="med"/>
-                      <a:tailEnd type="none" w="med" len="med"/>
-                    </a:lnT>
-                    <a:lnB w="6350" cap="flat" cmpd="sng" algn="ctr">
-                      <a:solidFill>
-                        <a:srgbClr val="CBD5E1"/>
-                      </a:solidFill>
-                      <a:prstDash val="solid"/>
-                      <a:round/>
-                      <a:headEnd type="none" w="med" len="med"/>
-                      <a:tailEnd type="none" w="med" len="med"/>
-                    </a:lnB>
-                    <a:solidFill>
-                      <a:srgbClr val="E8EFF8"/>
-                    </a:solidFill>
-                  </a:tcPr>
-                </a:tc>
-              </a:tr>
-              <a:tr h="201168">
-                <a:tc>
-                  <a:txBody>
-                    <a:bodyPr/>
-                    <a:lstStyle/>
-                    <a:p>
-                      <a:pPr algn="ctr" indent="0" marL="0">
-                        <a:buNone/>
-                      </a:pPr>
-                      <a:r>
-                        <a:rPr lang="en-US" sz="900" dirty="0">
-                          <a:solidFill>
-                            <a:srgbClr val="000000"/>
-                          </a:solidFill>
-                          <a:latin typeface="Arial" pitchFamily="34" charset="0"/>
-                          <a:ea typeface="Arial" pitchFamily="34" charset="-122"/>
-                          <a:cs typeface="Arial" pitchFamily="34" charset="-120"/>
-                        </a:rPr>
-                        <a:t>Booking.com</a:t>
-                      </a:r>
-                      <a:endParaRPr lang="en-US" sz="900" dirty="0">
-                        <a:latin typeface="Arial" charset="0"/>
-                        <a:ea typeface="Arial" charset="0"/>
-                        <a:cs typeface="Arial" charset="0"/>
-                      </a:endParaRPr>
-                    </a:p>
-                  </a:txBody>
-                  <a:tcPr marL="91440" marR="91440" marT="45720" marB="45720">
-                    <a:lnL w="6350" cap="flat" cmpd="sng" algn="ctr">
-                      <a:solidFill>
-                        <a:srgbClr val="CBD5E1"/>
-                      </a:solidFill>
-                      <a:prstDash val="solid"/>
-                      <a:round/>
-                      <a:headEnd type="none" w="med" len="med"/>
-                      <a:tailEnd type="none" w="med" len="med"/>
-                    </a:lnL>
-                    <a:lnR w="6350" cap="flat" cmpd="sng" algn="ctr">
-                      <a:solidFill>
-                        <a:srgbClr val="CBD5E1"/>
-                      </a:solidFill>
-                      <a:prstDash val="solid"/>
-                      <a:round/>
-                      <a:headEnd type="none" w="med" len="med"/>
-                      <a:tailEnd type="none" w="med" len="med"/>
-                    </a:lnR>
-                    <a:lnT w="6350" cap="flat" cmpd="sng" algn="ctr">
-                      <a:solidFill>
-                        <a:srgbClr val="CBD5E1"/>
-                      </a:solidFill>
-                      <a:prstDash val="solid"/>
-                      <a:round/>
-                      <a:headEnd type="none" w="med" len="med"/>
-                      <a:tailEnd type="none" w="med" len="med"/>
-                    </a:lnT>
-                    <a:lnB w="6350" cap="flat" cmpd="sng" algn="ctr">
-                      <a:solidFill>
-                        <a:srgbClr val="CBD5E1"/>
-                      </a:solidFill>
-                      <a:prstDash val="solid"/>
-                      <a:round/>
-                      <a:headEnd type="none" w="med" len="med"/>
-                      <a:tailEnd type="none" w="med" len="med"/>
-                    </a:lnB>
-                    <a:solidFill>
-                      <a:srgbClr val="FFFFFF"/>
-                    </a:solidFill>
-                  </a:tcPr>
-                </a:tc>
-                <a:tc>
-                  <a:txBody>
-                    <a:bodyPr/>
-                    <a:lstStyle/>
-                    <a:p>
-                      <a:pPr algn="ctr" indent="0" marL="0">
-                        <a:buNone/>
-                      </a:pPr>
-                      <a:r>
-                        <a:rPr lang="en-US" sz="900" dirty="0">
-                          <a:solidFill>
-                            <a:srgbClr val="000000"/>
-                          </a:solidFill>
-                          <a:latin typeface="Arial" pitchFamily="34" charset="0"/>
-                          <a:ea typeface="Arial" pitchFamily="34" charset="-122"/>
-                          <a:cs typeface="Arial" pitchFamily="34" charset="-120"/>
-                        </a:rPr>
-                        <a:t>35</a:t>
-                      </a:r>
-                      <a:endParaRPr lang="en-US" sz="900" dirty="0">
-                        <a:latin typeface="Arial" charset="0"/>
-                        <a:ea typeface="Arial" charset="0"/>
-                        <a:cs typeface="Arial" charset="0"/>
-                      </a:endParaRPr>
-                    </a:p>
-                  </a:txBody>
-                  <a:tcPr marL="91440" marR="91440" marT="45720" marB="45720">
-                    <a:lnL w="6350" cap="flat" cmpd="sng" algn="ctr">
-                      <a:solidFill>
-                        <a:srgbClr val="CBD5E1"/>
-                      </a:solidFill>
-                      <a:prstDash val="solid"/>
-                      <a:round/>
-                      <a:headEnd type="none" w="med" len="med"/>
-                      <a:tailEnd type="none" w="med" len="med"/>
-                    </a:lnL>
-                    <a:lnR w="6350" cap="flat" cmpd="sng" algn="ctr">
-                      <a:solidFill>
-                        <a:srgbClr val="CBD5E1"/>
-                      </a:solidFill>
-                      <a:prstDash val="solid"/>
-                      <a:round/>
-                      <a:headEnd type="none" w="med" len="med"/>
-                      <a:tailEnd type="none" w="med" len="med"/>
-                    </a:lnR>
-                    <a:lnT w="6350" cap="flat" cmpd="sng" algn="ctr">
-                      <a:solidFill>
-                        <a:srgbClr val="CBD5E1"/>
-                      </a:solidFill>
-                      <a:prstDash val="solid"/>
-                      <a:round/>
-                      <a:headEnd type="none" w="med" len="med"/>
-                      <a:tailEnd type="none" w="med" len="med"/>
-                    </a:lnT>
-                    <a:lnB w="6350" cap="flat" cmpd="sng" algn="ctr">
-                      <a:solidFill>
-                        <a:srgbClr val="CBD5E1"/>
-                      </a:solidFill>
-                      <a:prstDash val="solid"/>
-                      <a:round/>
-                      <a:headEnd type="none" w="med" len="med"/>
-                      <a:tailEnd type="none" w="med" len="med"/>
-                    </a:lnB>
-                    <a:solidFill>
-                      <a:srgbClr val="FFFFFF"/>
-                    </a:solidFill>
-                  </a:tcPr>
-                </a:tc>
-                <a:tc>
-                  <a:txBody>
-                    <a:bodyPr/>
-                    <a:lstStyle/>
-                    <a:p>
-                      <a:pPr algn="ctr" indent="0" marL="0">
-                        <a:buNone/>
-                      </a:pPr>
-                      <a:r>
-                        <a:rPr lang="en-US" sz="900" dirty="0">
-                          <a:solidFill>
-                            <a:srgbClr val="000000"/>
-                          </a:solidFill>
-                          <a:latin typeface="Arial" pitchFamily="34" charset="0"/>
-                          <a:ea typeface="Arial" pitchFamily="34" charset="-122"/>
-                          <a:cs typeface="Arial" pitchFamily="34" charset="-120"/>
-                        </a:rPr>
-                        <a:t>7.74</a:t>
-                      </a:r>
-                      <a:endParaRPr lang="en-US" sz="900" dirty="0">
-                        <a:latin typeface="Arial" charset="0"/>
-                        <a:ea typeface="Arial" charset="0"/>
-                        <a:cs typeface="Arial" charset="0"/>
-                      </a:endParaRPr>
-                    </a:p>
-                  </a:txBody>
-                  <a:tcPr marL="91440" marR="91440" marT="45720" marB="45720">
-                    <a:lnL w="6350" cap="flat" cmpd="sng" algn="ctr">
-                      <a:solidFill>
-                        <a:srgbClr val="CBD5E1"/>
-                      </a:solidFill>
-                      <a:prstDash val="solid"/>
-                      <a:round/>
-                      <a:headEnd type="none" w="med" len="med"/>
-                      <a:tailEnd type="none" w="med" len="med"/>
-                    </a:lnL>
-                    <a:lnR w="6350" cap="flat" cmpd="sng" algn="ctr">
-                      <a:solidFill>
-                        <a:srgbClr val="CBD5E1"/>
-                      </a:solidFill>
-                      <a:prstDash val="solid"/>
-                      <a:round/>
-                      <a:headEnd type="none" w="med" len="med"/>
-                      <a:tailEnd type="none" w="med" len="med"/>
-                    </a:lnR>
-                    <a:lnT w="6350" cap="flat" cmpd="sng" algn="ctr">
-                      <a:solidFill>
-                        <a:srgbClr val="CBD5E1"/>
-                      </a:solidFill>
-                      <a:prstDash val="solid"/>
-                      <a:round/>
-                      <a:headEnd type="none" w="med" len="med"/>
-                      <a:tailEnd type="none" w="med" len="med"/>
-                    </a:lnT>
-                    <a:lnB w="6350" cap="flat" cmpd="sng" algn="ctr">
-                      <a:solidFill>
-                        <a:srgbClr val="CBD5E1"/>
-                      </a:solidFill>
-                      <a:prstDash val="solid"/>
-                      <a:round/>
-                      <a:headEnd type="none" w="med" len="med"/>
-                      <a:tailEnd type="none" w="med" len="med"/>
-                    </a:lnB>
-                    <a:solidFill>
-                      <a:srgbClr val="FFFFFF"/>
-                    </a:solidFill>
-                  </a:tcPr>
-                </a:tc>
-                <a:tc>
-                  <a:txBody>
-                    <a:bodyPr/>
-                    <a:lstStyle/>
-                    <a:p>
-                      <a:pPr algn="ctr" indent="0" marL="0">
-                        <a:buNone/>
-                      </a:pPr>
-                      <a:r>
-                        <a:rPr lang="en-US" sz="900" dirty="0">
-                          <a:solidFill>
-                            <a:srgbClr val="000000"/>
-                          </a:solidFill>
-                          <a:latin typeface="Arial" pitchFamily="34" charset="0"/>
-                          <a:ea typeface="Arial" pitchFamily="34" charset="-122"/>
-                          <a:cs typeface="Arial" pitchFamily="34" charset="-120"/>
-                        </a:rPr>
-                        <a:t>/10</a:t>
-                      </a:r>
-                      <a:endParaRPr lang="en-US" sz="900" dirty="0">
-                        <a:latin typeface="Arial" charset="0"/>
-                        <a:ea typeface="Arial" charset="0"/>
-                        <a:cs typeface="Arial" charset="0"/>
-                      </a:endParaRPr>
-                    </a:p>
-                  </a:txBody>
-                  <a:tcPr marL="91440" marR="91440" marT="45720" marB="45720">
-                    <a:lnL w="6350" cap="flat" cmpd="sng" algn="ctr">
-                      <a:solidFill>
-                        <a:srgbClr val="CBD5E1"/>
-                      </a:solidFill>
-                      <a:prstDash val="solid"/>
-                      <a:round/>
-                      <a:headEnd type="none" w="med" len="med"/>
-                      <a:tailEnd type="none" w="med" len="med"/>
-                    </a:lnL>
-                    <a:lnR w="6350" cap="flat" cmpd="sng" algn="ctr">
-                      <a:solidFill>
-                        <a:srgbClr val="CBD5E1"/>
-                      </a:solidFill>
-                      <a:prstDash val="solid"/>
-                      <a:round/>
-                      <a:headEnd type="none" w="med" len="med"/>
-                      <a:tailEnd type="none" w="med" len="med"/>
-                    </a:lnR>
-                    <a:lnT w="6350" cap="flat" cmpd="sng" algn="ctr">
-                      <a:solidFill>
-                        <a:srgbClr val="CBD5E1"/>
-                      </a:solidFill>
-                      <a:prstDash val="solid"/>
-                      <a:round/>
-                      <a:headEnd type="none" w="med" len="med"/>
-                      <a:tailEnd type="none" w="med" len="med"/>
-                    </a:lnT>
-                    <a:lnB w="6350" cap="flat" cmpd="sng" algn="ctr">
-                      <a:solidFill>
-                        <a:srgbClr val="CBD5E1"/>
-                      </a:solidFill>
-                      <a:prstDash val="solid"/>
-                      <a:round/>
-                      <a:headEnd type="none" w="med" len="med"/>
-                      <a:tailEnd type="none" w="med" len="med"/>
-                    </a:lnB>
-                    <a:solidFill>
-                      <a:srgbClr val="FFFFFF"/>
-                    </a:solidFill>
-                  </a:tcPr>
-                </a:tc>
-                <a:tc>
-                  <a:txBody>
-                    <a:bodyPr/>
-                    <a:lstStyle/>
-                    <a:p>
-                      <a:pPr algn="ctr" indent="0" marL="0">
-                        <a:buNone/>
-                      </a:pPr>
-                      <a:r>
-                        <a:rPr lang="en-US" sz="900" dirty="0">
-                          <a:solidFill>
-                            <a:srgbClr val="000000"/>
-                          </a:solidFill>
-                          <a:latin typeface="Arial" pitchFamily="34" charset="0"/>
-                          <a:ea typeface="Arial" pitchFamily="34" charset="-122"/>
-                          <a:cs typeface="Arial" pitchFamily="34" charset="-120"/>
-                        </a:rPr>
-                        <a:t>7.74</a:t>
+                        <a:t>7.83</a:t>
                       </a:r>
                       <a:endParaRPr lang="en-US" sz="900" dirty="0">
                         <a:latin typeface="Arial" charset="0"/>
@@ -10233,7 +10216,7 @@
                 <a:ea typeface="Arial" pitchFamily="34" charset="-122"/>
                 <a:cs typeface="Arial" pitchFamily="34" charset="-120"/>
               </a:rPr>
-              <a:t>125件（85.6%）</a:t>
+              <a:t>61件（83.6%）</a:t>
             </a:r>
             <a:endParaRPr lang="en-US" sz="1100" dirty="0"/>
           </a:p>
@@ -10331,7 +10314,7 @@
                 <a:ea typeface="Arial" pitchFamily="34" charset="-122"/>
                 <a:cs typeface="Arial" pitchFamily="34" charset="-120"/>
               </a:rPr>
-              <a:t>16件（11.0%）</a:t>
+              <a:t>9件（12.3%）</a:t>
             </a:r>
             <a:endParaRPr lang="en-US" sz="1100" dirty="0"/>
           </a:p>
@@ -10429,7 +10412,7 @@
                 <a:ea typeface="Arial" pitchFamily="34" charset="-122"/>
                 <a:cs typeface="Arial" pitchFamily="34" charset="-120"/>
               </a:rPr>
-              <a:t>5件（3.4%）</a:t>
+              <a:t>3件（4.1%）</a:t>
             </a:r>
             <a:endParaRPr lang="en-US" sz="1100" dirty="0"/>
           </a:p>
@@ -10763,7 +10746,7 @@
                 <a:ea typeface="Arial" pitchFamily="34" charset="-122"/>
                 <a:cs typeface="Arial" pitchFamily="34" charset="-120"/>
               </a:rPr>
-              <a:t>50件+</a:t>
+              <a:t>20件+</a:t>
             </a:r>
             <a:endParaRPr lang="en-US" sz="900" dirty="0"/>
           </a:p>
@@ -10986,7 +10969,7 @@
                 <a:ea typeface="Arial" pitchFamily="34" charset="-122"/>
                 <a:cs typeface="Arial" pitchFamily="34" charset="-120"/>
               </a:rPr>
-              <a:t>50件+</a:t>
+              <a:t>20件+</a:t>
             </a:r>
             <a:endParaRPr lang="en-US" sz="900" dirty="0"/>
           </a:p>
@@ -11001,6 +10984,229 @@
         <p:spPr>
           <a:xfrm>
             <a:off x="3429000" y="1124712"/>
+            <a:ext cx="1645920" cy="274320"/>
+          </a:xfrm>
+          <a:prstGeom prst="rect">
+            <a:avLst/>
+          </a:prstGeom>
+          <a:noFill/>
+          <a:ln/>
+        </p:spPr>
+        <p:txBody>
+          <a:bodyPr wrap="square" lIns="0" tIns="0" rIns="0" bIns="0" rtlCol="0" anchor="ctr"/>
+          <a:lstStyle/>
+          <a:p>
+            <a:pPr indent="0" marL="0">
+              <a:buNone/>
+            </a:pPr>
+            <a:r>
+              <a:rPr lang="en-US" sz="1300" b="1" dirty="0">
+                <a:solidFill>
+                  <a:srgbClr val="1A2744"/>
+                </a:solidFill>
+                <a:latin typeface="Arial" pitchFamily="34" charset="0"/>
+                <a:ea typeface="Arial" pitchFamily="34" charset="-122"/>
+                <a:cs typeface="Arial" pitchFamily="34" charset="-120"/>
+              </a:rPr>
+              <a:t>スタッフの対応</a:t>
+            </a:r>
+            <a:endParaRPr lang="en-US" sz="1300" dirty="0"/>
+          </a:p>
+        </p:txBody>
+      </p:sp>
+      <p:sp>
+        <p:nvSpPr>
+          <p:cNvPr id="17" name="Text 15"/>
+          <p:cNvSpPr/>
+          <p:nvPr/>
+        </p:nvSpPr>
+        <p:spPr>
+          <a:xfrm>
+            <a:off x="3429000" y="1417320"/>
+            <a:ext cx="2377440" cy="365760"/>
+          </a:xfrm>
+          <a:prstGeom prst="rect">
+            <a:avLst/>
+          </a:prstGeom>
+          <a:noFill/>
+          <a:ln/>
+        </p:spPr>
+        <p:txBody>
+          <a:bodyPr wrap="square" lIns="0" tIns="0" rIns="0" bIns="0" rtlCol="0" anchor="ctr"/>
+          <a:lstStyle/>
+          <a:p>
+            <a:pPr indent="0" marL="0">
+              <a:buNone/>
+            </a:pPr>
+            <a:r>
+              <a:rPr lang="en-US" sz="900" dirty="0">
+                <a:solidFill>
+                  <a:srgbClr val="64748B"/>
+                </a:solidFill>
+                <a:latin typeface="Arial" pitchFamily="34" charset="0"/>
+                <a:ea typeface="Arial" pitchFamily="34" charset="-122"/>
+                <a:cs typeface="Arial" pitchFamily="34" charset="-120"/>
+              </a:rPr>
+              <a:t>とにかくスタッフに電話したら、とても親切に対応してくれて、対応してくれたのはありがたかったのですが、エアコンの音は...</a:t>
+            </a:r>
+            <a:endParaRPr lang="en-US" sz="900" dirty="0"/>
+          </a:p>
+        </p:txBody>
+      </p:sp>
+      <p:sp>
+        <p:nvSpPr>
+          <p:cNvPr id="18" name="Text 16"/>
+          <p:cNvSpPr/>
+          <p:nvPr/>
+        </p:nvSpPr>
+        <p:spPr>
+          <a:xfrm>
+            <a:off x="3429000" y="1828800"/>
+            <a:ext cx="2377440" cy="640080"/>
+          </a:xfrm>
+          <a:prstGeom prst="rect">
+            <a:avLst/>
+          </a:prstGeom>
+          <a:noFill/>
+          <a:ln/>
+        </p:spPr>
+        <p:txBody>
+          <a:bodyPr wrap="square" lIns="0" tIns="0" rIns="0" bIns="0" rtlCol="0" anchor="ctr"/>
+          <a:lstStyle/>
+          <a:p>
+            <a:pPr indent="0" marL="0">
+              <a:buNone/>
+            </a:pPr>
+            <a:r>
+              <a:rPr lang="en-US" sz="900" i="1" dirty="0">
+                <a:solidFill>
+                  <a:srgbClr val="3B7DD8"/>
+                </a:solidFill>
+                <a:latin typeface="Arial" pitchFamily="34" charset="0"/>
+                <a:ea typeface="Arial" pitchFamily="34" charset="-122"/>
+                <a:cs typeface="Arial" pitchFamily="34" charset="-120"/>
+              </a:rPr>
+              <a:t>「チェックイン後、アメニティを選んでいたらスタッフの方が子供用の可愛いアメニティを持ってきてくださり、その他にも塗り...」</a:t>
+            </a:r>
+            <a:endParaRPr lang="en-US" sz="900" dirty="0"/>
+          </a:p>
+        </p:txBody>
+      </p:sp>
+      <p:sp>
+        <p:nvSpPr>
+          <p:cNvPr id="19" name="Shape 17"/>
+          <p:cNvSpPr/>
+          <p:nvPr/>
+        </p:nvSpPr>
+        <p:spPr>
+          <a:xfrm>
+            <a:off x="6126480" y="1051560"/>
+            <a:ext cx="2651760" cy="1600200"/>
+          </a:xfrm>
+          <a:prstGeom prst="rect">
+            <a:avLst/>
+          </a:prstGeom>
+          <a:solidFill>
+            <a:srgbClr val="FFFFFF"/>
+          </a:solidFill>
+          <a:ln/>
+          <a:effectLst>
+            <a:outerShdw sx="100000" sy="100000" kx="0" ky="0" algn="bl" rotWithShape="0" blurRad="50800" dist="25400" dir="8100000">
+              <a:srgbClr val="000000">
+                <a:alpha val="10000"/>
+              </a:srgbClr>
+            </a:outerShdw>
+          </a:effectLst>
+        </p:spPr>
+      </p:sp>
+      <p:sp>
+        <p:nvSpPr>
+          <p:cNvPr id="20" name="Shape 18"/>
+          <p:cNvSpPr/>
+          <p:nvPr/>
+        </p:nvSpPr>
+        <p:spPr>
+          <a:xfrm>
+            <a:off x="6126480" y="1051560"/>
+            <a:ext cx="54864" cy="1600200"/>
+          </a:xfrm>
+          <a:prstGeom prst="rect">
+            <a:avLst/>
+          </a:prstGeom>
+          <a:solidFill>
+            <a:srgbClr val="16A34A"/>
+          </a:solidFill>
+          <a:ln/>
+        </p:spPr>
+      </p:sp>
+      <p:sp>
+        <p:nvSpPr>
+          <p:cNvPr id="21" name="Shape 19"/>
+          <p:cNvSpPr/>
+          <p:nvPr/>
+        </p:nvSpPr>
+        <p:spPr>
+          <a:xfrm>
+            <a:off x="7955280" y="1124712"/>
+            <a:ext cx="658368" cy="228600"/>
+          </a:xfrm>
+          <a:prstGeom prst="rect">
+            <a:avLst/>
+          </a:prstGeom>
+          <a:solidFill>
+            <a:srgbClr val="DCFCE7"/>
+          </a:solidFill>
+          <a:ln/>
+        </p:spPr>
+      </p:sp>
+      <p:sp>
+        <p:nvSpPr>
+          <p:cNvPr id="22" name="Text 20"/>
+          <p:cNvSpPr/>
+          <p:nvPr/>
+        </p:nvSpPr>
+        <p:spPr>
+          <a:xfrm>
+            <a:off x="7955280" y="1124712"/>
+            <a:ext cx="658368" cy="228600"/>
+          </a:xfrm>
+          <a:prstGeom prst="rect">
+            <a:avLst/>
+          </a:prstGeom>
+          <a:noFill/>
+          <a:ln/>
+        </p:spPr>
+        <p:txBody>
+          <a:bodyPr wrap="square" lIns="0" tIns="0" rIns="0" bIns="0" rtlCol="0" anchor="ctr"/>
+          <a:lstStyle/>
+          <a:p>
+            <a:pPr algn="ctr" indent="0" marL="0">
+              <a:buNone/>
+            </a:pPr>
+            <a:r>
+              <a:rPr lang="en-US" sz="900" b="1" dirty="0">
+                <a:solidFill>
+                  <a:srgbClr val="16A34A"/>
+                </a:solidFill>
+                <a:latin typeface="Arial" pitchFamily="34" charset="0"/>
+                <a:ea typeface="Arial" pitchFamily="34" charset="-122"/>
+                <a:cs typeface="Arial" pitchFamily="34" charset="-120"/>
+              </a:rPr>
+              <a:t>20件+</a:t>
+            </a:r>
+            <a:endParaRPr lang="en-US" sz="900" dirty="0"/>
+          </a:p>
+        </p:txBody>
+      </p:sp>
+      <p:sp>
+        <p:nvSpPr>
+          <p:cNvPr id="23" name="Text 21"/>
+          <p:cNvSpPr/>
+          <p:nvPr/>
+        </p:nvSpPr>
+        <p:spPr>
+          <a:xfrm>
+            <a:off x="6263640" y="1124712"/>
             <a:ext cx="1645920" cy="274320"/>
           </a:xfrm>
           <a:prstGeom prst="rect">
@@ -11033,13 +11239,13 @@
       </p:sp>
       <p:sp>
         <p:nvSpPr>
-          <p:cNvPr id="17" name="Text 15"/>
-          <p:cNvSpPr/>
-          <p:nvPr/>
-        </p:nvSpPr>
-        <p:spPr>
-          <a:xfrm>
-            <a:off x="3429000" y="1417320"/>
+          <p:cNvPr id="24" name="Text 22"/>
+          <p:cNvSpPr/>
+          <p:nvPr/>
+        </p:nvSpPr>
+        <p:spPr>
+          <a:xfrm>
+            <a:off x="6263640" y="1417320"/>
             <a:ext cx="2377440" cy="365760"/>
           </a:xfrm>
           <a:prstGeom prst="rect">
@@ -11072,13 +11278,13 @@
       </p:sp>
       <p:sp>
         <p:nvSpPr>
-          <p:cNvPr id="18" name="Text 16"/>
-          <p:cNvSpPr/>
-          <p:nvPr/>
-        </p:nvSpPr>
-        <p:spPr>
-          <a:xfrm>
-            <a:off x="3429000" y="1828800"/>
+          <p:cNvPr id="25" name="Text 23"/>
+          <p:cNvSpPr/>
+          <p:nvPr/>
+        </p:nvSpPr>
+        <p:spPr>
+          <a:xfrm>
+            <a:off x="6263640" y="1828800"/>
             <a:ext cx="2377440" cy="640080"/>
           </a:xfrm>
           <a:prstGeom prst="rect">
@@ -11111,13 +11317,13 @@
       </p:sp>
       <p:sp>
         <p:nvSpPr>
-          <p:cNvPr id="19" name="Shape 17"/>
-          <p:cNvSpPr/>
-          <p:nvPr/>
-        </p:nvSpPr>
-        <p:spPr>
-          <a:xfrm>
-            <a:off x="6126480" y="1051560"/>
+          <p:cNvPr id="26" name="Shape 24"/>
+          <p:cNvSpPr/>
+          <p:nvPr/>
+        </p:nvSpPr>
+        <p:spPr>
+          <a:xfrm>
+            <a:off x="457200" y="2880360"/>
             <a:ext cx="2651760" cy="1600200"/>
           </a:xfrm>
           <a:prstGeom prst="rect">
@@ -11138,13 +11344,13 @@
       </p:sp>
       <p:sp>
         <p:nvSpPr>
-          <p:cNvPr id="20" name="Shape 18"/>
-          <p:cNvSpPr/>
-          <p:nvPr/>
-        </p:nvSpPr>
-        <p:spPr>
-          <a:xfrm>
-            <a:off x="6126480" y="1051560"/>
+          <p:cNvPr id="27" name="Shape 25"/>
+          <p:cNvSpPr/>
+          <p:nvPr/>
+        </p:nvSpPr>
+        <p:spPr>
+          <a:xfrm>
+            <a:off x="457200" y="2880360"/>
             <a:ext cx="54864" cy="1600200"/>
           </a:xfrm>
           <a:prstGeom prst="rect">
@@ -11158,13 +11364,13 @@
       </p:sp>
       <p:sp>
         <p:nvSpPr>
-          <p:cNvPr id="21" name="Shape 19"/>
-          <p:cNvSpPr/>
-          <p:nvPr/>
-        </p:nvSpPr>
-        <p:spPr>
-          <a:xfrm>
-            <a:off x="7955280" y="1124712"/>
+          <p:cNvPr id="28" name="Shape 26"/>
+          <p:cNvSpPr/>
+          <p:nvPr/>
+        </p:nvSpPr>
+        <p:spPr>
+          <a:xfrm>
+            <a:off x="2286000" y="2953512"/>
             <a:ext cx="658368" cy="228600"/>
           </a:xfrm>
           <a:prstGeom prst="rect">
@@ -11178,13 +11384,13 @@
       </p:sp>
       <p:sp>
         <p:nvSpPr>
-          <p:cNvPr id="22" name="Text 20"/>
-          <p:cNvSpPr/>
-          <p:nvPr/>
-        </p:nvSpPr>
-        <p:spPr>
-          <a:xfrm>
-            <a:off x="7955280" y="1124712"/>
+          <p:cNvPr id="29" name="Text 27"/>
+          <p:cNvSpPr/>
+          <p:nvPr/>
+        </p:nvSpPr>
+        <p:spPr>
+          <a:xfrm>
+            <a:off x="2286000" y="2953512"/>
             <a:ext cx="658368" cy="228600"/>
           </a:xfrm>
           <a:prstGeom prst="rect">
@@ -11209,230 +11415,7 @@
                 <a:ea typeface="Arial" pitchFamily="34" charset="-122"/>
                 <a:cs typeface="Arial" pitchFamily="34" charset="-120"/>
               </a:rPr>
-              <a:t>50件+</a:t>
-            </a:r>
-            <a:endParaRPr lang="en-US" sz="900" dirty="0"/>
-          </a:p>
-        </p:txBody>
-      </p:sp>
-      <p:sp>
-        <p:nvSpPr>
-          <p:cNvPr id="23" name="Text 21"/>
-          <p:cNvSpPr/>
-          <p:nvPr/>
-        </p:nvSpPr>
-        <p:spPr>
-          <a:xfrm>
-            <a:off x="6263640" y="1124712"/>
-            <a:ext cx="1645920" cy="274320"/>
-          </a:xfrm>
-          <a:prstGeom prst="rect">
-            <a:avLst/>
-          </a:prstGeom>
-          <a:noFill/>
-          <a:ln/>
-        </p:spPr>
-        <p:txBody>
-          <a:bodyPr wrap="square" lIns="0" tIns="0" rIns="0" bIns="0" rtlCol="0" anchor="ctr"/>
-          <a:lstStyle/>
-          <a:p>
-            <a:pPr indent="0" marL="0">
-              <a:buNone/>
-            </a:pPr>
-            <a:r>
-              <a:rPr lang="en-US" sz="1300" b="1" dirty="0">
-                <a:solidFill>
-                  <a:srgbClr val="1A2744"/>
-                </a:solidFill>
-                <a:latin typeface="Arial" pitchFamily="34" charset="0"/>
-                <a:ea typeface="Arial" pitchFamily="34" charset="-122"/>
-                <a:cs typeface="Arial" pitchFamily="34" charset="-120"/>
-              </a:rPr>
-              <a:t>スタッフの対応</a:t>
-            </a:r>
-            <a:endParaRPr lang="en-US" sz="1300" dirty="0"/>
-          </a:p>
-        </p:txBody>
-      </p:sp>
-      <p:sp>
-        <p:nvSpPr>
-          <p:cNvPr id="24" name="Text 22"/>
-          <p:cNvSpPr/>
-          <p:nvPr/>
-        </p:nvSpPr>
-        <p:spPr>
-          <a:xfrm>
-            <a:off x="6263640" y="1417320"/>
-            <a:ext cx="2377440" cy="365760"/>
-          </a:xfrm>
-          <a:prstGeom prst="rect">
-            <a:avLst/>
-          </a:prstGeom>
-          <a:noFill/>
-          <a:ln/>
-        </p:spPr>
-        <p:txBody>
-          <a:bodyPr wrap="square" lIns="0" tIns="0" rIns="0" bIns="0" rtlCol="0" anchor="ctr"/>
-          <a:lstStyle/>
-          <a:p>
-            <a:pPr indent="0" marL="0">
-              <a:buNone/>
-            </a:pPr>
-            <a:r>
-              <a:rPr lang="en-US" sz="900" dirty="0">
-                <a:solidFill>
-                  <a:srgbClr val="64748B"/>
-                </a:solidFill>
-                <a:latin typeface="Arial" pitchFamily="34" charset="0"/>
-                <a:ea typeface="Arial" pitchFamily="34" charset="-122"/>
-                <a:cs typeface="Arial" pitchFamily="34" charset="-120"/>
-              </a:rPr>
-              <a:t>とにかくスタッフに電話したら、とても親切に対応してくれて、対応してくれたのはありがたかったのですが、エアコンの音は...</a:t>
-            </a:r>
-            <a:endParaRPr lang="en-US" sz="900" dirty="0"/>
-          </a:p>
-        </p:txBody>
-      </p:sp>
-      <p:sp>
-        <p:nvSpPr>
-          <p:cNvPr id="25" name="Text 23"/>
-          <p:cNvSpPr/>
-          <p:nvPr/>
-        </p:nvSpPr>
-        <p:spPr>
-          <a:xfrm>
-            <a:off x="6263640" y="1828800"/>
-            <a:ext cx="2377440" cy="640080"/>
-          </a:xfrm>
-          <a:prstGeom prst="rect">
-            <a:avLst/>
-          </a:prstGeom>
-          <a:noFill/>
-          <a:ln/>
-        </p:spPr>
-        <p:txBody>
-          <a:bodyPr wrap="square" lIns="0" tIns="0" rIns="0" bIns="0" rtlCol="0" anchor="ctr"/>
-          <a:lstStyle/>
-          <a:p>
-            <a:pPr indent="0" marL="0">
-              <a:buNone/>
-            </a:pPr>
-            <a:r>
-              <a:rPr lang="en-US" sz="900" i="1" dirty="0">
-                <a:solidFill>
-                  <a:srgbClr val="3B7DD8"/>
-                </a:solidFill>
-                <a:latin typeface="Arial" pitchFamily="34" charset="0"/>
-                <a:ea typeface="Arial" pitchFamily="34" charset="-122"/>
-                <a:cs typeface="Arial" pitchFamily="34" charset="-120"/>
-              </a:rPr>
-              <a:t>「チェックイン後、アメニティを選んでいたらスタッフの方が子供用の可愛いアメニティを持ってきてくださり、その他にも塗り...」</a:t>
-            </a:r>
-            <a:endParaRPr lang="en-US" sz="900" dirty="0"/>
-          </a:p>
-        </p:txBody>
-      </p:sp>
-      <p:sp>
-        <p:nvSpPr>
-          <p:cNvPr id="26" name="Shape 24"/>
-          <p:cNvSpPr/>
-          <p:nvPr/>
-        </p:nvSpPr>
-        <p:spPr>
-          <a:xfrm>
-            <a:off x="457200" y="2880360"/>
-            <a:ext cx="2651760" cy="1600200"/>
-          </a:xfrm>
-          <a:prstGeom prst="rect">
-            <a:avLst/>
-          </a:prstGeom>
-          <a:solidFill>
-            <a:srgbClr val="FFFFFF"/>
-          </a:solidFill>
-          <a:ln/>
-          <a:effectLst>
-            <a:outerShdw sx="100000" sy="100000" kx="0" ky="0" algn="bl" rotWithShape="0" blurRad="50800" dist="25400" dir="8100000">
-              <a:srgbClr val="000000">
-                <a:alpha val="10000"/>
-              </a:srgbClr>
-            </a:outerShdw>
-          </a:effectLst>
-        </p:spPr>
-      </p:sp>
-      <p:sp>
-        <p:nvSpPr>
-          <p:cNvPr id="27" name="Shape 25"/>
-          <p:cNvSpPr/>
-          <p:nvPr/>
-        </p:nvSpPr>
-        <p:spPr>
-          <a:xfrm>
-            <a:off x="457200" y="2880360"/>
-            <a:ext cx="54864" cy="1600200"/>
-          </a:xfrm>
-          <a:prstGeom prst="rect">
-            <a:avLst/>
-          </a:prstGeom>
-          <a:solidFill>
-            <a:srgbClr val="16A34A"/>
-          </a:solidFill>
-          <a:ln/>
-        </p:spPr>
-      </p:sp>
-      <p:sp>
-        <p:nvSpPr>
-          <p:cNvPr id="28" name="Shape 26"/>
-          <p:cNvSpPr/>
-          <p:nvPr/>
-        </p:nvSpPr>
-        <p:spPr>
-          <a:xfrm>
-            <a:off x="2286000" y="2953512"/>
-            <a:ext cx="658368" cy="228600"/>
-          </a:xfrm>
-          <a:prstGeom prst="rect">
-            <a:avLst/>
-          </a:prstGeom>
-          <a:solidFill>
-            <a:srgbClr val="DCFCE7"/>
-          </a:solidFill>
-          <a:ln/>
-        </p:spPr>
-      </p:sp>
-      <p:sp>
-        <p:nvSpPr>
-          <p:cNvPr id="29" name="Text 27"/>
-          <p:cNvSpPr/>
-          <p:nvPr/>
-        </p:nvSpPr>
-        <p:spPr>
-          <a:xfrm>
-            <a:off x="2286000" y="2953512"/>
-            <a:ext cx="658368" cy="228600"/>
-          </a:xfrm>
-          <a:prstGeom prst="rect">
-            <a:avLst/>
-          </a:prstGeom>
-          <a:noFill/>
-          <a:ln/>
-        </p:spPr>
-        <p:txBody>
-          <a:bodyPr wrap="square" lIns="0" tIns="0" rIns="0" bIns="0" rtlCol="0" anchor="ctr"/>
-          <a:lstStyle/>
-          <a:p>
-            <a:pPr algn="ctr" indent="0" marL="0">
-              <a:buNone/>
-            </a:pPr>
-            <a:r>
-              <a:rPr lang="en-US" sz="900" b="1" dirty="0">
-                <a:solidFill>
-                  <a:srgbClr val="16A34A"/>
-                </a:solidFill>
-                <a:latin typeface="Arial" pitchFamily="34" charset="0"/>
-                <a:ea typeface="Arial" pitchFamily="34" charset="-122"/>
-                <a:cs typeface="Arial" pitchFamily="34" charset="-120"/>
-              </a:rPr>
-              <a:t>20件+</a:t>
+              <a:t>10件+</a:t>
             </a:r>
             <a:endParaRPr lang="en-US" sz="900" dirty="0"/>
           </a:p>
@@ -11655,7 +11638,7 @@
                 <a:ea typeface="Arial" pitchFamily="34" charset="-122"/>
                 <a:cs typeface="Arial" pitchFamily="34" charset="-120"/>
               </a:rPr>
-              <a:t>20件+</a:t>
+              <a:t>10件+</a:t>
             </a:r>
             <a:endParaRPr lang="en-US" sz="900" dirty="0"/>
           </a:p>
@@ -11878,7 +11861,7 @@
                 <a:ea typeface="Arial" pitchFamily="34" charset="-122"/>
                 <a:cs typeface="Arial" pitchFamily="34" charset="-120"/>
               </a:rPr>
-              <a:t>20件+</a:t>
+              <a:t>10件+</a:t>
             </a:r>
             <a:endParaRPr lang="en-US" sz="900" dirty="0"/>
           </a:p>
@@ -11917,7 +11900,7 @@
                 <a:ea typeface="Arial" pitchFamily="34" charset="-122"/>
                 <a:cs typeface="Arial" pitchFamily="34" charset="-120"/>
               </a:rPr>
-              <a:t>コンビニ・周辺施設</a:t>
+              <a:t>コストパフォーマンス</a:t>
             </a:r>
             <a:endParaRPr lang="en-US" sz="1300" dirty="0"/>
           </a:p>
@@ -11956,7 +11939,7 @@
                 <a:ea typeface="Arial" pitchFamily="34" charset="-122"/>
                 <a:cs typeface="Arial" pitchFamily="34" charset="-120"/>
               </a:rPr>
-              <a:t>途中にローソンがあり、池袋から1駅、新宿から3駅と非常に便利な立地です</a:t>
+              <a:t>部屋は小さいですが、基本的なアメニティはすべて揃っているので、コストパフォーマンスに優れています</a:t>
             </a:r>
             <a:endParaRPr lang="en-US" sz="900" dirty="0"/>
           </a:p>
@@ -11995,7 +11978,7 @@
                 <a:ea typeface="Arial" pitchFamily="34" charset="-122"/>
                 <a:cs typeface="Arial" pitchFamily="34" charset="-120"/>
               </a:rPr>
-              <a:t>「近隣には松本清、ココナ、赤いローソンコンビニエンスストアがあります」</a:t>
+              <a:t>「素敵でお手頃価格 素敵でお手頃価格」</a:t>
             </a:r>
             <a:endParaRPr lang="en-US" sz="900" dirty="0"/>
           </a:p>
@@ -12753,7 +12736,7 @@
                           <a:ea typeface="Arial" pitchFamily="34" charset="-122"/>
                           <a:cs typeface="Arial" pitchFamily="34" charset="-120"/>
                         </a:rPr>
-                        <a:t>22件</a:t>
+                        <a:t>16件</a:t>
                       </a:r>
                       <a:endParaRPr lang="en-US" sz="900" dirty="0">
                         <a:latin typeface="Arial" charset="0"/>
@@ -13027,7 +13010,7 @@
                           <a:ea typeface="Arial" pitchFamily="34" charset="-122"/>
                           <a:cs typeface="Arial" pitchFamily="34" charset="-120"/>
                         </a:rPr>
-                        <a:t>19件</a:t>
+                        <a:t>9件</a:t>
                       </a:r>
                       <a:endParaRPr lang="en-US" sz="900" dirty="0">
                         <a:latin typeface="Arial" charset="0"/>
@@ -13165,7 +13148,7 @@
                           <a:ea typeface="Arial" pitchFamily="34" charset="-122"/>
                           <a:cs typeface="Arial" pitchFamily="34" charset="-120"/>
                         </a:rPr>
-                        <a:t>設備の老朽化</a:t>
+                        <a:t>防音性能</a:t>
                       </a:r>
                       <a:endParaRPr lang="en-US" sz="900" dirty="0">
                         <a:latin typeface="Arial" charset="0"/>
@@ -13233,7 +13216,7 @@
                           <a:ea typeface="Arial" pitchFamily="34" charset="-122"/>
                           <a:cs typeface="Arial" pitchFamily="34" charset="-120"/>
                         </a:rPr>
-                        <a:t>部屋はやや年季が入っていますが、きれいに掃除されておりました</a:t>
+                        <a:t>ああ、エアコンの音がうるさくてよく眠れません</a:t>
                       </a:r>
                       <a:endParaRPr lang="en-US" sz="900" dirty="0">
                         <a:latin typeface="Arial" charset="0"/>
@@ -13301,7 +13284,7 @@
                           <a:ea typeface="Arial" pitchFamily="34" charset="-122"/>
                           <a:cs typeface="Arial" pitchFamily="34" charset="-120"/>
                         </a:rPr>
-                        <a:t>10件</a:t>
+                        <a:t>4件</a:t>
                       </a:r>
                       <a:endParaRPr lang="en-US" sz="900" dirty="0">
                         <a:latin typeface="Arial" charset="0"/>
@@ -13575,7 +13558,7 @@
                           <a:ea typeface="Arial" pitchFamily="34" charset="-122"/>
                           <a:cs typeface="Arial" pitchFamily="34" charset="-120"/>
                         </a:rPr>
-                        <a:t>9件</a:t>
+                        <a:t>4件</a:t>
                       </a:r>
                       <a:endParaRPr lang="en-US" sz="900" dirty="0">
                         <a:latin typeface="Arial" charset="0"/>
@@ -13713,7 +13696,7 @@
                           <a:ea typeface="Arial" pitchFamily="34" charset="-122"/>
                           <a:cs typeface="Arial" pitchFamily="34" charset="-120"/>
                         </a:rPr>
-                        <a:t>防音性能</a:t>
+                        <a:t>部屋の狭さ</a:t>
                       </a:r>
                       <a:endParaRPr lang="en-US" sz="900" dirty="0">
                         <a:latin typeface="Arial" charset="0"/>
@@ -13781,7 +13764,7 @@
                           <a:ea typeface="Arial" pitchFamily="34" charset="-122"/>
                           <a:cs typeface="Arial" pitchFamily="34" charset="-120"/>
                         </a:rPr>
-                        <a:t>ああ、エアコンの音がうるさくてよく眠れません</a:t>
+                        <a:t>部屋は小さいですが、基本的なアメニティはすべて揃っているので、コストパフォーマンスに優れています</a:t>
                       </a:r>
                       <a:endParaRPr lang="en-US" sz="900" dirty="0">
                         <a:latin typeface="Arial" charset="0"/>
@@ -13849,7 +13832,7 @@
                           <a:ea typeface="Arial" pitchFamily="34" charset="-122"/>
                           <a:cs typeface="Arial" pitchFamily="34" charset="-120"/>
                         </a:rPr>
-                        <a:t>6件</a:t>
+                        <a:t>3件</a:t>
                       </a:r>
                       <a:endParaRPr lang="en-US" sz="900" dirty="0">
                         <a:latin typeface="Arial" charset="0"/>
@@ -13987,7 +13970,7 @@
                           <a:ea typeface="Arial" pitchFamily="34" charset="-122"/>
                           <a:cs typeface="Arial" pitchFamily="34" charset="-120"/>
                         </a:rPr>
-                        <a:t>部屋の狭さ</a:t>
+                        <a:t>窓・採光</a:t>
                       </a:r>
                       <a:endParaRPr lang="en-US" sz="900" dirty="0">
                         <a:latin typeface="Arial" charset="0"/>
@@ -14055,7 +14038,7 @@
                           <a:ea typeface="Arial" pitchFamily="34" charset="-122"/>
                           <a:cs typeface="Arial" pitchFamily="34" charset="-120"/>
                         </a:rPr>
-                        <a:t>部屋は小さいですが、基本的なアメニティはすべて揃っているので、コストパフォーマンスに優れています</a:t>
+                        <a:t>窓がない部屋だったので寝泊まりだけでは充分ですがホテル滞在メインだと部屋有りのとこがいいかもです</a:t>
                       </a:r>
                       <a:endParaRPr lang="en-US" sz="900" dirty="0">
                         <a:latin typeface="Arial" charset="0"/>
@@ -14123,7 +14106,7 @@
                           <a:ea typeface="Arial" pitchFamily="34" charset="-122"/>
                           <a:cs typeface="Arial" pitchFamily="34" charset="-120"/>
                         </a:rPr>
-                        <a:t>5件</a:t>
+                        <a:t>3件</a:t>
                       </a:r>
                       <a:endParaRPr lang="en-US" sz="900" dirty="0">
                         <a:latin typeface="Arial" charset="0"/>
@@ -14261,7 +14244,7 @@
                           <a:ea typeface="Arial" pitchFamily="34" charset="-122"/>
                           <a:cs typeface="Arial" pitchFamily="34" charset="-120"/>
                         </a:rPr>
-                        <a:t>窓・採光</a:t>
+                        <a:t>設備の老朽化</a:t>
                       </a:r>
                       <a:endParaRPr lang="en-US" sz="900" dirty="0">
                         <a:latin typeface="Arial" charset="0"/>
@@ -14329,7 +14312,7 @@
                           <a:ea typeface="Arial" pitchFamily="34" charset="-122"/>
                           <a:cs typeface="Arial" pitchFamily="34" charset="-120"/>
                         </a:rPr>
-                        <a:t>窓がない部屋だったので寝泊まりだけでは充分ですがホテル滞在メインだと部屋有りのとこがいいかもです</a:t>
+                        <a:t>部屋はやや年季が入っていますが、きれいに掃除されておりました</a:t>
                       </a:r>
                       <a:endParaRPr lang="en-US" sz="900" dirty="0">
                         <a:latin typeface="Arial" charset="0"/>
@@ -14397,7 +14380,7 @@
                           <a:ea typeface="Arial" pitchFamily="34" charset="-122"/>
                           <a:cs typeface="Arial" pitchFamily="34" charset="-120"/>
                         </a:rPr>
-                        <a:t>4件</a:t>
+                        <a:t>2件</a:t>
                       </a:r>
                       <a:endParaRPr lang="en-US" sz="900" dirty="0">
                         <a:latin typeface="Arial" charset="0"/>
@@ -14535,7 +14518,7 @@
                           <a:ea typeface="Arial" pitchFamily="34" charset="-122"/>
                           <a:cs typeface="Arial" pitchFamily="34" charset="-120"/>
                         </a:rPr>
-                        <a:t>清掃不備</a:t>
+                        <a:t>朝食の改善要望</a:t>
                       </a:r>
                       <a:endParaRPr lang="en-US" sz="900" dirty="0">
                         <a:latin typeface="Arial" charset="0"/>
@@ -14603,7 +14586,7 @@
                           <a:ea typeface="Arial" pitchFamily="34" charset="-122"/>
                           <a:cs typeface="Arial" pitchFamily="34" charset="-120"/>
                         </a:rPr>
-                        <a:t>汚いです 汚いです</a:t>
+                        <a:t>宿泊者サービスがどこもウェルカムドリンクでチェックイン時には終わっていることがほどんどでしたが、こちらは朝食時にホ...</a:t>
                       </a:r>
                       <a:endParaRPr lang="en-US" sz="900" dirty="0">
                         <a:latin typeface="Arial" charset="0"/>
@@ -14671,7 +14654,7 @@
                           <a:ea typeface="Arial" pitchFamily="34" charset="-122"/>
                           <a:cs typeface="Arial" pitchFamily="34" charset="-120"/>
                         </a:rPr>
-                        <a:t>4件</a:t>
+                        <a:t>2件</a:t>
                       </a:r>
                       <a:endParaRPr lang="en-US" sz="900" dirty="0">
                         <a:latin typeface="Arial" charset="0"/>
@@ -14809,7 +14792,7 @@
                           <a:ea typeface="Arial" pitchFamily="34" charset="-122"/>
                           <a:cs typeface="Arial" pitchFamily="34" charset="-120"/>
                         </a:rPr>
-                        <a:t>臭い・匂い</a:t>
+                        <a:t>清掃不備</a:t>
                       </a:r>
                       <a:endParaRPr lang="en-US" sz="900" dirty="0">
                         <a:latin typeface="Arial" charset="0"/>
@@ -14877,7 +14860,7 @@
                           <a:ea typeface="Arial" pitchFamily="34" charset="-122"/>
                           <a:cs typeface="Arial" pitchFamily="34" charset="-120"/>
                         </a:rPr>
-                        <a:t>お部屋もタバコの匂いは気にならなかったので良かったです</a:t>
+                        <a:t>汚いです 汚いです</a:t>
                       </a:r>
                       <a:endParaRPr lang="en-US" sz="900" dirty="0">
                         <a:latin typeface="Arial" charset="0"/>
@@ -14945,7 +14928,7 @@
                           <a:ea typeface="Arial" pitchFamily="34" charset="-122"/>
                           <a:cs typeface="Arial" pitchFamily="34" charset="-120"/>
                         </a:rPr>
-                        <a:t>3件</a:t>
+                        <a:t>2件</a:t>
                       </a:r>
                       <a:endParaRPr lang="en-US" sz="900" dirty="0">
                         <a:latin typeface="Arial" charset="0"/>

--- a/納品レポート/ホテル別レポート/richmond_mejiro_口コミ分析レポート.pptx
+++ b/納品レポート/ホテル別レポート/richmond_mejiro_口コミ分析レポート.pptx
@@ -180,22 +180,22 @@
                 <c:ptCount val="6"/>
                 <c:lvl>
                   <c:pt idx="0">
+                    <c:v>Trip.com</c:v>
+                  </c:pt>
+                  <c:pt idx="1">
                     <c:v>Agoda</c:v>
                   </c:pt>
-                  <c:pt idx="1">
-                    <c:v>Trip.com</c:v>
+                  <c:pt idx="2">
+                    <c:v>じゃらん</c:v>
                   </c:pt>
-                  <c:pt idx="2">
+                  <c:pt idx="3">
                     <c:v>Google</c:v>
                   </c:pt>
-                  <c:pt idx="3">
+                  <c:pt idx="4">
                     <c:v>楽天トラベル</c:v>
                   </c:pt>
-                  <c:pt idx="4">
+                  <c:pt idx="5">
                     <c:v>Booking.com</c:v>
-                  </c:pt>
-                  <c:pt idx="5">
-                    <c:v>じゃらん</c:v>
                   </c:pt>
                 </c:lvl>
               </c:multiLvlStrCache>
@@ -208,22 +208,22 @@
                 <c:formatCode>General</c:formatCode>
                 <c:ptCount val="6"/>
                 <c:pt idx="0">
-                  <c:v>10</c:v>
+                  <c:v>9.45</c:v>
                 </c:pt>
                 <c:pt idx="1">
-                  <c:v>9.48</c:v>
+                  <c:v>9.33</c:v>
                 </c:pt>
                 <c:pt idx="2">
-                  <c:v>8.4</c:v>
+                  <c:v>8.62</c:v>
                 </c:pt>
                 <c:pt idx="3">
-                  <c:v>8</c:v>
+                  <c:v>8.5</c:v>
                 </c:pt>
                 <c:pt idx="4">
-                  <c:v>7.86</c:v>
+                  <c:v>8.25</c:v>
                 </c:pt>
                 <c:pt idx="5">
-                  <c:v>7.83</c:v>
+                  <c:v>7.74</c:v>
                 </c:pt>
               </c:numCache>
             </c:numRef>
@@ -566,13 +566,13 @@
               <c:numCache>
                 <c:ptCount val="3"/>
                 <c:pt idx="0">
-                  <c:v>61</c:v>
+                  <c:v>125</c:v>
                 </c:pt>
                 <c:pt idx="1">
-                  <c:v>9</c:v>
+                  <c:v>16</c:v>
                 </c:pt>
                 <c:pt idx="2">
-                  <c:v>3</c:v>
+                  <c:v>5</c:v>
                 </c:pt>
               </c:numCache>
             </c:numRef>
@@ -768,11 +768,22 @@
               <a:effectLst/>
             </c:spPr>
           </c:dPt>
+          <c:dPt>
+            <c:idx val="8"/>
+            <c:invertIfNegative val="0"/>
+            <c:bubble3D val="0"/>
+            <c:spPr>
+              <a:solidFill>
+                <a:srgbClr val="DC2626"/>
+              </a:solidFill>
+              <a:effectLst/>
+            </c:spPr>
+          </c:dPt>
           <c:cat>
             <c:multiLvlStrRef>
-              <c:f>Sheet1!$A$2:$A$9</c:f>
+              <c:f>Sheet1!$A$2:$A$10</c:f>
               <c:multiLvlStrCache>
-                <c:ptCount val="8"/>
+                <c:ptCount val="9"/>
                 <c:lvl>
                   <c:pt idx="0">
                     <c:v>10点</c:v>
@@ -793,9 +804,12 @@
                     <c:v>5点</c:v>
                   </c:pt>
                   <c:pt idx="6">
+                    <c:v>4点</c:v>
+                  </c:pt>
+                  <c:pt idx="7">
                     <c:v>3点</c:v>
                   </c:pt>
-                  <c:pt idx="7">
+                  <c:pt idx="8">
                     <c:v>2点</c:v>
                   </c:pt>
                 </c:lvl>
@@ -804,33 +818,36 @@
           </c:cat>
           <c:val>
             <c:numRef>
-              <c:f>Sheet1!$B$2:$B$9</c:f>
+              <c:f>Sheet1!$B$2:$B$10</c:f>
               <c:numCache>
                 <c:formatCode>General</c:formatCode>
-                <c:ptCount val="8"/>
+                <c:ptCount val="9"/>
                 <c:pt idx="0">
-                  <c:v>30</c:v>
+                  <c:v>64</c:v>
                 </c:pt>
                 <c:pt idx="1">
-                  <c:v>9</c:v>
+                  <c:v>15</c:v>
                 </c:pt>
                 <c:pt idx="2">
-                  <c:v>22</c:v>
+                  <c:v>46</c:v>
                 </c:pt>
                 <c:pt idx="3">
-                  <c:v>4</c:v>
+                  <c:v>7</c:v>
                 </c:pt>
                 <c:pt idx="4">
-                  <c:v>3</c:v>
+                  <c:v>5</c:v>
                 </c:pt>
                 <c:pt idx="5">
-                  <c:v>2</c:v>
+                  <c:v>4</c:v>
                 </c:pt>
                 <c:pt idx="6">
                   <c:v>1</c:v>
                 </c:pt>
                 <c:pt idx="7">
-                  <c:v>2</c:v>
+                  <c:v>1</c:v>
+                </c:pt>
+                <c:pt idx="8">
+                  <c:v>3</c:v>
                 </c:pt>
               </c:numCache>
             </c:numRef>
@@ -2761,7 +2778,7 @@
                 <a:ea typeface="Arial" pitchFamily="34" charset="-122"/>
                 <a:cs typeface="Arial" pitchFamily="34" charset="-120"/>
               </a:rPr>
-              <a:t>分析対象期間：2026年3月</a:t>
+              <a:t>分析対象期間：2026年2月〜3月</a:t>
             </a:r>
             <a:endParaRPr lang="en-US" sz="1000" dirty="0"/>
           </a:p>
@@ -2781,7 +2798,7 @@
                 <a:ea typeface="Arial" pitchFamily="34" charset="-122"/>
                 <a:cs typeface="Arial" pitchFamily="34" charset="-120"/>
               </a:rPr>
-              <a:t>レビュー総数：73件（6サイト）</a:t>
+              <a:t>レビュー総数：146件（6サイト）</a:t>
             </a:r>
             <a:endParaRPr lang="en-US" sz="1000" dirty="0"/>
           </a:p>
@@ -3347,7 +3364,7 @@
                           <a:ea typeface="Arial" pitchFamily="34" charset="-122"/>
                           <a:cs typeface="Arial" pitchFamily="34" charset="-120"/>
                         </a:rPr>
-                        <a:t>8.49点</a:t>
+                        <a:t>8.60点</a:t>
                       </a:r>
                       <a:endParaRPr lang="en-US" sz="1000" dirty="0">
                         <a:latin typeface="Arial" charset="0"/>
@@ -3415,7 +3432,7 @@
                           <a:ea typeface="Arial" pitchFamily="34" charset="-122"/>
                           <a:cs typeface="Arial" pitchFamily="34" charset="-120"/>
                         </a:rPr>
-                        <a:t>8.8点以上</a:t>
+                        <a:t>8.9点以上</a:t>
                       </a:r>
                       <a:endParaRPr lang="en-US" sz="1000" dirty="0">
                         <a:latin typeface="Arial" charset="0"/>
@@ -3621,7 +3638,7 @@
                           <a:ea typeface="Arial" pitchFamily="34" charset="-122"/>
                           <a:cs typeface="Arial" pitchFamily="34" charset="-120"/>
                         </a:rPr>
-                        <a:t>83.6%</a:t>
+                        <a:t>85.6%</a:t>
                       </a:r>
                       <a:endParaRPr lang="en-US" sz="1000" dirty="0">
                         <a:latin typeface="Arial" charset="0"/>
@@ -3689,7 +3706,7 @@
                           <a:ea typeface="Arial" pitchFamily="34" charset="-122"/>
                           <a:cs typeface="Arial" pitchFamily="34" charset="-120"/>
                         </a:rPr>
-                        <a:t>89%以上</a:t>
+                        <a:t>91%以上</a:t>
                       </a:r>
                       <a:endParaRPr lang="en-US" sz="1000" dirty="0">
                         <a:latin typeface="Arial" charset="0"/>
@@ -3895,7 +3912,7 @@
                           <a:ea typeface="Arial" pitchFamily="34" charset="-122"/>
                           <a:cs typeface="Arial" pitchFamily="34" charset="-120"/>
                         </a:rPr>
-                        <a:t>4.1%</a:t>
+                        <a:t>3.4%</a:t>
                       </a:r>
                       <a:endParaRPr lang="en-US" sz="1000" dirty="0">
                         <a:latin typeface="Arial" charset="0"/>
@@ -3963,7 +3980,7 @@
                           <a:ea typeface="Arial" pitchFamily="34" charset="-122"/>
                           <a:cs typeface="Arial" pitchFamily="34" charset="-120"/>
                         </a:rPr>
-                        <a:t>1%以下</a:t>
+                        <a:t>0%以下</a:t>
                       </a:r>
                       <a:endParaRPr lang="en-US" sz="1000" dirty="0">
                         <a:latin typeface="Arial" charset="0"/>
@@ -4101,7 +4118,7 @@
                           <a:ea typeface="Arial" pitchFamily="34" charset="-122"/>
                           <a:cs typeface="Arial" pitchFamily="34" charset="-120"/>
                         </a:rPr>
-                        <a:t>じゃらん平均評価</a:t>
+                        <a:t>Booking.com平均評価</a:t>
                       </a:r>
                       <a:endParaRPr lang="en-US" sz="1000" dirty="0">
                         <a:latin typeface="Arial" charset="0"/>
@@ -4169,7 +4186,7 @@
                           <a:ea typeface="Arial" pitchFamily="34" charset="-122"/>
                           <a:cs typeface="Arial" pitchFamily="34" charset="-120"/>
                         </a:rPr>
-                        <a:t>7.8点</a:t>
+                        <a:t>7.7点</a:t>
                       </a:r>
                       <a:endParaRPr lang="en-US" sz="1000" dirty="0">
                         <a:latin typeface="Arial" charset="0"/>
@@ -4237,7 +4254,7 @@
                           <a:ea typeface="Arial" pitchFamily="34" charset="-122"/>
                           <a:cs typeface="Arial" pitchFamily="34" charset="-120"/>
                         </a:rPr>
-                        <a:t>8.8点以上</a:t>
+                        <a:t>8.7点以上</a:t>
                       </a:r>
                       <a:endParaRPr lang="en-US" sz="1000" dirty="0">
                         <a:latin typeface="Arial" charset="0"/>
@@ -4717,7 +4734,7 @@
                           <a:ea typeface="Arial" pitchFamily="34" charset="-122"/>
                           <a:cs typeface="Arial" pitchFamily="34" charset="-120"/>
                         </a:rPr>
-                        <a:t>約16件/期間</a:t>
+                        <a:t>約22件/期間</a:t>
                       </a:r>
                       <a:endParaRPr lang="en-US" sz="1000" dirty="0">
                         <a:latin typeface="Arial" charset="0"/>
@@ -4785,7 +4802,7 @@
                           <a:ea typeface="Arial" pitchFamily="34" charset="-122"/>
                           <a:cs typeface="Arial" pitchFamily="34" charset="-120"/>
                         </a:rPr>
-                        <a:t>8件以下</a:t>
+                        <a:t>11件以下</a:t>
                       </a:r>
                       <a:endParaRPr lang="en-US" sz="1000" dirty="0">
                         <a:latin typeface="Arial" charset="0"/>
@@ -5356,7 +5373,7 @@
                 <a:ea typeface="Arial" pitchFamily="34" charset="-122"/>
                 <a:cs typeface="Arial" pitchFamily="34" charset="-120"/>
               </a:rPr>
-              <a:t>8.49</a:t>
+              <a:t>8.60</a:t>
             </a:r>
             <a:endParaRPr lang="en-US" sz="3200" dirty="0"/>
           </a:p>
@@ -5481,7 +5498,7 @@
                 <a:ea typeface="Arial" pitchFamily="34" charset="-122"/>
                 <a:cs typeface="Arial" pitchFamily="34" charset="-120"/>
               </a:rPr>
-              <a:t>83.6%</a:t>
+              <a:t>85.6%</a:t>
             </a:r>
             <a:endParaRPr lang="en-US" sz="3200" dirty="0"/>
           </a:p>
@@ -5606,7 +5623,7 @@
                 <a:ea typeface="Arial" pitchFamily="34" charset="-122"/>
                 <a:cs typeface="Arial" pitchFamily="34" charset="-120"/>
               </a:rPr>
-              <a:t>4.1%</a:t>
+              <a:t>3.4%</a:t>
             </a:r>
             <a:endParaRPr lang="en-US" sz="3200" dirty="0"/>
           </a:p>
@@ -5731,7 +5748,7 @@
                 <a:ea typeface="Arial" pitchFamily="34" charset="-122"/>
                 <a:cs typeface="Arial" pitchFamily="34" charset="-120"/>
               </a:rPr>
-              <a:t>73件</a:t>
+              <a:t>146件</a:t>
             </a:r>
             <a:endParaRPr lang="en-US" sz="3200" dirty="0"/>
           </a:p>
@@ -5899,6 +5916,46 @@
                 <a:ea typeface="Arial" pitchFamily="34" charset="-122"/>
                 <a:cs typeface="Arial" pitchFamily="34" charset="-120"/>
               </a:rPr>
+              <a:t>快適さ・設備 </a:t>
+            </a:r>
+            <a:endParaRPr lang="en-US" sz="1100" dirty="0"/>
+          </a:p>
+          <a:p>
+            <a:pPr indent="0" marL="0">
+              <a:spcAft>
+                <a:spcPts val="200"/>
+              </a:spcAft>
+              <a:buNone/>
+            </a:pPr>
+            <a:r>
+              <a:rPr lang="en-US" sz="900" dirty="0">
+                <a:solidFill>
+                  <a:srgbClr val="64748B"/>
+                </a:solidFill>
+                <a:latin typeface="Arial" pitchFamily="34" charset="0"/>
+                <a:ea typeface="Arial" pitchFamily="34" charset="-122"/>
+                <a:cs typeface="Arial" pitchFamily="34" charset="-120"/>
+              </a:rPr>
+              <a:t>  ベッドが少し堅かった</a:t>
+            </a:r>
+            <a:endParaRPr lang="en-US" sz="1100" dirty="0"/>
+          </a:p>
+          <a:p>
+            <a:pPr indent="0" marL="0">
+              <a:spcAft>
+                <a:spcPts val="200"/>
+              </a:spcAft>
+              <a:buNone/>
+            </a:pPr>
+            <a:r>
+              <a:rPr lang="en-US" sz="1100" b="1" dirty="0">
+                <a:solidFill>
+                  <a:srgbClr val="334155"/>
+                </a:solidFill>
+                <a:latin typeface="Arial" pitchFamily="34" charset="0"/>
+                <a:ea typeface="Arial" pitchFamily="34" charset="-122"/>
+                <a:cs typeface="Arial" pitchFamily="34" charset="-120"/>
+              </a:rPr>
               <a:t>スタッフの対応 </a:t>
             </a:r>
             <a:endParaRPr lang="en-US" sz="1100" dirty="0"/>
@@ -5923,46 +5980,6 @@
             </a:r>
             <a:endParaRPr lang="en-US" sz="1100" dirty="0"/>
           </a:p>
-          <a:p>
-            <a:pPr indent="0" marL="0">
-              <a:spcAft>
-                <a:spcPts val="200"/>
-              </a:spcAft>
-              <a:buNone/>
-            </a:pPr>
-            <a:r>
-              <a:rPr lang="en-US" sz="1100" b="1" dirty="0">
-                <a:solidFill>
-                  <a:srgbClr val="334155"/>
-                </a:solidFill>
-                <a:latin typeface="Arial" pitchFamily="34" charset="0"/>
-                <a:ea typeface="Arial" pitchFamily="34" charset="-122"/>
-                <a:cs typeface="Arial" pitchFamily="34" charset="-120"/>
-              </a:rPr>
-              <a:t>快適さ・設備 </a:t>
-            </a:r>
-            <a:endParaRPr lang="en-US" sz="1100" dirty="0"/>
-          </a:p>
-          <a:p>
-            <a:pPr indent="0" marL="0">
-              <a:spcAft>
-                <a:spcPts val="200"/>
-              </a:spcAft>
-              <a:buNone/>
-            </a:pPr>
-            <a:r>
-              <a:rPr lang="en-US" sz="900" dirty="0">
-                <a:solidFill>
-                  <a:srgbClr val="64748B"/>
-                </a:solidFill>
-                <a:latin typeface="Arial" pitchFamily="34" charset="0"/>
-                <a:ea typeface="Arial" pitchFamily="34" charset="-122"/>
-                <a:cs typeface="Arial" pitchFamily="34" charset="-120"/>
-              </a:rPr>
-              <a:t>  ベッドが少し堅かった</a:t>
-            </a:r>
-            <a:endParaRPr lang="en-US" sz="1100" dirty="0"/>
-          </a:p>
         </p:txBody>
       </p:sp>
       <p:sp>
@@ -6167,7 +6184,7 @@
                 <a:ea typeface="Arial" pitchFamily="34" charset="-122"/>
                 <a:cs typeface="Arial" pitchFamily="34" charset="-120"/>
               </a:rPr>
-              <a:t>防音性能 </a:t>
+              <a:t>設備の老朽化 </a:t>
             </a:r>
             <a:endParaRPr lang="en-US" sz="1100" dirty="0"/>
           </a:p>
@@ -6187,7 +6204,7 @@
                 <a:ea typeface="Arial" pitchFamily="34" charset="-122"/>
                 <a:cs typeface="Arial" pitchFamily="34" charset="-120"/>
               </a:rPr>
-              <a:t>  ああ、エアコンの音がうるさくてよく眠れません</a:t>
+              <a:t>  部屋はやや年季が入っていますが、きれいに掃除されておりました</a:t>
             </a:r>
             <a:endParaRPr lang="en-US" sz="1100" dirty="0"/>
           </a:p>
@@ -6540,7 +6557,7 @@
                 <a:ea typeface="Arial" pitchFamily="34" charset="-122"/>
                 <a:cs typeface="Arial" pitchFamily="34" charset="-120"/>
               </a:rPr>
-              <a:t>8.49</a:t>
+              <a:t>8.60</a:t>
             </a:r>
             <a:endParaRPr lang="en-US" sz="3200" dirty="0"/>
           </a:p>
@@ -6665,7 +6682,7 @@
                 <a:ea typeface="Arial" pitchFamily="34" charset="-122"/>
                 <a:cs typeface="Arial" pitchFamily="34" charset="-120"/>
               </a:rPr>
-              <a:t>83.6%</a:t>
+              <a:t>85.6%</a:t>
             </a:r>
             <a:endParaRPr lang="en-US" sz="3200" dirty="0"/>
           </a:p>
@@ -6790,7 +6807,7 @@
                 <a:ea typeface="Arial" pitchFamily="34" charset="-122"/>
                 <a:cs typeface="Arial" pitchFamily="34" charset="-120"/>
               </a:rPr>
-              <a:t>4.1%</a:t>
+              <a:t>3.4%</a:t>
             </a:r>
             <a:endParaRPr lang="en-US" sz="3200" dirty="0"/>
           </a:p>
@@ -6915,7 +6932,7 @@
                 <a:ea typeface="Arial" pitchFamily="34" charset="-122"/>
                 <a:cs typeface="Arial" pitchFamily="34" charset="-120"/>
               </a:rPr>
-              <a:t>73件</a:t>
+              <a:t>146件</a:t>
             </a:r>
             <a:endParaRPr lang="en-US" sz="3200" dirty="0"/>
           </a:p>
@@ -7336,7 +7353,7 @@
                 <a:ea typeface="Arial" pitchFamily="34" charset="-122"/>
                 <a:cs typeface="Arial" pitchFamily="34" charset="-120"/>
               </a:rPr>
-              <a:t>Agoda(10.00)が最高スコア。</a:t>
+              <a:t>Trip.com(9.45)が最高スコア。</a:t>
             </a:r>
             <a:endParaRPr lang="en-US" sz="1100" dirty="0"/>
           </a:p>
@@ -7385,7 +7402,7 @@
                 <a:ea typeface="Arial" pitchFamily="34" charset="-122"/>
                 <a:cs typeface="Arial" pitchFamily="34" charset="-120"/>
               </a:rPr>
-              <a:t>じゃらん(7.8)が相対的に低い。口コミ返信の強化が急務</a:t>
+              <a:t>Booking.com(7.7)が相対的に低い。口コミ返信の強化が急務</a:t>
             </a:r>
             <a:endParaRPr lang="en-US" sz="1100" dirty="0"/>
           </a:p>
@@ -7826,7 +7843,7 @@
                           <a:ea typeface="Arial" pitchFamily="34" charset="-122"/>
                           <a:cs typeface="Arial" pitchFamily="34" charset="-120"/>
                         </a:rPr>
-                        <a:t>Agoda</a:t>
+                        <a:t>Trip.com</a:t>
                       </a:r>
                       <a:endParaRPr lang="en-US" sz="900" dirty="0">
                         <a:latin typeface="Arial" charset="0"/>
@@ -7894,7 +7911,7 @@
                           <a:ea typeface="Arial" pitchFamily="34" charset="-122"/>
                           <a:cs typeface="Arial" pitchFamily="34" charset="-120"/>
                         </a:rPr>
-                        <a:t>1</a:t>
+                        <a:t>40</a:t>
                       </a:r>
                       <a:endParaRPr lang="en-US" sz="900" dirty="0">
                         <a:latin typeface="Arial" charset="0"/>
@@ -7962,7 +7979,7 @@
                           <a:ea typeface="Arial" pitchFamily="34" charset="-122"/>
                           <a:cs typeface="Arial" pitchFamily="34" charset="-120"/>
                         </a:rPr>
-                        <a:t>10</a:t>
+                        <a:t>9.45</a:t>
                       </a:r>
                       <a:endParaRPr lang="en-US" sz="900" dirty="0">
                         <a:latin typeface="Arial" charset="0"/>
@@ -8098,7 +8115,7 @@
                           <a:ea typeface="Arial" pitchFamily="34" charset="-122"/>
                           <a:cs typeface="Arial" pitchFamily="34" charset="-120"/>
                         </a:rPr>
-                        <a:t>10</a:t>
+                        <a:t>9.45</a:t>
                       </a:r>
                       <a:endParaRPr lang="en-US" sz="900" dirty="0">
                         <a:latin typeface="Arial" charset="0"/>
@@ -8168,7 +8185,7 @@
                           <a:ea typeface="Arial" pitchFamily="34" charset="-122"/>
                           <a:cs typeface="Arial" pitchFamily="34" charset="-120"/>
                         </a:rPr>
-                        <a:t>Trip.com</a:t>
+                        <a:t>Agoda</a:t>
                       </a:r>
                       <a:endParaRPr lang="en-US" sz="900" dirty="0">
                         <a:latin typeface="Arial" charset="0"/>
@@ -8236,7 +8253,7 @@
                           <a:ea typeface="Arial" pitchFamily="34" charset="-122"/>
                           <a:cs typeface="Arial" pitchFamily="34" charset="-120"/>
                         </a:rPr>
-                        <a:t>25</a:t>
+                        <a:t>6</a:t>
                       </a:r>
                       <a:endParaRPr lang="en-US" sz="900" dirty="0">
                         <a:latin typeface="Arial" charset="0"/>
@@ -8304,7 +8321,7 @@
                           <a:ea typeface="Arial" pitchFamily="34" charset="-122"/>
                           <a:cs typeface="Arial" pitchFamily="34" charset="-120"/>
                         </a:rPr>
-                        <a:t>9.48</a:t>
+                        <a:t>9.33</a:t>
                       </a:r>
                       <a:endParaRPr lang="en-US" sz="900" dirty="0">
                         <a:latin typeface="Arial" charset="0"/>
@@ -8440,7 +8457,7 @@
                           <a:ea typeface="Arial" pitchFamily="34" charset="-122"/>
                           <a:cs typeface="Arial" pitchFamily="34" charset="-120"/>
                         </a:rPr>
-                        <a:t>9.48</a:t>
+                        <a:t>9.33</a:t>
                       </a:r>
                       <a:endParaRPr lang="en-US" sz="900" dirty="0">
                         <a:latin typeface="Arial" charset="0"/>
@@ -8510,7 +8527,7 @@
                           <a:ea typeface="Arial" pitchFamily="34" charset="-122"/>
                           <a:cs typeface="Arial" pitchFamily="34" charset="-120"/>
                         </a:rPr>
-                        <a:t>Google</a:t>
+                        <a:t>じゃらん</a:t>
                       </a:r>
                       <a:endParaRPr lang="en-US" sz="900" dirty="0">
                         <a:latin typeface="Arial" charset="0"/>
@@ -8578,7 +8595,7 @@
                           <a:ea typeface="Arial" pitchFamily="34" charset="-122"/>
                           <a:cs typeface="Arial" pitchFamily="34" charset="-120"/>
                         </a:rPr>
-                        <a:t>5</a:t>
+                        <a:t>29</a:t>
                       </a:r>
                       <a:endParaRPr lang="en-US" sz="900" dirty="0">
                         <a:latin typeface="Arial" charset="0"/>
@@ -8646,7 +8663,7 @@
                           <a:ea typeface="Arial" pitchFamily="34" charset="-122"/>
                           <a:cs typeface="Arial" pitchFamily="34" charset="-120"/>
                         </a:rPr>
-                        <a:t>4.2</a:t>
+                        <a:t>4.31</a:t>
                       </a:r>
                       <a:endParaRPr lang="en-US" sz="900" dirty="0">
                         <a:latin typeface="Arial" charset="0"/>
@@ -8782,7 +8799,7 @@
                           <a:ea typeface="Arial" pitchFamily="34" charset="-122"/>
                           <a:cs typeface="Arial" pitchFamily="34" charset="-120"/>
                         </a:rPr>
-                        <a:t>8.4</a:t>
+                        <a:t>8.62</a:t>
                       </a:r>
                       <a:endParaRPr lang="en-US" sz="900" dirty="0">
                         <a:latin typeface="Arial" charset="0"/>
@@ -8852,7 +8869,7 @@
                           <a:ea typeface="Arial" pitchFamily="34" charset="-122"/>
                           <a:cs typeface="Arial" pitchFamily="34" charset="-120"/>
                         </a:rPr>
-                        <a:t>楽天トラベル</a:t>
+                        <a:t>Google</a:t>
                       </a:r>
                       <a:endParaRPr lang="en-US" sz="900" dirty="0">
                         <a:latin typeface="Arial" charset="0"/>
@@ -8920,7 +8937,7 @@
                           <a:ea typeface="Arial" pitchFamily="34" charset="-122"/>
                           <a:cs typeface="Arial" pitchFamily="34" charset="-120"/>
                         </a:rPr>
-                        <a:t>9</a:t>
+                        <a:t>12</a:t>
                       </a:r>
                       <a:endParaRPr lang="en-US" sz="900" dirty="0">
                         <a:latin typeface="Arial" charset="0"/>
@@ -8988,7 +9005,7 @@
                           <a:ea typeface="Arial" pitchFamily="34" charset="-122"/>
                           <a:cs typeface="Arial" pitchFamily="34" charset="-120"/>
                         </a:rPr>
-                        <a:t>4</a:t>
+                        <a:t>4.25</a:t>
                       </a:r>
                       <a:endParaRPr lang="en-US" sz="900" dirty="0">
                         <a:latin typeface="Arial" charset="0"/>
@@ -9124,7 +9141,7 @@
                           <a:ea typeface="Arial" pitchFamily="34" charset="-122"/>
                           <a:cs typeface="Arial" pitchFamily="34" charset="-120"/>
                         </a:rPr>
-                        <a:t>8</a:t>
+                        <a:t>8.5</a:t>
                       </a:r>
                       <a:endParaRPr lang="en-US" sz="900" dirty="0">
                         <a:latin typeface="Arial" charset="0"/>
@@ -9172,6 +9189,348 @@
                     </a:lnB>
                     <a:solidFill>
                       <a:srgbClr val="FFFFFF"/>
+                    </a:solidFill>
+                  </a:tcPr>
+                </a:tc>
+              </a:tr>
+              <a:tr h="201168">
+                <a:tc>
+                  <a:txBody>
+                    <a:bodyPr/>
+                    <a:lstStyle/>
+                    <a:p>
+                      <a:pPr algn="ctr" indent="0" marL="0">
+                        <a:buNone/>
+                      </a:pPr>
+                      <a:r>
+                        <a:rPr lang="en-US" sz="900" dirty="0">
+                          <a:solidFill>
+                            <a:srgbClr val="000000"/>
+                          </a:solidFill>
+                          <a:latin typeface="Arial" pitchFamily="34" charset="0"/>
+                          <a:ea typeface="Arial" pitchFamily="34" charset="-122"/>
+                          <a:cs typeface="Arial" pitchFamily="34" charset="-120"/>
+                        </a:rPr>
+                        <a:t>楽天トラベル</a:t>
+                      </a:r>
+                      <a:endParaRPr lang="en-US" sz="900" dirty="0">
+                        <a:latin typeface="Arial" charset="0"/>
+                        <a:ea typeface="Arial" charset="0"/>
+                        <a:cs typeface="Arial" charset="0"/>
+                      </a:endParaRPr>
+                    </a:p>
+                  </a:txBody>
+                  <a:tcPr marL="91440" marR="91440" marT="45720" marB="45720">
+                    <a:lnL w="6350" cap="flat" cmpd="sng" algn="ctr">
+                      <a:solidFill>
+                        <a:srgbClr val="CBD5E1"/>
+                      </a:solidFill>
+                      <a:prstDash val="solid"/>
+                      <a:round/>
+                      <a:headEnd type="none" w="med" len="med"/>
+                      <a:tailEnd type="none" w="med" len="med"/>
+                    </a:lnL>
+                    <a:lnR w="6350" cap="flat" cmpd="sng" algn="ctr">
+                      <a:solidFill>
+                        <a:srgbClr val="CBD5E1"/>
+                      </a:solidFill>
+                      <a:prstDash val="solid"/>
+                      <a:round/>
+                      <a:headEnd type="none" w="med" len="med"/>
+                      <a:tailEnd type="none" w="med" len="med"/>
+                    </a:lnR>
+                    <a:lnT w="6350" cap="flat" cmpd="sng" algn="ctr">
+                      <a:solidFill>
+                        <a:srgbClr val="CBD5E1"/>
+                      </a:solidFill>
+                      <a:prstDash val="solid"/>
+                      <a:round/>
+                      <a:headEnd type="none" w="med" len="med"/>
+                      <a:tailEnd type="none" w="med" len="med"/>
+                    </a:lnT>
+                    <a:lnB w="6350" cap="flat" cmpd="sng" algn="ctr">
+                      <a:solidFill>
+                        <a:srgbClr val="CBD5E1"/>
+                      </a:solidFill>
+                      <a:prstDash val="solid"/>
+                      <a:round/>
+                      <a:headEnd type="none" w="med" len="med"/>
+                      <a:tailEnd type="none" w="med" len="med"/>
+                    </a:lnB>
+                    <a:solidFill>
+                      <a:srgbClr val="E8EFF8"/>
+                    </a:solidFill>
+                  </a:tcPr>
+                </a:tc>
+                <a:tc>
+                  <a:txBody>
+                    <a:bodyPr/>
+                    <a:lstStyle/>
+                    <a:p>
+                      <a:pPr algn="ctr" indent="0" marL="0">
+                        <a:buNone/>
+                      </a:pPr>
+                      <a:r>
+                        <a:rPr lang="en-US" sz="900" dirty="0">
+                          <a:solidFill>
+                            <a:srgbClr val="000000"/>
+                          </a:solidFill>
+                          <a:latin typeface="Arial" pitchFamily="34" charset="0"/>
+                          <a:ea typeface="Arial" pitchFamily="34" charset="-122"/>
+                          <a:cs typeface="Arial" pitchFamily="34" charset="-120"/>
+                        </a:rPr>
+                        <a:t>24</a:t>
+                      </a:r>
+                      <a:endParaRPr lang="en-US" sz="900" dirty="0">
+                        <a:latin typeface="Arial" charset="0"/>
+                        <a:ea typeface="Arial" charset="0"/>
+                        <a:cs typeface="Arial" charset="0"/>
+                      </a:endParaRPr>
+                    </a:p>
+                  </a:txBody>
+                  <a:tcPr marL="91440" marR="91440" marT="45720" marB="45720">
+                    <a:lnL w="6350" cap="flat" cmpd="sng" algn="ctr">
+                      <a:solidFill>
+                        <a:srgbClr val="CBD5E1"/>
+                      </a:solidFill>
+                      <a:prstDash val="solid"/>
+                      <a:round/>
+                      <a:headEnd type="none" w="med" len="med"/>
+                      <a:tailEnd type="none" w="med" len="med"/>
+                    </a:lnL>
+                    <a:lnR w="6350" cap="flat" cmpd="sng" algn="ctr">
+                      <a:solidFill>
+                        <a:srgbClr val="CBD5E1"/>
+                      </a:solidFill>
+                      <a:prstDash val="solid"/>
+                      <a:round/>
+                      <a:headEnd type="none" w="med" len="med"/>
+                      <a:tailEnd type="none" w="med" len="med"/>
+                    </a:lnR>
+                    <a:lnT w="6350" cap="flat" cmpd="sng" algn="ctr">
+                      <a:solidFill>
+                        <a:srgbClr val="CBD5E1"/>
+                      </a:solidFill>
+                      <a:prstDash val="solid"/>
+                      <a:round/>
+                      <a:headEnd type="none" w="med" len="med"/>
+                      <a:tailEnd type="none" w="med" len="med"/>
+                    </a:lnT>
+                    <a:lnB w="6350" cap="flat" cmpd="sng" algn="ctr">
+                      <a:solidFill>
+                        <a:srgbClr val="CBD5E1"/>
+                      </a:solidFill>
+                      <a:prstDash val="solid"/>
+                      <a:round/>
+                      <a:headEnd type="none" w="med" len="med"/>
+                      <a:tailEnd type="none" w="med" len="med"/>
+                    </a:lnB>
+                    <a:solidFill>
+                      <a:srgbClr val="E8EFF8"/>
+                    </a:solidFill>
+                  </a:tcPr>
+                </a:tc>
+                <a:tc>
+                  <a:txBody>
+                    <a:bodyPr/>
+                    <a:lstStyle/>
+                    <a:p>
+                      <a:pPr algn="ctr" indent="0" marL="0">
+                        <a:buNone/>
+                      </a:pPr>
+                      <a:r>
+                        <a:rPr lang="en-US" sz="900" dirty="0">
+                          <a:solidFill>
+                            <a:srgbClr val="000000"/>
+                          </a:solidFill>
+                          <a:latin typeface="Arial" pitchFamily="34" charset="0"/>
+                          <a:ea typeface="Arial" pitchFamily="34" charset="-122"/>
+                          <a:cs typeface="Arial" pitchFamily="34" charset="-120"/>
+                        </a:rPr>
+                        <a:t>4.12</a:t>
+                      </a:r>
+                      <a:endParaRPr lang="en-US" sz="900" dirty="0">
+                        <a:latin typeface="Arial" charset="0"/>
+                        <a:ea typeface="Arial" charset="0"/>
+                        <a:cs typeface="Arial" charset="0"/>
+                      </a:endParaRPr>
+                    </a:p>
+                  </a:txBody>
+                  <a:tcPr marL="91440" marR="91440" marT="45720" marB="45720">
+                    <a:lnL w="6350" cap="flat" cmpd="sng" algn="ctr">
+                      <a:solidFill>
+                        <a:srgbClr val="CBD5E1"/>
+                      </a:solidFill>
+                      <a:prstDash val="solid"/>
+                      <a:round/>
+                      <a:headEnd type="none" w="med" len="med"/>
+                      <a:tailEnd type="none" w="med" len="med"/>
+                    </a:lnL>
+                    <a:lnR w="6350" cap="flat" cmpd="sng" algn="ctr">
+                      <a:solidFill>
+                        <a:srgbClr val="CBD5E1"/>
+                      </a:solidFill>
+                      <a:prstDash val="solid"/>
+                      <a:round/>
+                      <a:headEnd type="none" w="med" len="med"/>
+                      <a:tailEnd type="none" w="med" len="med"/>
+                    </a:lnR>
+                    <a:lnT w="6350" cap="flat" cmpd="sng" algn="ctr">
+                      <a:solidFill>
+                        <a:srgbClr val="CBD5E1"/>
+                      </a:solidFill>
+                      <a:prstDash val="solid"/>
+                      <a:round/>
+                      <a:headEnd type="none" w="med" len="med"/>
+                      <a:tailEnd type="none" w="med" len="med"/>
+                    </a:lnT>
+                    <a:lnB w="6350" cap="flat" cmpd="sng" algn="ctr">
+                      <a:solidFill>
+                        <a:srgbClr val="CBD5E1"/>
+                      </a:solidFill>
+                      <a:prstDash val="solid"/>
+                      <a:round/>
+                      <a:headEnd type="none" w="med" len="med"/>
+                      <a:tailEnd type="none" w="med" len="med"/>
+                    </a:lnB>
+                    <a:solidFill>
+                      <a:srgbClr val="E8EFF8"/>
+                    </a:solidFill>
+                  </a:tcPr>
+                </a:tc>
+                <a:tc>
+                  <a:txBody>
+                    <a:bodyPr/>
+                    <a:lstStyle/>
+                    <a:p>
+                      <a:pPr algn="ctr" indent="0" marL="0">
+                        <a:buNone/>
+                      </a:pPr>
+                      <a:r>
+                        <a:rPr lang="en-US" sz="900" dirty="0">
+                          <a:solidFill>
+                            <a:srgbClr val="000000"/>
+                          </a:solidFill>
+                          <a:latin typeface="Arial" pitchFamily="34" charset="0"/>
+                          <a:ea typeface="Arial" pitchFamily="34" charset="-122"/>
+                          <a:cs typeface="Arial" pitchFamily="34" charset="-120"/>
+                        </a:rPr>
+                        <a:t>/5 (×2)</a:t>
+                      </a:r>
+                      <a:endParaRPr lang="en-US" sz="900" dirty="0">
+                        <a:latin typeface="Arial" charset="0"/>
+                        <a:ea typeface="Arial" charset="0"/>
+                        <a:cs typeface="Arial" charset="0"/>
+                      </a:endParaRPr>
+                    </a:p>
+                  </a:txBody>
+                  <a:tcPr marL="91440" marR="91440" marT="45720" marB="45720">
+                    <a:lnL w="6350" cap="flat" cmpd="sng" algn="ctr">
+                      <a:solidFill>
+                        <a:srgbClr val="CBD5E1"/>
+                      </a:solidFill>
+                      <a:prstDash val="solid"/>
+                      <a:round/>
+                      <a:headEnd type="none" w="med" len="med"/>
+                      <a:tailEnd type="none" w="med" len="med"/>
+                    </a:lnL>
+                    <a:lnR w="6350" cap="flat" cmpd="sng" algn="ctr">
+                      <a:solidFill>
+                        <a:srgbClr val="CBD5E1"/>
+                      </a:solidFill>
+                      <a:prstDash val="solid"/>
+                      <a:round/>
+                      <a:headEnd type="none" w="med" len="med"/>
+                      <a:tailEnd type="none" w="med" len="med"/>
+                    </a:lnR>
+                    <a:lnT w="6350" cap="flat" cmpd="sng" algn="ctr">
+                      <a:solidFill>
+                        <a:srgbClr val="CBD5E1"/>
+                      </a:solidFill>
+                      <a:prstDash val="solid"/>
+                      <a:round/>
+                      <a:headEnd type="none" w="med" len="med"/>
+                      <a:tailEnd type="none" w="med" len="med"/>
+                    </a:lnT>
+                    <a:lnB w="6350" cap="flat" cmpd="sng" algn="ctr">
+                      <a:solidFill>
+                        <a:srgbClr val="CBD5E1"/>
+                      </a:solidFill>
+                      <a:prstDash val="solid"/>
+                      <a:round/>
+                      <a:headEnd type="none" w="med" len="med"/>
+                      <a:tailEnd type="none" w="med" len="med"/>
+                    </a:lnB>
+                    <a:solidFill>
+                      <a:srgbClr val="E8EFF8"/>
+                    </a:solidFill>
+                  </a:tcPr>
+                </a:tc>
+                <a:tc>
+                  <a:txBody>
+                    <a:bodyPr/>
+                    <a:lstStyle/>
+                    <a:p>
+                      <a:pPr algn="ctr" indent="0" marL="0">
+                        <a:buNone/>
+                      </a:pPr>
+                      <a:r>
+                        <a:rPr lang="en-US" sz="900" dirty="0">
+                          <a:solidFill>
+                            <a:srgbClr val="000000"/>
+                          </a:solidFill>
+                          <a:latin typeface="Arial" pitchFamily="34" charset="0"/>
+                          <a:ea typeface="Arial" pitchFamily="34" charset="-122"/>
+                          <a:cs typeface="Arial" pitchFamily="34" charset="-120"/>
+                        </a:rPr>
+                        <a:t>8.25</a:t>
+                      </a:r>
+                      <a:endParaRPr lang="en-US" sz="900" dirty="0">
+                        <a:latin typeface="Arial" charset="0"/>
+                        <a:ea typeface="Arial" charset="0"/>
+                        <a:cs typeface="Arial" charset="0"/>
+                      </a:endParaRPr>
+                    </a:p>
+                  </a:txBody>
+                  <a:tcPr marL="91440" marR="91440" marT="45720" marB="45720">
+                    <a:lnL w="6350" cap="flat" cmpd="sng" algn="ctr">
+                      <a:solidFill>
+                        <a:srgbClr val="CBD5E1"/>
+                      </a:solidFill>
+                      <a:prstDash val="solid"/>
+                      <a:round/>
+                      <a:headEnd type="none" w="med" len="med"/>
+                      <a:tailEnd type="none" w="med" len="med"/>
+                    </a:lnL>
+                    <a:lnR w="6350" cap="flat" cmpd="sng" algn="ctr">
+                      <a:solidFill>
+                        <a:srgbClr val="CBD5E1"/>
+                      </a:solidFill>
+                      <a:prstDash val="solid"/>
+                      <a:round/>
+                      <a:headEnd type="none" w="med" len="med"/>
+                      <a:tailEnd type="none" w="med" len="med"/>
+                    </a:lnR>
+                    <a:lnT w="6350" cap="flat" cmpd="sng" algn="ctr">
+                      <a:solidFill>
+                        <a:srgbClr val="CBD5E1"/>
+                      </a:solidFill>
+                      <a:prstDash val="solid"/>
+                      <a:round/>
+                      <a:headEnd type="none" w="med" len="med"/>
+                      <a:tailEnd type="none" w="med" len="med"/>
+                    </a:lnT>
+                    <a:lnB w="6350" cap="flat" cmpd="sng" algn="ctr">
+                      <a:solidFill>
+                        <a:srgbClr val="CBD5E1"/>
+                      </a:solidFill>
+                      <a:prstDash val="solid"/>
+                      <a:round/>
+                      <a:headEnd type="none" w="med" len="med"/>
+                      <a:tailEnd type="none" w="med" len="med"/>
+                    </a:lnB>
+                    <a:solidFill>
+                      <a:srgbClr val="E8EFF8"/>
                     </a:solidFill>
                   </a:tcPr>
                 </a:tc>
@@ -9241,7 +9600,7 @@
                       <a:tailEnd type="none" w="med" len="med"/>
                     </a:lnB>
                     <a:solidFill>
-                      <a:srgbClr val="E8EFF8"/>
+                      <a:srgbClr val="FFFFFF"/>
                     </a:solidFill>
                   </a:tcPr>
                 </a:tc>
@@ -9262,7 +9621,7 @@
                           <a:ea typeface="Arial" pitchFamily="34" charset="-122"/>
                           <a:cs typeface="Arial" pitchFamily="34" charset="-120"/>
                         </a:rPr>
-                        <a:t>21</a:t>
+                        <a:t>35</a:t>
                       </a:r>
                       <a:endParaRPr lang="en-US" sz="900" dirty="0">
                         <a:latin typeface="Arial" charset="0"/>
@@ -9309,7 +9668,7 @@
                       <a:tailEnd type="none" w="med" len="med"/>
                     </a:lnB>
                     <a:solidFill>
-                      <a:srgbClr val="E8EFF8"/>
+                      <a:srgbClr val="FFFFFF"/>
                     </a:solidFill>
                   </a:tcPr>
                 </a:tc>
@@ -9330,7 +9689,7 @@
                           <a:ea typeface="Arial" pitchFamily="34" charset="-122"/>
                           <a:cs typeface="Arial" pitchFamily="34" charset="-120"/>
                         </a:rPr>
-                        <a:t>7.86</a:t>
+                        <a:t>7.74</a:t>
                       </a:r>
                       <a:endParaRPr lang="en-US" sz="900" dirty="0">
                         <a:latin typeface="Arial" charset="0"/>
@@ -9377,7 +9736,7 @@
                       <a:tailEnd type="none" w="med" len="med"/>
                     </a:lnB>
                     <a:solidFill>
-                      <a:srgbClr val="E8EFF8"/>
+                      <a:srgbClr val="FFFFFF"/>
                     </a:solidFill>
                   </a:tcPr>
                 </a:tc>
@@ -9445,144 +9804,6 @@
                       <a:tailEnd type="none" w="med" len="med"/>
                     </a:lnB>
                     <a:solidFill>
-                      <a:srgbClr val="E8EFF8"/>
-                    </a:solidFill>
-                  </a:tcPr>
-                </a:tc>
-                <a:tc>
-                  <a:txBody>
-                    <a:bodyPr/>
-                    <a:lstStyle/>
-                    <a:p>
-                      <a:pPr algn="ctr" indent="0" marL="0">
-                        <a:buNone/>
-                      </a:pPr>
-                      <a:r>
-                        <a:rPr lang="en-US" sz="900" dirty="0">
-                          <a:solidFill>
-                            <a:srgbClr val="000000"/>
-                          </a:solidFill>
-                          <a:latin typeface="Arial" pitchFamily="34" charset="0"/>
-                          <a:ea typeface="Arial" pitchFamily="34" charset="-122"/>
-                          <a:cs typeface="Arial" pitchFamily="34" charset="-120"/>
-                        </a:rPr>
-                        <a:t>7.86</a:t>
-                      </a:r>
-                      <a:endParaRPr lang="en-US" sz="900" dirty="0">
-                        <a:latin typeface="Arial" charset="0"/>
-                        <a:ea typeface="Arial" charset="0"/>
-                        <a:cs typeface="Arial" charset="0"/>
-                      </a:endParaRPr>
-                    </a:p>
-                  </a:txBody>
-                  <a:tcPr marL="91440" marR="91440" marT="45720" marB="45720">
-                    <a:lnL w="6350" cap="flat" cmpd="sng" algn="ctr">
-                      <a:solidFill>
-                        <a:srgbClr val="CBD5E1"/>
-                      </a:solidFill>
-                      <a:prstDash val="solid"/>
-                      <a:round/>
-                      <a:headEnd type="none" w="med" len="med"/>
-                      <a:tailEnd type="none" w="med" len="med"/>
-                    </a:lnL>
-                    <a:lnR w="6350" cap="flat" cmpd="sng" algn="ctr">
-                      <a:solidFill>
-                        <a:srgbClr val="CBD5E1"/>
-                      </a:solidFill>
-                      <a:prstDash val="solid"/>
-                      <a:round/>
-                      <a:headEnd type="none" w="med" len="med"/>
-                      <a:tailEnd type="none" w="med" len="med"/>
-                    </a:lnR>
-                    <a:lnT w="6350" cap="flat" cmpd="sng" algn="ctr">
-                      <a:solidFill>
-                        <a:srgbClr val="CBD5E1"/>
-                      </a:solidFill>
-                      <a:prstDash val="solid"/>
-                      <a:round/>
-                      <a:headEnd type="none" w="med" len="med"/>
-                      <a:tailEnd type="none" w="med" len="med"/>
-                    </a:lnT>
-                    <a:lnB w="6350" cap="flat" cmpd="sng" algn="ctr">
-                      <a:solidFill>
-                        <a:srgbClr val="CBD5E1"/>
-                      </a:solidFill>
-                      <a:prstDash val="solid"/>
-                      <a:round/>
-                      <a:headEnd type="none" w="med" len="med"/>
-                      <a:tailEnd type="none" w="med" len="med"/>
-                    </a:lnB>
-                    <a:solidFill>
-                      <a:srgbClr val="E8EFF8"/>
-                    </a:solidFill>
-                  </a:tcPr>
-                </a:tc>
-              </a:tr>
-              <a:tr h="201168">
-                <a:tc>
-                  <a:txBody>
-                    <a:bodyPr/>
-                    <a:lstStyle/>
-                    <a:p>
-                      <a:pPr algn="ctr" indent="0" marL="0">
-                        <a:buNone/>
-                      </a:pPr>
-                      <a:r>
-                        <a:rPr lang="en-US" sz="900" dirty="0">
-                          <a:solidFill>
-                            <a:srgbClr val="000000"/>
-                          </a:solidFill>
-                          <a:latin typeface="Arial" pitchFamily="34" charset="0"/>
-                          <a:ea typeface="Arial" pitchFamily="34" charset="-122"/>
-                          <a:cs typeface="Arial" pitchFamily="34" charset="-120"/>
-                        </a:rPr>
-                        <a:t>じゃらん</a:t>
-                      </a:r>
-                      <a:endParaRPr lang="en-US" sz="900" dirty="0">
-                        <a:latin typeface="Arial" charset="0"/>
-                        <a:ea typeface="Arial" charset="0"/>
-                        <a:cs typeface="Arial" charset="0"/>
-                      </a:endParaRPr>
-                    </a:p>
-                  </a:txBody>
-                  <a:tcPr marL="91440" marR="91440" marT="45720" marB="45720">
-                    <a:lnL w="6350" cap="flat" cmpd="sng" algn="ctr">
-                      <a:solidFill>
-                        <a:srgbClr val="CBD5E1"/>
-                      </a:solidFill>
-                      <a:prstDash val="solid"/>
-                      <a:round/>
-                      <a:headEnd type="none" w="med" len="med"/>
-                      <a:tailEnd type="none" w="med" len="med"/>
-                    </a:lnL>
-                    <a:lnR w="6350" cap="flat" cmpd="sng" algn="ctr">
-                      <a:solidFill>
-                        <a:srgbClr val="CBD5E1"/>
-                      </a:solidFill>
-                      <a:prstDash val="solid"/>
-                      <a:round/>
-                      <a:headEnd type="none" w="med" len="med"/>
-                      <a:tailEnd type="none" w="med" len="med"/>
-                    </a:lnR>
-                    <a:lnT w="6350" cap="flat" cmpd="sng" algn="ctr">
-                      <a:solidFill>
-                        <a:srgbClr val="CBD5E1"/>
-                      </a:solidFill>
-                      <a:prstDash val="solid"/>
-                      <a:round/>
-                      <a:headEnd type="none" w="med" len="med"/>
-                      <a:tailEnd type="none" w="med" len="med"/>
-                    </a:lnT>
-                    <a:lnB w="6350" cap="flat" cmpd="sng" algn="ctr">
-                      <a:solidFill>
-                        <a:srgbClr val="CBD5E1"/>
-                      </a:solidFill>
-                      <a:prstDash val="solid"/>
-                      <a:round/>
-                      <a:headEnd type="none" w="med" len="med"/>
-                      <a:tailEnd type="none" w="med" len="med"/>
-                    </a:lnB>
-                    <a:solidFill>
                       <a:srgbClr val="FFFFFF"/>
                     </a:solidFill>
                   </a:tcPr>
@@ -9604,211 +9825,7 @@
                           <a:ea typeface="Arial" pitchFamily="34" charset="-122"/>
                           <a:cs typeface="Arial" pitchFamily="34" charset="-120"/>
                         </a:rPr>
-                        <a:t>12</a:t>
-                      </a:r>
-                      <a:endParaRPr lang="en-US" sz="900" dirty="0">
-                        <a:latin typeface="Arial" charset="0"/>
-                        <a:ea typeface="Arial" charset="0"/>
-                        <a:cs typeface="Arial" charset="0"/>
-                      </a:endParaRPr>
-                    </a:p>
-                  </a:txBody>
-                  <a:tcPr marL="91440" marR="91440" marT="45720" marB="45720">
-                    <a:lnL w="6350" cap="flat" cmpd="sng" algn="ctr">
-                      <a:solidFill>
-                        <a:srgbClr val="CBD5E1"/>
-                      </a:solidFill>
-                      <a:prstDash val="solid"/>
-                      <a:round/>
-                      <a:headEnd type="none" w="med" len="med"/>
-                      <a:tailEnd type="none" w="med" len="med"/>
-                    </a:lnL>
-                    <a:lnR w="6350" cap="flat" cmpd="sng" algn="ctr">
-                      <a:solidFill>
-                        <a:srgbClr val="CBD5E1"/>
-                      </a:solidFill>
-                      <a:prstDash val="solid"/>
-                      <a:round/>
-                      <a:headEnd type="none" w="med" len="med"/>
-                      <a:tailEnd type="none" w="med" len="med"/>
-                    </a:lnR>
-                    <a:lnT w="6350" cap="flat" cmpd="sng" algn="ctr">
-                      <a:solidFill>
-                        <a:srgbClr val="CBD5E1"/>
-                      </a:solidFill>
-                      <a:prstDash val="solid"/>
-                      <a:round/>
-                      <a:headEnd type="none" w="med" len="med"/>
-                      <a:tailEnd type="none" w="med" len="med"/>
-                    </a:lnT>
-                    <a:lnB w="6350" cap="flat" cmpd="sng" algn="ctr">
-                      <a:solidFill>
-                        <a:srgbClr val="CBD5E1"/>
-                      </a:solidFill>
-                      <a:prstDash val="solid"/>
-                      <a:round/>
-                      <a:headEnd type="none" w="med" len="med"/>
-                      <a:tailEnd type="none" w="med" len="med"/>
-                    </a:lnB>
-                    <a:solidFill>
-                      <a:srgbClr val="FFFFFF"/>
-                    </a:solidFill>
-                  </a:tcPr>
-                </a:tc>
-                <a:tc>
-                  <a:txBody>
-                    <a:bodyPr/>
-                    <a:lstStyle/>
-                    <a:p>
-                      <a:pPr algn="ctr" indent="0" marL="0">
-                        <a:buNone/>
-                      </a:pPr>
-                      <a:r>
-                        <a:rPr lang="en-US" sz="900" dirty="0">
-                          <a:solidFill>
-                            <a:srgbClr val="000000"/>
-                          </a:solidFill>
-                          <a:latin typeface="Arial" pitchFamily="34" charset="0"/>
-                          <a:ea typeface="Arial" pitchFamily="34" charset="-122"/>
-                          <a:cs typeface="Arial" pitchFamily="34" charset="-120"/>
-                        </a:rPr>
-                        <a:t>3.92</a:t>
-                      </a:r>
-                      <a:endParaRPr lang="en-US" sz="900" dirty="0">
-                        <a:latin typeface="Arial" charset="0"/>
-                        <a:ea typeface="Arial" charset="0"/>
-                        <a:cs typeface="Arial" charset="0"/>
-                      </a:endParaRPr>
-                    </a:p>
-                  </a:txBody>
-                  <a:tcPr marL="91440" marR="91440" marT="45720" marB="45720">
-                    <a:lnL w="6350" cap="flat" cmpd="sng" algn="ctr">
-                      <a:solidFill>
-                        <a:srgbClr val="CBD5E1"/>
-                      </a:solidFill>
-                      <a:prstDash val="solid"/>
-                      <a:round/>
-                      <a:headEnd type="none" w="med" len="med"/>
-                      <a:tailEnd type="none" w="med" len="med"/>
-                    </a:lnL>
-                    <a:lnR w="6350" cap="flat" cmpd="sng" algn="ctr">
-                      <a:solidFill>
-                        <a:srgbClr val="CBD5E1"/>
-                      </a:solidFill>
-                      <a:prstDash val="solid"/>
-                      <a:round/>
-                      <a:headEnd type="none" w="med" len="med"/>
-                      <a:tailEnd type="none" w="med" len="med"/>
-                    </a:lnR>
-                    <a:lnT w="6350" cap="flat" cmpd="sng" algn="ctr">
-                      <a:solidFill>
-                        <a:srgbClr val="CBD5E1"/>
-                      </a:solidFill>
-                      <a:prstDash val="solid"/>
-                      <a:round/>
-                      <a:headEnd type="none" w="med" len="med"/>
-                      <a:tailEnd type="none" w="med" len="med"/>
-                    </a:lnT>
-                    <a:lnB w="6350" cap="flat" cmpd="sng" algn="ctr">
-                      <a:solidFill>
-                        <a:srgbClr val="CBD5E1"/>
-                      </a:solidFill>
-                      <a:prstDash val="solid"/>
-                      <a:round/>
-                      <a:headEnd type="none" w="med" len="med"/>
-                      <a:tailEnd type="none" w="med" len="med"/>
-                    </a:lnB>
-                    <a:solidFill>
-                      <a:srgbClr val="FFFFFF"/>
-                    </a:solidFill>
-                  </a:tcPr>
-                </a:tc>
-                <a:tc>
-                  <a:txBody>
-                    <a:bodyPr/>
-                    <a:lstStyle/>
-                    <a:p>
-                      <a:pPr algn="ctr" indent="0" marL="0">
-                        <a:buNone/>
-                      </a:pPr>
-                      <a:r>
-                        <a:rPr lang="en-US" sz="900" dirty="0">
-                          <a:solidFill>
-                            <a:srgbClr val="000000"/>
-                          </a:solidFill>
-                          <a:latin typeface="Arial" pitchFamily="34" charset="0"/>
-                          <a:ea typeface="Arial" pitchFamily="34" charset="-122"/>
-                          <a:cs typeface="Arial" pitchFamily="34" charset="-120"/>
-                        </a:rPr>
-                        <a:t>/5 (×2)</a:t>
-                      </a:r>
-                      <a:endParaRPr lang="en-US" sz="900" dirty="0">
-                        <a:latin typeface="Arial" charset="0"/>
-                        <a:ea typeface="Arial" charset="0"/>
-                        <a:cs typeface="Arial" charset="0"/>
-                      </a:endParaRPr>
-                    </a:p>
-                  </a:txBody>
-                  <a:tcPr marL="91440" marR="91440" marT="45720" marB="45720">
-                    <a:lnL w="6350" cap="flat" cmpd="sng" algn="ctr">
-                      <a:solidFill>
-                        <a:srgbClr val="CBD5E1"/>
-                      </a:solidFill>
-                      <a:prstDash val="solid"/>
-                      <a:round/>
-                      <a:headEnd type="none" w="med" len="med"/>
-                      <a:tailEnd type="none" w="med" len="med"/>
-                    </a:lnL>
-                    <a:lnR w="6350" cap="flat" cmpd="sng" algn="ctr">
-                      <a:solidFill>
-                        <a:srgbClr val="CBD5E1"/>
-                      </a:solidFill>
-                      <a:prstDash val="solid"/>
-                      <a:round/>
-                      <a:headEnd type="none" w="med" len="med"/>
-                      <a:tailEnd type="none" w="med" len="med"/>
-                    </a:lnR>
-                    <a:lnT w="6350" cap="flat" cmpd="sng" algn="ctr">
-                      <a:solidFill>
-                        <a:srgbClr val="CBD5E1"/>
-                      </a:solidFill>
-                      <a:prstDash val="solid"/>
-                      <a:round/>
-                      <a:headEnd type="none" w="med" len="med"/>
-                      <a:tailEnd type="none" w="med" len="med"/>
-                    </a:lnT>
-                    <a:lnB w="6350" cap="flat" cmpd="sng" algn="ctr">
-                      <a:solidFill>
-                        <a:srgbClr val="CBD5E1"/>
-                      </a:solidFill>
-                      <a:prstDash val="solid"/>
-                      <a:round/>
-                      <a:headEnd type="none" w="med" len="med"/>
-                      <a:tailEnd type="none" w="med" len="med"/>
-                    </a:lnB>
-                    <a:solidFill>
-                      <a:srgbClr val="FFFFFF"/>
-                    </a:solidFill>
-                  </a:tcPr>
-                </a:tc>
-                <a:tc>
-                  <a:txBody>
-                    <a:bodyPr/>
-                    <a:lstStyle/>
-                    <a:p>
-                      <a:pPr algn="ctr" indent="0" marL="0">
-                        <a:buNone/>
-                      </a:pPr>
-                      <a:r>
-                        <a:rPr lang="en-US" sz="900" dirty="0">
-                          <a:solidFill>
-                            <a:srgbClr val="000000"/>
-                          </a:solidFill>
-                          <a:latin typeface="Arial" pitchFamily="34" charset="0"/>
-                          <a:ea typeface="Arial" pitchFamily="34" charset="-122"/>
-                          <a:cs typeface="Arial" pitchFamily="34" charset="-120"/>
-                        </a:rPr>
-                        <a:t>7.83</a:t>
+                        <a:t>7.74</a:t>
                       </a:r>
                       <a:endParaRPr lang="en-US" sz="900" dirty="0">
                         <a:latin typeface="Arial" charset="0"/>
@@ -10216,7 +10233,7 @@
                 <a:ea typeface="Arial" pitchFamily="34" charset="-122"/>
                 <a:cs typeface="Arial" pitchFamily="34" charset="-120"/>
               </a:rPr>
-              <a:t>61件（83.6%）</a:t>
+              <a:t>125件（85.6%）</a:t>
             </a:r>
             <a:endParaRPr lang="en-US" sz="1100" dirty="0"/>
           </a:p>
@@ -10314,7 +10331,7 @@
                 <a:ea typeface="Arial" pitchFamily="34" charset="-122"/>
                 <a:cs typeface="Arial" pitchFamily="34" charset="-120"/>
               </a:rPr>
-              <a:t>9件（12.3%）</a:t>
+              <a:t>16件（11.0%）</a:t>
             </a:r>
             <a:endParaRPr lang="en-US" sz="1100" dirty="0"/>
           </a:p>
@@ -10412,7 +10429,7 @@
                 <a:ea typeface="Arial" pitchFamily="34" charset="-122"/>
                 <a:cs typeface="Arial" pitchFamily="34" charset="-120"/>
               </a:rPr>
-              <a:t>3件（4.1%）</a:t>
+              <a:t>5件（3.4%）</a:t>
             </a:r>
             <a:endParaRPr lang="en-US" sz="1100" dirty="0"/>
           </a:p>
@@ -10746,7 +10763,7 @@
                 <a:ea typeface="Arial" pitchFamily="34" charset="-122"/>
                 <a:cs typeface="Arial" pitchFamily="34" charset="-120"/>
               </a:rPr>
-              <a:t>20件+</a:t>
+              <a:t>50件+</a:t>
             </a:r>
             <a:endParaRPr lang="en-US" sz="900" dirty="0"/>
           </a:p>
@@ -10969,7 +10986,7 @@
                 <a:ea typeface="Arial" pitchFamily="34" charset="-122"/>
                 <a:cs typeface="Arial" pitchFamily="34" charset="-120"/>
               </a:rPr>
-              <a:t>20件+</a:t>
+              <a:t>50件+</a:t>
             </a:r>
             <a:endParaRPr lang="en-US" sz="900" dirty="0"/>
           </a:p>
@@ -10984,6 +11001,229 @@
         <p:spPr>
           <a:xfrm>
             <a:off x="3429000" y="1124712"/>
+            <a:ext cx="1645920" cy="274320"/>
+          </a:xfrm>
+          <a:prstGeom prst="rect">
+            <a:avLst/>
+          </a:prstGeom>
+          <a:noFill/>
+          <a:ln/>
+        </p:spPr>
+        <p:txBody>
+          <a:bodyPr wrap="square" lIns="0" tIns="0" rIns="0" bIns="0" rtlCol="0" anchor="ctr"/>
+          <a:lstStyle/>
+          <a:p>
+            <a:pPr indent="0" marL="0">
+              <a:buNone/>
+            </a:pPr>
+            <a:r>
+              <a:rPr lang="en-US" sz="1300" b="1" dirty="0">
+                <a:solidFill>
+                  <a:srgbClr val="1A2744"/>
+                </a:solidFill>
+                <a:latin typeface="Arial" pitchFamily="34" charset="0"/>
+                <a:ea typeface="Arial" pitchFamily="34" charset="-122"/>
+                <a:cs typeface="Arial" pitchFamily="34" charset="-120"/>
+              </a:rPr>
+              <a:t>快適さ・設備</a:t>
+            </a:r>
+            <a:endParaRPr lang="en-US" sz="1300" dirty="0"/>
+          </a:p>
+        </p:txBody>
+      </p:sp>
+      <p:sp>
+        <p:nvSpPr>
+          <p:cNvPr id="17" name="Text 15"/>
+          <p:cNvSpPr/>
+          <p:nvPr/>
+        </p:nvSpPr>
+        <p:spPr>
+          <a:xfrm>
+            <a:off x="3429000" y="1417320"/>
+            <a:ext cx="2377440" cy="365760"/>
+          </a:xfrm>
+          <a:prstGeom prst="rect">
+            <a:avLst/>
+          </a:prstGeom>
+          <a:noFill/>
+          <a:ln/>
+        </p:spPr>
+        <p:txBody>
+          <a:bodyPr wrap="square" lIns="0" tIns="0" rIns="0" bIns="0" rtlCol="0" anchor="ctr"/>
+          <a:lstStyle/>
+          <a:p>
+            <a:pPr indent="0" marL="0">
+              <a:buNone/>
+            </a:pPr>
+            <a:r>
+              <a:rPr lang="en-US" sz="900" dirty="0">
+                <a:solidFill>
+                  <a:srgbClr val="64748B"/>
+                </a:solidFill>
+                <a:latin typeface="Arial" pitchFamily="34" charset="0"/>
+                <a:ea typeface="Arial" pitchFamily="34" charset="-122"/>
+                <a:cs typeface="Arial" pitchFamily="34" charset="-120"/>
+              </a:rPr>
+              <a:t>ベッドが少し堅かった</a:t>
+            </a:r>
+            <a:endParaRPr lang="en-US" sz="900" dirty="0"/>
+          </a:p>
+        </p:txBody>
+      </p:sp>
+      <p:sp>
+        <p:nvSpPr>
+          <p:cNvPr id="18" name="Text 16"/>
+          <p:cNvSpPr/>
+          <p:nvPr/>
+        </p:nvSpPr>
+        <p:spPr>
+          <a:xfrm>
+            <a:off x="3429000" y="1828800"/>
+            <a:ext cx="2377440" cy="640080"/>
+          </a:xfrm>
+          <a:prstGeom prst="rect">
+            <a:avLst/>
+          </a:prstGeom>
+          <a:noFill/>
+          <a:ln/>
+        </p:spPr>
+        <p:txBody>
+          <a:bodyPr wrap="square" lIns="0" tIns="0" rIns="0" bIns="0" rtlCol="0" anchor="ctr"/>
+          <a:lstStyle/>
+          <a:p>
+            <a:pPr indent="0" marL="0">
+              <a:buNone/>
+            </a:pPr>
+            <a:r>
+              <a:rPr lang="en-US" sz="900" i="1" dirty="0">
+                <a:solidFill>
+                  <a:srgbClr val="3B7DD8"/>
+                </a:solidFill>
+                <a:latin typeface="Arial" pitchFamily="34" charset="0"/>
+                <a:ea typeface="Arial" pitchFamily="34" charset="-122"/>
+                <a:cs typeface="Arial" pitchFamily="34" charset="-120"/>
+              </a:rPr>
+              <a:t>「Really disturbed us」</a:t>
+            </a:r>
+            <a:endParaRPr lang="en-US" sz="900" dirty="0"/>
+          </a:p>
+        </p:txBody>
+      </p:sp>
+      <p:sp>
+        <p:nvSpPr>
+          <p:cNvPr id="19" name="Shape 17"/>
+          <p:cNvSpPr/>
+          <p:nvPr/>
+        </p:nvSpPr>
+        <p:spPr>
+          <a:xfrm>
+            <a:off x="6126480" y="1051560"/>
+            <a:ext cx="2651760" cy="1600200"/>
+          </a:xfrm>
+          <a:prstGeom prst="rect">
+            <a:avLst/>
+          </a:prstGeom>
+          <a:solidFill>
+            <a:srgbClr val="FFFFFF"/>
+          </a:solidFill>
+          <a:ln/>
+          <a:effectLst>
+            <a:outerShdw sx="100000" sy="100000" kx="0" ky="0" algn="bl" rotWithShape="0" blurRad="50800" dist="25400" dir="8100000">
+              <a:srgbClr val="000000">
+                <a:alpha val="10000"/>
+              </a:srgbClr>
+            </a:outerShdw>
+          </a:effectLst>
+        </p:spPr>
+      </p:sp>
+      <p:sp>
+        <p:nvSpPr>
+          <p:cNvPr id="20" name="Shape 18"/>
+          <p:cNvSpPr/>
+          <p:nvPr/>
+        </p:nvSpPr>
+        <p:spPr>
+          <a:xfrm>
+            <a:off x="6126480" y="1051560"/>
+            <a:ext cx="54864" cy="1600200"/>
+          </a:xfrm>
+          <a:prstGeom prst="rect">
+            <a:avLst/>
+          </a:prstGeom>
+          <a:solidFill>
+            <a:srgbClr val="16A34A"/>
+          </a:solidFill>
+          <a:ln/>
+        </p:spPr>
+      </p:sp>
+      <p:sp>
+        <p:nvSpPr>
+          <p:cNvPr id="21" name="Shape 19"/>
+          <p:cNvSpPr/>
+          <p:nvPr/>
+        </p:nvSpPr>
+        <p:spPr>
+          <a:xfrm>
+            <a:off x="7955280" y="1124712"/>
+            <a:ext cx="658368" cy="228600"/>
+          </a:xfrm>
+          <a:prstGeom prst="rect">
+            <a:avLst/>
+          </a:prstGeom>
+          <a:solidFill>
+            <a:srgbClr val="DCFCE7"/>
+          </a:solidFill>
+          <a:ln/>
+        </p:spPr>
+      </p:sp>
+      <p:sp>
+        <p:nvSpPr>
+          <p:cNvPr id="22" name="Text 20"/>
+          <p:cNvSpPr/>
+          <p:nvPr/>
+        </p:nvSpPr>
+        <p:spPr>
+          <a:xfrm>
+            <a:off x="7955280" y="1124712"/>
+            <a:ext cx="658368" cy="228600"/>
+          </a:xfrm>
+          <a:prstGeom prst="rect">
+            <a:avLst/>
+          </a:prstGeom>
+          <a:noFill/>
+          <a:ln/>
+        </p:spPr>
+        <p:txBody>
+          <a:bodyPr wrap="square" lIns="0" tIns="0" rIns="0" bIns="0" rtlCol="0" anchor="ctr"/>
+          <a:lstStyle/>
+          <a:p>
+            <a:pPr algn="ctr" indent="0" marL="0">
+              <a:buNone/>
+            </a:pPr>
+            <a:r>
+              <a:rPr lang="en-US" sz="900" b="1" dirty="0">
+                <a:solidFill>
+                  <a:srgbClr val="16A34A"/>
+                </a:solidFill>
+                <a:latin typeface="Arial" pitchFamily="34" charset="0"/>
+                <a:ea typeface="Arial" pitchFamily="34" charset="-122"/>
+                <a:cs typeface="Arial" pitchFamily="34" charset="-120"/>
+              </a:rPr>
+              <a:t>50件+</a:t>
+            </a:r>
+            <a:endParaRPr lang="en-US" sz="900" dirty="0"/>
+          </a:p>
+        </p:txBody>
+      </p:sp>
+      <p:sp>
+        <p:nvSpPr>
+          <p:cNvPr id="23" name="Text 21"/>
+          <p:cNvSpPr/>
+          <p:nvPr/>
+        </p:nvSpPr>
+        <p:spPr>
+          <a:xfrm>
+            <a:off x="6263640" y="1124712"/>
             <a:ext cx="1645920" cy="274320"/>
           </a:xfrm>
           <a:prstGeom prst="rect">
@@ -11016,13 +11256,13 @@
       </p:sp>
       <p:sp>
         <p:nvSpPr>
-          <p:cNvPr id="17" name="Text 15"/>
-          <p:cNvSpPr/>
-          <p:nvPr/>
-        </p:nvSpPr>
-        <p:spPr>
-          <a:xfrm>
-            <a:off x="3429000" y="1417320"/>
+          <p:cNvPr id="24" name="Text 22"/>
+          <p:cNvSpPr/>
+          <p:nvPr/>
+        </p:nvSpPr>
+        <p:spPr>
+          <a:xfrm>
+            <a:off x="6263640" y="1417320"/>
             <a:ext cx="2377440" cy="365760"/>
           </a:xfrm>
           <a:prstGeom prst="rect">
@@ -11055,13 +11295,13 @@
       </p:sp>
       <p:sp>
         <p:nvSpPr>
-          <p:cNvPr id="18" name="Text 16"/>
-          <p:cNvSpPr/>
-          <p:nvPr/>
-        </p:nvSpPr>
-        <p:spPr>
-          <a:xfrm>
-            <a:off x="3429000" y="1828800"/>
+          <p:cNvPr id="25" name="Text 23"/>
+          <p:cNvSpPr/>
+          <p:nvPr/>
+        </p:nvSpPr>
+        <p:spPr>
+          <a:xfrm>
+            <a:off x="6263640" y="1828800"/>
             <a:ext cx="2377440" cy="640080"/>
           </a:xfrm>
           <a:prstGeom prst="rect">
@@ -11094,13 +11334,13 @@
       </p:sp>
       <p:sp>
         <p:nvSpPr>
-          <p:cNvPr id="19" name="Shape 17"/>
-          <p:cNvSpPr/>
-          <p:nvPr/>
-        </p:nvSpPr>
-        <p:spPr>
-          <a:xfrm>
-            <a:off x="6126480" y="1051560"/>
+          <p:cNvPr id="26" name="Shape 24"/>
+          <p:cNvSpPr/>
+          <p:nvPr/>
+        </p:nvSpPr>
+        <p:spPr>
+          <a:xfrm>
+            <a:off x="457200" y="2880360"/>
             <a:ext cx="2651760" cy="1600200"/>
           </a:xfrm>
           <a:prstGeom prst="rect">
@@ -11121,13 +11361,13 @@
       </p:sp>
       <p:sp>
         <p:nvSpPr>
-          <p:cNvPr id="20" name="Shape 18"/>
-          <p:cNvSpPr/>
-          <p:nvPr/>
-        </p:nvSpPr>
-        <p:spPr>
-          <a:xfrm>
-            <a:off x="6126480" y="1051560"/>
+          <p:cNvPr id="27" name="Shape 25"/>
+          <p:cNvSpPr/>
+          <p:nvPr/>
+        </p:nvSpPr>
+        <p:spPr>
+          <a:xfrm>
+            <a:off x="457200" y="2880360"/>
             <a:ext cx="54864" cy="1600200"/>
           </a:xfrm>
           <a:prstGeom prst="rect">
@@ -11141,13 +11381,13 @@
       </p:sp>
       <p:sp>
         <p:nvSpPr>
-          <p:cNvPr id="21" name="Shape 19"/>
-          <p:cNvSpPr/>
-          <p:nvPr/>
-        </p:nvSpPr>
-        <p:spPr>
-          <a:xfrm>
-            <a:off x="7955280" y="1124712"/>
+          <p:cNvPr id="28" name="Shape 26"/>
+          <p:cNvSpPr/>
+          <p:nvPr/>
+        </p:nvSpPr>
+        <p:spPr>
+          <a:xfrm>
+            <a:off x="2286000" y="2953512"/>
             <a:ext cx="658368" cy="228600"/>
           </a:xfrm>
           <a:prstGeom prst="rect">
@@ -11161,13 +11401,13 @@
       </p:sp>
       <p:sp>
         <p:nvSpPr>
-          <p:cNvPr id="22" name="Text 20"/>
-          <p:cNvSpPr/>
-          <p:nvPr/>
-        </p:nvSpPr>
-        <p:spPr>
-          <a:xfrm>
-            <a:off x="7955280" y="1124712"/>
+          <p:cNvPr id="29" name="Text 27"/>
+          <p:cNvSpPr/>
+          <p:nvPr/>
+        </p:nvSpPr>
+        <p:spPr>
+          <a:xfrm>
+            <a:off x="2286000" y="2953512"/>
             <a:ext cx="658368" cy="228600"/>
           </a:xfrm>
           <a:prstGeom prst="rect">
@@ -11200,229 +11440,6 @@
       </p:sp>
       <p:sp>
         <p:nvSpPr>
-          <p:cNvPr id="23" name="Text 21"/>
-          <p:cNvSpPr/>
-          <p:nvPr/>
-        </p:nvSpPr>
-        <p:spPr>
-          <a:xfrm>
-            <a:off x="6263640" y="1124712"/>
-            <a:ext cx="1645920" cy="274320"/>
-          </a:xfrm>
-          <a:prstGeom prst="rect">
-            <a:avLst/>
-          </a:prstGeom>
-          <a:noFill/>
-          <a:ln/>
-        </p:spPr>
-        <p:txBody>
-          <a:bodyPr wrap="square" lIns="0" tIns="0" rIns="0" bIns="0" rtlCol="0" anchor="ctr"/>
-          <a:lstStyle/>
-          <a:p>
-            <a:pPr indent="0" marL="0">
-              <a:buNone/>
-            </a:pPr>
-            <a:r>
-              <a:rPr lang="en-US" sz="1300" b="1" dirty="0">
-                <a:solidFill>
-                  <a:srgbClr val="1A2744"/>
-                </a:solidFill>
-                <a:latin typeface="Arial" pitchFamily="34" charset="0"/>
-                <a:ea typeface="Arial" pitchFamily="34" charset="-122"/>
-                <a:cs typeface="Arial" pitchFamily="34" charset="-120"/>
-              </a:rPr>
-              <a:t>快適さ・設備</a:t>
-            </a:r>
-            <a:endParaRPr lang="en-US" sz="1300" dirty="0"/>
-          </a:p>
-        </p:txBody>
-      </p:sp>
-      <p:sp>
-        <p:nvSpPr>
-          <p:cNvPr id="24" name="Text 22"/>
-          <p:cNvSpPr/>
-          <p:nvPr/>
-        </p:nvSpPr>
-        <p:spPr>
-          <a:xfrm>
-            <a:off x="6263640" y="1417320"/>
-            <a:ext cx="2377440" cy="365760"/>
-          </a:xfrm>
-          <a:prstGeom prst="rect">
-            <a:avLst/>
-          </a:prstGeom>
-          <a:noFill/>
-          <a:ln/>
-        </p:spPr>
-        <p:txBody>
-          <a:bodyPr wrap="square" lIns="0" tIns="0" rIns="0" bIns="0" rtlCol="0" anchor="ctr"/>
-          <a:lstStyle/>
-          <a:p>
-            <a:pPr indent="0" marL="0">
-              <a:buNone/>
-            </a:pPr>
-            <a:r>
-              <a:rPr lang="en-US" sz="900" dirty="0">
-                <a:solidFill>
-                  <a:srgbClr val="64748B"/>
-                </a:solidFill>
-                <a:latin typeface="Arial" pitchFamily="34" charset="0"/>
-                <a:ea typeface="Arial" pitchFamily="34" charset="-122"/>
-                <a:cs typeface="Arial" pitchFamily="34" charset="-120"/>
-              </a:rPr>
-              <a:t>ベッドが少し堅かった</a:t>
-            </a:r>
-            <a:endParaRPr lang="en-US" sz="900" dirty="0"/>
-          </a:p>
-        </p:txBody>
-      </p:sp>
-      <p:sp>
-        <p:nvSpPr>
-          <p:cNvPr id="25" name="Text 23"/>
-          <p:cNvSpPr/>
-          <p:nvPr/>
-        </p:nvSpPr>
-        <p:spPr>
-          <a:xfrm>
-            <a:off x="6263640" y="1828800"/>
-            <a:ext cx="2377440" cy="640080"/>
-          </a:xfrm>
-          <a:prstGeom prst="rect">
-            <a:avLst/>
-          </a:prstGeom>
-          <a:noFill/>
-          <a:ln/>
-        </p:spPr>
-        <p:txBody>
-          <a:bodyPr wrap="square" lIns="0" tIns="0" rIns="0" bIns="0" rtlCol="0" anchor="ctr"/>
-          <a:lstStyle/>
-          <a:p>
-            <a:pPr indent="0" marL="0">
-              <a:buNone/>
-            </a:pPr>
-            <a:r>
-              <a:rPr lang="en-US" sz="900" i="1" dirty="0">
-                <a:solidFill>
-                  <a:srgbClr val="3B7DD8"/>
-                </a:solidFill>
-                <a:latin typeface="Arial" pitchFamily="34" charset="0"/>
-                <a:ea typeface="Arial" pitchFamily="34" charset="-122"/>
-                <a:cs typeface="Arial" pitchFamily="34" charset="-120"/>
-              </a:rPr>
-              <a:t>「Really disturbed us」</a:t>
-            </a:r>
-            <a:endParaRPr lang="en-US" sz="900" dirty="0"/>
-          </a:p>
-        </p:txBody>
-      </p:sp>
-      <p:sp>
-        <p:nvSpPr>
-          <p:cNvPr id="26" name="Shape 24"/>
-          <p:cNvSpPr/>
-          <p:nvPr/>
-        </p:nvSpPr>
-        <p:spPr>
-          <a:xfrm>
-            <a:off x="457200" y="2880360"/>
-            <a:ext cx="2651760" cy="1600200"/>
-          </a:xfrm>
-          <a:prstGeom prst="rect">
-            <a:avLst/>
-          </a:prstGeom>
-          <a:solidFill>
-            <a:srgbClr val="FFFFFF"/>
-          </a:solidFill>
-          <a:ln/>
-          <a:effectLst>
-            <a:outerShdw sx="100000" sy="100000" kx="0" ky="0" algn="bl" rotWithShape="0" blurRad="50800" dist="25400" dir="8100000">
-              <a:srgbClr val="000000">
-                <a:alpha val="10000"/>
-              </a:srgbClr>
-            </a:outerShdw>
-          </a:effectLst>
-        </p:spPr>
-      </p:sp>
-      <p:sp>
-        <p:nvSpPr>
-          <p:cNvPr id="27" name="Shape 25"/>
-          <p:cNvSpPr/>
-          <p:nvPr/>
-        </p:nvSpPr>
-        <p:spPr>
-          <a:xfrm>
-            <a:off x="457200" y="2880360"/>
-            <a:ext cx="54864" cy="1600200"/>
-          </a:xfrm>
-          <a:prstGeom prst="rect">
-            <a:avLst/>
-          </a:prstGeom>
-          <a:solidFill>
-            <a:srgbClr val="16A34A"/>
-          </a:solidFill>
-          <a:ln/>
-        </p:spPr>
-      </p:sp>
-      <p:sp>
-        <p:nvSpPr>
-          <p:cNvPr id="28" name="Shape 26"/>
-          <p:cNvSpPr/>
-          <p:nvPr/>
-        </p:nvSpPr>
-        <p:spPr>
-          <a:xfrm>
-            <a:off x="2286000" y="2953512"/>
-            <a:ext cx="658368" cy="228600"/>
-          </a:xfrm>
-          <a:prstGeom prst="rect">
-            <a:avLst/>
-          </a:prstGeom>
-          <a:solidFill>
-            <a:srgbClr val="DCFCE7"/>
-          </a:solidFill>
-          <a:ln/>
-        </p:spPr>
-      </p:sp>
-      <p:sp>
-        <p:nvSpPr>
-          <p:cNvPr id="29" name="Text 27"/>
-          <p:cNvSpPr/>
-          <p:nvPr/>
-        </p:nvSpPr>
-        <p:spPr>
-          <a:xfrm>
-            <a:off x="2286000" y="2953512"/>
-            <a:ext cx="658368" cy="228600"/>
-          </a:xfrm>
-          <a:prstGeom prst="rect">
-            <a:avLst/>
-          </a:prstGeom>
-          <a:noFill/>
-          <a:ln/>
-        </p:spPr>
-        <p:txBody>
-          <a:bodyPr wrap="square" lIns="0" tIns="0" rIns="0" bIns="0" rtlCol="0" anchor="ctr"/>
-          <a:lstStyle/>
-          <a:p>
-            <a:pPr algn="ctr" indent="0" marL="0">
-              <a:buNone/>
-            </a:pPr>
-            <a:r>
-              <a:rPr lang="en-US" sz="900" b="1" dirty="0">
-                <a:solidFill>
-                  <a:srgbClr val="16A34A"/>
-                </a:solidFill>
-                <a:latin typeface="Arial" pitchFamily="34" charset="0"/>
-                <a:ea typeface="Arial" pitchFamily="34" charset="-122"/>
-                <a:cs typeface="Arial" pitchFamily="34" charset="-120"/>
-              </a:rPr>
-              <a:t>10件+</a:t>
-            </a:r>
-            <a:endParaRPr lang="en-US" sz="900" dirty="0"/>
-          </a:p>
-        </p:txBody>
-      </p:sp>
-      <p:sp>
-        <p:nvSpPr>
           <p:cNvPr id="30" name="Text 28"/>
           <p:cNvSpPr/>
           <p:nvPr/>
@@ -11638,7 +11655,7 @@
                 <a:ea typeface="Arial" pitchFamily="34" charset="-122"/>
                 <a:cs typeface="Arial" pitchFamily="34" charset="-120"/>
               </a:rPr>
-              <a:t>10件+</a:t>
+              <a:t>20件+</a:t>
             </a:r>
             <a:endParaRPr lang="en-US" sz="900" dirty="0"/>
           </a:p>
@@ -11861,7 +11878,7 @@
                 <a:ea typeface="Arial" pitchFamily="34" charset="-122"/>
                 <a:cs typeface="Arial" pitchFamily="34" charset="-120"/>
               </a:rPr>
-              <a:t>10件+</a:t>
+              <a:t>20件+</a:t>
             </a:r>
             <a:endParaRPr lang="en-US" sz="900" dirty="0"/>
           </a:p>
@@ -11900,7 +11917,7 @@
                 <a:ea typeface="Arial" pitchFamily="34" charset="-122"/>
                 <a:cs typeface="Arial" pitchFamily="34" charset="-120"/>
               </a:rPr>
-              <a:t>コストパフォーマンス</a:t>
+              <a:t>コンビニ・周辺施設</a:t>
             </a:r>
             <a:endParaRPr lang="en-US" sz="1300" dirty="0"/>
           </a:p>
@@ -11939,7 +11956,7 @@
                 <a:ea typeface="Arial" pitchFamily="34" charset="-122"/>
                 <a:cs typeface="Arial" pitchFamily="34" charset="-120"/>
               </a:rPr>
-              <a:t>部屋は小さいですが、基本的なアメニティはすべて揃っているので、コストパフォーマンスに優れています</a:t>
+              <a:t>途中にローソンがあり、池袋から1駅、新宿から3駅と非常に便利な立地です</a:t>
             </a:r>
             <a:endParaRPr lang="en-US" sz="900" dirty="0"/>
           </a:p>
@@ -11978,7 +11995,7 @@
                 <a:ea typeface="Arial" pitchFamily="34" charset="-122"/>
                 <a:cs typeface="Arial" pitchFamily="34" charset="-120"/>
               </a:rPr>
-              <a:t>「素敵でお手頃価格 素敵でお手頃価格」</a:t>
+              <a:t>「近隣には松本清、ココナ、赤いローソンコンビニエンスストアがあります」</a:t>
             </a:r>
             <a:endParaRPr lang="en-US" sz="900" dirty="0"/>
           </a:p>
@@ -12736,7 +12753,7 @@
                           <a:ea typeface="Arial" pitchFamily="34" charset="-122"/>
                           <a:cs typeface="Arial" pitchFamily="34" charset="-120"/>
                         </a:rPr>
-                        <a:t>16件</a:t>
+                        <a:t>22件</a:t>
                       </a:r>
                       <a:endParaRPr lang="en-US" sz="900" dirty="0">
                         <a:latin typeface="Arial" charset="0"/>
@@ -13010,7 +13027,7 @@
                           <a:ea typeface="Arial" pitchFamily="34" charset="-122"/>
                           <a:cs typeface="Arial" pitchFamily="34" charset="-120"/>
                         </a:rPr>
-                        <a:t>9件</a:t>
+                        <a:t>19件</a:t>
                       </a:r>
                       <a:endParaRPr lang="en-US" sz="900" dirty="0">
                         <a:latin typeface="Arial" charset="0"/>
@@ -13148,7 +13165,7 @@
                           <a:ea typeface="Arial" pitchFamily="34" charset="-122"/>
                           <a:cs typeface="Arial" pitchFamily="34" charset="-120"/>
                         </a:rPr>
-                        <a:t>防音性能</a:t>
+                        <a:t>設備の老朽化</a:t>
                       </a:r>
                       <a:endParaRPr lang="en-US" sz="900" dirty="0">
                         <a:latin typeface="Arial" charset="0"/>
@@ -13216,7 +13233,7 @@
                           <a:ea typeface="Arial" pitchFamily="34" charset="-122"/>
                           <a:cs typeface="Arial" pitchFamily="34" charset="-120"/>
                         </a:rPr>
-                        <a:t>ああ、エアコンの音がうるさくてよく眠れません</a:t>
+                        <a:t>部屋はやや年季が入っていますが、きれいに掃除されておりました</a:t>
                       </a:r>
                       <a:endParaRPr lang="en-US" sz="900" dirty="0">
                         <a:latin typeface="Arial" charset="0"/>
@@ -13284,7 +13301,7 @@
                           <a:ea typeface="Arial" pitchFamily="34" charset="-122"/>
                           <a:cs typeface="Arial" pitchFamily="34" charset="-120"/>
                         </a:rPr>
-                        <a:t>4件</a:t>
+                        <a:t>10件</a:t>
                       </a:r>
                       <a:endParaRPr lang="en-US" sz="900" dirty="0">
                         <a:latin typeface="Arial" charset="0"/>
@@ -13558,7 +13575,7 @@
                           <a:ea typeface="Arial" pitchFamily="34" charset="-122"/>
                           <a:cs typeface="Arial" pitchFamily="34" charset="-120"/>
                         </a:rPr>
-                        <a:t>4件</a:t>
+                        <a:t>9件</a:t>
                       </a:r>
                       <a:endParaRPr lang="en-US" sz="900" dirty="0">
                         <a:latin typeface="Arial" charset="0"/>
@@ -13696,7 +13713,7 @@
                           <a:ea typeface="Arial" pitchFamily="34" charset="-122"/>
                           <a:cs typeface="Arial" pitchFamily="34" charset="-120"/>
                         </a:rPr>
-                        <a:t>部屋の狭さ</a:t>
+                        <a:t>防音性能</a:t>
                       </a:r>
                       <a:endParaRPr lang="en-US" sz="900" dirty="0">
                         <a:latin typeface="Arial" charset="0"/>
@@ -13764,7 +13781,7 @@
                           <a:ea typeface="Arial" pitchFamily="34" charset="-122"/>
                           <a:cs typeface="Arial" pitchFamily="34" charset="-120"/>
                         </a:rPr>
-                        <a:t>部屋は小さいですが、基本的なアメニティはすべて揃っているので、コストパフォーマンスに優れています</a:t>
+                        <a:t>ああ、エアコンの音がうるさくてよく眠れません</a:t>
                       </a:r>
                       <a:endParaRPr lang="en-US" sz="900" dirty="0">
                         <a:latin typeface="Arial" charset="0"/>
@@ -13832,7 +13849,7 @@
                           <a:ea typeface="Arial" pitchFamily="34" charset="-122"/>
                           <a:cs typeface="Arial" pitchFamily="34" charset="-120"/>
                         </a:rPr>
-                        <a:t>3件</a:t>
+                        <a:t>6件</a:t>
                       </a:r>
                       <a:endParaRPr lang="en-US" sz="900" dirty="0">
                         <a:latin typeface="Arial" charset="0"/>
@@ -13970,7 +13987,7 @@
                           <a:ea typeface="Arial" pitchFamily="34" charset="-122"/>
                           <a:cs typeface="Arial" pitchFamily="34" charset="-120"/>
                         </a:rPr>
-                        <a:t>窓・採光</a:t>
+                        <a:t>部屋の狭さ</a:t>
                       </a:r>
                       <a:endParaRPr lang="en-US" sz="900" dirty="0">
                         <a:latin typeface="Arial" charset="0"/>
@@ -14038,7 +14055,7 @@
                           <a:ea typeface="Arial" pitchFamily="34" charset="-122"/>
                           <a:cs typeface="Arial" pitchFamily="34" charset="-120"/>
                         </a:rPr>
-                        <a:t>窓がない部屋だったので寝泊まりだけでは充分ですがホテル滞在メインだと部屋有りのとこがいいかもです</a:t>
+                        <a:t>部屋は小さいですが、基本的なアメニティはすべて揃っているので、コストパフォーマンスに優れています</a:t>
                       </a:r>
                       <a:endParaRPr lang="en-US" sz="900" dirty="0">
                         <a:latin typeface="Arial" charset="0"/>
@@ -14106,7 +14123,7 @@
                           <a:ea typeface="Arial" pitchFamily="34" charset="-122"/>
                           <a:cs typeface="Arial" pitchFamily="34" charset="-120"/>
                         </a:rPr>
-                        <a:t>3件</a:t>
+                        <a:t>5件</a:t>
                       </a:r>
                       <a:endParaRPr lang="en-US" sz="900" dirty="0">
                         <a:latin typeface="Arial" charset="0"/>
@@ -14244,7 +14261,7 @@
                           <a:ea typeface="Arial" pitchFamily="34" charset="-122"/>
                           <a:cs typeface="Arial" pitchFamily="34" charset="-120"/>
                         </a:rPr>
-                        <a:t>設備の老朽化</a:t>
+                        <a:t>窓・採光</a:t>
                       </a:r>
                       <a:endParaRPr lang="en-US" sz="900" dirty="0">
                         <a:latin typeface="Arial" charset="0"/>
@@ -14312,7 +14329,7 @@
                           <a:ea typeface="Arial" pitchFamily="34" charset="-122"/>
                           <a:cs typeface="Arial" pitchFamily="34" charset="-120"/>
                         </a:rPr>
-                        <a:t>部屋はやや年季が入っていますが、きれいに掃除されておりました</a:t>
+                        <a:t>窓がない部屋だったので寝泊まりだけでは充分ですがホテル滞在メインだと部屋有りのとこがいいかもです</a:t>
                       </a:r>
                       <a:endParaRPr lang="en-US" sz="900" dirty="0">
                         <a:latin typeface="Arial" charset="0"/>
@@ -14380,7 +14397,7 @@
                           <a:ea typeface="Arial" pitchFamily="34" charset="-122"/>
                           <a:cs typeface="Arial" pitchFamily="34" charset="-120"/>
                         </a:rPr>
-                        <a:t>2件</a:t>
+                        <a:t>4件</a:t>
                       </a:r>
                       <a:endParaRPr lang="en-US" sz="900" dirty="0">
                         <a:latin typeface="Arial" charset="0"/>
@@ -14518,7 +14535,7 @@
                           <a:ea typeface="Arial" pitchFamily="34" charset="-122"/>
                           <a:cs typeface="Arial" pitchFamily="34" charset="-120"/>
                         </a:rPr>
-                        <a:t>朝食の改善要望</a:t>
+                        <a:t>清掃不備</a:t>
                       </a:r>
                       <a:endParaRPr lang="en-US" sz="900" dirty="0">
                         <a:latin typeface="Arial" charset="0"/>
@@ -14586,7 +14603,7 @@
                           <a:ea typeface="Arial" pitchFamily="34" charset="-122"/>
                           <a:cs typeface="Arial" pitchFamily="34" charset="-120"/>
                         </a:rPr>
-                        <a:t>宿泊者サービスがどこもウェルカムドリンクでチェックイン時には終わっていることがほどんどでしたが、こちらは朝食時にホ...</a:t>
+                        <a:t>汚いです 汚いです</a:t>
                       </a:r>
                       <a:endParaRPr lang="en-US" sz="900" dirty="0">
                         <a:latin typeface="Arial" charset="0"/>
@@ -14654,7 +14671,7 @@
                           <a:ea typeface="Arial" pitchFamily="34" charset="-122"/>
                           <a:cs typeface="Arial" pitchFamily="34" charset="-120"/>
                         </a:rPr>
-                        <a:t>2件</a:t>
+                        <a:t>4件</a:t>
                       </a:r>
                       <a:endParaRPr lang="en-US" sz="900" dirty="0">
                         <a:latin typeface="Arial" charset="0"/>
@@ -14792,7 +14809,7 @@
                           <a:ea typeface="Arial" pitchFamily="34" charset="-122"/>
                           <a:cs typeface="Arial" pitchFamily="34" charset="-120"/>
                         </a:rPr>
-                        <a:t>清掃不備</a:t>
+                        <a:t>臭い・匂い</a:t>
                       </a:r>
                       <a:endParaRPr lang="en-US" sz="900" dirty="0">
                         <a:latin typeface="Arial" charset="0"/>
@@ -14860,7 +14877,7 @@
                           <a:ea typeface="Arial" pitchFamily="34" charset="-122"/>
                           <a:cs typeface="Arial" pitchFamily="34" charset="-120"/>
                         </a:rPr>
-                        <a:t>汚いです 汚いです</a:t>
+                        <a:t>お部屋もタバコの匂いは気にならなかったので良かったです</a:t>
                       </a:r>
                       <a:endParaRPr lang="en-US" sz="900" dirty="0">
                         <a:latin typeface="Arial" charset="0"/>
@@ -14928,7 +14945,7 @@
                           <a:ea typeface="Arial" pitchFamily="34" charset="-122"/>
                           <a:cs typeface="Arial" pitchFamily="34" charset="-120"/>
                         </a:rPr>
-                        <a:t>2件</a:t>
+                        <a:t>3件</a:t>
                       </a:r>
                       <a:endParaRPr lang="en-US" sz="900" dirty="0">
                         <a:latin typeface="Arial" charset="0"/>

--- a/納品レポート/ホテル別レポート/richmond_mejiro_口コミ分析レポート.pptx
+++ b/納品レポート/ホテル別レポート/richmond_mejiro_口コミ分析レポート.pptx
@@ -2818,7 +2818,7 @@
                 <a:ea typeface="Arial" pitchFamily="34" charset="-122"/>
                 <a:cs typeface="Arial" pitchFamily="34" charset="-120"/>
               </a:rPr>
-              <a:t>作成日：2026年4月6日</a:t>
+              <a:t>作成日：2026年4月7日</a:t>
             </a:r>
             <a:endParaRPr lang="en-US" sz="1000" dirty="0"/>
           </a:p>

--- a/納品レポート/ホテル別レポート/richmond_mejiro_口コミ分析レポート.pptx
+++ b/納品レポート/ホテル別レポート/richmond_mejiro_口コミ分析レポート.pptx
@@ -2818,7 +2818,7 @@
                 <a:ea typeface="Arial" pitchFamily="34" charset="-122"/>
                 <a:cs typeface="Arial" pitchFamily="34" charset="-120"/>
               </a:rPr>
-              <a:t>作成日：2026年4月7日</a:t>
+              <a:t>作成日：2026年4月8日</a:t>
             </a:r>
             <a:endParaRPr lang="en-US" sz="1000" dirty="0"/>
           </a:p>

--- a/納品レポート/ホテル別レポート/richmond_mejiro_口コミ分析レポート.pptx
+++ b/納品レポート/ホテル別レポート/richmond_mejiro_口コミ分析レポート.pptx
@@ -2818,7 +2818,7 @@
                 <a:ea typeface="Arial" pitchFamily="34" charset="-122"/>
                 <a:cs typeface="Arial" pitchFamily="34" charset="-120"/>
               </a:rPr>
-              <a:t>作成日：2026年4月10日</a:t>
+              <a:t>作成日：2026年4月11日</a:t>
             </a:r>
             <a:endParaRPr lang="en-US" sz="1000" dirty="0"/>
           </a:p>

--- a/納品レポート/ホテル別レポート/richmond_mejiro_口コミ分析レポート.pptx
+++ b/納品レポート/ホテル別レポート/richmond_mejiro_口コミ分析レポート.pptx
@@ -180,22 +180,22 @@
                 <c:ptCount val="6"/>
                 <c:lvl>
                   <c:pt idx="0">
+                    <c:v>Agoda</c:v>
+                  </c:pt>
+                  <c:pt idx="1">
                     <c:v>Trip.com</c:v>
                   </c:pt>
-                  <c:pt idx="1">
-                    <c:v>Agoda</c:v>
-                  </c:pt>
                   <c:pt idx="2">
-                    <c:v>じゃらん</c:v>
+                    <c:v>Google</c:v>
                   </c:pt>
                   <c:pt idx="3">
-                    <c:v>Google</c:v>
+                    <c:v>楽天トラベル</c:v>
                   </c:pt>
                   <c:pt idx="4">
-                    <c:v>楽天トラベル</c:v>
+                    <c:v>Booking.com</c:v>
                   </c:pt>
                   <c:pt idx="5">
-                    <c:v>Booking.com</c:v>
+                    <c:v>じゃらん</c:v>
                   </c:pt>
                 </c:lvl>
               </c:multiLvlStrCache>
@@ -208,22 +208,22 @@
                 <c:formatCode>General</c:formatCode>
                 <c:ptCount val="6"/>
                 <c:pt idx="0">
-                  <c:v>9.45</c:v>
+                  <c:v>10</c:v>
                 </c:pt>
                 <c:pt idx="1">
-                  <c:v>9.33</c:v>
+                  <c:v>9.48</c:v>
                 </c:pt>
                 <c:pt idx="2">
-                  <c:v>8.62</c:v>
+                  <c:v>8.4</c:v>
                 </c:pt>
                 <c:pt idx="3">
-                  <c:v>8.5</c:v>
+                  <c:v>8</c:v>
                 </c:pt>
                 <c:pt idx="4">
-                  <c:v>8.25</c:v>
+                  <c:v>7.86</c:v>
                 </c:pt>
                 <c:pt idx="5">
-                  <c:v>7.74</c:v>
+                  <c:v>7.83</c:v>
                 </c:pt>
               </c:numCache>
             </c:numRef>
@@ -566,13 +566,13 @@
               <c:numCache>
                 <c:ptCount val="3"/>
                 <c:pt idx="0">
-                  <c:v>125</c:v>
+                  <c:v>61</c:v>
                 </c:pt>
                 <c:pt idx="1">
-                  <c:v>16</c:v>
+                  <c:v>9</c:v>
                 </c:pt>
                 <c:pt idx="2">
-                  <c:v>5</c:v>
+                  <c:v>3</c:v>
                 </c:pt>
               </c:numCache>
             </c:numRef>
@@ -768,22 +768,11 @@
               <a:effectLst/>
             </c:spPr>
           </c:dPt>
-          <c:dPt>
-            <c:idx val="8"/>
-            <c:invertIfNegative val="0"/>
-            <c:bubble3D val="0"/>
-            <c:spPr>
-              <a:solidFill>
-                <a:srgbClr val="DC2626"/>
-              </a:solidFill>
-              <a:effectLst/>
-            </c:spPr>
-          </c:dPt>
           <c:cat>
             <c:multiLvlStrRef>
-              <c:f>Sheet1!$A$2:$A$10</c:f>
+              <c:f>Sheet1!$A$2:$A$9</c:f>
               <c:multiLvlStrCache>
-                <c:ptCount val="9"/>
+                <c:ptCount val="8"/>
                 <c:lvl>
                   <c:pt idx="0">
                     <c:v>10点</c:v>
@@ -804,12 +793,9 @@
                     <c:v>5点</c:v>
                   </c:pt>
                   <c:pt idx="6">
-                    <c:v>4点</c:v>
+                    <c:v>3点</c:v>
                   </c:pt>
                   <c:pt idx="7">
-                    <c:v>3点</c:v>
-                  </c:pt>
-                  <c:pt idx="8">
                     <c:v>2点</c:v>
                   </c:pt>
                 </c:lvl>
@@ -818,36 +804,33 @@
           </c:cat>
           <c:val>
             <c:numRef>
-              <c:f>Sheet1!$B$2:$B$10</c:f>
+              <c:f>Sheet1!$B$2:$B$9</c:f>
               <c:numCache>
                 <c:formatCode>General</c:formatCode>
-                <c:ptCount val="9"/>
+                <c:ptCount val="8"/>
                 <c:pt idx="0">
-                  <c:v>64</c:v>
+                  <c:v>30</c:v>
                 </c:pt>
                 <c:pt idx="1">
-                  <c:v>15</c:v>
+                  <c:v>9</c:v>
                 </c:pt>
                 <c:pt idx="2">
-                  <c:v>46</c:v>
+                  <c:v>22</c:v>
                 </c:pt>
                 <c:pt idx="3">
-                  <c:v>7</c:v>
+                  <c:v>4</c:v>
                 </c:pt>
                 <c:pt idx="4">
-                  <c:v>5</c:v>
+                  <c:v>3</c:v>
                 </c:pt>
                 <c:pt idx="5">
-                  <c:v>4</c:v>
+                  <c:v>2</c:v>
                 </c:pt>
                 <c:pt idx="6">
                   <c:v>1</c:v>
                 </c:pt>
                 <c:pt idx="7">
-                  <c:v>1</c:v>
-                </c:pt>
-                <c:pt idx="8">
-                  <c:v>3</c:v>
+                  <c:v>2</c:v>
                 </c:pt>
               </c:numCache>
             </c:numRef>
@@ -2778,7 +2761,7 @@
                 <a:ea typeface="Arial" pitchFamily="34" charset="-122"/>
                 <a:cs typeface="Arial" pitchFamily="34" charset="-120"/>
               </a:rPr>
-              <a:t>分析対象期間：2026年2月〜3月</a:t>
+              <a:t>分析対象期間：2026年3月</a:t>
             </a:r>
             <a:endParaRPr lang="en-US" sz="1000" dirty="0"/>
           </a:p>
@@ -2798,7 +2781,7 @@
                 <a:ea typeface="Arial" pitchFamily="34" charset="-122"/>
                 <a:cs typeface="Arial" pitchFamily="34" charset="-120"/>
               </a:rPr>
-              <a:t>レビュー総数：146件（6サイト）</a:t>
+              <a:t>レビュー総数：73件（6サイト）</a:t>
             </a:r>
             <a:endParaRPr lang="en-US" sz="1000" dirty="0"/>
           </a:p>
@@ -2818,7 +2801,7 @@
                 <a:ea typeface="Arial" pitchFamily="34" charset="-122"/>
                 <a:cs typeface="Arial" pitchFamily="34" charset="-120"/>
               </a:rPr>
-              <a:t>作成日：2026年4月11日</a:t>
+              <a:t>作成日：2026年4月13日</a:t>
             </a:r>
             <a:endParaRPr lang="en-US" sz="1000" dirty="0"/>
           </a:p>
@@ -3364,7 +3347,7 @@
                           <a:ea typeface="Arial" pitchFamily="34" charset="-122"/>
                           <a:cs typeface="Arial" pitchFamily="34" charset="-120"/>
                         </a:rPr>
-                        <a:t>8.60点</a:t>
+                        <a:t>8.49点</a:t>
                       </a:r>
                       <a:endParaRPr lang="en-US" sz="1000" dirty="0">
                         <a:latin typeface="Arial" charset="0"/>
@@ -3432,7 +3415,7 @@
                           <a:ea typeface="Arial" pitchFamily="34" charset="-122"/>
                           <a:cs typeface="Arial" pitchFamily="34" charset="-120"/>
                         </a:rPr>
-                        <a:t>8.9点以上</a:t>
+                        <a:t>8.8点以上</a:t>
                       </a:r>
                       <a:endParaRPr lang="en-US" sz="1000" dirty="0">
                         <a:latin typeface="Arial" charset="0"/>
@@ -3638,7 +3621,7 @@
                           <a:ea typeface="Arial" pitchFamily="34" charset="-122"/>
                           <a:cs typeface="Arial" pitchFamily="34" charset="-120"/>
                         </a:rPr>
-                        <a:t>85.6%</a:t>
+                        <a:t>83.6%</a:t>
                       </a:r>
                       <a:endParaRPr lang="en-US" sz="1000" dirty="0">
                         <a:latin typeface="Arial" charset="0"/>
@@ -3706,7 +3689,7 @@
                           <a:ea typeface="Arial" pitchFamily="34" charset="-122"/>
                           <a:cs typeface="Arial" pitchFamily="34" charset="-120"/>
                         </a:rPr>
-                        <a:t>91%以上</a:t>
+                        <a:t>89%以上</a:t>
                       </a:r>
                       <a:endParaRPr lang="en-US" sz="1000" dirty="0">
                         <a:latin typeface="Arial" charset="0"/>
@@ -3912,7 +3895,7 @@
                           <a:ea typeface="Arial" pitchFamily="34" charset="-122"/>
                           <a:cs typeface="Arial" pitchFamily="34" charset="-120"/>
                         </a:rPr>
-                        <a:t>3.4%</a:t>
+                        <a:t>4.1%</a:t>
                       </a:r>
                       <a:endParaRPr lang="en-US" sz="1000" dirty="0">
                         <a:latin typeface="Arial" charset="0"/>
@@ -3980,7 +3963,7 @@
                           <a:ea typeface="Arial" pitchFamily="34" charset="-122"/>
                           <a:cs typeface="Arial" pitchFamily="34" charset="-120"/>
                         </a:rPr>
-                        <a:t>0%以下</a:t>
+                        <a:t>1%以下</a:t>
                       </a:r>
                       <a:endParaRPr lang="en-US" sz="1000" dirty="0">
                         <a:latin typeface="Arial" charset="0"/>
@@ -4118,7 +4101,7 @@
                           <a:ea typeface="Arial" pitchFamily="34" charset="-122"/>
                           <a:cs typeface="Arial" pitchFamily="34" charset="-120"/>
                         </a:rPr>
-                        <a:t>Booking.com平均評価</a:t>
+                        <a:t>じゃらん平均評価</a:t>
                       </a:r>
                       <a:endParaRPr lang="en-US" sz="1000" dirty="0">
                         <a:latin typeface="Arial" charset="0"/>
@@ -4186,7 +4169,7 @@
                           <a:ea typeface="Arial" pitchFamily="34" charset="-122"/>
                           <a:cs typeface="Arial" pitchFamily="34" charset="-120"/>
                         </a:rPr>
-                        <a:t>7.7点</a:t>
+                        <a:t>7.8点</a:t>
                       </a:r>
                       <a:endParaRPr lang="en-US" sz="1000" dirty="0">
                         <a:latin typeface="Arial" charset="0"/>
@@ -4254,7 +4237,7 @@
                           <a:ea typeface="Arial" pitchFamily="34" charset="-122"/>
                           <a:cs typeface="Arial" pitchFamily="34" charset="-120"/>
                         </a:rPr>
-                        <a:t>8.7点以上</a:t>
+                        <a:t>8.8点以上</a:t>
                       </a:r>
                       <a:endParaRPr lang="en-US" sz="1000" dirty="0">
                         <a:latin typeface="Arial" charset="0"/>
@@ -4734,7 +4717,7 @@
                           <a:ea typeface="Arial" pitchFamily="34" charset="-122"/>
                           <a:cs typeface="Arial" pitchFamily="34" charset="-120"/>
                         </a:rPr>
-                        <a:t>約22件/期間</a:t>
+                        <a:t>約16件/期間</a:t>
                       </a:r>
                       <a:endParaRPr lang="en-US" sz="1000" dirty="0">
                         <a:latin typeface="Arial" charset="0"/>
@@ -4802,7 +4785,7 @@
                           <a:ea typeface="Arial" pitchFamily="34" charset="-122"/>
                           <a:cs typeface="Arial" pitchFamily="34" charset="-120"/>
                         </a:rPr>
-                        <a:t>11件以下</a:t>
+                        <a:t>8件以下</a:t>
                       </a:r>
                       <a:endParaRPr lang="en-US" sz="1000" dirty="0">
                         <a:latin typeface="Arial" charset="0"/>
@@ -5373,7 +5356,7 @@
                 <a:ea typeface="Arial" pitchFamily="34" charset="-122"/>
                 <a:cs typeface="Arial" pitchFamily="34" charset="-120"/>
               </a:rPr>
-              <a:t>8.60</a:t>
+              <a:t>8.49</a:t>
             </a:r>
             <a:endParaRPr lang="en-US" sz="3200" dirty="0"/>
           </a:p>
@@ -5498,7 +5481,7 @@
                 <a:ea typeface="Arial" pitchFamily="34" charset="-122"/>
                 <a:cs typeface="Arial" pitchFamily="34" charset="-120"/>
               </a:rPr>
-              <a:t>85.6%</a:t>
+              <a:t>83.6%</a:t>
             </a:r>
             <a:endParaRPr lang="en-US" sz="3200" dirty="0"/>
           </a:p>
@@ -5623,7 +5606,7 @@
                 <a:ea typeface="Arial" pitchFamily="34" charset="-122"/>
                 <a:cs typeface="Arial" pitchFamily="34" charset="-120"/>
               </a:rPr>
-              <a:t>3.4%</a:t>
+              <a:t>4.1%</a:t>
             </a:r>
             <a:endParaRPr lang="en-US" sz="3200" dirty="0"/>
           </a:p>
@@ -5748,7 +5731,7 @@
                 <a:ea typeface="Arial" pitchFamily="34" charset="-122"/>
                 <a:cs typeface="Arial" pitchFamily="34" charset="-120"/>
               </a:rPr>
-              <a:t>146件</a:t>
+              <a:t>73件</a:t>
             </a:r>
             <a:endParaRPr lang="en-US" sz="3200" dirty="0"/>
           </a:p>
@@ -5916,6 +5899,46 @@
                 <a:ea typeface="Arial" pitchFamily="34" charset="-122"/>
                 <a:cs typeface="Arial" pitchFamily="34" charset="-120"/>
               </a:rPr>
+              <a:t>スタッフの対応 </a:t>
+            </a:r>
+            <a:endParaRPr lang="en-US" sz="1100" dirty="0"/>
+          </a:p>
+          <a:p>
+            <a:pPr indent="0" marL="0">
+              <a:spcAft>
+                <a:spcPts val="200"/>
+              </a:spcAft>
+              <a:buNone/>
+            </a:pPr>
+            <a:r>
+              <a:rPr lang="en-US" sz="900" dirty="0">
+                <a:solidFill>
+                  <a:srgbClr val="64748B"/>
+                </a:solidFill>
+                <a:latin typeface="Arial" pitchFamily="34" charset="0"/>
+                <a:ea typeface="Arial" pitchFamily="34" charset="-122"/>
+                <a:cs typeface="Arial" pitchFamily="34" charset="-120"/>
+              </a:rPr>
+              <a:t>  とにかくスタッフに電話したら、とても親切に対応してくれて、対応してくれたのはありがたかったのですが、エアコンの音は...</a:t>
+            </a:r>
+            <a:endParaRPr lang="en-US" sz="1100" dirty="0"/>
+          </a:p>
+          <a:p>
+            <a:pPr indent="0" marL="0">
+              <a:spcAft>
+                <a:spcPts val="200"/>
+              </a:spcAft>
+              <a:buNone/>
+            </a:pPr>
+            <a:r>
+              <a:rPr lang="en-US" sz="1100" b="1" dirty="0">
+                <a:solidFill>
+                  <a:srgbClr val="334155"/>
+                </a:solidFill>
+                <a:latin typeface="Arial" pitchFamily="34" charset="0"/>
+                <a:ea typeface="Arial" pitchFamily="34" charset="-122"/>
+                <a:cs typeface="Arial" pitchFamily="34" charset="-120"/>
+              </a:rPr>
               <a:t>快適さ・設備 </a:t>
             </a:r>
             <a:endParaRPr lang="en-US" sz="1100" dirty="0"/>
@@ -5940,46 +5963,6 @@
             </a:r>
             <a:endParaRPr lang="en-US" sz="1100" dirty="0"/>
           </a:p>
-          <a:p>
-            <a:pPr indent="0" marL="0">
-              <a:spcAft>
-                <a:spcPts val="200"/>
-              </a:spcAft>
-              <a:buNone/>
-            </a:pPr>
-            <a:r>
-              <a:rPr lang="en-US" sz="1100" b="1" dirty="0">
-                <a:solidFill>
-                  <a:srgbClr val="334155"/>
-                </a:solidFill>
-                <a:latin typeface="Arial" pitchFamily="34" charset="0"/>
-                <a:ea typeface="Arial" pitchFamily="34" charset="-122"/>
-                <a:cs typeface="Arial" pitchFamily="34" charset="-120"/>
-              </a:rPr>
-              <a:t>スタッフの対応 </a:t>
-            </a:r>
-            <a:endParaRPr lang="en-US" sz="1100" dirty="0"/>
-          </a:p>
-          <a:p>
-            <a:pPr indent="0" marL="0">
-              <a:spcAft>
-                <a:spcPts val="200"/>
-              </a:spcAft>
-              <a:buNone/>
-            </a:pPr>
-            <a:r>
-              <a:rPr lang="en-US" sz="900" dirty="0">
-                <a:solidFill>
-                  <a:srgbClr val="64748B"/>
-                </a:solidFill>
-                <a:latin typeface="Arial" pitchFamily="34" charset="0"/>
-                <a:ea typeface="Arial" pitchFamily="34" charset="-122"/>
-                <a:cs typeface="Arial" pitchFamily="34" charset="-120"/>
-              </a:rPr>
-              <a:t>  とにかくスタッフに電話したら、とても親切に対応してくれて、対応してくれたのはありがたかったのですが、エアコンの音は...</a:t>
-            </a:r>
-            <a:endParaRPr lang="en-US" sz="1100" dirty="0"/>
-          </a:p>
         </p:txBody>
       </p:sp>
       <p:sp>
@@ -6184,7 +6167,7 @@
                 <a:ea typeface="Arial" pitchFamily="34" charset="-122"/>
                 <a:cs typeface="Arial" pitchFamily="34" charset="-120"/>
               </a:rPr>
-              <a:t>設備の老朽化 </a:t>
+              <a:t>防音性能 </a:t>
             </a:r>
             <a:endParaRPr lang="en-US" sz="1100" dirty="0"/>
           </a:p>
@@ -6204,7 +6187,7 @@
                 <a:ea typeface="Arial" pitchFamily="34" charset="-122"/>
                 <a:cs typeface="Arial" pitchFamily="34" charset="-120"/>
               </a:rPr>
-              <a:t>  部屋はやや年季が入っていますが、きれいに掃除されておりました</a:t>
+              <a:t>  ああ、エアコンの音がうるさくてよく眠れません</a:t>
             </a:r>
             <a:endParaRPr lang="en-US" sz="1100" dirty="0"/>
           </a:p>
@@ -6557,7 +6540,7 @@
                 <a:ea typeface="Arial" pitchFamily="34" charset="-122"/>
                 <a:cs typeface="Arial" pitchFamily="34" charset="-120"/>
               </a:rPr>
-              <a:t>8.60</a:t>
+              <a:t>8.49</a:t>
             </a:r>
             <a:endParaRPr lang="en-US" sz="3200" dirty="0"/>
           </a:p>
@@ -6682,7 +6665,7 @@
                 <a:ea typeface="Arial" pitchFamily="34" charset="-122"/>
                 <a:cs typeface="Arial" pitchFamily="34" charset="-120"/>
               </a:rPr>
-              <a:t>85.6%</a:t>
+              <a:t>83.6%</a:t>
             </a:r>
             <a:endParaRPr lang="en-US" sz="3200" dirty="0"/>
           </a:p>
@@ -6807,7 +6790,7 @@
                 <a:ea typeface="Arial" pitchFamily="34" charset="-122"/>
                 <a:cs typeface="Arial" pitchFamily="34" charset="-120"/>
               </a:rPr>
-              <a:t>3.4%</a:t>
+              <a:t>4.1%</a:t>
             </a:r>
             <a:endParaRPr lang="en-US" sz="3200" dirty="0"/>
           </a:p>
@@ -6932,7 +6915,7 @@
                 <a:ea typeface="Arial" pitchFamily="34" charset="-122"/>
                 <a:cs typeface="Arial" pitchFamily="34" charset="-120"/>
               </a:rPr>
-              <a:t>146件</a:t>
+              <a:t>73件</a:t>
             </a:r>
             <a:endParaRPr lang="en-US" sz="3200" dirty="0"/>
           </a:p>
@@ -7353,7 +7336,7 @@
                 <a:ea typeface="Arial" pitchFamily="34" charset="-122"/>
                 <a:cs typeface="Arial" pitchFamily="34" charset="-120"/>
               </a:rPr>
-              <a:t>Trip.com(9.45)が最高スコア。</a:t>
+              <a:t>Agoda(10.00)が最高スコア。</a:t>
             </a:r>
             <a:endParaRPr lang="en-US" sz="1100" dirty="0"/>
           </a:p>
@@ -7402,7 +7385,7 @@
                 <a:ea typeface="Arial" pitchFamily="34" charset="-122"/>
                 <a:cs typeface="Arial" pitchFamily="34" charset="-120"/>
               </a:rPr>
-              <a:t>Booking.com(7.7)が相対的に低い。口コミ返信の強化が急務</a:t>
+              <a:t>じゃらん(7.8)が相対的に低い。口コミ返信の強化が急務</a:t>
             </a:r>
             <a:endParaRPr lang="en-US" sz="1100" dirty="0"/>
           </a:p>
@@ -7843,7 +7826,7 @@
                           <a:ea typeface="Arial" pitchFamily="34" charset="-122"/>
                           <a:cs typeface="Arial" pitchFamily="34" charset="-120"/>
                         </a:rPr>
-                        <a:t>Trip.com</a:t>
+                        <a:t>Agoda</a:t>
                       </a:r>
                       <a:endParaRPr lang="en-US" sz="900" dirty="0">
                         <a:latin typeface="Arial" charset="0"/>
@@ -7911,7 +7894,7 @@
                           <a:ea typeface="Arial" pitchFamily="34" charset="-122"/>
                           <a:cs typeface="Arial" pitchFamily="34" charset="-120"/>
                         </a:rPr>
-                        <a:t>40</a:t>
+                        <a:t>1</a:t>
                       </a:r>
                       <a:endParaRPr lang="en-US" sz="900" dirty="0">
                         <a:latin typeface="Arial" charset="0"/>
@@ -7979,7 +7962,7 @@
                           <a:ea typeface="Arial" pitchFamily="34" charset="-122"/>
                           <a:cs typeface="Arial" pitchFamily="34" charset="-120"/>
                         </a:rPr>
-                        <a:t>9.45</a:t>
+                        <a:t>10</a:t>
                       </a:r>
                       <a:endParaRPr lang="en-US" sz="900" dirty="0">
                         <a:latin typeface="Arial" charset="0"/>
@@ -8115,7 +8098,7 @@
                           <a:ea typeface="Arial" pitchFamily="34" charset="-122"/>
                           <a:cs typeface="Arial" pitchFamily="34" charset="-120"/>
                         </a:rPr>
-                        <a:t>9.45</a:t>
+                        <a:t>10</a:t>
                       </a:r>
                       <a:endParaRPr lang="en-US" sz="900" dirty="0">
                         <a:latin typeface="Arial" charset="0"/>
@@ -8185,7 +8168,7 @@
                           <a:ea typeface="Arial" pitchFamily="34" charset="-122"/>
                           <a:cs typeface="Arial" pitchFamily="34" charset="-120"/>
                         </a:rPr>
-                        <a:t>Agoda</a:t>
+                        <a:t>Trip.com</a:t>
                       </a:r>
                       <a:endParaRPr lang="en-US" sz="900" dirty="0">
                         <a:latin typeface="Arial" charset="0"/>
@@ -8253,7 +8236,7 @@
                           <a:ea typeface="Arial" pitchFamily="34" charset="-122"/>
                           <a:cs typeface="Arial" pitchFamily="34" charset="-120"/>
                         </a:rPr>
-                        <a:t>6</a:t>
+                        <a:t>25</a:t>
                       </a:r>
                       <a:endParaRPr lang="en-US" sz="900" dirty="0">
                         <a:latin typeface="Arial" charset="0"/>
@@ -8321,7 +8304,7 @@
                           <a:ea typeface="Arial" pitchFamily="34" charset="-122"/>
                           <a:cs typeface="Arial" pitchFamily="34" charset="-120"/>
                         </a:rPr>
-                        <a:t>9.33</a:t>
+                        <a:t>9.48</a:t>
                       </a:r>
                       <a:endParaRPr lang="en-US" sz="900" dirty="0">
                         <a:latin typeface="Arial" charset="0"/>
@@ -8457,7 +8440,7 @@
                           <a:ea typeface="Arial" pitchFamily="34" charset="-122"/>
                           <a:cs typeface="Arial" pitchFamily="34" charset="-120"/>
                         </a:rPr>
-                        <a:t>9.33</a:t>
+                        <a:t>9.48</a:t>
                       </a:r>
                       <a:endParaRPr lang="en-US" sz="900" dirty="0">
                         <a:latin typeface="Arial" charset="0"/>
@@ -8527,7 +8510,7 @@
                           <a:ea typeface="Arial" pitchFamily="34" charset="-122"/>
                           <a:cs typeface="Arial" pitchFamily="34" charset="-120"/>
                         </a:rPr>
-                        <a:t>じゃらん</a:t>
+                        <a:t>Google</a:t>
                       </a:r>
                       <a:endParaRPr lang="en-US" sz="900" dirty="0">
                         <a:latin typeface="Arial" charset="0"/>
@@ -8595,7 +8578,7 @@
                           <a:ea typeface="Arial" pitchFamily="34" charset="-122"/>
                           <a:cs typeface="Arial" pitchFamily="34" charset="-120"/>
                         </a:rPr>
-                        <a:t>29</a:t>
+                        <a:t>5</a:t>
                       </a:r>
                       <a:endParaRPr lang="en-US" sz="900" dirty="0">
                         <a:latin typeface="Arial" charset="0"/>
@@ -8663,7 +8646,7 @@
                           <a:ea typeface="Arial" pitchFamily="34" charset="-122"/>
                           <a:cs typeface="Arial" pitchFamily="34" charset="-120"/>
                         </a:rPr>
-                        <a:t>4.31</a:t>
+                        <a:t>4.2</a:t>
                       </a:r>
                       <a:endParaRPr lang="en-US" sz="900" dirty="0">
                         <a:latin typeface="Arial" charset="0"/>
@@ -8799,7 +8782,7 @@
                           <a:ea typeface="Arial" pitchFamily="34" charset="-122"/>
                           <a:cs typeface="Arial" pitchFamily="34" charset="-120"/>
                         </a:rPr>
-                        <a:t>8.62</a:t>
+                        <a:t>8.4</a:t>
                       </a:r>
                       <a:endParaRPr lang="en-US" sz="900" dirty="0">
                         <a:latin typeface="Arial" charset="0"/>
@@ -8869,7 +8852,691 @@
                           <a:ea typeface="Arial" pitchFamily="34" charset="-122"/>
                           <a:cs typeface="Arial" pitchFamily="34" charset="-120"/>
                         </a:rPr>
-                        <a:t>Google</a:t>
+                        <a:t>楽天トラベル</a:t>
+                      </a:r>
+                      <a:endParaRPr lang="en-US" sz="900" dirty="0">
+                        <a:latin typeface="Arial" charset="0"/>
+                        <a:ea typeface="Arial" charset="0"/>
+                        <a:cs typeface="Arial" charset="0"/>
+                      </a:endParaRPr>
+                    </a:p>
+                  </a:txBody>
+                  <a:tcPr marL="91440" marR="91440" marT="45720" marB="45720">
+                    <a:lnL w="6350" cap="flat" cmpd="sng" algn="ctr">
+                      <a:solidFill>
+                        <a:srgbClr val="CBD5E1"/>
+                      </a:solidFill>
+                      <a:prstDash val="solid"/>
+                      <a:round/>
+                      <a:headEnd type="none" w="med" len="med"/>
+                      <a:tailEnd type="none" w="med" len="med"/>
+                    </a:lnL>
+                    <a:lnR w="6350" cap="flat" cmpd="sng" algn="ctr">
+                      <a:solidFill>
+                        <a:srgbClr val="CBD5E1"/>
+                      </a:solidFill>
+                      <a:prstDash val="solid"/>
+                      <a:round/>
+                      <a:headEnd type="none" w="med" len="med"/>
+                      <a:tailEnd type="none" w="med" len="med"/>
+                    </a:lnR>
+                    <a:lnT w="6350" cap="flat" cmpd="sng" algn="ctr">
+                      <a:solidFill>
+                        <a:srgbClr val="CBD5E1"/>
+                      </a:solidFill>
+                      <a:prstDash val="solid"/>
+                      <a:round/>
+                      <a:headEnd type="none" w="med" len="med"/>
+                      <a:tailEnd type="none" w="med" len="med"/>
+                    </a:lnT>
+                    <a:lnB w="6350" cap="flat" cmpd="sng" algn="ctr">
+                      <a:solidFill>
+                        <a:srgbClr val="CBD5E1"/>
+                      </a:solidFill>
+                      <a:prstDash val="solid"/>
+                      <a:round/>
+                      <a:headEnd type="none" w="med" len="med"/>
+                      <a:tailEnd type="none" w="med" len="med"/>
+                    </a:lnB>
+                    <a:solidFill>
+                      <a:srgbClr val="FFFFFF"/>
+                    </a:solidFill>
+                  </a:tcPr>
+                </a:tc>
+                <a:tc>
+                  <a:txBody>
+                    <a:bodyPr/>
+                    <a:lstStyle/>
+                    <a:p>
+                      <a:pPr algn="ctr" indent="0" marL="0">
+                        <a:buNone/>
+                      </a:pPr>
+                      <a:r>
+                        <a:rPr lang="en-US" sz="900" dirty="0">
+                          <a:solidFill>
+                            <a:srgbClr val="000000"/>
+                          </a:solidFill>
+                          <a:latin typeface="Arial" pitchFamily="34" charset="0"/>
+                          <a:ea typeface="Arial" pitchFamily="34" charset="-122"/>
+                          <a:cs typeface="Arial" pitchFamily="34" charset="-120"/>
+                        </a:rPr>
+                        <a:t>9</a:t>
+                      </a:r>
+                      <a:endParaRPr lang="en-US" sz="900" dirty="0">
+                        <a:latin typeface="Arial" charset="0"/>
+                        <a:ea typeface="Arial" charset="0"/>
+                        <a:cs typeface="Arial" charset="0"/>
+                      </a:endParaRPr>
+                    </a:p>
+                  </a:txBody>
+                  <a:tcPr marL="91440" marR="91440" marT="45720" marB="45720">
+                    <a:lnL w="6350" cap="flat" cmpd="sng" algn="ctr">
+                      <a:solidFill>
+                        <a:srgbClr val="CBD5E1"/>
+                      </a:solidFill>
+                      <a:prstDash val="solid"/>
+                      <a:round/>
+                      <a:headEnd type="none" w="med" len="med"/>
+                      <a:tailEnd type="none" w="med" len="med"/>
+                    </a:lnL>
+                    <a:lnR w="6350" cap="flat" cmpd="sng" algn="ctr">
+                      <a:solidFill>
+                        <a:srgbClr val="CBD5E1"/>
+                      </a:solidFill>
+                      <a:prstDash val="solid"/>
+                      <a:round/>
+                      <a:headEnd type="none" w="med" len="med"/>
+                      <a:tailEnd type="none" w="med" len="med"/>
+                    </a:lnR>
+                    <a:lnT w="6350" cap="flat" cmpd="sng" algn="ctr">
+                      <a:solidFill>
+                        <a:srgbClr val="CBD5E1"/>
+                      </a:solidFill>
+                      <a:prstDash val="solid"/>
+                      <a:round/>
+                      <a:headEnd type="none" w="med" len="med"/>
+                      <a:tailEnd type="none" w="med" len="med"/>
+                    </a:lnT>
+                    <a:lnB w="6350" cap="flat" cmpd="sng" algn="ctr">
+                      <a:solidFill>
+                        <a:srgbClr val="CBD5E1"/>
+                      </a:solidFill>
+                      <a:prstDash val="solid"/>
+                      <a:round/>
+                      <a:headEnd type="none" w="med" len="med"/>
+                      <a:tailEnd type="none" w="med" len="med"/>
+                    </a:lnB>
+                    <a:solidFill>
+                      <a:srgbClr val="FFFFFF"/>
+                    </a:solidFill>
+                  </a:tcPr>
+                </a:tc>
+                <a:tc>
+                  <a:txBody>
+                    <a:bodyPr/>
+                    <a:lstStyle/>
+                    <a:p>
+                      <a:pPr algn="ctr" indent="0" marL="0">
+                        <a:buNone/>
+                      </a:pPr>
+                      <a:r>
+                        <a:rPr lang="en-US" sz="900" dirty="0">
+                          <a:solidFill>
+                            <a:srgbClr val="000000"/>
+                          </a:solidFill>
+                          <a:latin typeface="Arial" pitchFamily="34" charset="0"/>
+                          <a:ea typeface="Arial" pitchFamily="34" charset="-122"/>
+                          <a:cs typeface="Arial" pitchFamily="34" charset="-120"/>
+                        </a:rPr>
+                        <a:t>4</a:t>
+                      </a:r>
+                      <a:endParaRPr lang="en-US" sz="900" dirty="0">
+                        <a:latin typeface="Arial" charset="0"/>
+                        <a:ea typeface="Arial" charset="0"/>
+                        <a:cs typeface="Arial" charset="0"/>
+                      </a:endParaRPr>
+                    </a:p>
+                  </a:txBody>
+                  <a:tcPr marL="91440" marR="91440" marT="45720" marB="45720">
+                    <a:lnL w="6350" cap="flat" cmpd="sng" algn="ctr">
+                      <a:solidFill>
+                        <a:srgbClr val="CBD5E1"/>
+                      </a:solidFill>
+                      <a:prstDash val="solid"/>
+                      <a:round/>
+                      <a:headEnd type="none" w="med" len="med"/>
+                      <a:tailEnd type="none" w="med" len="med"/>
+                    </a:lnL>
+                    <a:lnR w="6350" cap="flat" cmpd="sng" algn="ctr">
+                      <a:solidFill>
+                        <a:srgbClr val="CBD5E1"/>
+                      </a:solidFill>
+                      <a:prstDash val="solid"/>
+                      <a:round/>
+                      <a:headEnd type="none" w="med" len="med"/>
+                      <a:tailEnd type="none" w="med" len="med"/>
+                    </a:lnR>
+                    <a:lnT w="6350" cap="flat" cmpd="sng" algn="ctr">
+                      <a:solidFill>
+                        <a:srgbClr val="CBD5E1"/>
+                      </a:solidFill>
+                      <a:prstDash val="solid"/>
+                      <a:round/>
+                      <a:headEnd type="none" w="med" len="med"/>
+                      <a:tailEnd type="none" w="med" len="med"/>
+                    </a:lnT>
+                    <a:lnB w="6350" cap="flat" cmpd="sng" algn="ctr">
+                      <a:solidFill>
+                        <a:srgbClr val="CBD5E1"/>
+                      </a:solidFill>
+                      <a:prstDash val="solid"/>
+                      <a:round/>
+                      <a:headEnd type="none" w="med" len="med"/>
+                      <a:tailEnd type="none" w="med" len="med"/>
+                    </a:lnB>
+                    <a:solidFill>
+                      <a:srgbClr val="FFFFFF"/>
+                    </a:solidFill>
+                  </a:tcPr>
+                </a:tc>
+                <a:tc>
+                  <a:txBody>
+                    <a:bodyPr/>
+                    <a:lstStyle/>
+                    <a:p>
+                      <a:pPr algn="ctr" indent="0" marL="0">
+                        <a:buNone/>
+                      </a:pPr>
+                      <a:r>
+                        <a:rPr lang="en-US" sz="900" dirty="0">
+                          <a:solidFill>
+                            <a:srgbClr val="000000"/>
+                          </a:solidFill>
+                          <a:latin typeface="Arial" pitchFamily="34" charset="0"/>
+                          <a:ea typeface="Arial" pitchFamily="34" charset="-122"/>
+                          <a:cs typeface="Arial" pitchFamily="34" charset="-120"/>
+                        </a:rPr>
+                        <a:t>/5 (×2)</a:t>
+                      </a:r>
+                      <a:endParaRPr lang="en-US" sz="900" dirty="0">
+                        <a:latin typeface="Arial" charset="0"/>
+                        <a:ea typeface="Arial" charset="0"/>
+                        <a:cs typeface="Arial" charset="0"/>
+                      </a:endParaRPr>
+                    </a:p>
+                  </a:txBody>
+                  <a:tcPr marL="91440" marR="91440" marT="45720" marB="45720">
+                    <a:lnL w="6350" cap="flat" cmpd="sng" algn="ctr">
+                      <a:solidFill>
+                        <a:srgbClr val="CBD5E1"/>
+                      </a:solidFill>
+                      <a:prstDash val="solid"/>
+                      <a:round/>
+                      <a:headEnd type="none" w="med" len="med"/>
+                      <a:tailEnd type="none" w="med" len="med"/>
+                    </a:lnL>
+                    <a:lnR w="6350" cap="flat" cmpd="sng" algn="ctr">
+                      <a:solidFill>
+                        <a:srgbClr val="CBD5E1"/>
+                      </a:solidFill>
+                      <a:prstDash val="solid"/>
+                      <a:round/>
+                      <a:headEnd type="none" w="med" len="med"/>
+                      <a:tailEnd type="none" w="med" len="med"/>
+                    </a:lnR>
+                    <a:lnT w="6350" cap="flat" cmpd="sng" algn="ctr">
+                      <a:solidFill>
+                        <a:srgbClr val="CBD5E1"/>
+                      </a:solidFill>
+                      <a:prstDash val="solid"/>
+                      <a:round/>
+                      <a:headEnd type="none" w="med" len="med"/>
+                      <a:tailEnd type="none" w="med" len="med"/>
+                    </a:lnT>
+                    <a:lnB w="6350" cap="flat" cmpd="sng" algn="ctr">
+                      <a:solidFill>
+                        <a:srgbClr val="CBD5E1"/>
+                      </a:solidFill>
+                      <a:prstDash val="solid"/>
+                      <a:round/>
+                      <a:headEnd type="none" w="med" len="med"/>
+                      <a:tailEnd type="none" w="med" len="med"/>
+                    </a:lnB>
+                    <a:solidFill>
+                      <a:srgbClr val="FFFFFF"/>
+                    </a:solidFill>
+                  </a:tcPr>
+                </a:tc>
+                <a:tc>
+                  <a:txBody>
+                    <a:bodyPr/>
+                    <a:lstStyle/>
+                    <a:p>
+                      <a:pPr algn="ctr" indent="0" marL="0">
+                        <a:buNone/>
+                      </a:pPr>
+                      <a:r>
+                        <a:rPr lang="en-US" sz="900" dirty="0">
+                          <a:solidFill>
+                            <a:srgbClr val="000000"/>
+                          </a:solidFill>
+                          <a:latin typeface="Arial" pitchFamily="34" charset="0"/>
+                          <a:ea typeface="Arial" pitchFamily="34" charset="-122"/>
+                          <a:cs typeface="Arial" pitchFamily="34" charset="-120"/>
+                        </a:rPr>
+                        <a:t>8</a:t>
+                      </a:r>
+                      <a:endParaRPr lang="en-US" sz="900" dirty="0">
+                        <a:latin typeface="Arial" charset="0"/>
+                        <a:ea typeface="Arial" charset="0"/>
+                        <a:cs typeface="Arial" charset="0"/>
+                      </a:endParaRPr>
+                    </a:p>
+                  </a:txBody>
+                  <a:tcPr marL="91440" marR="91440" marT="45720" marB="45720">
+                    <a:lnL w="6350" cap="flat" cmpd="sng" algn="ctr">
+                      <a:solidFill>
+                        <a:srgbClr val="CBD5E1"/>
+                      </a:solidFill>
+                      <a:prstDash val="solid"/>
+                      <a:round/>
+                      <a:headEnd type="none" w="med" len="med"/>
+                      <a:tailEnd type="none" w="med" len="med"/>
+                    </a:lnL>
+                    <a:lnR w="6350" cap="flat" cmpd="sng" algn="ctr">
+                      <a:solidFill>
+                        <a:srgbClr val="CBD5E1"/>
+                      </a:solidFill>
+                      <a:prstDash val="solid"/>
+                      <a:round/>
+                      <a:headEnd type="none" w="med" len="med"/>
+                      <a:tailEnd type="none" w="med" len="med"/>
+                    </a:lnR>
+                    <a:lnT w="6350" cap="flat" cmpd="sng" algn="ctr">
+                      <a:solidFill>
+                        <a:srgbClr val="CBD5E1"/>
+                      </a:solidFill>
+                      <a:prstDash val="solid"/>
+                      <a:round/>
+                      <a:headEnd type="none" w="med" len="med"/>
+                      <a:tailEnd type="none" w="med" len="med"/>
+                    </a:lnT>
+                    <a:lnB w="6350" cap="flat" cmpd="sng" algn="ctr">
+                      <a:solidFill>
+                        <a:srgbClr val="CBD5E1"/>
+                      </a:solidFill>
+                      <a:prstDash val="solid"/>
+                      <a:round/>
+                      <a:headEnd type="none" w="med" len="med"/>
+                      <a:tailEnd type="none" w="med" len="med"/>
+                    </a:lnB>
+                    <a:solidFill>
+                      <a:srgbClr val="FFFFFF"/>
+                    </a:solidFill>
+                  </a:tcPr>
+                </a:tc>
+              </a:tr>
+              <a:tr h="201168">
+                <a:tc>
+                  <a:txBody>
+                    <a:bodyPr/>
+                    <a:lstStyle/>
+                    <a:p>
+                      <a:pPr algn="ctr" indent="0" marL="0">
+                        <a:buNone/>
+                      </a:pPr>
+                      <a:r>
+                        <a:rPr lang="en-US" sz="900" dirty="0">
+                          <a:solidFill>
+                            <a:srgbClr val="000000"/>
+                          </a:solidFill>
+                          <a:latin typeface="Arial" pitchFamily="34" charset="0"/>
+                          <a:ea typeface="Arial" pitchFamily="34" charset="-122"/>
+                          <a:cs typeface="Arial" pitchFamily="34" charset="-120"/>
+                        </a:rPr>
+                        <a:t>Booking.com</a:t>
+                      </a:r>
+                      <a:endParaRPr lang="en-US" sz="900" dirty="0">
+                        <a:latin typeface="Arial" charset="0"/>
+                        <a:ea typeface="Arial" charset="0"/>
+                        <a:cs typeface="Arial" charset="0"/>
+                      </a:endParaRPr>
+                    </a:p>
+                  </a:txBody>
+                  <a:tcPr marL="91440" marR="91440" marT="45720" marB="45720">
+                    <a:lnL w="6350" cap="flat" cmpd="sng" algn="ctr">
+                      <a:solidFill>
+                        <a:srgbClr val="CBD5E1"/>
+                      </a:solidFill>
+                      <a:prstDash val="solid"/>
+                      <a:round/>
+                      <a:headEnd type="none" w="med" len="med"/>
+                      <a:tailEnd type="none" w="med" len="med"/>
+                    </a:lnL>
+                    <a:lnR w="6350" cap="flat" cmpd="sng" algn="ctr">
+                      <a:solidFill>
+                        <a:srgbClr val="CBD5E1"/>
+                      </a:solidFill>
+                      <a:prstDash val="solid"/>
+                      <a:round/>
+                      <a:headEnd type="none" w="med" len="med"/>
+                      <a:tailEnd type="none" w="med" len="med"/>
+                    </a:lnR>
+                    <a:lnT w="6350" cap="flat" cmpd="sng" algn="ctr">
+                      <a:solidFill>
+                        <a:srgbClr val="CBD5E1"/>
+                      </a:solidFill>
+                      <a:prstDash val="solid"/>
+                      <a:round/>
+                      <a:headEnd type="none" w="med" len="med"/>
+                      <a:tailEnd type="none" w="med" len="med"/>
+                    </a:lnT>
+                    <a:lnB w="6350" cap="flat" cmpd="sng" algn="ctr">
+                      <a:solidFill>
+                        <a:srgbClr val="CBD5E1"/>
+                      </a:solidFill>
+                      <a:prstDash val="solid"/>
+                      <a:round/>
+                      <a:headEnd type="none" w="med" len="med"/>
+                      <a:tailEnd type="none" w="med" len="med"/>
+                    </a:lnB>
+                    <a:solidFill>
+                      <a:srgbClr val="E8EFF8"/>
+                    </a:solidFill>
+                  </a:tcPr>
+                </a:tc>
+                <a:tc>
+                  <a:txBody>
+                    <a:bodyPr/>
+                    <a:lstStyle/>
+                    <a:p>
+                      <a:pPr algn="ctr" indent="0" marL="0">
+                        <a:buNone/>
+                      </a:pPr>
+                      <a:r>
+                        <a:rPr lang="en-US" sz="900" dirty="0">
+                          <a:solidFill>
+                            <a:srgbClr val="000000"/>
+                          </a:solidFill>
+                          <a:latin typeface="Arial" pitchFamily="34" charset="0"/>
+                          <a:ea typeface="Arial" pitchFamily="34" charset="-122"/>
+                          <a:cs typeface="Arial" pitchFamily="34" charset="-120"/>
+                        </a:rPr>
+                        <a:t>21</a:t>
+                      </a:r>
+                      <a:endParaRPr lang="en-US" sz="900" dirty="0">
+                        <a:latin typeface="Arial" charset="0"/>
+                        <a:ea typeface="Arial" charset="0"/>
+                        <a:cs typeface="Arial" charset="0"/>
+                      </a:endParaRPr>
+                    </a:p>
+                  </a:txBody>
+                  <a:tcPr marL="91440" marR="91440" marT="45720" marB="45720">
+                    <a:lnL w="6350" cap="flat" cmpd="sng" algn="ctr">
+                      <a:solidFill>
+                        <a:srgbClr val="CBD5E1"/>
+                      </a:solidFill>
+                      <a:prstDash val="solid"/>
+                      <a:round/>
+                      <a:headEnd type="none" w="med" len="med"/>
+                      <a:tailEnd type="none" w="med" len="med"/>
+                    </a:lnL>
+                    <a:lnR w="6350" cap="flat" cmpd="sng" algn="ctr">
+                      <a:solidFill>
+                        <a:srgbClr val="CBD5E1"/>
+                      </a:solidFill>
+                      <a:prstDash val="solid"/>
+                      <a:round/>
+                      <a:headEnd type="none" w="med" len="med"/>
+                      <a:tailEnd type="none" w="med" len="med"/>
+                    </a:lnR>
+                    <a:lnT w="6350" cap="flat" cmpd="sng" algn="ctr">
+                      <a:solidFill>
+                        <a:srgbClr val="CBD5E1"/>
+                      </a:solidFill>
+                      <a:prstDash val="solid"/>
+                      <a:round/>
+                      <a:headEnd type="none" w="med" len="med"/>
+                      <a:tailEnd type="none" w="med" len="med"/>
+                    </a:lnT>
+                    <a:lnB w="6350" cap="flat" cmpd="sng" algn="ctr">
+                      <a:solidFill>
+                        <a:srgbClr val="CBD5E1"/>
+                      </a:solidFill>
+                      <a:prstDash val="solid"/>
+                      <a:round/>
+                      <a:headEnd type="none" w="med" len="med"/>
+                      <a:tailEnd type="none" w="med" len="med"/>
+                    </a:lnB>
+                    <a:solidFill>
+                      <a:srgbClr val="E8EFF8"/>
+                    </a:solidFill>
+                  </a:tcPr>
+                </a:tc>
+                <a:tc>
+                  <a:txBody>
+                    <a:bodyPr/>
+                    <a:lstStyle/>
+                    <a:p>
+                      <a:pPr algn="ctr" indent="0" marL="0">
+                        <a:buNone/>
+                      </a:pPr>
+                      <a:r>
+                        <a:rPr lang="en-US" sz="900" dirty="0">
+                          <a:solidFill>
+                            <a:srgbClr val="000000"/>
+                          </a:solidFill>
+                          <a:latin typeface="Arial" pitchFamily="34" charset="0"/>
+                          <a:ea typeface="Arial" pitchFamily="34" charset="-122"/>
+                          <a:cs typeface="Arial" pitchFamily="34" charset="-120"/>
+                        </a:rPr>
+                        <a:t>7.86</a:t>
+                      </a:r>
+                      <a:endParaRPr lang="en-US" sz="900" dirty="0">
+                        <a:latin typeface="Arial" charset="0"/>
+                        <a:ea typeface="Arial" charset="0"/>
+                        <a:cs typeface="Arial" charset="0"/>
+                      </a:endParaRPr>
+                    </a:p>
+                  </a:txBody>
+                  <a:tcPr marL="91440" marR="91440" marT="45720" marB="45720">
+                    <a:lnL w="6350" cap="flat" cmpd="sng" algn="ctr">
+                      <a:solidFill>
+                        <a:srgbClr val="CBD5E1"/>
+                      </a:solidFill>
+                      <a:prstDash val="solid"/>
+                      <a:round/>
+                      <a:headEnd type="none" w="med" len="med"/>
+                      <a:tailEnd type="none" w="med" len="med"/>
+                    </a:lnL>
+                    <a:lnR w="6350" cap="flat" cmpd="sng" algn="ctr">
+                      <a:solidFill>
+                        <a:srgbClr val="CBD5E1"/>
+                      </a:solidFill>
+                      <a:prstDash val="solid"/>
+                      <a:round/>
+                      <a:headEnd type="none" w="med" len="med"/>
+                      <a:tailEnd type="none" w="med" len="med"/>
+                    </a:lnR>
+                    <a:lnT w="6350" cap="flat" cmpd="sng" algn="ctr">
+                      <a:solidFill>
+                        <a:srgbClr val="CBD5E1"/>
+                      </a:solidFill>
+                      <a:prstDash val="solid"/>
+                      <a:round/>
+                      <a:headEnd type="none" w="med" len="med"/>
+                      <a:tailEnd type="none" w="med" len="med"/>
+                    </a:lnT>
+                    <a:lnB w="6350" cap="flat" cmpd="sng" algn="ctr">
+                      <a:solidFill>
+                        <a:srgbClr val="CBD5E1"/>
+                      </a:solidFill>
+                      <a:prstDash val="solid"/>
+                      <a:round/>
+                      <a:headEnd type="none" w="med" len="med"/>
+                      <a:tailEnd type="none" w="med" len="med"/>
+                    </a:lnB>
+                    <a:solidFill>
+                      <a:srgbClr val="E8EFF8"/>
+                    </a:solidFill>
+                  </a:tcPr>
+                </a:tc>
+                <a:tc>
+                  <a:txBody>
+                    <a:bodyPr/>
+                    <a:lstStyle/>
+                    <a:p>
+                      <a:pPr algn="ctr" indent="0" marL="0">
+                        <a:buNone/>
+                      </a:pPr>
+                      <a:r>
+                        <a:rPr lang="en-US" sz="900" dirty="0">
+                          <a:solidFill>
+                            <a:srgbClr val="000000"/>
+                          </a:solidFill>
+                          <a:latin typeface="Arial" pitchFamily="34" charset="0"/>
+                          <a:ea typeface="Arial" pitchFamily="34" charset="-122"/>
+                          <a:cs typeface="Arial" pitchFamily="34" charset="-120"/>
+                        </a:rPr>
+                        <a:t>/10</a:t>
+                      </a:r>
+                      <a:endParaRPr lang="en-US" sz="900" dirty="0">
+                        <a:latin typeface="Arial" charset="0"/>
+                        <a:ea typeface="Arial" charset="0"/>
+                        <a:cs typeface="Arial" charset="0"/>
+                      </a:endParaRPr>
+                    </a:p>
+                  </a:txBody>
+                  <a:tcPr marL="91440" marR="91440" marT="45720" marB="45720">
+                    <a:lnL w="6350" cap="flat" cmpd="sng" algn="ctr">
+                      <a:solidFill>
+                        <a:srgbClr val="CBD5E1"/>
+                      </a:solidFill>
+                      <a:prstDash val="solid"/>
+                      <a:round/>
+                      <a:headEnd type="none" w="med" len="med"/>
+                      <a:tailEnd type="none" w="med" len="med"/>
+                    </a:lnL>
+                    <a:lnR w="6350" cap="flat" cmpd="sng" algn="ctr">
+                      <a:solidFill>
+                        <a:srgbClr val="CBD5E1"/>
+                      </a:solidFill>
+                      <a:prstDash val="solid"/>
+                      <a:round/>
+                      <a:headEnd type="none" w="med" len="med"/>
+                      <a:tailEnd type="none" w="med" len="med"/>
+                    </a:lnR>
+                    <a:lnT w="6350" cap="flat" cmpd="sng" algn="ctr">
+                      <a:solidFill>
+                        <a:srgbClr val="CBD5E1"/>
+                      </a:solidFill>
+                      <a:prstDash val="solid"/>
+                      <a:round/>
+                      <a:headEnd type="none" w="med" len="med"/>
+                      <a:tailEnd type="none" w="med" len="med"/>
+                    </a:lnT>
+                    <a:lnB w="6350" cap="flat" cmpd="sng" algn="ctr">
+                      <a:solidFill>
+                        <a:srgbClr val="CBD5E1"/>
+                      </a:solidFill>
+                      <a:prstDash val="solid"/>
+                      <a:round/>
+                      <a:headEnd type="none" w="med" len="med"/>
+                      <a:tailEnd type="none" w="med" len="med"/>
+                    </a:lnB>
+                    <a:solidFill>
+                      <a:srgbClr val="E8EFF8"/>
+                    </a:solidFill>
+                  </a:tcPr>
+                </a:tc>
+                <a:tc>
+                  <a:txBody>
+                    <a:bodyPr/>
+                    <a:lstStyle/>
+                    <a:p>
+                      <a:pPr algn="ctr" indent="0" marL="0">
+                        <a:buNone/>
+                      </a:pPr>
+                      <a:r>
+                        <a:rPr lang="en-US" sz="900" dirty="0">
+                          <a:solidFill>
+                            <a:srgbClr val="000000"/>
+                          </a:solidFill>
+                          <a:latin typeface="Arial" pitchFamily="34" charset="0"/>
+                          <a:ea typeface="Arial" pitchFamily="34" charset="-122"/>
+                          <a:cs typeface="Arial" pitchFamily="34" charset="-120"/>
+                        </a:rPr>
+                        <a:t>7.86</a:t>
+                      </a:r>
+                      <a:endParaRPr lang="en-US" sz="900" dirty="0">
+                        <a:latin typeface="Arial" charset="0"/>
+                        <a:ea typeface="Arial" charset="0"/>
+                        <a:cs typeface="Arial" charset="0"/>
+                      </a:endParaRPr>
+                    </a:p>
+                  </a:txBody>
+                  <a:tcPr marL="91440" marR="91440" marT="45720" marB="45720">
+                    <a:lnL w="6350" cap="flat" cmpd="sng" algn="ctr">
+                      <a:solidFill>
+                        <a:srgbClr val="CBD5E1"/>
+                      </a:solidFill>
+                      <a:prstDash val="solid"/>
+                      <a:round/>
+                      <a:headEnd type="none" w="med" len="med"/>
+                      <a:tailEnd type="none" w="med" len="med"/>
+                    </a:lnL>
+                    <a:lnR w="6350" cap="flat" cmpd="sng" algn="ctr">
+                      <a:solidFill>
+                        <a:srgbClr val="CBD5E1"/>
+                      </a:solidFill>
+                      <a:prstDash val="solid"/>
+                      <a:round/>
+                      <a:headEnd type="none" w="med" len="med"/>
+                      <a:tailEnd type="none" w="med" len="med"/>
+                    </a:lnR>
+                    <a:lnT w="6350" cap="flat" cmpd="sng" algn="ctr">
+                      <a:solidFill>
+                        <a:srgbClr val="CBD5E1"/>
+                      </a:solidFill>
+                      <a:prstDash val="solid"/>
+                      <a:round/>
+                      <a:headEnd type="none" w="med" len="med"/>
+                      <a:tailEnd type="none" w="med" len="med"/>
+                    </a:lnT>
+                    <a:lnB w="6350" cap="flat" cmpd="sng" algn="ctr">
+                      <a:solidFill>
+                        <a:srgbClr val="CBD5E1"/>
+                      </a:solidFill>
+                      <a:prstDash val="solid"/>
+                      <a:round/>
+                      <a:headEnd type="none" w="med" len="med"/>
+                      <a:tailEnd type="none" w="med" len="med"/>
+                    </a:lnB>
+                    <a:solidFill>
+                      <a:srgbClr val="E8EFF8"/>
+                    </a:solidFill>
+                  </a:tcPr>
+                </a:tc>
+              </a:tr>
+              <a:tr h="201168">
+                <a:tc>
+                  <a:txBody>
+                    <a:bodyPr/>
+                    <a:lstStyle/>
+                    <a:p>
+                      <a:pPr algn="ctr" indent="0" marL="0">
+                        <a:buNone/>
+                      </a:pPr>
+                      <a:r>
+                        <a:rPr lang="en-US" sz="900" dirty="0">
+                          <a:solidFill>
+                            <a:srgbClr val="000000"/>
+                          </a:solidFill>
+                          <a:latin typeface="Arial" pitchFamily="34" charset="0"/>
+                          <a:ea typeface="Arial" pitchFamily="34" charset="-122"/>
+                          <a:cs typeface="Arial" pitchFamily="34" charset="-120"/>
+                        </a:rPr>
+                        <a:t>じゃらん</a:t>
                       </a:r>
                       <a:endParaRPr lang="en-US" sz="900" dirty="0">
                         <a:latin typeface="Arial" charset="0"/>
@@ -9005,7 +9672,7 @@
                           <a:ea typeface="Arial" pitchFamily="34" charset="-122"/>
                           <a:cs typeface="Arial" pitchFamily="34" charset="-120"/>
                         </a:rPr>
-                        <a:t>4.25</a:t>
+                        <a:t>3.92</a:t>
                       </a:r>
                       <a:endParaRPr lang="en-US" sz="900" dirty="0">
                         <a:latin typeface="Arial" charset="0"/>
@@ -9141,691 +9808,7 @@
                           <a:ea typeface="Arial" pitchFamily="34" charset="-122"/>
                           <a:cs typeface="Arial" pitchFamily="34" charset="-120"/>
                         </a:rPr>
-                        <a:t>8.5</a:t>
-                      </a:r>
-                      <a:endParaRPr lang="en-US" sz="900" dirty="0">
-                        <a:latin typeface="Arial" charset="0"/>
-                        <a:ea typeface="Arial" charset="0"/>
-                        <a:cs typeface="Arial" charset="0"/>
-                      </a:endParaRPr>
-                    </a:p>
-                  </a:txBody>
-                  <a:tcPr marL="91440" marR="91440" marT="45720" marB="45720">
-                    <a:lnL w="6350" cap="flat" cmpd="sng" algn="ctr">
-                      <a:solidFill>
-                        <a:srgbClr val="CBD5E1"/>
-                      </a:solidFill>
-                      <a:prstDash val="solid"/>
-                      <a:round/>
-                      <a:headEnd type="none" w="med" len="med"/>
-                      <a:tailEnd type="none" w="med" len="med"/>
-                    </a:lnL>
-                    <a:lnR w="6350" cap="flat" cmpd="sng" algn="ctr">
-                      <a:solidFill>
-                        <a:srgbClr val="CBD5E1"/>
-                      </a:solidFill>
-                      <a:prstDash val="solid"/>
-                      <a:round/>
-                      <a:headEnd type="none" w="med" len="med"/>
-                      <a:tailEnd type="none" w="med" len="med"/>
-                    </a:lnR>
-                    <a:lnT w="6350" cap="flat" cmpd="sng" algn="ctr">
-                      <a:solidFill>
-                        <a:srgbClr val="CBD5E1"/>
-                      </a:solidFill>
-                      <a:prstDash val="solid"/>
-                      <a:round/>
-                      <a:headEnd type="none" w="med" len="med"/>
-                      <a:tailEnd type="none" w="med" len="med"/>
-                    </a:lnT>
-                    <a:lnB w="6350" cap="flat" cmpd="sng" algn="ctr">
-                      <a:solidFill>
-                        <a:srgbClr val="CBD5E1"/>
-                      </a:solidFill>
-                      <a:prstDash val="solid"/>
-                      <a:round/>
-                      <a:headEnd type="none" w="med" len="med"/>
-                      <a:tailEnd type="none" w="med" len="med"/>
-                    </a:lnB>
-                    <a:solidFill>
-                      <a:srgbClr val="FFFFFF"/>
-                    </a:solidFill>
-                  </a:tcPr>
-                </a:tc>
-              </a:tr>
-              <a:tr h="201168">
-                <a:tc>
-                  <a:txBody>
-                    <a:bodyPr/>
-                    <a:lstStyle/>
-                    <a:p>
-                      <a:pPr algn="ctr" indent="0" marL="0">
-                        <a:buNone/>
-                      </a:pPr>
-                      <a:r>
-                        <a:rPr lang="en-US" sz="900" dirty="0">
-                          <a:solidFill>
-                            <a:srgbClr val="000000"/>
-                          </a:solidFill>
-                          <a:latin typeface="Arial" pitchFamily="34" charset="0"/>
-                          <a:ea typeface="Arial" pitchFamily="34" charset="-122"/>
-                          <a:cs typeface="Arial" pitchFamily="34" charset="-120"/>
-                        </a:rPr>
-                        <a:t>楽天トラベル</a:t>
-                      </a:r>
-                      <a:endParaRPr lang="en-US" sz="900" dirty="0">
-                        <a:latin typeface="Arial" charset="0"/>
-                        <a:ea typeface="Arial" charset="0"/>
-                        <a:cs typeface="Arial" charset="0"/>
-                      </a:endParaRPr>
-                    </a:p>
-                  </a:txBody>
-                  <a:tcPr marL="91440" marR="91440" marT="45720" marB="45720">
-                    <a:lnL w="6350" cap="flat" cmpd="sng" algn="ctr">
-                      <a:solidFill>
-                        <a:srgbClr val="CBD5E1"/>
-                      </a:solidFill>
-                      <a:prstDash val="solid"/>
-                      <a:round/>
-                      <a:headEnd type="none" w="med" len="med"/>
-                      <a:tailEnd type="none" w="med" len="med"/>
-                    </a:lnL>
-                    <a:lnR w="6350" cap="flat" cmpd="sng" algn="ctr">
-                      <a:solidFill>
-                        <a:srgbClr val="CBD5E1"/>
-                      </a:solidFill>
-                      <a:prstDash val="solid"/>
-                      <a:round/>
-                      <a:headEnd type="none" w="med" len="med"/>
-                      <a:tailEnd type="none" w="med" len="med"/>
-                    </a:lnR>
-                    <a:lnT w="6350" cap="flat" cmpd="sng" algn="ctr">
-                      <a:solidFill>
-                        <a:srgbClr val="CBD5E1"/>
-                      </a:solidFill>
-                      <a:prstDash val="solid"/>
-                      <a:round/>
-                      <a:headEnd type="none" w="med" len="med"/>
-                      <a:tailEnd type="none" w="med" len="med"/>
-                    </a:lnT>
-                    <a:lnB w="6350" cap="flat" cmpd="sng" algn="ctr">
-                      <a:solidFill>
-                        <a:srgbClr val="CBD5E1"/>
-                      </a:solidFill>
-                      <a:prstDash val="solid"/>
-                      <a:round/>
-                      <a:headEnd type="none" w="med" len="med"/>
-                      <a:tailEnd type="none" w="med" len="med"/>
-                    </a:lnB>
-                    <a:solidFill>
-                      <a:srgbClr val="E8EFF8"/>
-                    </a:solidFill>
-                  </a:tcPr>
-                </a:tc>
-                <a:tc>
-                  <a:txBody>
-                    <a:bodyPr/>
-                    <a:lstStyle/>
-                    <a:p>
-                      <a:pPr algn="ctr" indent="0" marL="0">
-                        <a:buNone/>
-                      </a:pPr>
-                      <a:r>
-                        <a:rPr lang="en-US" sz="900" dirty="0">
-                          <a:solidFill>
-                            <a:srgbClr val="000000"/>
-                          </a:solidFill>
-                          <a:latin typeface="Arial" pitchFamily="34" charset="0"/>
-                          <a:ea typeface="Arial" pitchFamily="34" charset="-122"/>
-                          <a:cs typeface="Arial" pitchFamily="34" charset="-120"/>
-                        </a:rPr>
-                        <a:t>24</a:t>
-                      </a:r>
-                      <a:endParaRPr lang="en-US" sz="900" dirty="0">
-                        <a:latin typeface="Arial" charset="0"/>
-                        <a:ea typeface="Arial" charset="0"/>
-                        <a:cs typeface="Arial" charset="0"/>
-                      </a:endParaRPr>
-                    </a:p>
-                  </a:txBody>
-                  <a:tcPr marL="91440" marR="91440" marT="45720" marB="45720">
-                    <a:lnL w="6350" cap="flat" cmpd="sng" algn="ctr">
-                      <a:solidFill>
-                        <a:srgbClr val="CBD5E1"/>
-                      </a:solidFill>
-                      <a:prstDash val="solid"/>
-                      <a:round/>
-                      <a:headEnd type="none" w="med" len="med"/>
-                      <a:tailEnd type="none" w="med" len="med"/>
-                    </a:lnL>
-                    <a:lnR w="6350" cap="flat" cmpd="sng" algn="ctr">
-                      <a:solidFill>
-                        <a:srgbClr val="CBD5E1"/>
-                      </a:solidFill>
-                      <a:prstDash val="solid"/>
-                      <a:round/>
-                      <a:headEnd type="none" w="med" len="med"/>
-                      <a:tailEnd type="none" w="med" len="med"/>
-                    </a:lnR>
-                    <a:lnT w="6350" cap="flat" cmpd="sng" algn="ctr">
-                      <a:solidFill>
-                        <a:srgbClr val="CBD5E1"/>
-                      </a:solidFill>
-                      <a:prstDash val="solid"/>
-                      <a:round/>
-                      <a:headEnd type="none" w="med" len="med"/>
-                      <a:tailEnd type="none" w="med" len="med"/>
-                    </a:lnT>
-                    <a:lnB w="6350" cap="flat" cmpd="sng" algn="ctr">
-                      <a:solidFill>
-                        <a:srgbClr val="CBD5E1"/>
-                      </a:solidFill>
-                      <a:prstDash val="solid"/>
-                      <a:round/>
-                      <a:headEnd type="none" w="med" len="med"/>
-                      <a:tailEnd type="none" w="med" len="med"/>
-                    </a:lnB>
-                    <a:solidFill>
-                      <a:srgbClr val="E8EFF8"/>
-                    </a:solidFill>
-                  </a:tcPr>
-                </a:tc>
-                <a:tc>
-                  <a:txBody>
-                    <a:bodyPr/>
-                    <a:lstStyle/>
-                    <a:p>
-                      <a:pPr algn="ctr" indent="0" marL="0">
-                        <a:buNone/>
-                      </a:pPr>
-                      <a:r>
-                        <a:rPr lang="en-US" sz="900" dirty="0">
-                          <a:solidFill>
-                            <a:srgbClr val="000000"/>
-                          </a:solidFill>
-                          <a:latin typeface="Arial" pitchFamily="34" charset="0"/>
-                          <a:ea typeface="Arial" pitchFamily="34" charset="-122"/>
-                          <a:cs typeface="Arial" pitchFamily="34" charset="-120"/>
-                        </a:rPr>
-                        <a:t>4.12</a:t>
-                      </a:r>
-                      <a:endParaRPr lang="en-US" sz="900" dirty="0">
-                        <a:latin typeface="Arial" charset="0"/>
-                        <a:ea typeface="Arial" charset="0"/>
-                        <a:cs typeface="Arial" charset="0"/>
-                      </a:endParaRPr>
-                    </a:p>
-                  </a:txBody>
-                  <a:tcPr marL="91440" marR="91440" marT="45720" marB="45720">
-                    <a:lnL w="6350" cap="flat" cmpd="sng" algn="ctr">
-                      <a:solidFill>
-                        <a:srgbClr val="CBD5E1"/>
-                      </a:solidFill>
-                      <a:prstDash val="solid"/>
-                      <a:round/>
-                      <a:headEnd type="none" w="med" len="med"/>
-                      <a:tailEnd type="none" w="med" len="med"/>
-                    </a:lnL>
-                    <a:lnR w="6350" cap="flat" cmpd="sng" algn="ctr">
-                      <a:solidFill>
-                        <a:srgbClr val="CBD5E1"/>
-                      </a:solidFill>
-                      <a:prstDash val="solid"/>
-                      <a:round/>
-                      <a:headEnd type="none" w="med" len="med"/>
-                      <a:tailEnd type="none" w="med" len="med"/>
-                    </a:lnR>
-                    <a:lnT w="6350" cap="flat" cmpd="sng" algn="ctr">
-                      <a:solidFill>
-                        <a:srgbClr val="CBD5E1"/>
-                      </a:solidFill>
-                      <a:prstDash val="solid"/>
-                      <a:round/>
-                      <a:headEnd type="none" w="med" len="med"/>
-                      <a:tailEnd type="none" w="med" len="med"/>
-                    </a:lnT>
-                    <a:lnB w="6350" cap="flat" cmpd="sng" algn="ctr">
-                      <a:solidFill>
-                        <a:srgbClr val="CBD5E1"/>
-                      </a:solidFill>
-                      <a:prstDash val="solid"/>
-                      <a:round/>
-                      <a:headEnd type="none" w="med" len="med"/>
-                      <a:tailEnd type="none" w="med" len="med"/>
-                    </a:lnB>
-                    <a:solidFill>
-                      <a:srgbClr val="E8EFF8"/>
-                    </a:solidFill>
-                  </a:tcPr>
-                </a:tc>
-                <a:tc>
-                  <a:txBody>
-                    <a:bodyPr/>
-                    <a:lstStyle/>
-                    <a:p>
-                      <a:pPr algn="ctr" indent="0" marL="0">
-                        <a:buNone/>
-                      </a:pPr>
-                      <a:r>
-                        <a:rPr lang="en-US" sz="900" dirty="0">
-                          <a:solidFill>
-                            <a:srgbClr val="000000"/>
-                          </a:solidFill>
-                          <a:latin typeface="Arial" pitchFamily="34" charset="0"/>
-                          <a:ea typeface="Arial" pitchFamily="34" charset="-122"/>
-                          <a:cs typeface="Arial" pitchFamily="34" charset="-120"/>
-                        </a:rPr>
-                        <a:t>/5 (×2)</a:t>
-                      </a:r>
-                      <a:endParaRPr lang="en-US" sz="900" dirty="0">
-                        <a:latin typeface="Arial" charset="0"/>
-                        <a:ea typeface="Arial" charset="0"/>
-                        <a:cs typeface="Arial" charset="0"/>
-                      </a:endParaRPr>
-                    </a:p>
-                  </a:txBody>
-                  <a:tcPr marL="91440" marR="91440" marT="45720" marB="45720">
-                    <a:lnL w="6350" cap="flat" cmpd="sng" algn="ctr">
-                      <a:solidFill>
-                        <a:srgbClr val="CBD5E1"/>
-                      </a:solidFill>
-                      <a:prstDash val="solid"/>
-                      <a:round/>
-                      <a:headEnd type="none" w="med" len="med"/>
-                      <a:tailEnd type="none" w="med" len="med"/>
-                    </a:lnL>
-                    <a:lnR w="6350" cap="flat" cmpd="sng" algn="ctr">
-                      <a:solidFill>
-                        <a:srgbClr val="CBD5E1"/>
-                      </a:solidFill>
-                      <a:prstDash val="solid"/>
-                      <a:round/>
-                      <a:headEnd type="none" w="med" len="med"/>
-                      <a:tailEnd type="none" w="med" len="med"/>
-                    </a:lnR>
-                    <a:lnT w="6350" cap="flat" cmpd="sng" algn="ctr">
-                      <a:solidFill>
-                        <a:srgbClr val="CBD5E1"/>
-                      </a:solidFill>
-                      <a:prstDash val="solid"/>
-                      <a:round/>
-                      <a:headEnd type="none" w="med" len="med"/>
-                      <a:tailEnd type="none" w="med" len="med"/>
-                    </a:lnT>
-                    <a:lnB w="6350" cap="flat" cmpd="sng" algn="ctr">
-                      <a:solidFill>
-                        <a:srgbClr val="CBD5E1"/>
-                      </a:solidFill>
-                      <a:prstDash val="solid"/>
-                      <a:round/>
-                      <a:headEnd type="none" w="med" len="med"/>
-                      <a:tailEnd type="none" w="med" len="med"/>
-                    </a:lnB>
-                    <a:solidFill>
-                      <a:srgbClr val="E8EFF8"/>
-                    </a:solidFill>
-                  </a:tcPr>
-                </a:tc>
-                <a:tc>
-                  <a:txBody>
-                    <a:bodyPr/>
-                    <a:lstStyle/>
-                    <a:p>
-                      <a:pPr algn="ctr" indent="0" marL="0">
-                        <a:buNone/>
-                      </a:pPr>
-                      <a:r>
-                        <a:rPr lang="en-US" sz="900" dirty="0">
-                          <a:solidFill>
-                            <a:srgbClr val="000000"/>
-                          </a:solidFill>
-                          <a:latin typeface="Arial" pitchFamily="34" charset="0"/>
-                          <a:ea typeface="Arial" pitchFamily="34" charset="-122"/>
-                          <a:cs typeface="Arial" pitchFamily="34" charset="-120"/>
-                        </a:rPr>
-                        <a:t>8.25</a:t>
-                      </a:r>
-                      <a:endParaRPr lang="en-US" sz="900" dirty="0">
-                        <a:latin typeface="Arial" charset="0"/>
-                        <a:ea typeface="Arial" charset="0"/>
-                        <a:cs typeface="Arial" charset="0"/>
-                      </a:endParaRPr>
-                    </a:p>
-                  </a:txBody>
-                  <a:tcPr marL="91440" marR="91440" marT="45720" marB="45720">
-                    <a:lnL w="6350" cap="flat" cmpd="sng" algn="ctr">
-                      <a:solidFill>
-                        <a:srgbClr val="CBD5E1"/>
-                      </a:solidFill>
-                      <a:prstDash val="solid"/>
-                      <a:round/>
-                      <a:headEnd type="none" w="med" len="med"/>
-                      <a:tailEnd type="none" w="med" len="med"/>
-                    </a:lnL>
-                    <a:lnR w="6350" cap="flat" cmpd="sng" algn="ctr">
-                      <a:solidFill>
-                        <a:srgbClr val="CBD5E1"/>
-                      </a:solidFill>
-                      <a:prstDash val="solid"/>
-                      <a:round/>
-                      <a:headEnd type="none" w="med" len="med"/>
-                      <a:tailEnd type="none" w="med" len="med"/>
-                    </a:lnR>
-                    <a:lnT w="6350" cap="flat" cmpd="sng" algn="ctr">
-                      <a:solidFill>
-                        <a:srgbClr val="CBD5E1"/>
-                      </a:solidFill>
-                      <a:prstDash val="solid"/>
-                      <a:round/>
-                      <a:headEnd type="none" w="med" len="med"/>
-                      <a:tailEnd type="none" w="med" len="med"/>
-                    </a:lnT>
-                    <a:lnB w="6350" cap="flat" cmpd="sng" algn="ctr">
-                      <a:solidFill>
-                        <a:srgbClr val="CBD5E1"/>
-                      </a:solidFill>
-                      <a:prstDash val="solid"/>
-                      <a:round/>
-                      <a:headEnd type="none" w="med" len="med"/>
-                      <a:tailEnd type="none" w="med" len="med"/>
-                    </a:lnB>
-                    <a:solidFill>
-                      <a:srgbClr val="E8EFF8"/>
-                    </a:solidFill>
-                  </a:tcPr>
-                </a:tc>
-              </a:tr>
-              <a:tr h="201168">
-                <a:tc>
-                  <a:txBody>
-                    <a:bodyPr/>
-                    <a:lstStyle/>
-                    <a:p>
-                      <a:pPr algn="ctr" indent="0" marL="0">
-                        <a:buNone/>
-                      </a:pPr>
-                      <a:r>
-                        <a:rPr lang="en-US" sz="900" dirty="0">
-                          <a:solidFill>
-                            <a:srgbClr val="000000"/>
-                          </a:solidFill>
-                          <a:latin typeface="Arial" pitchFamily="34" charset="0"/>
-                          <a:ea typeface="Arial" pitchFamily="34" charset="-122"/>
-                          <a:cs typeface="Arial" pitchFamily="34" charset="-120"/>
-                        </a:rPr>
-                        <a:t>Booking.com</a:t>
-                      </a:r>
-                      <a:endParaRPr lang="en-US" sz="900" dirty="0">
-                        <a:latin typeface="Arial" charset="0"/>
-                        <a:ea typeface="Arial" charset="0"/>
-                        <a:cs typeface="Arial" charset="0"/>
-                      </a:endParaRPr>
-                    </a:p>
-                  </a:txBody>
-                  <a:tcPr marL="91440" marR="91440" marT="45720" marB="45720">
-                    <a:lnL w="6350" cap="flat" cmpd="sng" algn="ctr">
-                      <a:solidFill>
-                        <a:srgbClr val="CBD5E1"/>
-                      </a:solidFill>
-                      <a:prstDash val="solid"/>
-                      <a:round/>
-                      <a:headEnd type="none" w="med" len="med"/>
-                      <a:tailEnd type="none" w="med" len="med"/>
-                    </a:lnL>
-                    <a:lnR w="6350" cap="flat" cmpd="sng" algn="ctr">
-                      <a:solidFill>
-                        <a:srgbClr val="CBD5E1"/>
-                      </a:solidFill>
-                      <a:prstDash val="solid"/>
-                      <a:round/>
-                      <a:headEnd type="none" w="med" len="med"/>
-                      <a:tailEnd type="none" w="med" len="med"/>
-                    </a:lnR>
-                    <a:lnT w="6350" cap="flat" cmpd="sng" algn="ctr">
-                      <a:solidFill>
-                        <a:srgbClr val="CBD5E1"/>
-                      </a:solidFill>
-                      <a:prstDash val="solid"/>
-                      <a:round/>
-                      <a:headEnd type="none" w="med" len="med"/>
-                      <a:tailEnd type="none" w="med" len="med"/>
-                    </a:lnT>
-                    <a:lnB w="6350" cap="flat" cmpd="sng" algn="ctr">
-                      <a:solidFill>
-                        <a:srgbClr val="CBD5E1"/>
-                      </a:solidFill>
-                      <a:prstDash val="solid"/>
-                      <a:round/>
-                      <a:headEnd type="none" w="med" len="med"/>
-                      <a:tailEnd type="none" w="med" len="med"/>
-                    </a:lnB>
-                    <a:solidFill>
-                      <a:srgbClr val="FFFFFF"/>
-                    </a:solidFill>
-                  </a:tcPr>
-                </a:tc>
-                <a:tc>
-                  <a:txBody>
-                    <a:bodyPr/>
-                    <a:lstStyle/>
-                    <a:p>
-                      <a:pPr algn="ctr" indent="0" marL="0">
-                        <a:buNone/>
-                      </a:pPr>
-                      <a:r>
-                        <a:rPr lang="en-US" sz="900" dirty="0">
-                          <a:solidFill>
-                            <a:srgbClr val="000000"/>
-                          </a:solidFill>
-                          <a:latin typeface="Arial" pitchFamily="34" charset="0"/>
-                          <a:ea typeface="Arial" pitchFamily="34" charset="-122"/>
-                          <a:cs typeface="Arial" pitchFamily="34" charset="-120"/>
-                        </a:rPr>
-                        <a:t>35</a:t>
-                      </a:r>
-                      <a:endParaRPr lang="en-US" sz="900" dirty="0">
-                        <a:latin typeface="Arial" charset="0"/>
-                        <a:ea typeface="Arial" charset="0"/>
-                        <a:cs typeface="Arial" charset="0"/>
-                      </a:endParaRPr>
-                    </a:p>
-                  </a:txBody>
-                  <a:tcPr marL="91440" marR="91440" marT="45720" marB="45720">
-                    <a:lnL w="6350" cap="flat" cmpd="sng" algn="ctr">
-                      <a:solidFill>
-                        <a:srgbClr val="CBD5E1"/>
-                      </a:solidFill>
-                      <a:prstDash val="solid"/>
-                      <a:round/>
-                      <a:headEnd type="none" w="med" len="med"/>
-                      <a:tailEnd type="none" w="med" len="med"/>
-                    </a:lnL>
-                    <a:lnR w="6350" cap="flat" cmpd="sng" algn="ctr">
-                      <a:solidFill>
-                        <a:srgbClr val="CBD5E1"/>
-                      </a:solidFill>
-                      <a:prstDash val="solid"/>
-                      <a:round/>
-                      <a:headEnd type="none" w="med" len="med"/>
-                      <a:tailEnd type="none" w="med" len="med"/>
-                    </a:lnR>
-                    <a:lnT w="6350" cap="flat" cmpd="sng" algn="ctr">
-                      <a:solidFill>
-                        <a:srgbClr val="CBD5E1"/>
-                      </a:solidFill>
-                      <a:prstDash val="solid"/>
-                      <a:round/>
-                      <a:headEnd type="none" w="med" len="med"/>
-                      <a:tailEnd type="none" w="med" len="med"/>
-                    </a:lnT>
-                    <a:lnB w="6350" cap="flat" cmpd="sng" algn="ctr">
-                      <a:solidFill>
-                        <a:srgbClr val="CBD5E1"/>
-                      </a:solidFill>
-                      <a:prstDash val="solid"/>
-                      <a:round/>
-                      <a:headEnd type="none" w="med" len="med"/>
-                      <a:tailEnd type="none" w="med" len="med"/>
-                    </a:lnB>
-                    <a:solidFill>
-                      <a:srgbClr val="FFFFFF"/>
-                    </a:solidFill>
-                  </a:tcPr>
-                </a:tc>
-                <a:tc>
-                  <a:txBody>
-                    <a:bodyPr/>
-                    <a:lstStyle/>
-                    <a:p>
-                      <a:pPr algn="ctr" indent="0" marL="0">
-                        <a:buNone/>
-                      </a:pPr>
-                      <a:r>
-                        <a:rPr lang="en-US" sz="900" dirty="0">
-                          <a:solidFill>
-                            <a:srgbClr val="000000"/>
-                          </a:solidFill>
-                          <a:latin typeface="Arial" pitchFamily="34" charset="0"/>
-                          <a:ea typeface="Arial" pitchFamily="34" charset="-122"/>
-                          <a:cs typeface="Arial" pitchFamily="34" charset="-120"/>
-                        </a:rPr>
-                        <a:t>7.74</a:t>
-                      </a:r>
-                      <a:endParaRPr lang="en-US" sz="900" dirty="0">
-                        <a:latin typeface="Arial" charset="0"/>
-                        <a:ea typeface="Arial" charset="0"/>
-                        <a:cs typeface="Arial" charset="0"/>
-                      </a:endParaRPr>
-                    </a:p>
-                  </a:txBody>
-                  <a:tcPr marL="91440" marR="91440" marT="45720" marB="45720">
-                    <a:lnL w="6350" cap="flat" cmpd="sng" algn="ctr">
-                      <a:solidFill>
-                        <a:srgbClr val="CBD5E1"/>
-                      </a:solidFill>
-                      <a:prstDash val="solid"/>
-                      <a:round/>
-                      <a:headEnd type="none" w="med" len="med"/>
-                      <a:tailEnd type="none" w="med" len="med"/>
-                    </a:lnL>
-                    <a:lnR w="6350" cap="flat" cmpd="sng" algn="ctr">
-                      <a:solidFill>
-                        <a:srgbClr val="CBD5E1"/>
-                      </a:solidFill>
-                      <a:prstDash val="solid"/>
-                      <a:round/>
-                      <a:headEnd type="none" w="med" len="med"/>
-                      <a:tailEnd type="none" w="med" len="med"/>
-                    </a:lnR>
-                    <a:lnT w="6350" cap="flat" cmpd="sng" algn="ctr">
-                      <a:solidFill>
-                        <a:srgbClr val="CBD5E1"/>
-                      </a:solidFill>
-                      <a:prstDash val="solid"/>
-                      <a:round/>
-                      <a:headEnd type="none" w="med" len="med"/>
-                      <a:tailEnd type="none" w="med" len="med"/>
-                    </a:lnT>
-                    <a:lnB w="6350" cap="flat" cmpd="sng" algn="ctr">
-                      <a:solidFill>
-                        <a:srgbClr val="CBD5E1"/>
-                      </a:solidFill>
-                      <a:prstDash val="solid"/>
-                      <a:round/>
-                      <a:headEnd type="none" w="med" len="med"/>
-                      <a:tailEnd type="none" w="med" len="med"/>
-                    </a:lnB>
-                    <a:solidFill>
-                      <a:srgbClr val="FFFFFF"/>
-                    </a:solidFill>
-                  </a:tcPr>
-                </a:tc>
-                <a:tc>
-                  <a:txBody>
-                    <a:bodyPr/>
-                    <a:lstStyle/>
-                    <a:p>
-                      <a:pPr algn="ctr" indent="0" marL="0">
-                        <a:buNone/>
-                      </a:pPr>
-                      <a:r>
-                        <a:rPr lang="en-US" sz="900" dirty="0">
-                          <a:solidFill>
-                            <a:srgbClr val="000000"/>
-                          </a:solidFill>
-                          <a:latin typeface="Arial" pitchFamily="34" charset="0"/>
-                          <a:ea typeface="Arial" pitchFamily="34" charset="-122"/>
-                          <a:cs typeface="Arial" pitchFamily="34" charset="-120"/>
-                        </a:rPr>
-                        <a:t>/10</a:t>
-                      </a:r>
-                      <a:endParaRPr lang="en-US" sz="900" dirty="0">
-                        <a:latin typeface="Arial" charset="0"/>
-                        <a:ea typeface="Arial" charset="0"/>
-                        <a:cs typeface="Arial" charset="0"/>
-                      </a:endParaRPr>
-                    </a:p>
-                  </a:txBody>
-                  <a:tcPr marL="91440" marR="91440" marT="45720" marB="45720">
-                    <a:lnL w="6350" cap="flat" cmpd="sng" algn="ctr">
-                      <a:solidFill>
-                        <a:srgbClr val="CBD5E1"/>
-                      </a:solidFill>
-                      <a:prstDash val="solid"/>
-                      <a:round/>
-                      <a:headEnd type="none" w="med" len="med"/>
-                      <a:tailEnd type="none" w="med" len="med"/>
-                    </a:lnL>
-                    <a:lnR w="6350" cap="flat" cmpd="sng" algn="ctr">
-                      <a:solidFill>
-                        <a:srgbClr val="CBD5E1"/>
-                      </a:solidFill>
-                      <a:prstDash val="solid"/>
-                      <a:round/>
-                      <a:headEnd type="none" w="med" len="med"/>
-                      <a:tailEnd type="none" w="med" len="med"/>
-                    </a:lnR>
-                    <a:lnT w="6350" cap="flat" cmpd="sng" algn="ctr">
-                      <a:solidFill>
-                        <a:srgbClr val="CBD5E1"/>
-                      </a:solidFill>
-                      <a:prstDash val="solid"/>
-                      <a:round/>
-                      <a:headEnd type="none" w="med" len="med"/>
-                      <a:tailEnd type="none" w="med" len="med"/>
-                    </a:lnT>
-                    <a:lnB w="6350" cap="flat" cmpd="sng" algn="ctr">
-                      <a:solidFill>
-                        <a:srgbClr val="CBD5E1"/>
-                      </a:solidFill>
-                      <a:prstDash val="solid"/>
-                      <a:round/>
-                      <a:headEnd type="none" w="med" len="med"/>
-                      <a:tailEnd type="none" w="med" len="med"/>
-                    </a:lnB>
-                    <a:solidFill>
-                      <a:srgbClr val="FFFFFF"/>
-                    </a:solidFill>
-                  </a:tcPr>
-                </a:tc>
-                <a:tc>
-                  <a:txBody>
-                    <a:bodyPr/>
-                    <a:lstStyle/>
-                    <a:p>
-                      <a:pPr algn="ctr" indent="0" marL="0">
-                        <a:buNone/>
-                      </a:pPr>
-                      <a:r>
-                        <a:rPr lang="en-US" sz="900" dirty="0">
-                          <a:solidFill>
-                            <a:srgbClr val="000000"/>
-                          </a:solidFill>
-                          <a:latin typeface="Arial" pitchFamily="34" charset="0"/>
-                          <a:ea typeface="Arial" pitchFamily="34" charset="-122"/>
-                          <a:cs typeface="Arial" pitchFamily="34" charset="-120"/>
-                        </a:rPr>
-                        <a:t>7.74</a:t>
+                        <a:t>7.83</a:t>
                       </a:r>
                       <a:endParaRPr lang="en-US" sz="900" dirty="0">
                         <a:latin typeface="Arial" charset="0"/>
@@ -10233,7 +10216,7 @@
                 <a:ea typeface="Arial" pitchFamily="34" charset="-122"/>
                 <a:cs typeface="Arial" pitchFamily="34" charset="-120"/>
               </a:rPr>
-              <a:t>125件（85.6%）</a:t>
+              <a:t>61件（83.6%）</a:t>
             </a:r>
             <a:endParaRPr lang="en-US" sz="1100" dirty="0"/>
           </a:p>
@@ -10331,7 +10314,7 @@
                 <a:ea typeface="Arial" pitchFamily="34" charset="-122"/>
                 <a:cs typeface="Arial" pitchFamily="34" charset="-120"/>
               </a:rPr>
-              <a:t>16件（11.0%）</a:t>
+              <a:t>9件（12.3%）</a:t>
             </a:r>
             <a:endParaRPr lang="en-US" sz="1100" dirty="0"/>
           </a:p>
@@ -10429,7 +10412,7 @@
                 <a:ea typeface="Arial" pitchFamily="34" charset="-122"/>
                 <a:cs typeface="Arial" pitchFamily="34" charset="-120"/>
               </a:rPr>
-              <a:t>5件（3.4%）</a:t>
+              <a:t>3件（4.1%）</a:t>
             </a:r>
             <a:endParaRPr lang="en-US" sz="1100" dirty="0"/>
           </a:p>
@@ -10763,7 +10746,7 @@
                 <a:ea typeface="Arial" pitchFamily="34" charset="-122"/>
                 <a:cs typeface="Arial" pitchFamily="34" charset="-120"/>
               </a:rPr>
-              <a:t>50件+</a:t>
+              <a:t>20件+</a:t>
             </a:r>
             <a:endParaRPr lang="en-US" sz="900" dirty="0"/>
           </a:p>
@@ -10986,7 +10969,7 @@
                 <a:ea typeface="Arial" pitchFamily="34" charset="-122"/>
                 <a:cs typeface="Arial" pitchFamily="34" charset="-120"/>
               </a:rPr>
-              <a:t>50件+</a:t>
+              <a:t>20件+</a:t>
             </a:r>
             <a:endParaRPr lang="en-US" sz="900" dirty="0"/>
           </a:p>
@@ -11001,6 +10984,229 @@
         <p:spPr>
           <a:xfrm>
             <a:off x="3429000" y="1124712"/>
+            <a:ext cx="1645920" cy="274320"/>
+          </a:xfrm>
+          <a:prstGeom prst="rect">
+            <a:avLst/>
+          </a:prstGeom>
+          <a:noFill/>
+          <a:ln/>
+        </p:spPr>
+        <p:txBody>
+          <a:bodyPr wrap="square" lIns="0" tIns="0" rIns="0" bIns="0" rtlCol="0" anchor="ctr"/>
+          <a:lstStyle/>
+          <a:p>
+            <a:pPr indent="0" marL="0">
+              <a:buNone/>
+            </a:pPr>
+            <a:r>
+              <a:rPr lang="en-US" sz="1300" b="1" dirty="0">
+                <a:solidFill>
+                  <a:srgbClr val="1A2744"/>
+                </a:solidFill>
+                <a:latin typeface="Arial" pitchFamily="34" charset="0"/>
+                <a:ea typeface="Arial" pitchFamily="34" charset="-122"/>
+                <a:cs typeface="Arial" pitchFamily="34" charset="-120"/>
+              </a:rPr>
+              <a:t>スタッフの対応</a:t>
+            </a:r>
+            <a:endParaRPr lang="en-US" sz="1300" dirty="0"/>
+          </a:p>
+        </p:txBody>
+      </p:sp>
+      <p:sp>
+        <p:nvSpPr>
+          <p:cNvPr id="17" name="Text 15"/>
+          <p:cNvSpPr/>
+          <p:nvPr/>
+        </p:nvSpPr>
+        <p:spPr>
+          <a:xfrm>
+            <a:off x="3429000" y="1417320"/>
+            <a:ext cx="2377440" cy="365760"/>
+          </a:xfrm>
+          <a:prstGeom prst="rect">
+            <a:avLst/>
+          </a:prstGeom>
+          <a:noFill/>
+          <a:ln/>
+        </p:spPr>
+        <p:txBody>
+          <a:bodyPr wrap="square" lIns="0" tIns="0" rIns="0" bIns="0" rtlCol="0" anchor="ctr"/>
+          <a:lstStyle/>
+          <a:p>
+            <a:pPr indent="0" marL="0">
+              <a:buNone/>
+            </a:pPr>
+            <a:r>
+              <a:rPr lang="en-US" sz="900" dirty="0">
+                <a:solidFill>
+                  <a:srgbClr val="64748B"/>
+                </a:solidFill>
+                <a:latin typeface="Arial" pitchFamily="34" charset="0"/>
+                <a:ea typeface="Arial" pitchFamily="34" charset="-122"/>
+                <a:cs typeface="Arial" pitchFamily="34" charset="-120"/>
+              </a:rPr>
+              <a:t>とにかくスタッフに電話したら、とても親切に対応してくれて、対応してくれたのはありがたかったのですが、エアコンの音は...</a:t>
+            </a:r>
+            <a:endParaRPr lang="en-US" sz="900" dirty="0"/>
+          </a:p>
+        </p:txBody>
+      </p:sp>
+      <p:sp>
+        <p:nvSpPr>
+          <p:cNvPr id="18" name="Text 16"/>
+          <p:cNvSpPr/>
+          <p:nvPr/>
+        </p:nvSpPr>
+        <p:spPr>
+          <a:xfrm>
+            <a:off x="3429000" y="1828800"/>
+            <a:ext cx="2377440" cy="640080"/>
+          </a:xfrm>
+          <a:prstGeom prst="rect">
+            <a:avLst/>
+          </a:prstGeom>
+          <a:noFill/>
+          <a:ln/>
+        </p:spPr>
+        <p:txBody>
+          <a:bodyPr wrap="square" lIns="0" tIns="0" rIns="0" bIns="0" rtlCol="0" anchor="ctr"/>
+          <a:lstStyle/>
+          <a:p>
+            <a:pPr indent="0" marL="0">
+              <a:buNone/>
+            </a:pPr>
+            <a:r>
+              <a:rPr lang="en-US" sz="900" i="1" dirty="0">
+                <a:solidFill>
+                  <a:srgbClr val="3B7DD8"/>
+                </a:solidFill>
+                <a:latin typeface="Arial" pitchFamily="34" charset="0"/>
+                <a:ea typeface="Arial" pitchFamily="34" charset="-122"/>
+                <a:cs typeface="Arial" pitchFamily="34" charset="-120"/>
+              </a:rPr>
+              <a:t>「チェックイン後、アメニティを選んでいたらスタッフの方が子供用の可愛いアメニティを持ってきてくださり、その他にも塗り...」</a:t>
+            </a:r>
+            <a:endParaRPr lang="en-US" sz="900" dirty="0"/>
+          </a:p>
+        </p:txBody>
+      </p:sp>
+      <p:sp>
+        <p:nvSpPr>
+          <p:cNvPr id="19" name="Shape 17"/>
+          <p:cNvSpPr/>
+          <p:nvPr/>
+        </p:nvSpPr>
+        <p:spPr>
+          <a:xfrm>
+            <a:off x="6126480" y="1051560"/>
+            <a:ext cx="2651760" cy="1600200"/>
+          </a:xfrm>
+          <a:prstGeom prst="rect">
+            <a:avLst/>
+          </a:prstGeom>
+          <a:solidFill>
+            <a:srgbClr val="FFFFFF"/>
+          </a:solidFill>
+          <a:ln/>
+          <a:effectLst>
+            <a:outerShdw sx="100000" sy="100000" kx="0" ky="0" algn="bl" rotWithShape="0" blurRad="50800" dist="25400" dir="8100000">
+              <a:srgbClr val="000000">
+                <a:alpha val="10000"/>
+              </a:srgbClr>
+            </a:outerShdw>
+          </a:effectLst>
+        </p:spPr>
+      </p:sp>
+      <p:sp>
+        <p:nvSpPr>
+          <p:cNvPr id="20" name="Shape 18"/>
+          <p:cNvSpPr/>
+          <p:nvPr/>
+        </p:nvSpPr>
+        <p:spPr>
+          <a:xfrm>
+            <a:off x="6126480" y="1051560"/>
+            <a:ext cx="54864" cy="1600200"/>
+          </a:xfrm>
+          <a:prstGeom prst="rect">
+            <a:avLst/>
+          </a:prstGeom>
+          <a:solidFill>
+            <a:srgbClr val="16A34A"/>
+          </a:solidFill>
+          <a:ln/>
+        </p:spPr>
+      </p:sp>
+      <p:sp>
+        <p:nvSpPr>
+          <p:cNvPr id="21" name="Shape 19"/>
+          <p:cNvSpPr/>
+          <p:nvPr/>
+        </p:nvSpPr>
+        <p:spPr>
+          <a:xfrm>
+            <a:off x="7955280" y="1124712"/>
+            <a:ext cx="658368" cy="228600"/>
+          </a:xfrm>
+          <a:prstGeom prst="rect">
+            <a:avLst/>
+          </a:prstGeom>
+          <a:solidFill>
+            <a:srgbClr val="DCFCE7"/>
+          </a:solidFill>
+          <a:ln/>
+        </p:spPr>
+      </p:sp>
+      <p:sp>
+        <p:nvSpPr>
+          <p:cNvPr id="22" name="Text 20"/>
+          <p:cNvSpPr/>
+          <p:nvPr/>
+        </p:nvSpPr>
+        <p:spPr>
+          <a:xfrm>
+            <a:off x="7955280" y="1124712"/>
+            <a:ext cx="658368" cy="228600"/>
+          </a:xfrm>
+          <a:prstGeom prst="rect">
+            <a:avLst/>
+          </a:prstGeom>
+          <a:noFill/>
+          <a:ln/>
+        </p:spPr>
+        <p:txBody>
+          <a:bodyPr wrap="square" lIns="0" tIns="0" rIns="0" bIns="0" rtlCol="0" anchor="ctr"/>
+          <a:lstStyle/>
+          <a:p>
+            <a:pPr algn="ctr" indent="0" marL="0">
+              <a:buNone/>
+            </a:pPr>
+            <a:r>
+              <a:rPr lang="en-US" sz="900" b="1" dirty="0">
+                <a:solidFill>
+                  <a:srgbClr val="16A34A"/>
+                </a:solidFill>
+                <a:latin typeface="Arial" pitchFamily="34" charset="0"/>
+                <a:ea typeface="Arial" pitchFamily="34" charset="-122"/>
+                <a:cs typeface="Arial" pitchFamily="34" charset="-120"/>
+              </a:rPr>
+              <a:t>20件+</a:t>
+            </a:r>
+            <a:endParaRPr lang="en-US" sz="900" dirty="0"/>
+          </a:p>
+        </p:txBody>
+      </p:sp>
+      <p:sp>
+        <p:nvSpPr>
+          <p:cNvPr id="23" name="Text 21"/>
+          <p:cNvSpPr/>
+          <p:nvPr/>
+        </p:nvSpPr>
+        <p:spPr>
+          <a:xfrm>
+            <a:off x="6263640" y="1124712"/>
             <a:ext cx="1645920" cy="274320"/>
           </a:xfrm>
           <a:prstGeom prst="rect">
@@ -11033,13 +11239,13 @@
       </p:sp>
       <p:sp>
         <p:nvSpPr>
-          <p:cNvPr id="17" name="Text 15"/>
-          <p:cNvSpPr/>
-          <p:nvPr/>
-        </p:nvSpPr>
-        <p:spPr>
-          <a:xfrm>
-            <a:off x="3429000" y="1417320"/>
+          <p:cNvPr id="24" name="Text 22"/>
+          <p:cNvSpPr/>
+          <p:nvPr/>
+        </p:nvSpPr>
+        <p:spPr>
+          <a:xfrm>
+            <a:off x="6263640" y="1417320"/>
             <a:ext cx="2377440" cy="365760"/>
           </a:xfrm>
           <a:prstGeom prst="rect">
@@ -11072,13 +11278,13 @@
       </p:sp>
       <p:sp>
         <p:nvSpPr>
-          <p:cNvPr id="18" name="Text 16"/>
-          <p:cNvSpPr/>
-          <p:nvPr/>
-        </p:nvSpPr>
-        <p:spPr>
-          <a:xfrm>
-            <a:off x="3429000" y="1828800"/>
+          <p:cNvPr id="25" name="Text 23"/>
+          <p:cNvSpPr/>
+          <p:nvPr/>
+        </p:nvSpPr>
+        <p:spPr>
+          <a:xfrm>
+            <a:off x="6263640" y="1828800"/>
             <a:ext cx="2377440" cy="640080"/>
           </a:xfrm>
           <a:prstGeom prst="rect">
@@ -11111,13 +11317,13 @@
       </p:sp>
       <p:sp>
         <p:nvSpPr>
-          <p:cNvPr id="19" name="Shape 17"/>
-          <p:cNvSpPr/>
-          <p:nvPr/>
-        </p:nvSpPr>
-        <p:spPr>
-          <a:xfrm>
-            <a:off x="6126480" y="1051560"/>
+          <p:cNvPr id="26" name="Shape 24"/>
+          <p:cNvSpPr/>
+          <p:nvPr/>
+        </p:nvSpPr>
+        <p:spPr>
+          <a:xfrm>
+            <a:off x="457200" y="2880360"/>
             <a:ext cx="2651760" cy="1600200"/>
           </a:xfrm>
           <a:prstGeom prst="rect">
@@ -11138,13 +11344,13 @@
       </p:sp>
       <p:sp>
         <p:nvSpPr>
-          <p:cNvPr id="20" name="Shape 18"/>
-          <p:cNvSpPr/>
-          <p:nvPr/>
-        </p:nvSpPr>
-        <p:spPr>
-          <a:xfrm>
-            <a:off x="6126480" y="1051560"/>
+          <p:cNvPr id="27" name="Shape 25"/>
+          <p:cNvSpPr/>
+          <p:nvPr/>
+        </p:nvSpPr>
+        <p:spPr>
+          <a:xfrm>
+            <a:off x="457200" y="2880360"/>
             <a:ext cx="54864" cy="1600200"/>
           </a:xfrm>
           <a:prstGeom prst="rect">
@@ -11158,13 +11364,13 @@
       </p:sp>
       <p:sp>
         <p:nvSpPr>
-          <p:cNvPr id="21" name="Shape 19"/>
-          <p:cNvSpPr/>
-          <p:nvPr/>
-        </p:nvSpPr>
-        <p:spPr>
-          <a:xfrm>
-            <a:off x="7955280" y="1124712"/>
+          <p:cNvPr id="28" name="Shape 26"/>
+          <p:cNvSpPr/>
+          <p:nvPr/>
+        </p:nvSpPr>
+        <p:spPr>
+          <a:xfrm>
+            <a:off x="2286000" y="2953512"/>
             <a:ext cx="658368" cy="228600"/>
           </a:xfrm>
           <a:prstGeom prst="rect">
@@ -11178,13 +11384,13 @@
       </p:sp>
       <p:sp>
         <p:nvSpPr>
-          <p:cNvPr id="22" name="Text 20"/>
-          <p:cNvSpPr/>
-          <p:nvPr/>
-        </p:nvSpPr>
-        <p:spPr>
-          <a:xfrm>
-            <a:off x="7955280" y="1124712"/>
+          <p:cNvPr id="29" name="Text 27"/>
+          <p:cNvSpPr/>
+          <p:nvPr/>
+        </p:nvSpPr>
+        <p:spPr>
+          <a:xfrm>
+            <a:off x="2286000" y="2953512"/>
             <a:ext cx="658368" cy="228600"/>
           </a:xfrm>
           <a:prstGeom prst="rect">
@@ -11209,230 +11415,7 @@
                 <a:ea typeface="Arial" pitchFamily="34" charset="-122"/>
                 <a:cs typeface="Arial" pitchFamily="34" charset="-120"/>
               </a:rPr>
-              <a:t>50件+</a:t>
-            </a:r>
-            <a:endParaRPr lang="en-US" sz="900" dirty="0"/>
-          </a:p>
-        </p:txBody>
-      </p:sp>
-      <p:sp>
-        <p:nvSpPr>
-          <p:cNvPr id="23" name="Text 21"/>
-          <p:cNvSpPr/>
-          <p:nvPr/>
-        </p:nvSpPr>
-        <p:spPr>
-          <a:xfrm>
-            <a:off x="6263640" y="1124712"/>
-            <a:ext cx="1645920" cy="274320"/>
-          </a:xfrm>
-          <a:prstGeom prst="rect">
-            <a:avLst/>
-          </a:prstGeom>
-          <a:noFill/>
-          <a:ln/>
-        </p:spPr>
-        <p:txBody>
-          <a:bodyPr wrap="square" lIns="0" tIns="0" rIns="0" bIns="0" rtlCol="0" anchor="ctr"/>
-          <a:lstStyle/>
-          <a:p>
-            <a:pPr indent="0" marL="0">
-              <a:buNone/>
-            </a:pPr>
-            <a:r>
-              <a:rPr lang="en-US" sz="1300" b="1" dirty="0">
-                <a:solidFill>
-                  <a:srgbClr val="1A2744"/>
-                </a:solidFill>
-                <a:latin typeface="Arial" pitchFamily="34" charset="0"/>
-                <a:ea typeface="Arial" pitchFamily="34" charset="-122"/>
-                <a:cs typeface="Arial" pitchFamily="34" charset="-120"/>
-              </a:rPr>
-              <a:t>スタッフの対応</a:t>
-            </a:r>
-            <a:endParaRPr lang="en-US" sz="1300" dirty="0"/>
-          </a:p>
-        </p:txBody>
-      </p:sp>
-      <p:sp>
-        <p:nvSpPr>
-          <p:cNvPr id="24" name="Text 22"/>
-          <p:cNvSpPr/>
-          <p:nvPr/>
-        </p:nvSpPr>
-        <p:spPr>
-          <a:xfrm>
-            <a:off x="6263640" y="1417320"/>
-            <a:ext cx="2377440" cy="365760"/>
-          </a:xfrm>
-          <a:prstGeom prst="rect">
-            <a:avLst/>
-          </a:prstGeom>
-          <a:noFill/>
-          <a:ln/>
-        </p:spPr>
-        <p:txBody>
-          <a:bodyPr wrap="square" lIns="0" tIns="0" rIns="0" bIns="0" rtlCol="0" anchor="ctr"/>
-          <a:lstStyle/>
-          <a:p>
-            <a:pPr indent="0" marL="0">
-              <a:buNone/>
-            </a:pPr>
-            <a:r>
-              <a:rPr lang="en-US" sz="900" dirty="0">
-                <a:solidFill>
-                  <a:srgbClr val="64748B"/>
-                </a:solidFill>
-                <a:latin typeface="Arial" pitchFamily="34" charset="0"/>
-                <a:ea typeface="Arial" pitchFamily="34" charset="-122"/>
-                <a:cs typeface="Arial" pitchFamily="34" charset="-120"/>
-              </a:rPr>
-              <a:t>とにかくスタッフに電話したら、とても親切に対応してくれて、対応してくれたのはありがたかったのですが、エアコンの音は...</a:t>
-            </a:r>
-            <a:endParaRPr lang="en-US" sz="900" dirty="0"/>
-          </a:p>
-        </p:txBody>
-      </p:sp>
-      <p:sp>
-        <p:nvSpPr>
-          <p:cNvPr id="25" name="Text 23"/>
-          <p:cNvSpPr/>
-          <p:nvPr/>
-        </p:nvSpPr>
-        <p:spPr>
-          <a:xfrm>
-            <a:off x="6263640" y="1828800"/>
-            <a:ext cx="2377440" cy="640080"/>
-          </a:xfrm>
-          <a:prstGeom prst="rect">
-            <a:avLst/>
-          </a:prstGeom>
-          <a:noFill/>
-          <a:ln/>
-        </p:spPr>
-        <p:txBody>
-          <a:bodyPr wrap="square" lIns="0" tIns="0" rIns="0" bIns="0" rtlCol="0" anchor="ctr"/>
-          <a:lstStyle/>
-          <a:p>
-            <a:pPr indent="0" marL="0">
-              <a:buNone/>
-            </a:pPr>
-            <a:r>
-              <a:rPr lang="en-US" sz="900" i="1" dirty="0">
-                <a:solidFill>
-                  <a:srgbClr val="3B7DD8"/>
-                </a:solidFill>
-                <a:latin typeface="Arial" pitchFamily="34" charset="0"/>
-                <a:ea typeface="Arial" pitchFamily="34" charset="-122"/>
-                <a:cs typeface="Arial" pitchFamily="34" charset="-120"/>
-              </a:rPr>
-              <a:t>「チェックイン後、アメニティを選んでいたらスタッフの方が子供用の可愛いアメニティを持ってきてくださり、その他にも塗り...」</a:t>
-            </a:r>
-            <a:endParaRPr lang="en-US" sz="900" dirty="0"/>
-          </a:p>
-        </p:txBody>
-      </p:sp>
-      <p:sp>
-        <p:nvSpPr>
-          <p:cNvPr id="26" name="Shape 24"/>
-          <p:cNvSpPr/>
-          <p:nvPr/>
-        </p:nvSpPr>
-        <p:spPr>
-          <a:xfrm>
-            <a:off x="457200" y="2880360"/>
-            <a:ext cx="2651760" cy="1600200"/>
-          </a:xfrm>
-          <a:prstGeom prst="rect">
-            <a:avLst/>
-          </a:prstGeom>
-          <a:solidFill>
-            <a:srgbClr val="FFFFFF"/>
-          </a:solidFill>
-          <a:ln/>
-          <a:effectLst>
-            <a:outerShdw sx="100000" sy="100000" kx="0" ky="0" algn="bl" rotWithShape="0" blurRad="50800" dist="25400" dir="8100000">
-              <a:srgbClr val="000000">
-                <a:alpha val="10000"/>
-              </a:srgbClr>
-            </a:outerShdw>
-          </a:effectLst>
-        </p:spPr>
-      </p:sp>
-      <p:sp>
-        <p:nvSpPr>
-          <p:cNvPr id="27" name="Shape 25"/>
-          <p:cNvSpPr/>
-          <p:nvPr/>
-        </p:nvSpPr>
-        <p:spPr>
-          <a:xfrm>
-            <a:off x="457200" y="2880360"/>
-            <a:ext cx="54864" cy="1600200"/>
-          </a:xfrm>
-          <a:prstGeom prst="rect">
-            <a:avLst/>
-          </a:prstGeom>
-          <a:solidFill>
-            <a:srgbClr val="16A34A"/>
-          </a:solidFill>
-          <a:ln/>
-        </p:spPr>
-      </p:sp>
-      <p:sp>
-        <p:nvSpPr>
-          <p:cNvPr id="28" name="Shape 26"/>
-          <p:cNvSpPr/>
-          <p:nvPr/>
-        </p:nvSpPr>
-        <p:spPr>
-          <a:xfrm>
-            <a:off x="2286000" y="2953512"/>
-            <a:ext cx="658368" cy="228600"/>
-          </a:xfrm>
-          <a:prstGeom prst="rect">
-            <a:avLst/>
-          </a:prstGeom>
-          <a:solidFill>
-            <a:srgbClr val="DCFCE7"/>
-          </a:solidFill>
-          <a:ln/>
-        </p:spPr>
-      </p:sp>
-      <p:sp>
-        <p:nvSpPr>
-          <p:cNvPr id="29" name="Text 27"/>
-          <p:cNvSpPr/>
-          <p:nvPr/>
-        </p:nvSpPr>
-        <p:spPr>
-          <a:xfrm>
-            <a:off x="2286000" y="2953512"/>
-            <a:ext cx="658368" cy="228600"/>
-          </a:xfrm>
-          <a:prstGeom prst="rect">
-            <a:avLst/>
-          </a:prstGeom>
-          <a:noFill/>
-          <a:ln/>
-        </p:spPr>
-        <p:txBody>
-          <a:bodyPr wrap="square" lIns="0" tIns="0" rIns="0" bIns="0" rtlCol="0" anchor="ctr"/>
-          <a:lstStyle/>
-          <a:p>
-            <a:pPr algn="ctr" indent="0" marL="0">
-              <a:buNone/>
-            </a:pPr>
-            <a:r>
-              <a:rPr lang="en-US" sz="900" b="1" dirty="0">
-                <a:solidFill>
-                  <a:srgbClr val="16A34A"/>
-                </a:solidFill>
-                <a:latin typeface="Arial" pitchFamily="34" charset="0"/>
-                <a:ea typeface="Arial" pitchFamily="34" charset="-122"/>
-                <a:cs typeface="Arial" pitchFamily="34" charset="-120"/>
-              </a:rPr>
-              <a:t>20件+</a:t>
+              <a:t>10件+</a:t>
             </a:r>
             <a:endParaRPr lang="en-US" sz="900" dirty="0"/>
           </a:p>
@@ -11655,7 +11638,7 @@
                 <a:ea typeface="Arial" pitchFamily="34" charset="-122"/>
                 <a:cs typeface="Arial" pitchFamily="34" charset="-120"/>
               </a:rPr>
-              <a:t>20件+</a:t>
+              <a:t>10件+</a:t>
             </a:r>
             <a:endParaRPr lang="en-US" sz="900" dirty="0"/>
           </a:p>
@@ -11878,7 +11861,7 @@
                 <a:ea typeface="Arial" pitchFamily="34" charset="-122"/>
                 <a:cs typeface="Arial" pitchFamily="34" charset="-120"/>
               </a:rPr>
-              <a:t>20件+</a:t>
+              <a:t>10件+</a:t>
             </a:r>
             <a:endParaRPr lang="en-US" sz="900" dirty="0"/>
           </a:p>
@@ -11917,7 +11900,7 @@
                 <a:ea typeface="Arial" pitchFamily="34" charset="-122"/>
                 <a:cs typeface="Arial" pitchFamily="34" charset="-120"/>
               </a:rPr>
-              <a:t>コンビニ・周辺施設</a:t>
+              <a:t>コストパフォーマンス</a:t>
             </a:r>
             <a:endParaRPr lang="en-US" sz="1300" dirty="0"/>
           </a:p>
@@ -11956,7 +11939,7 @@
                 <a:ea typeface="Arial" pitchFamily="34" charset="-122"/>
                 <a:cs typeface="Arial" pitchFamily="34" charset="-120"/>
               </a:rPr>
-              <a:t>途中にローソンがあり、池袋から1駅、新宿から3駅と非常に便利な立地です</a:t>
+              <a:t>部屋は小さいですが、基本的なアメニティはすべて揃っているので、コストパフォーマンスに優れています</a:t>
             </a:r>
             <a:endParaRPr lang="en-US" sz="900" dirty="0"/>
           </a:p>
@@ -11995,7 +11978,7 @@
                 <a:ea typeface="Arial" pitchFamily="34" charset="-122"/>
                 <a:cs typeface="Arial" pitchFamily="34" charset="-120"/>
               </a:rPr>
-              <a:t>「近隣には松本清、ココナ、赤いローソンコンビニエンスストアがあります」</a:t>
+              <a:t>「素敵でお手頃価格 素敵でお手頃価格」</a:t>
             </a:r>
             <a:endParaRPr lang="en-US" sz="900" dirty="0"/>
           </a:p>
@@ -12753,7 +12736,7 @@
                           <a:ea typeface="Arial" pitchFamily="34" charset="-122"/>
                           <a:cs typeface="Arial" pitchFamily="34" charset="-120"/>
                         </a:rPr>
-                        <a:t>22件</a:t>
+                        <a:t>16件</a:t>
                       </a:r>
                       <a:endParaRPr lang="en-US" sz="900" dirty="0">
                         <a:latin typeface="Arial" charset="0"/>
@@ -13027,7 +13010,7 @@
                           <a:ea typeface="Arial" pitchFamily="34" charset="-122"/>
                           <a:cs typeface="Arial" pitchFamily="34" charset="-120"/>
                         </a:rPr>
-                        <a:t>19件</a:t>
+                        <a:t>9件</a:t>
                       </a:r>
                       <a:endParaRPr lang="en-US" sz="900" dirty="0">
                         <a:latin typeface="Arial" charset="0"/>
@@ -13165,7 +13148,7 @@
                           <a:ea typeface="Arial" pitchFamily="34" charset="-122"/>
                           <a:cs typeface="Arial" pitchFamily="34" charset="-120"/>
                         </a:rPr>
-                        <a:t>設備の老朽化</a:t>
+                        <a:t>防音性能</a:t>
                       </a:r>
                       <a:endParaRPr lang="en-US" sz="900" dirty="0">
                         <a:latin typeface="Arial" charset="0"/>
@@ -13233,7 +13216,7 @@
                           <a:ea typeface="Arial" pitchFamily="34" charset="-122"/>
                           <a:cs typeface="Arial" pitchFamily="34" charset="-120"/>
                         </a:rPr>
-                        <a:t>部屋はやや年季が入っていますが、きれいに掃除されておりました</a:t>
+                        <a:t>ああ、エアコンの音がうるさくてよく眠れません</a:t>
                       </a:r>
                       <a:endParaRPr lang="en-US" sz="900" dirty="0">
                         <a:latin typeface="Arial" charset="0"/>
@@ -13301,7 +13284,7 @@
                           <a:ea typeface="Arial" pitchFamily="34" charset="-122"/>
                           <a:cs typeface="Arial" pitchFamily="34" charset="-120"/>
                         </a:rPr>
-                        <a:t>10件</a:t>
+                        <a:t>4件</a:t>
                       </a:r>
                       <a:endParaRPr lang="en-US" sz="900" dirty="0">
                         <a:latin typeface="Arial" charset="0"/>
@@ -13575,7 +13558,7 @@
                           <a:ea typeface="Arial" pitchFamily="34" charset="-122"/>
                           <a:cs typeface="Arial" pitchFamily="34" charset="-120"/>
                         </a:rPr>
-                        <a:t>9件</a:t>
+                        <a:t>4件</a:t>
                       </a:r>
                       <a:endParaRPr lang="en-US" sz="900" dirty="0">
                         <a:latin typeface="Arial" charset="0"/>
@@ -13713,7 +13696,7 @@
                           <a:ea typeface="Arial" pitchFamily="34" charset="-122"/>
                           <a:cs typeface="Arial" pitchFamily="34" charset="-120"/>
                         </a:rPr>
-                        <a:t>防音性能</a:t>
+                        <a:t>部屋の狭さ</a:t>
                       </a:r>
                       <a:endParaRPr lang="en-US" sz="900" dirty="0">
                         <a:latin typeface="Arial" charset="0"/>
@@ -13781,7 +13764,7 @@
                           <a:ea typeface="Arial" pitchFamily="34" charset="-122"/>
                           <a:cs typeface="Arial" pitchFamily="34" charset="-120"/>
                         </a:rPr>
-                        <a:t>ああ、エアコンの音がうるさくてよく眠れません</a:t>
+                        <a:t>部屋は小さいですが、基本的なアメニティはすべて揃っているので、コストパフォーマンスに優れています</a:t>
                       </a:r>
                       <a:endParaRPr lang="en-US" sz="900" dirty="0">
                         <a:latin typeface="Arial" charset="0"/>
@@ -13849,7 +13832,7 @@
                           <a:ea typeface="Arial" pitchFamily="34" charset="-122"/>
                           <a:cs typeface="Arial" pitchFamily="34" charset="-120"/>
                         </a:rPr>
-                        <a:t>6件</a:t>
+                        <a:t>3件</a:t>
                       </a:r>
                       <a:endParaRPr lang="en-US" sz="900" dirty="0">
                         <a:latin typeface="Arial" charset="0"/>
@@ -13987,7 +13970,7 @@
                           <a:ea typeface="Arial" pitchFamily="34" charset="-122"/>
                           <a:cs typeface="Arial" pitchFamily="34" charset="-120"/>
                         </a:rPr>
-                        <a:t>部屋の狭さ</a:t>
+                        <a:t>窓・採光</a:t>
                       </a:r>
                       <a:endParaRPr lang="en-US" sz="900" dirty="0">
                         <a:latin typeface="Arial" charset="0"/>
@@ -14055,7 +14038,7 @@
                           <a:ea typeface="Arial" pitchFamily="34" charset="-122"/>
                           <a:cs typeface="Arial" pitchFamily="34" charset="-120"/>
                         </a:rPr>
-                        <a:t>部屋は小さいですが、基本的なアメニティはすべて揃っているので、コストパフォーマンスに優れています</a:t>
+                        <a:t>窓がない部屋だったので寝泊まりだけでは充分ですがホテル滞在メインだと部屋有りのとこがいいかもです</a:t>
                       </a:r>
                       <a:endParaRPr lang="en-US" sz="900" dirty="0">
                         <a:latin typeface="Arial" charset="0"/>
@@ -14123,7 +14106,7 @@
                           <a:ea typeface="Arial" pitchFamily="34" charset="-122"/>
                           <a:cs typeface="Arial" pitchFamily="34" charset="-120"/>
                         </a:rPr>
-                        <a:t>5件</a:t>
+                        <a:t>3件</a:t>
                       </a:r>
                       <a:endParaRPr lang="en-US" sz="900" dirty="0">
                         <a:latin typeface="Arial" charset="0"/>
@@ -14261,7 +14244,7 @@
                           <a:ea typeface="Arial" pitchFamily="34" charset="-122"/>
                           <a:cs typeface="Arial" pitchFamily="34" charset="-120"/>
                         </a:rPr>
-                        <a:t>窓・採光</a:t>
+                        <a:t>設備の老朽化</a:t>
                       </a:r>
                       <a:endParaRPr lang="en-US" sz="900" dirty="0">
                         <a:latin typeface="Arial" charset="0"/>
@@ -14329,7 +14312,7 @@
                           <a:ea typeface="Arial" pitchFamily="34" charset="-122"/>
                           <a:cs typeface="Arial" pitchFamily="34" charset="-120"/>
                         </a:rPr>
-                        <a:t>窓がない部屋だったので寝泊まりだけでは充分ですがホテル滞在メインだと部屋有りのとこがいいかもです</a:t>
+                        <a:t>部屋はやや年季が入っていますが、きれいに掃除されておりました</a:t>
                       </a:r>
                       <a:endParaRPr lang="en-US" sz="900" dirty="0">
                         <a:latin typeface="Arial" charset="0"/>
@@ -14397,7 +14380,7 @@
                           <a:ea typeface="Arial" pitchFamily="34" charset="-122"/>
                           <a:cs typeface="Arial" pitchFamily="34" charset="-120"/>
                         </a:rPr>
-                        <a:t>4件</a:t>
+                        <a:t>2件</a:t>
                       </a:r>
                       <a:endParaRPr lang="en-US" sz="900" dirty="0">
                         <a:latin typeface="Arial" charset="0"/>
@@ -14535,7 +14518,7 @@
                           <a:ea typeface="Arial" pitchFamily="34" charset="-122"/>
                           <a:cs typeface="Arial" pitchFamily="34" charset="-120"/>
                         </a:rPr>
-                        <a:t>清掃不備</a:t>
+                        <a:t>朝食の改善要望</a:t>
                       </a:r>
                       <a:endParaRPr lang="en-US" sz="900" dirty="0">
                         <a:latin typeface="Arial" charset="0"/>
@@ -14603,7 +14586,7 @@
                           <a:ea typeface="Arial" pitchFamily="34" charset="-122"/>
                           <a:cs typeface="Arial" pitchFamily="34" charset="-120"/>
                         </a:rPr>
-                        <a:t>汚いです 汚いです</a:t>
+                        <a:t>宿泊者サービスがどこもウェルカムドリンクでチェックイン時には終わっていることがほどんどでしたが、こちらは朝食時にホ...</a:t>
                       </a:r>
                       <a:endParaRPr lang="en-US" sz="900" dirty="0">
                         <a:latin typeface="Arial" charset="0"/>
@@ -14671,7 +14654,7 @@
                           <a:ea typeface="Arial" pitchFamily="34" charset="-122"/>
                           <a:cs typeface="Arial" pitchFamily="34" charset="-120"/>
                         </a:rPr>
-                        <a:t>4件</a:t>
+                        <a:t>2件</a:t>
                       </a:r>
                       <a:endParaRPr lang="en-US" sz="900" dirty="0">
                         <a:latin typeface="Arial" charset="0"/>
@@ -14809,7 +14792,7 @@
                           <a:ea typeface="Arial" pitchFamily="34" charset="-122"/>
                           <a:cs typeface="Arial" pitchFamily="34" charset="-120"/>
                         </a:rPr>
-                        <a:t>臭い・匂い</a:t>
+                        <a:t>清掃不備</a:t>
                       </a:r>
                       <a:endParaRPr lang="en-US" sz="900" dirty="0">
                         <a:latin typeface="Arial" charset="0"/>
@@ -14877,7 +14860,7 @@
                           <a:ea typeface="Arial" pitchFamily="34" charset="-122"/>
                           <a:cs typeface="Arial" pitchFamily="34" charset="-120"/>
                         </a:rPr>
-                        <a:t>お部屋もタバコの匂いは気にならなかったので良かったです</a:t>
+                        <a:t>汚いです 汚いです</a:t>
                       </a:r>
                       <a:endParaRPr lang="en-US" sz="900" dirty="0">
                         <a:latin typeface="Arial" charset="0"/>
@@ -14945,7 +14928,7 @@
                           <a:ea typeface="Arial" pitchFamily="34" charset="-122"/>
                           <a:cs typeface="Arial" pitchFamily="34" charset="-120"/>
                         </a:rPr>
-                        <a:t>3件</a:t>
+                        <a:t>2件</a:t>
                       </a:r>
                       <a:endParaRPr lang="en-US" sz="900" dirty="0">
                         <a:latin typeface="Arial" charset="0"/>

--- a/納品レポート/ホテル別レポート/richmond_mejiro_口コミ分析レポート.pptx
+++ b/納品レポート/ホテル別レポート/richmond_mejiro_口コミ分析レポート.pptx
@@ -2801,7 +2801,7 @@
                 <a:ea typeface="Arial" pitchFamily="34" charset="-122"/>
                 <a:cs typeface="Arial" pitchFamily="34" charset="-120"/>
               </a:rPr>
-              <a:t>作成日：2026年4月13日</a:t>
+              <a:t>作成日：2026年4月15日</a:t>
             </a:r>
             <a:endParaRPr lang="en-US" sz="1000" dirty="0"/>
           </a:p>

--- a/納品レポート/ホテル別レポート/richmond_mejiro_口コミ分析レポート.pptx
+++ b/納品レポート/ホテル別レポート/richmond_mejiro_口コミ分析レポート.pptx
@@ -180,22 +180,22 @@
                 <c:ptCount val="6"/>
                 <c:lvl>
                   <c:pt idx="0">
+                    <c:v>Agoda</c:v>
+                  </c:pt>
+                  <c:pt idx="1">
                     <c:v>Trip.com</c:v>
                   </c:pt>
-                  <c:pt idx="1">
-                    <c:v>Agoda</c:v>
-                  </c:pt>
                   <c:pt idx="2">
-                    <c:v>じゃらん</c:v>
+                    <c:v>Google</c:v>
                   </c:pt>
                   <c:pt idx="3">
-                    <c:v>Google</c:v>
+                    <c:v>楽天トラベル</c:v>
                   </c:pt>
                   <c:pt idx="4">
-                    <c:v>楽天トラベル</c:v>
+                    <c:v>Booking.com</c:v>
                   </c:pt>
                   <c:pt idx="5">
-                    <c:v>Booking.com</c:v>
+                    <c:v>じゃらん</c:v>
                   </c:pt>
                 </c:lvl>
               </c:multiLvlStrCache>
@@ -208,22 +208,22 @@
                 <c:formatCode>General</c:formatCode>
                 <c:ptCount val="6"/>
                 <c:pt idx="0">
-                  <c:v>9.45</c:v>
+                  <c:v>10</c:v>
                 </c:pt>
                 <c:pt idx="1">
-                  <c:v>9.33</c:v>
+                  <c:v>9.48</c:v>
                 </c:pt>
                 <c:pt idx="2">
-                  <c:v>8.62</c:v>
+                  <c:v>8.4</c:v>
                 </c:pt>
                 <c:pt idx="3">
-                  <c:v>8.5</c:v>
+                  <c:v>8</c:v>
                 </c:pt>
                 <c:pt idx="4">
-                  <c:v>8.25</c:v>
+                  <c:v>7.86</c:v>
                 </c:pt>
                 <c:pt idx="5">
-                  <c:v>7.74</c:v>
+                  <c:v>7.83</c:v>
                 </c:pt>
               </c:numCache>
             </c:numRef>
@@ -566,13 +566,13 @@
               <c:numCache>
                 <c:ptCount val="3"/>
                 <c:pt idx="0">
-                  <c:v>125</c:v>
+                  <c:v>61</c:v>
                 </c:pt>
                 <c:pt idx="1">
-                  <c:v>16</c:v>
+                  <c:v>9</c:v>
                 </c:pt>
                 <c:pt idx="2">
-                  <c:v>5</c:v>
+                  <c:v>3</c:v>
                 </c:pt>
               </c:numCache>
             </c:numRef>
@@ -768,22 +768,11 @@
               <a:effectLst/>
             </c:spPr>
           </c:dPt>
-          <c:dPt>
-            <c:idx val="8"/>
-            <c:invertIfNegative val="0"/>
-            <c:bubble3D val="0"/>
-            <c:spPr>
-              <a:solidFill>
-                <a:srgbClr val="DC2626"/>
-              </a:solidFill>
-              <a:effectLst/>
-            </c:spPr>
-          </c:dPt>
           <c:cat>
             <c:multiLvlStrRef>
-              <c:f>Sheet1!$A$2:$A$10</c:f>
+              <c:f>Sheet1!$A$2:$A$9</c:f>
               <c:multiLvlStrCache>
-                <c:ptCount val="9"/>
+                <c:ptCount val="8"/>
                 <c:lvl>
                   <c:pt idx="0">
                     <c:v>10点</c:v>
@@ -804,12 +793,9 @@
                     <c:v>5点</c:v>
                   </c:pt>
                   <c:pt idx="6">
-                    <c:v>4点</c:v>
+                    <c:v>3点</c:v>
                   </c:pt>
                   <c:pt idx="7">
-                    <c:v>3点</c:v>
-                  </c:pt>
-                  <c:pt idx="8">
                     <c:v>2点</c:v>
                   </c:pt>
                 </c:lvl>
@@ -818,36 +804,33 @@
           </c:cat>
           <c:val>
             <c:numRef>
-              <c:f>Sheet1!$B$2:$B$10</c:f>
+              <c:f>Sheet1!$B$2:$B$9</c:f>
               <c:numCache>
                 <c:formatCode>General</c:formatCode>
-                <c:ptCount val="9"/>
+                <c:ptCount val="8"/>
                 <c:pt idx="0">
-                  <c:v>64</c:v>
+                  <c:v>30</c:v>
                 </c:pt>
                 <c:pt idx="1">
-                  <c:v>15</c:v>
+                  <c:v>9</c:v>
                 </c:pt>
                 <c:pt idx="2">
-                  <c:v>46</c:v>
+                  <c:v>22</c:v>
                 </c:pt>
                 <c:pt idx="3">
-                  <c:v>7</c:v>
+                  <c:v>4</c:v>
                 </c:pt>
                 <c:pt idx="4">
-                  <c:v>5</c:v>
+                  <c:v>3</c:v>
                 </c:pt>
                 <c:pt idx="5">
-                  <c:v>4</c:v>
+                  <c:v>2</c:v>
                 </c:pt>
                 <c:pt idx="6">
                   <c:v>1</c:v>
                 </c:pt>
                 <c:pt idx="7">
-                  <c:v>1</c:v>
-                </c:pt>
-                <c:pt idx="8">
-                  <c:v>3</c:v>
+                  <c:v>2</c:v>
                 </c:pt>
               </c:numCache>
             </c:numRef>
@@ -2778,7 +2761,7 @@
                 <a:ea typeface="Arial" pitchFamily="34" charset="-122"/>
                 <a:cs typeface="Arial" pitchFamily="34" charset="-120"/>
               </a:rPr>
-              <a:t>分析対象期間：2026年2月〜3月</a:t>
+              <a:t>分析対象期間：2026年3月</a:t>
             </a:r>
             <a:endParaRPr lang="en-US" sz="1000" dirty="0"/>
           </a:p>
@@ -2798,7 +2781,7 @@
                 <a:ea typeface="Arial" pitchFamily="34" charset="-122"/>
                 <a:cs typeface="Arial" pitchFamily="34" charset="-120"/>
               </a:rPr>
-              <a:t>レビュー総数：146件（6サイト）</a:t>
+              <a:t>レビュー総数：73件（6サイト）</a:t>
             </a:r>
             <a:endParaRPr lang="en-US" sz="1000" dirty="0"/>
           </a:p>
@@ -2818,7 +2801,7 @@
                 <a:ea typeface="Arial" pitchFamily="34" charset="-122"/>
                 <a:cs typeface="Arial" pitchFamily="34" charset="-120"/>
               </a:rPr>
-              <a:t>作成日：2026年4月16日</a:t>
+              <a:t>作成日：2026年4月20日</a:t>
             </a:r>
             <a:endParaRPr lang="en-US" sz="1000" dirty="0"/>
           </a:p>
@@ -3364,7 +3347,7 @@
                           <a:ea typeface="Arial" pitchFamily="34" charset="-122"/>
                           <a:cs typeface="Arial" pitchFamily="34" charset="-120"/>
                         </a:rPr>
-                        <a:t>8.60点</a:t>
+                        <a:t>8.49点</a:t>
                       </a:r>
                       <a:endParaRPr lang="en-US" sz="1000" dirty="0">
                         <a:latin typeface="Arial" charset="0"/>
@@ -3432,7 +3415,7 @@
                           <a:ea typeface="Arial" pitchFamily="34" charset="-122"/>
                           <a:cs typeface="Arial" pitchFamily="34" charset="-120"/>
                         </a:rPr>
-                        <a:t>8.9点以上</a:t>
+                        <a:t>8.8点以上</a:t>
                       </a:r>
                       <a:endParaRPr lang="en-US" sz="1000" dirty="0">
                         <a:latin typeface="Arial" charset="0"/>
@@ -3638,7 +3621,7 @@
                           <a:ea typeface="Arial" pitchFamily="34" charset="-122"/>
                           <a:cs typeface="Arial" pitchFamily="34" charset="-120"/>
                         </a:rPr>
-                        <a:t>85.6%</a:t>
+                        <a:t>83.6%</a:t>
                       </a:r>
                       <a:endParaRPr lang="en-US" sz="1000" dirty="0">
                         <a:latin typeface="Arial" charset="0"/>
@@ -3706,7 +3689,7 @@
                           <a:ea typeface="Arial" pitchFamily="34" charset="-122"/>
                           <a:cs typeface="Arial" pitchFamily="34" charset="-120"/>
                         </a:rPr>
-                        <a:t>91%以上</a:t>
+                        <a:t>89%以上</a:t>
                       </a:r>
                       <a:endParaRPr lang="en-US" sz="1000" dirty="0">
                         <a:latin typeface="Arial" charset="0"/>
@@ -3912,7 +3895,7 @@
                           <a:ea typeface="Arial" pitchFamily="34" charset="-122"/>
                           <a:cs typeface="Arial" pitchFamily="34" charset="-120"/>
                         </a:rPr>
-                        <a:t>3.4%</a:t>
+                        <a:t>4.1%</a:t>
                       </a:r>
                       <a:endParaRPr lang="en-US" sz="1000" dirty="0">
                         <a:latin typeface="Arial" charset="0"/>
@@ -3980,7 +3963,7 @@
                           <a:ea typeface="Arial" pitchFamily="34" charset="-122"/>
                           <a:cs typeface="Arial" pitchFamily="34" charset="-120"/>
                         </a:rPr>
-                        <a:t>0%以下</a:t>
+                        <a:t>1%以下</a:t>
                       </a:r>
                       <a:endParaRPr lang="en-US" sz="1000" dirty="0">
                         <a:latin typeface="Arial" charset="0"/>
@@ -4118,7 +4101,7 @@
                           <a:ea typeface="Arial" pitchFamily="34" charset="-122"/>
                           <a:cs typeface="Arial" pitchFamily="34" charset="-120"/>
                         </a:rPr>
-                        <a:t>Booking.com平均評価</a:t>
+                        <a:t>じゃらん平均評価</a:t>
                       </a:r>
                       <a:endParaRPr lang="en-US" sz="1000" dirty="0">
                         <a:latin typeface="Arial" charset="0"/>
@@ -4186,7 +4169,7 @@
                           <a:ea typeface="Arial" pitchFamily="34" charset="-122"/>
                           <a:cs typeface="Arial" pitchFamily="34" charset="-120"/>
                         </a:rPr>
-                        <a:t>7.7点</a:t>
+                        <a:t>7.8点</a:t>
                       </a:r>
                       <a:endParaRPr lang="en-US" sz="1000" dirty="0">
                         <a:latin typeface="Arial" charset="0"/>
@@ -4254,7 +4237,7 @@
                           <a:ea typeface="Arial" pitchFamily="34" charset="-122"/>
                           <a:cs typeface="Arial" pitchFamily="34" charset="-120"/>
                         </a:rPr>
-                        <a:t>8.7点以上</a:t>
+                        <a:t>8.8点以上</a:t>
                       </a:r>
                       <a:endParaRPr lang="en-US" sz="1000" dirty="0">
                         <a:latin typeface="Arial" charset="0"/>
@@ -4734,7 +4717,7 @@
                           <a:ea typeface="Arial" pitchFamily="34" charset="-122"/>
                           <a:cs typeface="Arial" pitchFamily="34" charset="-120"/>
                         </a:rPr>
-                        <a:t>約22件/期間</a:t>
+                        <a:t>約16件/期間</a:t>
                       </a:r>
                       <a:endParaRPr lang="en-US" sz="1000" dirty="0">
                         <a:latin typeface="Arial" charset="0"/>
@@ -4802,7 +4785,7 @@
                           <a:ea typeface="Arial" pitchFamily="34" charset="-122"/>
                           <a:cs typeface="Arial" pitchFamily="34" charset="-120"/>
                         </a:rPr>
-                        <a:t>11件以下</a:t>
+                        <a:t>8件以下</a:t>
                       </a:r>
                       <a:endParaRPr lang="en-US" sz="1000" dirty="0">
                         <a:latin typeface="Arial" charset="0"/>
@@ -5373,7 +5356,7 @@
                 <a:ea typeface="Arial" pitchFamily="34" charset="-122"/>
                 <a:cs typeface="Arial" pitchFamily="34" charset="-120"/>
               </a:rPr>
-              <a:t>8.60</a:t>
+              <a:t>8.49</a:t>
             </a:r>
             <a:endParaRPr lang="en-US" sz="3200" dirty="0"/>
           </a:p>
@@ -5498,7 +5481,7 @@
                 <a:ea typeface="Arial" pitchFamily="34" charset="-122"/>
                 <a:cs typeface="Arial" pitchFamily="34" charset="-120"/>
               </a:rPr>
-              <a:t>85.6%</a:t>
+              <a:t>83.6%</a:t>
             </a:r>
             <a:endParaRPr lang="en-US" sz="3200" dirty="0"/>
           </a:p>
@@ -5623,7 +5606,7 @@
                 <a:ea typeface="Arial" pitchFamily="34" charset="-122"/>
                 <a:cs typeface="Arial" pitchFamily="34" charset="-120"/>
               </a:rPr>
-              <a:t>3.4%</a:t>
+              <a:t>4.1%</a:t>
             </a:r>
             <a:endParaRPr lang="en-US" sz="3200" dirty="0"/>
           </a:p>
@@ -5748,7 +5731,7 @@
                 <a:ea typeface="Arial" pitchFamily="34" charset="-122"/>
                 <a:cs typeface="Arial" pitchFamily="34" charset="-120"/>
               </a:rPr>
-              <a:t>146件</a:t>
+              <a:t>73件</a:t>
             </a:r>
             <a:endParaRPr lang="en-US" sz="3200" dirty="0"/>
           </a:p>
@@ -5916,6 +5899,46 @@
                 <a:ea typeface="Arial" pitchFamily="34" charset="-122"/>
                 <a:cs typeface="Arial" pitchFamily="34" charset="-120"/>
               </a:rPr>
+              <a:t>スタッフの対応 </a:t>
+            </a:r>
+            <a:endParaRPr lang="en-US" sz="1100" dirty="0"/>
+          </a:p>
+          <a:p>
+            <a:pPr indent="0" marL="0">
+              <a:spcAft>
+                <a:spcPts val="200"/>
+              </a:spcAft>
+              <a:buNone/>
+            </a:pPr>
+            <a:r>
+              <a:rPr lang="en-US" sz="900" dirty="0">
+                <a:solidFill>
+                  <a:srgbClr val="64748B"/>
+                </a:solidFill>
+                <a:latin typeface="Arial" pitchFamily="34" charset="0"/>
+                <a:ea typeface="Arial" pitchFamily="34" charset="-122"/>
+                <a:cs typeface="Arial" pitchFamily="34" charset="-120"/>
+              </a:rPr>
+              <a:t>  とにかくスタッフに電話したら、とても親切に対応してくれて、対応してくれたのはありがたかったのですが、エアコンの音は...</a:t>
+            </a:r>
+            <a:endParaRPr lang="en-US" sz="1100" dirty="0"/>
+          </a:p>
+          <a:p>
+            <a:pPr indent="0" marL="0">
+              <a:spcAft>
+                <a:spcPts val="200"/>
+              </a:spcAft>
+              <a:buNone/>
+            </a:pPr>
+            <a:r>
+              <a:rPr lang="en-US" sz="1100" b="1" dirty="0">
+                <a:solidFill>
+                  <a:srgbClr val="334155"/>
+                </a:solidFill>
+                <a:latin typeface="Arial" pitchFamily="34" charset="0"/>
+                <a:ea typeface="Arial" pitchFamily="34" charset="-122"/>
+                <a:cs typeface="Arial" pitchFamily="34" charset="-120"/>
+              </a:rPr>
               <a:t>快適さ・設備 </a:t>
             </a:r>
             <a:endParaRPr lang="en-US" sz="1100" dirty="0"/>
@@ -5940,46 +5963,6 @@
             </a:r>
             <a:endParaRPr lang="en-US" sz="1100" dirty="0"/>
           </a:p>
-          <a:p>
-            <a:pPr indent="0" marL="0">
-              <a:spcAft>
-                <a:spcPts val="200"/>
-              </a:spcAft>
-              <a:buNone/>
-            </a:pPr>
-            <a:r>
-              <a:rPr lang="en-US" sz="1100" b="1" dirty="0">
-                <a:solidFill>
-                  <a:srgbClr val="334155"/>
-                </a:solidFill>
-                <a:latin typeface="Arial" pitchFamily="34" charset="0"/>
-                <a:ea typeface="Arial" pitchFamily="34" charset="-122"/>
-                <a:cs typeface="Arial" pitchFamily="34" charset="-120"/>
-              </a:rPr>
-              <a:t>スタッフの対応 </a:t>
-            </a:r>
-            <a:endParaRPr lang="en-US" sz="1100" dirty="0"/>
-          </a:p>
-          <a:p>
-            <a:pPr indent="0" marL="0">
-              <a:spcAft>
-                <a:spcPts val="200"/>
-              </a:spcAft>
-              <a:buNone/>
-            </a:pPr>
-            <a:r>
-              <a:rPr lang="en-US" sz="900" dirty="0">
-                <a:solidFill>
-                  <a:srgbClr val="64748B"/>
-                </a:solidFill>
-                <a:latin typeface="Arial" pitchFamily="34" charset="0"/>
-                <a:ea typeface="Arial" pitchFamily="34" charset="-122"/>
-                <a:cs typeface="Arial" pitchFamily="34" charset="-120"/>
-              </a:rPr>
-              <a:t>  とにかくスタッフに電話したら、とても親切に対応してくれて、対応してくれたのはありがたかったのですが、エアコンの音は...</a:t>
-            </a:r>
-            <a:endParaRPr lang="en-US" sz="1100" dirty="0"/>
-          </a:p>
         </p:txBody>
       </p:sp>
       <p:sp>
@@ -6184,7 +6167,7 @@
                 <a:ea typeface="Arial" pitchFamily="34" charset="-122"/>
                 <a:cs typeface="Arial" pitchFamily="34" charset="-120"/>
               </a:rPr>
-              <a:t>設備の老朽化 </a:t>
+              <a:t>防音性能 </a:t>
             </a:r>
             <a:endParaRPr lang="en-US" sz="1100" dirty="0"/>
           </a:p>
@@ -6204,7 +6187,7 @@
                 <a:ea typeface="Arial" pitchFamily="34" charset="-122"/>
                 <a:cs typeface="Arial" pitchFamily="34" charset="-120"/>
               </a:rPr>
-              <a:t>  部屋はやや年季が入っていますが、きれいに掃除されておりました</a:t>
+              <a:t>  ああ、エアコンの音がうるさくてよく眠れません</a:t>
             </a:r>
             <a:endParaRPr lang="en-US" sz="1100" dirty="0"/>
           </a:p>
@@ -6557,7 +6540,7 @@
                 <a:ea typeface="Arial" pitchFamily="34" charset="-122"/>
                 <a:cs typeface="Arial" pitchFamily="34" charset="-120"/>
               </a:rPr>
-              <a:t>8.60</a:t>
+              <a:t>8.49</a:t>
             </a:r>
             <a:endParaRPr lang="en-US" sz="3200" dirty="0"/>
           </a:p>
@@ -6682,7 +6665,7 @@
                 <a:ea typeface="Arial" pitchFamily="34" charset="-122"/>
                 <a:cs typeface="Arial" pitchFamily="34" charset="-120"/>
               </a:rPr>
-              <a:t>85.6%</a:t>
+              <a:t>83.6%</a:t>
             </a:r>
             <a:endParaRPr lang="en-US" sz="3200" dirty="0"/>
           </a:p>
@@ -6807,7 +6790,7 @@
                 <a:ea typeface="Arial" pitchFamily="34" charset="-122"/>
                 <a:cs typeface="Arial" pitchFamily="34" charset="-120"/>
               </a:rPr>
-              <a:t>3.4%</a:t>
+              <a:t>4.1%</a:t>
             </a:r>
             <a:endParaRPr lang="en-US" sz="3200" dirty="0"/>
           </a:p>
@@ -6932,7 +6915,7 @@
                 <a:ea typeface="Arial" pitchFamily="34" charset="-122"/>
                 <a:cs typeface="Arial" pitchFamily="34" charset="-120"/>
               </a:rPr>
-              <a:t>146件</a:t>
+              <a:t>73件</a:t>
             </a:r>
             <a:endParaRPr lang="en-US" sz="3200" dirty="0"/>
           </a:p>
@@ -7353,7 +7336,7 @@
                 <a:ea typeface="Arial" pitchFamily="34" charset="-122"/>
                 <a:cs typeface="Arial" pitchFamily="34" charset="-120"/>
               </a:rPr>
-              <a:t>Trip.com(9.45)が最高スコア。</a:t>
+              <a:t>Agoda(10.00)が最高スコア。</a:t>
             </a:r>
             <a:endParaRPr lang="en-US" sz="1100" dirty="0"/>
           </a:p>
@@ -7402,7 +7385,7 @@
                 <a:ea typeface="Arial" pitchFamily="34" charset="-122"/>
                 <a:cs typeface="Arial" pitchFamily="34" charset="-120"/>
               </a:rPr>
-              <a:t>Booking.com(7.7)が相対的に低い。口コミ返信の強化が急務</a:t>
+              <a:t>じゃらん(7.8)が相対的に低い。口コミ返信の強化が急務</a:t>
             </a:r>
             <a:endParaRPr lang="en-US" sz="1100" dirty="0"/>
           </a:p>
@@ -7843,7 +7826,7 @@
                           <a:ea typeface="Arial" pitchFamily="34" charset="-122"/>
                           <a:cs typeface="Arial" pitchFamily="34" charset="-120"/>
                         </a:rPr>
-                        <a:t>Trip.com</a:t>
+                        <a:t>Agoda</a:t>
                       </a:r>
                       <a:endParaRPr lang="en-US" sz="900" dirty="0">
                         <a:latin typeface="Arial" charset="0"/>
@@ -7911,7 +7894,7 @@
                           <a:ea typeface="Arial" pitchFamily="34" charset="-122"/>
                           <a:cs typeface="Arial" pitchFamily="34" charset="-120"/>
                         </a:rPr>
-                        <a:t>40</a:t>
+                        <a:t>1</a:t>
                       </a:r>
                       <a:endParaRPr lang="en-US" sz="900" dirty="0">
                         <a:latin typeface="Arial" charset="0"/>
@@ -7979,7 +7962,7 @@
                           <a:ea typeface="Arial" pitchFamily="34" charset="-122"/>
                           <a:cs typeface="Arial" pitchFamily="34" charset="-120"/>
                         </a:rPr>
-                        <a:t>9.45</a:t>
+                        <a:t>10</a:t>
                       </a:r>
                       <a:endParaRPr lang="en-US" sz="900" dirty="0">
                         <a:latin typeface="Arial" charset="0"/>
@@ -8115,7 +8098,7 @@
                           <a:ea typeface="Arial" pitchFamily="34" charset="-122"/>
                           <a:cs typeface="Arial" pitchFamily="34" charset="-120"/>
                         </a:rPr>
-                        <a:t>9.45</a:t>
+                        <a:t>10</a:t>
                       </a:r>
                       <a:endParaRPr lang="en-US" sz="900" dirty="0">
                         <a:latin typeface="Arial" charset="0"/>
@@ -8185,7 +8168,7 @@
                           <a:ea typeface="Arial" pitchFamily="34" charset="-122"/>
                           <a:cs typeface="Arial" pitchFamily="34" charset="-120"/>
                         </a:rPr>
-                        <a:t>Agoda</a:t>
+                        <a:t>Trip.com</a:t>
                       </a:r>
                       <a:endParaRPr lang="en-US" sz="900" dirty="0">
                         <a:latin typeface="Arial" charset="0"/>
@@ -8253,7 +8236,7 @@
                           <a:ea typeface="Arial" pitchFamily="34" charset="-122"/>
                           <a:cs typeface="Arial" pitchFamily="34" charset="-120"/>
                         </a:rPr>
-                        <a:t>6</a:t>
+                        <a:t>25</a:t>
                       </a:r>
                       <a:endParaRPr lang="en-US" sz="900" dirty="0">
                         <a:latin typeface="Arial" charset="0"/>
@@ -8321,7 +8304,7 @@
                           <a:ea typeface="Arial" pitchFamily="34" charset="-122"/>
                           <a:cs typeface="Arial" pitchFamily="34" charset="-120"/>
                         </a:rPr>
-                        <a:t>9.33</a:t>
+                        <a:t>9.48</a:t>
                       </a:r>
                       <a:endParaRPr lang="en-US" sz="900" dirty="0">
                         <a:latin typeface="Arial" charset="0"/>
@@ -8457,7 +8440,7 @@
                           <a:ea typeface="Arial" pitchFamily="34" charset="-122"/>
                           <a:cs typeface="Arial" pitchFamily="34" charset="-120"/>
                         </a:rPr>
-                        <a:t>9.33</a:t>
+                        <a:t>9.48</a:t>
                       </a:r>
                       <a:endParaRPr lang="en-US" sz="900" dirty="0">
                         <a:latin typeface="Arial" charset="0"/>
@@ -8527,7 +8510,7 @@
                           <a:ea typeface="Arial" pitchFamily="34" charset="-122"/>
                           <a:cs typeface="Arial" pitchFamily="34" charset="-120"/>
                         </a:rPr>
-                        <a:t>じゃらん</a:t>
+                        <a:t>Google</a:t>
                       </a:r>
                       <a:endParaRPr lang="en-US" sz="900" dirty="0">
                         <a:latin typeface="Arial" charset="0"/>
@@ -8595,7 +8578,7 @@
                           <a:ea typeface="Arial" pitchFamily="34" charset="-122"/>
                           <a:cs typeface="Arial" pitchFamily="34" charset="-120"/>
                         </a:rPr>
-                        <a:t>29</a:t>
+                        <a:t>5</a:t>
                       </a:r>
                       <a:endParaRPr lang="en-US" sz="900" dirty="0">
                         <a:latin typeface="Arial" charset="0"/>
@@ -8663,7 +8646,7 @@
                           <a:ea typeface="Arial" pitchFamily="34" charset="-122"/>
                           <a:cs typeface="Arial" pitchFamily="34" charset="-120"/>
                         </a:rPr>
-                        <a:t>4.31</a:t>
+                        <a:t>4.2</a:t>
                       </a:r>
                       <a:endParaRPr lang="en-US" sz="900" dirty="0">
                         <a:latin typeface="Arial" charset="0"/>
@@ -8799,7 +8782,7 @@
                           <a:ea typeface="Arial" pitchFamily="34" charset="-122"/>
                           <a:cs typeface="Arial" pitchFamily="34" charset="-120"/>
                         </a:rPr>
-                        <a:t>8.62</a:t>
+                        <a:t>8.4</a:t>
                       </a:r>
                       <a:endParaRPr lang="en-US" sz="900" dirty="0">
                         <a:latin typeface="Arial" charset="0"/>
@@ -8869,7 +8852,691 @@
                           <a:ea typeface="Arial" pitchFamily="34" charset="-122"/>
                           <a:cs typeface="Arial" pitchFamily="34" charset="-120"/>
                         </a:rPr>
-                        <a:t>Google</a:t>
+                        <a:t>楽天トラベル</a:t>
+                      </a:r>
+                      <a:endParaRPr lang="en-US" sz="900" dirty="0">
+                        <a:latin typeface="Arial" charset="0"/>
+                        <a:ea typeface="Arial" charset="0"/>
+                        <a:cs typeface="Arial" charset="0"/>
+                      </a:endParaRPr>
+                    </a:p>
+                  </a:txBody>
+                  <a:tcPr marL="91440" marR="91440" marT="45720" marB="45720">
+                    <a:lnL w="6350" cap="flat" cmpd="sng" algn="ctr">
+                      <a:solidFill>
+                        <a:srgbClr val="CBD5E1"/>
+                      </a:solidFill>
+                      <a:prstDash val="solid"/>
+                      <a:round/>
+                      <a:headEnd type="none" w="med" len="med"/>
+                      <a:tailEnd type="none" w="med" len="med"/>
+                    </a:lnL>
+                    <a:lnR w="6350" cap="flat" cmpd="sng" algn="ctr">
+                      <a:solidFill>
+                        <a:srgbClr val="CBD5E1"/>
+                      </a:solidFill>
+                      <a:prstDash val="solid"/>
+                      <a:round/>
+                      <a:headEnd type="none" w="med" len="med"/>
+                      <a:tailEnd type="none" w="med" len="med"/>
+                    </a:lnR>
+                    <a:lnT w="6350" cap="flat" cmpd="sng" algn="ctr">
+                      <a:solidFill>
+                        <a:srgbClr val="CBD5E1"/>
+                      </a:solidFill>
+                      <a:prstDash val="solid"/>
+                      <a:round/>
+                      <a:headEnd type="none" w="med" len="med"/>
+                      <a:tailEnd type="none" w="med" len="med"/>
+                    </a:lnT>
+                    <a:lnB w="6350" cap="flat" cmpd="sng" algn="ctr">
+                      <a:solidFill>
+                        <a:srgbClr val="CBD5E1"/>
+                      </a:solidFill>
+                      <a:prstDash val="solid"/>
+                      <a:round/>
+                      <a:headEnd type="none" w="med" len="med"/>
+                      <a:tailEnd type="none" w="med" len="med"/>
+                    </a:lnB>
+                    <a:solidFill>
+                      <a:srgbClr val="FFFFFF"/>
+                    </a:solidFill>
+                  </a:tcPr>
+                </a:tc>
+                <a:tc>
+                  <a:txBody>
+                    <a:bodyPr/>
+                    <a:lstStyle/>
+                    <a:p>
+                      <a:pPr algn="ctr" indent="0" marL="0">
+                        <a:buNone/>
+                      </a:pPr>
+                      <a:r>
+                        <a:rPr lang="en-US" sz="900" dirty="0">
+                          <a:solidFill>
+                            <a:srgbClr val="000000"/>
+                          </a:solidFill>
+                          <a:latin typeface="Arial" pitchFamily="34" charset="0"/>
+                          <a:ea typeface="Arial" pitchFamily="34" charset="-122"/>
+                          <a:cs typeface="Arial" pitchFamily="34" charset="-120"/>
+                        </a:rPr>
+                        <a:t>9</a:t>
+                      </a:r>
+                      <a:endParaRPr lang="en-US" sz="900" dirty="0">
+                        <a:latin typeface="Arial" charset="0"/>
+                        <a:ea typeface="Arial" charset="0"/>
+                        <a:cs typeface="Arial" charset="0"/>
+                      </a:endParaRPr>
+                    </a:p>
+                  </a:txBody>
+                  <a:tcPr marL="91440" marR="91440" marT="45720" marB="45720">
+                    <a:lnL w="6350" cap="flat" cmpd="sng" algn="ctr">
+                      <a:solidFill>
+                        <a:srgbClr val="CBD5E1"/>
+                      </a:solidFill>
+                      <a:prstDash val="solid"/>
+                      <a:round/>
+                      <a:headEnd type="none" w="med" len="med"/>
+                      <a:tailEnd type="none" w="med" len="med"/>
+                    </a:lnL>
+                    <a:lnR w="6350" cap="flat" cmpd="sng" algn="ctr">
+                      <a:solidFill>
+                        <a:srgbClr val="CBD5E1"/>
+                      </a:solidFill>
+                      <a:prstDash val="solid"/>
+                      <a:round/>
+                      <a:headEnd type="none" w="med" len="med"/>
+                      <a:tailEnd type="none" w="med" len="med"/>
+                    </a:lnR>
+                    <a:lnT w="6350" cap="flat" cmpd="sng" algn="ctr">
+                      <a:solidFill>
+                        <a:srgbClr val="CBD5E1"/>
+                      </a:solidFill>
+                      <a:prstDash val="solid"/>
+                      <a:round/>
+                      <a:headEnd type="none" w="med" len="med"/>
+                      <a:tailEnd type="none" w="med" len="med"/>
+                    </a:lnT>
+                    <a:lnB w="6350" cap="flat" cmpd="sng" algn="ctr">
+                      <a:solidFill>
+                        <a:srgbClr val="CBD5E1"/>
+                      </a:solidFill>
+                      <a:prstDash val="solid"/>
+                      <a:round/>
+                      <a:headEnd type="none" w="med" len="med"/>
+                      <a:tailEnd type="none" w="med" len="med"/>
+                    </a:lnB>
+                    <a:solidFill>
+                      <a:srgbClr val="FFFFFF"/>
+                    </a:solidFill>
+                  </a:tcPr>
+                </a:tc>
+                <a:tc>
+                  <a:txBody>
+                    <a:bodyPr/>
+                    <a:lstStyle/>
+                    <a:p>
+                      <a:pPr algn="ctr" indent="0" marL="0">
+                        <a:buNone/>
+                      </a:pPr>
+                      <a:r>
+                        <a:rPr lang="en-US" sz="900" dirty="0">
+                          <a:solidFill>
+                            <a:srgbClr val="000000"/>
+                          </a:solidFill>
+                          <a:latin typeface="Arial" pitchFamily="34" charset="0"/>
+                          <a:ea typeface="Arial" pitchFamily="34" charset="-122"/>
+                          <a:cs typeface="Arial" pitchFamily="34" charset="-120"/>
+                        </a:rPr>
+                        <a:t>4</a:t>
+                      </a:r>
+                      <a:endParaRPr lang="en-US" sz="900" dirty="0">
+                        <a:latin typeface="Arial" charset="0"/>
+                        <a:ea typeface="Arial" charset="0"/>
+                        <a:cs typeface="Arial" charset="0"/>
+                      </a:endParaRPr>
+                    </a:p>
+                  </a:txBody>
+                  <a:tcPr marL="91440" marR="91440" marT="45720" marB="45720">
+                    <a:lnL w="6350" cap="flat" cmpd="sng" algn="ctr">
+                      <a:solidFill>
+                        <a:srgbClr val="CBD5E1"/>
+                      </a:solidFill>
+                      <a:prstDash val="solid"/>
+                      <a:round/>
+                      <a:headEnd type="none" w="med" len="med"/>
+                      <a:tailEnd type="none" w="med" len="med"/>
+                    </a:lnL>
+                    <a:lnR w="6350" cap="flat" cmpd="sng" algn="ctr">
+                      <a:solidFill>
+                        <a:srgbClr val="CBD5E1"/>
+                      </a:solidFill>
+                      <a:prstDash val="solid"/>
+                      <a:round/>
+                      <a:headEnd type="none" w="med" len="med"/>
+                      <a:tailEnd type="none" w="med" len="med"/>
+                    </a:lnR>
+                    <a:lnT w="6350" cap="flat" cmpd="sng" algn="ctr">
+                      <a:solidFill>
+                        <a:srgbClr val="CBD5E1"/>
+                      </a:solidFill>
+                      <a:prstDash val="solid"/>
+                      <a:round/>
+                      <a:headEnd type="none" w="med" len="med"/>
+                      <a:tailEnd type="none" w="med" len="med"/>
+                    </a:lnT>
+                    <a:lnB w="6350" cap="flat" cmpd="sng" algn="ctr">
+                      <a:solidFill>
+                        <a:srgbClr val="CBD5E1"/>
+                      </a:solidFill>
+                      <a:prstDash val="solid"/>
+                      <a:round/>
+                      <a:headEnd type="none" w="med" len="med"/>
+                      <a:tailEnd type="none" w="med" len="med"/>
+                    </a:lnB>
+                    <a:solidFill>
+                      <a:srgbClr val="FFFFFF"/>
+                    </a:solidFill>
+                  </a:tcPr>
+                </a:tc>
+                <a:tc>
+                  <a:txBody>
+                    <a:bodyPr/>
+                    <a:lstStyle/>
+                    <a:p>
+                      <a:pPr algn="ctr" indent="0" marL="0">
+                        <a:buNone/>
+                      </a:pPr>
+                      <a:r>
+                        <a:rPr lang="en-US" sz="900" dirty="0">
+                          <a:solidFill>
+                            <a:srgbClr val="000000"/>
+                          </a:solidFill>
+                          <a:latin typeface="Arial" pitchFamily="34" charset="0"/>
+                          <a:ea typeface="Arial" pitchFamily="34" charset="-122"/>
+                          <a:cs typeface="Arial" pitchFamily="34" charset="-120"/>
+                        </a:rPr>
+                        <a:t>/5 (×2)</a:t>
+                      </a:r>
+                      <a:endParaRPr lang="en-US" sz="900" dirty="0">
+                        <a:latin typeface="Arial" charset="0"/>
+                        <a:ea typeface="Arial" charset="0"/>
+                        <a:cs typeface="Arial" charset="0"/>
+                      </a:endParaRPr>
+                    </a:p>
+                  </a:txBody>
+                  <a:tcPr marL="91440" marR="91440" marT="45720" marB="45720">
+                    <a:lnL w="6350" cap="flat" cmpd="sng" algn="ctr">
+                      <a:solidFill>
+                        <a:srgbClr val="CBD5E1"/>
+                      </a:solidFill>
+                      <a:prstDash val="solid"/>
+                      <a:round/>
+                      <a:headEnd type="none" w="med" len="med"/>
+                      <a:tailEnd type="none" w="med" len="med"/>
+                    </a:lnL>
+                    <a:lnR w="6350" cap="flat" cmpd="sng" algn="ctr">
+                      <a:solidFill>
+                        <a:srgbClr val="CBD5E1"/>
+                      </a:solidFill>
+                      <a:prstDash val="solid"/>
+                      <a:round/>
+                      <a:headEnd type="none" w="med" len="med"/>
+                      <a:tailEnd type="none" w="med" len="med"/>
+                    </a:lnR>
+                    <a:lnT w="6350" cap="flat" cmpd="sng" algn="ctr">
+                      <a:solidFill>
+                        <a:srgbClr val="CBD5E1"/>
+                      </a:solidFill>
+                      <a:prstDash val="solid"/>
+                      <a:round/>
+                      <a:headEnd type="none" w="med" len="med"/>
+                      <a:tailEnd type="none" w="med" len="med"/>
+                    </a:lnT>
+                    <a:lnB w="6350" cap="flat" cmpd="sng" algn="ctr">
+                      <a:solidFill>
+                        <a:srgbClr val="CBD5E1"/>
+                      </a:solidFill>
+                      <a:prstDash val="solid"/>
+                      <a:round/>
+                      <a:headEnd type="none" w="med" len="med"/>
+                      <a:tailEnd type="none" w="med" len="med"/>
+                    </a:lnB>
+                    <a:solidFill>
+                      <a:srgbClr val="FFFFFF"/>
+                    </a:solidFill>
+                  </a:tcPr>
+                </a:tc>
+                <a:tc>
+                  <a:txBody>
+                    <a:bodyPr/>
+                    <a:lstStyle/>
+                    <a:p>
+                      <a:pPr algn="ctr" indent="0" marL="0">
+                        <a:buNone/>
+                      </a:pPr>
+                      <a:r>
+                        <a:rPr lang="en-US" sz="900" dirty="0">
+                          <a:solidFill>
+                            <a:srgbClr val="000000"/>
+                          </a:solidFill>
+                          <a:latin typeface="Arial" pitchFamily="34" charset="0"/>
+                          <a:ea typeface="Arial" pitchFamily="34" charset="-122"/>
+                          <a:cs typeface="Arial" pitchFamily="34" charset="-120"/>
+                        </a:rPr>
+                        <a:t>8</a:t>
+                      </a:r>
+                      <a:endParaRPr lang="en-US" sz="900" dirty="0">
+                        <a:latin typeface="Arial" charset="0"/>
+                        <a:ea typeface="Arial" charset="0"/>
+                        <a:cs typeface="Arial" charset="0"/>
+                      </a:endParaRPr>
+                    </a:p>
+                  </a:txBody>
+                  <a:tcPr marL="91440" marR="91440" marT="45720" marB="45720">
+                    <a:lnL w="6350" cap="flat" cmpd="sng" algn="ctr">
+                      <a:solidFill>
+                        <a:srgbClr val="CBD5E1"/>
+                      </a:solidFill>
+                      <a:prstDash val="solid"/>
+                      <a:round/>
+                      <a:headEnd type="none" w="med" len="med"/>
+                      <a:tailEnd type="none" w="med" len="med"/>
+                    </a:lnL>
+                    <a:lnR w="6350" cap="flat" cmpd="sng" algn="ctr">
+                      <a:solidFill>
+                        <a:srgbClr val="CBD5E1"/>
+                      </a:solidFill>
+                      <a:prstDash val="solid"/>
+                      <a:round/>
+                      <a:headEnd type="none" w="med" len="med"/>
+                      <a:tailEnd type="none" w="med" len="med"/>
+                    </a:lnR>
+                    <a:lnT w="6350" cap="flat" cmpd="sng" algn="ctr">
+                      <a:solidFill>
+                        <a:srgbClr val="CBD5E1"/>
+                      </a:solidFill>
+                      <a:prstDash val="solid"/>
+                      <a:round/>
+                      <a:headEnd type="none" w="med" len="med"/>
+                      <a:tailEnd type="none" w="med" len="med"/>
+                    </a:lnT>
+                    <a:lnB w="6350" cap="flat" cmpd="sng" algn="ctr">
+                      <a:solidFill>
+                        <a:srgbClr val="CBD5E1"/>
+                      </a:solidFill>
+                      <a:prstDash val="solid"/>
+                      <a:round/>
+                      <a:headEnd type="none" w="med" len="med"/>
+                      <a:tailEnd type="none" w="med" len="med"/>
+                    </a:lnB>
+                    <a:solidFill>
+                      <a:srgbClr val="FFFFFF"/>
+                    </a:solidFill>
+                  </a:tcPr>
+                </a:tc>
+              </a:tr>
+              <a:tr h="201168">
+                <a:tc>
+                  <a:txBody>
+                    <a:bodyPr/>
+                    <a:lstStyle/>
+                    <a:p>
+                      <a:pPr algn="ctr" indent="0" marL="0">
+                        <a:buNone/>
+                      </a:pPr>
+                      <a:r>
+                        <a:rPr lang="en-US" sz="900" dirty="0">
+                          <a:solidFill>
+                            <a:srgbClr val="000000"/>
+                          </a:solidFill>
+                          <a:latin typeface="Arial" pitchFamily="34" charset="0"/>
+                          <a:ea typeface="Arial" pitchFamily="34" charset="-122"/>
+                          <a:cs typeface="Arial" pitchFamily="34" charset="-120"/>
+                        </a:rPr>
+                        <a:t>Booking.com</a:t>
+                      </a:r>
+                      <a:endParaRPr lang="en-US" sz="900" dirty="0">
+                        <a:latin typeface="Arial" charset="0"/>
+                        <a:ea typeface="Arial" charset="0"/>
+                        <a:cs typeface="Arial" charset="0"/>
+                      </a:endParaRPr>
+                    </a:p>
+                  </a:txBody>
+                  <a:tcPr marL="91440" marR="91440" marT="45720" marB="45720">
+                    <a:lnL w="6350" cap="flat" cmpd="sng" algn="ctr">
+                      <a:solidFill>
+                        <a:srgbClr val="CBD5E1"/>
+                      </a:solidFill>
+                      <a:prstDash val="solid"/>
+                      <a:round/>
+                      <a:headEnd type="none" w="med" len="med"/>
+                      <a:tailEnd type="none" w="med" len="med"/>
+                    </a:lnL>
+                    <a:lnR w="6350" cap="flat" cmpd="sng" algn="ctr">
+                      <a:solidFill>
+                        <a:srgbClr val="CBD5E1"/>
+                      </a:solidFill>
+                      <a:prstDash val="solid"/>
+                      <a:round/>
+                      <a:headEnd type="none" w="med" len="med"/>
+                      <a:tailEnd type="none" w="med" len="med"/>
+                    </a:lnR>
+                    <a:lnT w="6350" cap="flat" cmpd="sng" algn="ctr">
+                      <a:solidFill>
+                        <a:srgbClr val="CBD5E1"/>
+                      </a:solidFill>
+                      <a:prstDash val="solid"/>
+                      <a:round/>
+                      <a:headEnd type="none" w="med" len="med"/>
+                      <a:tailEnd type="none" w="med" len="med"/>
+                    </a:lnT>
+                    <a:lnB w="6350" cap="flat" cmpd="sng" algn="ctr">
+                      <a:solidFill>
+                        <a:srgbClr val="CBD5E1"/>
+                      </a:solidFill>
+                      <a:prstDash val="solid"/>
+                      <a:round/>
+                      <a:headEnd type="none" w="med" len="med"/>
+                      <a:tailEnd type="none" w="med" len="med"/>
+                    </a:lnB>
+                    <a:solidFill>
+                      <a:srgbClr val="E8EFF8"/>
+                    </a:solidFill>
+                  </a:tcPr>
+                </a:tc>
+                <a:tc>
+                  <a:txBody>
+                    <a:bodyPr/>
+                    <a:lstStyle/>
+                    <a:p>
+                      <a:pPr algn="ctr" indent="0" marL="0">
+                        <a:buNone/>
+                      </a:pPr>
+                      <a:r>
+                        <a:rPr lang="en-US" sz="900" dirty="0">
+                          <a:solidFill>
+                            <a:srgbClr val="000000"/>
+                          </a:solidFill>
+                          <a:latin typeface="Arial" pitchFamily="34" charset="0"/>
+                          <a:ea typeface="Arial" pitchFamily="34" charset="-122"/>
+                          <a:cs typeface="Arial" pitchFamily="34" charset="-120"/>
+                        </a:rPr>
+                        <a:t>21</a:t>
+                      </a:r>
+                      <a:endParaRPr lang="en-US" sz="900" dirty="0">
+                        <a:latin typeface="Arial" charset="0"/>
+                        <a:ea typeface="Arial" charset="0"/>
+                        <a:cs typeface="Arial" charset="0"/>
+                      </a:endParaRPr>
+                    </a:p>
+                  </a:txBody>
+                  <a:tcPr marL="91440" marR="91440" marT="45720" marB="45720">
+                    <a:lnL w="6350" cap="flat" cmpd="sng" algn="ctr">
+                      <a:solidFill>
+                        <a:srgbClr val="CBD5E1"/>
+                      </a:solidFill>
+                      <a:prstDash val="solid"/>
+                      <a:round/>
+                      <a:headEnd type="none" w="med" len="med"/>
+                      <a:tailEnd type="none" w="med" len="med"/>
+                    </a:lnL>
+                    <a:lnR w="6350" cap="flat" cmpd="sng" algn="ctr">
+                      <a:solidFill>
+                        <a:srgbClr val="CBD5E1"/>
+                      </a:solidFill>
+                      <a:prstDash val="solid"/>
+                      <a:round/>
+                      <a:headEnd type="none" w="med" len="med"/>
+                      <a:tailEnd type="none" w="med" len="med"/>
+                    </a:lnR>
+                    <a:lnT w="6350" cap="flat" cmpd="sng" algn="ctr">
+                      <a:solidFill>
+                        <a:srgbClr val="CBD5E1"/>
+                      </a:solidFill>
+                      <a:prstDash val="solid"/>
+                      <a:round/>
+                      <a:headEnd type="none" w="med" len="med"/>
+                      <a:tailEnd type="none" w="med" len="med"/>
+                    </a:lnT>
+                    <a:lnB w="6350" cap="flat" cmpd="sng" algn="ctr">
+                      <a:solidFill>
+                        <a:srgbClr val="CBD5E1"/>
+                      </a:solidFill>
+                      <a:prstDash val="solid"/>
+                      <a:round/>
+                      <a:headEnd type="none" w="med" len="med"/>
+                      <a:tailEnd type="none" w="med" len="med"/>
+                    </a:lnB>
+                    <a:solidFill>
+                      <a:srgbClr val="E8EFF8"/>
+                    </a:solidFill>
+                  </a:tcPr>
+                </a:tc>
+                <a:tc>
+                  <a:txBody>
+                    <a:bodyPr/>
+                    <a:lstStyle/>
+                    <a:p>
+                      <a:pPr algn="ctr" indent="0" marL="0">
+                        <a:buNone/>
+                      </a:pPr>
+                      <a:r>
+                        <a:rPr lang="en-US" sz="900" dirty="0">
+                          <a:solidFill>
+                            <a:srgbClr val="000000"/>
+                          </a:solidFill>
+                          <a:latin typeface="Arial" pitchFamily="34" charset="0"/>
+                          <a:ea typeface="Arial" pitchFamily="34" charset="-122"/>
+                          <a:cs typeface="Arial" pitchFamily="34" charset="-120"/>
+                        </a:rPr>
+                        <a:t>7.86</a:t>
+                      </a:r>
+                      <a:endParaRPr lang="en-US" sz="900" dirty="0">
+                        <a:latin typeface="Arial" charset="0"/>
+                        <a:ea typeface="Arial" charset="0"/>
+                        <a:cs typeface="Arial" charset="0"/>
+                      </a:endParaRPr>
+                    </a:p>
+                  </a:txBody>
+                  <a:tcPr marL="91440" marR="91440" marT="45720" marB="45720">
+                    <a:lnL w="6350" cap="flat" cmpd="sng" algn="ctr">
+                      <a:solidFill>
+                        <a:srgbClr val="CBD5E1"/>
+                      </a:solidFill>
+                      <a:prstDash val="solid"/>
+                      <a:round/>
+                      <a:headEnd type="none" w="med" len="med"/>
+                      <a:tailEnd type="none" w="med" len="med"/>
+                    </a:lnL>
+                    <a:lnR w="6350" cap="flat" cmpd="sng" algn="ctr">
+                      <a:solidFill>
+                        <a:srgbClr val="CBD5E1"/>
+                      </a:solidFill>
+                      <a:prstDash val="solid"/>
+                      <a:round/>
+                      <a:headEnd type="none" w="med" len="med"/>
+                      <a:tailEnd type="none" w="med" len="med"/>
+                    </a:lnR>
+                    <a:lnT w="6350" cap="flat" cmpd="sng" algn="ctr">
+                      <a:solidFill>
+                        <a:srgbClr val="CBD5E1"/>
+                      </a:solidFill>
+                      <a:prstDash val="solid"/>
+                      <a:round/>
+                      <a:headEnd type="none" w="med" len="med"/>
+                      <a:tailEnd type="none" w="med" len="med"/>
+                    </a:lnT>
+                    <a:lnB w="6350" cap="flat" cmpd="sng" algn="ctr">
+                      <a:solidFill>
+                        <a:srgbClr val="CBD5E1"/>
+                      </a:solidFill>
+                      <a:prstDash val="solid"/>
+                      <a:round/>
+                      <a:headEnd type="none" w="med" len="med"/>
+                      <a:tailEnd type="none" w="med" len="med"/>
+                    </a:lnB>
+                    <a:solidFill>
+                      <a:srgbClr val="E8EFF8"/>
+                    </a:solidFill>
+                  </a:tcPr>
+                </a:tc>
+                <a:tc>
+                  <a:txBody>
+                    <a:bodyPr/>
+                    <a:lstStyle/>
+                    <a:p>
+                      <a:pPr algn="ctr" indent="0" marL="0">
+                        <a:buNone/>
+                      </a:pPr>
+                      <a:r>
+                        <a:rPr lang="en-US" sz="900" dirty="0">
+                          <a:solidFill>
+                            <a:srgbClr val="000000"/>
+                          </a:solidFill>
+                          <a:latin typeface="Arial" pitchFamily="34" charset="0"/>
+                          <a:ea typeface="Arial" pitchFamily="34" charset="-122"/>
+                          <a:cs typeface="Arial" pitchFamily="34" charset="-120"/>
+                        </a:rPr>
+                        <a:t>/10</a:t>
+                      </a:r>
+                      <a:endParaRPr lang="en-US" sz="900" dirty="0">
+                        <a:latin typeface="Arial" charset="0"/>
+                        <a:ea typeface="Arial" charset="0"/>
+                        <a:cs typeface="Arial" charset="0"/>
+                      </a:endParaRPr>
+                    </a:p>
+                  </a:txBody>
+                  <a:tcPr marL="91440" marR="91440" marT="45720" marB="45720">
+                    <a:lnL w="6350" cap="flat" cmpd="sng" algn="ctr">
+                      <a:solidFill>
+                        <a:srgbClr val="CBD5E1"/>
+                      </a:solidFill>
+                      <a:prstDash val="solid"/>
+                      <a:round/>
+                      <a:headEnd type="none" w="med" len="med"/>
+                      <a:tailEnd type="none" w="med" len="med"/>
+                    </a:lnL>
+                    <a:lnR w="6350" cap="flat" cmpd="sng" algn="ctr">
+                      <a:solidFill>
+                        <a:srgbClr val="CBD5E1"/>
+                      </a:solidFill>
+                      <a:prstDash val="solid"/>
+                      <a:round/>
+                      <a:headEnd type="none" w="med" len="med"/>
+                      <a:tailEnd type="none" w="med" len="med"/>
+                    </a:lnR>
+                    <a:lnT w="6350" cap="flat" cmpd="sng" algn="ctr">
+                      <a:solidFill>
+                        <a:srgbClr val="CBD5E1"/>
+                      </a:solidFill>
+                      <a:prstDash val="solid"/>
+                      <a:round/>
+                      <a:headEnd type="none" w="med" len="med"/>
+                      <a:tailEnd type="none" w="med" len="med"/>
+                    </a:lnT>
+                    <a:lnB w="6350" cap="flat" cmpd="sng" algn="ctr">
+                      <a:solidFill>
+                        <a:srgbClr val="CBD5E1"/>
+                      </a:solidFill>
+                      <a:prstDash val="solid"/>
+                      <a:round/>
+                      <a:headEnd type="none" w="med" len="med"/>
+                      <a:tailEnd type="none" w="med" len="med"/>
+                    </a:lnB>
+                    <a:solidFill>
+                      <a:srgbClr val="E8EFF8"/>
+                    </a:solidFill>
+                  </a:tcPr>
+                </a:tc>
+                <a:tc>
+                  <a:txBody>
+                    <a:bodyPr/>
+                    <a:lstStyle/>
+                    <a:p>
+                      <a:pPr algn="ctr" indent="0" marL="0">
+                        <a:buNone/>
+                      </a:pPr>
+                      <a:r>
+                        <a:rPr lang="en-US" sz="900" dirty="0">
+                          <a:solidFill>
+                            <a:srgbClr val="000000"/>
+                          </a:solidFill>
+                          <a:latin typeface="Arial" pitchFamily="34" charset="0"/>
+                          <a:ea typeface="Arial" pitchFamily="34" charset="-122"/>
+                          <a:cs typeface="Arial" pitchFamily="34" charset="-120"/>
+                        </a:rPr>
+                        <a:t>7.86</a:t>
+                      </a:r>
+                      <a:endParaRPr lang="en-US" sz="900" dirty="0">
+                        <a:latin typeface="Arial" charset="0"/>
+                        <a:ea typeface="Arial" charset="0"/>
+                        <a:cs typeface="Arial" charset="0"/>
+                      </a:endParaRPr>
+                    </a:p>
+                  </a:txBody>
+                  <a:tcPr marL="91440" marR="91440" marT="45720" marB="45720">
+                    <a:lnL w="6350" cap="flat" cmpd="sng" algn="ctr">
+                      <a:solidFill>
+                        <a:srgbClr val="CBD5E1"/>
+                      </a:solidFill>
+                      <a:prstDash val="solid"/>
+                      <a:round/>
+                      <a:headEnd type="none" w="med" len="med"/>
+                      <a:tailEnd type="none" w="med" len="med"/>
+                    </a:lnL>
+                    <a:lnR w="6350" cap="flat" cmpd="sng" algn="ctr">
+                      <a:solidFill>
+                        <a:srgbClr val="CBD5E1"/>
+                      </a:solidFill>
+                      <a:prstDash val="solid"/>
+                      <a:round/>
+                      <a:headEnd type="none" w="med" len="med"/>
+                      <a:tailEnd type="none" w="med" len="med"/>
+                    </a:lnR>
+                    <a:lnT w="6350" cap="flat" cmpd="sng" algn="ctr">
+                      <a:solidFill>
+                        <a:srgbClr val="CBD5E1"/>
+                      </a:solidFill>
+                      <a:prstDash val="solid"/>
+                      <a:round/>
+                      <a:headEnd type="none" w="med" len="med"/>
+                      <a:tailEnd type="none" w="med" len="med"/>
+                    </a:lnT>
+                    <a:lnB w="6350" cap="flat" cmpd="sng" algn="ctr">
+                      <a:solidFill>
+                        <a:srgbClr val="CBD5E1"/>
+                      </a:solidFill>
+                      <a:prstDash val="solid"/>
+                      <a:round/>
+                      <a:headEnd type="none" w="med" len="med"/>
+                      <a:tailEnd type="none" w="med" len="med"/>
+                    </a:lnB>
+                    <a:solidFill>
+                      <a:srgbClr val="E8EFF8"/>
+                    </a:solidFill>
+                  </a:tcPr>
+                </a:tc>
+              </a:tr>
+              <a:tr h="201168">
+                <a:tc>
+                  <a:txBody>
+                    <a:bodyPr/>
+                    <a:lstStyle/>
+                    <a:p>
+                      <a:pPr algn="ctr" indent="0" marL="0">
+                        <a:buNone/>
+                      </a:pPr>
+                      <a:r>
+                        <a:rPr lang="en-US" sz="900" dirty="0">
+                          <a:solidFill>
+                            <a:srgbClr val="000000"/>
+                          </a:solidFill>
+                          <a:latin typeface="Arial" pitchFamily="34" charset="0"/>
+                          <a:ea typeface="Arial" pitchFamily="34" charset="-122"/>
+                          <a:cs typeface="Arial" pitchFamily="34" charset="-120"/>
+                        </a:rPr>
+                        <a:t>じゃらん</a:t>
                       </a:r>
                       <a:endParaRPr lang="en-US" sz="900" dirty="0">
                         <a:latin typeface="Arial" charset="0"/>
@@ -9005,7 +9672,7 @@
                           <a:ea typeface="Arial" pitchFamily="34" charset="-122"/>
                           <a:cs typeface="Arial" pitchFamily="34" charset="-120"/>
                         </a:rPr>
-                        <a:t>4.25</a:t>
+                        <a:t>3.92</a:t>
                       </a:r>
                       <a:endParaRPr lang="en-US" sz="900" dirty="0">
                         <a:latin typeface="Arial" charset="0"/>
@@ -9141,691 +9808,7 @@
                           <a:ea typeface="Arial" pitchFamily="34" charset="-122"/>
                           <a:cs typeface="Arial" pitchFamily="34" charset="-120"/>
                         </a:rPr>
-                        <a:t>8.5</a:t>
-                      </a:r>
-                      <a:endParaRPr lang="en-US" sz="900" dirty="0">
-                        <a:latin typeface="Arial" charset="0"/>
-                        <a:ea typeface="Arial" charset="0"/>
-                        <a:cs typeface="Arial" charset="0"/>
-                      </a:endParaRPr>
-                    </a:p>
-                  </a:txBody>
-                  <a:tcPr marL="91440" marR="91440" marT="45720" marB="45720">
-                    <a:lnL w="6350" cap="flat" cmpd="sng" algn="ctr">
-                      <a:solidFill>
-                        <a:srgbClr val="CBD5E1"/>
-                      </a:solidFill>
-                      <a:prstDash val="solid"/>
-                      <a:round/>
-                      <a:headEnd type="none" w="med" len="med"/>
-                      <a:tailEnd type="none" w="med" len="med"/>
-                    </a:lnL>
-                    <a:lnR w="6350" cap="flat" cmpd="sng" algn="ctr">
-                      <a:solidFill>
-                        <a:srgbClr val="CBD5E1"/>
-                      </a:solidFill>
-                      <a:prstDash val="solid"/>
-                      <a:round/>
-                      <a:headEnd type="none" w="med" len="med"/>
-                      <a:tailEnd type="none" w="med" len="med"/>
-                    </a:lnR>
-                    <a:lnT w="6350" cap="flat" cmpd="sng" algn="ctr">
-                      <a:solidFill>
-                        <a:srgbClr val="CBD5E1"/>
-                      </a:solidFill>
-                      <a:prstDash val="solid"/>
-                      <a:round/>
-                      <a:headEnd type="none" w="med" len="med"/>
-                      <a:tailEnd type="none" w="med" len="med"/>
-                    </a:lnT>
-                    <a:lnB w="6350" cap="flat" cmpd="sng" algn="ctr">
-                      <a:solidFill>
-                        <a:srgbClr val="CBD5E1"/>
-                      </a:solidFill>
-                      <a:prstDash val="solid"/>
-                      <a:round/>
-                      <a:headEnd type="none" w="med" len="med"/>
-                      <a:tailEnd type="none" w="med" len="med"/>
-                    </a:lnB>
-                    <a:solidFill>
-                      <a:srgbClr val="FFFFFF"/>
-                    </a:solidFill>
-                  </a:tcPr>
-                </a:tc>
-              </a:tr>
-              <a:tr h="201168">
-                <a:tc>
-                  <a:txBody>
-                    <a:bodyPr/>
-                    <a:lstStyle/>
-                    <a:p>
-                      <a:pPr algn="ctr" indent="0" marL="0">
-                        <a:buNone/>
-                      </a:pPr>
-                      <a:r>
-                        <a:rPr lang="en-US" sz="900" dirty="0">
-                          <a:solidFill>
-                            <a:srgbClr val="000000"/>
-                          </a:solidFill>
-                          <a:latin typeface="Arial" pitchFamily="34" charset="0"/>
-                          <a:ea typeface="Arial" pitchFamily="34" charset="-122"/>
-                          <a:cs typeface="Arial" pitchFamily="34" charset="-120"/>
-                        </a:rPr>
-                        <a:t>楽天トラベル</a:t>
-                      </a:r>
-                      <a:endParaRPr lang="en-US" sz="900" dirty="0">
-                        <a:latin typeface="Arial" charset="0"/>
-                        <a:ea typeface="Arial" charset="0"/>
-                        <a:cs typeface="Arial" charset="0"/>
-                      </a:endParaRPr>
-                    </a:p>
-                  </a:txBody>
-                  <a:tcPr marL="91440" marR="91440" marT="45720" marB="45720">
-                    <a:lnL w="6350" cap="flat" cmpd="sng" algn="ctr">
-                      <a:solidFill>
-                        <a:srgbClr val="CBD5E1"/>
-                      </a:solidFill>
-                      <a:prstDash val="solid"/>
-                      <a:round/>
-                      <a:headEnd type="none" w="med" len="med"/>
-                      <a:tailEnd type="none" w="med" len="med"/>
-                    </a:lnL>
-                    <a:lnR w="6350" cap="flat" cmpd="sng" algn="ctr">
-                      <a:solidFill>
-                        <a:srgbClr val="CBD5E1"/>
-                      </a:solidFill>
-                      <a:prstDash val="solid"/>
-                      <a:round/>
-                      <a:headEnd type="none" w="med" len="med"/>
-                      <a:tailEnd type="none" w="med" len="med"/>
-                    </a:lnR>
-                    <a:lnT w="6350" cap="flat" cmpd="sng" algn="ctr">
-                      <a:solidFill>
-                        <a:srgbClr val="CBD5E1"/>
-                      </a:solidFill>
-                      <a:prstDash val="solid"/>
-                      <a:round/>
-                      <a:headEnd type="none" w="med" len="med"/>
-                      <a:tailEnd type="none" w="med" len="med"/>
-                    </a:lnT>
-                    <a:lnB w="6350" cap="flat" cmpd="sng" algn="ctr">
-                      <a:solidFill>
-                        <a:srgbClr val="CBD5E1"/>
-                      </a:solidFill>
-                      <a:prstDash val="solid"/>
-                      <a:round/>
-                      <a:headEnd type="none" w="med" len="med"/>
-                      <a:tailEnd type="none" w="med" len="med"/>
-                    </a:lnB>
-                    <a:solidFill>
-                      <a:srgbClr val="E8EFF8"/>
-                    </a:solidFill>
-                  </a:tcPr>
-                </a:tc>
-                <a:tc>
-                  <a:txBody>
-                    <a:bodyPr/>
-                    <a:lstStyle/>
-                    <a:p>
-                      <a:pPr algn="ctr" indent="0" marL="0">
-                        <a:buNone/>
-                      </a:pPr>
-                      <a:r>
-                        <a:rPr lang="en-US" sz="900" dirty="0">
-                          <a:solidFill>
-                            <a:srgbClr val="000000"/>
-                          </a:solidFill>
-                          <a:latin typeface="Arial" pitchFamily="34" charset="0"/>
-                          <a:ea typeface="Arial" pitchFamily="34" charset="-122"/>
-                          <a:cs typeface="Arial" pitchFamily="34" charset="-120"/>
-                        </a:rPr>
-                        <a:t>24</a:t>
-                      </a:r>
-                      <a:endParaRPr lang="en-US" sz="900" dirty="0">
-                        <a:latin typeface="Arial" charset="0"/>
-                        <a:ea typeface="Arial" charset="0"/>
-                        <a:cs typeface="Arial" charset="0"/>
-                      </a:endParaRPr>
-                    </a:p>
-                  </a:txBody>
-                  <a:tcPr marL="91440" marR="91440" marT="45720" marB="45720">
-                    <a:lnL w="6350" cap="flat" cmpd="sng" algn="ctr">
-                      <a:solidFill>
-                        <a:srgbClr val="CBD5E1"/>
-                      </a:solidFill>
-                      <a:prstDash val="solid"/>
-                      <a:round/>
-                      <a:headEnd type="none" w="med" len="med"/>
-                      <a:tailEnd type="none" w="med" len="med"/>
-                    </a:lnL>
-                    <a:lnR w="6350" cap="flat" cmpd="sng" algn="ctr">
-                      <a:solidFill>
-                        <a:srgbClr val="CBD5E1"/>
-                      </a:solidFill>
-                      <a:prstDash val="solid"/>
-                      <a:round/>
-                      <a:headEnd type="none" w="med" len="med"/>
-                      <a:tailEnd type="none" w="med" len="med"/>
-                    </a:lnR>
-                    <a:lnT w="6350" cap="flat" cmpd="sng" algn="ctr">
-                      <a:solidFill>
-                        <a:srgbClr val="CBD5E1"/>
-                      </a:solidFill>
-                      <a:prstDash val="solid"/>
-                      <a:round/>
-                      <a:headEnd type="none" w="med" len="med"/>
-                      <a:tailEnd type="none" w="med" len="med"/>
-                    </a:lnT>
-                    <a:lnB w="6350" cap="flat" cmpd="sng" algn="ctr">
-                      <a:solidFill>
-                        <a:srgbClr val="CBD5E1"/>
-                      </a:solidFill>
-                      <a:prstDash val="solid"/>
-                      <a:round/>
-                      <a:headEnd type="none" w="med" len="med"/>
-                      <a:tailEnd type="none" w="med" len="med"/>
-                    </a:lnB>
-                    <a:solidFill>
-                      <a:srgbClr val="E8EFF8"/>
-                    </a:solidFill>
-                  </a:tcPr>
-                </a:tc>
-                <a:tc>
-                  <a:txBody>
-                    <a:bodyPr/>
-                    <a:lstStyle/>
-                    <a:p>
-                      <a:pPr algn="ctr" indent="0" marL="0">
-                        <a:buNone/>
-                      </a:pPr>
-                      <a:r>
-                        <a:rPr lang="en-US" sz="900" dirty="0">
-                          <a:solidFill>
-                            <a:srgbClr val="000000"/>
-                          </a:solidFill>
-                          <a:latin typeface="Arial" pitchFamily="34" charset="0"/>
-                          <a:ea typeface="Arial" pitchFamily="34" charset="-122"/>
-                          <a:cs typeface="Arial" pitchFamily="34" charset="-120"/>
-                        </a:rPr>
-                        <a:t>4.12</a:t>
-                      </a:r>
-                      <a:endParaRPr lang="en-US" sz="900" dirty="0">
-                        <a:latin typeface="Arial" charset="0"/>
-                        <a:ea typeface="Arial" charset="0"/>
-                        <a:cs typeface="Arial" charset="0"/>
-                      </a:endParaRPr>
-                    </a:p>
-                  </a:txBody>
-                  <a:tcPr marL="91440" marR="91440" marT="45720" marB="45720">
-                    <a:lnL w="6350" cap="flat" cmpd="sng" algn="ctr">
-                      <a:solidFill>
-                        <a:srgbClr val="CBD5E1"/>
-                      </a:solidFill>
-                      <a:prstDash val="solid"/>
-                      <a:round/>
-                      <a:headEnd type="none" w="med" len="med"/>
-                      <a:tailEnd type="none" w="med" len="med"/>
-                    </a:lnL>
-                    <a:lnR w="6350" cap="flat" cmpd="sng" algn="ctr">
-                      <a:solidFill>
-                        <a:srgbClr val="CBD5E1"/>
-                      </a:solidFill>
-                      <a:prstDash val="solid"/>
-                      <a:round/>
-                      <a:headEnd type="none" w="med" len="med"/>
-                      <a:tailEnd type="none" w="med" len="med"/>
-                    </a:lnR>
-                    <a:lnT w="6350" cap="flat" cmpd="sng" algn="ctr">
-                      <a:solidFill>
-                        <a:srgbClr val="CBD5E1"/>
-                      </a:solidFill>
-                      <a:prstDash val="solid"/>
-                      <a:round/>
-                      <a:headEnd type="none" w="med" len="med"/>
-                      <a:tailEnd type="none" w="med" len="med"/>
-                    </a:lnT>
-                    <a:lnB w="6350" cap="flat" cmpd="sng" algn="ctr">
-                      <a:solidFill>
-                        <a:srgbClr val="CBD5E1"/>
-                      </a:solidFill>
-                      <a:prstDash val="solid"/>
-                      <a:round/>
-                      <a:headEnd type="none" w="med" len="med"/>
-                      <a:tailEnd type="none" w="med" len="med"/>
-                    </a:lnB>
-                    <a:solidFill>
-                      <a:srgbClr val="E8EFF8"/>
-                    </a:solidFill>
-                  </a:tcPr>
-                </a:tc>
-                <a:tc>
-                  <a:txBody>
-                    <a:bodyPr/>
-                    <a:lstStyle/>
-                    <a:p>
-                      <a:pPr algn="ctr" indent="0" marL="0">
-                        <a:buNone/>
-                      </a:pPr>
-                      <a:r>
-                        <a:rPr lang="en-US" sz="900" dirty="0">
-                          <a:solidFill>
-                            <a:srgbClr val="000000"/>
-                          </a:solidFill>
-                          <a:latin typeface="Arial" pitchFamily="34" charset="0"/>
-                          <a:ea typeface="Arial" pitchFamily="34" charset="-122"/>
-                          <a:cs typeface="Arial" pitchFamily="34" charset="-120"/>
-                        </a:rPr>
-                        <a:t>/5 (×2)</a:t>
-                      </a:r>
-                      <a:endParaRPr lang="en-US" sz="900" dirty="0">
-                        <a:latin typeface="Arial" charset="0"/>
-                        <a:ea typeface="Arial" charset="0"/>
-                        <a:cs typeface="Arial" charset="0"/>
-                      </a:endParaRPr>
-                    </a:p>
-                  </a:txBody>
-                  <a:tcPr marL="91440" marR="91440" marT="45720" marB="45720">
-                    <a:lnL w="6350" cap="flat" cmpd="sng" algn="ctr">
-                      <a:solidFill>
-                        <a:srgbClr val="CBD5E1"/>
-                      </a:solidFill>
-                      <a:prstDash val="solid"/>
-                      <a:round/>
-                      <a:headEnd type="none" w="med" len="med"/>
-                      <a:tailEnd type="none" w="med" len="med"/>
-                    </a:lnL>
-                    <a:lnR w="6350" cap="flat" cmpd="sng" algn="ctr">
-                      <a:solidFill>
-                        <a:srgbClr val="CBD5E1"/>
-                      </a:solidFill>
-                      <a:prstDash val="solid"/>
-                      <a:round/>
-                      <a:headEnd type="none" w="med" len="med"/>
-                      <a:tailEnd type="none" w="med" len="med"/>
-                    </a:lnR>
-                    <a:lnT w="6350" cap="flat" cmpd="sng" algn="ctr">
-                      <a:solidFill>
-                        <a:srgbClr val="CBD5E1"/>
-                      </a:solidFill>
-                      <a:prstDash val="solid"/>
-                      <a:round/>
-                      <a:headEnd type="none" w="med" len="med"/>
-                      <a:tailEnd type="none" w="med" len="med"/>
-                    </a:lnT>
-                    <a:lnB w="6350" cap="flat" cmpd="sng" algn="ctr">
-                      <a:solidFill>
-                        <a:srgbClr val="CBD5E1"/>
-                      </a:solidFill>
-                      <a:prstDash val="solid"/>
-                      <a:round/>
-                      <a:headEnd type="none" w="med" len="med"/>
-                      <a:tailEnd type="none" w="med" len="med"/>
-                    </a:lnB>
-                    <a:solidFill>
-                      <a:srgbClr val="E8EFF8"/>
-                    </a:solidFill>
-                  </a:tcPr>
-                </a:tc>
-                <a:tc>
-                  <a:txBody>
-                    <a:bodyPr/>
-                    <a:lstStyle/>
-                    <a:p>
-                      <a:pPr algn="ctr" indent="0" marL="0">
-                        <a:buNone/>
-                      </a:pPr>
-                      <a:r>
-                        <a:rPr lang="en-US" sz="900" dirty="0">
-                          <a:solidFill>
-                            <a:srgbClr val="000000"/>
-                          </a:solidFill>
-                          <a:latin typeface="Arial" pitchFamily="34" charset="0"/>
-                          <a:ea typeface="Arial" pitchFamily="34" charset="-122"/>
-                          <a:cs typeface="Arial" pitchFamily="34" charset="-120"/>
-                        </a:rPr>
-                        <a:t>8.25</a:t>
-                      </a:r>
-                      <a:endParaRPr lang="en-US" sz="900" dirty="0">
-                        <a:latin typeface="Arial" charset="0"/>
-                        <a:ea typeface="Arial" charset="0"/>
-                        <a:cs typeface="Arial" charset="0"/>
-                      </a:endParaRPr>
-                    </a:p>
-                  </a:txBody>
-                  <a:tcPr marL="91440" marR="91440" marT="45720" marB="45720">
-                    <a:lnL w="6350" cap="flat" cmpd="sng" algn="ctr">
-                      <a:solidFill>
-                        <a:srgbClr val="CBD5E1"/>
-                      </a:solidFill>
-                      <a:prstDash val="solid"/>
-                      <a:round/>
-                      <a:headEnd type="none" w="med" len="med"/>
-                      <a:tailEnd type="none" w="med" len="med"/>
-                    </a:lnL>
-                    <a:lnR w="6350" cap="flat" cmpd="sng" algn="ctr">
-                      <a:solidFill>
-                        <a:srgbClr val="CBD5E1"/>
-                      </a:solidFill>
-                      <a:prstDash val="solid"/>
-                      <a:round/>
-                      <a:headEnd type="none" w="med" len="med"/>
-                      <a:tailEnd type="none" w="med" len="med"/>
-                    </a:lnR>
-                    <a:lnT w="6350" cap="flat" cmpd="sng" algn="ctr">
-                      <a:solidFill>
-                        <a:srgbClr val="CBD5E1"/>
-                      </a:solidFill>
-                      <a:prstDash val="solid"/>
-                      <a:round/>
-                      <a:headEnd type="none" w="med" len="med"/>
-                      <a:tailEnd type="none" w="med" len="med"/>
-                    </a:lnT>
-                    <a:lnB w="6350" cap="flat" cmpd="sng" algn="ctr">
-                      <a:solidFill>
-                        <a:srgbClr val="CBD5E1"/>
-                      </a:solidFill>
-                      <a:prstDash val="solid"/>
-                      <a:round/>
-                      <a:headEnd type="none" w="med" len="med"/>
-                      <a:tailEnd type="none" w="med" len="med"/>
-                    </a:lnB>
-                    <a:solidFill>
-                      <a:srgbClr val="E8EFF8"/>
-                    </a:solidFill>
-                  </a:tcPr>
-                </a:tc>
-              </a:tr>
-              <a:tr h="201168">
-                <a:tc>
-                  <a:txBody>
-                    <a:bodyPr/>
-                    <a:lstStyle/>
-                    <a:p>
-                      <a:pPr algn="ctr" indent="0" marL="0">
-                        <a:buNone/>
-                      </a:pPr>
-                      <a:r>
-                        <a:rPr lang="en-US" sz="900" dirty="0">
-                          <a:solidFill>
-                            <a:srgbClr val="000000"/>
-                          </a:solidFill>
-                          <a:latin typeface="Arial" pitchFamily="34" charset="0"/>
-                          <a:ea typeface="Arial" pitchFamily="34" charset="-122"/>
-                          <a:cs typeface="Arial" pitchFamily="34" charset="-120"/>
-                        </a:rPr>
-                        <a:t>Booking.com</a:t>
-                      </a:r>
-                      <a:endParaRPr lang="en-US" sz="900" dirty="0">
-                        <a:latin typeface="Arial" charset="0"/>
-                        <a:ea typeface="Arial" charset="0"/>
-                        <a:cs typeface="Arial" charset="0"/>
-                      </a:endParaRPr>
-                    </a:p>
-                  </a:txBody>
-                  <a:tcPr marL="91440" marR="91440" marT="45720" marB="45720">
-                    <a:lnL w="6350" cap="flat" cmpd="sng" algn="ctr">
-                      <a:solidFill>
-                        <a:srgbClr val="CBD5E1"/>
-                      </a:solidFill>
-                      <a:prstDash val="solid"/>
-                      <a:round/>
-                      <a:headEnd type="none" w="med" len="med"/>
-                      <a:tailEnd type="none" w="med" len="med"/>
-                    </a:lnL>
-                    <a:lnR w="6350" cap="flat" cmpd="sng" algn="ctr">
-                      <a:solidFill>
-                        <a:srgbClr val="CBD5E1"/>
-                      </a:solidFill>
-                      <a:prstDash val="solid"/>
-                      <a:round/>
-                      <a:headEnd type="none" w="med" len="med"/>
-                      <a:tailEnd type="none" w="med" len="med"/>
-                    </a:lnR>
-                    <a:lnT w="6350" cap="flat" cmpd="sng" algn="ctr">
-                      <a:solidFill>
-                        <a:srgbClr val="CBD5E1"/>
-                      </a:solidFill>
-                      <a:prstDash val="solid"/>
-                      <a:round/>
-                      <a:headEnd type="none" w="med" len="med"/>
-                      <a:tailEnd type="none" w="med" len="med"/>
-                    </a:lnT>
-                    <a:lnB w="6350" cap="flat" cmpd="sng" algn="ctr">
-                      <a:solidFill>
-                        <a:srgbClr val="CBD5E1"/>
-                      </a:solidFill>
-                      <a:prstDash val="solid"/>
-                      <a:round/>
-                      <a:headEnd type="none" w="med" len="med"/>
-                      <a:tailEnd type="none" w="med" len="med"/>
-                    </a:lnB>
-                    <a:solidFill>
-                      <a:srgbClr val="FFFFFF"/>
-                    </a:solidFill>
-                  </a:tcPr>
-                </a:tc>
-                <a:tc>
-                  <a:txBody>
-                    <a:bodyPr/>
-                    <a:lstStyle/>
-                    <a:p>
-                      <a:pPr algn="ctr" indent="0" marL="0">
-                        <a:buNone/>
-                      </a:pPr>
-                      <a:r>
-                        <a:rPr lang="en-US" sz="900" dirty="0">
-                          <a:solidFill>
-                            <a:srgbClr val="000000"/>
-                          </a:solidFill>
-                          <a:latin typeface="Arial" pitchFamily="34" charset="0"/>
-                          <a:ea typeface="Arial" pitchFamily="34" charset="-122"/>
-                          <a:cs typeface="Arial" pitchFamily="34" charset="-120"/>
-                        </a:rPr>
-                        <a:t>35</a:t>
-                      </a:r>
-                      <a:endParaRPr lang="en-US" sz="900" dirty="0">
-                        <a:latin typeface="Arial" charset="0"/>
-                        <a:ea typeface="Arial" charset="0"/>
-                        <a:cs typeface="Arial" charset="0"/>
-                      </a:endParaRPr>
-                    </a:p>
-                  </a:txBody>
-                  <a:tcPr marL="91440" marR="91440" marT="45720" marB="45720">
-                    <a:lnL w="6350" cap="flat" cmpd="sng" algn="ctr">
-                      <a:solidFill>
-                        <a:srgbClr val="CBD5E1"/>
-                      </a:solidFill>
-                      <a:prstDash val="solid"/>
-                      <a:round/>
-                      <a:headEnd type="none" w="med" len="med"/>
-                      <a:tailEnd type="none" w="med" len="med"/>
-                    </a:lnL>
-                    <a:lnR w="6350" cap="flat" cmpd="sng" algn="ctr">
-                      <a:solidFill>
-                        <a:srgbClr val="CBD5E1"/>
-                      </a:solidFill>
-                      <a:prstDash val="solid"/>
-                      <a:round/>
-                      <a:headEnd type="none" w="med" len="med"/>
-                      <a:tailEnd type="none" w="med" len="med"/>
-                    </a:lnR>
-                    <a:lnT w="6350" cap="flat" cmpd="sng" algn="ctr">
-                      <a:solidFill>
-                        <a:srgbClr val="CBD5E1"/>
-                      </a:solidFill>
-                      <a:prstDash val="solid"/>
-                      <a:round/>
-                      <a:headEnd type="none" w="med" len="med"/>
-                      <a:tailEnd type="none" w="med" len="med"/>
-                    </a:lnT>
-                    <a:lnB w="6350" cap="flat" cmpd="sng" algn="ctr">
-                      <a:solidFill>
-                        <a:srgbClr val="CBD5E1"/>
-                      </a:solidFill>
-                      <a:prstDash val="solid"/>
-                      <a:round/>
-                      <a:headEnd type="none" w="med" len="med"/>
-                      <a:tailEnd type="none" w="med" len="med"/>
-                    </a:lnB>
-                    <a:solidFill>
-                      <a:srgbClr val="FFFFFF"/>
-                    </a:solidFill>
-                  </a:tcPr>
-                </a:tc>
-                <a:tc>
-                  <a:txBody>
-                    <a:bodyPr/>
-                    <a:lstStyle/>
-                    <a:p>
-                      <a:pPr algn="ctr" indent="0" marL="0">
-                        <a:buNone/>
-                      </a:pPr>
-                      <a:r>
-                        <a:rPr lang="en-US" sz="900" dirty="0">
-                          <a:solidFill>
-                            <a:srgbClr val="000000"/>
-                          </a:solidFill>
-                          <a:latin typeface="Arial" pitchFamily="34" charset="0"/>
-                          <a:ea typeface="Arial" pitchFamily="34" charset="-122"/>
-                          <a:cs typeface="Arial" pitchFamily="34" charset="-120"/>
-                        </a:rPr>
-                        <a:t>7.74</a:t>
-                      </a:r>
-                      <a:endParaRPr lang="en-US" sz="900" dirty="0">
-                        <a:latin typeface="Arial" charset="0"/>
-                        <a:ea typeface="Arial" charset="0"/>
-                        <a:cs typeface="Arial" charset="0"/>
-                      </a:endParaRPr>
-                    </a:p>
-                  </a:txBody>
-                  <a:tcPr marL="91440" marR="91440" marT="45720" marB="45720">
-                    <a:lnL w="6350" cap="flat" cmpd="sng" algn="ctr">
-                      <a:solidFill>
-                        <a:srgbClr val="CBD5E1"/>
-                      </a:solidFill>
-                      <a:prstDash val="solid"/>
-                      <a:round/>
-                      <a:headEnd type="none" w="med" len="med"/>
-                      <a:tailEnd type="none" w="med" len="med"/>
-                    </a:lnL>
-                    <a:lnR w="6350" cap="flat" cmpd="sng" algn="ctr">
-                      <a:solidFill>
-                        <a:srgbClr val="CBD5E1"/>
-                      </a:solidFill>
-                      <a:prstDash val="solid"/>
-                      <a:round/>
-                      <a:headEnd type="none" w="med" len="med"/>
-                      <a:tailEnd type="none" w="med" len="med"/>
-                    </a:lnR>
-                    <a:lnT w="6350" cap="flat" cmpd="sng" algn="ctr">
-                      <a:solidFill>
-                        <a:srgbClr val="CBD5E1"/>
-                      </a:solidFill>
-                      <a:prstDash val="solid"/>
-                      <a:round/>
-                      <a:headEnd type="none" w="med" len="med"/>
-                      <a:tailEnd type="none" w="med" len="med"/>
-                    </a:lnT>
-                    <a:lnB w="6350" cap="flat" cmpd="sng" algn="ctr">
-                      <a:solidFill>
-                        <a:srgbClr val="CBD5E1"/>
-                      </a:solidFill>
-                      <a:prstDash val="solid"/>
-                      <a:round/>
-                      <a:headEnd type="none" w="med" len="med"/>
-                      <a:tailEnd type="none" w="med" len="med"/>
-                    </a:lnB>
-                    <a:solidFill>
-                      <a:srgbClr val="FFFFFF"/>
-                    </a:solidFill>
-                  </a:tcPr>
-                </a:tc>
-                <a:tc>
-                  <a:txBody>
-                    <a:bodyPr/>
-                    <a:lstStyle/>
-                    <a:p>
-                      <a:pPr algn="ctr" indent="0" marL="0">
-                        <a:buNone/>
-                      </a:pPr>
-                      <a:r>
-                        <a:rPr lang="en-US" sz="900" dirty="0">
-                          <a:solidFill>
-                            <a:srgbClr val="000000"/>
-                          </a:solidFill>
-                          <a:latin typeface="Arial" pitchFamily="34" charset="0"/>
-                          <a:ea typeface="Arial" pitchFamily="34" charset="-122"/>
-                          <a:cs typeface="Arial" pitchFamily="34" charset="-120"/>
-                        </a:rPr>
-                        <a:t>/10</a:t>
-                      </a:r>
-                      <a:endParaRPr lang="en-US" sz="900" dirty="0">
-                        <a:latin typeface="Arial" charset="0"/>
-                        <a:ea typeface="Arial" charset="0"/>
-                        <a:cs typeface="Arial" charset="0"/>
-                      </a:endParaRPr>
-                    </a:p>
-                  </a:txBody>
-                  <a:tcPr marL="91440" marR="91440" marT="45720" marB="45720">
-                    <a:lnL w="6350" cap="flat" cmpd="sng" algn="ctr">
-                      <a:solidFill>
-                        <a:srgbClr val="CBD5E1"/>
-                      </a:solidFill>
-                      <a:prstDash val="solid"/>
-                      <a:round/>
-                      <a:headEnd type="none" w="med" len="med"/>
-                      <a:tailEnd type="none" w="med" len="med"/>
-                    </a:lnL>
-                    <a:lnR w="6350" cap="flat" cmpd="sng" algn="ctr">
-                      <a:solidFill>
-                        <a:srgbClr val="CBD5E1"/>
-                      </a:solidFill>
-                      <a:prstDash val="solid"/>
-                      <a:round/>
-                      <a:headEnd type="none" w="med" len="med"/>
-                      <a:tailEnd type="none" w="med" len="med"/>
-                    </a:lnR>
-                    <a:lnT w="6350" cap="flat" cmpd="sng" algn="ctr">
-                      <a:solidFill>
-                        <a:srgbClr val="CBD5E1"/>
-                      </a:solidFill>
-                      <a:prstDash val="solid"/>
-                      <a:round/>
-                      <a:headEnd type="none" w="med" len="med"/>
-                      <a:tailEnd type="none" w="med" len="med"/>
-                    </a:lnT>
-                    <a:lnB w="6350" cap="flat" cmpd="sng" algn="ctr">
-                      <a:solidFill>
-                        <a:srgbClr val="CBD5E1"/>
-                      </a:solidFill>
-                      <a:prstDash val="solid"/>
-                      <a:round/>
-                      <a:headEnd type="none" w="med" len="med"/>
-                      <a:tailEnd type="none" w="med" len="med"/>
-                    </a:lnB>
-                    <a:solidFill>
-                      <a:srgbClr val="FFFFFF"/>
-                    </a:solidFill>
-                  </a:tcPr>
-                </a:tc>
-                <a:tc>
-                  <a:txBody>
-                    <a:bodyPr/>
-                    <a:lstStyle/>
-                    <a:p>
-                      <a:pPr algn="ctr" indent="0" marL="0">
-                        <a:buNone/>
-                      </a:pPr>
-                      <a:r>
-                        <a:rPr lang="en-US" sz="900" dirty="0">
-                          <a:solidFill>
-                            <a:srgbClr val="000000"/>
-                          </a:solidFill>
-                          <a:latin typeface="Arial" pitchFamily="34" charset="0"/>
-                          <a:ea typeface="Arial" pitchFamily="34" charset="-122"/>
-                          <a:cs typeface="Arial" pitchFamily="34" charset="-120"/>
-                        </a:rPr>
-                        <a:t>7.74</a:t>
+                        <a:t>7.83</a:t>
                       </a:r>
                       <a:endParaRPr lang="en-US" sz="900" dirty="0">
                         <a:latin typeface="Arial" charset="0"/>
@@ -10233,7 +10216,7 @@
                 <a:ea typeface="Arial" pitchFamily="34" charset="-122"/>
                 <a:cs typeface="Arial" pitchFamily="34" charset="-120"/>
               </a:rPr>
-              <a:t>125件（85.6%）</a:t>
+              <a:t>61件（83.6%）</a:t>
             </a:r>
             <a:endParaRPr lang="en-US" sz="1100" dirty="0"/>
           </a:p>
@@ -10331,7 +10314,7 @@
                 <a:ea typeface="Arial" pitchFamily="34" charset="-122"/>
                 <a:cs typeface="Arial" pitchFamily="34" charset="-120"/>
               </a:rPr>
-              <a:t>16件（11.0%）</a:t>
+              <a:t>9件（12.3%）</a:t>
             </a:r>
             <a:endParaRPr lang="en-US" sz="1100" dirty="0"/>
           </a:p>
@@ -10429,7 +10412,7 @@
                 <a:ea typeface="Arial" pitchFamily="34" charset="-122"/>
                 <a:cs typeface="Arial" pitchFamily="34" charset="-120"/>
               </a:rPr>
-              <a:t>5件（3.4%）</a:t>
+              <a:t>3件（4.1%）</a:t>
             </a:r>
             <a:endParaRPr lang="en-US" sz="1100" dirty="0"/>
           </a:p>
@@ -10763,7 +10746,7 @@
                 <a:ea typeface="Arial" pitchFamily="34" charset="-122"/>
                 <a:cs typeface="Arial" pitchFamily="34" charset="-120"/>
               </a:rPr>
-              <a:t>50件+</a:t>
+              <a:t>20件+</a:t>
             </a:r>
             <a:endParaRPr lang="en-US" sz="900" dirty="0"/>
           </a:p>
@@ -10986,7 +10969,7 @@
                 <a:ea typeface="Arial" pitchFamily="34" charset="-122"/>
                 <a:cs typeface="Arial" pitchFamily="34" charset="-120"/>
               </a:rPr>
-              <a:t>50件+</a:t>
+              <a:t>20件+</a:t>
             </a:r>
             <a:endParaRPr lang="en-US" sz="900" dirty="0"/>
           </a:p>
@@ -11001,6 +10984,229 @@
         <p:spPr>
           <a:xfrm>
             <a:off x="3429000" y="1124712"/>
+            <a:ext cx="1645920" cy="274320"/>
+          </a:xfrm>
+          <a:prstGeom prst="rect">
+            <a:avLst/>
+          </a:prstGeom>
+          <a:noFill/>
+          <a:ln/>
+        </p:spPr>
+        <p:txBody>
+          <a:bodyPr wrap="square" lIns="0" tIns="0" rIns="0" bIns="0" rtlCol="0" anchor="ctr"/>
+          <a:lstStyle/>
+          <a:p>
+            <a:pPr indent="0" marL="0">
+              <a:buNone/>
+            </a:pPr>
+            <a:r>
+              <a:rPr lang="en-US" sz="1300" b="1" dirty="0">
+                <a:solidFill>
+                  <a:srgbClr val="1A2744"/>
+                </a:solidFill>
+                <a:latin typeface="Arial" pitchFamily="34" charset="0"/>
+                <a:ea typeface="Arial" pitchFamily="34" charset="-122"/>
+                <a:cs typeface="Arial" pitchFamily="34" charset="-120"/>
+              </a:rPr>
+              <a:t>スタッフの対応</a:t>
+            </a:r>
+            <a:endParaRPr lang="en-US" sz="1300" dirty="0"/>
+          </a:p>
+        </p:txBody>
+      </p:sp>
+      <p:sp>
+        <p:nvSpPr>
+          <p:cNvPr id="17" name="Text 15"/>
+          <p:cNvSpPr/>
+          <p:nvPr/>
+        </p:nvSpPr>
+        <p:spPr>
+          <a:xfrm>
+            <a:off x="3429000" y="1417320"/>
+            <a:ext cx="2377440" cy="365760"/>
+          </a:xfrm>
+          <a:prstGeom prst="rect">
+            <a:avLst/>
+          </a:prstGeom>
+          <a:noFill/>
+          <a:ln/>
+        </p:spPr>
+        <p:txBody>
+          <a:bodyPr wrap="square" lIns="0" tIns="0" rIns="0" bIns="0" rtlCol="0" anchor="ctr"/>
+          <a:lstStyle/>
+          <a:p>
+            <a:pPr indent="0" marL="0">
+              <a:buNone/>
+            </a:pPr>
+            <a:r>
+              <a:rPr lang="en-US" sz="900" dirty="0">
+                <a:solidFill>
+                  <a:srgbClr val="64748B"/>
+                </a:solidFill>
+                <a:latin typeface="Arial" pitchFamily="34" charset="0"/>
+                <a:ea typeface="Arial" pitchFamily="34" charset="-122"/>
+                <a:cs typeface="Arial" pitchFamily="34" charset="-120"/>
+              </a:rPr>
+              <a:t>とにかくスタッフに電話したら、とても親切に対応してくれて、対応してくれたのはありがたかったのですが、エアコンの音は...</a:t>
+            </a:r>
+            <a:endParaRPr lang="en-US" sz="900" dirty="0"/>
+          </a:p>
+        </p:txBody>
+      </p:sp>
+      <p:sp>
+        <p:nvSpPr>
+          <p:cNvPr id="18" name="Text 16"/>
+          <p:cNvSpPr/>
+          <p:nvPr/>
+        </p:nvSpPr>
+        <p:spPr>
+          <a:xfrm>
+            <a:off x="3429000" y="1828800"/>
+            <a:ext cx="2377440" cy="640080"/>
+          </a:xfrm>
+          <a:prstGeom prst="rect">
+            <a:avLst/>
+          </a:prstGeom>
+          <a:noFill/>
+          <a:ln/>
+        </p:spPr>
+        <p:txBody>
+          <a:bodyPr wrap="square" lIns="0" tIns="0" rIns="0" bIns="0" rtlCol="0" anchor="ctr"/>
+          <a:lstStyle/>
+          <a:p>
+            <a:pPr indent="0" marL="0">
+              <a:buNone/>
+            </a:pPr>
+            <a:r>
+              <a:rPr lang="en-US" sz="900" i="1" dirty="0">
+                <a:solidFill>
+                  <a:srgbClr val="3B7DD8"/>
+                </a:solidFill>
+                <a:latin typeface="Arial" pitchFamily="34" charset="0"/>
+                <a:ea typeface="Arial" pitchFamily="34" charset="-122"/>
+                <a:cs typeface="Arial" pitchFamily="34" charset="-120"/>
+              </a:rPr>
+              <a:t>「チェックイン後、アメニティを選んでいたらスタッフの方が子供用の可愛いアメニティを持ってきてくださり、その他にも塗り...」</a:t>
+            </a:r>
+            <a:endParaRPr lang="en-US" sz="900" dirty="0"/>
+          </a:p>
+        </p:txBody>
+      </p:sp>
+      <p:sp>
+        <p:nvSpPr>
+          <p:cNvPr id="19" name="Shape 17"/>
+          <p:cNvSpPr/>
+          <p:nvPr/>
+        </p:nvSpPr>
+        <p:spPr>
+          <a:xfrm>
+            <a:off x="6126480" y="1051560"/>
+            <a:ext cx="2651760" cy="1600200"/>
+          </a:xfrm>
+          <a:prstGeom prst="rect">
+            <a:avLst/>
+          </a:prstGeom>
+          <a:solidFill>
+            <a:srgbClr val="FFFFFF"/>
+          </a:solidFill>
+          <a:ln/>
+          <a:effectLst>
+            <a:outerShdw sx="100000" sy="100000" kx="0" ky="0" algn="bl" rotWithShape="0" blurRad="50800" dist="25400" dir="8100000">
+              <a:srgbClr val="000000">
+                <a:alpha val="10000"/>
+              </a:srgbClr>
+            </a:outerShdw>
+          </a:effectLst>
+        </p:spPr>
+      </p:sp>
+      <p:sp>
+        <p:nvSpPr>
+          <p:cNvPr id="20" name="Shape 18"/>
+          <p:cNvSpPr/>
+          <p:nvPr/>
+        </p:nvSpPr>
+        <p:spPr>
+          <a:xfrm>
+            <a:off x="6126480" y="1051560"/>
+            <a:ext cx="54864" cy="1600200"/>
+          </a:xfrm>
+          <a:prstGeom prst="rect">
+            <a:avLst/>
+          </a:prstGeom>
+          <a:solidFill>
+            <a:srgbClr val="16A34A"/>
+          </a:solidFill>
+          <a:ln/>
+        </p:spPr>
+      </p:sp>
+      <p:sp>
+        <p:nvSpPr>
+          <p:cNvPr id="21" name="Shape 19"/>
+          <p:cNvSpPr/>
+          <p:nvPr/>
+        </p:nvSpPr>
+        <p:spPr>
+          <a:xfrm>
+            <a:off x="7955280" y="1124712"/>
+            <a:ext cx="658368" cy="228600"/>
+          </a:xfrm>
+          <a:prstGeom prst="rect">
+            <a:avLst/>
+          </a:prstGeom>
+          <a:solidFill>
+            <a:srgbClr val="DCFCE7"/>
+          </a:solidFill>
+          <a:ln/>
+        </p:spPr>
+      </p:sp>
+      <p:sp>
+        <p:nvSpPr>
+          <p:cNvPr id="22" name="Text 20"/>
+          <p:cNvSpPr/>
+          <p:nvPr/>
+        </p:nvSpPr>
+        <p:spPr>
+          <a:xfrm>
+            <a:off x="7955280" y="1124712"/>
+            <a:ext cx="658368" cy="228600"/>
+          </a:xfrm>
+          <a:prstGeom prst="rect">
+            <a:avLst/>
+          </a:prstGeom>
+          <a:noFill/>
+          <a:ln/>
+        </p:spPr>
+        <p:txBody>
+          <a:bodyPr wrap="square" lIns="0" tIns="0" rIns="0" bIns="0" rtlCol="0" anchor="ctr"/>
+          <a:lstStyle/>
+          <a:p>
+            <a:pPr algn="ctr" indent="0" marL="0">
+              <a:buNone/>
+            </a:pPr>
+            <a:r>
+              <a:rPr lang="en-US" sz="900" b="1" dirty="0">
+                <a:solidFill>
+                  <a:srgbClr val="16A34A"/>
+                </a:solidFill>
+                <a:latin typeface="Arial" pitchFamily="34" charset="0"/>
+                <a:ea typeface="Arial" pitchFamily="34" charset="-122"/>
+                <a:cs typeface="Arial" pitchFamily="34" charset="-120"/>
+              </a:rPr>
+              <a:t>20件+</a:t>
+            </a:r>
+            <a:endParaRPr lang="en-US" sz="900" dirty="0"/>
+          </a:p>
+        </p:txBody>
+      </p:sp>
+      <p:sp>
+        <p:nvSpPr>
+          <p:cNvPr id="23" name="Text 21"/>
+          <p:cNvSpPr/>
+          <p:nvPr/>
+        </p:nvSpPr>
+        <p:spPr>
+          <a:xfrm>
+            <a:off x="6263640" y="1124712"/>
             <a:ext cx="1645920" cy="274320"/>
           </a:xfrm>
           <a:prstGeom prst="rect">
@@ -11033,13 +11239,13 @@
       </p:sp>
       <p:sp>
         <p:nvSpPr>
-          <p:cNvPr id="17" name="Text 15"/>
-          <p:cNvSpPr/>
-          <p:nvPr/>
-        </p:nvSpPr>
-        <p:spPr>
-          <a:xfrm>
-            <a:off x="3429000" y="1417320"/>
+          <p:cNvPr id="24" name="Text 22"/>
+          <p:cNvSpPr/>
+          <p:nvPr/>
+        </p:nvSpPr>
+        <p:spPr>
+          <a:xfrm>
+            <a:off x="6263640" y="1417320"/>
             <a:ext cx="2377440" cy="365760"/>
           </a:xfrm>
           <a:prstGeom prst="rect">
@@ -11072,13 +11278,13 @@
       </p:sp>
       <p:sp>
         <p:nvSpPr>
-          <p:cNvPr id="18" name="Text 16"/>
-          <p:cNvSpPr/>
-          <p:nvPr/>
-        </p:nvSpPr>
-        <p:spPr>
-          <a:xfrm>
-            <a:off x="3429000" y="1828800"/>
+          <p:cNvPr id="25" name="Text 23"/>
+          <p:cNvSpPr/>
+          <p:nvPr/>
+        </p:nvSpPr>
+        <p:spPr>
+          <a:xfrm>
+            <a:off x="6263640" y="1828800"/>
             <a:ext cx="2377440" cy="640080"/>
           </a:xfrm>
           <a:prstGeom prst="rect">
@@ -11111,13 +11317,13 @@
       </p:sp>
       <p:sp>
         <p:nvSpPr>
-          <p:cNvPr id="19" name="Shape 17"/>
-          <p:cNvSpPr/>
-          <p:nvPr/>
-        </p:nvSpPr>
-        <p:spPr>
-          <a:xfrm>
-            <a:off x="6126480" y="1051560"/>
+          <p:cNvPr id="26" name="Shape 24"/>
+          <p:cNvSpPr/>
+          <p:nvPr/>
+        </p:nvSpPr>
+        <p:spPr>
+          <a:xfrm>
+            <a:off x="457200" y="2880360"/>
             <a:ext cx="2651760" cy="1600200"/>
           </a:xfrm>
           <a:prstGeom prst="rect">
@@ -11138,13 +11344,13 @@
       </p:sp>
       <p:sp>
         <p:nvSpPr>
-          <p:cNvPr id="20" name="Shape 18"/>
-          <p:cNvSpPr/>
-          <p:nvPr/>
-        </p:nvSpPr>
-        <p:spPr>
-          <a:xfrm>
-            <a:off x="6126480" y="1051560"/>
+          <p:cNvPr id="27" name="Shape 25"/>
+          <p:cNvSpPr/>
+          <p:nvPr/>
+        </p:nvSpPr>
+        <p:spPr>
+          <a:xfrm>
+            <a:off x="457200" y="2880360"/>
             <a:ext cx="54864" cy="1600200"/>
           </a:xfrm>
           <a:prstGeom prst="rect">
@@ -11158,13 +11364,13 @@
       </p:sp>
       <p:sp>
         <p:nvSpPr>
-          <p:cNvPr id="21" name="Shape 19"/>
-          <p:cNvSpPr/>
-          <p:nvPr/>
-        </p:nvSpPr>
-        <p:spPr>
-          <a:xfrm>
-            <a:off x="7955280" y="1124712"/>
+          <p:cNvPr id="28" name="Shape 26"/>
+          <p:cNvSpPr/>
+          <p:nvPr/>
+        </p:nvSpPr>
+        <p:spPr>
+          <a:xfrm>
+            <a:off x="2286000" y="2953512"/>
             <a:ext cx="658368" cy="228600"/>
           </a:xfrm>
           <a:prstGeom prst="rect">
@@ -11178,13 +11384,13 @@
       </p:sp>
       <p:sp>
         <p:nvSpPr>
-          <p:cNvPr id="22" name="Text 20"/>
-          <p:cNvSpPr/>
-          <p:nvPr/>
-        </p:nvSpPr>
-        <p:spPr>
-          <a:xfrm>
-            <a:off x="7955280" y="1124712"/>
+          <p:cNvPr id="29" name="Text 27"/>
+          <p:cNvSpPr/>
+          <p:nvPr/>
+        </p:nvSpPr>
+        <p:spPr>
+          <a:xfrm>
+            <a:off x="2286000" y="2953512"/>
             <a:ext cx="658368" cy="228600"/>
           </a:xfrm>
           <a:prstGeom prst="rect">
@@ -11209,230 +11415,7 @@
                 <a:ea typeface="Arial" pitchFamily="34" charset="-122"/>
                 <a:cs typeface="Arial" pitchFamily="34" charset="-120"/>
               </a:rPr>
-              <a:t>50件+</a:t>
-            </a:r>
-            <a:endParaRPr lang="en-US" sz="900" dirty="0"/>
-          </a:p>
-        </p:txBody>
-      </p:sp>
-      <p:sp>
-        <p:nvSpPr>
-          <p:cNvPr id="23" name="Text 21"/>
-          <p:cNvSpPr/>
-          <p:nvPr/>
-        </p:nvSpPr>
-        <p:spPr>
-          <a:xfrm>
-            <a:off x="6263640" y="1124712"/>
-            <a:ext cx="1645920" cy="274320"/>
-          </a:xfrm>
-          <a:prstGeom prst="rect">
-            <a:avLst/>
-          </a:prstGeom>
-          <a:noFill/>
-          <a:ln/>
-        </p:spPr>
-        <p:txBody>
-          <a:bodyPr wrap="square" lIns="0" tIns="0" rIns="0" bIns="0" rtlCol="0" anchor="ctr"/>
-          <a:lstStyle/>
-          <a:p>
-            <a:pPr indent="0" marL="0">
-              <a:buNone/>
-            </a:pPr>
-            <a:r>
-              <a:rPr lang="en-US" sz="1300" b="1" dirty="0">
-                <a:solidFill>
-                  <a:srgbClr val="1A2744"/>
-                </a:solidFill>
-                <a:latin typeface="Arial" pitchFamily="34" charset="0"/>
-                <a:ea typeface="Arial" pitchFamily="34" charset="-122"/>
-                <a:cs typeface="Arial" pitchFamily="34" charset="-120"/>
-              </a:rPr>
-              <a:t>スタッフの対応</a:t>
-            </a:r>
-            <a:endParaRPr lang="en-US" sz="1300" dirty="0"/>
-          </a:p>
-        </p:txBody>
-      </p:sp>
-      <p:sp>
-        <p:nvSpPr>
-          <p:cNvPr id="24" name="Text 22"/>
-          <p:cNvSpPr/>
-          <p:nvPr/>
-        </p:nvSpPr>
-        <p:spPr>
-          <a:xfrm>
-            <a:off x="6263640" y="1417320"/>
-            <a:ext cx="2377440" cy="365760"/>
-          </a:xfrm>
-          <a:prstGeom prst="rect">
-            <a:avLst/>
-          </a:prstGeom>
-          <a:noFill/>
-          <a:ln/>
-        </p:spPr>
-        <p:txBody>
-          <a:bodyPr wrap="square" lIns="0" tIns="0" rIns="0" bIns="0" rtlCol="0" anchor="ctr"/>
-          <a:lstStyle/>
-          <a:p>
-            <a:pPr indent="0" marL="0">
-              <a:buNone/>
-            </a:pPr>
-            <a:r>
-              <a:rPr lang="en-US" sz="900" dirty="0">
-                <a:solidFill>
-                  <a:srgbClr val="64748B"/>
-                </a:solidFill>
-                <a:latin typeface="Arial" pitchFamily="34" charset="0"/>
-                <a:ea typeface="Arial" pitchFamily="34" charset="-122"/>
-                <a:cs typeface="Arial" pitchFamily="34" charset="-120"/>
-              </a:rPr>
-              <a:t>とにかくスタッフに電話したら、とても親切に対応してくれて、対応してくれたのはありがたかったのですが、エアコンの音は...</a:t>
-            </a:r>
-            <a:endParaRPr lang="en-US" sz="900" dirty="0"/>
-          </a:p>
-        </p:txBody>
-      </p:sp>
-      <p:sp>
-        <p:nvSpPr>
-          <p:cNvPr id="25" name="Text 23"/>
-          <p:cNvSpPr/>
-          <p:nvPr/>
-        </p:nvSpPr>
-        <p:spPr>
-          <a:xfrm>
-            <a:off x="6263640" y="1828800"/>
-            <a:ext cx="2377440" cy="640080"/>
-          </a:xfrm>
-          <a:prstGeom prst="rect">
-            <a:avLst/>
-          </a:prstGeom>
-          <a:noFill/>
-          <a:ln/>
-        </p:spPr>
-        <p:txBody>
-          <a:bodyPr wrap="square" lIns="0" tIns="0" rIns="0" bIns="0" rtlCol="0" anchor="ctr"/>
-          <a:lstStyle/>
-          <a:p>
-            <a:pPr indent="0" marL="0">
-              <a:buNone/>
-            </a:pPr>
-            <a:r>
-              <a:rPr lang="en-US" sz="900" i="1" dirty="0">
-                <a:solidFill>
-                  <a:srgbClr val="3B7DD8"/>
-                </a:solidFill>
-                <a:latin typeface="Arial" pitchFamily="34" charset="0"/>
-                <a:ea typeface="Arial" pitchFamily="34" charset="-122"/>
-                <a:cs typeface="Arial" pitchFamily="34" charset="-120"/>
-              </a:rPr>
-              <a:t>「チェックイン後、アメニティを選んでいたらスタッフの方が子供用の可愛いアメニティを持ってきてくださり、その他にも塗り...」</a:t>
-            </a:r>
-            <a:endParaRPr lang="en-US" sz="900" dirty="0"/>
-          </a:p>
-        </p:txBody>
-      </p:sp>
-      <p:sp>
-        <p:nvSpPr>
-          <p:cNvPr id="26" name="Shape 24"/>
-          <p:cNvSpPr/>
-          <p:nvPr/>
-        </p:nvSpPr>
-        <p:spPr>
-          <a:xfrm>
-            <a:off x="457200" y="2880360"/>
-            <a:ext cx="2651760" cy="1600200"/>
-          </a:xfrm>
-          <a:prstGeom prst="rect">
-            <a:avLst/>
-          </a:prstGeom>
-          <a:solidFill>
-            <a:srgbClr val="FFFFFF"/>
-          </a:solidFill>
-          <a:ln/>
-          <a:effectLst>
-            <a:outerShdw sx="100000" sy="100000" kx="0" ky="0" algn="bl" rotWithShape="0" blurRad="50800" dist="25400" dir="8100000">
-              <a:srgbClr val="000000">
-                <a:alpha val="10000"/>
-              </a:srgbClr>
-            </a:outerShdw>
-          </a:effectLst>
-        </p:spPr>
-      </p:sp>
-      <p:sp>
-        <p:nvSpPr>
-          <p:cNvPr id="27" name="Shape 25"/>
-          <p:cNvSpPr/>
-          <p:nvPr/>
-        </p:nvSpPr>
-        <p:spPr>
-          <a:xfrm>
-            <a:off x="457200" y="2880360"/>
-            <a:ext cx="54864" cy="1600200"/>
-          </a:xfrm>
-          <a:prstGeom prst="rect">
-            <a:avLst/>
-          </a:prstGeom>
-          <a:solidFill>
-            <a:srgbClr val="16A34A"/>
-          </a:solidFill>
-          <a:ln/>
-        </p:spPr>
-      </p:sp>
-      <p:sp>
-        <p:nvSpPr>
-          <p:cNvPr id="28" name="Shape 26"/>
-          <p:cNvSpPr/>
-          <p:nvPr/>
-        </p:nvSpPr>
-        <p:spPr>
-          <a:xfrm>
-            <a:off x="2286000" y="2953512"/>
-            <a:ext cx="658368" cy="228600"/>
-          </a:xfrm>
-          <a:prstGeom prst="rect">
-            <a:avLst/>
-          </a:prstGeom>
-          <a:solidFill>
-            <a:srgbClr val="DCFCE7"/>
-          </a:solidFill>
-          <a:ln/>
-        </p:spPr>
-      </p:sp>
-      <p:sp>
-        <p:nvSpPr>
-          <p:cNvPr id="29" name="Text 27"/>
-          <p:cNvSpPr/>
-          <p:nvPr/>
-        </p:nvSpPr>
-        <p:spPr>
-          <a:xfrm>
-            <a:off x="2286000" y="2953512"/>
-            <a:ext cx="658368" cy="228600"/>
-          </a:xfrm>
-          <a:prstGeom prst="rect">
-            <a:avLst/>
-          </a:prstGeom>
-          <a:noFill/>
-          <a:ln/>
-        </p:spPr>
-        <p:txBody>
-          <a:bodyPr wrap="square" lIns="0" tIns="0" rIns="0" bIns="0" rtlCol="0" anchor="ctr"/>
-          <a:lstStyle/>
-          <a:p>
-            <a:pPr algn="ctr" indent="0" marL="0">
-              <a:buNone/>
-            </a:pPr>
-            <a:r>
-              <a:rPr lang="en-US" sz="900" b="1" dirty="0">
-                <a:solidFill>
-                  <a:srgbClr val="16A34A"/>
-                </a:solidFill>
-                <a:latin typeface="Arial" pitchFamily="34" charset="0"/>
-                <a:ea typeface="Arial" pitchFamily="34" charset="-122"/>
-                <a:cs typeface="Arial" pitchFamily="34" charset="-120"/>
-              </a:rPr>
-              <a:t>20件+</a:t>
+              <a:t>10件+</a:t>
             </a:r>
             <a:endParaRPr lang="en-US" sz="900" dirty="0"/>
           </a:p>
@@ -11655,7 +11638,7 @@
                 <a:ea typeface="Arial" pitchFamily="34" charset="-122"/>
                 <a:cs typeface="Arial" pitchFamily="34" charset="-120"/>
               </a:rPr>
-              <a:t>20件+</a:t>
+              <a:t>10件+</a:t>
             </a:r>
             <a:endParaRPr lang="en-US" sz="900" dirty="0"/>
           </a:p>
@@ -11878,7 +11861,7 @@
                 <a:ea typeface="Arial" pitchFamily="34" charset="-122"/>
                 <a:cs typeface="Arial" pitchFamily="34" charset="-120"/>
               </a:rPr>
-              <a:t>20件+</a:t>
+              <a:t>10件+</a:t>
             </a:r>
             <a:endParaRPr lang="en-US" sz="900" dirty="0"/>
           </a:p>
@@ -11917,7 +11900,7 @@
                 <a:ea typeface="Arial" pitchFamily="34" charset="-122"/>
                 <a:cs typeface="Arial" pitchFamily="34" charset="-120"/>
               </a:rPr>
-              <a:t>コンビニ・周辺施設</a:t>
+              <a:t>コストパフォーマンス</a:t>
             </a:r>
             <a:endParaRPr lang="en-US" sz="1300" dirty="0"/>
           </a:p>
@@ -11956,7 +11939,7 @@
                 <a:ea typeface="Arial" pitchFamily="34" charset="-122"/>
                 <a:cs typeface="Arial" pitchFamily="34" charset="-120"/>
               </a:rPr>
-              <a:t>途中にローソンがあり、池袋から1駅、新宿から3駅と非常に便利な立地です</a:t>
+              <a:t>部屋は小さいですが、基本的なアメニティはすべて揃っているので、コストパフォーマンスに優れています</a:t>
             </a:r>
             <a:endParaRPr lang="en-US" sz="900" dirty="0"/>
           </a:p>
@@ -11995,7 +11978,7 @@
                 <a:ea typeface="Arial" pitchFamily="34" charset="-122"/>
                 <a:cs typeface="Arial" pitchFamily="34" charset="-120"/>
               </a:rPr>
-              <a:t>「近隣には松本清、ココナ、赤いローソンコンビニエンスストアがあります」</a:t>
+              <a:t>「素敵でお手頃価格 素敵でお手頃価格」</a:t>
             </a:r>
             <a:endParaRPr lang="en-US" sz="900" dirty="0"/>
           </a:p>
@@ -12753,7 +12736,7 @@
                           <a:ea typeface="Arial" pitchFamily="34" charset="-122"/>
                           <a:cs typeface="Arial" pitchFamily="34" charset="-120"/>
                         </a:rPr>
-                        <a:t>22件</a:t>
+                        <a:t>16件</a:t>
                       </a:r>
                       <a:endParaRPr lang="en-US" sz="900" dirty="0">
                         <a:latin typeface="Arial" charset="0"/>
@@ -13027,7 +13010,7 @@
                           <a:ea typeface="Arial" pitchFamily="34" charset="-122"/>
                           <a:cs typeface="Arial" pitchFamily="34" charset="-120"/>
                         </a:rPr>
-                        <a:t>19件</a:t>
+                        <a:t>9件</a:t>
                       </a:r>
                       <a:endParaRPr lang="en-US" sz="900" dirty="0">
                         <a:latin typeface="Arial" charset="0"/>
@@ -13165,7 +13148,7 @@
                           <a:ea typeface="Arial" pitchFamily="34" charset="-122"/>
                           <a:cs typeface="Arial" pitchFamily="34" charset="-120"/>
                         </a:rPr>
-                        <a:t>設備の老朽化</a:t>
+                        <a:t>防音性能</a:t>
                       </a:r>
                       <a:endParaRPr lang="en-US" sz="900" dirty="0">
                         <a:latin typeface="Arial" charset="0"/>
@@ -13233,7 +13216,7 @@
                           <a:ea typeface="Arial" pitchFamily="34" charset="-122"/>
                           <a:cs typeface="Arial" pitchFamily="34" charset="-120"/>
                         </a:rPr>
-                        <a:t>部屋はやや年季が入っていますが、きれいに掃除されておりました</a:t>
+                        <a:t>ああ、エアコンの音がうるさくてよく眠れません</a:t>
                       </a:r>
                       <a:endParaRPr lang="en-US" sz="900" dirty="0">
                         <a:latin typeface="Arial" charset="0"/>
@@ -13301,7 +13284,7 @@
                           <a:ea typeface="Arial" pitchFamily="34" charset="-122"/>
                           <a:cs typeface="Arial" pitchFamily="34" charset="-120"/>
                         </a:rPr>
-                        <a:t>10件</a:t>
+                        <a:t>4件</a:t>
                       </a:r>
                       <a:endParaRPr lang="en-US" sz="900" dirty="0">
                         <a:latin typeface="Arial" charset="0"/>
@@ -13575,7 +13558,7 @@
                           <a:ea typeface="Arial" pitchFamily="34" charset="-122"/>
                           <a:cs typeface="Arial" pitchFamily="34" charset="-120"/>
                         </a:rPr>
-                        <a:t>9件</a:t>
+                        <a:t>4件</a:t>
                       </a:r>
                       <a:endParaRPr lang="en-US" sz="900" dirty="0">
                         <a:latin typeface="Arial" charset="0"/>
@@ -13713,7 +13696,7 @@
                           <a:ea typeface="Arial" pitchFamily="34" charset="-122"/>
                           <a:cs typeface="Arial" pitchFamily="34" charset="-120"/>
                         </a:rPr>
-                        <a:t>防音性能</a:t>
+                        <a:t>部屋の狭さ</a:t>
                       </a:r>
                       <a:endParaRPr lang="en-US" sz="900" dirty="0">
                         <a:latin typeface="Arial" charset="0"/>
@@ -13781,7 +13764,7 @@
                           <a:ea typeface="Arial" pitchFamily="34" charset="-122"/>
                           <a:cs typeface="Arial" pitchFamily="34" charset="-120"/>
                         </a:rPr>
-                        <a:t>ああ、エアコンの音がうるさくてよく眠れません</a:t>
+                        <a:t>部屋は小さいですが、基本的なアメニティはすべて揃っているので、コストパフォーマンスに優れています</a:t>
                       </a:r>
                       <a:endParaRPr lang="en-US" sz="900" dirty="0">
                         <a:latin typeface="Arial" charset="0"/>
@@ -13849,7 +13832,7 @@
                           <a:ea typeface="Arial" pitchFamily="34" charset="-122"/>
                           <a:cs typeface="Arial" pitchFamily="34" charset="-120"/>
                         </a:rPr>
-                        <a:t>6件</a:t>
+                        <a:t>3件</a:t>
                       </a:r>
                       <a:endParaRPr lang="en-US" sz="900" dirty="0">
                         <a:latin typeface="Arial" charset="0"/>
@@ -13987,7 +13970,7 @@
                           <a:ea typeface="Arial" pitchFamily="34" charset="-122"/>
                           <a:cs typeface="Arial" pitchFamily="34" charset="-120"/>
                         </a:rPr>
-                        <a:t>部屋の狭さ</a:t>
+                        <a:t>窓・採光</a:t>
                       </a:r>
                       <a:endParaRPr lang="en-US" sz="900" dirty="0">
                         <a:latin typeface="Arial" charset="0"/>
@@ -14055,7 +14038,7 @@
                           <a:ea typeface="Arial" pitchFamily="34" charset="-122"/>
                           <a:cs typeface="Arial" pitchFamily="34" charset="-120"/>
                         </a:rPr>
-                        <a:t>部屋は小さいですが、基本的なアメニティはすべて揃っているので、コストパフォーマンスに優れています</a:t>
+                        <a:t>窓がない部屋だったので寝泊まりだけでは充分ですがホテル滞在メインだと部屋有りのとこがいいかもです</a:t>
                       </a:r>
                       <a:endParaRPr lang="en-US" sz="900" dirty="0">
                         <a:latin typeface="Arial" charset="0"/>
@@ -14123,7 +14106,7 @@
                           <a:ea typeface="Arial" pitchFamily="34" charset="-122"/>
                           <a:cs typeface="Arial" pitchFamily="34" charset="-120"/>
                         </a:rPr>
-                        <a:t>5件</a:t>
+                        <a:t>3件</a:t>
                       </a:r>
                       <a:endParaRPr lang="en-US" sz="900" dirty="0">
                         <a:latin typeface="Arial" charset="0"/>
@@ -14261,7 +14244,7 @@
                           <a:ea typeface="Arial" pitchFamily="34" charset="-122"/>
                           <a:cs typeface="Arial" pitchFamily="34" charset="-120"/>
                         </a:rPr>
-                        <a:t>窓・採光</a:t>
+                        <a:t>設備の老朽化</a:t>
                       </a:r>
                       <a:endParaRPr lang="en-US" sz="900" dirty="0">
                         <a:latin typeface="Arial" charset="0"/>
@@ -14329,7 +14312,7 @@
                           <a:ea typeface="Arial" pitchFamily="34" charset="-122"/>
                           <a:cs typeface="Arial" pitchFamily="34" charset="-120"/>
                         </a:rPr>
-                        <a:t>窓がない部屋だったので寝泊まりだけでは充分ですがホテル滞在メインだと部屋有りのとこがいいかもです</a:t>
+                        <a:t>部屋はやや年季が入っていますが、きれいに掃除されておりました</a:t>
                       </a:r>
                       <a:endParaRPr lang="en-US" sz="900" dirty="0">
                         <a:latin typeface="Arial" charset="0"/>
@@ -14397,7 +14380,7 @@
                           <a:ea typeface="Arial" pitchFamily="34" charset="-122"/>
                           <a:cs typeface="Arial" pitchFamily="34" charset="-120"/>
                         </a:rPr>
-                        <a:t>4件</a:t>
+                        <a:t>2件</a:t>
                       </a:r>
                       <a:endParaRPr lang="en-US" sz="900" dirty="0">
                         <a:latin typeface="Arial" charset="0"/>
@@ -14535,7 +14518,7 @@
                           <a:ea typeface="Arial" pitchFamily="34" charset="-122"/>
                           <a:cs typeface="Arial" pitchFamily="34" charset="-120"/>
                         </a:rPr>
-                        <a:t>清掃不備</a:t>
+                        <a:t>朝食の改善要望</a:t>
                       </a:r>
                       <a:endParaRPr lang="en-US" sz="900" dirty="0">
                         <a:latin typeface="Arial" charset="0"/>
@@ -14603,7 +14586,7 @@
                           <a:ea typeface="Arial" pitchFamily="34" charset="-122"/>
                           <a:cs typeface="Arial" pitchFamily="34" charset="-120"/>
                         </a:rPr>
-                        <a:t>汚いです 汚いです</a:t>
+                        <a:t>宿泊者サービスがどこもウェルカムドリンクでチェックイン時には終わっていることがほどんどでしたが、こちらは朝食時にホ...</a:t>
                       </a:r>
                       <a:endParaRPr lang="en-US" sz="900" dirty="0">
                         <a:latin typeface="Arial" charset="0"/>
@@ -14671,7 +14654,7 @@
                           <a:ea typeface="Arial" pitchFamily="34" charset="-122"/>
                           <a:cs typeface="Arial" pitchFamily="34" charset="-120"/>
                         </a:rPr>
-                        <a:t>4件</a:t>
+                        <a:t>2件</a:t>
                       </a:r>
                       <a:endParaRPr lang="en-US" sz="900" dirty="0">
                         <a:latin typeface="Arial" charset="0"/>
@@ -14809,7 +14792,7 @@
                           <a:ea typeface="Arial" pitchFamily="34" charset="-122"/>
                           <a:cs typeface="Arial" pitchFamily="34" charset="-120"/>
                         </a:rPr>
-                        <a:t>臭い・匂い</a:t>
+                        <a:t>清掃不備</a:t>
                       </a:r>
                       <a:endParaRPr lang="en-US" sz="900" dirty="0">
                         <a:latin typeface="Arial" charset="0"/>
@@ -14877,7 +14860,7 @@
                           <a:ea typeface="Arial" pitchFamily="34" charset="-122"/>
                           <a:cs typeface="Arial" pitchFamily="34" charset="-120"/>
                         </a:rPr>
-                        <a:t>お部屋もタバコの匂いは気にならなかったので良かったです</a:t>
+                        <a:t>汚いです 汚いです</a:t>
                       </a:r>
                       <a:endParaRPr lang="en-US" sz="900" dirty="0">
                         <a:latin typeface="Arial" charset="0"/>
@@ -14945,7 +14928,7 @@
                           <a:ea typeface="Arial" pitchFamily="34" charset="-122"/>
                           <a:cs typeface="Arial" pitchFamily="34" charset="-120"/>
                         </a:rPr>
-                        <a:t>3件</a:t>
+                        <a:t>2件</a:t>
                       </a:r>
                       <a:endParaRPr lang="en-US" sz="900" dirty="0">
                         <a:latin typeface="Arial" charset="0"/>

--- a/納品レポート/ホテル別レポート/richmond_mejiro_口コミ分析レポート.pptx
+++ b/納品レポート/ホテル別レポート/richmond_mejiro_口コミ分析レポート.pptx
@@ -2719,7 +2719,7 @@
                 <a:ea typeface="Arial" pitchFamily="34" charset="-122"/>
                 <a:cs typeface="Arial" pitchFamily="34" charset="-120"/>
               </a:rPr>
-              <a:t>リッチモンドホテル東京目白</a:t>
+              <a:t>リッチモンドホテル目白</a:t>
             </a:r>
             <a:endParaRPr lang="en-US" sz="1600" dirty="0"/>
           </a:p>
@@ -2801,7 +2801,7 @@
                 <a:ea typeface="Arial" pitchFamily="34" charset="-122"/>
                 <a:cs typeface="Arial" pitchFamily="34" charset="-120"/>
               </a:rPr>
-              <a:t>作成日：2026年4月20日</a:t>
+              <a:t>作成日：2026年4月21日</a:t>
             </a:r>
             <a:endParaRPr lang="en-US" sz="1000" dirty="0"/>
           </a:p>

--- a/納品レポート/ホテル別レポート/richmond_mejiro_口コミ分析レポート.pptx
+++ b/納品レポート/ホテル別レポート/richmond_mejiro_口コミ分析レポート.pptx
@@ -2719,7 +2719,7 @@
                 <a:ea typeface="Arial" pitchFamily="34" charset="-122"/>
                 <a:cs typeface="Arial" pitchFamily="34" charset="-120"/>
               </a:rPr>
-              <a:t>リッチモンドホテル目白</a:t>
+              <a:t>リッチモンドホテル東京目白</a:t>
             </a:r>
             <a:endParaRPr lang="en-US" sz="1600" dirty="0"/>
           </a:p>
@@ -2801,7 +2801,7 @@
                 <a:ea typeface="Arial" pitchFamily="34" charset="-122"/>
                 <a:cs typeface="Arial" pitchFamily="34" charset="-120"/>
               </a:rPr>
-              <a:t>作成日：2026年4月21日</a:t>
+              <a:t>作成日：2026年4月22日</a:t>
             </a:r>
             <a:endParaRPr lang="en-US" sz="1000" dirty="0"/>
           </a:p>
